--- a/SE202526/Management/Scrum Board.pptx
+++ b/SE202526/Management/Scrum Board.pptx
@@ -5,7 +5,7 @@
     <p:sldMasterId id="2147483659" r:id="rId1"/>
   </p:sldMasterIdLst>
   <p:notesMasterIdLst>
-    <p:notesMasterId r:id="rId8"/>
+    <p:notesMasterId r:id="rId11"/>
   </p:notesMasterIdLst>
   <p:sldIdLst>
     <p:sldId id="256" r:id="rId2"/>
@@ -14,6 +14,9 @@
     <p:sldId id="259" r:id="rId5"/>
     <p:sldId id="262" r:id="rId6"/>
     <p:sldId id="263" r:id="rId7"/>
+    <p:sldId id="265" r:id="rId8"/>
+    <p:sldId id="266" r:id="rId9"/>
+    <p:sldId id="264" r:id="rId10"/>
   </p:sldIdLst>
   <p:sldSz cx="21599525" cy="10799763"/>
   <p:notesSz cx="6858000" cy="9144000"/>
@@ -1255,7 +1258,7 @@
         </p:nvSpPr>
         <p:spPr>
           <a:xfrm>
-            <a:off x="278" y="685800"/>
+            <a:off x="0" y="685800"/>
             <a:ext cx="6858000" cy="3429000"/>
           </a:xfrm>
           <a:custGeom>
@@ -1323,6 +1326,387 @@
         </p:txBody>
       </p:sp>
     </p:spTree>
+  </p:cSld>
+  <p:clrMapOvr>
+    <a:masterClrMapping/>
+  </p:clrMapOvr>
+</p:notes>
+</file>
+
+<file path=ppt/notesSlides/notesSlide7.xml><?xml version="1.0" encoding="utf-8"?>
+<p:notes xmlns:a="http://schemas.openxmlformats.org/drawingml/2006/main" xmlns:r="http://schemas.openxmlformats.org/officeDocument/2006/relationships" xmlns:p="http://schemas.openxmlformats.org/presentationml/2006/main" showMasterSp="0" showMasterPhAnim="0">
+  <p:cSld>
+    <p:spTree>
+      <p:nvGrpSpPr>
+        <p:cNvPr id="1" name="Shape 217">
+          <a:extLst>
+            <a:ext uri="{FF2B5EF4-FFF2-40B4-BE49-F238E27FC236}">
+              <a16:creationId xmlns:a16="http://schemas.microsoft.com/office/drawing/2014/main" id="{0CA00273-3F04-9391-52AD-605DFE468738}"/>
+            </a:ext>
+          </a:extLst>
+        </p:cNvPr>
+        <p:cNvGrpSpPr/>
+        <p:nvPr/>
+      </p:nvGrpSpPr>
+      <p:grpSpPr>
+        <a:xfrm>
+          <a:off x="0" y="0"/>
+          <a:ext cx="0" cy="0"/>
+          <a:chOff x="0" y="0"/>
+          <a:chExt cx="0" cy="0"/>
+        </a:xfrm>
+      </p:grpSpPr>
+      <p:sp>
+        <p:nvSpPr>
+          <p:cNvPr id="218" name="Google Shape;218;g3850b307b58_0_258:notes">
+            <a:extLst>
+              <a:ext uri="{FF2B5EF4-FFF2-40B4-BE49-F238E27FC236}">
+                <a16:creationId xmlns:a16="http://schemas.microsoft.com/office/drawing/2014/main" id="{16BA3F99-B5B1-AC60-32DE-B6F8360DA4B3}"/>
+              </a:ext>
+            </a:extLst>
+          </p:cNvPr>
+          <p:cNvSpPr>
+            <a:spLocks noGrp="1" noRot="1" noChangeAspect="1"/>
+          </p:cNvSpPr>
+          <p:nvPr>
+            <p:ph type="sldImg" idx="2"/>
+          </p:nvPr>
+        </p:nvSpPr>
+        <p:spPr>
+          <a:xfrm>
+            <a:off x="0" y="685800"/>
+            <a:ext cx="6858000" cy="3429000"/>
+          </a:xfrm>
+          <a:custGeom>
+            <a:avLst/>
+            <a:gdLst/>
+            <a:ahLst/>
+            <a:cxnLst/>
+            <a:rect l="l" t="t" r="r" b="b"/>
+            <a:pathLst>
+              <a:path w="120000" h="120000" extrusionOk="0">
+                <a:moveTo>
+                  <a:pt x="0" y="0"/>
+                </a:moveTo>
+                <a:lnTo>
+                  <a:pt x="120000" y="0"/>
+                </a:lnTo>
+                <a:lnTo>
+                  <a:pt x="120000" y="120000"/>
+                </a:lnTo>
+                <a:lnTo>
+                  <a:pt x="0" y="120000"/>
+                </a:lnTo>
+                <a:close/>
+              </a:path>
+            </a:pathLst>
+          </a:custGeom>
+        </p:spPr>
+      </p:sp>
+      <p:sp>
+        <p:nvSpPr>
+          <p:cNvPr id="219" name="Google Shape;219;g3850b307b58_0_258:notes">
+            <a:extLst>
+              <a:ext uri="{FF2B5EF4-FFF2-40B4-BE49-F238E27FC236}">
+                <a16:creationId xmlns:a16="http://schemas.microsoft.com/office/drawing/2014/main" id="{1AD6EF15-17A7-6EFF-F02D-248CCDD420D5}"/>
+              </a:ext>
+            </a:extLst>
+          </p:cNvPr>
+          <p:cNvSpPr txBox="1">
+            <a:spLocks noGrp="1"/>
+          </p:cNvSpPr>
+          <p:nvPr>
+            <p:ph type="body" idx="1"/>
+          </p:nvPr>
+        </p:nvSpPr>
+        <p:spPr>
+          <a:xfrm>
+            <a:off x="685800" y="4343400"/>
+            <a:ext cx="5486400" cy="4114800"/>
+          </a:xfrm>
+          <a:prstGeom prst="rect">
+            <a:avLst/>
+          </a:prstGeom>
+        </p:spPr>
+        <p:txBody>
+          <a:bodyPr spcFirstLastPara="1" wrap="square" lIns="91425" tIns="91425" rIns="91425" bIns="91425" anchor="t" anchorCtr="0">
+            <a:noAutofit/>
+          </a:bodyPr>
+          <a:lstStyle/>
+          <a:p>
+            <a:pPr marL="0" lvl="0" indent="0" algn="l" rtl="0">
+              <a:spcBef>
+                <a:spcPts val="0"/>
+              </a:spcBef>
+              <a:spcAft>
+                <a:spcPts val="0"/>
+              </a:spcAft>
+              <a:buNone/>
+            </a:pPr>
+            <a:endParaRPr/>
+          </a:p>
+        </p:txBody>
+      </p:sp>
+    </p:spTree>
+    <p:extLst>
+      <p:ext uri="{BB962C8B-B14F-4D97-AF65-F5344CB8AC3E}">
+        <p14:creationId xmlns:p14="http://schemas.microsoft.com/office/powerpoint/2010/main" val="4014168180"/>
+      </p:ext>
+    </p:extLst>
+  </p:cSld>
+  <p:clrMapOvr>
+    <a:masterClrMapping/>
+  </p:clrMapOvr>
+</p:notes>
+</file>
+
+<file path=ppt/notesSlides/notesSlide8.xml><?xml version="1.0" encoding="utf-8"?>
+<p:notes xmlns:a="http://schemas.openxmlformats.org/drawingml/2006/main" xmlns:r="http://schemas.openxmlformats.org/officeDocument/2006/relationships" xmlns:p="http://schemas.openxmlformats.org/presentationml/2006/main" showMasterSp="0" showMasterPhAnim="0">
+  <p:cSld>
+    <p:spTree>
+      <p:nvGrpSpPr>
+        <p:cNvPr id="1" name="Shape 217">
+          <a:extLst>
+            <a:ext uri="{FF2B5EF4-FFF2-40B4-BE49-F238E27FC236}">
+              <a16:creationId xmlns:a16="http://schemas.microsoft.com/office/drawing/2014/main" id="{9EFE352A-EC05-5D6C-0A05-4D8065883D80}"/>
+            </a:ext>
+          </a:extLst>
+        </p:cNvPr>
+        <p:cNvGrpSpPr/>
+        <p:nvPr/>
+      </p:nvGrpSpPr>
+      <p:grpSpPr>
+        <a:xfrm>
+          <a:off x="0" y="0"/>
+          <a:ext cx="0" cy="0"/>
+          <a:chOff x="0" y="0"/>
+          <a:chExt cx="0" cy="0"/>
+        </a:xfrm>
+      </p:grpSpPr>
+      <p:sp>
+        <p:nvSpPr>
+          <p:cNvPr id="218" name="Google Shape;218;g3850b307b58_0_258:notes">
+            <a:extLst>
+              <a:ext uri="{FF2B5EF4-FFF2-40B4-BE49-F238E27FC236}">
+                <a16:creationId xmlns:a16="http://schemas.microsoft.com/office/drawing/2014/main" id="{A289F313-2720-CC74-093A-2D2E04E83925}"/>
+              </a:ext>
+            </a:extLst>
+          </p:cNvPr>
+          <p:cNvSpPr>
+            <a:spLocks noGrp="1" noRot="1" noChangeAspect="1"/>
+          </p:cNvSpPr>
+          <p:nvPr>
+            <p:ph type="sldImg" idx="2"/>
+          </p:nvPr>
+        </p:nvSpPr>
+        <p:spPr>
+          <a:xfrm>
+            <a:off x="0" y="685800"/>
+            <a:ext cx="6858000" cy="3429000"/>
+          </a:xfrm>
+          <a:custGeom>
+            <a:avLst/>
+            <a:gdLst/>
+            <a:ahLst/>
+            <a:cxnLst/>
+            <a:rect l="l" t="t" r="r" b="b"/>
+            <a:pathLst>
+              <a:path w="120000" h="120000" extrusionOk="0">
+                <a:moveTo>
+                  <a:pt x="0" y="0"/>
+                </a:moveTo>
+                <a:lnTo>
+                  <a:pt x="120000" y="0"/>
+                </a:lnTo>
+                <a:lnTo>
+                  <a:pt x="120000" y="120000"/>
+                </a:lnTo>
+                <a:lnTo>
+                  <a:pt x="0" y="120000"/>
+                </a:lnTo>
+                <a:close/>
+              </a:path>
+            </a:pathLst>
+          </a:custGeom>
+        </p:spPr>
+      </p:sp>
+      <p:sp>
+        <p:nvSpPr>
+          <p:cNvPr id="219" name="Google Shape;219;g3850b307b58_0_258:notes">
+            <a:extLst>
+              <a:ext uri="{FF2B5EF4-FFF2-40B4-BE49-F238E27FC236}">
+                <a16:creationId xmlns:a16="http://schemas.microsoft.com/office/drawing/2014/main" id="{E043782D-2724-7FD4-8D1A-F5F3211F9ACE}"/>
+              </a:ext>
+            </a:extLst>
+          </p:cNvPr>
+          <p:cNvSpPr txBox="1">
+            <a:spLocks noGrp="1"/>
+          </p:cNvSpPr>
+          <p:nvPr>
+            <p:ph type="body" idx="1"/>
+          </p:nvPr>
+        </p:nvSpPr>
+        <p:spPr>
+          <a:xfrm>
+            <a:off x="685800" y="4343400"/>
+            <a:ext cx="5486400" cy="4114800"/>
+          </a:xfrm>
+          <a:prstGeom prst="rect">
+            <a:avLst/>
+          </a:prstGeom>
+        </p:spPr>
+        <p:txBody>
+          <a:bodyPr spcFirstLastPara="1" wrap="square" lIns="91425" tIns="91425" rIns="91425" bIns="91425" anchor="t" anchorCtr="0">
+            <a:noAutofit/>
+          </a:bodyPr>
+          <a:lstStyle/>
+          <a:p>
+            <a:pPr marL="0" lvl="0" indent="0" algn="l" rtl="0">
+              <a:spcBef>
+                <a:spcPts val="0"/>
+              </a:spcBef>
+              <a:spcAft>
+                <a:spcPts val="0"/>
+              </a:spcAft>
+              <a:buNone/>
+            </a:pPr>
+            <a:endParaRPr/>
+          </a:p>
+        </p:txBody>
+      </p:sp>
+    </p:spTree>
+    <p:extLst>
+      <p:ext uri="{BB962C8B-B14F-4D97-AF65-F5344CB8AC3E}">
+        <p14:creationId xmlns:p14="http://schemas.microsoft.com/office/powerpoint/2010/main" val="3592031744"/>
+      </p:ext>
+    </p:extLst>
+  </p:cSld>
+  <p:clrMapOvr>
+    <a:masterClrMapping/>
+  </p:clrMapOvr>
+</p:notes>
+</file>
+
+<file path=ppt/notesSlides/notesSlide9.xml><?xml version="1.0" encoding="utf-8"?>
+<p:notes xmlns:a="http://schemas.openxmlformats.org/drawingml/2006/main" xmlns:r="http://schemas.openxmlformats.org/officeDocument/2006/relationships" xmlns:p="http://schemas.openxmlformats.org/presentationml/2006/main" showMasterSp="0" showMasterPhAnim="0">
+  <p:cSld>
+    <p:spTree>
+      <p:nvGrpSpPr>
+        <p:cNvPr id="1" name="Shape 186">
+          <a:extLst>
+            <a:ext uri="{FF2B5EF4-FFF2-40B4-BE49-F238E27FC236}">
+              <a16:creationId xmlns:a16="http://schemas.microsoft.com/office/drawing/2014/main" id="{477AF97E-BBB7-01EE-C84C-3520A11DD13F}"/>
+            </a:ext>
+          </a:extLst>
+        </p:cNvPr>
+        <p:cNvGrpSpPr/>
+        <p:nvPr/>
+      </p:nvGrpSpPr>
+      <p:grpSpPr>
+        <a:xfrm>
+          <a:off x="0" y="0"/>
+          <a:ext cx="0" cy="0"/>
+          <a:chOff x="0" y="0"/>
+          <a:chExt cx="0" cy="0"/>
+        </a:xfrm>
+      </p:grpSpPr>
+      <p:sp>
+        <p:nvSpPr>
+          <p:cNvPr id="187" name="Google Shape;187;g3850b307b58_0_218:notes">
+            <a:extLst>
+              <a:ext uri="{FF2B5EF4-FFF2-40B4-BE49-F238E27FC236}">
+                <a16:creationId xmlns:a16="http://schemas.microsoft.com/office/drawing/2014/main" id="{4C561D66-5AED-1555-6E34-487A460A375A}"/>
+              </a:ext>
+            </a:extLst>
+          </p:cNvPr>
+          <p:cNvSpPr>
+            <a:spLocks noGrp="1" noRot="1" noChangeAspect="1"/>
+          </p:cNvSpPr>
+          <p:nvPr>
+            <p:ph type="sldImg" idx="2"/>
+          </p:nvPr>
+        </p:nvSpPr>
+        <p:spPr>
+          <a:xfrm>
+            <a:off x="0" y="685800"/>
+            <a:ext cx="6858000" cy="3429000"/>
+          </a:xfrm>
+          <a:custGeom>
+            <a:avLst/>
+            <a:gdLst/>
+            <a:ahLst/>
+            <a:cxnLst/>
+            <a:rect l="l" t="t" r="r" b="b"/>
+            <a:pathLst>
+              <a:path w="120000" h="120000" extrusionOk="0">
+                <a:moveTo>
+                  <a:pt x="0" y="0"/>
+                </a:moveTo>
+                <a:lnTo>
+                  <a:pt x="120000" y="0"/>
+                </a:lnTo>
+                <a:lnTo>
+                  <a:pt x="120000" y="120000"/>
+                </a:lnTo>
+                <a:lnTo>
+                  <a:pt x="0" y="120000"/>
+                </a:lnTo>
+                <a:close/>
+              </a:path>
+            </a:pathLst>
+          </a:custGeom>
+        </p:spPr>
+      </p:sp>
+      <p:sp>
+        <p:nvSpPr>
+          <p:cNvPr id="188" name="Google Shape;188;g3850b307b58_0_218:notes">
+            <a:extLst>
+              <a:ext uri="{FF2B5EF4-FFF2-40B4-BE49-F238E27FC236}">
+                <a16:creationId xmlns:a16="http://schemas.microsoft.com/office/drawing/2014/main" id="{C1EFC72D-AE2D-A2E9-9BCD-42A34F495E19}"/>
+              </a:ext>
+            </a:extLst>
+          </p:cNvPr>
+          <p:cNvSpPr txBox="1">
+            <a:spLocks noGrp="1"/>
+          </p:cNvSpPr>
+          <p:nvPr>
+            <p:ph type="body" idx="1"/>
+          </p:nvPr>
+        </p:nvSpPr>
+        <p:spPr>
+          <a:xfrm>
+            <a:off x="685800" y="4343400"/>
+            <a:ext cx="5486400" cy="4114800"/>
+          </a:xfrm>
+          <a:prstGeom prst="rect">
+            <a:avLst/>
+          </a:prstGeom>
+        </p:spPr>
+        <p:txBody>
+          <a:bodyPr spcFirstLastPara="1" wrap="square" lIns="91425" tIns="91425" rIns="91425" bIns="91425" anchor="t" anchorCtr="0">
+            <a:noAutofit/>
+          </a:bodyPr>
+          <a:lstStyle/>
+          <a:p>
+            <a:pPr marL="0" lvl="0" indent="0" algn="l" rtl="0">
+              <a:spcBef>
+                <a:spcPts val="0"/>
+              </a:spcBef>
+              <a:spcAft>
+                <a:spcPts val="0"/>
+              </a:spcAft>
+              <a:buNone/>
+            </a:pPr>
+            <a:endParaRPr/>
+          </a:p>
+        </p:txBody>
+      </p:sp>
+    </p:spTree>
+    <p:extLst>
+      <p:ext uri="{BB962C8B-B14F-4D97-AF65-F5344CB8AC3E}">
+        <p14:creationId xmlns:p14="http://schemas.microsoft.com/office/powerpoint/2010/main" val="2843157151"/>
+      </p:ext>
+    </p:extLst>
   </p:cSld>
   <p:clrMapOvr>
     <a:masterClrMapping/>
@@ -1705,7 +2089,7 @@
             </a:pPr>
             <a:fld id="{00000000-1234-1234-1234-123412341234}" type="slidenum">
               <a:rPr lang="en-GB"/>
-              <a:t>‹nº›</a:t>
+              <a:t>‹#›</a:t>
             </a:fld>
             <a:endParaRPr/>
           </a:p>
@@ -2069,7 +2453,7 @@
             </a:pPr>
             <a:fld id="{00000000-1234-1234-1234-123412341234}" type="slidenum">
               <a:rPr lang="en-GB"/>
-              <a:t>‹nº›</a:t>
+              <a:t>‹#›</a:t>
             </a:fld>
             <a:endParaRPr/>
           </a:p>
@@ -2173,7 +2557,7 @@
             </a:pPr>
             <a:fld id="{00000000-1234-1234-1234-123412341234}" type="slidenum">
               <a:rPr lang="en-GB"/>
-              <a:t>‹nº›</a:t>
+              <a:t>‹#›</a:t>
             </a:fld>
             <a:endParaRPr/>
           </a:p>
@@ -2406,7 +2790,7 @@
             </a:pPr>
             <a:fld id="{00000000-1234-1234-1234-123412341234}" type="slidenum">
               <a:rPr lang="en-GB"/>
-              <a:t>‹nº›</a:t>
+              <a:t>‹#›</a:t>
             </a:fld>
             <a:endParaRPr/>
           </a:p>
@@ -2768,7 +3152,7 @@
             </a:pPr>
             <a:fld id="{00000000-1234-1234-1234-123412341234}" type="slidenum">
               <a:rPr lang="en-GB"/>
-              <a:t>‹nº›</a:t>
+              <a:t>‹#›</a:t>
             </a:fld>
             <a:endParaRPr/>
           </a:p>
@@ -3259,7 +3643,7 @@
             </a:pPr>
             <a:fld id="{00000000-1234-1234-1234-123412341234}" type="slidenum">
               <a:rPr lang="en-GB"/>
-              <a:t>‹nº›</a:t>
+              <a:t>‹#›</a:t>
             </a:fld>
             <a:endParaRPr/>
           </a:p>
@@ -3492,7 +3876,7 @@
             </a:pPr>
             <a:fld id="{00000000-1234-1234-1234-123412341234}" type="slidenum">
               <a:rPr lang="en-GB"/>
-              <a:t>‹nº›</a:t>
+              <a:t>‹#›</a:t>
             </a:fld>
             <a:endParaRPr/>
           </a:p>
@@ -3854,7 +4238,7 @@
             </a:pPr>
             <a:fld id="{00000000-1234-1234-1234-123412341234}" type="slidenum">
               <a:rPr lang="en-GB"/>
-              <a:t>‹nº›</a:t>
+              <a:t>‹#›</a:t>
             </a:fld>
             <a:endParaRPr/>
           </a:p>
@@ -4087,7 +4471,7 @@
             </a:pPr>
             <a:fld id="{00000000-1234-1234-1234-123412341234}" type="slidenum">
               <a:rPr lang="en-GB"/>
-              <a:t>‹nº›</a:t>
+              <a:t>‹#›</a:t>
             </a:fld>
             <a:endParaRPr/>
           </a:p>
@@ -4645,7 +5029,7 @@
             </a:pPr>
             <a:fld id="{00000000-1234-1234-1234-123412341234}" type="slidenum">
               <a:rPr lang="en-GB"/>
-              <a:t>‹nº›</a:t>
+              <a:t>‹#›</a:t>
             </a:fld>
             <a:endParaRPr/>
           </a:p>
@@ -4793,7 +5177,7 @@
             </a:pPr>
             <a:fld id="{00000000-1234-1234-1234-123412341234}" type="slidenum">
               <a:rPr lang="en-GB"/>
-              <a:t>‹nº›</a:t>
+              <a:t>‹#›</a:t>
             </a:fld>
             <a:endParaRPr/>
           </a:p>
@@ -5364,7 +5748,7 @@
             </a:pPr>
             <a:fld id="{00000000-1234-1234-1234-123412341234}" type="slidenum">
               <a:rPr lang="en-GB"/>
-              <a:t>‹nº›</a:t>
+              <a:t>‹#›</a:t>
             </a:fld>
             <a:endParaRPr/>
           </a:p>
@@ -12669,6 +13053,5000 @@
 </p:sld>
 </file>
 
+<file path=ppt/slides/slide7.xml><?xml version="1.0" encoding="utf-8"?>
+<p:sld xmlns:a="http://schemas.openxmlformats.org/drawingml/2006/main" xmlns:r="http://schemas.openxmlformats.org/officeDocument/2006/relationships" xmlns:p="http://schemas.openxmlformats.org/presentationml/2006/main">
+  <p:cSld>
+    <p:spTree>
+      <p:nvGrpSpPr>
+        <p:cNvPr id="1" name="Shape 220">
+          <a:extLst>
+            <a:ext uri="{FF2B5EF4-FFF2-40B4-BE49-F238E27FC236}">
+              <a16:creationId xmlns:a16="http://schemas.microsoft.com/office/drawing/2014/main" id="{CDC54219-356C-4739-AD0B-C000713F0F0B}"/>
+            </a:ext>
+          </a:extLst>
+        </p:cNvPr>
+        <p:cNvGrpSpPr/>
+        <p:nvPr/>
+      </p:nvGrpSpPr>
+      <p:grpSpPr>
+        <a:xfrm>
+          <a:off x="0" y="0"/>
+          <a:ext cx="0" cy="0"/>
+          <a:chOff x="0" y="0"/>
+          <a:chExt cx="0" cy="0"/>
+        </a:xfrm>
+      </p:grpSpPr>
+      <p:pic>
+        <p:nvPicPr>
+          <p:cNvPr id="221" name="Google Shape;221;p20" title="Vmw_I2.png">
+            <a:extLst>
+              <a:ext uri="{FF2B5EF4-FFF2-40B4-BE49-F238E27FC236}">
+                <a16:creationId xmlns:a16="http://schemas.microsoft.com/office/drawing/2014/main" id="{1A21C88A-FF69-7DBB-3D0E-D5DCEC49D2E4}"/>
+              </a:ext>
+            </a:extLst>
+          </p:cNvPr>
+          <p:cNvPicPr preferRelativeResize="0"/>
+          <p:nvPr/>
+        </p:nvPicPr>
+        <p:blipFill>
+          <a:blip r:embed="rId3">
+            <a:alphaModFix amt="51000"/>
+          </a:blip>
+          <a:stretch>
+            <a:fillRect/>
+          </a:stretch>
+        </p:blipFill>
+        <p:spPr>
+          <a:xfrm>
+            <a:off x="0" y="0"/>
+            <a:ext cx="21600000" cy="10800000"/>
+          </a:xfrm>
+          <a:prstGeom prst="rect">
+            <a:avLst/>
+          </a:prstGeom>
+          <a:noFill/>
+          <a:ln>
+            <a:noFill/>
+          </a:ln>
+        </p:spPr>
+      </p:pic>
+      <p:sp>
+        <p:nvSpPr>
+          <p:cNvPr id="222" name="Google Shape;222;p20">
+            <a:extLst>
+              <a:ext uri="{FF2B5EF4-FFF2-40B4-BE49-F238E27FC236}">
+                <a16:creationId xmlns:a16="http://schemas.microsoft.com/office/drawing/2014/main" id="{2E4A2B31-BD0B-5F75-A81C-63AF21BF28EC}"/>
+              </a:ext>
+            </a:extLst>
+          </p:cNvPr>
+          <p:cNvSpPr/>
+          <p:nvPr/>
+        </p:nvSpPr>
+        <p:spPr>
+          <a:xfrm>
+            <a:off x="814250" y="3300663"/>
+            <a:ext cx="19957567" cy="4198675"/>
+          </a:xfrm>
+          <a:prstGeom prst="rect">
+            <a:avLst/>
+          </a:prstGeom>
+        </p:spPr>
+        <p:txBody>
+          <a:bodyPr>
+            <a:prstTxWarp prst="textPlain">
+              <a:avLst/>
+            </a:prstTxWarp>
+          </a:bodyPr>
+          <a:lstStyle/>
+          <a:p>
+            <a:pPr lvl="0" algn="ctr"/>
+            <a:r>
+              <a:rPr b="1" i="0" dirty="0">
+                <a:ln w="114300" cap="flat" cmpd="sng">
+                  <a:solidFill>
+                    <a:srgbClr val="434343"/>
+                  </a:solidFill>
+                  <a:prstDash val="solid"/>
+                  <a:round/>
+                  <a:headEnd type="none" w="sm" len="sm"/>
+                  <a:tailEnd type="none" w="sm" len="sm"/>
+                </a:ln>
+                <a:solidFill>
+                  <a:schemeClr val="lt1"/>
+                </a:solidFill>
+                <a:latin typeface="Consolas"/>
+              </a:rPr>
+              <a:t>Sprint </a:t>
+            </a:r>
+            <a:r>
+              <a:rPr lang="pt-PT" b="1" i="0" dirty="0">
+                <a:ln w="114300" cap="flat" cmpd="sng">
+                  <a:solidFill>
+                    <a:srgbClr val="434343"/>
+                  </a:solidFill>
+                  <a:prstDash val="solid"/>
+                  <a:round/>
+                  <a:headEnd type="none" w="sm" len="sm"/>
+                  <a:tailEnd type="none" w="sm" len="sm"/>
+                </a:ln>
+                <a:solidFill>
+                  <a:schemeClr val="lt1"/>
+                </a:solidFill>
+                <a:latin typeface="Consolas"/>
+              </a:rPr>
+              <a:t>3</a:t>
+            </a:r>
+            <a:endParaRPr b="1" i="0" dirty="0">
+              <a:ln w="114300" cap="flat" cmpd="sng">
+                <a:solidFill>
+                  <a:srgbClr val="434343"/>
+                </a:solidFill>
+                <a:prstDash val="solid"/>
+                <a:round/>
+                <a:headEnd type="none" w="sm" len="sm"/>
+                <a:tailEnd type="none" w="sm" len="sm"/>
+              </a:ln>
+              <a:solidFill>
+                <a:schemeClr val="lt1"/>
+              </a:solidFill>
+              <a:latin typeface="Consolas"/>
+            </a:endParaRPr>
+          </a:p>
+        </p:txBody>
+      </p:sp>
+    </p:spTree>
+    <p:extLst>
+      <p:ext uri="{BB962C8B-B14F-4D97-AF65-F5344CB8AC3E}">
+        <p14:creationId xmlns:p14="http://schemas.microsoft.com/office/powerpoint/2010/main" val="769110798"/>
+      </p:ext>
+    </p:extLst>
+  </p:cSld>
+  <p:clrMapOvr>
+    <a:masterClrMapping/>
+  </p:clrMapOvr>
+</p:sld>
+</file>
+
+<file path=ppt/slides/slide8.xml><?xml version="1.0" encoding="utf-8"?>
+<p:sld xmlns:a="http://schemas.openxmlformats.org/drawingml/2006/main" xmlns:r="http://schemas.openxmlformats.org/officeDocument/2006/relationships" xmlns:p="http://schemas.openxmlformats.org/presentationml/2006/main">
+  <p:cSld>
+    <p:spTree>
+      <p:nvGrpSpPr>
+        <p:cNvPr id="1" name="Shape 220">
+          <a:extLst>
+            <a:ext uri="{FF2B5EF4-FFF2-40B4-BE49-F238E27FC236}">
+              <a16:creationId xmlns:a16="http://schemas.microsoft.com/office/drawing/2014/main" id="{CA77B1C2-A004-A9A1-830F-53B787D6BA59}"/>
+            </a:ext>
+          </a:extLst>
+        </p:cNvPr>
+        <p:cNvGrpSpPr/>
+        <p:nvPr/>
+      </p:nvGrpSpPr>
+      <p:grpSpPr>
+        <a:xfrm>
+          <a:off x="0" y="0"/>
+          <a:ext cx="0" cy="0"/>
+          <a:chOff x="0" y="0"/>
+          <a:chExt cx="0" cy="0"/>
+        </a:xfrm>
+      </p:grpSpPr>
+      <p:pic>
+        <p:nvPicPr>
+          <p:cNvPr id="221" name="Google Shape;221;p20" title="Vmw_I2.png">
+            <a:extLst>
+              <a:ext uri="{FF2B5EF4-FFF2-40B4-BE49-F238E27FC236}">
+                <a16:creationId xmlns:a16="http://schemas.microsoft.com/office/drawing/2014/main" id="{999E0134-6D34-E5F8-3E85-EC5D33B7B86B}"/>
+              </a:ext>
+            </a:extLst>
+          </p:cNvPr>
+          <p:cNvPicPr preferRelativeResize="0"/>
+          <p:nvPr/>
+        </p:nvPicPr>
+        <p:blipFill>
+          <a:blip r:embed="rId3">
+            <a:alphaModFix amt="51000"/>
+          </a:blip>
+          <a:stretch>
+            <a:fillRect/>
+          </a:stretch>
+        </p:blipFill>
+        <p:spPr>
+          <a:xfrm>
+            <a:off x="0" y="0"/>
+            <a:ext cx="21600000" cy="10800000"/>
+          </a:xfrm>
+          <a:prstGeom prst="rect">
+            <a:avLst/>
+          </a:prstGeom>
+          <a:noFill/>
+          <a:ln>
+            <a:noFill/>
+          </a:ln>
+        </p:spPr>
+      </p:pic>
+      <p:sp>
+        <p:nvSpPr>
+          <p:cNvPr id="222" name="Google Shape;222;p20">
+            <a:extLst>
+              <a:ext uri="{FF2B5EF4-FFF2-40B4-BE49-F238E27FC236}">
+                <a16:creationId xmlns:a16="http://schemas.microsoft.com/office/drawing/2014/main" id="{8AC8E86E-9EFD-6F3E-FE85-934F6BDC1DE3}"/>
+              </a:ext>
+            </a:extLst>
+          </p:cNvPr>
+          <p:cNvSpPr/>
+          <p:nvPr/>
+        </p:nvSpPr>
+        <p:spPr>
+          <a:xfrm>
+            <a:off x="814250" y="3300663"/>
+            <a:ext cx="19957567" cy="4198675"/>
+          </a:xfrm>
+          <a:prstGeom prst="rect">
+            <a:avLst/>
+          </a:prstGeom>
+        </p:spPr>
+        <p:txBody>
+          <a:bodyPr>
+            <a:prstTxWarp prst="textPlain">
+              <a:avLst/>
+            </a:prstTxWarp>
+          </a:bodyPr>
+          <a:lstStyle/>
+          <a:p>
+            <a:pPr lvl="0" algn="ctr"/>
+            <a:r>
+              <a:rPr b="1" i="0" dirty="0">
+                <a:ln w="114300" cap="flat" cmpd="sng">
+                  <a:solidFill>
+                    <a:srgbClr val="434343"/>
+                  </a:solidFill>
+                  <a:prstDash val="solid"/>
+                  <a:round/>
+                  <a:headEnd type="none" w="sm" len="sm"/>
+                  <a:tailEnd type="none" w="sm" len="sm"/>
+                </a:ln>
+                <a:solidFill>
+                  <a:schemeClr val="lt1"/>
+                </a:solidFill>
+                <a:latin typeface="Consolas"/>
+              </a:rPr>
+              <a:t>Sprint </a:t>
+            </a:r>
+            <a:r>
+              <a:rPr lang="pt-PT" b="1" i="0" dirty="0">
+                <a:ln w="114300" cap="flat" cmpd="sng">
+                  <a:solidFill>
+                    <a:srgbClr val="434343"/>
+                  </a:solidFill>
+                  <a:prstDash val="solid"/>
+                  <a:round/>
+                  <a:headEnd type="none" w="sm" len="sm"/>
+                  <a:tailEnd type="none" w="sm" len="sm"/>
+                </a:ln>
+                <a:solidFill>
+                  <a:schemeClr val="lt1"/>
+                </a:solidFill>
+                <a:latin typeface="Consolas"/>
+              </a:rPr>
+              <a:t>4</a:t>
+            </a:r>
+            <a:endParaRPr b="1" i="0" dirty="0">
+              <a:ln w="114300" cap="flat" cmpd="sng">
+                <a:solidFill>
+                  <a:srgbClr val="434343"/>
+                </a:solidFill>
+                <a:prstDash val="solid"/>
+                <a:round/>
+                <a:headEnd type="none" w="sm" len="sm"/>
+                <a:tailEnd type="none" w="sm" len="sm"/>
+              </a:ln>
+              <a:solidFill>
+                <a:schemeClr val="lt1"/>
+              </a:solidFill>
+              <a:latin typeface="Consolas"/>
+            </a:endParaRPr>
+          </a:p>
+        </p:txBody>
+      </p:sp>
+    </p:spTree>
+    <p:extLst>
+      <p:ext uri="{BB962C8B-B14F-4D97-AF65-F5344CB8AC3E}">
+        <p14:creationId xmlns:p14="http://schemas.microsoft.com/office/powerpoint/2010/main" val="2246039440"/>
+      </p:ext>
+    </p:extLst>
+  </p:cSld>
+  <p:clrMapOvr>
+    <a:masterClrMapping/>
+  </p:clrMapOvr>
+</p:sld>
+</file>
+
+<file path=ppt/slides/slide9.xml><?xml version="1.0" encoding="utf-8"?>
+<p:sld xmlns:a="http://schemas.openxmlformats.org/drawingml/2006/main" xmlns:r="http://schemas.openxmlformats.org/officeDocument/2006/relationships" xmlns:p="http://schemas.openxmlformats.org/presentationml/2006/main">
+  <p:cSld>
+    <p:spTree>
+      <p:nvGrpSpPr>
+        <p:cNvPr id="1" name="Shape 189">
+          <a:extLst>
+            <a:ext uri="{FF2B5EF4-FFF2-40B4-BE49-F238E27FC236}">
+              <a16:creationId xmlns:a16="http://schemas.microsoft.com/office/drawing/2014/main" id="{276A673A-3C8E-4167-E0F9-EE1C55E9E3B6}"/>
+            </a:ext>
+          </a:extLst>
+        </p:cNvPr>
+        <p:cNvGrpSpPr/>
+        <p:nvPr/>
+      </p:nvGrpSpPr>
+      <p:grpSpPr>
+        <a:xfrm>
+          <a:off x="0" y="0"/>
+          <a:ext cx="0" cy="0"/>
+          <a:chOff x="0" y="0"/>
+          <a:chExt cx="0" cy="0"/>
+        </a:xfrm>
+      </p:grpSpPr>
+      <p:cxnSp>
+        <p:nvCxnSpPr>
+          <p:cNvPr id="190" name="Google Shape;190;p19">
+            <a:extLst>
+              <a:ext uri="{FF2B5EF4-FFF2-40B4-BE49-F238E27FC236}">
+                <a16:creationId xmlns:a16="http://schemas.microsoft.com/office/drawing/2014/main" id="{94161A19-776B-997F-23A4-858A22AF3412}"/>
+              </a:ext>
+            </a:extLst>
+          </p:cNvPr>
+          <p:cNvCxnSpPr/>
+          <p:nvPr/>
+        </p:nvCxnSpPr>
+        <p:spPr>
+          <a:xfrm>
+            <a:off x="5944724" y="-31500"/>
+            <a:ext cx="0" cy="10857000"/>
+          </a:xfrm>
+          <a:prstGeom prst="straightConnector1">
+            <a:avLst/>
+          </a:prstGeom>
+          <a:noFill/>
+          <a:ln w="38100" cap="flat" cmpd="sng">
+            <a:solidFill>
+              <a:srgbClr val="5B0F00"/>
+            </a:solidFill>
+            <a:prstDash val="solid"/>
+            <a:round/>
+            <a:headEnd type="none" w="med" len="med"/>
+            <a:tailEnd type="none" w="med" len="med"/>
+          </a:ln>
+        </p:spPr>
+      </p:cxnSp>
+      <p:sp>
+        <p:nvSpPr>
+          <p:cNvPr id="191" name="Google Shape;191;p19">
+            <a:extLst>
+              <a:ext uri="{FF2B5EF4-FFF2-40B4-BE49-F238E27FC236}">
+                <a16:creationId xmlns:a16="http://schemas.microsoft.com/office/drawing/2014/main" id="{088171E6-E9BA-5177-88E8-2DE2A9993893}"/>
+              </a:ext>
+            </a:extLst>
+          </p:cNvPr>
+          <p:cNvSpPr/>
+          <p:nvPr/>
+        </p:nvSpPr>
+        <p:spPr>
+          <a:xfrm>
+            <a:off x="3197186" y="84312"/>
+            <a:ext cx="2410800" cy="480900"/>
+          </a:xfrm>
+          <a:prstGeom prst="roundRect">
+            <a:avLst>
+              <a:gd name="adj" fmla="val 16667"/>
+            </a:avLst>
+          </a:prstGeom>
+          <a:solidFill>
+            <a:srgbClr val="F9CB9C"/>
+          </a:solidFill>
+          <a:ln w="28575" cap="flat" cmpd="sng">
+            <a:solidFill>
+              <a:srgbClr val="B45F06"/>
+            </a:solidFill>
+            <a:prstDash val="solid"/>
+            <a:round/>
+            <a:headEnd type="none" w="sm" len="sm"/>
+            <a:tailEnd type="none" w="sm" len="sm"/>
+          </a:ln>
+        </p:spPr>
+        <p:txBody>
+          <a:bodyPr spcFirstLastPara="1" wrap="square" lIns="91425" tIns="91425" rIns="91425" bIns="91425" anchor="ctr" anchorCtr="0">
+            <a:noAutofit/>
+          </a:bodyPr>
+          <a:lstStyle/>
+          <a:p>
+            <a:pPr marL="0" lvl="0" indent="0" algn="ctr" rtl="0">
+              <a:spcBef>
+                <a:spcPts val="0"/>
+              </a:spcBef>
+              <a:spcAft>
+                <a:spcPts val="0"/>
+              </a:spcAft>
+              <a:buNone/>
+            </a:pPr>
+            <a:r>
+              <a:rPr lang="en-GB" sz="1800" b="1">
+                <a:latin typeface="Consolas"/>
+                <a:ea typeface="Consolas"/>
+                <a:cs typeface="Consolas"/>
+                <a:sym typeface="Consolas"/>
+              </a:rPr>
+              <a:t>Student ID</a:t>
+            </a:r>
+            <a:endParaRPr sz="1800" b="1">
+              <a:latin typeface="Consolas"/>
+              <a:ea typeface="Consolas"/>
+              <a:cs typeface="Consolas"/>
+              <a:sym typeface="Consolas"/>
+            </a:endParaRPr>
+          </a:p>
+        </p:txBody>
+      </p:sp>
+      <p:sp>
+        <p:nvSpPr>
+          <p:cNvPr id="192" name="Google Shape;192;p19">
+            <a:extLst>
+              <a:ext uri="{FF2B5EF4-FFF2-40B4-BE49-F238E27FC236}">
+                <a16:creationId xmlns:a16="http://schemas.microsoft.com/office/drawing/2014/main" id="{EAEA8A37-97A6-F2E8-E5FC-457FC1A81CD1}"/>
+              </a:ext>
+            </a:extLst>
+          </p:cNvPr>
+          <p:cNvSpPr/>
+          <p:nvPr/>
+        </p:nvSpPr>
+        <p:spPr>
+          <a:xfrm>
+            <a:off x="6281636" y="84312"/>
+            <a:ext cx="2410800" cy="480900"/>
+          </a:xfrm>
+          <a:prstGeom prst="roundRect">
+            <a:avLst>
+              <a:gd name="adj" fmla="val 16667"/>
+            </a:avLst>
+          </a:prstGeom>
+          <a:solidFill>
+            <a:srgbClr val="F9CB9C"/>
+          </a:solidFill>
+          <a:ln w="28575" cap="flat" cmpd="sng">
+            <a:solidFill>
+              <a:srgbClr val="B45F06"/>
+            </a:solidFill>
+            <a:prstDash val="solid"/>
+            <a:round/>
+            <a:headEnd type="none" w="sm" len="sm"/>
+            <a:tailEnd type="none" w="sm" len="sm"/>
+          </a:ln>
+        </p:spPr>
+        <p:txBody>
+          <a:bodyPr spcFirstLastPara="1" wrap="square" lIns="91425" tIns="91425" rIns="91425" bIns="91425" anchor="ctr" anchorCtr="0">
+            <a:noAutofit/>
+          </a:bodyPr>
+          <a:lstStyle/>
+          <a:p>
+            <a:pPr marL="0" lvl="0" indent="0" algn="ctr" rtl="0">
+              <a:spcBef>
+                <a:spcPts val="0"/>
+              </a:spcBef>
+              <a:spcAft>
+                <a:spcPts val="0"/>
+              </a:spcAft>
+              <a:buNone/>
+            </a:pPr>
+            <a:r>
+              <a:rPr lang="en-GB" sz="1800" b="1">
+                <a:latin typeface="Consolas"/>
+                <a:ea typeface="Consolas"/>
+                <a:cs typeface="Consolas"/>
+                <a:sym typeface="Consolas"/>
+              </a:rPr>
+              <a:t>Story</a:t>
+            </a:r>
+            <a:endParaRPr sz="1800" b="1">
+              <a:latin typeface="Consolas"/>
+              <a:ea typeface="Consolas"/>
+              <a:cs typeface="Consolas"/>
+              <a:sym typeface="Consolas"/>
+            </a:endParaRPr>
+          </a:p>
+        </p:txBody>
+      </p:sp>
+      <p:sp>
+        <p:nvSpPr>
+          <p:cNvPr id="193" name="Google Shape;193;p19">
+            <a:extLst>
+              <a:ext uri="{FF2B5EF4-FFF2-40B4-BE49-F238E27FC236}">
+                <a16:creationId xmlns:a16="http://schemas.microsoft.com/office/drawing/2014/main" id="{7F37EAE2-3330-926F-61AC-1D50780D3718}"/>
+              </a:ext>
+            </a:extLst>
+          </p:cNvPr>
+          <p:cNvSpPr/>
+          <p:nvPr/>
+        </p:nvSpPr>
+        <p:spPr>
+          <a:xfrm>
+            <a:off x="9366071" y="84312"/>
+            <a:ext cx="2410800" cy="480900"/>
+          </a:xfrm>
+          <a:prstGeom prst="roundRect">
+            <a:avLst>
+              <a:gd name="adj" fmla="val 16667"/>
+            </a:avLst>
+          </a:prstGeom>
+          <a:solidFill>
+            <a:srgbClr val="F9CB9C"/>
+          </a:solidFill>
+          <a:ln w="28575" cap="flat" cmpd="sng">
+            <a:solidFill>
+              <a:srgbClr val="B45F06"/>
+            </a:solidFill>
+            <a:prstDash val="solid"/>
+            <a:round/>
+            <a:headEnd type="none" w="sm" len="sm"/>
+            <a:tailEnd type="none" w="sm" len="sm"/>
+          </a:ln>
+        </p:spPr>
+        <p:txBody>
+          <a:bodyPr spcFirstLastPara="1" wrap="square" lIns="91425" tIns="91425" rIns="91425" bIns="91425" anchor="ctr" anchorCtr="0">
+            <a:noAutofit/>
+          </a:bodyPr>
+          <a:lstStyle/>
+          <a:p>
+            <a:pPr marL="0" lvl="0" indent="0" algn="ctr" rtl="0">
+              <a:spcBef>
+                <a:spcPts val="0"/>
+              </a:spcBef>
+              <a:spcAft>
+                <a:spcPts val="0"/>
+              </a:spcAft>
+              <a:buNone/>
+            </a:pPr>
+            <a:r>
+              <a:rPr lang="en-GB" sz="1800" b="1">
+                <a:latin typeface="Consolas"/>
+                <a:ea typeface="Consolas"/>
+                <a:cs typeface="Consolas"/>
+                <a:sym typeface="Consolas"/>
+              </a:rPr>
+              <a:t>To Do</a:t>
+            </a:r>
+            <a:endParaRPr sz="1800" b="1">
+              <a:latin typeface="Consolas"/>
+              <a:ea typeface="Consolas"/>
+              <a:cs typeface="Consolas"/>
+              <a:sym typeface="Consolas"/>
+            </a:endParaRPr>
+          </a:p>
+        </p:txBody>
+      </p:sp>
+      <p:sp>
+        <p:nvSpPr>
+          <p:cNvPr id="194" name="Google Shape;194;p19">
+            <a:extLst>
+              <a:ext uri="{FF2B5EF4-FFF2-40B4-BE49-F238E27FC236}">
+                <a16:creationId xmlns:a16="http://schemas.microsoft.com/office/drawing/2014/main" id="{A8ABCEC0-E864-8785-E9AE-A88694E60632}"/>
+              </a:ext>
+            </a:extLst>
+          </p:cNvPr>
+          <p:cNvSpPr/>
+          <p:nvPr/>
+        </p:nvSpPr>
+        <p:spPr>
+          <a:xfrm>
+            <a:off x="12395940" y="84312"/>
+            <a:ext cx="2410800" cy="480900"/>
+          </a:xfrm>
+          <a:prstGeom prst="roundRect">
+            <a:avLst>
+              <a:gd name="adj" fmla="val 16667"/>
+            </a:avLst>
+          </a:prstGeom>
+          <a:solidFill>
+            <a:srgbClr val="F9CB9C"/>
+          </a:solidFill>
+          <a:ln w="28575" cap="flat" cmpd="sng">
+            <a:solidFill>
+              <a:srgbClr val="B45F06"/>
+            </a:solidFill>
+            <a:prstDash val="solid"/>
+            <a:round/>
+            <a:headEnd type="none" w="sm" len="sm"/>
+            <a:tailEnd type="none" w="sm" len="sm"/>
+          </a:ln>
+        </p:spPr>
+        <p:txBody>
+          <a:bodyPr spcFirstLastPara="1" wrap="square" lIns="91425" tIns="91425" rIns="91425" bIns="91425" anchor="ctr" anchorCtr="0">
+            <a:noAutofit/>
+          </a:bodyPr>
+          <a:lstStyle/>
+          <a:p>
+            <a:pPr marL="0" lvl="0" indent="0" algn="ctr" rtl="0">
+              <a:spcBef>
+                <a:spcPts val="0"/>
+              </a:spcBef>
+              <a:spcAft>
+                <a:spcPts val="0"/>
+              </a:spcAft>
+              <a:buNone/>
+            </a:pPr>
+            <a:r>
+              <a:rPr lang="en-GB" sz="1800" b="1">
+                <a:latin typeface="Consolas"/>
+                <a:ea typeface="Consolas"/>
+                <a:cs typeface="Consolas"/>
+                <a:sym typeface="Consolas"/>
+              </a:rPr>
+              <a:t>Doing</a:t>
+            </a:r>
+            <a:endParaRPr sz="1800" b="1">
+              <a:latin typeface="Consolas"/>
+              <a:ea typeface="Consolas"/>
+              <a:cs typeface="Consolas"/>
+              <a:sym typeface="Consolas"/>
+            </a:endParaRPr>
+          </a:p>
+        </p:txBody>
+      </p:sp>
+      <p:sp>
+        <p:nvSpPr>
+          <p:cNvPr id="195" name="Google Shape;195;p19">
+            <a:extLst>
+              <a:ext uri="{FF2B5EF4-FFF2-40B4-BE49-F238E27FC236}">
+                <a16:creationId xmlns:a16="http://schemas.microsoft.com/office/drawing/2014/main" id="{3BEDC2EC-A63D-F165-5A88-6431F1655ABE}"/>
+              </a:ext>
+            </a:extLst>
+          </p:cNvPr>
+          <p:cNvSpPr/>
+          <p:nvPr/>
+        </p:nvSpPr>
+        <p:spPr>
+          <a:xfrm>
+            <a:off x="15532407" y="84312"/>
+            <a:ext cx="2410800" cy="480900"/>
+          </a:xfrm>
+          <a:prstGeom prst="roundRect">
+            <a:avLst>
+              <a:gd name="adj" fmla="val 16667"/>
+            </a:avLst>
+          </a:prstGeom>
+          <a:solidFill>
+            <a:srgbClr val="F9CB9C"/>
+          </a:solidFill>
+          <a:ln w="28575" cap="flat" cmpd="sng">
+            <a:solidFill>
+              <a:srgbClr val="B45F06"/>
+            </a:solidFill>
+            <a:prstDash val="solid"/>
+            <a:round/>
+            <a:headEnd type="none" w="sm" len="sm"/>
+            <a:tailEnd type="none" w="sm" len="sm"/>
+          </a:ln>
+        </p:spPr>
+        <p:txBody>
+          <a:bodyPr spcFirstLastPara="1" wrap="square" lIns="91425" tIns="91425" rIns="91425" bIns="91425" anchor="ctr" anchorCtr="0">
+            <a:noAutofit/>
+          </a:bodyPr>
+          <a:lstStyle/>
+          <a:p>
+            <a:pPr marL="0" lvl="0" indent="0" algn="ctr" rtl="0">
+              <a:spcBef>
+                <a:spcPts val="0"/>
+              </a:spcBef>
+              <a:spcAft>
+                <a:spcPts val="0"/>
+              </a:spcAft>
+              <a:buNone/>
+            </a:pPr>
+            <a:r>
+              <a:rPr lang="en-GB" sz="1800" b="1">
+                <a:latin typeface="Consolas"/>
+                <a:ea typeface="Consolas"/>
+                <a:cs typeface="Consolas"/>
+                <a:sym typeface="Consolas"/>
+              </a:rPr>
+              <a:t>Review</a:t>
+            </a:r>
+            <a:endParaRPr sz="1800" b="1">
+              <a:latin typeface="Consolas"/>
+              <a:ea typeface="Consolas"/>
+              <a:cs typeface="Consolas"/>
+              <a:sym typeface="Consolas"/>
+            </a:endParaRPr>
+          </a:p>
+        </p:txBody>
+      </p:sp>
+      <p:sp>
+        <p:nvSpPr>
+          <p:cNvPr id="196" name="Google Shape;196;p19">
+            <a:extLst>
+              <a:ext uri="{FF2B5EF4-FFF2-40B4-BE49-F238E27FC236}">
+                <a16:creationId xmlns:a16="http://schemas.microsoft.com/office/drawing/2014/main" id="{6D555EB9-7D5F-493F-AA25-50422DDE4928}"/>
+              </a:ext>
+            </a:extLst>
+          </p:cNvPr>
+          <p:cNvSpPr/>
+          <p:nvPr/>
+        </p:nvSpPr>
+        <p:spPr>
+          <a:xfrm>
+            <a:off x="18668888" y="84312"/>
+            <a:ext cx="2410800" cy="480900"/>
+          </a:xfrm>
+          <a:prstGeom prst="roundRect">
+            <a:avLst>
+              <a:gd name="adj" fmla="val 16667"/>
+            </a:avLst>
+          </a:prstGeom>
+          <a:solidFill>
+            <a:srgbClr val="F9CB9C"/>
+          </a:solidFill>
+          <a:ln w="28575" cap="flat" cmpd="sng">
+            <a:solidFill>
+              <a:srgbClr val="B45F06"/>
+            </a:solidFill>
+            <a:prstDash val="solid"/>
+            <a:round/>
+            <a:headEnd type="none" w="sm" len="sm"/>
+            <a:tailEnd type="none" w="sm" len="sm"/>
+          </a:ln>
+        </p:spPr>
+        <p:txBody>
+          <a:bodyPr spcFirstLastPara="1" wrap="square" lIns="91425" tIns="91425" rIns="91425" bIns="91425" anchor="ctr" anchorCtr="0">
+            <a:noAutofit/>
+          </a:bodyPr>
+          <a:lstStyle/>
+          <a:p>
+            <a:pPr marL="0" lvl="0" indent="0" algn="ctr" rtl="0">
+              <a:spcBef>
+                <a:spcPts val="0"/>
+              </a:spcBef>
+              <a:spcAft>
+                <a:spcPts val="0"/>
+              </a:spcAft>
+              <a:buNone/>
+            </a:pPr>
+            <a:r>
+              <a:rPr lang="en-GB" sz="1800" b="1">
+                <a:latin typeface="Consolas"/>
+                <a:ea typeface="Consolas"/>
+                <a:cs typeface="Consolas"/>
+                <a:sym typeface="Consolas"/>
+              </a:rPr>
+              <a:t>Done</a:t>
+            </a:r>
+            <a:endParaRPr sz="1800" b="1">
+              <a:latin typeface="Consolas"/>
+              <a:ea typeface="Consolas"/>
+              <a:cs typeface="Consolas"/>
+              <a:sym typeface="Consolas"/>
+            </a:endParaRPr>
+          </a:p>
+        </p:txBody>
+      </p:sp>
+      <p:sp>
+        <p:nvSpPr>
+          <p:cNvPr id="197" name="Google Shape;197;p19">
+            <a:extLst>
+              <a:ext uri="{FF2B5EF4-FFF2-40B4-BE49-F238E27FC236}">
+                <a16:creationId xmlns:a16="http://schemas.microsoft.com/office/drawing/2014/main" id="{4787831D-6457-A4B3-F963-D910EC0D7E0D}"/>
+              </a:ext>
+            </a:extLst>
+          </p:cNvPr>
+          <p:cNvSpPr/>
+          <p:nvPr/>
+        </p:nvSpPr>
+        <p:spPr>
+          <a:xfrm>
+            <a:off x="167288" y="84312"/>
+            <a:ext cx="2410800" cy="480900"/>
+          </a:xfrm>
+          <a:prstGeom prst="roundRect">
+            <a:avLst>
+              <a:gd name="adj" fmla="val 16667"/>
+            </a:avLst>
+          </a:prstGeom>
+          <a:solidFill>
+            <a:srgbClr val="F9CB9C"/>
+          </a:solidFill>
+          <a:ln w="28575" cap="flat" cmpd="sng">
+            <a:solidFill>
+              <a:srgbClr val="B45F06"/>
+            </a:solidFill>
+            <a:prstDash val="solid"/>
+            <a:round/>
+            <a:headEnd type="none" w="sm" len="sm"/>
+            <a:tailEnd type="none" w="sm" len="sm"/>
+          </a:ln>
+        </p:spPr>
+        <p:txBody>
+          <a:bodyPr spcFirstLastPara="1" wrap="square" lIns="91425" tIns="91425" rIns="91425" bIns="91425" anchor="ctr" anchorCtr="0">
+            <a:noAutofit/>
+          </a:bodyPr>
+          <a:lstStyle/>
+          <a:p>
+            <a:pPr marL="0" lvl="0" indent="0" algn="ctr" rtl="0">
+              <a:spcBef>
+                <a:spcPts val="0"/>
+              </a:spcBef>
+              <a:spcAft>
+                <a:spcPts val="0"/>
+              </a:spcAft>
+              <a:buNone/>
+            </a:pPr>
+            <a:r>
+              <a:rPr lang="en-GB" sz="1800" b="1">
+                <a:latin typeface="Consolas"/>
+                <a:ea typeface="Consolas"/>
+                <a:cs typeface="Consolas"/>
+                <a:sym typeface="Consolas"/>
+              </a:rPr>
+              <a:t>Backlog</a:t>
+            </a:r>
+            <a:endParaRPr sz="1800" b="1">
+              <a:latin typeface="Consolas"/>
+              <a:ea typeface="Consolas"/>
+              <a:cs typeface="Consolas"/>
+              <a:sym typeface="Consolas"/>
+            </a:endParaRPr>
+          </a:p>
+        </p:txBody>
+      </p:sp>
+      <p:cxnSp>
+        <p:nvCxnSpPr>
+          <p:cNvPr id="204" name="Google Shape;204;p19">
+            <a:extLst>
+              <a:ext uri="{FF2B5EF4-FFF2-40B4-BE49-F238E27FC236}">
+                <a16:creationId xmlns:a16="http://schemas.microsoft.com/office/drawing/2014/main" id="{6B04546C-2D79-6429-A1DE-4FF0004620CC}"/>
+              </a:ext>
+            </a:extLst>
+          </p:cNvPr>
+          <p:cNvCxnSpPr/>
+          <p:nvPr/>
+        </p:nvCxnSpPr>
+        <p:spPr>
+          <a:xfrm>
+            <a:off x="5607986" y="1626038"/>
+            <a:ext cx="16042200" cy="0"/>
+          </a:xfrm>
+          <a:prstGeom prst="straightConnector1">
+            <a:avLst/>
+          </a:prstGeom>
+          <a:noFill/>
+          <a:ln w="28575" cap="flat" cmpd="sng">
+            <a:solidFill>
+              <a:srgbClr val="999999"/>
+            </a:solidFill>
+            <a:prstDash val="dash"/>
+            <a:round/>
+            <a:headEnd type="none" w="med" len="med"/>
+            <a:tailEnd type="none" w="med" len="med"/>
+          </a:ln>
+        </p:spPr>
+      </p:cxnSp>
+      <p:cxnSp>
+        <p:nvCxnSpPr>
+          <p:cNvPr id="205" name="Google Shape;205;p19">
+            <a:extLst>
+              <a:ext uri="{FF2B5EF4-FFF2-40B4-BE49-F238E27FC236}">
+                <a16:creationId xmlns:a16="http://schemas.microsoft.com/office/drawing/2014/main" id="{26D38A50-C71E-885E-1A3E-448C9A1BB5CC}"/>
+              </a:ext>
+            </a:extLst>
+          </p:cNvPr>
+          <p:cNvCxnSpPr/>
+          <p:nvPr/>
+        </p:nvCxnSpPr>
+        <p:spPr>
+          <a:xfrm>
+            <a:off x="5607986" y="3201938"/>
+            <a:ext cx="16042200" cy="0"/>
+          </a:xfrm>
+          <a:prstGeom prst="straightConnector1">
+            <a:avLst/>
+          </a:prstGeom>
+          <a:noFill/>
+          <a:ln w="28575" cap="flat" cmpd="sng">
+            <a:solidFill>
+              <a:srgbClr val="999999"/>
+            </a:solidFill>
+            <a:prstDash val="dash"/>
+            <a:round/>
+            <a:headEnd type="none" w="med" len="med"/>
+            <a:tailEnd type="none" w="med" len="med"/>
+          </a:ln>
+        </p:spPr>
+      </p:cxnSp>
+      <p:cxnSp>
+        <p:nvCxnSpPr>
+          <p:cNvPr id="206" name="Google Shape;206;p19">
+            <a:extLst>
+              <a:ext uri="{FF2B5EF4-FFF2-40B4-BE49-F238E27FC236}">
+                <a16:creationId xmlns:a16="http://schemas.microsoft.com/office/drawing/2014/main" id="{A542019A-281C-A712-1C3A-7EAA9F8D85A4}"/>
+              </a:ext>
+            </a:extLst>
+          </p:cNvPr>
+          <p:cNvCxnSpPr/>
+          <p:nvPr/>
+        </p:nvCxnSpPr>
+        <p:spPr>
+          <a:xfrm>
+            <a:off x="5607986" y="4777838"/>
+            <a:ext cx="16042200" cy="0"/>
+          </a:xfrm>
+          <a:prstGeom prst="straightConnector1">
+            <a:avLst/>
+          </a:prstGeom>
+          <a:noFill/>
+          <a:ln w="28575" cap="flat" cmpd="sng">
+            <a:solidFill>
+              <a:srgbClr val="999999"/>
+            </a:solidFill>
+            <a:prstDash val="dash"/>
+            <a:round/>
+            <a:headEnd type="none" w="med" len="med"/>
+            <a:tailEnd type="none" w="med" len="med"/>
+          </a:ln>
+        </p:spPr>
+      </p:cxnSp>
+      <p:cxnSp>
+        <p:nvCxnSpPr>
+          <p:cNvPr id="207" name="Google Shape;207;p19">
+            <a:extLst>
+              <a:ext uri="{FF2B5EF4-FFF2-40B4-BE49-F238E27FC236}">
+                <a16:creationId xmlns:a16="http://schemas.microsoft.com/office/drawing/2014/main" id="{C98DBDBF-867D-9BC3-E484-6F2BDCE36674}"/>
+              </a:ext>
+            </a:extLst>
+          </p:cNvPr>
+          <p:cNvCxnSpPr/>
+          <p:nvPr/>
+        </p:nvCxnSpPr>
+        <p:spPr>
+          <a:xfrm>
+            <a:off x="5607986" y="6353738"/>
+            <a:ext cx="16042200" cy="0"/>
+          </a:xfrm>
+          <a:prstGeom prst="straightConnector1">
+            <a:avLst/>
+          </a:prstGeom>
+          <a:noFill/>
+          <a:ln w="28575" cap="flat" cmpd="sng">
+            <a:solidFill>
+              <a:srgbClr val="999999"/>
+            </a:solidFill>
+            <a:prstDash val="dash"/>
+            <a:round/>
+            <a:headEnd type="none" w="med" len="med"/>
+            <a:tailEnd type="none" w="med" len="med"/>
+          </a:ln>
+        </p:spPr>
+      </p:cxnSp>
+      <p:cxnSp>
+        <p:nvCxnSpPr>
+          <p:cNvPr id="208" name="Google Shape;208;p19">
+            <a:extLst>
+              <a:ext uri="{FF2B5EF4-FFF2-40B4-BE49-F238E27FC236}">
+                <a16:creationId xmlns:a16="http://schemas.microsoft.com/office/drawing/2014/main" id="{998EDE9E-2E13-FBA2-123C-14F1A2CD68CC}"/>
+              </a:ext>
+            </a:extLst>
+          </p:cNvPr>
+          <p:cNvCxnSpPr/>
+          <p:nvPr/>
+        </p:nvCxnSpPr>
+        <p:spPr>
+          <a:xfrm>
+            <a:off x="5607986" y="7929638"/>
+            <a:ext cx="16042200" cy="0"/>
+          </a:xfrm>
+          <a:prstGeom prst="straightConnector1">
+            <a:avLst/>
+          </a:prstGeom>
+          <a:noFill/>
+          <a:ln w="28575" cap="flat" cmpd="sng">
+            <a:solidFill>
+              <a:srgbClr val="999999"/>
+            </a:solidFill>
+            <a:prstDash val="dash"/>
+            <a:round/>
+            <a:headEnd type="none" w="med" len="med"/>
+            <a:tailEnd type="none" w="med" len="med"/>
+          </a:ln>
+        </p:spPr>
+      </p:cxnSp>
+      <p:cxnSp>
+        <p:nvCxnSpPr>
+          <p:cNvPr id="209" name="Google Shape;209;p19">
+            <a:extLst>
+              <a:ext uri="{FF2B5EF4-FFF2-40B4-BE49-F238E27FC236}">
+                <a16:creationId xmlns:a16="http://schemas.microsoft.com/office/drawing/2014/main" id="{1FEBDE58-49EE-CBC2-5ADD-C634A48BD154}"/>
+              </a:ext>
+            </a:extLst>
+          </p:cNvPr>
+          <p:cNvCxnSpPr/>
+          <p:nvPr/>
+        </p:nvCxnSpPr>
+        <p:spPr>
+          <a:xfrm>
+            <a:off x="5607986" y="9505538"/>
+            <a:ext cx="16042200" cy="0"/>
+          </a:xfrm>
+          <a:prstGeom prst="straightConnector1">
+            <a:avLst/>
+          </a:prstGeom>
+          <a:noFill/>
+          <a:ln w="28575" cap="flat" cmpd="sng">
+            <a:solidFill>
+              <a:srgbClr val="999999"/>
+            </a:solidFill>
+            <a:prstDash val="dash"/>
+            <a:round/>
+            <a:headEnd type="none" w="med" len="med"/>
+            <a:tailEnd type="none" w="med" len="med"/>
+          </a:ln>
+        </p:spPr>
+      </p:cxnSp>
+      <p:cxnSp>
+        <p:nvCxnSpPr>
+          <p:cNvPr id="215" name="Google Shape;215;p19">
+            <a:extLst>
+              <a:ext uri="{FF2B5EF4-FFF2-40B4-BE49-F238E27FC236}">
+                <a16:creationId xmlns:a16="http://schemas.microsoft.com/office/drawing/2014/main" id="{D0FD3737-4D9A-30A5-BE55-8003CEDD3594}"/>
+              </a:ext>
+            </a:extLst>
+          </p:cNvPr>
+          <p:cNvCxnSpPr/>
+          <p:nvPr/>
+        </p:nvCxnSpPr>
+        <p:spPr>
+          <a:xfrm>
+            <a:off x="2874374" y="-28500"/>
+            <a:ext cx="0" cy="10857000"/>
+          </a:xfrm>
+          <a:prstGeom prst="straightConnector1">
+            <a:avLst/>
+          </a:prstGeom>
+          <a:noFill/>
+          <a:ln w="38100" cap="flat" cmpd="sng">
+            <a:solidFill>
+              <a:srgbClr val="5B0F00"/>
+            </a:solidFill>
+            <a:prstDash val="solid"/>
+            <a:round/>
+            <a:headEnd type="none" w="med" len="med"/>
+            <a:tailEnd type="none" w="med" len="med"/>
+          </a:ln>
+        </p:spPr>
+      </p:cxnSp>
+      <p:sp>
+        <p:nvSpPr>
+          <p:cNvPr id="2" name="Google Shape;74;p15">
+            <a:extLst>
+              <a:ext uri="{FF2B5EF4-FFF2-40B4-BE49-F238E27FC236}">
+                <a16:creationId xmlns:a16="http://schemas.microsoft.com/office/drawing/2014/main" id="{CE31001C-F1E4-334A-BF4D-5E5806FA9308}"/>
+              </a:ext>
+            </a:extLst>
+          </p:cNvPr>
+          <p:cNvSpPr/>
+          <p:nvPr/>
+        </p:nvSpPr>
+        <p:spPr>
+          <a:xfrm>
+            <a:off x="3197186" y="1385588"/>
+            <a:ext cx="2410800" cy="480900"/>
+          </a:xfrm>
+          <a:prstGeom prst="roundRect">
+            <a:avLst>
+              <a:gd name="adj" fmla="val 16667"/>
+            </a:avLst>
+          </a:prstGeom>
+          <a:solidFill>
+            <a:srgbClr val="E6B8AF"/>
+          </a:solidFill>
+          <a:ln w="28575" cap="flat" cmpd="sng">
+            <a:solidFill>
+              <a:srgbClr val="5B0F00"/>
+            </a:solidFill>
+            <a:prstDash val="solid"/>
+            <a:round/>
+            <a:headEnd type="none" w="sm" len="sm"/>
+            <a:tailEnd type="none" w="sm" len="sm"/>
+          </a:ln>
+        </p:spPr>
+        <p:txBody>
+          <a:bodyPr spcFirstLastPara="1" wrap="square" lIns="91425" tIns="91425" rIns="91425" bIns="91425" anchor="ctr" anchorCtr="0">
+            <a:noAutofit/>
+          </a:bodyPr>
+          <a:lstStyle/>
+          <a:p>
+            <a:pPr marL="0" lvl="0" indent="0" algn="ctr" rtl="0">
+              <a:spcBef>
+                <a:spcPts val="0"/>
+              </a:spcBef>
+              <a:spcAft>
+                <a:spcPts val="0"/>
+              </a:spcAft>
+              <a:buNone/>
+            </a:pPr>
+            <a:r>
+              <a:rPr lang="en-GB" sz="1800" b="1" dirty="0">
+                <a:latin typeface="Consolas"/>
+                <a:ea typeface="Consolas"/>
+                <a:cs typeface="Consolas"/>
+                <a:sym typeface="Consolas"/>
+              </a:rPr>
+              <a:t>68338</a:t>
+            </a:r>
+            <a:endParaRPr sz="1800" b="1" dirty="0">
+              <a:latin typeface="Consolas"/>
+              <a:ea typeface="Consolas"/>
+              <a:cs typeface="Consolas"/>
+              <a:sym typeface="Consolas"/>
+            </a:endParaRPr>
+          </a:p>
+        </p:txBody>
+      </p:sp>
+      <p:sp>
+        <p:nvSpPr>
+          <p:cNvPr id="3" name="Google Shape;75;p15">
+            <a:extLst>
+              <a:ext uri="{FF2B5EF4-FFF2-40B4-BE49-F238E27FC236}">
+                <a16:creationId xmlns:a16="http://schemas.microsoft.com/office/drawing/2014/main" id="{74CB071C-939E-1E4B-036F-6789D482D8FF}"/>
+              </a:ext>
+            </a:extLst>
+          </p:cNvPr>
+          <p:cNvSpPr/>
+          <p:nvPr/>
+        </p:nvSpPr>
+        <p:spPr>
+          <a:xfrm>
+            <a:off x="3197186" y="2961501"/>
+            <a:ext cx="2410800" cy="480900"/>
+          </a:xfrm>
+          <a:prstGeom prst="roundRect">
+            <a:avLst>
+              <a:gd name="adj" fmla="val 16667"/>
+            </a:avLst>
+          </a:prstGeom>
+          <a:solidFill>
+            <a:srgbClr val="E6B8AF"/>
+          </a:solidFill>
+          <a:ln w="28575" cap="flat" cmpd="sng">
+            <a:solidFill>
+              <a:srgbClr val="5B0F00"/>
+            </a:solidFill>
+            <a:prstDash val="solid"/>
+            <a:round/>
+            <a:headEnd type="none" w="sm" len="sm"/>
+            <a:tailEnd type="none" w="sm" len="sm"/>
+          </a:ln>
+        </p:spPr>
+        <p:txBody>
+          <a:bodyPr spcFirstLastPara="1" wrap="square" lIns="91425" tIns="91425" rIns="91425" bIns="91425" anchor="ctr" anchorCtr="0">
+            <a:noAutofit/>
+          </a:bodyPr>
+          <a:lstStyle/>
+          <a:p>
+            <a:pPr marL="0" lvl="0" indent="0" algn="ctr" rtl="0">
+              <a:spcBef>
+                <a:spcPts val="0"/>
+              </a:spcBef>
+              <a:spcAft>
+                <a:spcPts val="0"/>
+              </a:spcAft>
+              <a:buNone/>
+            </a:pPr>
+            <a:r>
+              <a:rPr lang="en-GB" sz="1800" b="1" dirty="0">
+                <a:latin typeface="Consolas"/>
+                <a:ea typeface="Consolas"/>
+                <a:cs typeface="Consolas"/>
+                <a:sym typeface="Consolas"/>
+              </a:rPr>
+              <a:t>68245</a:t>
+            </a:r>
+            <a:endParaRPr sz="1800" b="1" dirty="0">
+              <a:latin typeface="Consolas"/>
+              <a:ea typeface="Consolas"/>
+              <a:cs typeface="Consolas"/>
+              <a:sym typeface="Consolas"/>
+            </a:endParaRPr>
+          </a:p>
+        </p:txBody>
+      </p:sp>
+      <p:sp>
+        <p:nvSpPr>
+          <p:cNvPr id="4" name="Google Shape;76;p15">
+            <a:extLst>
+              <a:ext uri="{FF2B5EF4-FFF2-40B4-BE49-F238E27FC236}">
+                <a16:creationId xmlns:a16="http://schemas.microsoft.com/office/drawing/2014/main" id="{C6A2B30D-9E8B-DB58-DB96-C0C54F78ACE7}"/>
+              </a:ext>
+            </a:extLst>
+          </p:cNvPr>
+          <p:cNvSpPr/>
+          <p:nvPr/>
+        </p:nvSpPr>
+        <p:spPr>
+          <a:xfrm>
+            <a:off x="3197186" y="4537410"/>
+            <a:ext cx="2410800" cy="480900"/>
+          </a:xfrm>
+          <a:prstGeom prst="roundRect">
+            <a:avLst>
+              <a:gd name="adj" fmla="val 16667"/>
+            </a:avLst>
+          </a:prstGeom>
+          <a:solidFill>
+            <a:srgbClr val="E6B8AF"/>
+          </a:solidFill>
+          <a:ln w="28575" cap="flat" cmpd="sng">
+            <a:solidFill>
+              <a:srgbClr val="5B0F00"/>
+            </a:solidFill>
+            <a:prstDash val="solid"/>
+            <a:round/>
+            <a:headEnd type="none" w="sm" len="sm"/>
+            <a:tailEnd type="none" w="sm" len="sm"/>
+          </a:ln>
+        </p:spPr>
+        <p:txBody>
+          <a:bodyPr spcFirstLastPara="1" wrap="square" lIns="91425" tIns="91425" rIns="91425" bIns="91425" anchor="ctr" anchorCtr="0">
+            <a:noAutofit/>
+          </a:bodyPr>
+          <a:lstStyle/>
+          <a:p>
+            <a:pPr marL="0" lvl="0" indent="0" algn="ctr" rtl="0">
+              <a:spcBef>
+                <a:spcPts val="0"/>
+              </a:spcBef>
+              <a:spcAft>
+                <a:spcPts val="0"/>
+              </a:spcAft>
+              <a:buNone/>
+            </a:pPr>
+            <a:r>
+              <a:rPr lang="en-GB" sz="1800" b="1" dirty="0">
+                <a:latin typeface="Consolas"/>
+                <a:ea typeface="Consolas"/>
+                <a:cs typeface="Consolas"/>
+                <a:sym typeface="Consolas"/>
+              </a:rPr>
+              <a:t>68725</a:t>
+            </a:r>
+            <a:endParaRPr sz="1800" b="1" dirty="0">
+              <a:latin typeface="Consolas"/>
+              <a:ea typeface="Consolas"/>
+              <a:cs typeface="Consolas"/>
+              <a:sym typeface="Consolas"/>
+            </a:endParaRPr>
+          </a:p>
+        </p:txBody>
+      </p:sp>
+      <p:sp>
+        <p:nvSpPr>
+          <p:cNvPr id="5" name="Google Shape;77;p15">
+            <a:extLst>
+              <a:ext uri="{FF2B5EF4-FFF2-40B4-BE49-F238E27FC236}">
+                <a16:creationId xmlns:a16="http://schemas.microsoft.com/office/drawing/2014/main" id="{F12E5E83-0EE9-3CC9-8FCE-855D45490734}"/>
+              </a:ext>
+            </a:extLst>
+          </p:cNvPr>
+          <p:cNvSpPr/>
+          <p:nvPr/>
+        </p:nvSpPr>
+        <p:spPr>
+          <a:xfrm>
+            <a:off x="3197186" y="6113307"/>
+            <a:ext cx="2410800" cy="480900"/>
+          </a:xfrm>
+          <a:prstGeom prst="roundRect">
+            <a:avLst>
+              <a:gd name="adj" fmla="val 16667"/>
+            </a:avLst>
+          </a:prstGeom>
+          <a:solidFill>
+            <a:srgbClr val="E6B8AF"/>
+          </a:solidFill>
+          <a:ln w="28575" cap="flat" cmpd="sng">
+            <a:solidFill>
+              <a:srgbClr val="5B0F00"/>
+            </a:solidFill>
+            <a:prstDash val="solid"/>
+            <a:round/>
+            <a:headEnd type="none" w="sm" len="sm"/>
+            <a:tailEnd type="none" w="sm" len="sm"/>
+          </a:ln>
+        </p:spPr>
+        <p:txBody>
+          <a:bodyPr spcFirstLastPara="1" wrap="square" lIns="91425" tIns="91425" rIns="91425" bIns="91425" anchor="ctr" anchorCtr="0">
+            <a:noAutofit/>
+          </a:bodyPr>
+          <a:lstStyle/>
+          <a:p>
+            <a:pPr marL="0" lvl="0" indent="0" algn="ctr" rtl="0">
+              <a:spcBef>
+                <a:spcPts val="0"/>
+              </a:spcBef>
+              <a:spcAft>
+                <a:spcPts val="0"/>
+              </a:spcAft>
+              <a:buNone/>
+            </a:pPr>
+            <a:r>
+              <a:rPr lang="en-GB" sz="1800" b="1" dirty="0">
+                <a:latin typeface="Consolas"/>
+                <a:ea typeface="Consolas"/>
+                <a:cs typeface="Consolas"/>
+                <a:sym typeface="Consolas"/>
+              </a:rPr>
+              <a:t>68180</a:t>
+            </a:r>
+            <a:endParaRPr sz="1800" b="1" dirty="0">
+              <a:latin typeface="Consolas"/>
+              <a:ea typeface="Consolas"/>
+              <a:cs typeface="Consolas"/>
+              <a:sym typeface="Consolas"/>
+            </a:endParaRPr>
+          </a:p>
+        </p:txBody>
+      </p:sp>
+      <p:sp>
+        <p:nvSpPr>
+          <p:cNvPr id="6" name="Google Shape;78;p15">
+            <a:extLst>
+              <a:ext uri="{FF2B5EF4-FFF2-40B4-BE49-F238E27FC236}">
+                <a16:creationId xmlns:a16="http://schemas.microsoft.com/office/drawing/2014/main" id="{CFBB95AD-ACE3-880B-3CA9-B9C10A01D4C8}"/>
+              </a:ext>
+            </a:extLst>
+          </p:cNvPr>
+          <p:cNvSpPr/>
+          <p:nvPr/>
+        </p:nvSpPr>
+        <p:spPr>
+          <a:xfrm>
+            <a:off x="3197186" y="7689198"/>
+            <a:ext cx="2410800" cy="480900"/>
+          </a:xfrm>
+          <a:prstGeom prst="roundRect">
+            <a:avLst>
+              <a:gd name="adj" fmla="val 16667"/>
+            </a:avLst>
+          </a:prstGeom>
+          <a:solidFill>
+            <a:srgbClr val="E6B8AF"/>
+          </a:solidFill>
+          <a:ln w="28575" cap="flat" cmpd="sng">
+            <a:solidFill>
+              <a:srgbClr val="5B0F00"/>
+            </a:solidFill>
+            <a:prstDash val="solid"/>
+            <a:round/>
+            <a:headEnd type="none" w="sm" len="sm"/>
+            <a:tailEnd type="none" w="sm" len="sm"/>
+          </a:ln>
+        </p:spPr>
+        <p:txBody>
+          <a:bodyPr spcFirstLastPara="1" wrap="square" lIns="91425" tIns="91425" rIns="91425" bIns="91425" anchor="ctr" anchorCtr="0">
+            <a:noAutofit/>
+          </a:bodyPr>
+          <a:lstStyle/>
+          <a:p>
+            <a:pPr marL="0" lvl="0" indent="0" algn="ctr" rtl="0">
+              <a:spcBef>
+                <a:spcPts val="0"/>
+              </a:spcBef>
+              <a:spcAft>
+                <a:spcPts val="0"/>
+              </a:spcAft>
+              <a:buNone/>
+            </a:pPr>
+            <a:r>
+              <a:rPr lang="en-GB" sz="1800" b="1" dirty="0">
+                <a:latin typeface="Consolas"/>
+                <a:ea typeface="Consolas"/>
+                <a:cs typeface="Consolas"/>
+                <a:sym typeface="Consolas"/>
+              </a:rPr>
+              <a:t>67912</a:t>
+            </a:r>
+            <a:endParaRPr sz="1800" b="1" dirty="0">
+              <a:latin typeface="Consolas"/>
+              <a:ea typeface="Consolas"/>
+              <a:cs typeface="Consolas"/>
+              <a:sym typeface="Consolas"/>
+            </a:endParaRPr>
+          </a:p>
+        </p:txBody>
+      </p:sp>
+      <p:sp>
+        <p:nvSpPr>
+          <p:cNvPr id="7" name="Google Shape;79;p15">
+            <a:extLst>
+              <a:ext uri="{FF2B5EF4-FFF2-40B4-BE49-F238E27FC236}">
+                <a16:creationId xmlns:a16="http://schemas.microsoft.com/office/drawing/2014/main" id="{855BB797-FC35-A0D0-DE45-292C13398DE4}"/>
+              </a:ext>
+            </a:extLst>
+          </p:cNvPr>
+          <p:cNvSpPr/>
+          <p:nvPr/>
+        </p:nvSpPr>
+        <p:spPr>
+          <a:xfrm>
+            <a:off x="3197186" y="9265103"/>
+            <a:ext cx="2410800" cy="480900"/>
+          </a:xfrm>
+          <a:prstGeom prst="roundRect">
+            <a:avLst>
+              <a:gd name="adj" fmla="val 16667"/>
+            </a:avLst>
+          </a:prstGeom>
+          <a:solidFill>
+            <a:srgbClr val="E6B8AF"/>
+          </a:solidFill>
+          <a:ln w="28575" cap="flat" cmpd="sng">
+            <a:solidFill>
+              <a:srgbClr val="5B0F00"/>
+            </a:solidFill>
+            <a:prstDash val="solid"/>
+            <a:round/>
+            <a:headEnd type="none" w="sm" len="sm"/>
+            <a:tailEnd type="none" w="sm" len="sm"/>
+          </a:ln>
+        </p:spPr>
+        <p:txBody>
+          <a:bodyPr spcFirstLastPara="1" wrap="square" lIns="91425" tIns="91425" rIns="91425" bIns="91425" anchor="ctr" anchorCtr="0">
+            <a:noAutofit/>
+          </a:bodyPr>
+          <a:lstStyle/>
+          <a:p>
+            <a:pPr marL="0" lvl="0" indent="0" algn="ctr" rtl="0">
+              <a:spcBef>
+                <a:spcPts val="0"/>
+              </a:spcBef>
+              <a:spcAft>
+                <a:spcPts val="0"/>
+              </a:spcAft>
+              <a:buNone/>
+            </a:pPr>
+            <a:r>
+              <a:rPr lang="en-GB" sz="1800" b="1" dirty="0">
+                <a:latin typeface="Consolas"/>
+                <a:ea typeface="Consolas"/>
+                <a:cs typeface="Consolas"/>
+                <a:sym typeface="Consolas"/>
+              </a:rPr>
+              <a:t>67870</a:t>
+            </a:r>
+            <a:endParaRPr sz="1800" b="1" dirty="0">
+              <a:latin typeface="Consolas"/>
+              <a:ea typeface="Consolas"/>
+              <a:cs typeface="Consolas"/>
+              <a:sym typeface="Consolas"/>
+            </a:endParaRPr>
+          </a:p>
+        </p:txBody>
+      </p:sp>
+      <p:sp>
+        <p:nvSpPr>
+          <p:cNvPr id="10" name="Google Shape;86;p15">
+            <a:extLst>
+              <a:ext uri="{FF2B5EF4-FFF2-40B4-BE49-F238E27FC236}">
+                <a16:creationId xmlns:a16="http://schemas.microsoft.com/office/drawing/2014/main" id="{D3AE1D88-3DBC-4FEE-9596-7AFA6325DD1F}"/>
+              </a:ext>
+            </a:extLst>
+          </p:cNvPr>
+          <p:cNvSpPr/>
+          <p:nvPr/>
+        </p:nvSpPr>
+        <p:spPr>
+          <a:xfrm>
+            <a:off x="6039639" y="825083"/>
+            <a:ext cx="2410800" cy="9012715"/>
+          </a:xfrm>
+          <a:prstGeom prst="roundRect">
+            <a:avLst>
+              <a:gd name="adj" fmla="val 16667"/>
+            </a:avLst>
+          </a:prstGeom>
+          <a:solidFill>
+            <a:srgbClr val="D9EAD3"/>
+          </a:solidFill>
+          <a:ln w="28575" cap="flat" cmpd="sng">
+            <a:solidFill>
+              <a:srgbClr val="274E13"/>
+            </a:solidFill>
+            <a:prstDash val="solid"/>
+            <a:round/>
+            <a:headEnd type="none" w="sm" len="sm"/>
+            <a:tailEnd type="none" w="sm" len="sm"/>
+          </a:ln>
+        </p:spPr>
+        <p:txBody>
+          <a:bodyPr spcFirstLastPara="1" wrap="square" lIns="91425" tIns="91425" rIns="91425" bIns="91425" anchor="t" anchorCtr="0">
+            <a:noAutofit/>
+          </a:bodyPr>
+          <a:lstStyle/>
+          <a:p>
+            <a:pPr marL="0" lvl="0" indent="0" rtl="0">
+              <a:spcBef>
+                <a:spcPts val="0"/>
+              </a:spcBef>
+              <a:spcAft>
+                <a:spcPts val="0"/>
+              </a:spcAft>
+              <a:buNone/>
+            </a:pPr>
+            <a:r>
+              <a:rPr lang="en-GB" dirty="0">
+                <a:latin typeface="Consolas"/>
+                <a:ea typeface="Consolas"/>
+                <a:cs typeface="Consolas"/>
+                <a:sym typeface="Consolas"/>
+              </a:rPr>
+              <a:t>US1: Como </a:t>
+            </a:r>
+            <a:r>
+              <a:rPr lang="en-GB" dirty="0" err="1">
+                <a:latin typeface="Consolas"/>
+                <a:ea typeface="Consolas"/>
+                <a:cs typeface="Consolas"/>
+                <a:sym typeface="Consolas"/>
+              </a:rPr>
+              <a:t>membro</a:t>
+            </a:r>
+            <a:r>
+              <a:rPr lang="en-GB" dirty="0">
+                <a:latin typeface="Consolas"/>
+                <a:ea typeface="Consolas"/>
+                <a:cs typeface="Consolas"/>
+                <a:sym typeface="Consolas"/>
+              </a:rPr>
+              <a:t> da </a:t>
+            </a:r>
+            <a:r>
+              <a:rPr lang="en-GB" dirty="0" err="1">
+                <a:latin typeface="Consolas"/>
+                <a:ea typeface="Consolas"/>
+                <a:cs typeface="Consolas"/>
+                <a:sym typeface="Consolas"/>
+              </a:rPr>
+              <a:t>equipa</a:t>
+            </a:r>
+            <a:r>
+              <a:rPr lang="en-GB" dirty="0">
+                <a:latin typeface="Consolas"/>
+                <a:ea typeface="Consolas"/>
+                <a:cs typeface="Consolas"/>
+                <a:sym typeface="Consolas"/>
+              </a:rPr>
+              <a:t> </a:t>
+            </a:r>
+            <a:r>
+              <a:rPr lang="en-GB" dirty="0" err="1">
+                <a:latin typeface="Consolas"/>
+                <a:ea typeface="Consolas"/>
+                <a:cs typeface="Consolas"/>
+                <a:sym typeface="Consolas"/>
+              </a:rPr>
+              <a:t>quero</a:t>
+            </a:r>
+            <a:r>
+              <a:rPr lang="en-GB" dirty="0">
+                <a:latin typeface="Consolas"/>
+                <a:ea typeface="Consolas"/>
+                <a:cs typeface="Consolas"/>
+                <a:sym typeface="Consolas"/>
+              </a:rPr>
+              <a:t> </a:t>
+            </a:r>
+            <a:r>
+              <a:rPr lang="en-GB" dirty="0" err="1">
+                <a:latin typeface="Consolas"/>
+                <a:ea typeface="Consolas"/>
+                <a:cs typeface="Consolas"/>
+                <a:sym typeface="Consolas"/>
+              </a:rPr>
+              <a:t>identificar</a:t>
+            </a:r>
+            <a:r>
+              <a:rPr lang="en-GB" dirty="0">
+                <a:latin typeface="Consolas"/>
+                <a:ea typeface="Consolas"/>
+                <a:cs typeface="Consolas"/>
+                <a:sym typeface="Consolas"/>
+              </a:rPr>
+              <a:t> </a:t>
+            </a:r>
+            <a:r>
+              <a:rPr lang="en-GB" dirty="0" err="1">
+                <a:latin typeface="Consolas"/>
+                <a:ea typeface="Consolas"/>
+                <a:cs typeface="Consolas"/>
+                <a:sym typeface="Consolas"/>
+              </a:rPr>
+              <a:t>padrões</a:t>
+            </a:r>
+            <a:r>
+              <a:rPr lang="en-GB" dirty="0">
+                <a:latin typeface="Consolas"/>
+                <a:ea typeface="Consolas"/>
+                <a:cs typeface="Consolas"/>
+                <a:sym typeface="Consolas"/>
+              </a:rPr>
+              <a:t> de </a:t>
+            </a:r>
+            <a:r>
+              <a:rPr lang="en-GB" dirty="0" err="1">
+                <a:latin typeface="Consolas"/>
+                <a:ea typeface="Consolas"/>
+                <a:cs typeface="Consolas"/>
+                <a:sym typeface="Consolas"/>
+              </a:rPr>
+              <a:t>desenho</a:t>
+            </a:r>
+            <a:r>
+              <a:rPr lang="en-GB" dirty="0">
+                <a:latin typeface="Consolas"/>
+                <a:ea typeface="Consolas"/>
+                <a:cs typeface="Consolas"/>
+                <a:sym typeface="Consolas"/>
+              </a:rPr>
+              <a:t> para completer a </a:t>
+            </a:r>
+            <a:r>
+              <a:rPr lang="en-GB" dirty="0" err="1">
+                <a:latin typeface="Consolas"/>
+                <a:ea typeface="Consolas"/>
+                <a:cs typeface="Consolas"/>
+                <a:sym typeface="Consolas"/>
+              </a:rPr>
+              <a:t>tarefa</a:t>
+            </a:r>
+            <a:endParaRPr dirty="0">
+              <a:latin typeface="Consolas"/>
+              <a:ea typeface="Consolas"/>
+              <a:cs typeface="Consolas"/>
+              <a:sym typeface="Consolas"/>
+            </a:endParaRPr>
+          </a:p>
+        </p:txBody>
+      </p:sp>
+      <p:sp>
+        <p:nvSpPr>
+          <p:cNvPr id="11" name="Google Shape;92;p15">
+            <a:extLst>
+              <a:ext uri="{FF2B5EF4-FFF2-40B4-BE49-F238E27FC236}">
+                <a16:creationId xmlns:a16="http://schemas.microsoft.com/office/drawing/2014/main" id="{F59D234A-AD90-7A9A-A021-4BF25A04C1C9}"/>
+              </a:ext>
+            </a:extLst>
+          </p:cNvPr>
+          <p:cNvSpPr/>
+          <p:nvPr/>
+        </p:nvSpPr>
+        <p:spPr>
+          <a:xfrm>
+            <a:off x="6264864" y="2222750"/>
+            <a:ext cx="2884105" cy="7634470"/>
+          </a:xfrm>
+          <a:prstGeom prst="roundRect">
+            <a:avLst>
+              <a:gd name="adj" fmla="val 16667"/>
+            </a:avLst>
+          </a:prstGeom>
+          <a:solidFill>
+            <a:srgbClr val="D9EAD3"/>
+          </a:solidFill>
+          <a:ln w="28575" cap="flat" cmpd="sng">
+            <a:solidFill>
+              <a:srgbClr val="274E13"/>
+            </a:solidFill>
+            <a:prstDash val="solid"/>
+            <a:round/>
+            <a:headEnd type="none" w="sm" len="sm"/>
+            <a:tailEnd type="none" w="sm" len="sm"/>
+          </a:ln>
+        </p:spPr>
+        <p:txBody>
+          <a:bodyPr spcFirstLastPara="1" wrap="square" lIns="91425" tIns="91425" rIns="91425" bIns="91425" anchor="t" anchorCtr="0">
+            <a:noAutofit/>
+          </a:bodyPr>
+          <a:lstStyle/>
+          <a:p>
+            <a:pPr lvl="0"/>
+            <a:r>
+              <a:rPr lang="en-GB" dirty="0">
+                <a:latin typeface="Consolas"/>
+                <a:ea typeface="Consolas"/>
+                <a:cs typeface="Consolas"/>
+                <a:sym typeface="Consolas"/>
+              </a:rPr>
+              <a:t>US2: Como </a:t>
+            </a:r>
+            <a:r>
+              <a:rPr lang="en-GB" dirty="0" err="1">
+                <a:latin typeface="Consolas"/>
+                <a:ea typeface="Consolas"/>
+                <a:cs typeface="Consolas"/>
+                <a:sym typeface="Consolas"/>
+              </a:rPr>
+              <a:t>membro</a:t>
+            </a:r>
+            <a:r>
+              <a:rPr lang="en-GB" dirty="0">
+                <a:latin typeface="Consolas"/>
+                <a:ea typeface="Consolas"/>
+                <a:cs typeface="Consolas"/>
+                <a:sym typeface="Consolas"/>
+              </a:rPr>
+              <a:t> da </a:t>
+            </a:r>
+            <a:r>
+              <a:rPr lang="en-GB" dirty="0" err="1">
+                <a:latin typeface="Consolas"/>
+                <a:ea typeface="Consolas"/>
+                <a:cs typeface="Consolas"/>
+                <a:sym typeface="Consolas"/>
+              </a:rPr>
+              <a:t>equipa</a:t>
+            </a:r>
+            <a:r>
+              <a:rPr lang="en-GB" dirty="0">
+                <a:latin typeface="Consolas"/>
+                <a:ea typeface="Consolas"/>
+                <a:cs typeface="Consolas"/>
+                <a:sym typeface="Consolas"/>
+              </a:rPr>
+              <a:t> </a:t>
+            </a:r>
+            <a:r>
+              <a:rPr lang="en-GB" dirty="0" err="1">
+                <a:latin typeface="Consolas"/>
+                <a:ea typeface="Consolas"/>
+                <a:cs typeface="Consolas"/>
+                <a:sym typeface="Consolas"/>
+              </a:rPr>
+              <a:t>quero</a:t>
+            </a:r>
+            <a:r>
+              <a:rPr lang="en-GB" dirty="0">
+                <a:latin typeface="Consolas"/>
+                <a:ea typeface="Consolas"/>
+                <a:cs typeface="Consolas"/>
+                <a:sym typeface="Consolas"/>
+              </a:rPr>
+              <a:t> </a:t>
+            </a:r>
+            <a:r>
+              <a:rPr lang="en-GB" dirty="0" err="1">
+                <a:latin typeface="Consolas"/>
+                <a:ea typeface="Consolas"/>
+                <a:cs typeface="Consolas"/>
+                <a:sym typeface="Consolas"/>
+              </a:rPr>
+              <a:t>identificar</a:t>
+            </a:r>
+            <a:r>
+              <a:rPr lang="en-GB" dirty="0">
+                <a:latin typeface="Consolas"/>
+                <a:ea typeface="Consolas"/>
+                <a:cs typeface="Consolas"/>
+                <a:sym typeface="Consolas"/>
+              </a:rPr>
+              <a:t> “</a:t>
+            </a:r>
+            <a:r>
+              <a:rPr lang="en-GB" dirty="0" err="1">
+                <a:latin typeface="Consolas"/>
+                <a:ea typeface="Consolas"/>
+                <a:cs typeface="Consolas"/>
+                <a:sym typeface="Consolas"/>
+              </a:rPr>
+              <a:t>CodeSmells</a:t>
+            </a:r>
+            <a:r>
+              <a:rPr lang="en-GB" dirty="0">
+                <a:latin typeface="Consolas"/>
+                <a:ea typeface="Consolas"/>
+                <a:cs typeface="Consolas"/>
+                <a:sym typeface="Consolas"/>
+              </a:rPr>
+              <a:t>” para </a:t>
+            </a:r>
+            <a:r>
+              <a:rPr lang="en-GB" dirty="0" err="1">
+                <a:latin typeface="Consolas"/>
+                <a:ea typeface="Consolas"/>
+                <a:cs typeface="Consolas"/>
+                <a:sym typeface="Consolas"/>
+              </a:rPr>
+              <a:t>completar</a:t>
+            </a:r>
+            <a:r>
+              <a:rPr lang="en-GB" dirty="0">
+                <a:latin typeface="Consolas"/>
+                <a:ea typeface="Consolas"/>
+                <a:cs typeface="Consolas"/>
+                <a:sym typeface="Consolas"/>
+              </a:rPr>
+              <a:t> a </a:t>
+            </a:r>
+            <a:r>
+              <a:rPr lang="en-GB" dirty="0" err="1">
+                <a:latin typeface="Consolas"/>
+                <a:ea typeface="Consolas"/>
+                <a:cs typeface="Consolas"/>
+                <a:sym typeface="Consolas"/>
+              </a:rPr>
+              <a:t>tarefa</a:t>
+            </a:r>
+            <a:endParaRPr dirty="0">
+              <a:latin typeface="Consolas"/>
+              <a:ea typeface="Consolas"/>
+              <a:cs typeface="Consolas"/>
+              <a:sym typeface="Consolas"/>
+            </a:endParaRPr>
+          </a:p>
+        </p:txBody>
+      </p:sp>
+      <p:sp>
+        <p:nvSpPr>
+          <p:cNvPr id="19" name="Google Shape;121;p16">
+            <a:extLst>
+              <a:ext uri="{FF2B5EF4-FFF2-40B4-BE49-F238E27FC236}">
+                <a16:creationId xmlns:a16="http://schemas.microsoft.com/office/drawing/2014/main" id="{9122DCF9-B5DD-6D06-A08F-60E5F9692EBB}"/>
+              </a:ext>
+            </a:extLst>
+          </p:cNvPr>
+          <p:cNvSpPr/>
+          <p:nvPr/>
+        </p:nvSpPr>
+        <p:spPr>
+          <a:xfrm>
+            <a:off x="15607166" y="4297512"/>
+            <a:ext cx="2410800" cy="905019"/>
+          </a:xfrm>
+          <a:prstGeom prst="roundRect">
+            <a:avLst>
+              <a:gd name="adj" fmla="val 16667"/>
+            </a:avLst>
+          </a:prstGeom>
+          <a:solidFill>
+            <a:srgbClr val="D0E0E3"/>
+          </a:solidFill>
+          <a:ln w="28575" cap="flat" cmpd="sng">
+            <a:solidFill>
+              <a:srgbClr val="134F5C"/>
+            </a:solidFill>
+            <a:prstDash val="solid"/>
+            <a:round/>
+            <a:headEnd type="none" w="sm" len="sm"/>
+            <a:tailEnd type="none" w="sm" len="sm"/>
+          </a:ln>
+        </p:spPr>
+        <p:txBody>
+          <a:bodyPr spcFirstLastPara="1" wrap="square" lIns="91425" tIns="91425" rIns="91425" bIns="91425" anchor="t" anchorCtr="0">
+            <a:noAutofit/>
+          </a:bodyPr>
+          <a:lstStyle/>
+          <a:p>
+            <a:pPr marL="0" lvl="0" indent="0" algn="l" rtl="0">
+              <a:spcBef>
+                <a:spcPts val="0"/>
+              </a:spcBef>
+              <a:spcAft>
+                <a:spcPts val="0"/>
+              </a:spcAft>
+              <a:buNone/>
+            </a:pPr>
+            <a:r>
+              <a:rPr lang="en-GB" dirty="0">
+                <a:latin typeface="Consolas"/>
+                <a:ea typeface="Consolas"/>
+                <a:cs typeface="Consolas"/>
+                <a:sym typeface="Consolas"/>
+              </a:rPr>
+              <a:t>T1: </a:t>
+            </a:r>
+            <a:r>
+              <a:rPr lang="en-GB" dirty="0" err="1">
+                <a:latin typeface="Consolas"/>
+                <a:ea typeface="Consolas"/>
+                <a:cs typeface="Consolas"/>
+                <a:sym typeface="Consolas"/>
+              </a:rPr>
+              <a:t>Identificar</a:t>
+            </a:r>
+            <a:r>
+              <a:rPr lang="en-GB" dirty="0">
+                <a:latin typeface="Consolas"/>
+                <a:ea typeface="Consolas"/>
+                <a:cs typeface="Consolas"/>
+                <a:sym typeface="Consolas"/>
+              </a:rPr>
+              <a:t> </a:t>
+            </a:r>
+            <a:r>
+              <a:rPr lang="en-GB" dirty="0" err="1">
+                <a:latin typeface="Consolas"/>
+                <a:ea typeface="Consolas"/>
+                <a:cs typeface="Consolas"/>
+                <a:sym typeface="Consolas"/>
+              </a:rPr>
+              <a:t>padrões</a:t>
+            </a:r>
+            <a:r>
+              <a:rPr lang="en-GB" dirty="0">
+                <a:latin typeface="Consolas"/>
+                <a:ea typeface="Consolas"/>
+                <a:cs typeface="Consolas"/>
+                <a:sym typeface="Consolas"/>
+              </a:rPr>
+              <a:t> de </a:t>
+            </a:r>
+            <a:r>
+              <a:rPr lang="en-GB" dirty="0" err="1">
+                <a:latin typeface="Consolas"/>
+                <a:ea typeface="Consolas"/>
+                <a:cs typeface="Consolas"/>
+                <a:sym typeface="Consolas"/>
+              </a:rPr>
+              <a:t>desenho</a:t>
+            </a:r>
+            <a:endParaRPr lang="en-GB" dirty="0">
+              <a:latin typeface="Consolas"/>
+              <a:ea typeface="Consolas"/>
+              <a:cs typeface="Consolas"/>
+              <a:sym typeface="Consolas"/>
+            </a:endParaRPr>
+          </a:p>
+          <a:p>
+            <a:pPr marL="0" lvl="0" indent="0" algn="l" rtl="0">
+              <a:spcBef>
+                <a:spcPts val="0"/>
+              </a:spcBef>
+              <a:spcAft>
+                <a:spcPts val="0"/>
+              </a:spcAft>
+              <a:buNone/>
+            </a:pPr>
+            <a:endParaRPr dirty="0">
+              <a:latin typeface="Consolas"/>
+              <a:ea typeface="Consolas"/>
+              <a:cs typeface="Consolas"/>
+              <a:sym typeface="Consolas"/>
+            </a:endParaRPr>
+          </a:p>
+        </p:txBody>
+      </p:sp>
+      <p:sp>
+        <p:nvSpPr>
+          <p:cNvPr id="8" name="Google Shape;92;p15">
+            <a:extLst>
+              <a:ext uri="{FF2B5EF4-FFF2-40B4-BE49-F238E27FC236}">
+                <a16:creationId xmlns:a16="http://schemas.microsoft.com/office/drawing/2014/main" id="{B9DB896B-7CB5-0609-1298-F36A6898D816}"/>
+              </a:ext>
+            </a:extLst>
+          </p:cNvPr>
+          <p:cNvSpPr/>
+          <p:nvPr/>
+        </p:nvSpPr>
+        <p:spPr>
+          <a:xfrm>
+            <a:off x="6443739" y="3457876"/>
+            <a:ext cx="2884105" cy="6418767"/>
+          </a:xfrm>
+          <a:prstGeom prst="roundRect">
+            <a:avLst>
+              <a:gd name="adj" fmla="val 16667"/>
+            </a:avLst>
+          </a:prstGeom>
+          <a:solidFill>
+            <a:srgbClr val="D9EAD3"/>
+          </a:solidFill>
+          <a:ln w="28575" cap="flat" cmpd="sng">
+            <a:solidFill>
+              <a:srgbClr val="274E13"/>
+            </a:solidFill>
+            <a:prstDash val="solid"/>
+            <a:round/>
+            <a:headEnd type="none" w="sm" len="sm"/>
+            <a:tailEnd type="none" w="sm" len="sm"/>
+          </a:ln>
+        </p:spPr>
+        <p:txBody>
+          <a:bodyPr spcFirstLastPara="1" wrap="square" lIns="91425" tIns="91425" rIns="91425" bIns="91425" anchor="t" anchorCtr="0">
+            <a:noAutofit/>
+          </a:bodyPr>
+          <a:lstStyle/>
+          <a:p>
+            <a:pPr lvl="0"/>
+            <a:r>
+              <a:rPr lang="en-GB" dirty="0">
+                <a:latin typeface="Consolas"/>
+                <a:ea typeface="Consolas"/>
+                <a:cs typeface="Consolas"/>
+                <a:sym typeface="Consolas"/>
+              </a:rPr>
+              <a:t>US3: Como </a:t>
+            </a:r>
+            <a:r>
+              <a:rPr lang="en-GB" dirty="0" err="1">
+                <a:latin typeface="Consolas"/>
+                <a:ea typeface="Consolas"/>
+                <a:cs typeface="Consolas"/>
+                <a:sym typeface="Consolas"/>
+              </a:rPr>
+              <a:t>membro</a:t>
+            </a:r>
+            <a:r>
+              <a:rPr lang="en-GB" dirty="0">
+                <a:latin typeface="Consolas"/>
+                <a:ea typeface="Consolas"/>
+                <a:cs typeface="Consolas"/>
+                <a:sym typeface="Consolas"/>
+              </a:rPr>
+              <a:t> da </a:t>
+            </a:r>
+            <a:r>
+              <a:rPr lang="en-GB" dirty="0" err="1">
+                <a:latin typeface="Consolas"/>
+                <a:ea typeface="Consolas"/>
+                <a:cs typeface="Consolas"/>
+                <a:sym typeface="Consolas"/>
+              </a:rPr>
+              <a:t>equipa</a:t>
+            </a:r>
+            <a:r>
+              <a:rPr lang="en-GB" dirty="0">
+                <a:latin typeface="Consolas"/>
+                <a:ea typeface="Consolas"/>
+                <a:cs typeface="Consolas"/>
+                <a:sym typeface="Consolas"/>
+              </a:rPr>
+              <a:t> </a:t>
+            </a:r>
+            <a:r>
+              <a:rPr lang="en-GB" dirty="0" err="1">
+                <a:latin typeface="Consolas"/>
+                <a:ea typeface="Consolas"/>
+                <a:cs typeface="Consolas"/>
+                <a:sym typeface="Consolas"/>
+              </a:rPr>
+              <a:t>quero</a:t>
+            </a:r>
+            <a:r>
+              <a:rPr lang="en-GB" dirty="0">
+                <a:latin typeface="Consolas"/>
+                <a:ea typeface="Consolas"/>
+                <a:cs typeface="Consolas"/>
+                <a:sym typeface="Consolas"/>
+              </a:rPr>
+              <a:t> </a:t>
+            </a:r>
+            <a:r>
+              <a:rPr lang="en-GB" dirty="0" err="1">
+                <a:latin typeface="Consolas"/>
+                <a:ea typeface="Consolas"/>
+                <a:cs typeface="Consolas"/>
+                <a:sym typeface="Consolas"/>
+              </a:rPr>
+              <a:t>identificar</a:t>
+            </a:r>
+            <a:r>
+              <a:rPr lang="en-GB" dirty="0">
+                <a:latin typeface="Consolas"/>
+                <a:ea typeface="Consolas"/>
+                <a:cs typeface="Consolas"/>
+                <a:sym typeface="Consolas"/>
+              </a:rPr>
+              <a:t> “</a:t>
+            </a:r>
+            <a:r>
+              <a:rPr lang="en-GB" dirty="0" err="1">
+                <a:latin typeface="Consolas"/>
+                <a:ea typeface="Consolas"/>
+                <a:cs typeface="Consolas"/>
+                <a:sym typeface="Consolas"/>
+              </a:rPr>
+              <a:t>CodeMetrics</a:t>
+            </a:r>
+            <a:r>
+              <a:rPr lang="en-GB" dirty="0">
+                <a:latin typeface="Consolas"/>
+                <a:ea typeface="Consolas"/>
+                <a:cs typeface="Consolas"/>
+                <a:sym typeface="Consolas"/>
+              </a:rPr>
+              <a:t>” para </a:t>
+            </a:r>
+            <a:r>
+              <a:rPr lang="en-GB" dirty="0" err="1">
+                <a:latin typeface="Consolas"/>
+                <a:ea typeface="Consolas"/>
+                <a:cs typeface="Consolas"/>
+                <a:sym typeface="Consolas"/>
+              </a:rPr>
+              <a:t>terminar</a:t>
+            </a:r>
+            <a:r>
+              <a:rPr lang="en-GB" dirty="0">
+                <a:latin typeface="Consolas"/>
+                <a:ea typeface="Consolas"/>
+                <a:cs typeface="Consolas"/>
+                <a:sym typeface="Consolas"/>
+              </a:rPr>
+              <a:t> a </a:t>
+            </a:r>
+            <a:r>
+              <a:rPr lang="en-GB" dirty="0" err="1">
+                <a:latin typeface="Consolas"/>
+                <a:ea typeface="Consolas"/>
+                <a:cs typeface="Consolas"/>
+                <a:sym typeface="Consolas"/>
+              </a:rPr>
+              <a:t>tarefa</a:t>
+            </a:r>
+            <a:endParaRPr lang="en-GB" dirty="0">
+              <a:latin typeface="Consolas"/>
+              <a:ea typeface="Consolas"/>
+              <a:cs typeface="Consolas"/>
+              <a:sym typeface="Consolas"/>
+            </a:endParaRPr>
+          </a:p>
+          <a:p>
+            <a:pPr marL="0" lvl="0" indent="0" algn="l" rtl="0">
+              <a:spcBef>
+                <a:spcPts val="0"/>
+              </a:spcBef>
+              <a:spcAft>
+                <a:spcPts val="0"/>
+              </a:spcAft>
+              <a:buNone/>
+            </a:pPr>
+            <a:r>
+              <a:rPr lang="en-GB" dirty="0">
+                <a:latin typeface="Consolas"/>
+                <a:ea typeface="Consolas"/>
+                <a:cs typeface="Consolas"/>
+                <a:sym typeface="Consolas"/>
+              </a:rPr>
+              <a:t> </a:t>
+            </a:r>
+            <a:endParaRPr dirty="0">
+              <a:latin typeface="Consolas"/>
+              <a:ea typeface="Consolas"/>
+              <a:cs typeface="Consolas"/>
+              <a:sym typeface="Consolas"/>
+            </a:endParaRPr>
+          </a:p>
+        </p:txBody>
+      </p:sp>
+      <p:sp>
+        <p:nvSpPr>
+          <p:cNvPr id="9" name="Google Shape;92;p15">
+            <a:extLst>
+              <a:ext uri="{FF2B5EF4-FFF2-40B4-BE49-F238E27FC236}">
+                <a16:creationId xmlns:a16="http://schemas.microsoft.com/office/drawing/2014/main" id="{B30C688A-1011-C4B7-A86C-D04A0EE21186}"/>
+              </a:ext>
+            </a:extLst>
+          </p:cNvPr>
+          <p:cNvSpPr/>
+          <p:nvPr/>
+        </p:nvSpPr>
+        <p:spPr>
+          <a:xfrm>
+            <a:off x="6622614" y="4777838"/>
+            <a:ext cx="2884105" cy="5098804"/>
+          </a:xfrm>
+          <a:prstGeom prst="roundRect">
+            <a:avLst>
+              <a:gd name="adj" fmla="val 16667"/>
+            </a:avLst>
+          </a:prstGeom>
+          <a:solidFill>
+            <a:srgbClr val="D9EAD3"/>
+          </a:solidFill>
+          <a:ln w="28575" cap="flat" cmpd="sng">
+            <a:solidFill>
+              <a:srgbClr val="274E13"/>
+            </a:solidFill>
+            <a:prstDash val="solid"/>
+            <a:round/>
+            <a:headEnd type="none" w="sm" len="sm"/>
+            <a:tailEnd type="none" w="sm" len="sm"/>
+          </a:ln>
+        </p:spPr>
+        <p:txBody>
+          <a:bodyPr spcFirstLastPara="1" wrap="square" lIns="91425" tIns="91425" rIns="91425" bIns="91425" anchor="t" anchorCtr="0">
+            <a:noAutofit/>
+          </a:bodyPr>
+          <a:lstStyle/>
+          <a:p>
+            <a:pPr lvl="0"/>
+            <a:r>
+              <a:rPr lang="en-GB" dirty="0">
+                <a:latin typeface="Consolas"/>
+                <a:ea typeface="Consolas"/>
+                <a:cs typeface="Consolas"/>
+                <a:sym typeface="Consolas"/>
+              </a:rPr>
+              <a:t>US4: Como </a:t>
+            </a:r>
+            <a:r>
+              <a:rPr lang="en-GB" dirty="0" err="1">
+                <a:latin typeface="Consolas"/>
+                <a:ea typeface="Consolas"/>
+                <a:cs typeface="Consolas"/>
+                <a:sym typeface="Consolas"/>
+              </a:rPr>
+              <a:t>membro</a:t>
+            </a:r>
+            <a:r>
+              <a:rPr lang="en-GB" dirty="0">
+                <a:latin typeface="Consolas"/>
+                <a:ea typeface="Consolas"/>
+                <a:cs typeface="Consolas"/>
+                <a:sym typeface="Consolas"/>
+              </a:rPr>
+              <a:t> da </a:t>
+            </a:r>
+            <a:r>
+              <a:rPr lang="en-GB" dirty="0" err="1">
+                <a:latin typeface="Consolas"/>
+                <a:ea typeface="Consolas"/>
+                <a:cs typeface="Consolas"/>
+                <a:sym typeface="Consolas"/>
+              </a:rPr>
+              <a:t>equipa</a:t>
+            </a:r>
+            <a:r>
+              <a:rPr lang="en-GB" dirty="0">
+                <a:latin typeface="Consolas"/>
+                <a:ea typeface="Consolas"/>
+                <a:cs typeface="Consolas"/>
+                <a:sym typeface="Consolas"/>
+              </a:rPr>
+              <a:t> </a:t>
+            </a:r>
+            <a:r>
+              <a:rPr lang="en-GB" dirty="0" err="1">
+                <a:latin typeface="Consolas"/>
+                <a:ea typeface="Consolas"/>
+                <a:cs typeface="Consolas"/>
+                <a:sym typeface="Consolas"/>
+              </a:rPr>
+              <a:t>quero</a:t>
+            </a:r>
+            <a:r>
+              <a:rPr lang="en-GB" dirty="0">
+                <a:latin typeface="Consolas"/>
+                <a:ea typeface="Consolas"/>
+                <a:cs typeface="Consolas"/>
+                <a:sym typeface="Consolas"/>
+              </a:rPr>
+              <a:t> </a:t>
+            </a:r>
+            <a:r>
+              <a:rPr lang="en-GB" dirty="0" err="1">
+                <a:latin typeface="Consolas"/>
+                <a:ea typeface="Consolas"/>
+                <a:cs typeface="Consolas"/>
+                <a:sym typeface="Consolas"/>
+              </a:rPr>
+              <a:t>fazer</a:t>
+            </a:r>
+            <a:r>
+              <a:rPr lang="en-GB" dirty="0">
+                <a:latin typeface="Consolas"/>
+                <a:ea typeface="Consolas"/>
+                <a:cs typeface="Consolas"/>
+                <a:sym typeface="Consolas"/>
+              </a:rPr>
+              <a:t> as “</a:t>
+            </a:r>
+            <a:r>
+              <a:rPr lang="en-GB" dirty="0" err="1">
+                <a:latin typeface="Consolas"/>
+                <a:ea typeface="Consolas"/>
+                <a:cs typeface="Consolas"/>
+                <a:sym typeface="Consolas"/>
+              </a:rPr>
+              <a:t>UseCases</a:t>
+            </a:r>
+            <a:r>
+              <a:rPr lang="en-GB" dirty="0">
+                <a:latin typeface="Consolas"/>
+                <a:ea typeface="Consolas"/>
+                <a:cs typeface="Consolas"/>
+                <a:sym typeface="Consolas"/>
+              </a:rPr>
+              <a:t>” para </a:t>
+            </a:r>
+            <a:r>
+              <a:rPr lang="en-GB" dirty="0" err="1">
+                <a:latin typeface="Consolas"/>
+                <a:ea typeface="Consolas"/>
+                <a:cs typeface="Consolas"/>
+                <a:sym typeface="Consolas"/>
+              </a:rPr>
+              <a:t>terminar</a:t>
+            </a:r>
+            <a:r>
+              <a:rPr lang="en-GB" dirty="0">
+                <a:latin typeface="Consolas"/>
+                <a:ea typeface="Consolas"/>
+                <a:cs typeface="Consolas"/>
+                <a:sym typeface="Consolas"/>
+              </a:rPr>
+              <a:t> a </a:t>
+            </a:r>
+            <a:r>
+              <a:rPr lang="en-GB" dirty="0" err="1">
+                <a:latin typeface="Consolas"/>
+                <a:ea typeface="Consolas"/>
+                <a:cs typeface="Consolas"/>
+                <a:sym typeface="Consolas"/>
+              </a:rPr>
+              <a:t>tarefa</a:t>
+            </a:r>
+            <a:endParaRPr lang="en-GB" dirty="0">
+              <a:latin typeface="Consolas"/>
+              <a:ea typeface="Consolas"/>
+              <a:cs typeface="Consolas"/>
+              <a:sym typeface="Consolas"/>
+            </a:endParaRPr>
+          </a:p>
+          <a:p>
+            <a:pPr marL="0" lvl="0" indent="0" algn="l" rtl="0">
+              <a:spcBef>
+                <a:spcPts val="0"/>
+              </a:spcBef>
+              <a:spcAft>
+                <a:spcPts val="0"/>
+              </a:spcAft>
+              <a:buNone/>
+            </a:pPr>
+            <a:r>
+              <a:rPr lang="en-GB" dirty="0">
+                <a:latin typeface="Consolas"/>
+                <a:ea typeface="Consolas"/>
+                <a:cs typeface="Consolas"/>
+                <a:sym typeface="Consolas"/>
+              </a:rPr>
+              <a:t> </a:t>
+            </a:r>
+            <a:endParaRPr dirty="0">
+              <a:latin typeface="Consolas"/>
+              <a:ea typeface="Consolas"/>
+              <a:cs typeface="Consolas"/>
+              <a:sym typeface="Consolas"/>
+            </a:endParaRPr>
+          </a:p>
+        </p:txBody>
+      </p:sp>
+      <p:sp>
+        <p:nvSpPr>
+          <p:cNvPr id="22" name="Google Shape;121;p16">
+            <a:extLst>
+              <a:ext uri="{FF2B5EF4-FFF2-40B4-BE49-F238E27FC236}">
+                <a16:creationId xmlns:a16="http://schemas.microsoft.com/office/drawing/2014/main" id="{28D15982-7395-B550-BD38-DA8501FEE0F9}"/>
+              </a:ext>
+            </a:extLst>
+          </p:cNvPr>
+          <p:cNvSpPr/>
+          <p:nvPr/>
+        </p:nvSpPr>
+        <p:spPr>
+          <a:xfrm>
+            <a:off x="15607166" y="2657955"/>
+            <a:ext cx="2410800" cy="905019"/>
+          </a:xfrm>
+          <a:prstGeom prst="roundRect">
+            <a:avLst>
+              <a:gd name="adj" fmla="val 16667"/>
+            </a:avLst>
+          </a:prstGeom>
+          <a:solidFill>
+            <a:srgbClr val="D0E0E3"/>
+          </a:solidFill>
+          <a:ln w="28575" cap="flat" cmpd="sng">
+            <a:solidFill>
+              <a:srgbClr val="134F5C"/>
+            </a:solidFill>
+            <a:prstDash val="solid"/>
+            <a:round/>
+            <a:headEnd type="none" w="sm" len="sm"/>
+            <a:tailEnd type="none" w="sm" len="sm"/>
+          </a:ln>
+        </p:spPr>
+        <p:txBody>
+          <a:bodyPr spcFirstLastPara="1" wrap="square" lIns="91425" tIns="91425" rIns="91425" bIns="91425" anchor="t" anchorCtr="0">
+            <a:noAutofit/>
+          </a:bodyPr>
+          <a:lstStyle/>
+          <a:p>
+            <a:pPr marL="0" lvl="0" indent="0" algn="l" rtl="0">
+              <a:spcBef>
+                <a:spcPts val="0"/>
+              </a:spcBef>
+              <a:spcAft>
+                <a:spcPts val="0"/>
+              </a:spcAft>
+              <a:buNone/>
+            </a:pPr>
+            <a:r>
+              <a:rPr lang="en-GB" dirty="0">
+                <a:latin typeface="Consolas"/>
+                <a:ea typeface="Consolas"/>
+                <a:cs typeface="Consolas"/>
+                <a:sym typeface="Consolas"/>
+              </a:rPr>
+              <a:t>T1: </a:t>
+            </a:r>
+            <a:r>
+              <a:rPr lang="en-GB" dirty="0" err="1">
+                <a:latin typeface="Consolas"/>
+                <a:ea typeface="Consolas"/>
+                <a:cs typeface="Consolas"/>
+                <a:sym typeface="Consolas"/>
+              </a:rPr>
+              <a:t>Identificar</a:t>
+            </a:r>
+            <a:r>
+              <a:rPr lang="en-GB" dirty="0">
+                <a:latin typeface="Consolas"/>
+                <a:ea typeface="Consolas"/>
+                <a:cs typeface="Consolas"/>
+                <a:sym typeface="Consolas"/>
+              </a:rPr>
+              <a:t> </a:t>
+            </a:r>
+            <a:r>
+              <a:rPr lang="en-GB" dirty="0" err="1">
+                <a:latin typeface="Consolas"/>
+                <a:ea typeface="Consolas"/>
+                <a:cs typeface="Consolas"/>
+                <a:sym typeface="Consolas"/>
+              </a:rPr>
+              <a:t>padrões</a:t>
+            </a:r>
+            <a:r>
+              <a:rPr lang="en-GB" dirty="0">
+                <a:latin typeface="Consolas"/>
+                <a:ea typeface="Consolas"/>
+                <a:cs typeface="Consolas"/>
+                <a:sym typeface="Consolas"/>
+              </a:rPr>
+              <a:t> de </a:t>
+            </a:r>
+            <a:r>
+              <a:rPr lang="en-GB" dirty="0" err="1">
+                <a:latin typeface="Consolas"/>
+                <a:ea typeface="Consolas"/>
+                <a:cs typeface="Consolas"/>
+                <a:sym typeface="Consolas"/>
+              </a:rPr>
+              <a:t>desenho</a:t>
+            </a:r>
+            <a:endParaRPr lang="en-GB" dirty="0">
+              <a:latin typeface="Consolas"/>
+              <a:ea typeface="Consolas"/>
+              <a:cs typeface="Consolas"/>
+              <a:sym typeface="Consolas"/>
+            </a:endParaRPr>
+          </a:p>
+          <a:p>
+            <a:pPr marL="0" lvl="0" indent="0" algn="l" rtl="0">
+              <a:spcBef>
+                <a:spcPts val="0"/>
+              </a:spcBef>
+              <a:spcAft>
+                <a:spcPts val="0"/>
+              </a:spcAft>
+              <a:buNone/>
+            </a:pPr>
+            <a:endParaRPr dirty="0">
+              <a:latin typeface="Consolas"/>
+              <a:ea typeface="Consolas"/>
+              <a:cs typeface="Consolas"/>
+              <a:sym typeface="Consolas"/>
+            </a:endParaRPr>
+          </a:p>
+        </p:txBody>
+      </p:sp>
+      <p:sp>
+        <p:nvSpPr>
+          <p:cNvPr id="23" name="Google Shape;121;p16">
+            <a:extLst>
+              <a:ext uri="{FF2B5EF4-FFF2-40B4-BE49-F238E27FC236}">
+                <a16:creationId xmlns:a16="http://schemas.microsoft.com/office/drawing/2014/main" id="{BB304D12-8B85-73EF-EBB9-8B924D93B6C1}"/>
+              </a:ext>
+            </a:extLst>
+          </p:cNvPr>
+          <p:cNvSpPr/>
+          <p:nvPr/>
+        </p:nvSpPr>
+        <p:spPr>
+          <a:xfrm>
+            <a:off x="15532407" y="968150"/>
+            <a:ext cx="2410800" cy="905019"/>
+          </a:xfrm>
+          <a:prstGeom prst="roundRect">
+            <a:avLst>
+              <a:gd name="adj" fmla="val 16667"/>
+            </a:avLst>
+          </a:prstGeom>
+          <a:solidFill>
+            <a:srgbClr val="D0E0E3"/>
+          </a:solidFill>
+          <a:ln w="28575" cap="flat" cmpd="sng">
+            <a:solidFill>
+              <a:srgbClr val="134F5C"/>
+            </a:solidFill>
+            <a:prstDash val="solid"/>
+            <a:round/>
+            <a:headEnd type="none" w="sm" len="sm"/>
+            <a:tailEnd type="none" w="sm" len="sm"/>
+          </a:ln>
+        </p:spPr>
+        <p:txBody>
+          <a:bodyPr spcFirstLastPara="1" wrap="square" lIns="91425" tIns="91425" rIns="91425" bIns="91425" anchor="t" anchorCtr="0">
+            <a:noAutofit/>
+          </a:bodyPr>
+          <a:lstStyle/>
+          <a:p>
+            <a:pPr marL="0" lvl="0" indent="0" algn="l" rtl="0">
+              <a:spcBef>
+                <a:spcPts val="0"/>
+              </a:spcBef>
+              <a:spcAft>
+                <a:spcPts val="0"/>
+              </a:spcAft>
+              <a:buNone/>
+            </a:pPr>
+            <a:r>
+              <a:rPr lang="en-GB" dirty="0">
+                <a:latin typeface="Consolas"/>
+                <a:ea typeface="Consolas"/>
+                <a:cs typeface="Consolas"/>
+                <a:sym typeface="Consolas"/>
+              </a:rPr>
+              <a:t>T1: </a:t>
+            </a:r>
+            <a:r>
+              <a:rPr lang="en-GB" dirty="0" err="1">
+                <a:latin typeface="Consolas"/>
+                <a:ea typeface="Consolas"/>
+                <a:cs typeface="Consolas"/>
+                <a:sym typeface="Consolas"/>
+              </a:rPr>
+              <a:t>Identificar</a:t>
+            </a:r>
+            <a:r>
+              <a:rPr lang="en-GB" dirty="0">
+                <a:latin typeface="Consolas"/>
+                <a:ea typeface="Consolas"/>
+                <a:cs typeface="Consolas"/>
+                <a:sym typeface="Consolas"/>
+              </a:rPr>
+              <a:t> </a:t>
+            </a:r>
+            <a:r>
+              <a:rPr lang="en-GB" dirty="0" err="1">
+                <a:latin typeface="Consolas"/>
+                <a:ea typeface="Consolas"/>
+                <a:cs typeface="Consolas"/>
+                <a:sym typeface="Consolas"/>
+              </a:rPr>
+              <a:t>padrões</a:t>
+            </a:r>
+            <a:r>
+              <a:rPr lang="en-GB" dirty="0">
+                <a:latin typeface="Consolas"/>
+                <a:ea typeface="Consolas"/>
+                <a:cs typeface="Consolas"/>
+                <a:sym typeface="Consolas"/>
+              </a:rPr>
+              <a:t> de </a:t>
+            </a:r>
+            <a:r>
+              <a:rPr lang="en-GB" dirty="0" err="1">
+                <a:latin typeface="Consolas"/>
+                <a:ea typeface="Consolas"/>
+                <a:cs typeface="Consolas"/>
+                <a:sym typeface="Consolas"/>
+              </a:rPr>
+              <a:t>desenho</a:t>
+            </a:r>
+            <a:endParaRPr lang="en-GB" dirty="0">
+              <a:latin typeface="Consolas"/>
+              <a:ea typeface="Consolas"/>
+              <a:cs typeface="Consolas"/>
+              <a:sym typeface="Consolas"/>
+            </a:endParaRPr>
+          </a:p>
+          <a:p>
+            <a:pPr marL="0" lvl="0" indent="0" algn="l" rtl="0">
+              <a:spcBef>
+                <a:spcPts val="0"/>
+              </a:spcBef>
+              <a:spcAft>
+                <a:spcPts val="0"/>
+              </a:spcAft>
+              <a:buNone/>
+            </a:pPr>
+            <a:endParaRPr dirty="0">
+              <a:latin typeface="Consolas"/>
+              <a:ea typeface="Consolas"/>
+              <a:cs typeface="Consolas"/>
+              <a:sym typeface="Consolas"/>
+            </a:endParaRPr>
+          </a:p>
+        </p:txBody>
+      </p:sp>
+      <p:sp>
+        <p:nvSpPr>
+          <p:cNvPr id="24" name="Google Shape;121;p16">
+            <a:extLst>
+              <a:ext uri="{FF2B5EF4-FFF2-40B4-BE49-F238E27FC236}">
+                <a16:creationId xmlns:a16="http://schemas.microsoft.com/office/drawing/2014/main" id="{FB7D3E3E-613D-EC3A-2E84-B0A17FD56948}"/>
+              </a:ext>
+            </a:extLst>
+          </p:cNvPr>
+          <p:cNvSpPr/>
+          <p:nvPr/>
+        </p:nvSpPr>
+        <p:spPr>
+          <a:xfrm>
+            <a:off x="15607166" y="7480290"/>
+            <a:ext cx="2410800" cy="905019"/>
+          </a:xfrm>
+          <a:prstGeom prst="roundRect">
+            <a:avLst>
+              <a:gd name="adj" fmla="val 16667"/>
+            </a:avLst>
+          </a:prstGeom>
+          <a:solidFill>
+            <a:srgbClr val="D0E0E3"/>
+          </a:solidFill>
+          <a:ln w="28575" cap="flat" cmpd="sng">
+            <a:solidFill>
+              <a:srgbClr val="134F5C"/>
+            </a:solidFill>
+            <a:prstDash val="solid"/>
+            <a:round/>
+            <a:headEnd type="none" w="sm" len="sm"/>
+            <a:tailEnd type="none" w="sm" len="sm"/>
+          </a:ln>
+        </p:spPr>
+        <p:txBody>
+          <a:bodyPr spcFirstLastPara="1" wrap="square" lIns="91425" tIns="91425" rIns="91425" bIns="91425" anchor="t" anchorCtr="0">
+            <a:noAutofit/>
+          </a:bodyPr>
+          <a:lstStyle/>
+          <a:p>
+            <a:pPr marL="0" lvl="0" indent="0" algn="l" rtl="0">
+              <a:spcBef>
+                <a:spcPts val="0"/>
+              </a:spcBef>
+              <a:spcAft>
+                <a:spcPts val="0"/>
+              </a:spcAft>
+              <a:buNone/>
+            </a:pPr>
+            <a:r>
+              <a:rPr lang="en-GB" dirty="0">
+                <a:latin typeface="Consolas"/>
+                <a:ea typeface="Consolas"/>
+                <a:cs typeface="Consolas"/>
+                <a:sym typeface="Consolas"/>
+              </a:rPr>
+              <a:t>T1: </a:t>
+            </a:r>
+            <a:r>
+              <a:rPr lang="en-GB" dirty="0" err="1">
+                <a:latin typeface="Consolas"/>
+                <a:ea typeface="Consolas"/>
+                <a:cs typeface="Consolas"/>
+                <a:sym typeface="Consolas"/>
+              </a:rPr>
+              <a:t>Identificar</a:t>
+            </a:r>
+            <a:r>
+              <a:rPr lang="en-GB" dirty="0">
+                <a:latin typeface="Consolas"/>
+                <a:ea typeface="Consolas"/>
+                <a:cs typeface="Consolas"/>
+                <a:sym typeface="Consolas"/>
+              </a:rPr>
+              <a:t> </a:t>
+            </a:r>
+            <a:r>
+              <a:rPr lang="en-GB" dirty="0" err="1">
+                <a:latin typeface="Consolas"/>
+                <a:ea typeface="Consolas"/>
+                <a:cs typeface="Consolas"/>
+                <a:sym typeface="Consolas"/>
+              </a:rPr>
+              <a:t>padrões</a:t>
+            </a:r>
+            <a:r>
+              <a:rPr lang="en-GB" dirty="0">
+                <a:latin typeface="Consolas"/>
+                <a:ea typeface="Consolas"/>
+                <a:cs typeface="Consolas"/>
+                <a:sym typeface="Consolas"/>
+              </a:rPr>
+              <a:t> de </a:t>
+            </a:r>
+            <a:r>
+              <a:rPr lang="en-GB" dirty="0" err="1">
+                <a:latin typeface="Consolas"/>
+                <a:ea typeface="Consolas"/>
+                <a:cs typeface="Consolas"/>
+                <a:sym typeface="Consolas"/>
+              </a:rPr>
+              <a:t>desenho</a:t>
+            </a:r>
+            <a:endParaRPr lang="en-GB" dirty="0">
+              <a:latin typeface="Consolas"/>
+              <a:ea typeface="Consolas"/>
+              <a:cs typeface="Consolas"/>
+              <a:sym typeface="Consolas"/>
+            </a:endParaRPr>
+          </a:p>
+          <a:p>
+            <a:pPr marL="0" lvl="0" indent="0" algn="l" rtl="0">
+              <a:spcBef>
+                <a:spcPts val="0"/>
+              </a:spcBef>
+              <a:spcAft>
+                <a:spcPts val="0"/>
+              </a:spcAft>
+              <a:buNone/>
+            </a:pPr>
+            <a:endParaRPr dirty="0">
+              <a:latin typeface="Consolas"/>
+              <a:ea typeface="Consolas"/>
+              <a:cs typeface="Consolas"/>
+              <a:sym typeface="Consolas"/>
+            </a:endParaRPr>
+          </a:p>
+        </p:txBody>
+      </p:sp>
+      <p:sp>
+        <p:nvSpPr>
+          <p:cNvPr id="25" name="Google Shape;121;p16">
+            <a:extLst>
+              <a:ext uri="{FF2B5EF4-FFF2-40B4-BE49-F238E27FC236}">
+                <a16:creationId xmlns:a16="http://schemas.microsoft.com/office/drawing/2014/main" id="{D1E81CC8-A85D-4C03-876F-10BA27A076F0}"/>
+              </a:ext>
+            </a:extLst>
+          </p:cNvPr>
+          <p:cNvSpPr/>
+          <p:nvPr/>
+        </p:nvSpPr>
+        <p:spPr>
+          <a:xfrm>
+            <a:off x="12395940" y="5898068"/>
+            <a:ext cx="2410800" cy="905019"/>
+          </a:xfrm>
+          <a:prstGeom prst="roundRect">
+            <a:avLst>
+              <a:gd name="adj" fmla="val 16667"/>
+            </a:avLst>
+          </a:prstGeom>
+          <a:solidFill>
+            <a:srgbClr val="D0E0E3"/>
+          </a:solidFill>
+          <a:ln w="28575" cap="flat" cmpd="sng">
+            <a:solidFill>
+              <a:srgbClr val="134F5C"/>
+            </a:solidFill>
+            <a:prstDash val="solid"/>
+            <a:round/>
+            <a:headEnd type="none" w="sm" len="sm"/>
+            <a:tailEnd type="none" w="sm" len="sm"/>
+          </a:ln>
+        </p:spPr>
+        <p:txBody>
+          <a:bodyPr spcFirstLastPara="1" wrap="square" lIns="91425" tIns="91425" rIns="91425" bIns="91425" anchor="t" anchorCtr="0">
+            <a:noAutofit/>
+          </a:bodyPr>
+          <a:lstStyle/>
+          <a:p>
+            <a:pPr marL="0" lvl="0" indent="0" algn="l" rtl="0">
+              <a:spcBef>
+                <a:spcPts val="0"/>
+              </a:spcBef>
+              <a:spcAft>
+                <a:spcPts val="0"/>
+              </a:spcAft>
+              <a:buNone/>
+            </a:pPr>
+            <a:r>
+              <a:rPr lang="en-GB" dirty="0">
+                <a:latin typeface="Consolas"/>
+                <a:ea typeface="Consolas"/>
+                <a:cs typeface="Consolas"/>
+                <a:sym typeface="Consolas"/>
+              </a:rPr>
+              <a:t>T1: </a:t>
+            </a:r>
+            <a:r>
+              <a:rPr lang="en-GB" dirty="0" err="1">
+                <a:latin typeface="Consolas"/>
+                <a:ea typeface="Consolas"/>
+                <a:cs typeface="Consolas"/>
+                <a:sym typeface="Consolas"/>
+              </a:rPr>
+              <a:t>Identificar</a:t>
+            </a:r>
+            <a:r>
+              <a:rPr lang="en-GB" dirty="0">
+                <a:latin typeface="Consolas"/>
+                <a:ea typeface="Consolas"/>
+                <a:cs typeface="Consolas"/>
+                <a:sym typeface="Consolas"/>
+              </a:rPr>
+              <a:t> </a:t>
+            </a:r>
+            <a:r>
+              <a:rPr lang="en-GB" dirty="0" err="1">
+                <a:latin typeface="Consolas"/>
+                <a:ea typeface="Consolas"/>
+                <a:cs typeface="Consolas"/>
+                <a:sym typeface="Consolas"/>
+              </a:rPr>
+              <a:t>padrões</a:t>
+            </a:r>
+            <a:r>
+              <a:rPr lang="en-GB" dirty="0">
+                <a:latin typeface="Consolas"/>
+                <a:ea typeface="Consolas"/>
+                <a:cs typeface="Consolas"/>
+                <a:sym typeface="Consolas"/>
+              </a:rPr>
+              <a:t> de </a:t>
+            </a:r>
+            <a:r>
+              <a:rPr lang="en-GB" dirty="0" err="1">
+                <a:latin typeface="Consolas"/>
+                <a:ea typeface="Consolas"/>
+                <a:cs typeface="Consolas"/>
+                <a:sym typeface="Consolas"/>
+              </a:rPr>
+              <a:t>desenho</a:t>
+            </a:r>
+            <a:endParaRPr lang="en-GB" dirty="0">
+              <a:latin typeface="Consolas"/>
+              <a:ea typeface="Consolas"/>
+              <a:cs typeface="Consolas"/>
+              <a:sym typeface="Consolas"/>
+            </a:endParaRPr>
+          </a:p>
+          <a:p>
+            <a:pPr marL="0" lvl="0" indent="0" algn="l" rtl="0">
+              <a:spcBef>
+                <a:spcPts val="0"/>
+              </a:spcBef>
+              <a:spcAft>
+                <a:spcPts val="0"/>
+              </a:spcAft>
+              <a:buNone/>
+            </a:pPr>
+            <a:endParaRPr dirty="0">
+              <a:latin typeface="Consolas"/>
+              <a:ea typeface="Consolas"/>
+              <a:cs typeface="Consolas"/>
+              <a:sym typeface="Consolas"/>
+            </a:endParaRPr>
+          </a:p>
+        </p:txBody>
+      </p:sp>
+      <p:sp>
+        <p:nvSpPr>
+          <p:cNvPr id="26" name="Google Shape;121;p16">
+            <a:extLst>
+              <a:ext uri="{FF2B5EF4-FFF2-40B4-BE49-F238E27FC236}">
+                <a16:creationId xmlns:a16="http://schemas.microsoft.com/office/drawing/2014/main" id="{6D6DB528-7FA3-332E-8C77-B250832D0184}"/>
+              </a:ext>
+            </a:extLst>
+          </p:cNvPr>
+          <p:cNvSpPr/>
+          <p:nvPr/>
+        </p:nvSpPr>
+        <p:spPr>
+          <a:xfrm>
+            <a:off x="12423686" y="9023737"/>
+            <a:ext cx="2410800" cy="905019"/>
+          </a:xfrm>
+          <a:prstGeom prst="roundRect">
+            <a:avLst>
+              <a:gd name="adj" fmla="val 16667"/>
+            </a:avLst>
+          </a:prstGeom>
+          <a:solidFill>
+            <a:srgbClr val="D0E0E3"/>
+          </a:solidFill>
+          <a:ln w="28575" cap="flat" cmpd="sng">
+            <a:solidFill>
+              <a:srgbClr val="134F5C"/>
+            </a:solidFill>
+            <a:prstDash val="solid"/>
+            <a:round/>
+            <a:headEnd type="none" w="sm" len="sm"/>
+            <a:tailEnd type="none" w="sm" len="sm"/>
+          </a:ln>
+        </p:spPr>
+        <p:txBody>
+          <a:bodyPr spcFirstLastPara="1" wrap="square" lIns="91425" tIns="91425" rIns="91425" bIns="91425" anchor="t" anchorCtr="0">
+            <a:noAutofit/>
+          </a:bodyPr>
+          <a:lstStyle/>
+          <a:p>
+            <a:pPr marL="0" lvl="0" indent="0" algn="l" rtl="0">
+              <a:spcBef>
+                <a:spcPts val="0"/>
+              </a:spcBef>
+              <a:spcAft>
+                <a:spcPts val="0"/>
+              </a:spcAft>
+              <a:buNone/>
+            </a:pPr>
+            <a:r>
+              <a:rPr lang="en-GB" dirty="0">
+                <a:latin typeface="Consolas"/>
+                <a:ea typeface="Consolas"/>
+                <a:cs typeface="Consolas"/>
+                <a:sym typeface="Consolas"/>
+              </a:rPr>
+              <a:t>T1: </a:t>
+            </a:r>
+            <a:r>
+              <a:rPr lang="en-GB" dirty="0" err="1">
+                <a:latin typeface="Consolas"/>
+                <a:ea typeface="Consolas"/>
+                <a:cs typeface="Consolas"/>
+                <a:sym typeface="Consolas"/>
+              </a:rPr>
+              <a:t>Identificar</a:t>
+            </a:r>
+            <a:r>
+              <a:rPr lang="en-GB" dirty="0">
+                <a:latin typeface="Consolas"/>
+                <a:ea typeface="Consolas"/>
+                <a:cs typeface="Consolas"/>
+                <a:sym typeface="Consolas"/>
+              </a:rPr>
+              <a:t> </a:t>
+            </a:r>
+            <a:r>
+              <a:rPr lang="en-GB" dirty="0" err="1">
+                <a:latin typeface="Consolas"/>
+                <a:ea typeface="Consolas"/>
+                <a:cs typeface="Consolas"/>
+                <a:sym typeface="Consolas"/>
+              </a:rPr>
+              <a:t>padrões</a:t>
+            </a:r>
+            <a:r>
+              <a:rPr lang="en-GB" dirty="0">
+                <a:latin typeface="Consolas"/>
+                <a:ea typeface="Consolas"/>
+                <a:cs typeface="Consolas"/>
+                <a:sym typeface="Consolas"/>
+              </a:rPr>
+              <a:t> de </a:t>
+            </a:r>
+            <a:r>
+              <a:rPr lang="en-GB" dirty="0" err="1">
+                <a:latin typeface="Consolas"/>
+                <a:ea typeface="Consolas"/>
+                <a:cs typeface="Consolas"/>
+                <a:sym typeface="Consolas"/>
+              </a:rPr>
+              <a:t>desenho</a:t>
+            </a:r>
+            <a:endParaRPr lang="en-GB" dirty="0">
+              <a:latin typeface="Consolas"/>
+              <a:ea typeface="Consolas"/>
+              <a:cs typeface="Consolas"/>
+              <a:sym typeface="Consolas"/>
+            </a:endParaRPr>
+          </a:p>
+          <a:p>
+            <a:pPr marL="0" lvl="0" indent="0" algn="l" rtl="0">
+              <a:spcBef>
+                <a:spcPts val="0"/>
+              </a:spcBef>
+              <a:spcAft>
+                <a:spcPts val="0"/>
+              </a:spcAft>
+              <a:buNone/>
+            </a:pPr>
+            <a:endParaRPr dirty="0">
+              <a:latin typeface="Consolas"/>
+              <a:ea typeface="Consolas"/>
+              <a:cs typeface="Consolas"/>
+              <a:sym typeface="Consolas"/>
+            </a:endParaRPr>
+          </a:p>
+        </p:txBody>
+      </p:sp>
+      <p:sp>
+        <p:nvSpPr>
+          <p:cNvPr id="27" name="Google Shape;121;p16">
+            <a:extLst>
+              <a:ext uri="{FF2B5EF4-FFF2-40B4-BE49-F238E27FC236}">
+                <a16:creationId xmlns:a16="http://schemas.microsoft.com/office/drawing/2014/main" id="{707F0F55-CD7B-238D-CFF7-FDA98CDF2B78}"/>
+              </a:ext>
+            </a:extLst>
+          </p:cNvPr>
+          <p:cNvSpPr/>
+          <p:nvPr/>
+        </p:nvSpPr>
+        <p:spPr>
+          <a:xfrm>
+            <a:off x="12395940" y="1119414"/>
+            <a:ext cx="2410800" cy="905019"/>
+          </a:xfrm>
+          <a:prstGeom prst="roundRect">
+            <a:avLst>
+              <a:gd name="adj" fmla="val 16667"/>
+            </a:avLst>
+          </a:prstGeom>
+          <a:solidFill>
+            <a:srgbClr val="D0E0E3"/>
+          </a:solidFill>
+          <a:ln w="28575" cap="flat" cmpd="sng">
+            <a:solidFill>
+              <a:srgbClr val="134F5C"/>
+            </a:solidFill>
+            <a:prstDash val="solid"/>
+            <a:round/>
+            <a:headEnd type="none" w="sm" len="sm"/>
+            <a:tailEnd type="none" w="sm" len="sm"/>
+          </a:ln>
+        </p:spPr>
+        <p:txBody>
+          <a:bodyPr spcFirstLastPara="1" wrap="square" lIns="91425" tIns="91425" rIns="91425" bIns="91425" anchor="t" anchorCtr="0">
+            <a:noAutofit/>
+          </a:bodyPr>
+          <a:lstStyle/>
+          <a:p>
+            <a:pPr marL="0" lvl="0" indent="0" algn="l" rtl="0">
+              <a:spcBef>
+                <a:spcPts val="0"/>
+              </a:spcBef>
+              <a:spcAft>
+                <a:spcPts val="0"/>
+              </a:spcAft>
+              <a:buNone/>
+            </a:pPr>
+            <a:r>
+              <a:rPr lang="en-GB" dirty="0">
+                <a:latin typeface="Consolas"/>
+                <a:ea typeface="Consolas"/>
+                <a:cs typeface="Consolas"/>
+                <a:sym typeface="Consolas"/>
+              </a:rPr>
+              <a:t>T3: </a:t>
+            </a:r>
+            <a:r>
+              <a:rPr lang="en-GB" dirty="0" err="1">
+                <a:latin typeface="Consolas"/>
+                <a:ea typeface="Consolas"/>
+                <a:cs typeface="Consolas"/>
+                <a:sym typeface="Consolas"/>
+              </a:rPr>
+              <a:t>Identificar</a:t>
+            </a:r>
+            <a:r>
+              <a:rPr lang="en-GB" dirty="0">
+                <a:latin typeface="Consolas"/>
+                <a:ea typeface="Consolas"/>
+                <a:cs typeface="Consolas"/>
+                <a:sym typeface="Consolas"/>
+              </a:rPr>
+              <a:t> “</a:t>
+            </a:r>
+            <a:r>
+              <a:rPr lang="en-GB" dirty="0" err="1">
+                <a:latin typeface="Consolas"/>
+                <a:ea typeface="Consolas"/>
+                <a:cs typeface="Consolas"/>
+                <a:sym typeface="Consolas"/>
+              </a:rPr>
+              <a:t>CodeMetrics</a:t>
+            </a:r>
+            <a:r>
+              <a:rPr lang="en-GB" dirty="0">
+                <a:latin typeface="Consolas"/>
+                <a:ea typeface="Consolas"/>
+                <a:cs typeface="Consolas"/>
+                <a:sym typeface="Consolas"/>
+              </a:rPr>
+              <a:t>”</a:t>
+            </a:r>
+          </a:p>
+          <a:p>
+            <a:pPr marL="0" lvl="0" indent="0" algn="l" rtl="0">
+              <a:spcBef>
+                <a:spcPts val="0"/>
+              </a:spcBef>
+              <a:spcAft>
+                <a:spcPts val="0"/>
+              </a:spcAft>
+              <a:buNone/>
+            </a:pPr>
+            <a:endParaRPr dirty="0">
+              <a:latin typeface="Consolas"/>
+              <a:ea typeface="Consolas"/>
+              <a:cs typeface="Consolas"/>
+              <a:sym typeface="Consolas"/>
+            </a:endParaRPr>
+          </a:p>
+        </p:txBody>
+      </p:sp>
+      <p:sp>
+        <p:nvSpPr>
+          <p:cNvPr id="28" name="Google Shape;121;p16">
+            <a:extLst>
+              <a:ext uri="{FF2B5EF4-FFF2-40B4-BE49-F238E27FC236}">
+                <a16:creationId xmlns:a16="http://schemas.microsoft.com/office/drawing/2014/main" id="{7392959A-8667-CD23-5CD7-3DD2625BDBCD}"/>
+              </a:ext>
+            </a:extLst>
+          </p:cNvPr>
+          <p:cNvSpPr/>
+          <p:nvPr/>
+        </p:nvSpPr>
+        <p:spPr>
+          <a:xfrm>
+            <a:off x="15607166" y="6133137"/>
+            <a:ext cx="2410800" cy="905019"/>
+          </a:xfrm>
+          <a:prstGeom prst="roundRect">
+            <a:avLst>
+              <a:gd name="adj" fmla="val 16667"/>
+            </a:avLst>
+          </a:prstGeom>
+          <a:solidFill>
+            <a:srgbClr val="D0E0E3"/>
+          </a:solidFill>
+          <a:ln w="28575" cap="flat" cmpd="sng">
+            <a:solidFill>
+              <a:srgbClr val="134F5C"/>
+            </a:solidFill>
+            <a:prstDash val="solid"/>
+            <a:round/>
+            <a:headEnd type="none" w="sm" len="sm"/>
+            <a:tailEnd type="none" w="sm" len="sm"/>
+          </a:ln>
+        </p:spPr>
+        <p:txBody>
+          <a:bodyPr spcFirstLastPara="1" wrap="square" lIns="91425" tIns="91425" rIns="91425" bIns="91425" anchor="t" anchorCtr="0">
+            <a:noAutofit/>
+          </a:bodyPr>
+          <a:lstStyle/>
+          <a:p>
+            <a:pPr marL="0" lvl="0" indent="0" algn="l" rtl="0">
+              <a:spcBef>
+                <a:spcPts val="0"/>
+              </a:spcBef>
+              <a:spcAft>
+                <a:spcPts val="0"/>
+              </a:spcAft>
+              <a:buNone/>
+            </a:pPr>
+            <a:r>
+              <a:rPr lang="en-GB" dirty="0">
+                <a:latin typeface="Consolas"/>
+                <a:ea typeface="Consolas"/>
+                <a:cs typeface="Consolas"/>
+                <a:sym typeface="Consolas"/>
+              </a:rPr>
+              <a:t>T2: </a:t>
+            </a:r>
+            <a:r>
+              <a:rPr lang="en-GB" dirty="0" err="1">
+                <a:latin typeface="Consolas"/>
+                <a:ea typeface="Consolas"/>
+                <a:cs typeface="Consolas"/>
+                <a:sym typeface="Consolas"/>
+              </a:rPr>
+              <a:t>Identificar</a:t>
+            </a:r>
+            <a:r>
+              <a:rPr lang="en-GB" dirty="0">
+                <a:latin typeface="Consolas"/>
+                <a:ea typeface="Consolas"/>
+                <a:cs typeface="Consolas"/>
+                <a:sym typeface="Consolas"/>
+              </a:rPr>
+              <a:t> “</a:t>
+            </a:r>
+            <a:r>
+              <a:rPr lang="en-GB" dirty="0" err="1">
+                <a:latin typeface="Consolas"/>
+                <a:ea typeface="Consolas"/>
+                <a:cs typeface="Consolas"/>
+                <a:sym typeface="Consolas"/>
+              </a:rPr>
+              <a:t>CodeSmells</a:t>
+            </a:r>
+            <a:r>
+              <a:rPr lang="en-GB" dirty="0">
+                <a:latin typeface="Consolas"/>
+                <a:ea typeface="Consolas"/>
+                <a:cs typeface="Consolas"/>
+                <a:sym typeface="Consolas"/>
+              </a:rPr>
+              <a:t>”</a:t>
+            </a:r>
+          </a:p>
+          <a:p>
+            <a:pPr marL="0" lvl="0" indent="0" algn="l" rtl="0">
+              <a:spcBef>
+                <a:spcPts val="0"/>
+              </a:spcBef>
+              <a:spcAft>
+                <a:spcPts val="0"/>
+              </a:spcAft>
+              <a:buNone/>
+            </a:pPr>
+            <a:endParaRPr dirty="0">
+              <a:latin typeface="Consolas"/>
+              <a:ea typeface="Consolas"/>
+              <a:cs typeface="Consolas"/>
+              <a:sym typeface="Consolas"/>
+            </a:endParaRPr>
+          </a:p>
+        </p:txBody>
+      </p:sp>
+      <p:sp>
+        <p:nvSpPr>
+          <p:cNvPr id="29" name="Google Shape;121;p16">
+            <a:extLst>
+              <a:ext uri="{FF2B5EF4-FFF2-40B4-BE49-F238E27FC236}">
+                <a16:creationId xmlns:a16="http://schemas.microsoft.com/office/drawing/2014/main" id="{B1AF8A98-FF77-6CF3-D7E0-569F85AE60A2}"/>
+              </a:ext>
+            </a:extLst>
+          </p:cNvPr>
+          <p:cNvSpPr/>
+          <p:nvPr/>
+        </p:nvSpPr>
+        <p:spPr>
+          <a:xfrm>
+            <a:off x="15654801" y="9220841"/>
+            <a:ext cx="2410800" cy="905019"/>
+          </a:xfrm>
+          <a:prstGeom prst="roundRect">
+            <a:avLst>
+              <a:gd name="adj" fmla="val 16667"/>
+            </a:avLst>
+          </a:prstGeom>
+          <a:solidFill>
+            <a:srgbClr val="D0E0E3"/>
+          </a:solidFill>
+          <a:ln w="28575" cap="flat" cmpd="sng">
+            <a:solidFill>
+              <a:srgbClr val="134F5C"/>
+            </a:solidFill>
+            <a:prstDash val="solid"/>
+            <a:round/>
+            <a:headEnd type="none" w="sm" len="sm"/>
+            <a:tailEnd type="none" w="sm" len="sm"/>
+          </a:ln>
+        </p:spPr>
+        <p:txBody>
+          <a:bodyPr spcFirstLastPara="1" wrap="square" lIns="91425" tIns="91425" rIns="91425" bIns="91425" anchor="t" anchorCtr="0">
+            <a:noAutofit/>
+          </a:bodyPr>
+          <a:lstStyle/>
+          <a:p>
+            <a:pPr marL="0" lvl="0" indent="0" algn="l" rtl="0">
+              <a:spcBef>
+                <a:spcPts val="0"/>
+              </a:spcBef>
+              <a:spcAft>
+                <a:spcPts val="0"/>
+              </a:spcAft>
+              <a:buNone/>
+            </a:pPr>
+            <a:r>
+              <a:rPr lang="en-GB" dirty="0">
+                <a:latin typeface="Consolas"/>
+                <a:ea typeface="Consolas"/>
+                <a:cs typeface="Consolas"/>
+                <a:sym typeface="Consolas"/>
+              </a:rPr>
+              <a:t>T2: </a:t>
+            </a:r>
+            <a:r>
+              <a:rPr lang="en-GB" dirty="0" err="1">
+                <a:latin typeface="Consolas"/>
+                <a:ea typeface="Consolas"/>
+                <a:cs typeface="Consolas"/>
+                <a:sym typeface="Consolas"/>
+              </a:rPr>
+              <a:t>Identificar</a:t>
+            </a:r>
+            <a:r>
+              <a:rPr lang="en-GB" dirty="0">
+                <a:latin typeface="Consolas"/>
+                <a:ea typeface="Consolas"/>
+                <a:cs typeface="Consolas"/>
+                <a:sym typeface="Consolas"/>
+              </a:rPr>
+              <a:t> “</a:t>
+            </a:r>
+            <a:r>
+              <a:rPr lang="en-GB" dirty="0" err="1">
+                <a:latin typeface="Consolas"/>
+                <a:ea typeface="Consolas"/>
+                <a:cs typeface="Consolas"/>
+                <a:sym typeface="Consolas"/>
+              </a:rPr>
+              <a:t>CodeSmells</a:t>
+            </a:r>
+            <a:r>
+              <a:rPr lang="en-GB" dirty="0">
+                <a:latin typeface="Consolas"/>
+                <a:ea typeface="Consolas"/>
+                <a:cs typeface="Consolas"/>
+                <a:sym typeface="Consolas"/>
+              </a:rPr>
+              <a:t>”</a:t>
+            </a:r>
+          </a:p>
+          <a:p>
+            <a:pPr marL="0" lvl="0" indent="0" algn="l" rtl="0">
+              <a:spcBef>
+                <a:spcPts val="0"/>
+              </a:spcBef>
+              <a:spcAft>
+                <a:spcPts val="0"/>
+              </a:spcAft>
+              <a:buNone/>
+            </a:pPr>
+            <a:endParaRPr dirty="0">
+              <a:latin typeface="Consolas"/>
+              <a:ea typeface="Consolas"/>
+              <a:cs typeface="Consolas"/>
+              <a:sym typeface="Consolas"/>
+            </a:endParaRPr>
+          </a:p>
+        </p:txBody>
+      </p:sp>
+      <p:sp>
+        <p:nvSpPr>
+          <p:cNvPr id="30" name="Google Shape;121;p16">
+            <a:extLst>
+              <a:ext uri="{FF2B5EF4-FFF2-40B4-BE49-F238E27FC236}">
+                <a16:creationId xmlns:a16="http://schemas.microsoft.com/office/drawing/2014/main" id="{CE6B0747-7778-571D-B159-ED8C72AE70EE}"/>
+              </a:ext>
+            </a:extLst>
+          </p:cNvPr>
+          <p:cNvSpPr/>
+          <p:nvPr/>
+        </p:nvSpPr>
+        <p:spPr>
+          <a:xfrm>
+            <a:off x="15607166" y="8181648"/>
+            <a:ext cx="2410800" cy="905019"/>
+          </a:xfrm>
+          <a:prstGeom prst="roundRect">
+            <a:avLst>
+              <a:gd name="adj" fmla="val 16667"/>
+            </a:avLst>
+          </a:prstGeom>
+          <a:solidFill>
+            <a:srgbClr val="D0E0E3"/>
+          </a:solidFill>
+          <a:ln w="28575" cap="flat" cmpd="sng">
+            <a:solidFill>
+              <a:srgbClr val="134F5C"/>
+            </a:solidFill>
+            <a:prstDash val="solid"/>
+            <a:round/>
+            <a:headEnd type="none" w="sm" len="sm"/>
+            <a:tailEnd type="none" w="sm" len="sm"/>
+          </a:ln>
+        </p:spPr>
+        <p:txBody>
+          <a:bodyPr spcFirstLastPara="1" wrap="square" lIns="91425" tIns="91425" rIns="91425" bIns="91425" anchor="t" anchorCtr="0">
+            <a:noAutofit/>
+          </a:bodyPr>
+          <a:lstStyle/>
+          <a:p>
+            <a:pPr marL="0" lvl="0" indent="0" algn="l" rtl="0">
+              <a:spcBef>
+                <a:spcPts val="0"/>
+              </a:spcBef>
+              <a:spcAft>
+                <a:spcPts val="0"/>
+              </a:spcAft>
+              <a:buNone/>
+            </a:pPr>
+            <a:r>
+              <a:rPr lang="en-GB" dirty="0">
+                <a:latin typeface="Consolas"/>
+                <a:ea typeface="Consolas"/>
+                <a:cs typeface="Consolas"/>
+                <a:sym typeface="Consolas"/>
+              </a:rPr>
+              <a:t>T2: </a:t>
+            </a:r>
+            <a:r>
+              <a:rPr lang="en-GB" dirty="0" err="1">
+                <a:latin typeface="Consolas"/>
+                <a:ea typeface="Consolas"/>
+                <a:cs typeface="Consolas"/>
+                <a:sym typeface="Consolas"/>
+              </a:rPr>
+              <a:t>Identificar</a:t>
+            </a:r>
+            <a:r>
+              <a:rPr lang="en-GB" dirty="0">
+                <a:latin typeface="Consolas"/>
+                <a:ea typeface="Consolas"/>
+                <a:cs typeface="Consolas"/>
+                <a:sym typeface="Consolas"/>
+              </a:rPr>
+              <a:t> “</a:t>
+            </a:r>
+            <a:r>
+              <a:rPr lang="en-GB" dirty="0" err="1">
+                <a:latin typeface="Consolas"/>
+                <a:ea typeface="Consolas"/>
+                <a:cs typeface="Consolas"/>
+                <a:sym typeface="Consolas"/>
+              </a:rPr>
+              <a:t>CodeSmells</a:t>
+            </a:r>
+            <a:r>
+              <a:rPr lang="en-GB" dirty="0">
+                <a:latin typeface="Consolas"/>
+                <a:ea typeface="Consolas"/>
+                <a:cs typeface="Consolas"/>
+                <a:sym typeface="Consolas"/>
+              </a:rPr>
+              <a:t>”</a:t>
+            </a:r>
+          </a:p>
+          <a:p>
+            <a:pPr marL="0" lvl="0" indent="0" algn="l" rtl="0">
+              <a:spcBef>
+                <a:spcPts val="0"/>
+              </a:spcBef>
+              <a:spcAft>
+                <a:spcPts val="0"/>
+              </a:spcAft>
+              <a:buNone/>
+            </a:pPr>
+            <a:endParaRPr dirty="0">
+              <a:latin typeface="Consolas"/>
+              <a:ea typeface="Consolas"/>
+              <a:cs typeface="Consolas"/>
+              <a:sym typeface="Consolas"/>
+            </a:endParaRPr>
+          </a:p>
+        </p:txBody>
+      </p:sp>
+      <p:sp>
+        <p:nvSpPr>
+          <p:cNvPr id="31" name="Google Shape;121;p16">
+            <a:extLst>
+              <a:ext uri="{FF2B5EF4-FFF2-40B4-BE49-F238E27FC236}">
+                <a16:creationId xmlns:a16="http://schemas.microsoft.com/office/drawing/2014/main" id="{619324BE-2717-F412-7BAE-7E39BDDC0F7D}"/>
+              </a:ext>
+            </a:extLst>
+          </p:cNvPr>
+          <p:cNvSpPr/>
+          <p:nvPr/>
+        </p:nvSpPr>
+        <p:spPr>
+          <a:xfrm>
+            <a:off x="15607166" y="4977406"/>
+            <a:ext cx="2410800" cy="905019"/>
+          </a:xfrm>
+          <a:prstGeom prst="roundRect">
+            <a:avLst>
+              <a:gd name="adj" fmla="val 16667"/>
+            </a:avLst>
+          </a:prstGeom>
+          <a:solidFill>
+            <a:srgbClr val="D0E0E3"/>
+          </a:solidFill>
+          <a:ln w="28575" cap="flat" cmpd="sng">
+            <a:solidFill>
+              <a:srgbClr val="134F5C"/>
+            </a:solidFill>
+            <a:prstDash val="solid"/>
+            <a:round/>
+            <a:headEnd type="none" w="sm" len="sm"/>
+            <a:tailEnd type="none" w="sm" len="sm"/>
+          </a:ln>
+        </p:spPr>
+        <p:txBody>
+          <a:bodyPr spcFirstLastPara="1" wrap="square" lIns="91425" tIns="91425" rIns="91425" bIns="91425" anchor="t" anchorCtr="0">
+            <a:noAutofit/>
+          </a:bodyPr>
+          <a:lstStyle/>
+          <a:p>
+            <a:pPr marL="0" lvl="0" indent="0" algn="l" rtl="0">
+              <a:spcBef>
+                <a:spcPts val="0"/>
+              </a:spcBef>
+              <a:spcAft>
+                <a:spcPts val="0"/>
+              </a:spcAft>
+              <a:buNone/>
+            </a:pPr>
+            <a:r>
+              <a:rPr lang="en-GB" dirty="0">
+                <a:latin typeface="Consolas"/>
+                <a:ea typeface="Consolas"/>
+                <a:cs typeface="Consolas"/>
+                <a:sym typeface="Consolas"/>
+              </a:rPr>
+              <a:t>T2: </a:t>
+            </a:r>
+            <a:r>
+              <a:rPr lang="en-GB" dirty="0" err="1">
+                <a:latin typeface="Consolas"/>
+                <a:ea typeface="Consolas"/>
+                <a:cs typeface="Consolas"/>
+                <a:sym typeface="Consolas"/>
+              </a:rPr>
+              <a:t>Identificar</a:t>
+            </a:r>
+            <a:r>
+              <a:rPr lang="en-GB" dirty="0">
+                <a:latin typeface="Consolas"/>
+                <a:ea typeface="Consolas"/>
+                <a:cs typeface="Consolas"/>
+                <a:sym typeface="Consolas"/>
+              </a:rPr>
+              <a:t> “</a:t>
+            </a:r>
+            <a:r>
+              <a:rPr lang="en-GB" dirty="0" err="1">
+                <a:latin typeface="Consolas"/>
+                <a:ea typeface="Consolas"/>
+                <a:cs typeface="Consolas"/>
+                <a:sym typeface="Consolas"/>
+              </a:rPr>
+              <a:t>CodeSmells</a:t>
+            </a:r>
+            <a:r>
+              <a:rPr lang="en-GB" dirty="0">
+                <a:latin typeface="Consolas"/>
+                <a:ea typeface="Consolas"/>
+                <a:cs typeface="Consolas"/>
+                <a:sym typeface="Consolas"/>
+              </a:rPr>
+              <a:t>”</a:t>
+            </a:r>
+          </a:p>
+          <a:p>
+            <a:pPr marL="0" lvl="0" indent="0" algn="l" rtl="0">
+              <a:spcBef>
+                <a:spcPts val="0"/>
+              </a:spcBef>
+              <a:spcAft>
+                <a:spcPts val="0"/>
+              </a:spcAft>
+              <a:buNone/>
+            </a:pPr>
+            <a:endParaRPr dirty="0">
+              <a:latin typeface="Consolas"/>
+              <a:ea typeface="Consolas"/>
+              <a:cs typeface="Consolas"/>
+              <a:sym typeface="Consolas"/>
+            </a:endParaRPr>
+          </a:p>
+        </p:txBody>
+      </p:sp>
+      <p:sp>
+        <p:nvSpPr>
+          <p:cNvPr id="32" name="Google Shape;121;p16">
+            <a:extLst>
+              <a:ext uri="{FF2B5EF4-FFF2-40B4-BE49-F238E27FC236}">
+                <a16:creationId xmlns:a16="http://schemas.microsoft.com/office/drawing/2014/main" id="{DCCFD43A-CECE-D383-B3F9-1A15A03BD2F8}"/>
+              </a:ext>
+            </a:extLst>
+          </p:cNvPr>
+          <p:cNvSpPr/>
+          <p:nvPr/>
+        </p:nvSpPr>
+        <p:spPr>
+          <a:xfrm>
+            <a:off x="15607166" y="3265387"/>
+            <a:ext cx="2410800" cy="905019"/>
+          </a:xfrm>
+          <a:prstGeom prst="roundRect">
+            <a:avLst>
+              <a:gd name="adj" fmla="val 16667"/>
+            </a:avLst>
+          </a:prstGeom>
+          <a:solidFill>
+            <a:srgbClr val="D0E0E3"/>
+          </a:solidFill>
+          <a:ln w="28575" cap="flat" cmpd="sng">
+            <a:solidFill>
+              <a:srgbClr val="134F5C"/>
+            </a:solidFill>
+            <a:prstDash val="solid"/>
+            <a:round/>
+            <a:headEnd type="none" w="sm" len="sm"/>
+            <a:tailEnd type="none" w="sm" len="sm"/>
+          </a:ln>
+        </p:spPr>
+        <p:txBody>
+          <a:bodyPr spcFirstLastPara="1" wrap="square" lIns="91425" tIns="91425" rIns="91425" bIns="91425" anchor="t" anchorCtr="0">
+            <a:noAutofit/>
+          </a:bodyPr>
+          <a:lstStyle/>
+          <a:p>
+            <a:pPr marL="0" lvl="0" indent="0" algn="l" rtl="0">
+              <a:spcBef>
+                <a:spcPts val="0"/>
+              </a:spcBef>
+              <a:spcAft>
+                <a:spcPts val="0"/>
+              </a:spcAft>
+              <a:buNone/>
+            </a:pPr>
+            <a:r>
+              <a:rPr lang="en-GB" dirty="0">
+                <a:latin typeface="Consolas"/>
+                <a:ea typeface="Consolas"/>
+                <a:cs typeface="Consolas"/>
+                <a:sym typeface="Consolas"/>
+              </a:rPr>
+              <a:t>T2: </a:t>
+            </a:r>
+            <a:r>
+              <a:rPr lang="en-GB" dirty="0" err="1">
+                <a:latin typeface="Consolas"/>
+                <a:ea typeface="Consolas"/>
+                <a:cs typeface="Consolas"/>
+                <a:sym typeface="Consolas"/>
+              </a:rPr>
+              <a:t>Identificar</a:t>
+            </a:r>
+            <a:r>
+              <a:rPr lang="en-GB" dirty="0">
+                <a:latin typeface="Consolas"/>
+                <a:ea typeface="Consolas"/>
+                <a:cs typeface="Consolas"/>
+                <a:sym typeface="Consolas"/>
+              </a:rPr>
+              <a:t> “</a:t>
+            </a:r>
+            <a:r>
+              <a:rPr lang="en-GB" dirty="0" err="1">
+                <a:latin typeface="Consolas"/>
+                <a:ea typeface="Consolas"/>
+                <a:cs typeface="Consolas"/>
+                <a:sym typeface="Consolas"/>
+              </a:rPr>
+              <a:t>CodeSmells</a:t>
+            </a:r>
+            <a:r>
+              <a:rPr lang="en-GB" dirty="0">
+                <a:latin typeface="Consolas"/>
+                <a:ea typeface="Consolas"/>
+                <a:cs typeface="Consolas"/>
+                <a:sym typeface="Consolas"/>
+              </a:rPr>
+              <a:t>”</a:t>
+            </a:r>
+          </a:p>
+          <a:p>
+            <a:pPr marL="0" lvl="0" indent="0" algn="l" rtl="0">
+              <a:spcBef>
+                <a:spcPts val="0"/>
+              </a:spcBef>
+              <a:spcAft>
+                <a:spcPts val="0"/>
+              </a:spcAft>
+              <a:buNone/>
+            </a:pPr>
+            <a:endParaRPr dirty="0">
+              <a:latin typeface="Consolas"/>
+              <a:ea typeface="Consolas"/>
+              <a:cs typeface="Consolas"/>
+              <a:sym typeface="Consolas"/>
+            </a:endParaRPr>
+          </a:p>
+        </p:txBody>
+      </p:sp>
+      <p:sp>
+        <p:nvSpPr>
+          <p:cNvPr id="33" name="Google Shape;121;p16">
+            <a:extLst>
+              <a:ext uri="{FF2B5EF4-FFF2-40B4-BE49-F238E27FC236}">
+                <a16:creationId xmlns:a16="http://schemas.microsoft.com/office/drawing/2014/main" id="{5403ED1A-F517-F3DA-3358-5A3A8CAA2BCE}"/>
+              </a:ext>
+            </a:extLst>
+          </p:cNvPr>
+          <p:cNvSpPr/>
+          <p:nvPr/>
+        </p:nvSpPr>
+        <p:spPr>
+          <a:xfrm>
+            <a:off x="15532407" y="1594448"/>
+            <a:ext cx="2410800" cy="905019"/>
+          </a:xfrm>
+          <a:prstGeom prst="roundRect">
+            <a:avLst>
+              <a:gd name="adj" fmla="val 16667"/>
+            </a:avLst>
+          </a:prstGeom>
+          <a:solidFill>
+            <a:srgbClr val="D0E0E3"/>
+          </a:solidFill>
+          <a:ln w="28575" cap="flat" cmpd="sng">
+            <a:solidFill>
+              <a:srgbClr val="134F5C"/>
+            </a:solidFill>
+            <a:prstDash val="solid"/>
+            <a:round/>
+            <a:headEnd type="none" w="sm" len="sm"/>
+            <a:tailEnd type="none" w="sm" len="sm"/>
+          </a:ln>
+        </p:spPr>
+        <p:txBody>
+          <a:bodyPr spcFirstLastPara="1" wrap="square" lIns="91425" tIns="91425" rIns="91425" bIns="91425" anchor="t" anchorCtr="0">
+            <a:noAutofit/>
+          </a:bodyPr>
+          <a:lstStyle/>
+          <a:p>
+            <a:pPr marL="0" lvl="0" indent="0" algn="l" rtl="0">
+              <a:spcBef>
+                <a:spcPts val="0"/>
+              </a:spcBef>
+              <a:spcAft>
+                <a:spcPts val="0"/>
+              </a:spcAft>
+              <a:buNone/>
+            </a:pPr>
+            <a:r>
+              <a:rPr lang="en-GB" dirty="0">
+                <a:latin typeface="Consolas"/>
+                <a:ea typeface="Consolas"/>
+                <a:cs typeface="Consolas"/>
+                <a:sym typeface="Consolas"/>
+              </a:rPr>
+              <a:t>T2: </a:t>
+            </a:r>
+            <a:r>
+              <a:rPr lang="en-GB" dirty="0" err="1">
+                <a:latin typeface="Consolas"/>
+                <a:ea typeface="Consolas"/>
+                <a:cs typeface="Consolas"/>
+                <a:sym typeface="Consolas"/>
+              </a:rPr>
+              <a:t>Identificar</a:t>
+            </a:r>
+            <a:r>
+              <a:rPr lang="en-GB" dirty="0">
+                <a:latin typeface="Consolas"/>
+                <a:ea typeface="Consolas"/>
+                <a:cs typeface="Consolas"/>
+                <a:sym typeface="Consolas"/>
+              </a:rPr>
+              <a:t> “</a:t>
+            </a:r>
+            <a:r>
+              <a:rPr lang="en-GB" dirty="0" err="1">
+                <a:latin typeface="Consolas"/>
+                <a:ea typeface="Consolas"/>
+                <a:cs typeface="Consolas"/>
+                <a:sym typeface="Consolas"/>
+              </a:rPr>
+              <a:t>CodeSmells</a:t>
+            </a:r>
+            <a:r>
+              <a:rPr lang="en-GB" dirty="0">
+                <a:latin typeface="Consolas"/>
+                <a:ea typeface="Consolas"/>
+                <a:cs typeface="Consolas"/>
+                <a:sym typeface="Consolas"/>
+              </a:rPr>
+              <a:t>”</a:t>
+            </a:r>
+          </a:p>
+          <a:p>
+            <a:pPr marL="0" lvl="0" indent="0" algn="l" rtl="0">
+              <a:spcBef>
+                <a:spcPts val="0"/>
+              </a:spcBef>
+              <a:spcAft>
+                <a:spcPts val="0"/>
+              </a:spcAft>
+              <a:buNone/>
+            </a:pPr>
+            <a:endParaRPr dirty="0">
+              <a:latin typeface="Consolas"/>
+              <a:ea typeface="Consolas"/>
+              <a:cs typeface="Consolas"/>
+              <a:sym typeface="Consolas"/>
+            </a:endParaRPr>
+          </a:p>
+        </p:txBody>
+      </p:sp>
+      <p:sp>
+        <p:nvSpPr>
+          <p:cNvPr id="35" name="Google Shape;121;p16">
+            <a:extLst>
+              <a:ext uri="{FF2B5EF4-FFF2-40B4-BE49-F238E27FC236}">
+                <a16:creationId xmlns:a16="http://schemas.microsoft.com/office/drawing/2014/main" id="{AA31E5A5-1CDC-FB0A-3024-F64CAD1393BB}"/>
+              </a:ext>
+            </a:extLst>
+          </p:cNvPr>
+          <p:cNvSpPr/>
+          <p:nvPr/>
+        </p:nvSpPr>
+        <p:spPr>
+          <a:xfrm>
+            <a:off x="12402922" y="2682321"/>
+            <a:ext cx="2410800" cy="905019"/>
+          </a:xfrm>
+          <a:prstGeom prst="roundRect">
+            <a:avLst>
+              <a:gd name="adj" fmla="val 16667"/>
+            </a:avLst>
+          </a:prstGeom>
+          <a:solidFill>
+            <a:srgbClr val="D0E0E3"/>
+          </a:solidFill>
+          <a:ln w="28575" cap="flat" cmpd="sng">
+            <a:solidFill>
+              <a:srgbClr val="134F5C"/>
+            </a:solidFill>
+            <a:prstDash val="solid"/>
+            <a:round/>
+            <a:headEnd type="none" w="sm" len="sm"/>
+            <a:tailEnd type="none" w="sm" len="sm"/>
+          </a:ln>
+        </p:spPr>
+        <p:txBody>
+          <a:bodyPr spcFirstLastPara="1" wrap="square" lIns="91425" tIns="91425" rIns="91425" bIns="91425" anchor="t" anchorCtr="0">
+            <a:noAutofit/>
+          </a:bodyPr>
+          <a:lstStyle/>
+          <a:p>
+            <a:pPr marL="0" lvl="0" indent="0" algn="l" rtl="0">
+              <a:spcBef>
+                <a:spcPts val="0"/>
+              </a:spcBef>
+              <a:spcAft>
+                <a:spcPts val="0"/>
+              </a:spcAft>
+              <a:buNone/>
+            </a:pPr>
+            <a:r>
+              <a:rPr lang="en-GB" dirty="0">
+                <a:latin typeface="Consolas"/>
+                <a:ea typeface="Consolas"/>
+                <a:cs typeface="Consolas"/>
+                <a:sym typeface="Consolas"/>
+              </a:rPr>
+              <a:t>T3: </a:t>
+            </a:r>
+            <a:r>
+              <a:rPr lang="en-GB" dirty="0" err="1">
+                <a:latin typeface="Consolas"/>
+                <a:ea typeface="Consolas"/>
+                <a:cs typeface="Consolas"/>
+                <a:sym typeface="Consolas"/>
+              </a:rPr>
+              <a:t>Identificar</a:t>
+            </a:r>
+            <a:r>
+              <a:rPr lang="en-GB" dirty="0">
+                <a:latin typeface="Consolas"/>
+                <a:ea typeface="Consolas"/>
+                <a:cs typeface="Consolas"/>
+                <a:sym typeface="Consolas"/>
+              </a:rPr>
+              <a:t> “</a:t>
+            </a:r>
+            <a:r>
+              <a:rPr lang="en-GB" dirty="0" err="1">
+                <a:latin typeface="Consolas"/>
+                <a:ea typeface="Consolas"/>
+                <a:cs typeface="Consolas"/>
+                <a:sym typeface="Consolas"/>
+              </a:rPr>
+              <a:t>CodeMetrics</a:t>
+            </a:r>
+            <a:r>
+              <a:rPr lang="en-GB" dirty="0">
+                <a:latin typeface="Consolas"/>
+                <a:ea typeface="Consolas"/>
+                <a:cs typeface="Consolas"/>
+                <a:sym typeface="Consolas"/>
+              </a:rPr>
+              <a:t>”</a:t>
+            </a:r>
+          </a:p>
+          <a:p>
+            <a:pPr marL="0" lvl="0" indent="0" algn="l" rtl="0">
+              <a:spcBef>
+                <a:spcPts val="0"/>
+              </a:spcBef>
+              <a:spcAft>
+                <a:spcPts val="0"/>
+              </a:spcAft>
+              <a:buNone/>
+            </a:pPr>
+            <a:endParaRPr dirty="0">
+              <a:latin typeface="Consolas"/>
+              <a:ea typeface="Consolas"/>
+              <a:cs typeface="Consolas"/>
+              <a:sym typeface="Consolas"/>
+            </a:endParaRPr>
+          </a:p>
+        </p:txBody>
+      </p:sp>
+      <p:sp>
+        <p:nvSpPr>
+          <p:cNvPr id="36" name="Google Shape;121;p16">
+            <a:extLst>
+              <a:ext uri="{FF2B5EF4-FFF2-40B4-BE49-F238E27FC236}">
+                <a16:creationId xmlns:a16="http://schemas.microsoft.com/office/drawing/2014/main" id="{FC565C52-AD9E-143A-25BF-4946958FE19E}"/>
+              </a:ext>
+            </a:extLst>
+          </p:cNvPr>
+          <p:cNvSpPr/>
+          <p:nvPr/>
+        </p:nvSpPr>
+        <p:spPr>
+          <a:xfrm>
+            <a:off x="12402922" y="4157517"/>
+            <a:ext cx="2410800" cy="905019"/>
+          </a:xfrm>
+          <a:prstGeom prst="roundRect">
+            <a:avLst>
+              <a:gd name="adj" fmla="val 16667"/>
+            </a:avLst>
+          </a:prstGeom>
+          <a:solidFill>
+            <a:srgbClr val="D0E0E3"/>
+          </a:solidFill>
+          <a:ln w="28575" cap="flat" cmpd="sng">
+            <a:solidFill>
+              <a:srgbClr val="134F5C"/>
+            </a:solidFill>
+            <a:prstDash val="solid"/>
+            <a:round/>
+            <a:headEnd type="none" w="sm" len="sm"/>
+            <a:tailEnd type="none" w="sm" len="sm"/>
+          </a:ln>
+        </p:spPr>
+        <p:txBody>
+          <a:bodyPr spcFirstLastPara="1" wrap="square" lIns="91425" tIns="91425" rIns="91425" bIns="91425" anchor="t" anchorCtr="0">
+            <a:noAutofit/>
+          </a:bodyPr>
+          <a:lstStyle/>
+          <a:p>
+            <a:pPr marL="0" lvl="0" indent="0" algn="l" rtl="0">
+              <a:spcBef>
+                <a:spcPts val="0"/>
+              </a:spcBef>
+              <a:spcAft>
+                <a:spcPts val="0"/>
+              </a:spcAft>
+              <a:buNone/>
+            </a:pPr>
+            <a:r>
+              <a:rPr lang="en-GB" dirty="0">
+                <a:latin typeface="Consolas"/>
+                <a:ea typeface="Consolas"/>
+                <a:cs typeface="Consolas"/>
+                <a:sym typeface="Consolas"/>
+              </a:rPr>
+              <a:t>T3: </a:t>
+            </a:r>
+            <a:r>
+              <a:rPr lang="en-GB" dirty="0" err="1">
+                <a:latin typeface="Consolas"/>
+                <a:ea typeface="Consolas"/>
+                <a:cs typeface="Consolas"/>
+                <a:sym typeface="Consolas"/>
+              </a:rPr>
+              <a:t>Identificar</a:t>
+            </a:r>
+            <a:r>
+              <a:rPr lang="en-GB" dirty="0">
+                <a:latin typeface="Consolas"/>
+                <a:ea typeface="Consolas"/>
+                <a:cs typeface="Consolas"/>
+                <a:sym typeface="Consolas"/>
+              </a:rPr>
+              <a:t> “</a:t>
+            </a:r>
+            <a:r>
+              <a:rPr lang="en-GB" dirty="0" err="1">
+                <a:latin typeface="Consolas"/>
+                <a:ea typeface="Consolas"/>
+                <a:cs typeface="Consolas"/>
+                <a:sym typeface="Consolas"/>
+              </a:rPr>
+              <a:t>CodeMetrics</a:t>
+            </a:r>
+            <a:r>
+              <a:rPr lang="en-GB" dirty="0">
+                <a:latin typeface="Consolas"/>
+                <a:ea typeface="Consolas"/>
+                <a:cs typeface="Consolas"/>
+                <a:sym typeface="Consolas"/>
+              </a:rPr>
+              <a:t>”</a:t>
+            </a:r>
+          </a:p>
+          <a:p>
+            <a:pPr marL="0" lvl="0" indent="0" algn="l" rtl="0">
+              <a:spcBef>
+                <a:spcPts val="0"/>
+              </a:spcBef>
+              <a:spcAft>
+                <a:spcPts val="0"/>
+              </a:spcAft>
+              <a:buNone/>
+            </a:pPr>
+            <a:endParaRPr dirty="0">
+              <a:latin typeface="Consolas"/>
+              <a:ea typeface="Consolas"/>
+              <a:cs typeface="Consolas"/>
+              <a:sym typeface="Consolas"/>
+            </a:endParaRPr>
+          </a:p>
+        </p:txBody>
+      </p:sp>
+      <p:sp>
+        <p:nvSpPr>
+          <p:cNvPr id="37" name="Google Shape;121;p16">
+            <a:extLst>
+              <a:ext uri="{FF2B5EF4-FFF2-40B4-BE49-F238E27FC236}">
+                <a16:creationId xmlns:a16="http://schemas.microsoft.com/office/drawing/2014/main" id="{DE963885-06CC-64DA-7845-B81694A0D890}"/>
+              </a:ext>
+            </a:extLst>
+          </p:cNvPr>
+          <p:cNvSpPr/>
+          <p:nvPr/>
+        </p:nvSpPr>
+        <p:spPr>
+          <a:xfrm>
+            <a:off x="12423686" y="7375850"/>
+            <a:ext cx="2410800" cy="905019"/>
+          </a:xfrm>
+          <a:prstGeom prst="roundRect">
+            <a:avLst>
+              <a:gd name="adj" fmla="val 16667"/>
+            </a:avLst>
+          </a:prstGeom>
+          <a:solidFill>
+            <a:srgbClr val="D0E0E3"/>
+          </a:solidFill>
+          <a:ln w="28575" cap="flat" cmpd="sng">
+            <a:solidFill>
+              <a:srgbClr val="134F5C"/>
+            </a:solidFill>
+            <a:prstDash val="solid"/>
+            <a:round/>
+            <a:headEnd type="none" w="sm" len="sm"/>
+            <a:tailEnd type="none" w="sm" len="sm"/>
+          </a:ln>
+        </p:spPr>
+        <p:txBody>
+          <a:bodyPr spcFirstLastPara="1" wrap="square" lIns="91425" tIns="91425" rIns="91425" bIns="91425" anchor="t" anchorCtr="0">
+            <a:noAutofit/>
+          </a:bodyPr>
+          <a:lstStyle/>
+          <a:p>
+            <a:pPr marL="0" lvl="0" indent="0" algn="l" rtl="0">
+              <a:spcBef>
+                <a:spcPts val="0"/>
+              </a:spcBef>
+              <a:spcAft>
+                <a:spcPts val="0"/>
+              </a:spcAft>
+              <a:buNone/>
+            </a:pPr>
+            <a:r>
+              <a:rPr lang="en-GB" dirty="0">
+                <a:latin typeface="Consolas"/>
+                <a:ea typeface="Consolas"/>
+                <a:cs typeface="Consolas"/>
+                <a:sym typeface="Consolas"/>
+              </a:rPr>
+              <a:t>T3: </a:t>
+            </a:r>
+            <a:r>
+              <a:rPr lang="en-GB" dirty="0" err="1">
+                <a:latin typeface="Consolas"/>
+                <a:ea typeface="Consolas"/>
+                <a:cs typeface="Consolas"/>
+                <a:sym typeface="Consolas"/>
+              </a:rPr>
+              <a:t>Identificar</a:t>
+            </a:r>
+            <a:r>
+              <a:rPr lang="en-GB" dirty="0">
+                <a:latin typeface="Consolas"/>
+                <a:ea typeface="Consolas"/>
+                <a:cs typeface="Consolas"/>
+                <a:sym typeface="Consolas"/>
+              </a:rPr>
+              <a:t> “</a:t>
+            </a:r>
+            <a:r>
+              <a:rPr lang="en-GB" dirty="0" err="1">
+                <a:latin typeface="Consolas"/>
+                <a:ea typeface="Consolas"/>
+                <a:cs typeface="Consolas"/>
+                <a:sym typeface="Consolas"/>
+              </a:rPr>
+              <a:t>CodeMetrics</a:t>
+            </a:r>
+            <a:r>
+              <a:rPr lang="en-GB" dirty="0">
+                <a:latin typeface="Consolas"/>
+                <a:ea typeface="Consolas"/>
+                <a:cs typeface="Consolas"/>
+                <a:sym typeface="Consolas"/>
+              </a:rPr>
+              <a:t>”</a:t>
+            </a:r>
+          </a:p>
+          <a:p>
+            <a:pPr marL="0" lvl="0" indent="0" algn="l" rtl="0">
+              <a:spcBef>
+                <a:spcPts val="0"/>
+              </a:spcBef>
+              <a:spcAft>
+                <a:spcPts val="0"/>
+              </a:spcAft>
+              <a:buNone/>
+            </a:pPr>
+            <a:endParaRPr dirty="0">
+              <a:latin typeface="Consolas"/>
+              <a:ea typeface="Consolas"/>
+              <a:cs typeface="Consolas"/>
+              <a:sym typeface="Consolas"/>
+            </a:endParaRPr>
+          </a:p>
+        </p:txBody>
+      </p:sp>
+      <p:sp>
+        <p:nvSpPr>
+          <p:cNvPr id="38" name="Google Shape;121;p16">
+            <a:extLst>
+              <a:ext uri="{FF2B5EF4-FFF2-40B4-BE49-F238E27FC236}">
+                <a16:creationId xmlns:a16="http://schemas.microsoft.com/office/drawing/2014/main" id="{60D6D72C-2512-56DD-F052-4FBE937059AB}"/>
+              </a:ext>
+            </a:extLst>
+          </p:cNvPr>
+          <p:cNvSpPr/>
+          <p:nvPr/>
+        </p:nvSpPr>
+        <p:spPr>
+          <a:xfrm>
+            <a:off x="9745929" y="5826723"/>
+            <a:ext cx="2410800" cy="905019"/>
+          </a:xfrm>
+          <a:prstGeom prst="roundRect">
+            <a:avLst>
+              <a:gd name="adj" fmla="val 16667"/>
+            </a:avLst>
+          </a:prstGeom>
+          <a:solidFill>
+            <a:srgbClr val="D0E0E3"/>
+          </a:solidFill>
+          <a:ln w="28575" cap="flat" cmpd="sng">
+            <a:solidFill>
+              <a:srgbClr val="134F5C"/>
+            </a:solidFill>
+            <a:prstDash val="solid"/>
+            <a:round/>
+            <a:headEnd type="none" w="sm" len="sm"/>
+            <a:tailEnd type="none" w="sm" len="sm"/>
+          </a:ln>
+        </p:spPr>
+        <p:txBody>
+          <a:bodyPr spcFirstLastPara="1" wrap="square" lIns="91425" tIns="91425" rIns="91425" bIns="91425" anchor="t" anchorCtr="0">
+            <a:noAutofit/>
+          </a:bodyPr>
+          <a:lstStyle/>
+          <a:p>
+            <a:pPr marL="0" lvl="0" indent="0" algn="l" rtl="0">
+              <a:spcBef>
+                <a:spcPts val="0"/>
+              </a:spcBef>
+              <a:spcAft>
+                <a:spcPts val="0"/>
+              </a:spcAft>
+              <a:buNone/>
+            </a:pPr>
+            <a:r>
+              <a:rPr lang="en-GB" dirty="0">
+                <a:latin typeface="Consolas"/>
+                <a:ea typeface="Consolas"/>
+                <a:cs typeface="Consolas"/>
+                <a:sym typeface="Consolas"/>
+              </a:rPr>
+              <a:t>T3: </a:t>
+            </a:r>
+            <a:r>
+              <a:rPr lang="en-GB" dirty="0" err="1">
+                <a:latin typeface="Consolas"/>
+                <a:ea typeface="Consolas"/>
+                <a:cs typeface="Consolas"/>
+                <a:sym typeface="Consolas"/>
+              </a:rPr>
+              <a:t>Identificar</a:t>
+            </a:r>
+            <a:r>
+              <a:rPr lang="en-GB" dirty="0">
+                <a:latin typeface="Consolas"/>
+                <a:ea typeface="Consolas"/>
+                <a:cs typeface="Consolas"/>
+                <a:sym typeface="Consolas"/>
+              </a:rPr>
+              <a:t> “</a:t>
+            </a:r>
+            <a:r>
+              <a:rPr lang="en-GB" dirty="0" err="1">
+                <a:latin typeface="Consolas"/>
+                <a:ea typeface="Consolas"/>
+                <a:cs typeface="Consolas"/>
+                <a:sym typeface="Consolas"/>
+              </a:rPr>
+              <a:t>CodeMetrics</a:t>
+            </a:r>
+            <a:r>
+              <a:rPr lang="en-GB" dirty="0">
+                <a:latin typeface="Consolas"/>
+                <a:ea typeface="Consolas"/>
+                <a:cs typeface="Consolas"/>
+                <a:sym typeface="Consolas"/>
+              </a:rPr>
+              <a:t>”</a:t>
+            </a:r>
+          </a:p>
+          <a:p>
+            <a:pPr marL="0" lvl="0" indent="0" algn="l" rtl="0">
+              <a:spcBef>
+                <a:spcPts val="0"/>
+              </a:spcBef>
+              <a:spcAft>
+                <a:spcPts val="0"/>
+              </a:spcAft>
+              <a:buNone/>
+            </a:pPr>
+            <a:endParaRPr dirty="0">
+              <a:latin typeface="Consolas"/>
+              <a:ea typeface="Consolas"/>
+              <a:cs typeface="Consolas"/>
+              <a:sym typeface="Consolas"/>
+            </a:endParaRPr>
+          </a:p>
+        </p:txBody>
+      </p:sp>
+      <p:sp>
+        <p:nvSpPr>
+          <p:cNvPr id="39" name="Google Shape;121;p16">
+            <a:extLst>
+              <a:ext uri="{FF2B5EF4-FFF2-40B4-BE49-F238E27FC236}">
+                <a16:creationId xmlns:a16="http://schemas.microsoft.com/office/drawing/2014/main" id="{D6490F7B-D149-8F1D-51F3-EA1AD7A8BCA4}"/>
+              </a:ext>
+            </a:extLst>
+          </p:cNvPr>
+          <p:cNvSpPr/>
+          <p:nvPr/>
+        </p:nvSpPr>
+        <p:spPr>
+          <a:xfrm>
+            <a:off x="9735861" y="8812560"/>
+            <a:ext cx="2410800" cy="905019"/>
+          </a:xfrm>
+          <a:prstGeom prst="roundRect">
+            <a:avLst>
+              <a:gd name="adj" fmla="val 16667"/>
+            </a:avLst>
+          </a:prstGeom>
+          <a:solidFill>
+            <a:srgbClr val="D0E0E3"/>
+          </a:solidFill>
+          <a:ln w="28575" cap="flat" cmpd="sng">
+            <a:solidFill>
+              <a:srgbClr val="134F5C"/>
+            </a:solidFill>
+            <a:prstDash val="solid"/>
+            <a:round/>
+            <a:headEnd type="none" w="sm" len="sm"/>
+            <a:tailEnd type="none" w="sm" len="sm"/>
+          </a:ln>
+        </p:spPr>
+        <p:txBody>
+          <a:bodyPr spcFirstLastPara="1" wrap="square" lIns="91425" tIns="91425" rIns="91425" bIns="91425" anchor="t" anchorCtr="0">
+            <a:noAutofit/>
+          </a:bodyPr>
+          <a:lstStyle/>
+          <a:p>
+            <a:pPr marL="0" lvl="0" indent="0" algn="l" rtl="0">
+              <a:spcBef>
+                <a:spcPts val="0"/>
+              </a:spcBef>
+              <a:spcAft>
+                <a:spcPts val="0"/>
+              </a:spcAft>
+              <a:buNone/>
+            </a:pPr>
+            <a:r>
+              <a:rPr lang="en-GB" dirty="0">
+                <a:latin typeface="Consolas"/>
+                <a:ea typeface="Consolas"/>
+                <a:cs typeface="Consolas"/>
+                <a:sym typeface="Consolas"/>
+              </a:rPr>
+              <a:t>T3: </a:t>
+            </a:r>
+            <a:r>
+              <a:rPr lang="en-GB" dirty="0" err="1">
+                <a:latin typeface="Consolas"/>
+                <a:ea typeface="Consolas"/>
+                <a:cs typeface="Consolas"/>
+                <a:sym typeface="Consolas"/>
+              </a:rPr>
+              <a:t>Identificar</a:t>
+            </a:r>
+            <a:r>
+              <a:rPr lang="en-GB" dirty="0">
+                <a:latin typeface="Consolas"/>
+                <a:ea typeface="Consolas"/>
+                <a:cs typeface="Consolas"/>
+                <a:sym typeface="Consolas"/>
+              </a:rPr>
+              <a:t> “</a:t>
+            </a:r>
+            <a:r>
+              <a:rPr lang="en-GB" dirty="0" err="1">
+                <a:latin typeface="Consolas"/>
+                <a:ea typeface="Consolas"/>
+                <a:cs typeface="Consolas"/>
+                <a:sym typeface="Consolas"/>
+              </a:rPr>
+              <a:t>CodeMetrics</a:t>
+            </a:r>
+            <a:r>
+              <a:rPr lang="en-GB" dirty="0">
+                <a:latin typeface="Consolas"/>
+                <a:ea typeface="Consolas"/>
+                <a:cs typeface="Consolas"/>
+                <a:sym typeface="Consolas"/>
+              </a:rPr>
+              <a:t>”</a:t>
+            </a:r>
+          </a:p>
+          <a:p>
+            <a:pPr marL="0" lvl="0" indent="0" algn="l" rtl="0">
+              <a:spcBef>
+                <a:spcPts val="0"/>
+              </a:spcBef>
+              <a:spcAft>
+                <a:spcPts val="0"/>
+              </a:spcAft>
+              <a:buNone/>
+            </a:pPr>
+            <a:endParaRPr dirty="0">
+              <a:latin typeface="Consolas"/>
+              <a:ea typeface="Consolas"/>
+              <a:cs typeface="Consolas"/>
+              <a:sym typeface="Consolas"/>
+            </a:endParaRPr>
+          </a:p>
+        </p:txBody>
+      </p:sp>
+      <p:sp>
+        <p:nvSpPr>
+          <p:cNvPr id="40" name="Google Shape;121;p16">
+            <a:extLst>
+              <a:ext uri="{FF2B5EF4-FFF2-40B4-BE49-F238E27FC236}">
+                <a16:creationId xmlns:a16="http://schemas.microsoft.com/office/drawing/2014/main" id="{E90BDC21-53F1-27FF-1B6D-8138E92A6B09}"/>
+              </a:ext>
+            </a:extLst>
+          </p:cNvPr>
+          <p:cNvSpPr/>
+          <p:nvPr/>
+        </p:nvSpPr>
+        <p:spPr>
+          <a:xfrm>
+            <a:off x="9414628" y="1271118"/>
+            <a:ext cx="2410800" cy="610163"/>
+          </a:xfrm>
+          <a:prstGeom prst="roundRect">
+            <a:avLst>
+              <a:gd name="adj" fmla="val 16667"/>
+            </a:avLst>
+          </a:prstGeom>
+          <a:solidFill>
+            <a:srgbClr val="D0E0E3"/>
+          </a:solidFill>
+          <a:ln w="28575" cap="flat" cmpd="sng">
+            <a:solidFill>
+              <a:srgbClr val="134F5C"/>
+            </a:solidFill>
+            <a:prstDash val="solid"/>
+            <a:round/>
+            <a:headEnd type="none" w="sm" len="sm"/>
+            <a:tailEnd type="none" w="sm" len="sm"/>
+          </a:ln>
+        </p:spPr>
+        <p:txBody>
+          <a:bodyPr spcFirstLastPara="1" wrap="square" lIns="91425" tIns="91425" rIns="91425" bIns="91425" anchor="t" anchorCtr="0">
+            <a:noAutofit/>
+          </a:bodyPr>
+          <a:lstStyle/>
+          <a:p>
+            <a:pPr marL="0" lvl="0" indent="0" algn="l" rtl="0">
+              <a:spcBef>
+                <a:spcPts val="0"/>
+              </a:spcBef>
+              <a:spcAft>
+                <a:spcPts val="0"/>
+              </a:spcAft>
+              <a:buNone/>
+            </a:pPr>
+            <a:r>
+              <a:rPr lang="en-GB" dirty="0">
+                <a:latin typeface="Consolas"/>
+                <a:ea typeface="Consolas"/>
+                <a:cs typeface="Consolas"/>
+                <a:sym typeface="Consolas"/>
+              </a:rPr>
+              <a:t>T4: Fazer “</a:t>
+            </a:r>
+            <a:r>
+              <a:rPr lang="en-GB" dirty="0" err="1">
+                <a:latin typeface="Consolas"/>
+                <a:ea typeface="Consolas"/>
+                <a:cs typeface="Consolas"/>
+                <a:sym typeface="Consolas"/>
+              </a:rPr>
+              <a:t>UseCases</a:t>
+            </a:r>
+            <a:r>
+              <a:rPr lang="en-GB" dirty="0">
+                <a:latin typeface="Consolas"/>
+                <a:ea typeface="Consolas"/>
+                <a:cs typeface="Consolas"/>
+                <a:sym typeface="Consolas"/>
+              </a:rPr>
+              <a:t>”</a:t>
+            </a:r>
+          </a:p>
+          <a:p>
+            <a:pPr marL="0" lvl="0" indent="0" algn="l" rtl="0">
+              <a:spcBef>
+                <a:spcPts val="0"/>
+              </a:spcBef>
+              <a:spcAft>
+                <a:spcPts val="0"/>
+              </a:spcAft>
+              <a:buNone/>
+            </a:pPr>
+            <a:endParaRPr dirty="0">
+              <a:latin typeface="Consolas"/>
+              <a:ea typeface="Consolas"/>
+              <a:cs typeface="Consolas"/>
+              <a:sym typeface="Consolas"/>
+            </a:endParaRPr>
+          </a:p>
+        </p:txBody>
+      </p:sp>
+      <p:sp>
+        <p:nvSpPr>
+          <p:cNvPr id="41" name="Google Shape;121;p16">
+            <a:extLst>
+              <a:ext uri="{FF2B5EF4-FFF2-40B4-BE49-F238E27FC236}">
+                <a16:creationId xmlns:a16="http://schemas.microsoft.com/office/drawing/2014/main" id="{AEB5770A-114E-19A6-70C5-1DC0886AD4AF}"/>
+              </a:ext>
+            </a:extLst>
+          </p:cNvPr>
+          <p:cNvSpPr/>
+          <p:nvPr/>
+        </p:nvSpPr>
+        <p:spPr>
+          <a:xfrm>
+            <a:off x="9735861" y="9524639"/>
+            <a:ext cx="2410800" cy="610163"/>
+          </a:xfrm>
+          <a:prstGeom prst="roundRect">
+            <a:avLst>
+              <a:gd name="adj" fmla="val 16667"/>
+            </a:avLst>
+          </a:prstGeom>
+          <a:solidFill>
+            <a:srgbClr val="D0E0E3"/>
+          </a:solidFill>
+          <a:ln w="28575" cap="flat" cmpd="sng">
+            <a:solidFill>
+              <a:srgbClr val="134F5C"/>
+            </a:solidFill>
+            <a:prstDash val="solid"/>
+            <a:round/>
+            <a:headEnd type="none" w="sm" len="sm"/>
+            <a:tailEnd type="none" w="sm" len="sm"/>
+          </a:ln>
+        </p:spPr>
+        <p:txBody>
+          <a:bodyPr spcFirstLastPara="1" wrap="square" lIns="91425" tIns="91425" rIns="91425" bIns="91425" anchor="t" anchorCtr="0">
+            <a:noAutofit/>
+          </a:bodyPr>
+          <a:lstStyle/>
+          <a:p>
+            <a:pPr marL="0" lvl="0" indent="0" algn="l" rtl="0">
+              <a:spcBef>
+                <a:spcPts val="0"/>
+              </a:spcBef>
+              <a:spcAft>
+                <a:spcPts val="0"/>
+              </a:spcAft>
+              <a:buNone/>
+            </a:pPr>
+            <a:r>
+              <a:rPr lang="en-GB" dirty="0">
+                <a:latin typeface="Consolas"/>
+                <a:ea typeface="Consolas"/>
+                <a:cs typeface="Consolas"/>
+                <a:sym typeface="Consolas"/>
+              </a:rPr>
+              <a:t>T4: Fazer “</a:t>
+            </a:r>
+            <a:r>
+              <a:rPr lang="en-GB" dirty="0" err="1">
+                <a:latin typeface="Consolas"/>
+                <a:ea typeface="Consolas"/>
+                <a:cs typeface="Consolas"/>
+                <a:sym typeface="Consolas"/>
+              </a:rPr>
+              <a:t>UseCases</a:t>
+            </a:r>
+            <a:r>
+              <a:rPr lang="en-GB" dirty="0">
+                <a:latin typeface="Consolas"/>
+                <a:ea typeface="Consolas"/>
+                <a:cs typeface="Consolas"/>
+                <a:sym typeface="Consolas"/>
+              </a:rPr>
+              <a:t>”</a:t>
+            </a:r>
+          </a:p>
+          <a:p>
+            <a:pPr marL="0" lvl="0" indent="0" algn="l" rtl="0">
+              <a:spcBef>
+                <a:spcPts val="0"/>
+              </a:spcBef>
+              <a:spcAft>
+                <a:spcPts val="0"/>
+              </a:spcAft>
+              <a:buNone/>
+            </a:pPr>
+            <a:endParaRPr dirty="0">
+              <a:latin typeface="Consolas"/>
+              <a:ea typeface="Consolas"/>
+              <a:cs typeface="Consolas"/>
+              <a:sym typeface="Consolas"/>
+            </a:endParaRPr>
+          </a:p>
+        </p:txBody>
+      </p:sp>
+      <p:sp>
+        <p:nvSpPr>
+          <p:cNvPr id="42" name="Google Shape;121;p16">
+            <a:extLst>
+              <a:ext uri="{FF2B5EF4-FFF2-40B4-BE49-F238E27FC236}">
+                <a16:creationId xmlns:a16="http://schemas.microsoft.com/office/drawing/2014/main" id="{11111CBA-DAA2-BE6C-0011-A1B3C0A969B6}"/>
+              </a:ext>
+            </a:extLst>
+          </p:cNvPr>
+          <p:cNvSpPr/>
+          <p:nvPr/>
+        </p:nvSpPr>
+        <p:spPr>
+          <a:xfrm>
+            <a:off x="9745929" y="7559935"/>
+            <a:ext cx="2410800" cy="610163"/>
+          </a:xfrm>
+          <a:prstGeom prst="roundRect">
+            <a:avLst>
+              <a:gd name="adj" fmla="val 16667"/>
+            </a:avLst>
+          </a:prstGeom>
+          <a:solidFill>
+            <a:srgbClr val="D0E0E3"/>
+          </a:solidFill>
+          <a:ln w="28575" cap="flat" cmpd="sng">
+            <a:solidFill>
+              <a:srgbClr val="134F5C"/>
+            </a:solidFill>
+            <a:prstDash val="solid"/>
+            <a:round/>
+            <a:headEnd type="none" w="sm" len="sm"/>
+            <a:tailEnd type="none" w="sm" len="sm"/>
+          </a:ln>
+        </p:spPr>
+        <p:txBody>
+          <a:bodyPr spcFirstLastPara="1" wrap="square" lIns="91425" tIns="91425" rIns="91425" bIns="91425" anchor="t" anchorCtr="0">
+            <a:noAutofit/>
+          </a:bodyPr>
+          <a:lstStyle/>
+          <a:p>
+            <a:pPr marL="0" lvl="0" indent="0" algn="l" rtl="0">
+              <a:spcBef>
+                <a:spcPts val="0"/>
+              </a:spcBef>
+              <a:spcAft>
+                <a:spcPts val="0"/>
+              </a:spcAft>
+              <a:buNone/>
+            </a:pPr>
+            <a:r>
+              <a:rPr lang="en-GB" dirty="0">
+                <a:latin typeface="Consolas"/>
+                <a:ea typeface="Consolas"/>
+                <a:cs typeface="Consolas"/>
+                <a:sym typeface="Consolas"/>
+              </a:rPr>
+              <a:t>T4: Fazer “</a:t>
+            </a:r>
+            <a:r>
+              <a:rPr lang="en-GB" dirty="0" err="1">
+                <a:latin typeface="Consolas"/>
+                <a:ea typeface="Consolas"/>
+                <a:cs typeface="Consolas"/>
+                <a:sym typeface="Consolas"/>
+              </a:rPr>
+              <a:t>UseCases</a:t>
+            </a:r>
+            <a:r>
+              <a:rPr lang="en-GB" dirty="0">
+                <a:latin typeface="Consolas"/>
+                <a:ea typeface="Consolas"/>
+                <a:cs typeface="Consolas"/>
+                <a:sym typeface="Consolas"/>
+              </a:rPr>
+              <a:t>”</a:t>
+            </a:r>
+          </a:p>
+          <a:p>
+            <a:pPr marL="0" lvl="0" indent="0" algn="l" rtl="0">
+              <a:spcBef>
+                <a:spcPts val="0"/>
+              </a:spcBef>
+              <a:spcAft>
+                <a:spcPts val="0"/>
+              </a:spcAft>
+              <a:buNone/>
+            </a:pPr>
+            <a:endParaRPr dirty="0">
+              <a:latin typeface="Consolas"/>
+              <a:ea typeface="Consolas"/>
+              <a:cs typeface="Consolas"/>
+              <a:sym typeface="Consolas"/>
+            </a:endParaRPr>
+          </a:p>
+        </p:txBody>
+      </p:sp>
+      <p:sp>
+        <p:nvSpPr>
+          <p:cNvPr id="43" name="Google Shape;121;p16">
+            <a:extLst>
+              <a:ext uri="{FF2B5EF4-FFF2-40B4-BE49-F238E27FC236}">
+                <a16:creationId xmlns:a16="http://schemas.microsoft.com/office/drawing/2014/main" id="{0AF5B3E6-751E-F04E-EBD5-D8B6512097F8}"/>
+              </a:ext>
+            </a:extLst>
+          </p:cNvPr>
+          <p:cNvSpPr/>
+          <p:nvPr/>
+        </p:nvSpPr>
+        <p:spPr>
+          <a:xfrm>
+            <a:off x="9657648" y="4339391"/>
+            <a:ext cx="2410800" cy="610163"/>
+          </a:xfrm>
+          <a:prstGeom prst="roundRect">
+            <a:avLst>
+              <a:gd name="adj" fmla="val 16667"/>
+            </a:avLst>
+          </a:prstGeom>
+          <a:solidFill>
+            <a:srgbClr val="D0E0E3"/>
+          </a:solidFill>
+          <a:ln w="28575" cap="flat" cmpd="sng">
+            <a:solidFill>
+              <a:srgbClr val="134F5C"/>
+            </a:solidFill>
+            <a:prstDash val="solid"/>
+            <a:round/>
+            <a:headEnd type="none" w="sm" len="sm"/>
+            <a:tailEnd type="none" w="sm" len="sm"/>
+          </a:ln>
+        </p:spPr>
+        <p:txBody>
+          <a:bodyPr spcFirstLastPara="1" wrap="square" lIns="91425" tIns="91425" rIns="91425" bIns="91425" anchor="t" anchorCtr="0">
+            <a:noAutofit/>
+          </a:bodyPr>
+          <a:lstStyle/>
+          <a:p>
+            <a:pPr marL="0" lvl="0" indent="0" algn="l" rtl="0">
+              <a:spcBef>
+                <a:spcPts val="0"/>
+              </a:spcBef>
+              <a:spcAft>
+                <a:spcPts val="0"/>
+              </a:spcAft>
+              <a:buNone/>
+            </a:pPr>
+            <a:r>
+              <a:rPr lang="en-GB" dirty="0">
+                <a:latin typeface="Consolas"/>
+                <a:ea typeface="Consolas"/>
+                <a:cs typeface="Consolas"/>
+                <a:sym typeface="Consolas"/>
+              </a:rPr>
+              <a:t>T4: Fazer “</a:t>
+            </a:r>
+            <a:r>
+              <a:rPr lang="en-GB" dirty="0" err="1">
+                <a:latin typeface="Consolas"/>
+                <a:ea typeface="Consolas"/>
+                <a:cs typeface="Consolas"/>
+                <a:sym typeface="Consolas"/>
+              </a:rPr>
+              <a:t>UseCases</a:t>
+            </a:r>
+            <a:r>
+              <a:rPr lang="en-GB" dirty="0">
+                <a:latin typeface="Consolas"/>
+                <a:ea typeface="Consolas"/>
+                <a:cs typeface="Consolas"/>
+                <a:sym typeface="Consolas"/>
+              </a:rPr>
+              <a:t>”</a:t>
+            </a:r>
+          </a:p>
+          <a:p>
+            <a:pPr marL="0" lvl="0" indent="0" algn="l" rtl="0">
+              <a:spcBef>
+                <a:spcPts val="0"/>
+              </a:spcBef>
+              <a:spcAft>
+                <a:spcPts val="0"/>
+              </a:spcAft>
+              <a:buNone/>
+            </a:pPr>
+            <a:endParaRPr dirty="0">
+              <a:latin typeface="Consolas"/>
+              <a:ea typeface="Consolas"/>
+              <a:cs typeface="Consolas"/>
+              <a:sym typeface="Consolas"/>
+            </a:endParaRPr>
+          </a:p>
+        </p:txBody>
+      </p:sp>
+      <p:sp>
+        <p:nvSpPr>
+          <p:cNvPr id="44" name="Google Shape;121;p16">
+            <a:extLst>
+              <a:ext uri="{FF2B5EF4-FFF2-40B4-BE49-F238E27FC236}">
+                <a16:creationId xmlns:a16="http://schemas.microsoft.com/office/drawing/2014/main" id="{17FFF2D9-AFF2-50D5-4B27-C8F96A47A498}"/>
+              </a:ext>
+            </a:extLst>
+          </p:cNvPr>
+          <p:cNvSpPr/>
+          <p:nvPr/>
+        </p:nvSpPr>
+        <p:spPr>
+          <a:xfrm>
+            <a:off x="9533166" y="2867401"/>
+            <a:ext cx="2410800" cy="610163"/>
+          </a:xfrm>
+          <a:prstGeom prst="roundRect">
+            <a:avLst>
+              <a:gd name="adj" fmla="val 16667"/>
+            </a:avLst>
+          </a:prstGeom>
+          <a:solidFill>
+            <a:srgbClr val="D0E0E3"/>
+          </a:solidFill>
+          <a:ln w="28575" cap="flat" cmpd="sng">
+            <a:solidFill>
+              <a:srgbClr val="134F5C"/>
+            </a:solidFill>
+            <a:prstDash val="solid"/>
+            <a:round/>
+            <a:headEnd type="none" w="sm" len="sm"/>
+            <a:tailEnd type="none" w="sm" len="sm"/>
+          </a:ln>
+        </p:spPr>
+        <p:txBody>
+          <a:bodyPr spcFirstLastPara="1" wrap="square" lIns="91425" tIns="91425" rIns="91425" bIns="91425" anchor="t" anchorCtr="0">
+            <a:noAutofit/>
+          </a:bodyPr>
+          <a:lstStyle/>
+          <a:p>
+            <a:pPr marL="0" lvl="0" indent="0" algn="l" rtl="0">
+              <a:spcBef>
+                <a:spcPts val="0"/>
+              </a:spcBef>
+              <a:spcAft>
+                <a:spcPts val="0"/>
+              </a:spcAft>
+              <a:buNone/>
+            </a:pPr>
+            <a:r>
+              <a:rPr lang="en-GB" dirty="0">
+                <a:latin typeface="Consolas"/>
+                <a:ea typeface="Consolas"/>
+                <a:cs typeface="Consolas"/>
+                <a:sym typeface="Consolas"/>
+              </a:rPr>
+              <a:t>T4: Fazer “</a:t>
+            </a:r>
+            <a:r>
+              <a:rPr lang="en-GB" dirty="0" err="1">
+                <a:latin typeface="Consolas"/>
+                <a:ea typeface="Consolas"/>
+                <a:cs typeface="Consolas"/>
+                <a:sym typeface="Consolas"/>
+              </a:rPr>
+              <a:t>UseCases</a:t>
+            </a:r>
+            <a:r>
+              <a:rPr lang="en-GB" dirty="0">
+                <a:latin typeface="Consolas"/>
+                <a:ea typeface="Consolas"/>
+                <a:cs typeface="Consolas"/>
+                <a:sym typeface="Consolas"/>
+              </a:rPr>
+              <a:t>”</a:t>
+            </a:r>
+          </a:p>
+          <a:p>
+            <a:pPr marL="0" lvl="0" indent="0" algn="l" rtl="0">
+              <a:spcBef>
+                <a:spcPts val="0"/>
+              </a:spcBef>
+              <a:spcAft>
+                <a:spcPts val="0"/>
+              </a:spcAft>
+              <a:buNone/>
+            </a:pPr>
+            <a:endParaRPr dirty="0">
+              <a:latin typeface="Consolas"/>
+              <a:ea typeface="Consolas"/>
+              <a:cs typeface="Consolas"/>
+              <a:sym typeface="Consolas"/>
+            </a:endParaRPr>
+          </a:p>
+        </p:txBody>
+      </p:sp>
+      <p:sp>
+        <p:nvSpPr>
+          <p:cNvPr id="45" name="Google Shape;121;p16">
+            <a:extLst>
+              <a:ext uri="{FF2B5EF4-FFF2-40B4-BE49-F238E27FC236}">
+                <a16:creationId xmlns:a16="http://schemas.microsoft.com/office/drawing/2014/main" id="{40082015-5236-737F-1643-0998FA6EBDAF}"/>
+              </a:ext>
+            </a:extLst>
+          </p:cNvPr>
+          <p:cNvSpPr/>
+          <p:nvPr/>
+        </p:nvSpPr>
+        <p:spPr>
+          <a:xfrm>
+            <a:off x="9745929" y="6502342"/>
+            <a:ext cx="2410800" cy="610163"/>
+          </a:xfrm>
+          <a:prstGeom prst="roundRect">
+            <a:avLst>
+              <a:gd name="adj" fmla="val 16667"/>
+            </a:avLst>
+          </a:prstGeom>
+          <a:solidFill>
+            <a:srgbClr val="D0E0E3"/>
+          </a:solidFill>
+          <a:ln w="28575" cap="flat" cmpd="sng">
+            <a:solidFill>
+              <a:srgbClr val="134F5C"/>
+            </a:solidFill>
+            <a:prstDash val="solid"/>
+            <a:round/>
+            <a:headEnd type="none" w="sm" len="sm"/>
+            <a:tailEnd type="none" w="sm" len="sm"/>
+          </a:ln>
+        </p:spPr>
+        <p:txBody>
+          <a:bodyPr spcFirstLastPara="1" wrap="square" lIns="91425" tIns="91425" rIns="91425" bIns="91425" anchor="t" anchorCtr="0">
+            <a:noAutofit/>
+          </a:bodyPr>
+          <a:lstStyle/>
+          <a:p>
+            <a:pPr marL="0" lvl="0" indent="0" algn="l" rtl="0">
+              <a:spcBef>
+                <a:spcPts val="0"/>
+              </a:spcBef>
+              <a:spcAft>
+                <a:spcPts val="0"/>
+              </a:spcAft>
+              <a:buNone/>
+            </a:pPr>
+            <a:r>
+              <a:rPr lang="en-GB" dirty="0">
+                <a:latin typeface="Consolas"/>
+                <a:ea typeface="Consolas"/>
+                <a:cs typeface="Consolas"/>
+                <a:sym typeface="Consolas"/>
+              </a:rPr>
+              <a:t>T4: Fazer “</a:t>
+            </a:r>
+            <a:r>
+              <a:rPr lang="en-GB" dirty="0" err="1">
+                <a:latin typeface="Consolas"/>
+                <a:ea typeface="Consolas"/>
+                <a:cs typeface="Consolas"/>
+                <a:sym typeface="Consolas"/>
+              </a:rPr>
+              <a:t>UseCases</a:t>
+            </a:r>
+            <a:r>
+              <a:rPr lang="en-GB" dirty="0">
+                <a:latin typeface="Consolas"/>
+                <a:ea typeface="Consolas"/>
+                <a:cs typeface="Consolas"/>
+                <a:sym typeface="Consolas"/>
+              </a:rPr>
+              <a:t>”</a:t>
+            </a:r>
+          </a:p>
+          <a:p>
+            <a:pPr marL="0" lvl="0" indent="0" algn="l" rtl="0">
+              <a:spcBef>
+                <a:spcPts val="0"/>
+              </a:spcBef>
+              <a:spcAft>
+                <a:spcPts val="0"/>
+              </a:spcAft>
+              <a:buNone/>
+            </a:pPr>
+            <a:endParaRPr dirty="0">
+              <a:latin typeface="Consolas"/>
+              <a:ea typeface="Consolas"/>
+              <a:cs typeface="Consolas"/>
+              <a:sym typeface="Consolas"/>
+            </a:endParaRPr>
+          </a:p>
+        </p:txBody>
+      </p:sp>
+    </p:spTree>
+    <p:extLst>
+      <p:ext uri="{BB962C8B-B14F-4D97-AF65-F5344CB8AC3E}">
+        <p14:creationId xmlns:p14="http://schemas.microsoft.com/office/powerpoint/2010/main" val="288175161"/>
+      </p:ext>
+    </p:extLst>
+  </p:cSld>
+  <p:clrMapOvr>
+    <a:masterClrMapping/>
+  </p:clrMapOvr>
+</p:sld>
+</file>
+
 <file path=ppt/theme/theme1.xml><?xml version="1.0" encoding="utf-8"?>
 <a:theme xmlns:a="http://schemas.openxmlformats.org/drawingml/2006/main" name="Simple Light">
   <a:themeElements>

--- a/SE202526/Management/Scrum Board.pptx
+++ b/SE202526/Management/Scrum Board.pptx
@@ -13210,6 +13210,246 @@
           </a:p>
         </p:txBody>
       </p:sp>
+      <p:sp>
+        <p:nvSpPr>
+          <p:cNvPr id="15" name="Google Shape;92;p15">
+            <a:extLst>
+              <a:ext uri="{FF2B5EF4-FFF2-40B4-BE49-F238E27FC236}">
+                <a16:creationId xmlns:a16="http://schemas.microsoft.com/office/drawing/2014/main" id="{5A2EF24F-5AB4-C041-D7F9-BF2EBBE8D2E1}"/>
+              </a:ext>
+            </a:extLst>
+          </p:cNvPr>
+          <p:cNvSpPr/>
+          <p:nvPr/>
+        </p:nvSpPr>
+        <p:spPr>
+          <a:xfrm>
+            <a:off x="270828" y="872940"/>
+            <a:ext cx="2185575" cy="1792037"/>
+          </a:xfrm>
+          <a:prstGeom prst="roundRect">
+            <a:avLst>
+              <a:gd name="adj" fmla="val 16667"/>
+            </a:avLst>
+          </a:prstGeom>
+          <a:solidFill>
+            <a:srgbClr val="D9EAD3"/>
+          </a:solidFill>
+          <a:ln w="28575" cap="flat" cmpd="sng">
+            <a:solidFill>
+              <a:srgbClr val="274E13"/>
+            </a:solidFill>
+            <a:prstDash val="solid"/>
+            <a:round/>
+            <a:headEnd type="none" w="sm" len="sm"/>
+            <a:tailEnd type="none" w="sm" len="sm"/>
+          </a:ln>
+        </p:spPr>
+        <p:txBody>
+          <a:bodyPr spcFirstLastPara="1" wrap="square" lIns="91425" tIns="91425" rIns="91425" bIns="91425" anchor="t" anchorCtr="0">
+            <a:noAutofit/>
+          </a:bodyPr>
+          <a:lstStyle/>
+          <a:p>
+            <a:pPr lvl="0"/>
+            <a:r>
+              <a:rPr lang="pt-PT" dirty="0">
+                <a:latin typeface="Consolas"/>
+                <a:ea typeface="Consolas"/>
+                <a:cs typeface="Consolas"/>
+                <a:sym typeface="Consolas"/>
+              </a:rPr>
+              <a:t>T1: Identificar design patterns.</a:t>
+            </a:r>
+            <a:endParaRPr dirty="0">
+              <a:latin typeface="Consolas"/>
+              <a:ea typeface="Consolas"/>
+              <a:cs typeface="Consolas"/>
+              <a:sym typeface="Consolas"/>
+            </a:endParaRPr>
+          </a:p>
+        </p:txBody>
+      </p:sp>
+      <p:sp>
+        <p:nvSpPr>
+          <p:cNvPr id="16" name="Google Shape;92;p15">
+            <a:extLst>
+              <a:ext uri="{FF2B5EF4-FFF2-40B4-BE49-F238E27FC236}">
+                <a16:creationId xmlns:a16="http://schemas.microsoft.com/office/drawing/2014/main" id="{EF607294-7302-19A7-8FE5-1DD1B55FCB89}"/>
+              </a:ext>
+            </a:extLst>
+          </p:cNvPr>
+          <p:cNvSpPr/>
+          <p:nvPr/>
+        </p:nvSpPr>
+        <p:spPr>
+          <a:xfrm>
+            <a:off x="277880" y="2783177"/>
+            <a:ext cx="2185575" cy="1792037"/>
+          </a:xfrm>
+          <a:prstGeom prst="roundRect">
+            <a:avLst>
+              <a:gd name="adj" fmla="val 16667"/>
+            </a:avLst>
+          </a:prstGeom>
+          <a:solidFill>
+            <a:srgbClr val="D9EAD3"/>
+          </a:solidFill>
+          <a:ln w="28575" cap="flat" cmpd="sng">
+            <a:solidFill>
+              <a:srgbClr val="274E13"/>
+            </a:solidFill>
+            <a:prstDash val="solid"/>
+            <a:round/>
+            <a:headEnd type="none" w="sm" len="sm"/>
+            <a:tailEnd type="none" w="sm" len="sm"/>
+          </a:ln>
+        </p:spPr>
+        <p:txBody>
+          <a:bodyPr spcFirstLastPara="1" wrap="square" lIns="91425" tIns="91425" rIns="91425" bIns="91425" anchor="t" anchorCtr="0">
+            <a:noAutofit/>
+          </a:bodyPr>
+          <a:lstStyle/>
+          <a:p>
+            <a:pPr lvl="0"/>
+            <a:r>
+              <a:rPr lang="pt-PT" dirty="0">
+                <a:latin typeface="Consolas"/>
+                <a:ea typeface="Consolas"/>
+                <a:cs typeface="Consolas"/>
+                <a:sym typeface="Consolas"/>
+              </a:rPr>
+              <a:t>T2: Identificar Code Smells.</a:t>
+            </a:r>
+            <a:endParaRPr dirty="0">
+              <a:latin typeface="Consolas"/>
+              <a:ea typeface="Consolas"/>
+              <a:cs typeface="Consolas"/>
+              <a:sym typeface="Consolas"/>
+            </a:endParaRPr>
+          </a:p>
+        </p:txBody>
+      </p:sp>
+      <p:sp>
+        <p:nvSpPr>
+          <p:cNvPr id="17" name="Google Shape;92;p15">
+            <a:extLst>
+              <a:ext uri="{FF2B5EF4-FFF2-40B4-BE49-F238E27FC236}">
+                <a16:creationId xmlns:a16="http://schemas.microsoft.com/office/drawing/2014/main" id="{47B9C22B-D9D4-8945-E1CA-DF6AD2F1F04D}"/>
+              </a:ext>
+            </a:extLst>
+          </p:cNvPr>
+          <p:cNvSpPr/>
+          <p:nvPr/>
+        </p:nvSpPr>
+        <p:spPr>
+          <a:xfrm>
+            <a:off x="277880" y="4699227"/>
+            <a:ext cx="2185575" cy="1792037"/>
+          </a:xfrm>
+          <a:prstGeom prst="roundRect">
+            <a:avLst>
+              <a:gd name="adj" fmla="val 16667"/>
+            </a:avLst>
+          </a:prstGeom>
+          <a:solidFill>
+            <a:srgbClr val="D9EAD3"/>
+          </a:solidFill>
+          <a:ln w="28575" cap="flat" cmpd="sng">
+            <a:solidFill>
+              <a:srgbClr val="274E13"/>
+            </a:solidFill>
+            <a:prstDash val="solid"/>
+            <a:round/>
+            <a:headEnd type="none" w="sm" len="sm"/>
+            <a:tailEnd type="none" w="sm" len="sm"/>
+          </a:ln>
+        </p:spPr>
+        <p:txBody>
+          <a:bodyPr spcFirstLastPara="1" wrap="square" lIns="91425" tIns="91425" rIns="91425" bIns="91425" anchor="t" anchorCtr="0">
+            <a:noAutofit/>
+          </a:bodyPr>
+          <a:lstStyle/>
+          <a:p>
+            <a:pPr lvl="0"/>
+            <a:r>
+              <a:rPr lang="pt-PT" dirty="0">
+                <a:latin typeface="Consolas"/>
+                <a:ea typeface="Consolas"/>
+                <a:cs typeface="Consolas"/>
+                <a:sym typeface="Consolas"/>
+              </a:rPr>
+              <a:t>T3: Identificar Code Metrics.</a:t>
+            </a:r>
+            <a:endParaRPr dirty="0">
+              <a:latin typeface="Consolas"/>
+              <a:ea typeface="Consolas"/>
+              <a:cs typeface="Consolas"/>
+              <a:sym typeface="Consolas"/>
+            </a:endParaRPr>
+          </a:p>
+        </p:txBody>
+      </p:sp>
+      <p:sp>
+        <p:nvSpPr>
+          <p:cNvPr id="18" name="Google Shape;92;p15">
+            <a:extLst>
+              <a:ext uri="{FF2B5EF4-FFF2-40B4-BE49-F238E27FC236}">
+                <a16:creationId xmlns:a16="http://schemas.microsoft.com/office/drawing/2014/main" id="{1B834BA1-D552-1CB3-225C-F2A7FDCB877D}"/>
+              </a:ext>
+            </a:extLst>
+          </p:cNvPr>
+          <p:cNvSpPr/>
+          <p:nvPr/>
+        </p:nvSpPr>
+        <p:spPr>
+          <a:xfrm>
+            <a:off x="277880" y="6615277"/>
+            <a:ext cx="2185575" cy="1792037"/>
+          </a:xfrm>
+          <a:prstGeom prst="roundRect">
+            <a:avLst>
+              <a:gd name="adj" fmla="val 16667"/>
+            </a:avLst>
+          </a:prstGeom>
+          <a:solidFill>
+            <a:srgbClr val="D9EAD3"/>
+          </a:solidFill>
+          <a:ln w="28575" cap="flat" cmpd="sng">
+            <a:solidFill>
+              <a:srgbClr val="274E13"/>
+            </a:solidFill>
+            <a:prstDash val="solid"/>
+            <a:round/>
+            <a:headEnd type="none" w="sm" len="sm"/>
+            <a:tailEnd type="none" w="sm" len="sm"/>
+          </a:ln>
+        </p:spPr>
+        <p:txBody>
+          <a:bodyPr spcFirstLastPara="1" wrap="square" lIns="91425" tIns="91425" rIns="91425" bIns="91425" anchor="t" anchorCtr="0">
+            <a:noAutofit/>
+          </a:bodyPr>
+          <a:lstStyle/>
+          <a:p>
+            <a:pPr lvl="0"/>
+            <a:r>
+              <a:rPr lang="pt-PT" dirty="0">
+                <a:latin typeface="Consolas"/>
+                <a:ea typeface="Consolas"/>
+                <a:cs typeface="Consolas"/>
+                <a:sym typeface="Consolas"/>
+              </a:rPr>
+              <a:t>T4: Fazer Use Cases.</a:t>
+            </a:r>
+            <a:endParaRPr dirty="0">
+              <a:latin typeface="Consolas"/>
+              <a:ea typeface="Consolas"/>
+              <a:cs typeface="Consolas"/>
+              <a:sym typeface="Consolas"/>
+            </a:endParaRPr>
+          </a:p>
+        </p:txBody>
+      </p:sp>
     </p:spTree>
     <p:extLst>
       <p:ext uri="{BB962C8B-B14F-4D97-AF65-F5344CB8AC3E}">

--- a/SE202526/Management/Scrum Board.pptx
+++ b/SE202526/Management/Scrum Board.pptx
@@ -5,7 +5,7 @@
     <p:sldMasterId id="2147483659" r:id="rId1"/>
   </p:sldMasterIdLst>
   <p:notesMasterIdLst>
-    <p:notesMasterId r:id="rId18"/>
+    <p:notesMasterId r:id="rId22"/>
   </p:notesMasterIdLst>
   <p:sldIdLst>
     <p:sldId id="256" r:id="rId2"/>
@@ -24,6 +24,10 @@
     <p:sldId id="268" r:id="rId15"/>
     <p:sldId id="264" r:id="rId16"/>
     <p:sldId id="267" r:id="rId17"/>
+    <p:sldId id="274" r:id="rId18"/>
+    <p:sldId id="275" r:id="rId19"/>
+    <p:sldId id="276" r:id="rId20"/>
+    <p:sldId id="277" r:id="rId21"/>
   </p:sldIdLst>
   <p:sldSz cx="21599525" cy="10799763"/>
   <p:notesSz cx="6858000" cy="9144000"/>
@@ -1709,6 +1713,387 @@
 </p:notes>
 </file>
 
+<file path=ppt/notesSlides/notesSlide17.xml><?xml version="1.0" encoding="utf-8"?>
+<p:notes xmlns:a="http://schemas.openxmlformats.org/drawingml/2006/main" xmlns:r="http://schemas.openxmlformats.org/officeDocument/2006/relationships" xmlns:p="http://schemas.openxmlformats.org/presentationml/2006/main" showMasterSp="0" showMasterPhAnim="0">
+  <p:cSld>
+    <p:spTree>
+      <p:nvGrpSpPr>
+        <p:cNvPr id="1" name="Shape 217">
+          <a:extLst>
+            <a:ext uri="{FF2B5EF4-FFF2-40B4-BE49-F238E27FC236}">
+              <a16:creationId xmlns:a16="http://schemas.microsoft.com/office/drawing/2014/main" id="{59CFDF11-7E9A-98F6-F6F5-9A0D35B86F94}"/>
+            </a:ext>
+          </a:extLst>
+        </p:cNvPr>
+        <p:cNvGrpSpPr/>
+        <p:nvPr/>
+      </p:nvGrpSpPr>
+      <p:grpSpPr>
+        <a:xfrm>
+          <a:off x="0" y="0"/>
+          <a:ext cx="0" cy="0"/>
+          <a:chOff x="0" y="0"/>
+          <a:chExt cx="0" cy="0"/>
+        </a:xfrm>
+      </p:grpSpPr>
+      <p:sp>
+        <p:nvSpPr>
+          <p:cNvPr id="218" name="Google Shape;218;g3850b307b58_0_258:notes">
+            <a:extLst>
+              <a:ext uri="{FF2B5EF4-FFF2-40B4-BE49-F238E27FC236}">
+                <a16:creationId xmlns:a16="http://schemas.microsoft.com/office/drawing/2014/main" id="{21267B66-2123-11D1-AC1A-119024D18B6A}"/>
+              </a:ext>
+            </a:extLst>
+          </p:cNvPr>
+          <p:cNvSpPr>
+            <a:spLocks noGrp="1" noRot="1" noChangeAspect="1"/>
+          </p:cNvSpPr>
+          <p:nvPr>
+            <p:ph type="sldImg" idx="2"/>
+          </p:nvPr>
+        </p:nvSpPr>
+        <p:spPr>
+          <a:xfrm>
+            <a:off x="0" y="685800"/>
+            <a:ext cx="6858000" cy="3429000"/>
+          </a:xfrm>
+          <a:custGeom>
+            <a:avLst/>
+            <a:gdLst/>
+            <a:ahLst/>
+            <a:cxnLst/>
+            <a:rect l="l" t="t" r="r" b="b"/>
+            <a:pathLst>
+              <a:path w="120000" h="120000" extrusionOk="0">
+                <a:moveTo>
+                  <a:pt x="0" y="0"/>
+                </a:moveTo>
+                <a:lnTo>
+                  <a:pt x="120000" y="0"/>
+                </a:lnTo>
+                <a:lnTo>
+                  <a:pt x="120000" y="120000"/>
+                </a:lnTo>
+                <a:lnTo>
+                  <a:pt x="0" y="120000"/>
+                </a:lnTo>
+                <a:close/>
+              </a:path>
+            </a:pathLst>
+          </a:custGeom>
+        </p:spPr>
+      </p:sp>
+      <p:sp>
+        <p:nvSpPr>
+          <p:cNvPr id="219" name="Google Shape;219;g3850b307b58_0_258:notes">
+            <a:extLst>
+              <a:ext uri="{FF2B5EF4-FFF2-40B4-BE49-F238E27FC236}">
+                <a16:creationId xmlns:a16="http://schemas.microsoft.com/office/drawing/2014/main" id="{3EFA0D23-17AC-2FA6-0957-0DBBDECBFFBF}"/>
+              </a:ext>
+            </a:extLst>
+          </p:cNvPr>
+          <p:cNvSpPr txBox="1">
+            <a:spLocks noGrp="1"/>
+          </p:cNvSpPr>
+          <p:nvPr>
+            <p:ph type="body" idx="1"/>
+          </p:nvPr>
+        </p:nvSpPr>
+        <p:spPr>
+          <a:xfrm>
+            <a:off x="685800" y="4343400"/>
+            <a:ext cx="5486400" cy="4114800"/>
+          </a:xfrm>
+          <a:prstGeom prst="rect">
+            <a:avLst/>
+          </a:prstGeom>
+        </p:spPr>
+        <p:txBody>
+          <a:bodyPr spcFirstLastPara="1" wrap="square" lIns="91425" tIns="91425" rIns="91425" bIns="91425" anchor="t" anchorCtr="0">
+            <a:noAutofit/>
+          </a:bodyPr>
+          <a:lstStyle/>
+          <a:p>
+            <a:pPr marL="0" lvl="0" indent="0" algn="l" rtl="0">
+              <a:spcBef>
+                <a:spcPts val="0"/>
+              </a:spcBef>
+              <a:spcAft>
+                <a:spcPts val="0"/>
+              </a:spcAft>
+              <a:buNone/>
+            </a:pPr>
+            <a:endParaRPr/>
+          </a:p>
+        </p:txBody>
+      </p:sp>
+    </p:spTree>
+    <p:extLst>
+      <p:ext uri="{BB962C8B-B14F-4D97-AF65-F5344CB8AC3E}">
+        <p14:creationId xmlns:p14="http://schemas.microsoft.com/office/powerpoint/2010/main" val="1422058924"/>
+      </p:ext>
+    </p:extLst>
+  </p:cSld>
+  <p:clrMapOvr>
+    <a:masterClrMapping/>
+  </p:clrMapOvr>
+</p:notes>
+</file>
+
+<file path=ppt/notesSlides/notesSlide18.xml><?xml version="1.0" encoding="utf-8"?>
+<p:notes xmlns:a="http://schemas.openxmlformats.org/drawingml/2006/main" xmlns:r="http://schemas.openxmlformats.org/officeDocument/2006/relationships" xmlns:p="http://schemas.openxmlformats.org/presentationml/2006/main" showMasterSp="0" showMasterPhAnim="0">
+  <p:cSld>
+    <p:spTree>
+      <p:nvGrpSpPr>
+        <p:cNvPr id="1" name="Shape 186">
+          <a:extLst>
+            <a:ext uri="{FF2B5EF4-FFF2-40B4-BE49-F238E27FC236}">
+              <a16:creationId xmlns:a16="http://schemas.microsoft.com/office/drawing/2014/main" id="{8888A771-CE03-94E4-C93B-9332CFAFA714}"/>
+            </a:ext>
+          </a:extLst>
+        </p:cNvPr>
+        <p:cNvGrpSpPr/>
+        <p:nvPr/>
+      </p:nvGrpSpPr>
+      <p:grpSpPr>
+        <a:xfrm>
+          <a:off x="0" y="0"/>
+          <a:ext cx="0" cy="0"/>
+          <a:chOff x="0" y="0"/>
+          <a:chExt cx="0" cy="0"/>
+        </a:xfrm>
+      </p:grpSpPr>
+      <p:sp>
+        <p:nvSpPr>
+          <p:cNvPr id="187" name="Google Shape;187;g3850b307b58_0_218:notes">
+            <a:extLst>
+              <a:ext uri="{FF2B5EF4-FFF2-40B4-BE49-F238E27FC236}">
+                <a16:creationId xmlns:a16="http://schemas.microsoft.com/office/drawing/2014/main" id="{6A3ABE09-EDDD-B6D0-E001-FDF4D8600E3B}"/>
+              </a:ext>
+            </a:extLst>
+          </p:cNvPr>
+          <p:cNvSpPr>
+            <a:spLocks noGrp="1" noRot="1" noChangeAspect="1"/>
+          </p:cNvSpPr>
+          <p:nvPr>
+            <p:ph type="sldImg" idx="2"/>
+          </p:nvPr>
+        </p:nvSpPr>
+        <p:spPr>
+          <a:xfrm>
+            <a:off x="0" y="685800"/>
+            <a:ext cx="6858000" cy="3429000"/>
+          </a:xfrm>
+          <a:custGeom>
+            <a:avLst/>
+            <a:gdLst/>
+            <a:ahLst/>
+            <a:cxnLst/>
+            <a:rect l="l" t="t" r="r" b="b"/>
+            <a:pathLst>
+              <a:path w="120000" h="120000" extrusionOk="0">
+                <a:moveTo>
+                  <a:pt x="0" y="0"/>
+                </a:moveTo>
+                <a:lnTo>
+                  <a:pt x="120000" y="0"/>
+                </a:lnTo>
+                <a:lnTo>
+                  <a:pt x="120000" y="120000"/>
+                </a:lnTo>
+                <a:lnTo>
+                  <a:pt x="0" y="120000"/>
+                </a:lnTo>
+                <a:close/>
+              </a:path>
+            </a:pathLst>
+          </a:custGeom>
+        </p:spPr>
+      </p:sp>
+      <p:sp>
+        <p:nvSpPr>
+          <p:cNvPr id="188" name="Google Shape;188;g3850b307b58_0_218:notes">
+            <a:extLst>
+              <a:ext uri="{FF2B5EF4-FFF2-40B4-BE49-F238E27FC236}">
+                <a16:creationId xmlns:a16="http://schemas.microsoft.com/office/drawing/2014/main" id="{E9B2AA31-51DD-0FC8-4986-A22E1192BF16}"/>
+              </a:ext>
+            </a:extLst>
+          </p:cNvPr>
+          <p:cNvSpPr txBox="1">
+            <a:spLocks noGrp="1"/>
+          </p:cNvSpPr>
+          <p:nvPr>
+            <p:ph type="body" idx="1"/>
+          </p:nvPr>
+        </p:nvSpPr>
+        <p:spPr>
+          <a:xfrm>
+            <a:off x="685800" y="4343400"/>
+            <a:ext cx="5486400" cy="4114800"/>
+          </a:xfrm>
+          <a:prstGeom prst="rect">
+            <a:avLst/>
+          </a:prstGeom>
+        </p:spPr>
+        <p:txBody>
+          <a:bodyPr spcFirstLastPara="1" wrap="square" lIns="91425" tIns="91425" rIns="91425" bIns="91425" anchor="t" anchorCtr="0">
+            <a:noAutofit/>
+          </a:bodyPr>
+          <a:lstStyle/>
+          <a:p>
+            <a:pPr marL="0" lvl="0" indent="0" algn="l" rtl="0">
+              <a:spcBef>
+                <a:spcPts val="0"/>
+              </a:spcBef>
+              <a:spcAft>
+                <a:spcPts val="0"/>
+              </a:spcAft>
+              <a:buNone/>
+            </a:pPr>
+            <a:endParaRPr/>
+          </a:p>
+        </p:txBody>
+      </p:sp>
+    </p:spTree>
+    <p:extLst>
+      <p:ext uri="{BB962C8B-B14F-4D97-AF65-F5344CB8AC3E}">
+        <p14:creationId xmlns:p14="http://schemas.microsoft.com/office/powerpoint/2010/main" val="3202348878"/>
+      </p:ext>
+    </p:extLst>
+  </p:cSld>
+  <p:clrMapOvr>
+    <a:masterClrMapping/>
+  </p:clrMapOvr>
+</p:notes>
+</file>
+
+<file path=ppt/notesSlides/notesSlide19.xml><?xml version="1.0" encoding="utf-8"?>
+<p:notes xmlns:a="http://schemas.openxmlformats.org/drawingml/2006/main" xmlns:r="http://schemas.openxmlformats.org/officeDocument/2006/relationships" xmlns:p="http://schemas.openxmlformats.org/presentationml/2006/main" showMasterSp="0" showMasterPhAnim="0">
+  <p:cSld>
+    <p:spTree>
+      <p:nvGrpSpPr>
+        <p:cNvPr id="1" name="Shape 186">
+          <a:extLst>
+            <a:ext uri="{FF2B5EF4-FFF2-40B4-BE49-F238E27FC236}">
+              <a16:creationId xmlns:a16="http://schemas.microsoft.com/office/drawing/2014/main" id="{D15EBAC5-35B6-0924-EB80-3F05318D3B39}"/>
+            </a:ext>
+          </a:extLst>
+        </p:cNvPr>
+        <p:cNvGrpSpPr/>
+        <p:nvPr/>
+      </p:nvGrpSpPr>
+      <p:grpSpPr>
+        <a:xfrm>
+          <a:off x="0" y="0"/>
+          <a:ext cx="0" cy="0"/>
+          <a:chOff x="0" y="0"/>
+          <a:chExt cx="0" cy="0"/>
+        </a:xfrm>
+      </p:grpSpPr>
+      <p:sp>
+        <p:nvSpPr>
+          <p:cNvPr id="187" name="Google Shape;187;g3850b307b58_0_218:notes">
+            <a:extLst>
+              <a:ext uri="{FF2B5EF4-FFF2-40B4-BE49-F238E27FC236}">
+                <a16:creationId xmlns:a16="http://schemas.microsoft.com/office/drawing/2014/main" id="{A4EAF0C8-AB39-8A1F-8C2D-392E43D1060C}"/>
+              </a:ext>
+            </a:extLst>
+          </p:cNvPr>
+          <p:cNvSpPr>
+            <a:spLocks noGrp="1" noRot="1" noChangeAspect="1"/>
+          </p:cNvSpPr>
+          <p:nvPr>
+            <p:ph type="sldImg" idx="2"/>
+          </p:nvPr>
+        </p:nvSpPr>
+        <p:spPr>
+          <a:xfrm>
+            <a:off x="0" y="685800"/>
+            <a:ext cx="6858000" cy="3429000"/>
+          </a:xfrm>
+          <a:custGeom>
+            <a:avLst/>
+            <a:gdLst/>
+            <a:ahLst/>
+            <a:cxnLst/>
+            <a:rect l="l" t="t" r="r" b="b"/>
+            <a:pathLst>
+              <a:path w="120000" h="120000" extrusionOk="0">
+                <a:moveTo>
+                  <a:pt x="0" y="0"/>
+                </a:moveTo>
+                <a:lnTo>
+                  <a:pt x="120000" y="0"/>
+                </a:lnTo>
+                <a:lnTo>
+                  <a:pt x="120000" y="120000"/>
+                </a:lnTo>
+                <a:lnTo>
+                  <a:pt x="0" y="120000"/>
+                </a:lnTo>
+                <a:close/>
+              </a:path>
+            </a:pathLst>
+          </a:custGeom>
+        </p:spPr>
+      </p:sp>
+      <p:sp>
+        <p:nvSpPr>
+          <p:cNvPr id="188" name="Google Shape;188;g3850b307b58_0_218:notes">
+            <a:extLst>
+              <a:ext uri="{FF2B5EF4-FFF2-40B4-BE49-F238E27FC236}">
+                <a16:creationId xmlns:a16="http://schemas.microsoft.com/office/drawing/2014/main" id="{1D5189ED-818C-48B2-ED8B-95D00741403D}"/>
+              </a:ext>
+            </a:extLst>
+          </p:cNvPr>
+          <p:cNvSpPr txBox="1">
+            <a:spLocks noGrp="1"/>
+          </p:cNvSpPr>
+          <p:nvPr>
+            <p:ph type="body" idx="1"/>
+          </p:nvPr>
+        </p:nvSpPr>
+        <p:spPr>
+          <a:xfrm>
+            <a:off x="685800" y="4343400"/>
+            <a:ext cx="5486400" cy="4114800"/>
+          </a:xfrm>
+          <a:prstGeom prst="rect">
+            <a:avLst/>
+          </a:prstGeom>
+        </p:spPr>
+        <p:txBody>
+          <a:bodyPr spcFirstLastPara="1" wrap="square" lIns="91425" tIns="91425" rIns="91425" bIns="91425" anchor="t" anchorCtr="0">
+            <a:noAutofit/>
+          </a:bodyPr>
+          <a:lstStyle/>
+          <a:p>
+            <a:pPr marL="0" lvl="0" indent="0" algn="l" rtl="0">
+              <a:spcBef>
+                <a:spcPts val="0"/>
+              </a:spcBef>
+              <a:spcAft>
+                <a:spcPts val="0"/>
+              </a:spcAft>
+              <a:buNone/>
+            </a:pPr>
+            <a:endParaRPr/>
+          </a:p>
+        </p:txBody>
+      </p:sp>
+    </p:spTree>
+    <p:extLst>
+      <p:ext uri="{BB962C8B-B14F-4D97-AF65-F5344CB8AC3E}">
+        <p14:creationId xmlns:p14="http://schemas.microsoft.com/office/powerpoint/2010/main" val="1700329263"/>
+      </p:ext>
+    </p:extLst>
+  </p:cSld>
+  <p:clrMapOvr>
+    <a:masterClrMapping/>
+  </p:clrMapOvr>
+</p:notes>
+</file>
+
 <file path=ppt/notesSlides/notesSlide2.xml><?xml version="1.0" encoding="utf-8"?>
 <p:notes xmlns:a="http://schemas.openxmlformats.org/drawingml/2006/main" xmlns:r="http://schemas.openxmlformats.org/officeDocument/2006/relationships" xmlns:p="http://schemas.openxmlformats.org/presentationml/2006/main" showMasterSp="0" showMasterPhAnim="0">
   <p:cSld>
@@ -1806,6 +2191,133 @@
         </p:txBody>
       </p:sp>
     </p:spTree>
+  </p:cSld>
+  <p:clrMapOvr>
+    <a:masterClrMapping/>
+  </p:clrMapOvr>
+</p:notes>
+</file>
+
+<file path=ppt/notesSlides/notesSlide20.xml><?xml version="1.0" encoding="utf-8"?>
+<p:notes xmlns:a="http://schemas.openxmlformats.org/drawingml/2006/main" xmlns:r="http://schemas.openxmlformats.org/officeDocument/2006/relationships" xmlns:p="http://schemas.openxmlformats.org/presentationml/2006/main" showMasterSp="0" showMasterPhAnim="0">
+  <p:cSld>
+    <p:spTree>
+      <p:nvGrpSpPr>
+        <p:cNvPr id="1" name="Shape 186">
+          <a:extLst>
+            <a:ext uri="{FF2B5EF4-FFF2-40B4-BE49-F238E27FC236}">
+              <a16:creationId xmlns:a16="http://schemas.microsoft.com/office/drawing/2014/main" id="{90A12D8D-11EF-F019-2459-FA14B4FD67B0}"/>
+            </a:ext>
+          </a:extLst>
+        </p:cNvPr>
+        <p:cNvGrpSpPr/>
+        <p:nvPr/>
+      </p:nvGrpSpPr>
+      <p:grpSpPr>
+        <a:xfrm>
+          <a:off x="0" y="0"/>
+          <a:ext cx="0" cy="0"/>
+          <a:chOff x="0" y="0"/>
+          <a:chExt cx="0" cy="0"/>
+        </a:xfrm>
+      </p:grpSpPr>
+      <p:sp>
+        <p:nvSpPr>
+          <p:cNvPr id="187" name="Google Shape;187;g3850b307b58_0_218:notes">
+            <a:extLst>
+              <a:ext uri="{FF2B5EF4-FFF2-40B4-BE49-F238E27FC236}">
+                <a16:creationId xmlns:a16="http://schemas.microsoft.com/office/drawing/2014/main" id="{0F015668-C48E-538F-00E5-4FE2C879C963}"/>
+              </a:ext>
+            </a:extLst>
+          </p:cNvPr>
+          <p:cNvSpPr>
+            <a:spLocks noGrp="1" noRot="1" noChangeAspect="1"/>
+          </p:cNvSpPr>
+          <p:nvPr>
+            <p:ph type="sldImg" idx="2"/>
+          </p:nvPr>
+        </p:nvSpPr>
+        <p:spPr>
+          <a:xfrm>
+            <a:off x="0" y="685800"/>
+            <a:ext cx="6858000" cy="3429000"/>
+          </a:xfrm>
+          <a:custGeom>
+            <a:avLst/>
+            <a:gdLst/>
+            <a:ahLst/>
+            <a:cxnLst/>
+            <a:rect l="l" t="t" r="r" b="b"/>
+            <a:pathLst>
+              <a:path w="120000" h="120000" extrusionOk="0">
+                <a:moveTo>
+                  <a:pt x="0" y="0"/>
+                </a:moveTo>
+                <a:lnTo>
+                  <a:pt x="120000" y="0"/>
+                </a:lnTo>
+                <a:lnTo>
+                  <a:pt x="120000" y="120000"/>
+                </a:lnTo>
+                <a:lnTo>
+                  <a:pt x="0" y="120000"/>
+                </a:lnTo>
+                <a:close/>
+              </a:path>
+            </a:pathLst>
+          </a:custGeom>
+        </p:spPr>
+      </p:sp>
+      <p:sp>
+        <p:nvSpPr>
+          <p:cNvPr id="188" name="Google Shape;188;g3850b307b58_0_218:notes">
+            <a:extLst>
+              <a:ext uri="{FF2B5EF4-FFF2-40B4-BE49-F238E27FC236}">
+                <a16:creationId xmlns:a16="http://schemas.microsoft.com/office/drawing/2014/main" id="{A42D7096-9FF4-585A-7772-DA7700A6A037}"/>
+              </a:ext>
+            </a:extLst>
+          </p:cNvPr>
+          <p:cNvSpPr txBox="1">
+            <a:spLocks noGrp="1"/>
+          </p:cNvSpPr>
+          <p:nvPr>
+            <p:ph type="body" idx="1"/>
+          </p:nvPr>
+        </p:nvSpPr>
+        <p:spPr>
+          <a:xfrm>
+            <a:off x="685800" y="4343400"/>
+            <a:ext cx="5486400" cy="4114800"/>
+          </a:xfrm>
+          <a:prstGeom prst="rect">
+            <a:avLst/>
+          </a:prstGeom>
+        </p:spPr>
+        <p:txBody>
+          <a:bodyPr spcFirstLastPara="1" wrap="square" lIns="91425" tIns="91425" rIns="91425" bIns="91425" anchor="t" anchorCtr="0">
+            <a:noAutofit/>
+          </a:bodyPr>
+          <a:lstStyle/>
+          <a:p>
+            <a:pPr marL="0" lvl="0" indent="0" algn="l" rtl="0">
+              <a:spcBef>
+                <a:spcPts val="0"/>
+              </a:spcBef>
+              <a:spcAft>
+                <a:spcPts val="0"/>
+              </a:spcAft>
+              <a:buNone/>
+            </a:pPr>
+            <a:endParaRPr/>
+          </a:p>
+        </p:txBody>
+      </p:sp>
+    </p:spTree>
+    <p:extLst>
+      <p:ext uri="{BB962C8B-B14F-4D97-AF65-F5344CB8AC3E}">
+        <p14:creationId xmlns:p14="http://schemas.microsoft.com/office/powerpoint/2010/main" val="604953558"/>
+      </p:ext>
+    </p:extLst>
   </p:cSld>
   <p:clrMapOvr>
     <a:masterClrMapping/>
@@ -2985,7 +3497,7 @@
             </a:pPr>
             <a:fld id="{00000000-1234-1234-1234-123412341234}" type="slidenum">
               <a:rPr lang="en-GB"/>
-              <a:t>‹#›</a:t>
+              <a:t>‹nº›</a:t>
             </a:fld>
             <a:endParaRPr/>
           </a:p>
@@ -3349,7 +3861,7 @@
             </a:pPr>
             <a:fld id="{00000000-1234-1234-1234-123412341234}" type="slidenum">
               <a:rPr lang="en-GB"/>
-              <a:t>‹#›</a:t>
+              <a:t>‹nº›</a:t>
             </a:fld>
             <a:endParaRPr/>
           </a:p>
@@ -3453,7 +3965,7 @@
             </a:pPr>
             <a:fld id="{00000000-1234-1234-1234-123412341234}" type="slidenum">
               <a:rPr lang="en-GB"/>
-              <a:t>‹#›</a:t>
+              <a:t>‹nº›</a:t>
             </a:fld>
             <a:endParaRPr/>
           </a:p>
@@ -3686,7 +4198,7 @@
             </a:pPr>
             <a:fld id="{00000000-1234-1234-1234-123412341234}" type="slidenum">
               <a:rPr lang="en-GB"/>
-              <a:t>‹#›</a:t>
+              <a:t>‹nº›</a:t>
             </a:fld>
             <a:endParaRPr/>
           </a:p>
@@ -4048,7 +4560,7 @@
             </a:pPr>
             <a:fld id="{00000000-1234-1234-1234-123412341234}" type="slidenum">
               <a:rPr lang="en-GB"/>
-              <a:t>‹#›</a:t>
+              <a:t>‹nº›</a:t>
             </a:fld>
             <a:endParaRPr/>
           </a:p>
@@ -4539,7 +5051,7 @@
             </a:pPr>
             <a:fld id="{00000000-1234-1234-1234-123412341234}" type="slidenum">
               <a:rPr lang="en-GB"/>
-              <a:t>‹#›</a:t>
+              <a:t>‹nº›</a:t>
             </a:fld>
             <a:endParaRPr/>
           </a:p>
@@ -4772,7 +5284,7 @@
             </a:pPr>
             <a:fld id="{00000000-1234-1234-1234-123412341234}" type="slidenum">
               <a:rPr lang="en-GB"/>
-              <a:t>‹#›</a:t>
+              <a:t>‹nº›</a:t>
             </a:fld>
             <a:endParaRPr/>
           </a:p>
@@ -5134,7 +5646,7 @@
             </a:pPr>
             <a:fld id="{00000000-1234-1234-1234-123412341234}" type="slidenum">
               <a:rPr lang="en-GB"/>
-              <a:t>‹#›</a:t>
+              <a:t>‹nº›</a:t>
             </a:fld>
             <a:endParaRPr/>
           </a:p>
@@ -5367,7 +5879,7 @@
             </a:pPr>
             <a:fld id="{00000000-1234-1234-1234-123412341234}" type="slidenum">
               <a:rPr lang="en-GB"/>
-              <a:t>‹#›</a:t>
+              <a:t>‹nº›</a:t>
             </a:fld>
             <a:endParaRPr/>
           </a:p>
@@ -5925,7 +6437,7 @@
             </a:pPr>
             <a:fld id="{00000000-1234-1234-1234-123412341234}" type="slidenum">
               <a:rPr lang="en-GB"/>
-              <a:t>‹#›</a:t>
+              <a:t>‹nº›</a:t>
             </a:fld>
             <a:endParaRPr/>
           </a:p>
@@ -6073,7 +6585,7 @@
             </a:pPr>
             <a:fld id="{00000000-1234-1234-1234-123412341234}" type="slidenum">
               <a:rPr lang="en-GB"/>
-              <a:t>‹#›</a:t>
+              <a:t>‹nº›</a:t>
             </a:fld>
             <a:endParaRPr/>
           </a:p>
@@ -6644,7 +7156,7 @@
             </a:pPr>
             <a:fld id="{00000000-1234-1234-1234-123412341234}" type="slidenum">
               <a:rPr lang="en-GB"/>
-              <a:t>‹#›</a:t>
+              <a:t>‹nº›</a:t>
             </a:fld>
             <a:endParaRPr/>
           </a:p>
@@ -12038,7 +12550,25 @@
                 <a:cs typeface="Consolas"/>
                 <a:sym typeface="Consolas"/>
               </a:rPr>
-              <a:t> para completer a </a:t>
+              <a:t> para </a:t>
+            </a:r>
+            <a:r>
+              <a:rPr lang="en-GB" dirty="0" err="1">
+                <a:latin typeface="Consolas"/>
+                <a:ea typeface="Consolas"/>
+                <a:cs typeface="Consolas"/>
+                <a:sym typeface="Consolas"/>
+              </a:rPr>
+              <a:t>completar</a:t>
+            </a:r>
+            <a:r>
+              <a:rPr lang="en-GB" dirty="0">
+                <a:latin typeface="Consolas"/>
+                <a:ea typeface="Consolas"/>
+                <a:cs typeface="Consolas"/>
+                <a:sym typeface="Consolas"/>
+              </a:rPr>
+              <a:t> a </a:t>
             </a:r>
             <a:r>
               <a:rPr lang="en-GB" dirty="0" err="1">
@@ -19477,7 +20007,25 @@
                 <a:cs typeface="Consolas"/>
                 <a:sym typeface="Consolas"/>
               </a:rPr>
-              <a:t> para completer a </a:t>
+              <a:t> para </a:t>
+            </a:r>
+            <a:r>
+              <a:rPr lang="en-GB" dirty="0" err="1">
+                <a:latin typeface="Consolas"/>
+                <a:ea typeface="Consolas"/>
+                <a:cs typeface="Consolas"/>
+                <a:sym typeface="Consolas"/>
+              </a:rPr>
+              <a:t>completar</a:t>
+            </a:r>
+            <a:r>
+              <a:rPr lang="en-GB" dirty="0">
+                <a:latin typeface="Consolas"/>
+                <a:ea typeface="Consolas"/>
+                <a:cs typeface="Consolas"/>
+                <a:sym typeface="Consolas"/>
+              </a:rPr>
+              <a:t> a </a:t>
             </a:r>
             <a:r>
               <a:rPr lang="en-GB" dirty="0" err="1">
@@ -21746,6 +22294,4235 @@
     <p:extLst>
       <p:ext uri="{BB962C8B-B14F-4D97-AF65-F5344CB8AC3E}">
         <p14:creationId xmlns:p14="http://schemas.microsoft.com/office/powerpoint/2010/main" val="727368029"/>
+      </p:ext>
+    </p:extLst>
+  </p:cSld>
+  <p:clrMapOvr>
+    <a:masterClrMapping/>
+  </p:clrMapOvr>
+</p:sld>
+</file>
+
+<file path=ppt/slides/slide17.xml><?xml version="1.0" encoding="utf-8"?>
+<p:sld xmlns:a="http://schemas.openxmlformats.org/drawingml/2006/main" xmlns:r="http://schemas.openxmlformats.org/officeDocument/2006/relationships" xmlns:p="http://schemas.openxmlformats.org/presentationml/2006/main">
+  <p:cSld>
+    <p:spTree>
+      <p:nvGrpSpPr>
+        <p:cNvPr id="1" name="Shape 220">
+          <a:extLst>
+            <a:ext uri="{FF2B5EF4-FFF2-40B4-BE49-F238E27FC236}">
+              <a16:creationId xmlns:a16="http://schemas.microsoft.com/office/drawing/2014/main" id="{2EBFD6EA-A48C-63D4-EDD7-5B179984D801}"/>
+            </a:ext>
+          </a:extLst>
+        </p:cNvPr>
+        <p:cNvGrpSpPr/>
+        <p:nvPr/>
+      </p:nvGrpSpPr>
+      <p:grpSpPr>
+        <a:xfrm>
+          <a:off x="0" y="0"/>
+          <a:ext cx="0" cy="0"/>
+          <a:chOff x="0" y="0"/>
+          <a:chExt cx="0" cy="0"/>
+        </a:xfrm>
+      </p:grpSpPr>
+      <p:pic>
+        <p:nvPicPr>
+          <p:cNvPr id="221" name="Google Shape;221;p20" title="Vmw_I2.png">
+            <a:extLst>
+              <a:ext uri="{FF2B5EF4-FFF2-40B4-BE49-F238E27FC236}">
+                <a16:creationId xmlns:a16="http://schemas.microsoft.com/office/drawing/2014/main" id="{164746D6-B500-63ED-A898-1D62D88EB8EC}"/>
+              </a:ext>
+            </a:extLst>
+          </p:cNvPr>
+          <p:cNvPicPr preferRelativeResize="0"/>
+          <p:nvPr/>
+        </p:nvPicPr>
+        <p:blipFill>
+          <a:blip r:embed="rId3">
+            <a:alphaModFix amt="51000"/>
+          </a:blip>
+          <a:stretch>
+            <a:fillRect/>
+          </a:stretch>
+        </p:blipFill>
+        <p:spPr>
+          <a:xfrm>
+            <a:off x="0" y="0"/>
+            <a:ext cx="21600000" cy="10800000"/>
+          </a:xfrm>
+          <a:prstGeom prst="rect">
+            <a:avLst/>
+          </a:prstGeom>
+          <a:noFill/>
+          <a:ln>
+            <a:noFill/>
+          </a:ln>
+        </p:spPr>
+      </p:pic>
+      <p:sp>
+        <p:nvSpPr>
+          <p:cNvPr id="222" name="Google Shape;222;p20">
+            <a:extLst>
+              <a:ext uri="{FF2B5EF4-FFF2-40B4-BE49-F238E27FC236}">
+                <a16:creationId xmlns:a16="http://schemas.microsoft.com/office/drawing/2014/main" id="{4E6590C9-D3D0-13D5-F472-26282D6BD622}"/>
+              </a:ext>
+            </a:extLst>
+          </p:cNvPr>
+          <p:cNvSpPr/>
+          <p:nvPr/>
+        </p:nvSpPr>
+        <p:spPr>
+          <a:xfrm>
+            <a:off x="814250" y="3300663"/>
+            <a:ext cx="19957567" cy="4198675"/>
+          </a:xfrm>
+          <a:prstGeom prst="rect">
+            <a:avLst/>
+          </a:prstGeom>
+        </p:spPr>
+        <p:txBody>
+          <a:bodyPr>
+            <a:prstTxWarp prst="textPlain">
+              <a:avLst/>
+            </a:prstTxWarp>
+          </a:bodyPr>
+          <a:lstStyle/>
+          <a:p>
+            <a:pPr lvl="0" algn="ctr"/>
+            <a:r>
+              <a:rPr b="1" i="0" dirty="0">
+                <a:ln w="114300" cap="flat" cmpd="sng">
+                  <a:solidFill>
+                    <a:srgbClr val="434343"/>
+                  </a:solidFill>
+                  <a:prstDash val="solid"/>
+                  <a:round/>
+                  <a:headEnd type="none" w="sm" len="sm"/>
+                  <a:tailEnd type="none" w="sm" len="sm"/>
+                </a:ln>
+                <a:solidFill>
+                  <a:schemeClr val="lt1"/>
+                </a:solidFill>
+                <a:latin typeface="Consolas"/>
+              </a:rPr>
+              <a:t>Sprint </a:t>
+            </a:r>
+            <a:r>
+              <a:rPr lang="pt-PT" b="1" dirty="0">
+                <a:ln w="114300" cap="flat" cmpd="sng">
+                  <a:solidFill>
+                    <a:srgbClr val="434343"/>
+                  </a:solidFill>
+                  <a:prstDash val="solid"/>
+                  <a:round/>
+                  <a:headEnd type="none" w="sm" len="sm"/>
+                  <a:tailEnd type="none" w="sm" len="sm"/>
+                </a:ln>
+                <a:solidFill>
+                  <a:schemeClr val="lt1"/>
+                </a:solidFill>
+                <a:latin typeface="Consolas"/>
+              </a:rPr>
+              <a:t>5</a:t>
+            </a:r>
+            <a:endParaRPr b="1" i="0" dirty="0">
+              <a:ln w="114300" cap="flat" cmpd="sng">
+                <a:solidFill>
+                  <a:srgbClr val="434343"/>
+                </a:solidFill>
+                <a:prstDash val="solid"/>
+                <a:round/>
+                <a:headEnd type="none" w="sm" len="sm"/>
+                <a:tailEnd type="none" w="sm" len="sm"/>
+              </a:ln>
+              <a:solidFill>
+                <a:schemeClr val="lt1"/>
+              </a:solidFill>
+              <a:latin typeface="Consolas"/>
+            </a:endParaRPr>
+          </a:p>
+        </p:txBody>
+      </p:sp>
+    </p:spTree>
+    <p:extLst>
+      <p:ext uri="{BB962C8B-B14F-4D97-AF65-F5344CB8AC3E}">
+        <p14:creationId xmlns:p14="http://schemas.microsoft.com/office/powerpoint/2010/main" val="3783642518"/>
+      </p:ext>
+    </p:extLst>
+  </p:cSld>
+  <p:clrMapOvr>
+    <a:masterClrMapping/>
+  </p:clrMapOvr>
+</p:sld>
+</file>
+
+<file path=ppt/slides/slide18.xml><?xml version="1.0" encoding="utf-8"?>
+<p:sld xmlns:a="http://schemas.openxmlformats.org/drawingml/2006/main" xmlns:r="http://schemas.openxmlformats.org/officeDocument/2006/relationships" xmlns:p="http://schemas.openxmlformats.org/presentationml/2006/main">
+  <p:cSld>
+    <p:spTree>
+      <p:nvGrpSpPr>
+        <p:cNvPr id="1" name="Shape 189">
+          <a:extLst>
+            <a:ext uri="{FF2B5EF4-FFF2-40B4-BE49-F238E27FC236}">
+              <a16:creationId xmlns:a16="http://schemas.microsoft.com/office/drawing/2014/main" id="{6C234F18-EF5C-6646-E071-8487F7E2CF03}"/>
+            </a:ext>
+          </a:extLst>
+        </p:cNvPr>
+        <p:cNvGrpSpPr/>
+        <p:nvPr/>
+      </p:nvGrpSpPr>
+      <p:grpSpPr>
+        <a:xfrm>
+          <a:off x="0" y="0"/>
+          <a:ext cx="0" cy="0"/>
+          <a:chOff x="0" y="0"/>
+          <a:chExt cx="0" cy="0"/>
+        </a:xfrm>
+      </p:grpSpPr>
+      <p:cxnSp>
+        <p:nvCxnSpPr>
+          <p:cNvPr id="190" name="Google Shape;190;p19">
+            <a:extLst>
+              <a:ext uri="{FF2B5EF4-FFF2-40B4-BE49-F238E27FC236}">
+                <a16:creationId xmlns:a16="http://schemas.microsoft.com/office/drawing/2014/main" id="{0FA7271B-49A4-4EA5-B94D-523856EAB9AB}"/>
+              </a:ext>
+            </a:extLst>
+          </p:cNvPr>
+          <p:cNvCxnSpPr/>
+          <p:nvPr/>
+        </p:nvCxnSpPr>
+        <p:spPr>
+          <a:xfrm>
+            <a:off x="5944724" y="-31500"/>
+            <a:ext cx="0" cy="10857000"/>
+          </a:xfrm>
+          <a:prstGeom prst="straightConnector1">
+            <a:avLst/>
+          </a:prstGeom>
+          <a:noFill/>
+          <a:ln w="38100" cap="flat" cmpd="sng">
+            <a:solidFill>
+              <a:srgbClr val="5B0F00"/>
+            </a:solidFill>
+            <a:prstDash val="solid"/>
+            <a:round/>
+            <a:headEnd type="none" w="med" len="med"/>
+            <a:tailEnd type="none" w="med" len="med"/>
+          </a:ln>
+        </p:spPr>
+      </p:cxnSp>
+      <p:sp>
+        <p:nvSpPr>
+          <p:cNvPr id="191" name="Google Shape;191;p19">
+            <a:extLst>
+              <a:ext uri="{FF2B5EF4-FFF2-40B4-BE49-F238E27FC236}">
+                <a16:creationId xmlns:a16="http://schemas.microsoft.com/office/drawing/2014/main" id="{EF65630C-B5A3-F7AD-311A-47678288CA10}"/>
+              </a:ext>
+            </a:extLst>
+          </p:cNvPr>
+          <p:cNvSpPr/>
+          <p:nvPr/>
+        </p:nvSpPr>
+        <p:spPr>
+          <a:xfrm>
+            <a:off x="3197186" y="84312"/>
+            <a:ext cx="2410800" cy="480900"/>
+          </a:xfrm>
+          <a:prstGeom prst="roundRect">
+            <a:avLst>
+              <a:gd name="adj" fmla="val 16667"/>
+            </a:avLst>
+          </a:prstGeom>
+          <a:solidFill>
+            <a:srgbClr val="F9CB9C"/>
+          </a:solidFill>
+          <a:ln w="28575" cap="flat" cmpd="sng">
+            <a:solidFill>
+              <a:srgbClr val="B45F06"/>
+            </a:solidFill>
+            <a:prstDash val="solid"/>
+            <a:round/>
+            <a:headEnd type="none" w="sm" len="sm"/>
+            <a:tailEnd type="none" w="sm" len="sm"/>
+          </a:ln>
+        </p:spPr>
+        <p:txBody>
+          <a:bodyPr spcFirstLastPara="1" wrap="square" lIns="91425" tIns="91425" rIns="91425" bIns="91425" anchor="ctr" anchorCtr="0">
+            <a:noAutofit/>
+          </a:bodyPr>
+          <a:lstStyle/>
+          <a:p>
+            <a:pPr marL="0" lvl="0" indent="0" algn="ctr" rtl="0">
+              <a:spcBef>
+                <a:spcPts val="0"/>
+              </a:spcBef>
+              <a:spcAft>
+                <a:spcPts val="0"/>
+              </a:spcAft>
+              <a:buNone/>
+            </a:pPr>
+            <a:r>
+              <a:rPr lang="en-GB" sz="1800" b="1">
+                <a:latin typeface="Consolas"/>
+                <a:ea typeface="Consolas"/>
+                <a:cs typeface="Consolas"/>
+                <a:sym typeface="Consolas"/>
+              </a:rPr>
+              <a:t>Student ID</a:t>
+            </a:r>
+            <a:endParaRPr sz="1800" b="1">
+              <a:latin typeface="Consolas"/>
+              <a:ea typeface="Consolas"/>
+              <a:cs typeface="Consolas"/>
+              <a:sym typeface="Consolas"/>
+            </a:endParaRPr>
+          </a:p>
+        </p:txBody>
+      </p:sp>
+      <p:sp>
+        <p:nvSpPr>
+          <p:cNvPr id="192" name="Google Shape;192;p19">
+            <a:extLst>
+              <a:ext uri="{FF2B5EF4-FFF2-40B4-BE49-F238E27FC236}">
+                <a16:creationId xmlns:a16="http://schemas.microsoft.com/office/drawing/2014/main" id="{A6AA3BF1-D384-16CE-F7AE-F2D65D41B716}"/>
+              </a:ext>
+            </a:extLst>
+          </p:cNvPr>
+          <p:cNvSpPr/>
+          <p:nvPr/>
+        </p:nvSpPr>
+        <p:spPr>
+          <a:xfrm>
+            <a:off x="6281636" y="84312"/>
+            <a:ext cx="2410800" cy="480900"/>
+          </a:xfrm>
+          <a:prstGeom prst="roundRect">
+            <a:avLst>
+              <a:gd name="adj" fmla="val 16667"/>
+            </a:avLst>
+          </a:prstGeom>
+          <a:solidFill>
+            <a:srgbClr val="F9CB9C"/>
+          </a:solidFill>
+          <a:ln w="28575" cap="flat" cmpd="sng">
+            <a:solidFill>
+              <a:srgbClr val="B45F06"/>
+            </a:solidFill>
+            <a:prstDash val="solid"/>
+            <a:round/>
+            <a:headEnd type="none" w="sm" len="sm"/>
+            <a:tailEnd type="none" w="sm" len="sm"/>
+          </a:ln>
+        </p:spPr>
+        <p:txBody>
+          <a:bodyPr spcFirstLastPara="1" wrap="square" lIns="91425" tIns="91425" rIns="91425" bIns="91425" anchor="ctr" anchorCtr="0">
+            <a:noAutofit/>
+          </a:bodyPr>
+          <a:lstStyle/>
+          <a:p>
+            <a:pPr marL="0" lvl="0" indent="0" algn="ctr" rtl="0">
+              <a:spcBef>
+                <a:spcPts val="0"/>
+              </a:spcBef>
+              <a:spcAft>
+                <a:spcPts val="0"/>
+              </a:spcAft>
+              <a:buNone/>
+            </a:pPr>
+            <a:r>
+              <a:rPr lang="en-GB" sz="1800" b="1">
+                <a:latin typeface="Consolas"/>
+                <a:ea typeface="Consolas"/>
+                <a:cs typeface="Consolas"/>
+                <a:sym typeface="Consolas"/>
+              </a:rPr>
+              <a:t>Story</a:t>
+            </a:r>
+            <a:endParaRPr sz="1800" b="1">
+              <a:latin typeface="Consolas"/>
+              <a:ea typeface="Consolas"/>
+              <a:cs typeface="Consolas"/>
+              <a:sym typeface="Consolas"/>
+            </a:endParaRPr>
+          </a:p>
+        </p:txBody>
+      </p:sp>
+      <p:sp>
+        <p:nvSpPr>
+          <p:cNvPr id="193" name="Google Shape;193;p19">
+            <a:extLst>
+              <a:ext uri="{FF2B5EF4-FFF2-40B4-BE49-F238E27FC236}">
+                <a16:creationId xmlns:a16="http://schemas.microsoft.com/office/drawing/2014/main" id="{2B5AF5F0-9939-AA68-1239-06F43617491A}"/>
+              </a:ext>
+            </a:extLst>
+          </p:cNvPr>
+          <p:cNvSpPr/>
+          <p:nvPr/>
+        </p:nvSpPr>
+        <p:spPr>
+          <a:xfrm>
+            <a:off x="9366071" y="84312"/>
+            <a:ext cx="2410800" cy="480900"/>
+          </a:xfrm>
+          <a:prstGeom prst="roundRect">
+            <a:avLst>
+              <a:gd name="adj" fmla="val 16667"/>
+            </a:avLst>
+          </a:prstGeom>
+          <a:solidFill>
+            <a:srgbClr val="F9CB9C"/>
+          </a:solidFill>
+          <a:ln w="28575" cap="flat" cmpd="sng">
+            <a:solidFill>
+              <a:srgbClr val="B45F06"/>
+            </a:solidFill>
+            <a:prstDash val="solid"/>
+            <a:round/>
+            <a:headEnd type="none" w="sm" len="sm"/>
+            <a:tailEnd type="none" w="sm" len="sm"/>
+          </a:ln>
+        </p:spPr>
+        <p:txBody>
+          <a:bodyPr spcFirstLastPara="1" wrap="square" lIns="91425" tIns="91425" rIns="91425" bIns="91425" anchor="ctr" anchorCtr="0">
+            <a:noAutofit/>
+          </a:bodyPr>
+          <a:lstStyle/>
+          <a:p>
+            <a:pPr marL="0" lvl="0" indent="0" algn="ctr" rtl="0">
+              <a:spcBef>
+                <a:spcPts val="0"/>
+              </a:spcBef>
+              <a:spcAft>
+                <a:spcPts val="0"/>
+              </a:spcAft>
+              <a:buNone/>
+            </a:pPr>
+            <a:r>
+              <a:rPr lang="en-GB" sz="1800" b="1">
+                <a:latin typeface="Consolas"/>
+                <a:ea typeface="Consolas"/>
+                <a:cs typeface="Consolas"/>
+                <a:sym typeface="Consolas"/>
+              </a:rPr>
+              <a:t>To Do</a:t>
+            </a:r>
+            <a:endParaRPr sz="1800" b="1">
+              <a:latin typeface="Consolas"/>
+              <a:ea typeface="Consolas"/>
+              <a:cs typeface="Consolas"/>
+              <a:sym typeface="Consolas"/>
+            </a:endParaRPr>
+          </a:p>
+        </p:txBody>
+      </p:sp>
+      <p:sp>
+        <p:nvSpPr>
+          <p:cNvPr id="194" name="Google Shape;194;p19">
+            <a:extLst>
+              <a:ext uri="{FF2B5EF4-FFF2-40B4-BE49-F238E27FC236}">
+                <a16:creationId xmlns:a16="http://schemas.microsoft.com/office/drawing/2014/main" id="{4904590F-C04E-1A45-D258-62E82151C837}"/>
+              </a:ext>
+            </a:extLst>
+          </p:cNvPr>
+          <p:cNvSpPr/>
+          <p:nvPr/>
+        </p:nvSpPr>
+        <p:spPr>
+          <a:xfrm>
+            <a:off x="12395940" y="84312"/>
+            <a:ext cx="2410800" cy="480900"/>
+          </a:xfrm>
+          <a:prstGeom prst="roundRect">
+            <a:avLst>
+              <a:gd name="adj" fmla="val 16667"/>
+            </a:avLst>
+          </a:prstGeom>
+          <a:solidFill>
+            <a:srgbClr val="F9CB9C"/>
+          </a:solidFill>
+          <a:ln w="28575" cap="flat" cmpd="sng">
+            <a:solidFill>
+              <a:srgbClr val="B45F06"/>
+            </a:solidFill>
+            <a:prstDash val="solid"/>
+            <a:round/>
+            <a:headEnd type="none" w="sm" len="sm"/>
+            <a:tailEnd type="none" w="sm" len="sm"/>
+          </a:ln>
+        </p:spPr>
+        <p:txBody>
+          <a:bodyPr spcFirstLastPara="1" wrap="square" lIns="91425" tIns="91425" rIns="91425" bIns="91425" anchor="ctr" anchorCtr="0">
+            <a:noAutofit/>
+          </a:bodyPr>
+          <a:lstStyle/>
+          <a:p>
+            <a:pPr marL="0" lvl="0" indent="0" algn="ctr" rtl="0">
+              <a:spcBef>
+                <a:spcPts val="0"/>
+              </a:spcBef>
+              <a:spcAft>
+                <a:spcPts val="0"/>
+              </a:spcAft>
+              <a:buNone/>
+            </a:pPr>
+            <a:r>
+              <a:rPr lang="en-GB" sz="1800" b="1">
+                <a:latin typeface="Consolas"/>
+                <a:ea typeface="Consolas"/>
+                <a:cs typeface="Consolas"/>
+                <a:sym typeface="Consolas"/>
+              </a:rPr>
+              <a:t>Doing</a:t>
+            </a:r>
+            <a:endParaRPr sz="1800" b="1">
+              <a:latin typeface="Consolas"/>
+              <a:ea typeface="Consolas"/>
+              <a:cs typeface="Consolas"/>
+              <a:sym typeface="Consolas"/>
+            </a:endParaRPr>
+          </a:p>
+        </p:txBody>
+      </p:sp>
+      <p:sp>
+        <p:nvSpPr>
+          <p:cNvPr id="195" name="Google Shape;195;p19">
+            <a:extLst>
+              <a:ext uri="{FF2B5EF4-FFF2-40B4-BE49-F238E27FC236}">
+                <a16:creationId xmlns:a16="http://schemas.microsoft.com/office/drawing/2014/main" id="{D7150193-2A04-4B93-A4B5-1C80450CC0B9}"/>
+              </a:ext>
+            </a:extLst>
+          </p:cNvPr>
+          <p:cNvSpPr/>
+          <p:nvPr/>
+        </p:nvSpPr>
+        <p:spPr>
+          <a:xfrm>
+            <a:off x="15532407" y="84312"/>
+            <a:ext cx="2410800" cy="480900"/>
+          </a:xfrm>
+          <a:prstGeom prst="roundRect">
+            <a:avLst>
+              <a:gd name="adj" fmla="val 16667"/>
+            </a:avLst>
+          </a:prstGeom>
+          <a:solidFill>
+            <a:srgbClr val="F9CB9C"/>
+          </a:solidFill>
+          <a:ln w="28575" cap="flat" cmpd="sng">
+            <a:solidFill>
+              <a:srgbClr val="B45F06"/>
+            </a:solidFill>
+            <a:prstDash val="solid"/>
+            <a:round/>
+            <a:headEnd type="none" w="sm" len="sm"/>
+            <a:tailEnd type="none" w="sm" len="sm"/>
+          </a:ln>
+        </p:spPr>
+        <p:txBody>
+          <a:bodyPr spcFirstLastPara="1" wrap="square" lIns="91425" tIns="91425" rIns="91425" bIns="91425" anchor="ctr" anchorCtr="0">
+            <a:noAutofit/>
+          </a:bodyPr>
+          <a:lstStyle/>
+          <a:p>
+            <a:pPr marL="0" lvl="0" indent="0" algn="ctr" rtl="0">
+              <a:spcBef>
+                <a:spcPts val="0"/>
+              </a:spcBef>
+              <a:spcAft>
+                <a:spcPts val="0"/>
+              </a:spcAft>
+              <a:buNone/>
+            </a:pPr>
+            <a:r>
+              <a:rPr lang="en-GB" sz="1800" b="1">
+                <a:latin typeface="Consolas"/>
+                <a:ea typeface="Consolas"/>
+                <a:cs typeface="Consolas"/>
+                <a:sym typeface="Consolas"/>
+              </a:rPr>
+              <a:t>Review</a:t>
+            </a:r>
+            <a:endParaRPr sz="1800" b="1">
+              <a:latin typeface="Consolas"/>
+              <a:ea typeface="Consolas"/>
+              <a:cs typeface="Consolas"/>
+              <a:sym typeface="Consolas"/>
+            </a:endParaRPr>
+          </a:p>
+        </p:txBody>
+      </p:sp>
+      <p:sp>
+        <p:nvSpPr>
+          <p:cNvPr id="196" name="Google Shape;196;p19">
+            <a:extLst>
+              <a:ext uri="{FF2B5EF4-FFF2-40B4-BE49-F238E27FC236}">
+                <a16:creationId xmlns:a16="http://schemas.microsoft.com/office/drawing/2014/main" id="{37365BD8-8582-6193-3F3A-B679F38A11D4}"/>
+              </a:ext>
+            </a:extLst>
+          </p:cNvPr>
+          <p:cNvSpPr/>
+          <p:nvPr/>
+        </p:nvSpPr>
+        <p:spPr>
+          <a:xfrm>
+            <a:off x="18668888" y="84312"/>
+            <a:ext cx="2410800" cy="480900"/>
+          </a:xfrm>
+          <a:prstGeom prst="roundRect">
+            <a:avLst>
+              <a:gd name="adj" fmla="val 16667"/>
+            </a:avLst>
+          </a:prstGeom>
+          <a:solidFill>
+            <a:srgbClr val="F9CB9C"/>
+          </a:solidFill>
+          <a:ln w="28575" cap="flat" cmpd="sng">
+            <a:solidFill>
+              <a:srgbClr val="B45F06"/>
+            </a:solidFill>
+            <a:prstDash val="solid"/>
+            <a:round/>
+            <a:headEnd type="none" w="sm" len="sm"/>
+            <a:tailEnd type="none" w="sm" len="sm"/>
+          </a:ln>
+        </p:spPr>
+        <p:txBody>
+          <a:bodyPr spcFirstLastPara="1" wrap="square" lIns="91425" tIns="91425" rIns="91425" bIns="91425" anchor="ctr" anchorCtr="0">
+            <a:noAutofit/>
+          </a:bodyPr>
+          <a:lstStyle/>
+          <a:p>
+            <a:pPr marL="0" lvl="0" indent="0" algn="ctr" rtl="0">
+              <a:spcBef>
+                <a:spcPts val="0"/>
+              </a:spcBef>
+              <a:spcAft>
+                <a:spcPts val="0"/>
+              </a:spcAft>
+              <a:buNone/>
+            </a:pPr>
+            <a:r>
+              <a:rPr lang="en-GB" sz="1800" b="1">
+                <a:latin typeface="Consolas"/>
+                <a:ea typeface="Consolas"/>
+                <a:cs typeface="Consolas"/>
+                <a:sym typeface="Consolas"/>
+              </a:rPr>
+              <a:t>Done</a:t>
+            </a:r>
+            <a:endParaRPr sz="1800" b="1">
+              <a:latin typeface="Consolas"/>
+              <a:ea typeface="Consolas"/>
+              <a:cs typeface="Consolas"/>
+              <a:sym typeface="Consolas"/>
+            </a:endParaRPr>
+          </a:p>
+        </p:txBody>
+      </p:sp>
+      <p:sp>
+        <p:nvSpPr>
+          <p:cNvPr id="197" name="Google Shape;197;p19">
+            <a:extLst>
+              <a:ext uri="{FF2B5EF4-FFF2-40B4-BE49-F238E27FC236}">
+                <a16:creationId xmlns:a16="http://schemas.microsoft.com/office/drawing/2014/main" id="{C61F63FF-85B2-C682-7C17-DA9CBE05BE5B}"/>
+              </a:ext>
+            </a:extLst>
+          </p:cNvPr>
+          <p:cNvSpPr/>
+          <p:nvPr/>
+        </p:nvSpPr>
+        <p:spPr>
+          <a:xfrm>
+            <a:off x="167288" y="84312"/>
+            <a:ext cx="2410800" cy="480900"/>
+          </a:xfrm>
+          <a:prstGeom prst="roundRect">
+            <a:avLst>
+              <a:gd name="adj" fmla="val 16667"/>
+            </a:avLst>
+          </a:prstGeom>
+          <a:solidFill>
+            <a:srgbClr val="F9CB9C"/>
+          </a:solidFill>
+          <a:ln w="28575" cap="flat" cmpd="sng">
+            <a:solidFill>
+              <a:srgbClr val="B45F06"/>
+            </a:solidFill>
+            <a:prstDash val="solid"/>
+            <a:round/>
+            <a:headEnd type="none" w="sm" len="sm"/>
+            <a:tailEnd type="none" w="sm" len="sm"/>
+          </a:ln>
+        </p:spPr>
+        <p:txBody>
+          <a:bodyPr spcFirstLastPara="1" wrap="square" lIns="91425" tIns="91425" rIns="91425" bIns="91425" anchor="ctr" anchorCtr="0">
+            <a:noAutofit/>
+          </a:bodyPr>
+          <a:lstStyle/>
+          <a:p>
+            <a:pPr marL="0" lvl="0" indent="0" algn="ctr" rtl="0">
+              <a:spcBef>
+                <a:spcPts val="0"/>
+              </a:spcBef>
+              <a:spcAft>
+                <a:spcPts val="0"/>
+              </a:spcAft>
+              <a:buNone/>
+            </a:pPr>
+            <a:r>
+              <a:rPr lang="en-GB" sz="1800" b="1">
+                <a:latin typeface="Consolas"/>
+                <a:ea typeface="Consolas"/>
+                <a:cs typeface="Consolas"/>
+                <a:sym typeface="Consolas"/>
+              </a:rPr>
+              <a:t>Backlog</a:t>
+            </a:r>
+            <a:endParaRPr sz="1800" b="1">
+              <a:latin typeface="Consolas"/>
+              <a:ea typeface="Consolas"/>
+              <a:cs typeface="Consolas"/>
+              <a:sym typeface="Consolas"/>
+            </a:endParaRPr>
+          </a:p>
+        </p:txBody>
+      </p:sp>
+      <p:cxnSp>
+        <p:nvCxnSpPr>
+          <p:cNvPr id="204" name="Google Shape;204;p19">
+            <a:extLst>
+              <a:ext uri="{FF2B5EF4-FFF2-40B4-BE49-F238E27FC236}">
+                <a16:creationId xmlns:a16="http://schemas.microsoft.com/office/drawing/2014/main" id="{4BA81BA1-1F84-9A0C-9B69-FB7FF37C97EB}"/>
+              </a:ext>
+            </a:extLst>
+          </p:cNvPr>
+          <p:cNvCxnSpPr/>
+          <p:nvPr/>
+        </p:nvCxnSpPr>
+        <p:spPr>
+          <a:xfrm>
+            <a:off x="5607986" y="1626038"/>
+            <a:ext cx="16042200" cy="0"/>
+          </a:xfrm>
+          <a:prstGeom prst="straightConnector1">
+            <a:avLst/>
+          </a:prstGeom>
+          <a:noFill/>
+          <a:ln w="28575" cap="flat" cmpd="sng">
+            <a:solidFill>
+              <a:srgbClr val="999999"/>
+            </a:solidFill>
+            <a:prstDash val="dash"/>
+            <a:round/>
+            <a:headEnd type="none" w="med" len="med"/>
+            <a:tailEnd type="none" w="med" len="med"/>
+          </a:ln>
+        </p:spPr>
+      </p:cxnSp>
+      <p:cxnSp>
+        <p:nvCxnSpPr>
+          <p:cNvPr id="205" name="Google Shape;205;p19">
+            <a:extLst>
+              <a:ext uri="{FF2B5EF4-FFF2-40B4-BE49-F238E27FC236}">
+                <a16:creationId xmlns:a16="http://schemas.microsoft.com/office/drawing/2014/main" id="{37D21275-C78A-B3F5-6FCA-48B31691FA18}"/>
+              </a:ext>
+            </a:extLst>
+          </p:cNvPr>
+          <p:cNvCxnSpPr/>
+          <p:nvPr/>
+        </p:nvCxnSpPr>
+        <p:spPr>
+          <a:xfrm>
+            <a:off x="5607986" y="3203476"/>
+            <a:ext cx="16042200" cy="0"/>
+          </a:xfrm>
+          <a:prstGeom prst="straightConnector1">
+            <a:avLst/>
+          </a:prstGeom>
+          <a:noFill/>
+          <a:ln w="28575" cap="flat" cmpd="sng">
+            <a:solidFill>
+              <a:srgbClr val="999999"/>
+            </a:solidFill>
+            <a:prstDash val="dash"/>
+            <a:round/>
+            <a:headEnd type="none" w="med" len="med"/>
+            <a:tailEnd type="none" w="med" len="med"/>
+          </a:ln>
+        </p:spPr>
+      </p:cxnSp>
+      <p:cxnSp>
+        <p:nvCxnSpPr>
+          <p:cNvPr id="206" name="Google Shape;206;p19">
+            <a:extLst>
+              <a:ext uri="{FF2B5EF4-FFF2-40B4-BE49-F238E27FC236}">
+                <a16:creationId xmlns:a16="http://schemas.microsoft.com/office/drawing/2014/main" id="{118C5939-D241-9138-D3FF-5B1E85C723B2}"/>
+              </a:ext>
+            </a:extLst>
+          </p:cNvPr>
+          <p:cNvCxnSpPr/>
+          <p:nvPr/>
+        </p:nvCxnSpPr>
+        <p:spPr>
+          <a:xfrm>
+            <a:off x="5607986" y="4777838"/>
+            <a:ext cx="16042200" cy="0"/>
+          </a:xfrm>
+          <a:prstGeom prst="straightConnector1">
+            <a:avLst/>
+          </a:prstGeom>
+          <a:noFill/>
+          <a:ln w="28575" cap="flat" cmpd="sng">
+            <a:solidFill>
+              <a:srgbClr val="999999"/>
+            </a:solidFill>
+            <a:prstDash val="dash"/>
+            <a:round/>
+            <a:headEnd type="none" w="med" len="med"/>
+            <a:tailEnd type="none" w="med" len="med"/>
+          </a:ln>
+        </p:spPr>
+      </p:cxnSp>
+      <p:cxnSp>
+        <p:nvCxnSpPr>
+          <p:cNvPr id="207" name="Google Shape;207;p19">
+            <a:extLst>
+              <a:ext uri="{FF2B5EF4-FFF2-40B4-BE49-F238E27FC236}">
+                <a16:creationId xmlns:a16="http://schemas.microsoft.com/office/drawing/2014/main" id="{8ECB2DEC-CC21-A204-ED02-81F1526B3247}"/>
+              </a:ext>
+            </a:extLst>
+          </p:cNvPr>
+          <p:cNvCxnSpPr/>
+          <p:nvPr/>
+        </p:nvCxnSpPr>
+        <p:spPr>
+          <a:xfrm>
+            <a:off x="5607986" y="6353738"/>
+            <a:ext cx="16042200" cy="0"/>
+          </a:xfrm>
+          <a:prstGeom prst="straightConnector1">
+            <a:avLst/>
+          </a:prstGeom>
+          <a:noFill/>
+          <a:ln w="28575" cap="flat" cmpd="sng">
+            <a:solidFill>
+              <a:srgbClr val="999999"/>
+            </a:solidFill>
+            <a:prstDash val="dash"/>
+            <a:round/>
+            <a:headEnd type="none" w="med" len="med"/>
+            <a:tailEnd type="none" w="med" len="med"/>
+          </a:ln>
+        </p:spPr>
+      </p:cxnSp>
+      <p:cxnSp>
+        <p:nvCxnSpPr>
+          <p:cNvPr id="208" name="Google Shape;208;p19">
+            <a:extLst>
+              <a:ext uri="{FF2B5EF4-FFF2-40B4-BE49-F238E27FC236}">
+                <a16:creationId xmlns:a16="http://schemas.microsoft.com/office/drawing/2014/main" id="{1BD36354-4A6F-D396-D993-E199E2307A26}"/>
+              </a:ext>
+            </a:extLst>
+          </p:cNvPr>
+          <p:cNvCxnSpPr/>
+          <p:nvPr/>
+        </p:nvCxnSpPr>
+        <p:spPr>
+          <a:xfrm>
+            <a:off x="5607986" y="7929638"/>
+            <a:ext cx="16042200" cy="0"/>
+          </a:xfrm>
+          <a:prstGeom prst="straightConnector1">
+            <a:avLst/>
+          </a:prstGeom>
+          <a:noFill/>
+          <a:ln w="28575" cap="flat" cmpd="sng">
+            <a:solidFill>
+              <a:srgbClr val="999999"/>
+            </a:solidFill>
+            <a:prstDash val="dash"/>
+            <a:round/>
+            <a:headEnd type="none" w="med" len="med"/>
+            <a:tailEnd type="none" w="med" len="med"/>
+          </a:ln>
+        </p:spPr>
+      </p:cxnSp>
+      <p:cxnSp>
+        <p:nvCxnSpPr>
+          <p:cNvPr id="209" name="Google Shape;209;p19">
+            <a:extLst>
+              <a:ext uri="{FF2B5EF4-FFF2-40B4-BE49-F238E27FC236}">
+                <a16:creationId xmlns:a16="http://schemas.microsoft.com/office/drawing/2014/main" id="{86B6A005-6AB5-F470-7282-4DF5BB4243FE}"/>
+              </a:ext>
+            </a:extLst>
+          </p:cNvPr>
+          <p:cNvCxnSpPr/>
+          <p:nvPr/>
+        </p:nvCxnSpPr>
+        <p:spPr>
+          <a:xfrm>
+            <a:off x="5607986" y="9505538"/>
+            <a:ext cx="16042200" cy="0"/>
+          </a:xfrm>
+          <a:prstGeom prst="straightConnector1">
+            <a:avLst/>
+          </a:prstGeom>
+          <a:noFill/>
+          <a:ln w="28575" cap="flat" cmpd="sng">
+            <a:solidFill>
+              <a:srgbClr val="999999"/>
+            </a:solidFill>
+            <a:prstDash val="dash"/>
+            <a:round/>
+            <a:headEnd type="none" w="med" len="med"/>
+            <a:tailEnd type="none" w="med" len="med"/>
+          </a:ln>
+        </p:spPr>
+      </p:cxnSp>
+      <p:cxnSp>
+        <p:nvCxnSpPr>
+          <p:cNvPr id="215" name="Google Shape;215;p19">
+            <a:extLst>
+              <a:ext uri="{FF2B5EF4-FFF2-40B4-BE49-F238E27FC236}">
+                <a16:creationId xmlns:a16="http://schemas.microsoft.com/office/drawing/2014/main" id="{24DBB748-2678-1EA8-A485-AF9C91ED4002}"/>
+              </a:ext>
+            </a:extLst>
+          </p:cNvPr>
+          <p:cNvCxnSpPr/>
+          <p:nvPr/>
+        </p:nvCxnSpPr>
+        <p:spPr>
+          <a:xfrm>
+            <a:off x="2874374" y="-28500"/>
+            <a:ext cx="0" cy="10857000"/>
+          </a:xfrm>
+          <a:prstGeom prst="straightConnector1">
+            <a:avLst/>
+          </a:prstGeom>
+          <a:noFill/>
+          <a:ln w="38100" cap="flat" cmpd="sng">
+            <a:solidFill>
+              <a:srgbClr val="5B0F00"/>
+            </a:solidFill>
+            <a:prstDash val="solid"/>
+            <a:round/>
+            <a:headEnd type="none" w="med" len="med"/>
+            <a:tailEnd type="none" w="med" len="med"/>
+          </a:ln>
+        </p:spPr>
+      </p:cxnSp>
+      <p:sp>
+        <p:nvSpPr>
+          <p:cNvPr id="2" name="Google Shape;74;p15">
+            <a:extLst>
+              <a:ext uri="{FF2B5EF4-FFF2-40B4-BE49-F238E27FC236}">
+                <a16:creationId xmlns:a16="http://schemas.microsoft.com/office/drawing/2014/main" id="{C0CC416F-C734-4CB8-A2EC-C43D11EF3ACF}"/>
+              </a:ext>
+            </a:extLst>
+          </p:cNvPr>
+          <p:cNvSpPr/>
+          <p:nvPr/>
+        </p:nvSpPr>
+        <p:spPr>
+          <a:xfrm>
+            <a:off x="3197186" y="1385588"/>
+            <a:ext cx="2410800" cy="480900"/>
+          </a:xfrm>
+          <a:prstGeom prst="roundRect">
+            <a:avLst>
+              <a:gd name="adj" fmla="val 16667"/>
+            </a:avLst>
+          </a:prstGeom>
+          <a:solidFill>
+            <a:srgbClr val="E6B8AF"/>
+          </a:solidFill>
+          <a:ln w="28575" cap="flat" cmpd="sng">
+            <a:solidFill>
+              <a:srgbClr val="5B0F00"/>
+            </a:solidFill>
+            <a:prstDash val="solid"/>
+            <a:round/>
+            <a:headEnd type="none" w="sm" len="sm"/>
+            <a:tailEnd type="none" w="sm" len="sm"/>
+          </a:ln>
+        </p:spPr>
+        <p:txBody>
+          <a:bodyPr spcFirstLastPara="1" wrap="square" lIns="91425" tIns="91425" rIns="91425" bIns="91425" anchor="ctr" anchorCtr="0">
+            <a:noAutofit/>
+          </a:bodyPr>
+          <a:lstStyle/>
+          <a:p>
+            <a:pPr marL="0" lvl="0" indent="0" algn="ctr" rtl="0">
+              <a:spcBef>
+                <a:spcPts val="0"/>
+              </a:spcBef>
+              <a:spcAft>
+                <a:spcPts val="0"/>
+              </a:spcAft>
+              <a:buNone/>
+            </a:pPr>
+            <a:r>
+              <a:rPr lang="en-GB" sz="1800" b="1" dirty="0">
+                <a:latin typeface="Consolas"/>
+                <a:ea typeface="Consolas"/>
+                <a:cs typeface="Consolas"/>
+                <a:sym typeface="Consolas"/>
+              </a:rPr>
+              <a:t>68338</a:t>
+            </a:r>
+            <a:endParaRPr sz="1800" b="1" dirty="0">
+              <a:latin typeface="Consolas"/>
+              <a:ea typeface="Consolas"/>
+              <a:cs typeface="Consolas"/>
+              <a:sym typeface="Consolas"/>
+            </a:endParaRPr>
+          </a:p>
+        </p:txBody>
+      </p:sp>
+      <p:sp>
+        <p:nvSpPr>
+          <p:cNvPr id="3" name="Google Shape;75;p15">
+            <a:extLst>
+              <a:ext uri="{FF2B5EF4-FFF2-40B4-BE49-F238E27FC236}">
+                <a16:creationId xmlns:a16="http://schemas.microsoft.com/office/drawing/2014/main" id="{3EC76D3C-D152-060F-CC37-4C758FBD05CB}"/>
+              </a:ext>
+            </a:extLst>
+          </p:cNvPr>
+          <p:cNvSpPr/>
+          <p:nvPr/>
+        </p:nvSpPr>
+        <p:spPr>
+          <a:xfrm>
+            <a:off x="3197186" y="2961501"/>
+            <a:ext cx="2410800" cy="480900"/>
+          </a:xfrm>
+          <a:prstGeom prst="roundRect">
+            <a:avLst>
+              <a:gd name="adj" fmla="val 16667"/>
+            </a:avLst>
+          </a:prstGeom>
+          <a:solidFill>
+            <a:srgbClr val="E6B8AF"/>
+          </a:solidFill>
+          <a:ln w="28575" cap="flat" cmpd="sng">
+            <a:solidFill>
+              <a:srgbClr val="5B0F00"/>
+            </a:solidFill>
+            <a:prstDash val="solid"/>
+            <a:round/>
+            <a:headEnd type="none" w="sm" len="sm"/>
+            <a:tailEnd type="none" w="sm" len="sm"/>
+          </a:ln>
+        </p:spPr>
+        <p:txBody>
+          <a:bodyPr spcFirstLastPara="1" wrap="square" lIns="91425" tIns="91425" rIns="91425" bIns="91425" anchor="ctr" anchorCtr="0">
+            <a:noAutofit/>
+          </a:bodyPr>
+          <a:lstStyle/>
+          <a:p>
+            <a:pPr marL="0" lvl="0" indent="0" algn="ctr" rtl="0">
+              <a:spcBef>
+                <a:spcPts val="0"/>
+              </a:spcBef>
+              <a:spcAft>
+                <a:spcPts val="0"/>
+              </a:spcAft>
+              <a:buNone/>
+            </a:pPr>
+            <a:r>
+              <a:rPr lang="en-GB" sz="1800" b="1" dirty="0">
+                <a:latin typeface="Consolas"/>
+                <a:ea typeface="Consolas"/>
+                <a:cs typeface="Consolas"/>
+                <a:sym typeface="Consolas"/>
+              </a:rPr>
+              <a:t>68245</a:t>
+            </a:r>
+            <a:endParaRPr sz="1800" b="1" dirty="0">
+              <a:latin typeface="Consolas"/>
+              <a:ea typeface="Consolas"/>
+              <a:cs typeface="Consolas"/>
+              <a:sym typeface="Consolas"/>
+            </a:endParaRPr>
+          </a:p>
+        </p:txBody>
+      </p:sp>
+      <p:sp>
+        <p:nvSpPr>
+          <p:cNvPr id="4" name="Google Shape;76;p15">
+            <a:extLst>
+              <a:ext uri="{FF2B5EF4-FFF2-40B4-BE49-F238E27FC236}">
+                <a16:creationId xmlns:a16="http://schemas.microsoft.com/office/drawing/2014/main" id="{8CD9B04C-7B17-3A03-66A4-195D868581FA}"/>
+              </a:ext>
+            </a:extLst>
+          </p:cNvPr>
+          <p:cNvSpPr/>
+          <p:nvPr/>
+        </p:nvSpPr>
+        <p:spPr>
+          <a:xfrm>
+            <a:off x="3197186" y="4537410"/>
+            <a:ext cx="2410800" cy="480900"/>
+          </a:xfrm>
+          <a:prstGeom prst="roundRect">
+            <a:avLst>
+              <a:gd name="adj" fmla="val 16667"/>
+            </a:avLst>
+          </a:prstGeom>
+          <a:solidFill>
+            <a:srgbClr val="E6B8AF"/>
+          </a:solidFill>
+          <a:ln w="28575" cap="flat" cmpd="sng">
+            <a:solidFill>
+              <a:srgbClr val="5B0F00"/>
+            </a:solidFill>
+            <a:prstDash val="solid"/>
+            <a:round/>
+            <a:headEnd type="none" w="sm" len="sm"/>
+            <a:tailEnd type="none" w="sm" len="sm"/>
+          </a:ln>
+        </p:spPr>
+        <p:txBody>
+          <a:bodyPr spcFirstLastPara="1" wrap="square" lIns="91425" tIns="91425" rIns="91425" bIns="91425" anchor="ctr" anchorCtr="0">
+            <a:noAutofit/>
+          </a:bodyPr>
+          <a:lstStyle/>
+          <a:p>
+            <a:pPr marL="0" lvl="0" indent="0" algn="ctr" rtl="0">
+              <a:spcBef>
+                <a:spcPts val="0"/>
+              </a:spcBef>
+              <a:spcAft>
+                <a:spcPts val="0"/>
+              </a:spcAft>
+              <a:buNone/>
+            </a:pPr>
+            <a:r>
+              <a:rPr lang="en-GB" sz="1800" b="1" dirty="0">
+                <a:latin typeface="Consolas"/>
+                <a:ea typeface="Consolas"/>
+                <a:cs typeface="Consolas"/>
+                <a:sym typeface="Consolas"/>
+              </a:rPr>
+              <a:t>68725</a:t>
+            </a:r>
+            <a:endParaRPr sz="1800" b="1" dirty="0">
+              <a:latin typeface="Consolas"/>
+              <a:ea typeface="Consolas"/>
+              <a:cs typeface="Consolas"/>
+              <a:sym typeface="Consolas"/>
+            </a:endParaRPr>
+          </a:p>
+        </p:txBody>
+      </p:sp>
+      <p:sp>
+        <p:nvSpPr>
+          <p:cNvPr id="5" name="Google Shape;77;p15">
+            <a:extLst>
+              <a:ext uri="{FF2B5EF4-FFF2-40B4-BE49-F238E27FC236}">
+                <a16:creationId xmlns:a16="http://schemas.microsoft.com/office/drawing/2014/main" id="{DAE98067-BA7B-B697-828C-D2842232A116}"/>
+              </a:ext>
+            </a:extLst>
+          </p:cNvPr>
+          <p:cNvSpPr/>
+          <p:nvPr/>
+        </p:nvSpPr>
+        <p:spPr>
+          <a:xfrm>
+            <a:off x="3197186" y="6113307"/>
+            <a:ext cx="2410800" cy="480900"/>
+          </a:xfrm>
+          <a:prstGeom prst="roundRect">
+            <a:avLst>
+              <a:gd name="adj" fmla="val 16667"/>
+            </a:avLst>
+          </a:prstGeom>
+          <a:solidFill>
+            <a:srgbClr val="E6B8AF"/>
+          </a:solidFill>
+          <a:ln w="28575" cap="flat" cmpd="sng">
+            <a:solidFill>
+              <a:srgbClr val="5B0F00"/>
+            </a:solidFill>
+            <a:prstDash val="solid"/>
+            <a:round/>
+            <a:headEnd type="none" w="sm" len="sm"/>
+            <a:tailEnd type="none" w="sm" len="sm"/>
+          </a:ln>
+        </p:spPr>
+        <p:txBody>
+          <a:bodyPr spcFirstLastPara="1" wrap="square" lIns="91425" tIns="91425" rIns="91425" bIns="91425" anchor="ctr" anchorCtr="0">
+            <a:noAutofit/>
+          </a:bodyPr>
+          <a:lstStyle/>
+          <a:p>
+            <a:pPr marL="0" lvl="0" indent="0" algn="ctr" rtl="0">
+              <a:spcBef>
+                <a:spcPts val="0"/>
+              </a:spcBef>
+              <a:spcAft>
+                <a:spcPts val="0"/>
+              </a:spcAft>
+              <a:buNone/>
+            </a:pPr>
+            <a:r>
+              <a:rPr lang="en-GB" sz="1800" b="1" dirty="0">
+                <a:latin typeface="Consolas"/>
+                <a:ea typeface="Consolas"/>
+                <a:cs typeface="Consolas"/>
+                <a:sym typeface="Consolas"/>
+              </a:rPr>
+              <a:t>68180</a:t>
+            </a:r>
+            <a:endParaRPr sz="1800" b="1" dirty="0">
+              <a:latin typeface="Consolas"/>
+              <a:ea typeface="Consolas"/>
+              <a:cs typeface="Consolas"/>
+              <a:sym typeface="Consolas"/>
+            </a:endParaRPr>
+          </a:p>
+        </p:txBody>
+      </p:sp>
+      <p:sp>
+        <p:nvSpPr>
+          <p:cNvPr id="6" name="Google Shape;78;p15">
+            <a:extLst>
+              <a:ext uri="{FF2B5EF4-FFF2-40B4-BE49-F238E27FC236}">
+                <a16:creationId xmlns:a16="http://schemas.microsoft.com/office/drawing/2014/main" id="{E170DC01-D154-8867-C4C6-1AE0F0982F32}"/>
+              </a:ext>
+            </a:extLst>
+          </p:cNvPr>
+          <p:cNvSpPr/>
+          <p:nvPr/>
+        </p:nvSpPr>
+        <p:spPr>
+          <a:xfrm>
+            <a:off x="3197186" y="7689198"/>
+            <a:ext cx="2410800" cy="480900"/>
+          </a:xfrm>
+          <a:prstGeom prst="roundRect">
+            <a:avLst>
+              <a:gd name="adj" fmla="val 16667"/>
+            </a:avLst>
+          </a:prstGeom>
+          <a:solidFill>
+            <a:srgbClr val="E6B8AF"/>
+          </a:solidFill>
+          <a:ln w="28575" cap="flat" cmpd="sng">
+            <a:solidFill>
+              <a:srgbClr val="5B0F00"/>
+            </a:solidFill>
+            <a:prstDash val="solid"/>
+            <a:round/>
+            <a:headEnd type="none" w="sm" len="sm"/>
+            <a:tailEnd type="none" w="sm" len="sm"/>
+          </a:ln>
+        </p:spPr>
+        <p:txBody>
+          <a:bodyPr spcFirstLastPara="1" wrap="square" lIns="91425" tIns="91425" rIns="91425" bIns="91425" anchor="ctr" anchorCtr="0">
+            <a:noAutofit/>
+          </a:bodyPr>
+          <a:lstStyle/>
+          <a:p>
+            <a:pPr marL="0" lvl="0" indent="0" algn="ctr" rtl="0">
+              <a:spcBef>
+                <a:spcPts val="0"/>
+              </a:spcBef>
+              <a:spcAft>
+                <a:spcPts val="0"/>
+              </a:spcAft>
+              <a:buNone/>
+            </a:pPr>
+            <a:r>
+              <a:rPr lang="en-GB" sz="1800" b="1" dirty="0">
+                <a:latin typeface="Consolas"/>
+                <a:ea typeface="Consolas"/>
+                <a:cs typeface="Consolas"/>
+                <a:sym typeface="Consolas"/>
+              </a:rPr>
+              <a:t>67912</a:t>
+            </a:r>
+            <a:endParaRPr sz="1800" b="1" dirty="0">
+              <a:latin typeface="Consolas"/>
+              <a:ea typeface="Consolas"/>
+              <a:cs typeface="Consolas"/>
+              <a:sym typeface="Consolas"/>
+            </a:endParaRPr>
+          </a:p>
+        </p:txBody>
+      </p:sp>
+      <p:sp>
+        <p:nvSpPr>
+          <p:cNvPr id="7" name="Google Shape;79;p15">
+            <a:extLst>
+              <a:ext uri="{FF2B5EF4-FFF2-40B4-BE49-F238E27FC236}">
+                <a16:creationId xmlns:a16="http://schemas.microsoft.com/office/drawing/2014/main" id="{7F6E731C-F28E-4845-2E7C-45AF68A052C1}"/>
+              </a:ext>
+            </a:extLst>
+          </p:cNvPr>
+          <p:cNvSpPr/>
+          <p:nvPr/>
+        </p:nvSpPr>
+        <p:spPr>
+          <a:xfrm>
+            <a:off x="3197186" y="9265103"/>
+            <a:ext cx="2410800" cy="480900"/>
+          </a:xfrm>
+          <a:prstGeom prst="roundRect">
+            <a:avLst>
+              <a:gd name="adj" fmla="val 16667"/>
+            </a:avLst>
+          </a:prstGeom>
+          <a:solidFill>
+            <a:srgbClr val="E6B8AF"/>
+          </a:solidFill>
+          <a:ln w="28575" cap="flat" cmpd="sng">
+            <a:solidFill>
+              <a:srgbClr val="5B0F00"/>
+            </a:solidFill>
+            <a:prstDash val="solid"/>
+            <a:round/>
+            <a:headEnd type="none" w="sm" len="sm"/>
+            <a:tailEnd type="none" w="sm" len="sm"/>
+          </a:ln>
+        </p:spPr>
+        <p:txBody>
+          <a:bodyPr spcFirstLastPara="1" wrap="square" lIns="91425" tIns="91425" rIns="91425" bIns="91425" anchor="ctr" anchorCtr="0">
+            <a:noAutofit/>
+          </a:bodyPr>
+          <a:lstStyle/>
+          <a:p>
+            <a:pPr marL="0" lvl="0" indent="0" algn="ctr" rtl="0">
+              <a:spcBef>
+                <a:spcPts val="0"/>
+              </a:spcBef>
+              <a:spcAft>
+                <a:spcPts val="0"/>
+              </a:spcAft>
+              <a:buNone/>
+            </a:pPr>
+            <a:r>
+              <a:rPr lang="en-GB" sz="1800" b="1" dirty="0">
+                <a:latin typeface="Consolas"/>
+                <a:ea typeface="Consolas"/>
+                <a:cs typeface="Consolas"/>
+                <a:sym typeface="Consolas"/>
+              </a:rPr>
+              <a:t>67870</a:t>
+            </a:r>
+            <a:endParaRPr sz="1800" b="1" dirty="0">
+              <a:latin typeface="Consolas"/>
+              <a:ea typeface="Consolas"/>
+              <a:cs typeface="Consolas"/>
+              <a:sym typeface="Consolas"/>
+            </a:endParaRPr>
+          </a:p>
+        </p:txBody>
+      </p:sp>
+      <p:sp>
+        <p:nvSpPr>
+          <p:cNvPr id="15" name="Google Shape;92;p15">
+            <a:extLst>
+              <a:ext uri="{FF2B5EF4-FFF2-40B4-BE49-F238E27FC236}">
+                <a16:creationId xmlns:a16="http://schemas.microsoft.com/office/drawing/2014/main" id="{619F19D0-A650-FE2C-A413-3C8DF5B336B0}"/>
+              </a:ext>
+            </a:extLst>
+          </p:cNvPr>
+          <p:cNvSpPr/>
+          <p:nvPr/>
+        </p:nvSpPr>
+        <p:spPr>
+          <a:xfrm>
+            <a:off x="270828" y="872940"/>
+            <a:ext cx="2185575" cy="1792037"/>
+          </a:xfrm>
+          <a:prstGeom prst="roundRect">
+            <a:avLst>
+              <a:gd name="adj" fmla="val 16667"/>
+            </a:avLst>
+          </a:prstGeom>
+          <a:solidFill>
+            <a:srgbClr val="D9EAD3"/>
+          </a:solidFill>
+          <a:ln w="28575" cap="flat" cmpd="sng">
+            <a:solidFill>
+              <a:srgbClr val="274E13"/>
+            </a:solidFill>
+            <a:prstDash val="solid"/>
+            <a:round/>
+            <a:headEnd type="none" w="sm" len="sm"/>
+            <a:tailEnd type="none" w="sm" len="sm"/>
+          </a:ln>
+        </p:spPr>
+        <p:txBody>
+          <a:bodyPr spcFirstLastPara="1" wrap="square" lIns="91425" tIns="91425" rIns="91425" bIns="91425" anchor="t" anchorCtr="0">
+            <a:noAutofit/>
+          </a:bodyPr>
+          <a:lstStyle/>
+          <a:p>
+            <a:pPr lvl="0"/>
+            <a:r>
+              <a:rPr lang="pt-PT" dirty="0">
+                <a:latin typeface="Consolas"/>
+                <a:ea typeface="Consolas"/>
+                <a:cs typeface="Consolas"/>
+                <a:sym typeface="Consolas"/>
+              </a:rPr>
+              <a:t>T1: Implementar o novo mapa com objetivo semanal e ranking </a:t>
+            </a:r>
+            <a:r>
+              <a:rPr lang="pt-PT" dirty="0" err="1">
+                <a:latin typeface="Consolas"/>
+                <a:ea typeface="Consolas"/>
+                <a:cs typeface="Consolas"/>
+                <a:sym typeface="Consolas"/>
+              </a:rPr>
+              <a:t>system</a:t>
+            </a:r>
+            <a:r>
+              <a:rPr lang="pt-PT" dirty="0">
+                <a:latin typeface="Consolas"/>
+                <a:ea typeface="Consolas"/>
+                <a:cs typeface="Consolas"/>
+                <a:sym typeface="Consolas"/>
+              </a:rPr>
+              <a:t>.</a:t>
+            </a:r>
+            <a:endParaRPr dirty="0">
+              <a:latin typeface="Consolas"/>
+              <a:ea typeface="Consolas"/>
+              <a:cs typeface="Consolas"/>
+              <a:sym typeface="Consolas"/>
+            </a:endParaRPr>
+          </a:p>
+        </p:txBody>
+      </p:sp>
+      <p:sp>
+        <p:nvSpPr>
+          <p:cNvPr id="16" name="Google Shape;92;p15">
+            <a:extLst>
+              <a:ext uri="{FF2B5EF4-FFF2-40B4-BE49-F238E27FC236}">
+                <a16:creationId xmlns:a16="http://schemas.microsoft.com/office/drawing/2014/main" id="{897ADA3A-B9C6-CD39-C093-76B5441777F4}"/>
+              </a:ext>
+            </a:extLst>
+          </p:cNvPr>
+          <p:cNvSpPr/>
+          <p:nvPr/>
+        </p:nvSpPr>
+        <p:spPr>
+          <a:xfrm>
+            <a:off x="277880" y="2783177"/>
+            <a:ext cx="2185575" cy="1792037"/>
+          </a:xfrm>
+          <a:prstGeom prst="roundRect">
+            <a:avLst>
+              <a:gd name="adj" fmla="val 16667"/>
+            </a:avLst>
+          </a:prstGeom>
+          <a:solidFill>
+            <a:srgbClr val="D9EAD3"/>
+          </a:solidFill>
+          <a:ln w="28575" cap="flat" cmpd="sng">
+            <a:solidFill>
+              <a:srgbClr val="274E13"/>
+            </a:solidFill>
+            <a:prstDash val="solid"/>
+            <a:round/>
+            <a:headEnd type="none" w="sm" len="sm"/>
+            <a:tailEnd type="none" w="sm" len="sm"/>
+          </a:ln>
+        </p:spPr>
+        <p:txBody>
+          <a:bodyPr spcFirstLastPara="1" wrap="square" lIns="91425" tIns="91425" rIns="91425" bIns="91425" anchor="t" anchorCtr="0">
+            <a:noAutofit/>
+          </a:bodyPr>
+          <a:lstStyle/>
+          <a:p>
+            <a:pPr lvl="0"/>
+            <a:r>
+              <a:rPr lang="pt-PT" dirty="0">
+                <a:latin typeface="Consolas"/>
+                <a:ea typeface="Consolas"/>
+                <a:cs typeface="Consolas"/>
+                <a:sym typeface="Consolas"/>
+              </a:rPr>
+              <a:t>T2: Implementar a </a:t>
+            </a:r>
+            <a:r>
+              <a:rPr lang="pt-PT" dirty="0" err="1">
+                <a:latin typeface="Consolas"/>
+                <a:ea typeface="Consolas"/>
+                <a:cs typeface="Consolas"/>
+                <a:sym typeface="Consolas"/>
+              </a:rPr>
+              <a:t>Health</a:t>
+            </a:r>
+            <a:r>
+              <a:rPr lang="pt-PT" dirty="0">
+                <a:latin typeface="Consolas"/>
+                <a:ea typeface="Consolas"/>
+                <a:cs typeface="Consolas"/>
+                <a:sym typeface="Consolas"/>
+              </a:rPr>
+              <a:t> Bar de cada </a:t>
+            </a:r>
+            <a:r>
+              <a:rPr lang="pt-PT" dirty="0" err="1">
+                <a:latin typeface="Consolas"/>
+                <a:ea typeface="Consolas"/>
+                <a:cs typeface="Consolas"/>
+                <a:sym typeface="Consolas"/>
+              </a:rPr>
+              <a:t>wave</a:t>
+            </a:r>
+            <a:r>
+              <a:rPr lang="pt-PT" dirty="0">
+                <a:latin typeface="Consolas"/>
+                <a:ea typeface="Consolas"/>
+                <a:cs typeface="Consolas"/>
+                <a:sym typeface="Consolas"/>
+              </a:rPr>
+              <a:t> de inimigos.</a:t>
+            </a:r>
+            <a:endParaRPr dirty="0">
+              <a:latin typeface="Consolas"/>
+              <a:ea typeface="Consolas"/>
+              <a:cs typeface="Consolas"/>
+              <a:sym typeface="Consolas"/>
+            </a:endParaRPr>
+          </a:p>
+        </p:txBody>
+      </p:sp>
+      <p:sp>
+        <p:nvSpPr>
+          <p:cNvPr id="17" name="Google Shape;92;p15">
+            <a:extLst>
+              <a:ext uri="{FF2B5EF4-FFF2-40B4-BE49-F238E27FC236}">
+                <a16:creationId xmlns:a16="http://schemas.microsoft.com/office/drawing/2014/main" id="{4246A0A7-ACC5-192C-B7EF-C8B08F69E79B}"/>
+              </a:ext>
+            </a:extLst>
+          </p:cNvPr>
+          <p:cNvSpPr/>
+          <p:nvPr/>
+        </p:nvSpPr>
+        <p:spPr>
+          <a:xfrm>
+            <a:off x="277880" y="4699227"/>
+            <a:ext cx="2185575" cy="1792037"/>
+          </a:xfrm>
+          <a:prstGeom prst="roundRect">
+            <a:avLst>
+              <a:gd name="adj" fmla="val 16667"/>
+            </a:avLst>
+          </a:prstGeom>
+          <a:solidFill>
+            <a:srgbClr val="D9EAD3"/>
+          </a:solidFill>
+          <a:ln w="28575" cap="flat" cmpd="sng">
+            <a:solidFill>
+              <a:srgbClr val="274E13"/>
+            </a:solidFill>
+            <a:prstDash val="solid"/>
+            <a:round/>
+            <a:headEnd type="none" w="sm" len="sm"/>
+            <a:tailEnd type="none" w="sm" len="sm"/>
+          </a:ln>
+        </p:spPr>
+        <p:txBody>
+          <a:bodyPr spcFirstLastPara="1" wrap="square" lIns="91425" tIns="91425" rIns="91425" bIns="91425" anchor="t" anchorCtr="0">
+            <a:noAutofit/>
+          </a:bodyPr>
+          <a:lstStyle/>
+          <a:p>
+            <a:pPr lvl="0"/>
+            <a:r>
+              <a:rPr lang="pt-PT" dirty="0">
+                <a:latin typeface="Consolas"/>
+                <a:ea typeface="Consolas"/>
+                <a:cs typeface="Consolas"/>
+                <a:sym typeface="Consolas"/>
+              </a:rPr>
+              <a:t>T3: Implementar as diferentes condições climatéricas.</a:t>
+            </a:r>
+            <a:endParaRPr dirty="0">
+              <a:latin typeface="Consolas"/>
+              <a:ea typeface="Consolas"/>
+              <a:cs typeface="Consolas"/>
+              <a:sym typeface="Consolas"/>
+            </a:endParaRPr>
+          </a:p>
+        </p:txBody>
+      </p:sp>
+      <p:sp>
+        <p:nvSpPr>
+          <p:cNvPr id="19" name="Google Shape;86;p15">
+            <a:extLst>
+              <a:ext uri="{FF2B5EF4-FFF2-40B4-BE49-F238E27FC236}">
+                <a16:creationId xmlns:a16="http://schemas.microsoft.com/office/drawing/2014/main" id="{C73BBE09-7AF8-2E0C-440C-6FF99D05A508}"/>
+              </a:ext>
+            </a:extLst>
+          </p:cNvPr>
+          <p:cNvSpPr/>
+          <p:nvPr/>
+        </p:nvSpPr>
+        <p:spPr>
+          <a:xfrm>
+            <a:off x="6113259" y="1088887"/>
+            <a:ext cx="2410800" cy="9069525"/>
+          </a:xfrm>
+          <a:prstGeom prst="roundRect">
+            <a:avLst>
+              <a:gd name="adj" fmla="val 16667"/>
+            </a:avLst>
+          </a:prstGeom>
+          <a:solidFill>
+            <a:srgbClr val="D9EAD3"/>
+          </a:solidFill>
+          <a:ln w="28575" cap="flat" cmpd="sng">
+            <a:solidFill>
+              <a:srgbClr val="274E13"/>
+            </a:solidFill>
+            <a:prstDash val="solid"/>
+            <a:round/>
+            <a:headEnd type="none" w="sm" len="sm"/>
+            <a:tailEnd type="none" w="sm" len="sm"/>
+          </a:ln>
+        </p:spPr>
+        <p:txBody>
+          <a:bodyPr spcFirstLastPara="1" wrap="square" lIns="91425" tIns="91425" rIns="91425" bIns="91425" anchor="t" anchorCtr="0">
+            <a:noAutofit/>
+          </a:bodyPr>
+          <a:lstStyle/>
+          <a:p>
+            <a:pPr marL="0" lvl="0" indent="0" rtl="0">
+              <a:spcBef>
+                <a:spcPts val="0"/>
+              </a:spcBef>
+              <a:spcAft>
+                <a:spcPts val="0"/>
+              </a:spcAft>
+              <a:buNone/>
+            </a:pPr>
+            <a:r>
+              <a:rPr lang="en-GB" dirty="0">
+                <a:latin typeface="Consolas"/>
+                <a:ea typeface="Consolas"/>
+                <a:cs typeface="Consolas"/>
+                <a:sym typeface="Consolas"/>
+              </a:rPr>
+              <a:t>US1: Como </a:t>
+            </a:r>
+            <a:r>
+              <a:rPr lang="en-GB" dirty="0" err="1">
+                <a:latin typeface="Consolas"/>
+                <a:ea typeface="Consolas"/>
+                <a:cs typeface="Consolas"/>
+                <a:sym typeface="Consolas"/>
+              </a:rPr>
+              <a:t>membro</a:t>
+            </a:r>
+            <a:r>
+              <a:rPr lang="en-GB" dirty="0">
+                <a:latin typeface="Consolas"/>
+                <a:ea typeface="Consolas"/>
+                <a:cs typeface="Consolas"/>
+                <a:sym typeface="Consolas"/>
+              </a:rPr>
+              <a:t> da </a:t>
+            </a:r>
+            <a:r>
+              <a:rPr lang="en-GB" dirty="0" err="1">
+                <a:latin typeface="Consolas"/>
+                <a:ea typeface="Consolas"/>
+                <a:cs typeface="Consolas"/>
+                <a:sym typeface="Consolas"/>
+              </a:rPr>
+              <a:t>equipa</a:t>
+            </a:r>
+            <a:r>
+              <a:rPr lang="en-GB" dirty="0">
+                <a:latin typeface="Consolas"/>
+                <a:ea typeface="Consolas"/>
+                <a:cs typeface="Consolas"/>
+                <a:sym typeface="Consolas"/>
+              </a:rPr>
+              <a:t>, </a:t>
+            </a:r>
+            <a:r>
+              <a:rPr lang="en-GB" dirty="0" err="1">
+                <a:latin typeface="Consolas"/>
+                <a:ea typeface="Consolas"/>
+                <a:cs typeface="Consolas"/>
+                <a:sym typeface="Consolas"/>
+              </a:rPr>
+              <a:t>quero</a:t>
+            </a:r>
+            <a:r>
+              <a:rPr lang="en-GB" dirty="0">
+                <a:latin typeface="Consolas"/>
+                <a:ea typeface="Consolas"/>
+                <a:cs typeface="Consolas"/>
+                <a:sym typeface="Consolas"/>
+              </a:rPr>
+              <a:t> </a:t>
+            </a:r>
+            <a:r>
+              <a:rPr lang="en-GB" dirty="0" err="1">
+                <a:latin typeface="Consolas"/>
+                <a:ea typeface="Consolas"/>
+                <a:cs typeface="Consolas"/>
+                <a:sym typeface="Consolas"/>
+              </a:rPr>
+              <a:t>implementar</a:t>
+            </a:r>
+            <a:r>
+              <a:rPr lang="en-GB" dirty="0">
+                <a:latin typeface="Consolas"/>
+                <a:ea typeface="Consolas"/>
+                <a:cs typeface="Consolas"/>
+                <a:sym typeface="Consolas"/>
+              </a:rPr>
+              <a:t> o novo </a:t>
+            </a:r>
+            <a:r>
+              <a:rPr lang="en-GB" dirty="0" err="1">
+                <a:latin typeface="Consolas"/>
+                <a:ea typeface="Consolas"/>
+                <a:cs typeface="Consolas"/>
+                <a:sym typeface="Consolas"/>
+              </a:rPr>
+              <a:t>mapa</a:t>
+            </a:r>
+            <a:r>
+              <a:rPr lang="en-GB" dirty="0">
+                <a:latin typeface="Consolas"/>
+                <a:ea typeface="Consolas"/>
+                <a:cs typeface="Consolas"/>
+                <a:sym typeface="Consolas"/>
+              </a:rPr>
+              <a:t> com </a:t>
+            </a:r>
+            <a:r>
+              <a:rPr lang="en-GB" dirty="0" err="1">
+                <a:latin typeface="Consolas"/>
+                <a:ea typeface="Consolas"/>
+                <a:cs typeface="Consolas"/>
+                <a:sym typeface="Consolas"/>
+              </a:rPr>
+              <a:t>objetivo</a:t>
+            </a:r>
+            <a:r>
+              <a:rPr lang="en-GB" dirty="0">
+                <a:latin typeface="Consolas"/>
+                <a:ea typeface="Consolas"/>
+                <a:cs typeface="Consolas"/>
+                <a:sym typeface="Consolas"/>
+              </a:rPr>
+              <a:t> </a:t>
+            </a:r>
+            <a:r>
+              <a:rPr lang="en-GB" dirty="0" err="1">
+                <a:latin typeface="Consolas"/>
+                <a:ea typeface="Consolas"/>
+                <a:cs typeface="Consolas"/>
+                <a:sym typeface="Consolas"/>
+              </a:rPr>
+              <a:t>semanal</a:t>
+            </a:r>
+            <a:r>
+              <a:rPr lang="en-GB" dirty="0">
+                <a:latin typeface="Consolas"/>
+                <a:ea typeface="Consolas"/>
+                <a:cs typeface="Consolas"/>
+                <a:sym typeface="Consolas"/>
+              </a:rPr>
+              <a:t> e ranking.</a:t>
+            </a:r>
+            <a:endParaRPr dirty="0">
+              <a:latin typeface="Consolas"/>
+              <a:ea typeface="Consolas"/>
+              <a:cs typeface="Consolas"/>
+              <a:sym typeface="Consolas"/>
+            </a:endParaRPr>
+          </a:p>
+        </p:txBody>
+      </p:sp>
+      <p:sp>
+        <p:nvSpPr>
+          <p:cNvPr id="20" name="Google Shape;92;p15">
+            <a:extLst>
+              <a:ext uri="{FF2B5EF4-FFF2-40B4-BE49-F238E27FC236}">
+                <a16:creationId xmlns:a16="http://schemas.microsoft.com/office/drawing/2014/main" id="{A333C870-6B58-CE6D-F17A-1A7FD0BC7437}"/>
+              </a:ext>
+            </a:extLst>
+          </p:cNvPr>
+          <p:cNvSpPr/>
+          <p:nvPr/>
+        </p:nvSpPr>
+        <p:spPr>
+          <a:xfrm>
+            <a:off x="6220805" y="2536503"/>
+            <a:ext cx="2507514" cy="7634470"/>
+          </a:xfrm>
+          <a:prstGeom prst="roundRect">
+            <a:avLst>
+              <a:gd name="adj" fmla="val 16667"/>
+            </a:avLst>
+          </a:prstGeom>
+          <a:solidFill>
+            <a:srgbClr val="D9EAD3"/>
+          </a:solidFill>
+          <a:ln w="28575" cap="flat" cmpd="sng">
+            <a:solidFill>
+              <a:srgbClr val="274E13"/>
+            </a:solidFill>
+            <a:prstDash val="solid"/>
+            <a:round/>
+            <a:headEnd type="none" w="sm" len="sm"/>
+            <a:tailEnd type="none" w="sm" len="sm"/>
+          </a:ln>
+        </p:spPr>
+        <p:txBody>
+          <a:bodyPr spcFirstLastPara="1" wrap="square" lIns="91425" tIns="91425" rIns="91425" bIns="91425" anchor="t" anchorCtr="0">
+            <a:noAutofit/>
+          </a:bodyPr>
+          <a:lstStyle/>
+          <a:p>
+            <a:pPr lvl="0"/>
+            <a:r>
+              <a:rPr lang="en-GB" dirty="0">
+                <a:latin typeface="Consolas"/>
+                <a:ea typeface="Consolas"/>
+                <a:cs typeface="Consolas"/>
+                <a:sym typeface="Consolas"/>
+              </a:rPr>
+              <a:t>US2: Como </a:t>
+            </a:r>
+            <a:r>
+              <a:rPr lang="en-GB" dirty="0" err="1">
+                <a:latin typeface="Consolas"/>
+                <a:ea typeface="Consolas"/>
+                <a:cs typeface="Consolas"/>
+                <a:sym typeface="Consolas"/>
+              </a:rPr>
+              <a:t>membro</a:t>
+            </a:r>
+            <a:r>
+              <a:rPr lang="en-GB" dirty="0">
+                <a:latin typeface="Consolas"/>
+                <a:ea typeface="Consolas"/>
+                <a:cs typeface="Consolas"/>
+                <a:sym typeface="Consolas"/>
+              </a:rPr>
+              <a:t> da </a:t>
+            </a:r>
+            <a:r>
+              <a:rPr lang="en-GB" dirty="0" err="1">
+                <a:latin typeface="Consolas"/>
+                <a:ea typeface="Consolas"/>
+                <a:cs typeface="Consolas"/>
+                <a:sym typeface="Consolas"/>
+              </a:rPr>
+              <a:t>equipa</a:t>
+            </a:r>
+            <a:r>
+              <a:rPr lang="en-GB" dirty="0">
+                <a:latin typeface="Consolas"/>
+                <a:ea typeface="Consolas"/>
+                <a:cs typeface="Consolas"/>
+                <a:sym typeface="Consolas"/>
+              </a:rPr>
+              <a:t> </a:t>
+            </a:r>
+            <a:r>
+              <a:rPr lang="en-GB" dirty="0" err="1">
+                <a:latin typeface="Consolas"/>
+                <a:ea typeface="Consolas"/>
+                <a:cs typeface="Consolas"/>
+                <a:sym typeface="Consolas"/>
+              </a:rPr>
+              <a:t>quero</a:t>
+            </a:r>
+            <a:r>
+              <a:rPr lang="pt-PT" dirty="0">
+                <a:latin typeface="Consolas"/>
+                <a:ea typeface="Consolas"/>
+                <a:cs typeface="Consolas"/>
+                <a:sym typeface="Consolas"/>
+              </a:rPr>
+              <a:t> implementar a </a:t>
+            </a:r>
+            <a:r>
+              <a:rPr lang="pt-PT" dirty="0" err="1">
+                <a:latin typeface="Consolas"/>
+                <a:ea typeface="Consolas"/>
+                <a:cs typeface="Consolas"/>
+                <a:sym typeface="Consolas"/>
+              </a:rPr>
+              <a:t>Health</a:t>
+            </a:r>
+            <a:r>
+              <a:rPr lang="pt-PT" dirty="0">
+                <a:latin typeface="Consolas"/>
+                <a:ea typeface="Consolas"/>
+                <a:cs typeface="Consolas"/>
+                <a:sym typeface="Consolas"/>
+              </a:rPr>
+              <a:t> Bar de cada </a:t>
+            </a:r>
+            <a:r>
+              <a:rPr lang="pt-PT" dirty="0" err="1">
+                <a:latin typeface="Consolas"/>
+                <a:ea typeface="Consolas"/>
+                <a:cs typeface="Consolas"/>
+                <a:sym typeface="Consolas"/>
+              </a:rPr>
+              <a:t>wave</a:t>
+            </a:r>
+            <a:r>
+              <a:rPr lang="pt-PT" dirty="0">
+                <a:latin typeface="Consolas"/>
+                <a:ea typeface="Consolas"/>
+                <a:cs typeface="Consolas"/>
+                <a:sym typeface="Consolas"/>
+              </a:rPr>
+              <a:t> de inimigos.</a:t>
+            </a:r>
+            <a:endParaRPr dirty="0">
+              <a:latin typeface="Consolas"/>
+              <a:ea typeface="Consolas"/>
+              <a:cs typeface="Consolas"/>
+              <a:sym typeface="Consolas"/>
+            </a:endParaRPr>
+          </a:p>
+        </p:txBody>
+      </p:sp>
+      <p:sp>
+        <p:nvSpPr>
+          <p:cNvPr id="21" name="Google Shape;92;p15">
+            <a:extLst>
+              <a:ext uri="{FF2B5EF4-FFF2-40B4-BE49-F238E27FC236}">
+                <a16:creationId xmlns:a16="http://schemas.microsoft.com/office/drawing/2014/main" id="{8FABC0D9-A41E-04B0-8EFC-0F732BE4D5B1}"/>
+              </a:ext>
+            </a:extLst>
+          </p:cNvPr>
+          <p:cNvSpPr/>
+          <p:nvPr/>
+        </p:nvSpPr>
+        <p:spPr>
+          <a:xfrm>
+            <a:off x="6294173" y="3994181"/>
+            <a:ext cx="2548762" cy="6176792"/>
+          </a:xfrm>
+          <a:prstGeom prst="roundRect">
+            <a:avLst>
+              <a:gd name="adj" fmla="val 16667"/>
+            </a:avLst>
+          </a:prstGeom>
+          <a:solidFill>
+            <a:srgbClr val="D9EAD3"/>
+          </a:solidFill>
+          <a:ln w="28575" cap="flat" cmpd="sng">
+            <a:solidFill>
+              <a:srgbClr val="274E13"/>
+            </a:solidFill>
+            <a:prstDash val="solid"/>
+            <a:round/>
+            <a:headEnd type="none" w="sm" len="sm"/>
+            <a:tailEnd type="none" w="sm" len="sm"/>
+          </a:ln>
+        </p:spPr>
+        <p:txBody>
+          <a:bodyPr spcFirstLastPara="1" wrap="square" lIns="91425" tIns="91425" rIns="91425" bIns="91425" anchor="t" anchorCtr="0">
+            <a:noAutofit/>
+          </a:bodyPr>
+          <a:lstStyle/>
+          <a:p>
+            <a:pPr lvl="0"/>
+            <a:r>
+              <a:rPr lang="en-GB" dirty="0">
+                <a:latin typeface="Consolas"/>
+                <a:ea typeface="Consolas"/>
+                <a:cs typeface="Consolas"/>
+                <a:sym typeface="Consolas"/>
+              </a:rPr>
+              <a:t>US3: Como </a:t>
+            </a:r>
+            <a:r>
+              <a:rPr lang="en-GB" dirty="0" err="1">
+                <a:latin typeface="Consolas"/>
+                <a:ea typeface="Consolas"/>
+                <a:cs typeface="Consolas"/>
+                <a:sym typeface="Consolas"/>
+              </a:rPr>
+              <a:t>membro</a:t>
+            </a:r>
+            <a:r>
+              <a:rPr lang="en-GB" dirty="0">
+                <a:latin typeface="Consolas"/>
+                <a:ea typeface="Consolas"/>
+                <a:cs typeface="Consolas"/>
+                <a:sym typeface="Consolas"/>
+              </a:rPr>
+              <a:t> da </a:t>
+            </a:r>
+            <a:r>
+              <a:rPr lang="en-GB" dirty="0" err="1">
+                <a:latin typeface="Consolas"/>
+                <a:ea typeface="Consolas"/>
+                <a:cs typeface="Consolas"/>
+                <a:sym typeface="Consolas"/>
+              </a:rPr>
+              <a:t>equipa</a:t>
+            </a:r>
+            <a:r>
+              <a:rPr lang="en-GB" dirty="0">
+                <a:latin typeface="Consolas"/>
+                <a:ea typeface="Consolas"/>
+                <a:cs typeface="Consolas"/>
+                <a:sym typeface="Consolas"/>
+              </a:rPr>
+              <a:t> </a:t>
+            </a:r>
+            <a:r>
+              <a:rPr lang="en-GB" dirty="0" err="1">
+                <a:latin typeface="Consolas"/>
+                <a:ea typeface="Consolas"/>
+                <a:cs typeface="Consolas"/>
+                <a:sym typeface="Consolas"/>
+              </a:rPr>
+              <a:t>quero</a:t>
+            </a:r>
+            <a:r>
+              <a:rPr lang="pt-PT" dirty="0">
+                <a:latin typeface="Consolas"/>
+                <a:ea typeface="Consolas"/>
+                <a:cs typeface="Consolas"/>
+                <a:sym typeface="Consolas"/>
+              </a:rPr>
+              <a:t> implementar as diferentes condições climatéricas.</a:t>
+            </a:r>
+          </a:p>
+        </p:txBody>
+      </p:sp>
+    </p:spTree>
+    <p:extLst>
+      <p:ext uri="{BB962C8B-B14F-4D97-AF65-F5344CB8AC3E}">
+        <p14:creationId xmlns:p14="http://schemas.microsoft.com/office/powerpoint/2010/main" val="1632838218"/>
+      </p:ext>
+    </p:extLst>
+  </p:cSld>
+  <p:clrMapOvr>
+    <a:masterClrMapping/>
+  </p:clrMapOvr>
+</p:sld>
+</file>
+
+<file path=ppt/slides/slide19.xml><?xml version="1.0" encoding="utf-8"?>
+<p:sld xmlns:a="http://schemas.openxmlformats.org/drawingml/2006/main" xmlns:r="http://schemas.openxmlformats.org/officeDocument/2006/relationships" xmlns:p="http://schemas.openxmlformats.org/presentationml/2006/main">
+  <p:cSld>
+    <p:spTree>
+      <p:nvGrpSpPr>
+        <p:cNvPr id="1" name="Shape 189">
+          <a:extLst>
+            <a:ext uri="{FF2B5EF4-FFF2-40B4-BE49-F238E27FC236}">
+              <a16:creationId xmlns:a16="http://schemas.microsoft.com/office/drawing/2014/main" id="{3A07598E-EBA3-8AFC-5CAA-49848139AA93}"/>
+            </a:ext>
+          </a:extLst>
+        </p:cNvPr>
+        <p:cNvGrpSpPr/>
+        <p:nvPr/>
+      </p:nvGrpSpPr>
+      <p:grpSpPr>
+        <a:xfrm>
+          <a:off x="0" y="0"/>
+          <a:ext cx="0" cy="0"/>
+          <a:chOff x="0" y="0"/>
+          <a:chExt cx="0" cy="0"/>
+        </a:xfrm>
+      </p:grpSpPr>
+      <p:cxnSp>
+        <p:nvCxnSpPr>
+          <p:cNvPr id="190" name="Google Shape;190;p19">
+            <a:extLst>
+              <a:ext uri="{FF2B5EF4-FFF2-40B4-BE49-F238E27FC236}">
+                <a16:creationId xmlns:a16="http://schemas.microsoft.com/office/drawing/2014/main" id="{AF004D3C-A391-E63A-19C2-1297158BC63C}"/>
+              </a:ext>
+            </a:extLst>
+          </p:cNvPr>
+          <p:cNvCxnSpPr/>
+          <p:nvPr/>
+        </p:nvCxnSpPr>
+        <p:spPr>
+          <a:xfrm>
+            <a:off x="5944724" y="-31500"/>
+            <a:ext cx="0" cy="10857000"/>
+          </a:xfrm>
+          <a:prstGeom prst="straightConnector1">
+            <a:avLst/>
+          </a:prstGeom>
+          <a:noFill/>
+          <a:ln w="38100" cap="flat" cmpd="sng">
+            <a:solidFill>
+              <a:srgbClr val="5B0F00"/>
+            </a:solidFill>
+            <a:prstDash val="solid"/>
+            <a:round/>
+            <a:headEnd type="none" w="med" len="med"/>
+            <a:tailEnd type="none" w="med" len="med"/>
+          </a:ln>
+        </p:spPr>
+      </p:cxnSp>
+      <p:sp>
+        <p:nvSpPr>
+          <p:cNvPr id="191" name="Google Shape;191;p19">
+            <a:extLst>
+              <a:ext uri="{FF2B5EF4-FFF2-40B4-BE49-F238E27FC236}">
+                <a16:creationId xmlns:a16="http://schemas.microsoft.com/office/drawing/2014/main" id="{8871A561-D3B3-6796-3127-27E33C963549}"/>
+              </a:ext>
+            </a:extLst>
+          </p:cNvPr>
+          <p:cNvSpPr/>
+          <p:nvPr/>
+        </p:nvSpPr>
+        <p:spPr>
+          <a:xfrm>
+            <a:off x="3197186" y="84312"/>
+            <a:ext cx="2410800" cy="480900"/>
+          </a:xfrm>
+          <a:prstGeom prst="roundRect">
+            <a:avLst>
+              <a:gd name="adj" fmla="val 16667"/>
+            </a:avLst>
+          </a:prstGeom>
+          <a:solidFill>
+            <a:srgbClr val="F9CB9C"/>
+          </a:solidFill>
+          <a:ln w="28575" cap="flat" cmpd="sng">
+            <a:solidFill>
+              <a:srgbClr val="B45F06"/>
+            </a:solidFill>
+            <a:prstDash val="solid"/>
+            <a:round/>
+            <a:headEnd type="none" w="sm" len="sm"/>
+            <a:tailEnd type="none" w="sm" len="sm"/>
+          </a:ln>
+        </p:spPr>
+        <p:txBody>
+          <a:bodyPr spcFirstLastPara="1" wrap="square" lIns="91425" tIns="91425" rIns="91425" bIns="91425" anchor="ctr" anchorCtr="0">
+            <a:noAutofit/>
+          </a:bodyPr>
+          <a:lstStyle/>
+          <a:p>
+            <a:pPr marL="0" lvl="0" indent="0" algn="ctr" rtl="0">
+              <a:spcBef>
+                <a:spcPts val="0"/>
+              </a:spcBef>
+              <a:spcAft>
+                <a:spcPts val="0"/>
+              </a:spcAft>
+              <a:buNone/>
+            </a:pPr>
+            <a:r>
+              <a:rPr lang="en-GB" sz="1800" b="1">
+                <a:latin typeface="Consolas"/>
+                <a:ea typeface="Consolas"/>
+                <a:cs typeface="Consolas"/>
+                <a:sym typeface="Consolas"/>
+              </a:rPr>
+              <a:t>Student ID</a:t>
+            </a:r>
+            <a:endParaRPr sz="1800" b="1">
+              <a:latin typeface="Consolas"/>
+              <a:ea typeface="Consolas"/>
+              <a:cs typeface="Consolas"/>
+              <a:sym typeface="Consolas"/>
+            </a:endParaRPr>
+          </a:p>
+        </p:txBody>
+      </p:sp>
+      <p:sp>
+        <p:nvSpPr>
+          <p:cNvPr id="192" name="Google Shape;192;p19">
+            <a:extLst>
+              <a:ext uri="{FF2B5EF4-FFF2-40B4-BE49-F238E27FC236}">
+                <a16:creationId xmlns:a16="http://schemas.microsoft.com/office/drawing/2014/main" id="{FC2C3AC4-48AF-ACD1-A784-238EC7D442D3}"/>
+              </a:ext>
+            </a:extLst>
+          </p:cNvPr>
+          <p:cNvSpPr/>
+          <p:nvPr/>
+        </p:nvSpPr>
+        <p:spPr>
+          <a:xfrm>
+            <a:off x="6281636" y="84312"/>
+            <a:ext cx="2410800" cy="480900"/>
+          </a:xfrm>
+          <a:prstGeom prst="roundRect">
+            <a:avLst>
+              <a:gd name="adj" fmla="val 16667"/>
+            </a:avLst>
+          </a:prstGeom>
+          <a:solidFill>
+            <a:srgbClr val="F9CB9C"/>
+          </a:solidFill>
+          <a:ln w="28575" cap="flat" cmpd="sng">
+            <a:solidFill>
+              <a:srgbClr val="B45F06"/>
+            </a:solidFill>
+            <a:prstDash val="solid"/>
+            <a:round/>
+            <a:headEnd type="none" w="sm" len="sm"/>
+            <a:tailEnd type="none" w="sm" len="sm"/>
+          </a:ln>
+        </p:spPr>
+        <p:txBody>
+          <a:bodyPr spcFirstLastPara="1" wrap="square" lIns="91425" tIns="91425" rIns="91425" bIns="91425" anchor="ctr" anchorCtr="0">
+            <a:noAutofit/>
+          </a:bodyPr>
+          <a:lstStyle/>
+          <a:p>
+            <a:pPr marL="0" lvl="0" indent="0" algn="ctr" rtl="0">
+              <a:spcBef>
+                <a:spcPts val="0"/>
+              </a:spcBef>
+              <a:spcAft>
+                <a:spcPts val="0"/>
+              </a:spcAft>
+              <a:buNone/>
+            </a:pPr>
+            <a:r>
+              <a:rPr lang="en-GB" sz="1800" b="1">
+                <a:latin typeface="Consolas"/>
+                <a:ea typeface="Consolas"/>
+                <a:cs typeface="Consolas"/>
+                <a:sym typeface="Consolas"/>
+              </a:rPr>
+              <a:t>Story</a:t>
+            </a:r>
+            <a:endParaRPr sz="1800" b="1">
+              <a:latin typeface="Consolas"/>
+              <a:ea typeface="Consolas"/>
+              <a:cs typeface="Consolas"/>
+              <a:sym typeface="Consolas"/>
+            </a:endParaRPr>
+          </a:p>
+        </p:txBody>
+      </p:sp>
+      <p:sp>
+        <p:nvSpPr>
+          <p:cNvPr id="193" name="Google Shape;193;p19">
+            <a:extLst>
+              <a:ext uri="{FF2B5EF4-FFF2-40B4-BE49-F238E27FC236}">
+                <a16:creationId xmlns:a16="http://schemas.microsoft.com/office/drawing/2014/main" id="{1DA4AC9C-09C1-F6E4-A8F4-1EAC1BA63D77}"/>
+              </a:ext>
+            </a:extLst>
+          </p:cNvPr>
+          <p:cNvSpPr/>
+          <p:nvPr/>
+        </p:nvSpPr>
+        <p:spPr>
+          <a:xfrm>
+            <a:off x="9366071" y="84312"/>
+            <a:ext cx="2410800" cy="480900"/>
+          </a:xfrm>
+          <a:prstGeom prst="roundRect">
+            <a:avLst>
+              <a:gd name="adj" fmla="val 16667"/>
+            </a:avLst>
+          </a:prstGeom>
+          <a:solidFill>
+            <a:srgbClr val="F9CB9C"/>
+          </a:solidFill>
+          <a:ln w="28575" cap="flat" cmpd="sng">
+            <a:solidFill>
+              <a:srgbClr val="B45F06"/>
+            </a:solidFill>
+            <a:prstDash val="solid"/>
+            <a:round/>
+            <a:headEnd type="none" w="sm" len="sm"/>
+            <a:tailEnd type="none" w="sm" len="sm"/>
+          </a:ln>
+        </p:spPr>
+        <p:txBody>
+          <a:bodyPr spcFirstLastPara="1" wrap="square" lIns="91425" tIns="91425" rIns="91425" bIns="91425" anchor="ctr" anchorCtr="0">
+            <a:noAutofit/>
+          </a:bodyPr>
+          <a:lstStyle/>
+          <a:p>
+            <a:pPr marL="0" lvl="0" indent="0" algn="ctr" rtl="0">
+              <a:spcBef>
+                <a:spcPts val="0"/>
+              </a:spcBef>
+              <a:spcAft>
+                <a:spcPts val="0"/>
+              </a:spcAft>
+              <a:buNone/>
+            </a:pPr>
+            <a:r>
+              <a:rPr lang="en-GB" sz="1800" b="1">
+                <a:latin typeface="Consolas"/>
+                <a:ea typeface="Consolas"/>
+                <a:cs typeface="Consolas"/>
+                <a:sym typeface="Consolas"/>
+              </a:rPr>
+              <a:t>To Do</a:t>
+            </a:r>
+            <a:endParaRPr sz="1800" b="1">
+              <a:latin typeface="Consolas"/>
+              <a:ea typeface="Consolas"/>
+              <a:cs typeface="Consolas"/>
+              <a:sym typeface="Consolas"/>
+            </a:endParaRPr>
+          </a:p>
+        </p:txBody>
+      </p:sp>
+      <p:sp>
+        <p:nvSpPr>
+          <p:cNvPr id="194" name="Google Shape;194;p19">
+            <a:extLst>
+              <a:ext uri="{FF2B5EF4-FFF2-40B4-BE49-F238E27FC236}">
+                <a16:creationId xmlns:a16="http://schemas.microsoft.com/office/drawing/2014/main" id="{BC06BCF9-54F3-BA25-830A-1C49A1A68E68}"/>
+              </a:ext>
+            </a:extLst>
+          </p:cNvPr>
+          <p:cNvSpPr/>
+          <p:nvPr/>
+        </p:nvSpPr>
+        <p:spPr>
+          <a:xfrm>
+            <a:off x="12395940" y="84312"/>
+            <a:ext cx="2410800" cy="480900"/>
+          </a:xfrm>
+          <a:prstGeom prst="roundRect">
+            <a:avLst>
+              <a:gd name="adj" fmla="val 16667"/>
+            </a:avLst>
+          </a:prstGeom>
+          <a:solidFill>
+            <a:srgbClr val="F9CB9C"/>
+          </a:solidFill>
+          <a:ln w="28575" cap="flat" cmpd="sng">
+            <a:solidFill>
+              <a:srgbClr val="B45F06"/>
+            </a:solidFill>
+            <a:prstDash val="solid"/>
+            <a:round/>
+            <a:headEnd type="none" w="sm" len="sm"/>
+            <a:tailEnd type="none" w="sm" len="sm"/>
+          </a:ln>
+        </p:spPr>
+        <p:txBody>
+          <a:bodyPr spcFirstLastPara="1" wrap="square" lIns="91425" tIns="91425" rIns="91425" bIns="91425" anchor="ctr" anchorCtr="0">
+            <a:noAutofit/>
+          </a:bodyPr>
+          <a:lstStyle/>
+          <a:p>
+            <a:pPr marL="0" lvl="0" indent="0" algn="ctr" rtl="0">
+              <a:spcBef>
+                <a:spcPts val="0"/>
+              </a:spcBef>
+              <a:spcAft>
+                <a:spcPts val="0"/>
+              </a:spcAft>
+              <a:buNone/>
+            </a:pPr>
+            <a:r>
+              <a:rPr lang="en-GB" sz="1800" b="1">
+                <a:latin typeface="Consolas"/>
+                <a:ea typeface="Consolas"/>
+                <a:cs typeface="Consolas"/>
+                <a:sym typeface="Consolas"/>
+              </a:rPr>
+              <a:t>Doing</a:t>
+            </a:r>
+            <a:endParaRPr sz="1800" b="1">
+              <a:latin typeface="Consolas"/>
+              <a:ea typeface="Consolas"/>
+              <a:cs typeface="Consolas"/>
+              <a:sym typeface="Consolas"/>
+            </a:endParaRPr>
+          </a:p>
+        </p:txBody>
+      </p:sp>
+      <p:sp>
+        <p:nvSpPr>
+          <p:cNvPr id="195" name="Google Shape;195;p19">
+            <a:extLst>
+              <a:ext uri="{FF2B5EF4-FFF2-40B4-BE49-F238E27FC236}">
+                <a16:creationId xmlns:a16="http://schemas.microsoft.com/office/drawing/2014/main" id="{3D01836A-55B8-C6BA-82CD-8EAA157E6A44}"/>
+              </a:ext>
+            </a:extLst>
+          </p:cNvPr>
+          <p:cNvSpPr/>
+          <p:nvPr/>
+        </p:nvSpPr>
+        <p:spPr>
+          <a:xfrm>
+            <a:off x="15532407" y="84312"/>
+            <a:ext cx="2410800" cy="480900"/>
+          </a:xfrm>
+          <a:prstGeom prst="roundRect">
+            <a:avLst>
+              <a:gd name="adj" fmla="val 16667"/>
+            </a:avLst>
+          </a:prstGeom>
+          <a:solidFill>
+            <a:srgbClr val="F9CB9C"/>
+          </a:solidFill>
+          <a:ln w="28575" cap="flat" cmpd="sng">
+            <a:solidFill>
+              <a:srgbClr val="B45F06"/>
+            </a:solidFill>
+            <a:prstDash val="solid"/>
+            <a:round/>
+            <a:headEnd type="none" w="sm" len="sm"/>
+            <a:tailEnd type="none" w="sm" len="sm"/>
+          </a:ln>
+        </p:spPr>
+        <p:txBody>
+          <a:bodyPr spcFirstLastPara="1" wrap="square" lIns="91425" tIns="91425" rIns="91425" bIns="91425" anchor="ctr" anchorCtr="0">
+            <a:noAutofit/>
+          </a:bodyPr>
+          <a:lstStyle/>
+          <a:p>
+            <a:pPr marL="0" lvl="0" indent="0" algn="ctr" rtl="0">
+              <a:spcBef>
+                <a:spcPts val="0"/>
+              </a:spcBef>
+              <a:spcAft>
+                <a:spcPts val="0"/>
+              </a:spcAft>
+              <a:buNone/>
+            </a:pPr>
+            <a:r>
+              <a:rPr lang="en-GB" sz="1800" b="1">
+                <a:latin typeface="Consolas"/>
+                <a:ea typeface="Consolas"/>
+                <a:cs typeface="Consolas"/>
+                <a:sym typeface="Consolas"/>
+              </a:rPr>
+              <a:t>Review</a:t>
+            </a:r>
+            <a:endParaRPr sz="1800" b="1">
+              <a:latin typeface="Consolas"/>
+              <a:ea typeface="Consolas"/>
+              <a:cs typeface="Consolas"/>
+              <a:sym typeface="Consolas"/>
+            </a:endParaRPr>
+          </a:p>
+        </p:txBody>
+      </p:sp>
+      <p:sp>
+        <p:nvSpPr>
+          <p:cNvPr id="196" name="Google Shape;196;p19">
+            <a:extLst>
+              <a:ext uri="{FF2B5EF4-FFF2-40B4-BE49-F238E27FC236}">
+                <a16:creationId xmlns:a16="http://schemas.microsoft.com/office/drawing/2014/main" id="{29D00CBA-D30D-75DA-49FA-3CBD84E2EE88}"/>
+              </a:ext>
+            </a:extLst>
+          </p:cNvPr>
+          <p:cNvSpPr/>
+          <p:nvPr/>
+        </p:nvSpPr>
+        <p:spPr>
+          <a:xfrm>
+            <a:off x="18668888" y="84312"/>
+            <a:ext cx="2410800" cy="480900"/>
+          </a:xfrm>
+          <a:prstGeom prst="roundRect">
+            <a:avLst>
+              <a:gd name="adj" fmla="val 16667"/>
+            </a:avLst>
+          </a:prstGeom>
+          <a:solidFill>
+            <a:srgbClr val="F9CB9C"/>
+          </a:solidFill>
+          <a:ln w="28575" cap="flat" cmpd="sng">
+            <a:solidFill>
+              <a:srgbClr val="B45F06"/>
+            </a:solidFill>
+            <a:prstDash val="solid"/>
+            <a:round/>
+            <a:headEnd type="none" w="sm" len="sm"/>
+            <a:tailEnd type="none" w="sm" len="sm"/>
+          </a:ln>
+        </p:spPr>
+        <p:txBody>
+          <a:bodyPr spcFirstLastPara="1" wrap="square" lIns="91425" tIns="91425" rIns="91425" bIns="91425" anchor="ctr" anchorCtr="0">
+            <a:noAutofit/>
+          </a:bodyPr>
+          <a:lstStyle/>
+          <a:p>
+            <a:pPr marL="0" lvl="0" indent="0" algn="ctr" rtl="0">
+              <a:spcBef>
+                <a:spcPts val="0"/>
+              </a:spcBef>
+              <a:spcAft>
+                <a:spcPts val="0"/>
+              </a:spcAft>
+              <a:buNone/>
+            </a:pPr>
+            <a:r>
+              <a:rPr lang="en-GB" sz="1800" b="1">
+                <a:latin typeface="Consolas"/>
+                <a:ea typeface="Consolas"/>
+                <a:cs typeface="Consolas"/>
+                <a:sym typeface="Consolas"/>
+              </a:rPr>
+              <a:t>Done</a:t>
+            </a:r>
+            <a:endParaRPr sz="1800" b="1">
+              <a:latin typeface="Consolas"/>
+              <a:ea typeface="Consolas"/>
+              <a:cs typeface="Consolas"/>
+              <a:sym typeface="Consolas"/>
+            </a:endParaRPr>
+          </a:p>
+        </p:txBody>
+      </p:sp>
+      <p:sp>
+        <p:nvSpPr>
+          <p:cNvPr id="197" name="Google Shape;197;p19">
+            <a:extLst>
+              <a:ext uri="{FF2B5EF4-FFF2-40B4-BE49-F238E27FC236}">
+                <a16:creationId xmlns:a16="http://schemas.microsoft.com/office/drawing/2014/main" id="{F5FF8753-39A0-C025-D867-8C3F03B30866}"/>
+              </a:ext>
+            </a:extLst>
+          </p:cNvPr>
+          <p:cNvSpPr/>
+          <p:nvPr/>
+        </p:nvSpPr>
+        <p:spPr>
+          <a:xfrm>
+            <a:off x="167288" y="84312"/>
+            <a:ext cx="2410800" cy="480900"/>
+          </a:xfrm>
+          <a:prstGeom prst="roundRect">
+            <a:avLst>
+              <a:gd name="adj" fmla="val 16667"/>
+            </a:avLst>
+          </a:prstGeom>
+          <a:solidFill>
+            <a:srgbClr val="F9CB9C"/>
+          </a:solidFill>
+          <a:ln w="28575" cap="flat" cmpd="sng">
+            <a:solidFill>
+              <a:srgbClr val="B45F06"/>
+            </a:solidFill>
+            <a:prstDash val="solid"/>
+            <a:round/>
+            <a:headEnd type="none" w="sm" len="sm"/>
+            <a:tailEnd type="none" w="sm" len="sm"/>
+          </a:ln>
+        </p:spPr>
+        <p:txBody>
+          <a:bodyPr spcFirstLastPara="1" wrap="square" lIns="91425" tIns="91425" rIns="91425" bIns="91425" anchor="ctr" anchorCtr="0">
+            <a:noAutofit/>
+          </a:bodyPr>
+          <a:lstStyle/>
+          <a:p>
+            <a:pPr marL="0" lvl="0" indent="0" algn="ctr" rtl="0">
+              <a:spcBef>
+                <a:spcPts val="0"/>
+              </a:spcBef>
+              <a:spcAft>
+                <a:spcPts val="0"/>
+              </a:spcAft>
+              <a:buNone/>
+            </a:pPr>
+            <a:r>
+              <a:rPr lang="en-GB" sz="1800" b="1">
+                <a:latin typeface="Consolas"/>
+                <a:ea typeface="Consolas"/>
+                <a:cs typeface="Consolas"/>
+                <a:sym typeface="Consolas"/>
+              </a:rPr>
+              <a:t>Backlog</a:t>
+            </a:r>
+            <a:endParaRPr sz="1800" b="1">
+              <a:latin typeface="Consolas"/>
+              <a:ea typeface="Consolas"/>
+              <a:cs typeface="Consolas"/>
+              <a:sym typeface="Consolas"/>
+            </a:endParaRPr>
+          </a:p>
+        </p:txBody>
+      </p:sp>
+      <p:cxnSp>
+        <p:nvCxnSpPr>
+          <p:cNvPr id="204" name="Google Shape;204;p19">
+            <a:extLst>
+              <a:ext uri="{FF2B5EF4-FFF2-40B4-BE49-F238E27FC236}">
+                <a16:creationId xmlns:a16="http://schemas.microsoft.com/office/drawing/2014/main" id="{B2829AFB-6165-C8D5-EC56-AF8ABDDE9EF8}"/>
+              </a:ext>
+            </a:extLst>
+          </p:cNvPr>
+          <p:cNvCxnSpPr/>
+          <p:nvPr/>
+        </p:nvCxnSpPr>
+        <p:spPr>
+          <a:xfrm>
+            <a:off x="5607986" y="1626038"/>
+            <a:ext cx="16042200" cy="0"/>
+          </a:xfrm>
+          <a:prstGeom prst="straightConnector1">
+            <a:avLst/>
+          </a:prstGeom>
+          <a:noFill/>
+          <a:ln w="28575" cap="flat" cmpd="sng">
+            <a:solidFill>
+              <a:srgbClr val="999999"/>
+            </a:solidFill>
+            <a:prstDash val="dash"/>
+            <a:round/>
+            <a:headEnd type="none" w="med" len="med"/>
+            <a:tailEnd type="none" w="med" len="med"/>
+          </a:ln>
+        </p:spPr>
+      </p:cxnSp>
+      <p:cxnSp>
+        <p:nvCxnSpPr>
+          <p:cNvPr id="205" name="Google Shape;205;p19">
+            <a:extLst>
+              <a:ext uri="{FF2B5EF4-FFF2-40B4-BE49-F238E27FC236}">
+                <a16:creationId xmlns:a16="http://schemas.microsoft.com/office/drawing/2014/main" id="{1AB4AAF4-FBAA-E6C6-7478-81BA9B891461}"/>
+              </a:ext>
+            </a:extLst>
+          </p:cNvPr>
+          <p:cNvCxnSpPr/>
+          <p:nvPr/>
+        </p:nvCxnSpPr>
+        <p:spPr>
+          <a:xfrm>
+            <a:off x="5607986" y="3203476"/>
+            <a:ext cx="16042200" cy="0"/>
+          </a:xfrm>
+          <a:prstGeom prst="straightConnector1">
+            <a:avLst/>
+          </a:prstGeom>
+          <a:noFill/>
+          <a:ln w="28575" cap="flat" cmpd="sng">
+            <a:solidFill>
+              <a:srgbClr val="999999"/>
+            </a:solidFill>
+            <a:prstDash val="dash"/>
+            <a:round/>
+            <a:headEnd type="none" w="med" len="med"/>
+            <a:tailEnd type="none" w="med" len="med"/>
+          </a:ln>
+        </p:spPr>
+      </p:cxnSp>
+      <p:cxnSp>
+        <p:nvCxnSpPr>
+          <p:cNvPr id="206" name="Google Shape;206;p19">
+            <a:extLst>
+              <a:ext uri="{FF2B5EF4-FFF2-40B4-BE49-F238E27FC236}">
+                <a16:creationId xmlns:a16="http://schemas.microsoft.com/office/drawing/2014/main" id="{B2FBC8FB-759C-5D6E-0626-47D22648F900}"/>
+              </a:ext>
+            </a:extLst>
+          </p:cNvPr>
+          <p:cNvCxnSpPr/>
+          <p:nvPr/>
+        </p:nvCxnSpPr>
+        <p:spPr>
+          <a:xfrm>
+            <a:off x="5607986" y="4777838"/>
+            <a:ext cx="16042200" cy="0"/>
+          </a:xfrm>
+          <a:prstGeom prst="straightConnector1">
+            <a:avLst/>
+          </a:prstGeom>
+          <a:noFill/>
+          <a:ln w="28575" cap="flat" cmpd="sng">
+            <a:solidFill>
+              <a:srgbClr val="999999"/>
+            </a:solidFill>
+            <a:prstDash val="dash"/>
+            <a:round/>
+            <a:headEnd type="none" w="med" len="med"/>
+            <a:tailEnd type="none" w="med" len="med"/>
+          </a:ln>
+        </p:spPr>
+      </p:cxnSp>
+      <p:cxnSp>
+        <p:nvCxnSpPr>
+          <p:cNvPr id="207" name="Google Shape;207;p19">
+            <a:extLst>
+              <a:ext uri="{FF2B5EF4-FFF2-40B4-BE49-F238E27FC236}">
+                <a16:creationId xmlns:a16="http://schemas.microsoft.com/office/drawing/2014/main" id="{629D5493-021E-2CF8-629C-B49AB58E5A22}"/>
+              </a:ext>
+            </a:extLst>
+          </p:cNvPr>
+          <p:cNvCxnSpPr/>
+          <p:nvPr/>
+        </p:nvCxnSpPr>
+        <p:spPr>
+          <a:xfrm>
+            <a:off x="5607986" y="6353738"/>
+            <a:ext cx="16042200" cy="0"/>
+          </a:xfrm>
+          <a:prstGeom prst="straightConnector1">
+            <a:avLst/>
+          </a:prstGeom>
+          <a:noFill/>
+          <a:ln w="28575" cap="flat" cmpd="sng">
+            <a:solidFill>
+              <a:srgbClr val="999999"/>
+            </a:solidFill>
+            <a:prstDash val="dash"/>
+            <a:round/>
+            <a:headEnd type="none" w="med" len="med"/>
+            <a:tailEnd type="none" w="med" len="med"/>
+          </a:ln>
+        </p:spPr>
+      </p:cxnSp>
+      <p:cxnSp>
+        <p:nvCxnSpPr>
+          <p:cNvPr id="208" name="Google Shape;208;p19">
+            <a:extLst>
+              <a:ext uri="{FF2B5EF4-FFF2-40B4-BE49-F238E27FC236}">
+                <a16:creationId xmlns:a16="http://schemas.microsoft.com/office/drawing/2014/main" id="{F8F6A46D-2060-BDEC-B8A8-C1B266009630}"/>
+              </a:ext>
+            </a:extLst>
+          </p:cNvPr>
+          <p:cNvCxnSpPr/>
+          <p:nvPr/>
+        </p:nvCxnSpPr>
+        <p:spPr>
+          <a:xfrm>
+            <a:off x="5607986" y="7929638"/>
+            <a:ext cx="16042200" cy="0"/>
+          </a:xfrm>
+          <a:prstGeom prst="straightConnector1">
+            <a:avLst/>
+          </a:prstGeom>
+          <a:noFill/>
+          <a:ln w="28575" cap="flat" cmpd="sng">
+            <a:solidFill>
+              <a:srgbClr val="999999"/>
+            </a:solidFill>
+            <a:prstDash val="dash"/>
+            <a:round/>
+            <a:headEnd type="none" w="med" len="med"/>
+            <a:tailEnd type="none" w="med" len="med"/>
+          </a:ln>
+        </p:spPr>
+      </p:cxnSp>
+      <p:cxnSp>
+        <p:nvCxnSpPr>
+          <p:cNvPr id="209" name="Google Shape;209;p19">
+            <a:extLst>
+              <a:ext uri="{FF2B5EF4-FFF2-40B4-BE49-F238E27FC236}">
+                <a16:creationId xmlns:a16="http://schemas.microsoft.com/office/drawing/2014/main" id="{96AD2D4E-AD7C-CA64-30F1-245304071DBE}"/>
+              </a:ext>
+            </a:extLst>
+          </p:cNvPr>
+          <p:cNvCxnSpPr/>
+          <p:nvPr/>
+        </p:nvCxnSpPr>
+        <p:spPr>
+          <a:xfrm>
+            <a:off x="5607986" y="9505538"/>
+            <a:ext cx="16042200" cy="0"/>
+          </a:xfrm>
+          <a:prstGeom prst="straightConnector1">
+            <a:avLst/>
+          </a:prstGeom>
+          <a:noFill/>
+          <a:ln w="28575" cap="flat" cmpd="sng">
+            <a:solidFill>
+              <a:srgbClr val="999999"/>
+            </a:solidFill>
+            <a:prstDash val="dash"/>
+            <a:round/>
+            <a:headEnd type="none" w="med" len="med"/>
+            <a:tailEnd type="none" w="med" len="med"/>
+          </a:ln>
+        </p:spPr>
+      </p:cxnSp>
+      <p:cxnSp>
+        <p:nvCxnSpPr>
+          <p:cNvPr id="215" name="Google Shape;215;p19">
+            <a:extLst>
+              <a:ext uri="{FF2B5EF4-FFF2-40B4-BE49-F238E27FC236}">
+                <a16:creationId xmlns:a16="http://schemas.microsoft.com/office/drawing/2014/main" id="{B57419FA-6EEF-45E2-B7FD-8BE8F79A0728}"/>
+              </a:ext>
+            </a:extLst>
+          </p:cNvPr>
+          <p:cNvCxnSpPr/>
+          <p:nvPr/>
+        </p:nvCxnSpPr>
+        <p:spPr>
+          <a:xfrm>
+            <a:off x="2874374" y="-28500"/>
+            <a:ext cx="0" cy="10857000"/>
+          </a:xfrm>
+          <a:prstGeom prst="straightConnector1">
+            <a:avLst/>
+          </a:prstGeom>
+          <a:noFill/>
+          <a:ln w="38100" cap="flat" cmpd="sng">
+            <a:solidFill>
+              <a:srgbClr val="5B0F00"/>
+            </a:solidFill>
+            <a:prstDash val="solid"/>
+            <a:round/>
+            <a:headEnd type="none" w="med" len="med"/>
+            <a:tailEnd type="none" w="med" len="med"/>
+          </a:ln>
+        </p:spPr>
+      </p:cxnSp>
+      <p:sp>
+        <p:nvSpPr>
+          <p:cNvPr id="2" name="Google Shape;74;p15">
+            <a:extLst>
+              <a:ext uri="{FF2B5EF4-FFF2-40B4-BE49-F238E27FC236}">
+                <a16:creationId xmlns:a16="http://schemas.microsoft.com/office/drawing/2014/main" id="{6D7064A2-FA68-771E-E233-06069D607CDA}"/>
+              </a:ext>
+            </a:extLst>
+          </p:cNvPr>
+          <p:cNvSpPr/>
+          <p:nvPr/>
+        </p:nvSpPr>
+        <p:spPr>
+          <a:xfrm>
+            <a:off x="3197186" y="1385588"/>
+            <a:ext cx="2410800" cy="480900"/>
+          </a:xfrm>
+          <a:prstGeom prst="roundRect">
+            <a:avLst>
+              <a:gd name="adj" fmla="val 16667"/>
+            </a:avLst>
+          </a:prstGeom>
+          <a:solidFill>
+            <a:srgbClr val="E6B8AF"/>
+          </a:solidFill>
+          <a:ln w="28575" cap="flat" cmpd="sng">
+            <a:solidFill>
+              <a:srgbClr val="5B0F00"/>
+            </a:solidFill>
+            <a:prstDash val="solid"/>
+            <a:round/>
+            <a:headEnd type="none" w="sm" len="sm"/>
+            <a:tailEnd type="none" w="sm" len="sm"/>
+          </a:ln>
+        </p:spPr>
+        <p:txBody>
+          <a:bodyPr spcFirstLastPara="1" wrap="square" lIns="91425" tIns="91425" rIns="91425" bIns="91425" anchor="ctr" anchorCtr="0">
+            <a:noAutofit/>
+          </a:bodyPr>
+          <a:lstStyle/>
+          <a:p>
+            <a:pPr marL="0" lvl="0" indent="0" algn="ctr" rtl="0">
+              <a:spcBef>
+                <a:spcPts val="0"/>
+              </a:spcBef>
+              <a:spcAft>
+                <a:spcPts val="0"/>
+              </a:spcAft>
+              <a:buNone/>
+            </a:pPr>
+            <a:r>
+              <a:rPr lang="en-GB" sz="1800" b="1" dirty="0">
+                <a:latin typeface="Consolas"/>
+                <a:ea typeface="Consolas"/>
+                <a:cs typeface="Consolas"/>
+                <a:sym typeface="Consolas"/>
+              </a:rPr>
+              <a:t>68338</a:t>
+            </a:r>
+            <a:endParaRPr sz="1800" b="1" dirty="0">
+              <a:latin typeface="Consolas"/>
+              <a:ea typeface="Consolas"/>
+              <a:cs typeface="Consolas"/>
+              <a:sym typeface="Consolas"/>
+            </a:endParaRPr>
+          </a:p>
+        </p:txBody>
+      </p:sp>
+      <p:sp>
+        <p:nvSpPr>
+          <p:cNvPr id="3" name="Google Shape;75;p15">
+            <a:extLst>
+              <a:ext uri="{FF2B5EF4-FFF2-40B4-BE49-F238E27FC236}">
+                <a16:creationId xmlns:a16="http://schemas.microsoft.com/office/drawing/2014/main" id="{5EEE2CC9-1FB8-0EBD-814E-58D75C27656B}"/>
+              </a:ext>
+            </a:extLst>
+          </p:cNvPr>
+          <p:cNvSpPr/>
+          <p:nvPr/>
+        </p:nvSpPr>
+        <p:spPr>
+          <a:xfrm>
+            <a:off x="3197186" y="2961501"/>
+            <a:ext cx="2410800" cy="480900"/>
+          </a:xfrm>
+          <a:prstGeom prst="roundRect">
+            <a:avLst>
+              <a:gd name="adj" fmla="val 16667"/>
+            </a:avLst>
+          </a:prstGeom>
+          <a:solidFill>
+            <a:srgbClr val="E6B8AF"/>
+          </a:solidFill>
+          <a:ln w="28575" cap="flat" cmpd="sng">
+            <a:solidFill>
+              <a:srgbClr val="5B0F00"/>
+            </a:solidFill>
+            <a:prstDash val="solid"/>
+            <a:round/>
+            <a:headEnd type="none" w="sm" len="sm"/>
+            <a:tailEnd type="none" w="sm" len="sm"/>
+          </a:ln>
+        </p:spPr>
+        <p:txBody>
+          <a:bodyPr spcFirstLastPara="1" wrap="square" lIns="91425" tIns="91425" rIns="91425" bIns="91425" anchor="ctr" anchorCtr="0">
+            <a:noAutofit/>
+          </a:bodyPr>
+          <a:lstStyle/>
+          <a:p>
+            <a:pPr marL="0" lvl="0" indent="0" algn="ctr" rtl="0">
+              <a:spcBef>
+                <a:spcPts val="0"/>
+              </a:spcBef>
+              <a:spcAft>
+                <a:spcPts val="0"/>
+              </a:spcAft>
+              <a:buNone/>
+            </a:pPr>
+            <a:r>
+              <a:rPr lang="en-GB" sz="1800" b="1" dirty="0">
+                <a:latin typeface="Consolas"/>
+                <a:ea typeface="Consolas"/>
+                <a:cs typeface="Consolas"/>
+                <a:sym typeface="Consolas"/>
+              </a:rPr>
+              <a:t>68245</a:t>
+            </a:r>
+            <a:endParaRPr sz="1800" b="1" dirty="0">
+              <a:latin typeface="Consolas"/>
+              <a:ea typeface="Consolas"/>
+              <a:cs typeface="Consolas"/>
+              <a:sym typeface="Consolas"/>
+            </a:endParaRPr>
+          </a:p>
+        </p:txBody>
+      </p:sp>
+      <p:sp>
+        <p:nvSpPr>
+          <p:cNvPr id="4" name="Google Shape;76;p15">
+            <a:extLst>
+              <a:ext uri="{FF2B5EF4-FFF2-40B4-BE49-F238E27FC236}">
+                <a16:creationId xmlns:a16="http://schemas.microsoft.com/office/drawing/2014/main" id="{14C5B081-E4A7-53B0-6AA6-B1F9F172D769}"/>
+              </a:ext>
+            </a:extLst>
+          </p:cNvPr>
+          <p:cNvSpPr/>
+          <p:nvPr/>
+        </p:nvSpPr>
+        <p:spPr>
+          <a:xfrm>
+            <a:off x="3197186" y="4537410"/>
+            <a:ext cx="2410800" cy="480900"/>
+          </a:xfrm>
+          <a:prstGeom prst="roundRect">
+            <a:avLst>
+              <a:gd name="adj" fmla="val 16667"/>
+            </a:avLst>
+          </a:prstGeom>
+          <a:solidFill>
+            <a:srgbClr val="E6B8AF"/>
+          </a:solidFill>
+          <a:ln w="28575" cap="flat" cmpd="sng">
+            <a:solidFill>
+              <a:srgbClr val="5B0F00"/>
+            </a:solidFill>
+            <a:prstDash val="solid"/>
+            <a:round/>
+            <a:headEnd type="none" w="sm" len="sm"/>
+            <a:tailEnd type="none" w="sm" len="sm"/>
+          </a:ln>
+        </p:spPr>
+        <p:txBody>
+          <a:bodyPr spcFirstLastPara="1" wrap="square" lIns="91425" tIns="91425" rIns="91425" bIns="91425" anchor="ctr" anchorCtr="0">
+            <a:noAutofit/>
+          </a:bodyPr>
+          <a:lstStyle/>
+          <a:p>
+            <a:pPr marL="0" lvl="0" indent="0" algn="ctr" rtl="0">
+              <a:spcBef>
+                <a:spcPts val="0"/>
+              </a:spcBef>
+              <a:spcAft>
+                <a:spcPts val="0"/>
+              </a:spcAft>
+              <a:buNone/>
+            </a:pPr>
+            <a:r>
+              <a:rPr lang="en-GB" sz="1800" b="1" dirty="0">
+                <a:latin typeface="Consolas"/>
+                <a:ea typeface="Consolas"/>
+                <a:cs typeface="Consolas"/>
+                <a:sym typeface="Consolas"/>
+              </a:rPr>
+              <a:t>68725</a:t>
+            </a:r>
+            <a:endParaRPr sz="1800" b="1" dirty="0">
+              <a:latin typeface="Consolas"/>
+              <a:ea typeface="Consolas"/>
+              <a:cs typeface="Consolas"/>
+              <a:sym typeface="Consolas"/>
+            </a:endParaRPr>
+          </a:p>
+        </p:txBody>
+      </p:sp>
+      <p:sp>
+        <p:nvSpPr>
+          <p:cNvPr id="5" name="Google Shape;77;p15">
+            <a:extLst>
+              <a:ext uri="{FF2B5EF4-FFF2-40B4-BE49-F238E27FC236}">
+                <a16:creationId xmlns:a16="http://schemas.microsoft.com/office/drawing/2014/main" id="{261CB615-FF92-5E86-9AE2-91FF31399343}"/>
+              </a:ext>
+            </a:extLst>
+          </p:cNvPr>
+          <p:cNvSpPr/>
+          <p:nvPr/>
+        </p:nvSpPr>
+        <p:spPr>
+          <a:xfrm>
+            <a:off x="3197186" y="6113307"/>
+            <a:ext cx="2410800" cy="480900"/>
+          </a:xfrm>
+          <a:prstGeom prst="roundRect">
+            <a:avLst>
+              <a:gd name="adj" fmla="val 16667"/>
+            </a:avLst>
+          </a:prstGeom>
+          <a:solidFill>
+            <a:srgbClr val="E6B8AF"/>
+          </a:solidFill>
+          <a:ln w="28575" cap="flat" cmpd="sng">
+            <a:solidFill>
+              <a:srgbClr val="5B0F00"/>
+            </a:solidFill>
+            <a:prstDash val="solid"/>
+            <a:round/>
+            <a:headEnd type="none" w="sm" len="sm"/>
+            <a:tailEnd type="none" w="sm" len="sm"/>
+          </a:ln>
+        </p:spPr>
+        <p:txBody>
+          <a:bodyPr spcFirstLastPara="1" wrap="square" lIns="91425" tIns="91425" rIns="91425" bIns="91425" anchor="ctr" anchorCtr="0">
+            <a:noAutofit/>
+          </a:bodyPr>
+          <a:lstStyle/>
+          <a:p>
+            <a:pPr marL="0" lvl="0" indent="0" algn="ctr" rtl="0">
+              <a:spcBef>
+                <a:spcPts val="0"/>
+              </a:spcBef>
+              <a:spcAft>
+                <a:spcPts val="0"/>
+              </a:spcAft>
+              <a:buNone/>
+            </a:pPr>
+            <a:r>
+              <a:rPr lang="en-GB" sz="1800" b="1" dirty="0">
+                <a:latin typeface="Consolas"/>
+                <a:ea typeface="Consolas"/>
+                <a:cs typeface="Consolas"/>
+                <a:sym typeface="Consolas"/>
+              </a:rPr>
+              <a:t>68180</a:t>
+            </a:r>
+            <a:endParaRPr sz="1800" b="1" dirty="0">
+              <a:latin typeface="Consolas"/>
+              <a:ea typeface="Consolas"/>
+              <a:cs typeface="Consolas"/>
+              <a:sym typeface="Consolas"/>
+            </a:endParaRPr>
+          </a:p>
+        </p:txBody>
+      </p:sp>
+      <p:sp>
+        <p:nvSpPr>
+          <p:cNvPr id="6" name="Google Shape;78;p15">
+            <a:extLst>
+              <a:ext uri="{FF2B5EF4-FFF2-40B4-BE49-F238E27FC236}">
+                <a16:creationId xmlns:a16="http://schemas.microsoft.com/office/drawing/2014/main" id="{7DB2D0FA-7055-D508-5D2E-F02925EBFD80}"/>
+              </a:ext>
+            </a:extLst>
+          </p:cNvPr>
+          <p:cNvSpPr/>
+          <p:nvPr/>
+        </p:nvSpPr>
+        <p:spPr>
+          <a:xfrm>
+            <a:off x="3197186" y="7689198"/>
+            <a:ext cx="2410800" cy="480900"/>
+          </a:xfrm>
+          <a:prstGeom prst="roundRect">
+            <a:avLst>
+              <a:gd name="adj" fmla="val 16667"/>
+            </a:avLst>
+          </a:prstGeom>
+          <a:solidFill>
+            <a:srgbClr val="E6B8AF"/>
+          </a:solidFill>
+          <a:ln w="28575" cap="flat" cmpd="sng">
+            <a:solidFill>
+              <a:srgbClr val="5B0F00"/>
+            </a:solidFill>
+            <a:prstDash val="solid"/>
+            <a:round/>
+            <a:headEnd type="none" w="sm" len="sm"/>
+            <a:tailEnd type="none" w="sm" len="sm"/>
+          </a:ln>
+        </p:spPr>
+        <p:txBody>
+          <a:bodyPr spcFirstLastPara="1" wrap="square" lIns="91425" tIns="91425" rIns="91425" bIns="91425" anchor="ctr" anchorCtr="0">
+            <a:noAutofit/>
+          </a:bodyPr>
+          <a:lstStyle/>
+          <a:p>
+            <a:pPr marL="0" lvl="0" indent="0" algn="ctr" rtl="0">
+              <a:spcBef>
+                <a:spcPts val="0"/>
+              </a:spcBef>
+              <a:spcAft>
+                <a:spcPts val="0"/>
+              </a:spcAft>
+              <a:buNone/>
+            </a:pPr>
+            <a:r>
+              <a:rPr lang="en-GB" sz="1800" b="1" dirty="0">
+                <a:latin typeface="Consolas"/>
+                <a:ea typeface="Consolas"/>
+                <a:cs typeface="Consolas"/>
+                <a:sym typeface="Consolas"/>
+              </a:rPr>
+              <a:t>67912</a:t>
+            </a:r>
+            <a:endParaRPr sz="1800" b="1" dirty="0">
+              <a:latin typeface="Consolas"/>
+              <a:ea typeface="Consolas"/>
+              <a:cs typeface="Consolas"/>
+              <a:sym typeface="Consolas"/>
+            </a:endParaRPr>
+          </a:p>
+        </p:txBody>
+      </p:sp>
+      <p:sp>
+        <p:nvSpPr>
+          <p:cNvPr id="7" name="Google Shape;79;p15">
+            <a:extLst>
+              <a:ext uri="{FF2B5EF4-FFF2-40B4-BE49-F238E27FC236}">
+                <a16:creationId xmlns:a16="http://schemas.microsoft.com/office/drawing/2014/main" id="{EEE8AA1C-0F8D-1599-FAC0-4B90B6B19DCF}"/>
+              </a:ext>
+            </a:extLst>
+          </p:cNvPr>
+          <p:cNvSpPr/>
+          <p:nvPr/>
+        </p:nvSpPr>
+        <p:spPr>
+          <a:xfrm>
+            <a:off x="3197186" y="9265103"/>
+            <a:ext cx="2410800" cy="480900"/>
+          </a:xfrm>
+          <a:prstGeom prst="roundRect">
+            <a:avLst>
+              <a:gd name="adj" fmla="val 16667"/>
+            </a:avLst>
+          </a:prstGeom>
+          <a:solidFill>
+            <a:srgbClr val="E6B8AF"/>
+          </a:solidFill>
+          <a:ln w="28575" cap="flat" cmpd="sng">
+            <a:solidFill>
+              <a:srgbClr val="5B0F00"/>
+            </a:solidFill>
+            <a:prstDash val="solid"/>
+            <a:round/>
+            <a:headEnd type="none" w="sm" len="sm"/>
+            <a:tailEnd type="none" w="sm" len="sm"/>
+          </a:ln>
+        </p:spPr>
+        <p:txBody>
+          <a:bodyPr spcFirstLastPara="1" wrap="square" lIns="91425" tIns="91425" rIns="91425" bIns="91425" anchor="ctr" anchorCtr="0">
+            <a:noAutofit/>
+          </a:bodyPr>
+          <a:lstStyle/>
+          <a:p>
+            <a:pPr marL="0" lvl="0" indent="0" algn="ctr" rtl="0">
+              <a:spcBef>
+                <a:spcPts val="0"/>
+              </a:spcBef>
+              <a:spcAft>
+                <a:spcPts val="0"/>
+              </a:spcAft>
+              <a:buNone/>
+            </a:pPr>
+            <a:r>
+              <a:rPr lang="en-GB" sz="1800" b="1" dirty="0">
+                <a:latin typeface="Consolas"/>
+                <a:ea typeface="Consolas"/>
+                <a:cs typeface="Consolas"/>
+                <a:sym typeface="Consolas"/>
+              </a:rPr>
+              <a:t>67870</a:t>
+            </a:r>
+            <a:endParaRPr sz="1800" b="1" dirty="0">
+              <a:latin typeface="Consolas"/>
+              <a:ea typeface="Consolas"/>
+              <a:cs typeface="Consolas"/>
+              <a:sym typeface="Consolas"/>
+            </a:endParaRPr>
+          </a:p>
+        </p:txBody>
+      </p:sp>
+      <p:sp>
+        <p:nvSpPr>
+          <p:cNvPr id="19" name="Google Shape;86;p15">
+            <a:extLst>
+              <a:ext uri="{FF2B5EF4-FFF2-40B4-BE49-F238E27FC236}">
+                <a16:creationId xmlns:a16="http://schemas.microsoft.com/office/drawing/2014/main" id="{C2C34EFB-898A-06FD-C407-9DE65FEAE38C}"/>
+              </a:ext>
+            </a:extLst>
+          </p:cNvPr>
+          <p:cNvSpPr/>
+          <p:nvPr/>
+        </p:nvSpPr>
+        <p:spPr>
+          <a:xfrm>
+            <a:off x="6113259" y="1088887"/>
+            <a:ext cx="2410800" cy="9069525"/>
+          </a:xfrm>
+          <a:prstGeom prst="roundRect">
+            <a:avLst>
+              <a:gd name="adj" fmla="val 16667"/>
+            </a:avLst>
+          </a:prstGeom>
+          <a:solidFill>
+            <a:srgbClr val="D9EAD3"/>
+          </a:solidFill>
+          <a:ln w="28575" cap="flat" cmpd="sng">
+            <a:solidFill>
+              <a:srgbClr val="274E13"/>
+            </a:solidFill>
+            <a:prstDash val="solid"/>
+            <a:round/>
+            <a:headEnd type="none" w="sm" len="sm"/>
+            <a:tailEnd type="none" w="sm" len="sm"/>
+          </a:ln>
+        </p:spPr>
+        <p:txBody>
+          <a:bodyPr spcFirstLastPara="1" wrap="square" lIns="91425" tIns="91425" rIns="91425" bIns="91425" anchor="t" anchorCtr="0">
+            <a:noAutofit/>
+          </a:bodyPr>
+          <a:lstStyle/>
+          <a:p>
+            <a:pPr marL="0" lvl="0" indent="0" rtl="0">
+              <a:spcBef>
+                <a:spcPts val="0"/>
+              </a:spcBef>
+              <a:spcAft>
+                <a:spcPts val="0"/>
+              </a:spcAft>
+              <a:buNone/>
+            </a:pPr>
+            <a:r>
+              <a:rPr lang="en-GB" dirty="0">
+                <a:latin typeface="Consolas"/>
+                <a:ea typeface="Consolas"/>
+                <a:cs typeface="Consolas"/>
+                <a:sym typeface="Consolas"/>
+              </a:rPr>
+              <a:t>US1: Como </a:t>
+            </a:r>
+            <a:r>
+              <a:rPr lang="en-GB" dirty="0" err="1">
+                <a:latin typeface="Consolas"/>
+                <a:ea typeface="Consolas"/>
+                <a:cs typeface="Consolas"/>
+                <a:sym typeface="Consolas"/>
+              </a:rPr>
+              <a:t>membro</a:t>
+            </a:r>
+            <a:r>
+              <a:rPr lang="en-GB" dirty="0">
+                <a:latin typeface="Consolas"/>
+                <a:ea typeface="Consolas"/>
+                <a:cs typeface="Consolas"/>
+                <a:sym typeface="Consolas"/>
+              </a:rPr>
+              <a:t> da </a:t>
+            </a:r>
+            <a:r>
+              <a:rPr lang="en-GB" dirty="0" err="1">
+                <a:latin typeface="Consolas"/>
+                <a:ea typeface="Consolas"/>
+                <a:cs typeface="Consolas"/>
+                <a:sym typeface="Consolas"/>
+              </a:rPr>
+              <a:t>equipa</a:t>
+            </a:r>
+            <a:r>
+              <a:rPr lang="en-GB" dirty="0">
+                <a:latin typeface="Consolas"/>
+                <a:ea typeface="Consolas"/>
+                <a:cs typeface="Consolas"/>
+                <a:sym typeface="Consolas"/>
+              </a:rPr>
+              <a:t>, </a:t>
+            </a:r>
+            <a:r>
+              <a:rPr lang="en-GB" dirty="0" err="1">
+                <a:latin typeface="Consolas"/>
+                <a:ea typeface="Consolas"/>
+                <a:cs typeface="Consolas"/>
+                <a:sym typeface="Consolas"/>
+              </a:rPr>
+              <a:t>quero</a:t>
+            </a:r>
+            <a:r>
+              <a:rPr lang="en-GB" dirty="0">
+                <a:latin typeface="Consolas"/>
+                <a:ea typeface="Consolas"/>
+                <a:cs typeface="Consolas"/>
+                <a:sym typeface="Consolas"/>
+              </a:rPr>
+              <a:t> </a:t>
+            </a:r>
+            <a:r>
+              <a:rPr lang="en-GB" dirty="0" err="1">
+                <a:latin typeface="Consolas"/>
+                <a:ea typeface="Consolas"/>
+                <a:cs typeface="Consolas"/>
+                <a:sym typeface="Consolas"/>
+              </a:rPr>
+              <a:t>implementar</a:t>
+            </a:r>
+            <a:r>
+              <a:rPr lang="en-GB" dirty="0">
+                <a:latin typeface="Consolas"/>
+                <a:ea typeface="Consolas"/>
+                <a:cs typeface="Consolas"/>
+                <a:sym typeface="Consolas"/>
+              </a:rPr>
+              <a:t> o novo </a:t>
+            </a:r>
+            <a:r>
+              <a:rPr lang="en-GB" dirty="0" err="1">
+                <a:latin typeface="Consolas"/>
+                <a:ea typeface="Consolas"/>
+                <a:cs typeface="Consolas"/>
+                <a:sym typeface="Consolas"/>
+              </a:rPr>
+              <a:t>mapa</a:t>
+            </a:r>
+            <a:r>
+              <a:rPr lang="en-GB" dirty="0">
+                <a:latin typeface="Consolas"/>
+                <a:ea typeface="Consolas"/>
+                <a:cs typeface="Consolas"/>
+                <a:sym typeface="Consolas"/>
+              </a:rPr>
+              <a:t> com </a:t>
+            </a:r>
+            <a:r>
+              <a:rPr lang="en-GB" dirty="0" err="1">
+                <a:latin typeface="Consolas"/>
+                <a:ea typeface="Consolas"/>
+                <a:cs typeface="Consolas"/>
+                <a:sym typeface="Consolas"/>
+              </a:rPr>
+              <a:t>objetivo</a:t>
+            </a:r>
+            <a:r>
+              <a:rPr lang="en-GB" dirty="0">
+                <a:latin typeface="Consolas"/>
+                <a:ea typeface="Consolas"/>
+                <a:cs typeface="Consolas"/>
+                <a:sym typeface="Consolas"/>
+              </a:rPr>
+              <a:t> </a:t>
+            </a:r>
+            <a:r>
+              <a:rPr lang="en-GB" dirty="0" err="1">
+                <a:latin typeface="Consolas"/>
+                <a:ea typeface="Consolas"/>
+                <a:cs typeface="Consolas"/>
+                <a:sym typeface="Consolas"/>
+              </a:rPr>
+              <a:t>semanal</a:t>
+            </a:r>
+            <a:r>
+              <a:rPr lang="en-GB" dirty="0">
+                <a:latin typeface="Consolas"/>
+                <a:ea typeface="Consolas"/>
+                <a:cs typeface="Consolas"/>
+                <a:sym typeface="Consolas"/>
+              </a:rPr>
+              <a:t> e ranking.</a:t>
+            </a:r>
+            <a:endParaRPr dirty="0">
+              <a:latin typeface="Consolas"/>
+              <a:ea typeface="Consolas"/>
+              <a:cs typeface="Consolas"/>
+              <a:sym typeface="Consolas"/>
+            </a:endParaRPr>
+          </a:p>
+        </p:txBody>
+      </p:sp>
+      <p:sp>
+        <p:nvSpPr>
+          <p:cNvPr id="20" name="Google Shape;92;p15">
+            <a:extLst>
+              <a:ext uri="{FF2B5EF4-FFF2-40B4-BE49-F238E27FC236}">
+                <a16:creationId xmlns:a16="http://schemas.microsoft.com/office/drawing/2014/main" id="{772E8B87-CF4D-0CA4-D3B0-AB0AEDBFF3BC}"/>
+              </a:ext>
+            </a:extLst>
+          </p:cNvPr>
+          <p:cNvSpPr/>
+          <p:nvPr/>
+        </p:nvSpPr>
+        <p:spPr>
+          <a:xfrm>
+            <a:off x="6220805" y="2536503"/>
+            <a:ext cx="2507514" cy="7634470"/>
+          </a:xfrm>
+          <a:prstGeom prst="roundRect">
+            <a:avLst>
+              <a:gd name="adj" fmla="val 16667"/>
+            </a:avLst>
+          </a:prstGeom>
+          <a:solidFill>
+            <a:srgbClr val="D9EAD3"/>
+          </a:solidFill>
+          <a:ln w="28575" cap="flat" cmpd="sng">
+            <a:solidFill>
+              <a:srgbClr val="274E13"/>
+            </a:solidFill>
+            <a:prstDash val="solid"/>
+            <a:round/>
+            <a:headEnd type="none" w="sm" len="sm"/>
+            <a:tailEnd type="none" w="sm" len="sm"/>
+          </a:ln>
+        </p:spPr>
+        <p:txBody>
+          <a:bodyPr spcFirstLastPara="1" wrap="square" lIns="91425" tIns="91425" rIns="91425" bIns="91425" anchor="t" anchorCtr="0">
+            <a:noAutofit/>
+          </a:bodyPr>
+          <a:lstStyle/>
+          <a:p>
+            <a:pPr lvl="0"/>
+            <a:r>
+              <a:rPr lang="en-GB" dirty="0">
+                <a:latin typeface="Consolas"/>
+                <a:ea typeface="Consolas"/>
+                <a:cs typeface="Consolas"/>
+                <a:sym typeface="Consolas"/>
+              </a:rPr>
+              <a:t>US2: Como </a:t>
+            </a:r>
+            <a:r>
+              <a:rPr lang="en-GB" dirty="0" err="1">
+                <a:latin typeface="Consolas"/>
+                <a:ea typeface="Consolas"/>
+                <a:cs typeface="Consolas"/>
+                <a:sym typeface="Consolas"/>
+              </a:rPr>
+              <a:t>membro</a:t>
+            </a:r>
+            <a:r>
+              <a:rPr lang="en-GB" dirty="0">
+                <a:latin typeface="Consolas"/>
+                <a:ea typeface="Consolas"/>
+                <a:cs typeface="Consolas"/>
+                <a:sym typeface="Consolas"/>
+              </a:rPr>
+              <a:t> da </a:t>
+            </a:r>
+            <a:r>
+              <a:rPr lang="en-GB" dirty="0" err="1">
+                <a:latin typeface="Consolas"/>
+                <a:ea typeface="Consolas"/>
+                <a:cs typeface="Consolas"/>
+                <a:sym typeface="Consolas"/>
+              </a:rPr>
+              <a:t>equipa</a:t>
+            </a:r>
+            <a:r>
+              <a:rPr lang="en-GB" dirty="0">
+                <a:latin typeface="Consolas"/>
+                <a:ea typeface="Consolas"/>
+                <a:cs typeface="Consolas"/>
+                <a:sym typeface="Consolas"/>
+              </a:rPr>
+              <a:t> </a:t>
+            </a:r>
+            <a:r>
+              <a:rPr lang="en-GB" dirty="0" err="1">
+                <a:latin typeface="Consolas"/>
+                <a:ea typeface="Consolas"/>
+                <a:cs typeface="Consolas"/>
+                <a:sym typeface="Consolas"/>
+              </a:rPr>
+              <a:t>quero</a:t>
+            </a:r>
+            <a:r>
+              <a:rPr lang="pt-PT" dirty="0">
+                <a:latin typeface="Consolas"/>
+                <a:ea typeface="Consolas"/>
+                <a:cs typeface="Consolas"/>
+                <a:sym typeface="Consolas"/>
+              </a:rPr>
+              <a:t> implementar a </a:t>
+            </a:r>
+            <a:r>
+              <a:rPr lang="pt-PT" dirty="0" err="1">
+                <a:latin typeface="Consolas"/>
+                <a:ea typeface="Consolas"/>
+                <a:cs typeface="Consolas"/>
+                <a:sym typeface="Consolas"/>
+              </a:rPr>
+              <a:t>Health</a:t>
+            </a:r>
+            <a:r>
+              <a:rPr lang="pt-PT" dirty="0">
+                <a:latin typeface="Consolas"/>
+                <a:ea typeface="Consolas"/>
+                <a:cs typeface="Consolas"/>
+                <a:sym typeface="Consolas"/>
+              </a:rPr>
+              <a:t> Bar de cada </a:t>
+            </a:r>
+            <a:r>
+              <a:rPr lang="pt-PT" dirty="0" err="1">
+                <a:latin typeface="Consolas"/>
+                <a:ea typeface="Consolas"/>
+                <a:cs typeface="Consolas"/>
+                <a:sym typeface="Consolas"/>
+              </a:rPr>
+              <a:t>wave</a:t>
+            </a:r>
+            <a:r>
+              <a:rPr lang="pt-PT" dirty="0">
+                <a:latin typeface="Consolas"/>
+                <a:ea typeface="Consolas"/>
+                <a:cs typeface="Consolas"/>
+                <a:sym typeface="Consolas"/>
+              </a:rPr>
+              <a:t> de inimigos.</a:t>
+            </a:r>
+            <a:endParaRPr dirty="0">
+              <a:latin typeface="Consolas"/>
+              <a:ea typeface="Consolas"/>
+              <a:cs typeface="Consolas"/>
+              <a:sym typeface="Consolas"/>
+            </a:endParaRPr>
+          </a:p>
+        </p:txBody>
+      </p:sp>
+      <p:sp>
+        <p:nvSpPr>
+          <p:cNvPr id="21" name="Google Shape;92;p15">
+            <a:extLst>
+              <a:ext uri="{FF2B5EF4-FFF2-40B4-BE49-F238E27FC236}">
+                <a16:creationId xmlns:a16="http://schemas.microsoft.com/office/drawing/2014/main" id="{ACD90AF1-C1C3-436F-E5E4-0E6A17E0F072}"/>
+              </a:ext>
+            </a:extLst>
+          </p:cNvPr>
+          <p:cNvSpPr/>
+          <p:nvPr/>
+        </p:nvSpPr>
+        <p:spPr>
+          <a:xfrm>
+            <a:off x="6294173" y="3994181"/>
+            <a:ext cx="2548762" cy="6176792"/>
+          </a:xfrm>
+          <a:prstGeom prst="roundRect">
+            <a:avLst>
+              <a:gd name="adj" fmla="val 16667"/>
+            </a:avLst>
+          </a:prstGeom>
+          <a:solidFill>
+            <a:srgbClr val="D9EAD3"/>
+          </a:solidFill>
+          <a:ln w="28575" cap="flat" cmpd="sng">
+            <a:solidFill>
+              <a:srgbClr val="274E13"/>
+            </a:solidFill>
+            <a:prstDash val="solid"/>
+            <a:round/>
+            <a:headEnd type="none" w="sm" len="sm"/>
+            <a:tailEnd type="none" w="sm" len="sm"/>
+          </a:ln>
+        </p:spPr>
+        <p:txBody>
+          <a:bodyPr spcFirstLastPara="1" wrap="square" lIns="91425" tIns="91425" rIns="91425" bIns="91425" anchor="t" anchorCtr="0">
+            <a:noAutofit/>
+          </a:bodyPr>
+          <a:lstStyle/>
+          <a:p>
+            <a:pPr lvl="0"/>
+            <a:r>
+              <a:rPr lang="en-GB" dirty="0">
+                <a:latin typeface="Consolas"/>
+                <a:ea typeface="Consolas"/>
+                <a:cs typeface="Consolas"/>
+                <a:sym typeface="Consolas"/>
+              </a:rPr>
+              <a:t>US3: Como </a:t>
+            </a:r>
+            <a:r>
+              <a:rPr lang="en-GB" dirty="0" err="1">
+                <a:latin typeface="Consolas"/>
+                <a:ea typeface="Consolas"/>
+                <a:cs typeface="Consolas"/>
+                <a:sym typeface="Consolas"/>
+              </a:rPr>
+              <a:t>membro</a:t>
+            </a:r>
+            <a:r>
+              <a:rPr lang="en-GB" dirty="0">
+                <a:latin typeface="Consolas"/>
+                <a:ea typeface="Consolas"/>
+                <a:cs typeface="Consolas"/>
+                <a:sym typeface="Consolas"/>
+              </a:rPr>
+              <a:t> da </a:t>
+            </a:r>
+            <a:r>
+              <a:rPr lang="en-GB" dirty="0" err="1">
+                <a:latin typeface="Consolas"/>
+                <a:ea typeface="Consolas"/>
+                <a:cs typeface="Consolas"/>
+                <a:sym typeface="Consolas"/>
+              </a:rPr>
+              <a:t>equipa</a:t>
+            </a:r>
+            <a:r>
+              <a:rPr lang="en-GB" dirty="0">
+                <a:latin typeface="Consolas"/>
+                <a:ea typeface="Consolas"/>
+                <a:cs typeface="Consolas"/>
+                <a:sym typeface="Consolas"/>
+              </a:rPr>
+              <a:t> </a:t>
+            </a:r>
+            <a:r>
+              <a:rPr lang="en-GB" dirty="0" err="1">
+                <a:latin typeface="Consolas"/>
+                <a:ea typeface="Consolas"/>
+                <a:cs typeface="Consolas"/>
+                <a:sym typeface="Consolas"/>
+              </a:rPr>
+              <a:t>quero</a:t>
+            </a:r>
+            <a:r>
+              <a:rPr lang="pt-PT" dirty="0">
+                <a:latin typeface="Consolas"/>
+                <a:ea typeface="Consolas"/>
+                <a:cs typeface="Consolas"/>
+                <a:sym typeface="Consolas"/>
+              </a:rPr>
+              <a:t> implementar as diferentes condições climatéricas.</a:t>
+            </a:r>
+          </a:p>
+        </p:txBody>
+      </p:sp>
+      <p:sp>
+        <p:nvSpPr>
+          <p:cNvPr id="25" name="Google Shape;121;p16">
+            <a:extLst>
+              <a:ext uri="{FF2B5EF4-FFF2-40B4-BE49-F238E27FC236}">
+                <a16:creationId xmlns:a16="http://schemas.microsoft.com/office/drawing/2014/main" id="{D89A3A82-5859-D371-16AE-D9D07B76AED5}"/>
+              </a:ext>
+            </a:extLst>
+          </p:cNvPr>
+          <p:cNvSpPr/>
+          <p:nvPr/>
+        </p:nvSpPr>
+        <p:spPr>
+          <a:xfrm>
+            <a:off x="12395940" y="1104722"/>
+            <a:ext cx="2410800" cy="2657243"/>
+          </a:xfrm>
+          <a:prstGeom prst="roundRect">
+            <a:avLst>
+              <a:gd name="adj" fmla="val 16667"/>
+            </a:avLst>
+          </a:prstGeom>
+          <a:solidFill>
+            <a:srgbClr val="D0E0E3"/>
+          </a:solidFill>
+          <a:ln w="28575" cap="flat" cmpd="sng">
+            <a:solidFill>
+              <a:srgbClr val="134F5C"/>
+            </a:solidFill>
+            <a:prstDash val="solid"/>
+            <a:round/>
+            <a:headEnd type="none" w="sm" len="sm"/>
+            <a:tailEnd type="none" w="sm" len="sm"/>
+          </a:ln>
+        </p:spPr>
+        <p:txBody>
+          <a:bodyPr spcFirstLastPara="1" wrap="square" lIns="91425" tIns="91425" rIns="91425" bIns="91425" anchor="t" anchorCtr="0">
+            <a:noAutofit/>
+          </a:bodyPr>
+          <a:lstStyle/>
+          <a:p>
+            <a:r>
+              <a:rPr lang="en-GB" dirty="0">
+                <a:latin typeface="Consolas"/>
+                <a:ea typeface="Consolas"/>
+                <a:cs typeface="Consolas"/>
+                <a:sym typeface="Consolas"/>
+              </a:rPr>
+              <a:t>T1: </a:t>
+            </a:r>
+            <a:r>
+              <a:rPr lang="pt-PT" dirty="0">
+                <a:latin typeface="Consolas"/>
+                <a:ea typeface="Consolas"/>
+                <a:cs typeface="Consolas"/>
+                <a:sym typeface="Consolas"/>
+              </a:rPr>
+              <a:t>Fazer Interface de Rankings e “jogar Desafio Semanal”</a:t>
+            </a:r>
+            <a:br>
+              <a:rPr lang="en-GB" dirty="0">
+                <a:latin typeface="Consolas"/>
+                <a:ea typeface="Consolas"/>
+                <a:cs typeface="Consolas"/>
+                <a:sym typeface="Consolas"/>
+              </a:rPr>
+            </a:br>
+            <a:br>
+              <a:rPr lang="en-GB" dirty="0">
+                <a:latin typeface="Consolas"/>
+                <a:ea typeface="Consolas"/>
+                <a:cs typeface="Consolas"/>
+                <a:sym typeface="Consolas"/>
+              </a:rPr>
+            </a:br>
+            <a:endParaRPr lang="en-GB" dirty="0">
+              <a:latin typeface="Consolas"/>
+              <a:ea typeface="Consolas"/>
+              <a:cs typeface="Consolas"/>
+              <a:sym typeface="Consolas"/>
+            </a:endParaRPr>
+          </a:p>
+          <a:p>
+            <a:pPr marL="0" lvl="0" indent="0" algn="l" rtl="0">
+              <a:spcBef>
+                <a:spcPts val="0"/>
+              </a:spcBef>
+              <a:spcAft>
+                <a:spcPts val="0"/>
+              </a:spcAft>
+              <a:buNone/>
+            </a:pPr>
+            <a:endParaRPr dirty="0">
+              <a:latin typeface="Consolas"/>
+              <a:ea typeface="Consolas"/>
+              <a:cs typeface="Consolas"/>
+              <a:sym typeface="Consolas"/>
+            </a:endParaRPr>
+          </a:p>
+        </p:txBody>
+      </p:sp>
+      <p:sp>
+        <p:nvSpPr>
+          <p:cNvPr id="26" name="Google Shape;121;p16">
+            <a:extLst>
+              <a:ext uri="{FF2B5EF4-FFF2-40B4-BE49-F238E27FC236}">
+                <a16:creationId xmlns:a16="http://schemas.microsoft.com/office/drawing/2014/main" id="{006DD7DB-6473-2DE4-4874-88A514979BBD}"/>
+              </a:ext>
+            </a:extLst>
+          </p:cNvPr>
+          <p:cNvSpPr/>
+          <p:nvPr/>
+        </p:nvSpPr>
+        <p:spPr>
+          <a:xfrm>
+            <a:off x="9366071" y="8897627"/>
+            <a:ext cx="2410800" cy="1215821"/>
+          </a:xfrm>
+          <a:prstGeom prst="roundRect">
+            <a:avLst>
+              <a:gd name="adj" fmla="val 16667"/>
+            </a:avLst>
+          </a:prstGeom>
+          <a:solidFill>
+            <a:srgbClr val="D0E0E3"/>
+          </a:solidFill>
+          <a:ln w="28575" cap="flat" cmpd="sng">
+            <a:solidFill>
+              <a:srgbClr val="134F5C"/>
+            </a:solidFill>
+            <a:prstDash val="solid"/>
+            <a:round/>
+            <a:headEnd type="none" w="sm" len="sm"/>
+            <a:tailEnd type="none" w="sm" len="sm"/>
+          </a:ln>
+        </p:spPr>
+        <p:txBody>
+          <a:bodyPr spcFirstLastPara="1" wrap="square" lIns="91425" tIns="91425" rIns="91425" bIns="91425" anchor="t" anchorCtr="0">
+            <a:noAutofit/>
+          </a:bodyPr>
+          <a:lstStyle/>
+          <a:p>
+            <a:r>
+              <a:rPr lang="pt-PT" dirty="0">
+                <a:latin typeface="Consolas"/>
+                <a:ea typeface="Consolas"/>
+                <a:cs typeface="Consolas"/>
+                <a:sym typeface="Consolas"/>
+              </a:rPr>
+              <a:t>T2: Implementar a </a:t>
+            </a:r>
+            <a:r>
+              <a:rPr lang="pt-PT" dirty="0" err="1">
+                <a:latin typeface="Consolas"/>
+                <a:ea typeface="Consolas"/>
+                <a:cs typeface="Consolas"/>
+                <a:sym typeface="Consolas"/>
+              </a:rPr>
+              <a:t>Health</a:t>
+            </a:r>
+            <a:r>
+              <a:rPr lang="pt-PT" dirty="0">
+                <a:latin typeface="Consolas"/>
+                <a:ea typeface="Consolas"/>
+                <a:cs typeface="Consolas"/>
+                <a:sym typeface="Consolas"/>
+              </a:rPr>
+              <a:t> Bar de cada </a:t>
+            </a:r>
+            <a:r>
+              <a:rPr lang="pt-PT" dirty="0" err="1">
+                <a:latin typeface="Consolas"/>
+                <a:ea typeface="Consolas"/>
+                <a:cs typeface="Consolas"/>
+                <a:sym typeface="Consolas"/>
+              </a:rPr>
+              <a:t>wave</a:t>
+            </a:r>
+            <a:r>
+              <a:rPr lang="pt-PT" dirty="0">
+                <a:latin typeface="Consolas"/>
+                <a:ea typeface="Consolas"/>
+                <a:cs typeface="Consolas"/>
+                <a:sym typeface="Consolas"/>
+              </a:rPr>
+              <a:t> de inimigos.</a:t>
+            </a:r>
+          </a:p>
+          <a:p>
+            <a:r>
+              <a:rPr lang="en-GB" dirty="0">
+                <a:latin typeface="Consolas"/>
+                <a:ea typeface="Consolas"/>
+                <a:cs typeface="Consolas"/>
+                <a:sym typeface="Consolas"/>
+              </a:rPr>
+              <a:t> </a:t>
+            </a:r>
+            <a:br>
+              <a:rPr lang="en-GB" dirty="0">
+                <a:latin typeface="Consolas"/>
+                <a:ea typeface="Consolas"/>
+                <a:cs typeface="Consolas"/>
+                <a:sym typeface="Consolas"/>
+              </a:rPr>
+            </a:br>
+            <a:br>
+              <a:rPr lang="en-GB" dirty="0">
+                <a:latin typeface="Consolas"/>
+                <a:ea typeface="Consolas"/>
+                <a:cs typeface="Consolas"/>
+                <a:sym typeface="Consolas"/>
+              </a:rPr>
+            </a:br>
+            <a:endParaRPr lang="en-GB" dirty="0">
+              <a:latin typeface="Consolas"/>
+              <a:ea typeface="Consolas"/>
+              <a:cs typeface="Consolas"/>
+              <a:sym typeface="Consolas"/>
+            </a:endParaRPr>
+          </a:p>
+          <a:p>
+            <a:pPr marL="0" lvl="0" indent="0" algn="l" rtl="0">
+              <a:spcBef>
+                <a:spcPts val="0"/>
+              </a:spcBef>
+              <a:spcAft>
+                <a:spcPts val="0"/>
+              </a:spcAft>
+              <a:buNone/>
+            </a:pPr>
+            <a:endParaRPr dirty="0">
+              <a:latin typeface="Consolas"/>
+              <a:ea typeface="Consolas"/>
+              <a:cs typeface="Consolas"/>
+              <a:sym typeface="Consolas"/>
+            </a:endParaRPr>
+          </a:p>
+        </p:txBody>
+      </p:sp>
+      <p:sp>
+        <p:nvSpPr>
+          <p:cNvPr id="27" name="Google Shape;121;p16">
+            <a:extLst>
+              <a:ext uri="{FF2B5EF4-FFF2-40B4-BE49-F238E27FC236}">
+                <a16:creationId xmlns:a16="http://schemas.microsoft.com/office/drawing/2014/main" id="{7F1BF7C6-355B-004E-DDD2-D93DC227D842}"/>
+              </a:ext>
+            </a:extLst>
+          </p:cNvPr>
+          <p:cNvSpPr/>
+          <p:nvPr/>
+        </p:nvSpPr>
+        <p:spPr>
+          <a:xfrm>
+            <a:off x="9366071" y="5744289"/>
+            <a:ext cx="2410800" cy="1215821"/>
+          </a:xfrm>
+          <a:prstGeom prst="roundRect">
+            <a:avLst>
+              <a:gd name="adj" fmla="val 16667"/>
+            </a:avLst>
+          </a:prstGeom>
+          <a:solidFill>
+            <a:srgbClr val="D0E0E3"/>
+          </a:solidFill>
+          <a:ln w="28575" cap="flat" cmpd="sng">
+            <a:solidFill>
+              <a:srgbClr val="134F5C"/>
+            </a:solidFill>
+            <a:prstDash val="solid"/>
+            <a:round/>
+            <a:headEnd type="none" w="sm" len="sm"/>
+            <a:tailEnd type="none" w="sm" len="sm"/>
+          </a:ln>
+        </p:spPr>
+        <p:txBody>
+          <a:bodyPr spcFirstLastPara="1" wrap="square" lIns="91425" tIns="91425" rIns="91425" bIns="91425" anchor="t" anchorCtr="0">
+            <a:noAutofit/>
+          </a:bodyPr>
+          <a:lstStyle/>
+          <a:p>
+            <a:r>
+              <a:rPr lang="pt-PT" dirty="0">
+                <a:latin typeface="Consolas"/>
+                <a:ea typeface="Consolas"/>
+                <a:cs typeface="Consolas"/>
+                <a:sym typeface="Consolas"/>
+              </a:rPr>
+              <a:t>T2: Implementar a </a:t>
+            </a:r>
+            <a:r>
+              <a:rPr lang="pt-PT" dirty="0" err="1">
+                <a:latin typeface="Consolas"/>
+                <a:ea typeface="Consolas"/>
+                <a:cs typeface="Consolas"/>
+                <a:sym typeface="Consolas"/>
+              </a:rPr>
+              <a:t>Health</a:t>
+            </a:r>
+            <a:r>
+              <a:rPr lang="pt-PT" dirty="0">
+                <a:latin typeface="Consolas"/>
+                <a:ea typeface="Consolas"/>
+                <a:cs typeface="Consolas"/>
+                <a:sym typeface="Consolas"/>
+              </a:rPr>
+              <a:t> Bar de cada </a:t>
+            </a:r>
+            <a:r>
+              <a:rPr lang="pt-PT" dirty="0" err="1">
+                <a:latin typeface="Consolas"/>
+                <a:ea typeface="Consolas"/>
+                <a:cs typeface="Consolas"/>
+                <a:sym typeface="Consolas"/>
+              </a:rPr>
+              <a:t>wave</a:t>
+            </a:r>
+            <a:r>
+              <a:rPr lang="pt-PT" dirty="0">
+                <a:latin typeface="Consolas"/>
+                <a:ea typeface="Consolas"/>
+                <a:cs typeface="Consolas"/>
+                <a:sym typeface="Consolas"/>
+              </a:rPr>
+              <a:t> de inimigos.</a:t>
+            </a:r>
+          </a:p>
+          <a:p>
+            <a:r>
+              <a:rPr lang="en-GB" dirty="0">
+                <a:latin typeface="Consolas"/>
+                <a:ea typeface="Consolas"/>
+                <a:cs typeface="Consolas"/>
+                <a:sym typeface="Consolas"/>
+              </a:rPr>
+              <a:t> </a:t>
+            </a:r>
+            <a:br>
+              <a:rPr lang="en-GB" dirty="0">
+                <a:latin typeface="Consolas"/>
+                <a:ea typeface="Consolas"/>
+                <a:cs typeface="Consolas"/>
+                <a:sym typeface="Consolas"/>
+              </a:rPr>
+            </a:br>
+            <a:br>
+              <a:rPr lang="en-GB" dirty="0">
+                <a:latin typeface="Consolas"/>
+                <a:ea typeface="Consolas"/>
+                <a:cs typeface="Consolas"/>
+                <a:sym typeface="Consolas"/>
+              </a:rPr>
+            </a:br>
+            <a:endParaRPr lang="en-GB" dirty="0">
+              <a:latin typeface="Consolas"/>
+              <a:ea typeface="Consolas"/>
+              <a:cs typeface="Consolas"/>
+              <a:sym typeface="Consolas"/>
+            </a:endParaRPr>
+          </a:p>
+          <a:p>
+            <a:pPr marL="0" lvl="0" indent="0" algn="l" rtl="0">
+              <a:spcBef>
+                <a:spcPts val="0"/>
+              </a:spcBef>
+              <a:spcAft>
+                <a:spcPts val="0"/>
+              </a:spcAft>
+              <a:buNone/>
+            </a:pPr>
+            <a:endParaRPr dirty="0">
+              <a:latin typeface="Consolas"/>
+              <a:ea typeface="Consolas"/>
+              <a:cs typeface="Consolas"/>
+              <a:sym typeface="Consolas"/>
+            </a:endParaRPr>
+          </a:p>
+        </p:txBody>
+      </p:sp>
+      <p:sp>
+        <p:nvSpPr>
+          <p:cNvPr id="28" name="Google Shape;121;p16">
+            <a:extLst>
+              <a:ext uri="{FF2B5EF4-FFF2-40B4-BE49-F238E27FC236}">
+                <a16:creationId xmlns:a16="http://schemas.microsoft.com/office/drawing/2014/main" id="{4ED0CAA4-9B4E-73CC-8DAB-5CC49617A235}"/>
+              </a:ext>
+            </a:extLst>
+          </p:cNvPr>
+          <p:cNvSpPr/>
+          <p:nvPr/>
+        </p:nvSpPr>
+        <p:spPr>
+          <a:xfrm>
+            <a:off x="12395940" y="4225282"/>
+            <a:ext cx="2410800" cy="1215821"/>
+          </a:xfrm>
+          <a:prstGeom prst="roundRect">
+            <a:avLst>
+              <a:gd name="adj" fmla="val 16667"/>
+            </a:avLst>
+          </a:prstGeom>
+          <a:solidFill>
+            <a:srgbClr val="D0E0E3"/>
+          </a:solidFill>
+          <a:ln w="28575" cap="flat" cmpd="sng">
+            <a:solidFill>
+              <a:srgbClr val="134F5C"/>
+            </a:solidFill>
+            <a:prstDash val="solid"/>
+            <a:round/>
+            <a:headEnd type="none" w="sm" len="sm"/>
+            <a:tailEnd type="none" w="sm" len="sm"/>
+          </a:ln>
+        </p:spPr>
+        <p:txBody>
+          <a:bodyPr spcFirstLastPara="1" wrap="square" lIns="91425" tIns="91425" rIns="91425" bIns="91425" anchor="t" anchorCtr="0">
+            <a:noAutofit/>
+          </a:bodyPr>
+          <a:lstStyle/>
+          <a:p>
+            <a:r>
+              <a:rPr lang="pt-PT" dirty="0">
+                <a:latin typeface="Consolas"/>
+                <a:ea typeface="Consolas"/>
+                <a:cs typeface="Consolas"/>
+                <a:sym typeface="Consolas"/>
+              </a:rPr>
+              <a:t>T3: Implementar a parte do Terramoto.</a:t>
+            </a:r>
+          </a:p>
+          <a:p>
+            <a:r>
+              <a:rPr lang="en-GB" dirty="0">
+                <a:latin typeface="Consolas"/>
+                <a:ea typeface="Consolas"/>
+                <a:cs typeface="Consolas"/>
+                <a:sym typeface="Consolas"/>
+              </a:rPr>
+              <a:t> </a:t>
+            </a:r>
+            <a:br>
+              <a:rPr lang="en-GB" dirty="0">
+                <a:latin typeface="Consolas"/>
+                <a:ea typeface="Consolas"/>
+                <a:cs typeface="Consolas"/>
+                <a:sym typeface="Consolas"/>
+              </a:rPr>
+            </a:br>
+            <a:br>
+              <a:rPr lang="en-GB" dirty="0">
+                <a:latin typeface="Consolas"/>
+                <a:ea typeface="Consolas"/>
+                <a:cs typeface="Consolas"/>
+                <a:sym typeface="Consolas"/>
+              </a:rPr>
+            </a:br>
+            <a:endParaRPr lang="en-GB" dirty="0">
+              <a:latin typeface="Consolas"/>
+              <a:ea typeface="Consolas"/>
+              <a:cs typeface="Consolas"/>
+              <a:sym typeface="Consolas"/>
+            </a:endParaRPr>
+          </a:p>
+          <a:p>
+            <a:pPr marL="0" lvl="0" indent="0" algn="l" rtl="0">
+              <a:spcBef>
+                <a:spcPts val="0"/>
+              </a:spcBef>
+              <a:spcAft>
+                <a:spcPts val="0"/>
+              </a:spcAft>
+              <a:buNone/>
+            </a:pPr>
+            <a:endParaRPr dirty="0">
+              <a:latin typeface="Consolas"/>
+              <a:ea typeface="Consolas"/>
+              <a:cs typeface="Consolas"/>
+              <a:sym typeface="Consolas"/>
+            </a:endParaRPr>
+          </a:p>
+        </p:txBody>
+      </p:sp>
+      <p:sp>
+        <p:nvSpPr>
+          <p:cNvPr id="30" name="Google Shape;121;p16">
+            <a:extLst>
+              <a:ext uri="{FF2B5EF4-FFF2-40B4-BE49-F238E27FC236}">
+                <a16:creationId xmlns:a16="http://schemas.microsoft.com/office/drawing/2014/main" id="{DD5EAB4D-5FD4-276A-54F0-19874A4F5CE2}"/>
+              </a:ext>
+            </a:extLst>
+          </p:cNvPr>
+          <p:cNvSpPr/>
+          <p:nvPr/>
+        </p:nvSpPr>
+        <p:spPr>
+          <a:xfrm>
+            <a:off x="12395940" y="7321727"/>
+            <a:ext cx="2410800" cy="1215821"/>
+          </a:xfrm>
+          <a:prstGeom prst="roundRect">
+            <a:avLst>
+              <a:gd name="adj" fmla="val 16667"/>
+            </a:avLst>
+          </a:prstGeom>
+          <a:solidFill>
+            <a:srgbClr val="D0E0E3"/>
+          </a:solidFill>
+          <a:ln w="28575" cap="flat" cmpd="sng">
+            <a:solidFill>
+              <a:srgbClr val="134F5C"/>
+            </a:solidFill>
+            <a:prstDash val="solid"/>
+            <a:round/>
+            <a:headEnd type="none" w="sm" len="sm"/>
+            <a:tailEnd type="none" w="sm" len="sm"/>
+          </a:ln>
+        </p:spPr>
+        <p:txBody>
+          <a:bodyPr spcFirstLastPara="1" wrap="square" lIns="91425" tIns="91425" rIns="91425" bIns="91425" anchor="t" anchorCtr="0">
+            <a:noAutofit/>
+          </a:bodyPr>
+          <a:lstStyle/>
+          <a:p>
+            <a:r>
+              <a:rPr lang="pt-PT" dirty="0">
+                <a:latin typeface="Consolas"/>
+                <a:ea typeface="Consolas"/>
+                <a:cs typeface="Consolas"/>
+                <a:sym typeface="Consolas"/>
+              </a:rPr>
+              <a:t>T3: Implementar a parte do Meteorito. </a:t>
+            </a:r>
+          </a:p>
+          <a:p>
+            <a:r>
+              <a:rPr lang="en-GB" dirty="0">
+                <a:latin typeface="Consolas"/>
+                <a:ea typeface="Consolas"/>
+                <a:cs typeface="Consolas"/>
+                <a:sym typeface="Consolas"/>
+              </a:rPr>
+              <a:t> </a:t>
+            </a:r>
+            <a:br>
+              <a:rPr lang="en-GB" dirty="0">
+                <a:latin typeface="Consolas"/>
+                <a:ea typeface="Consolas"/>
+                <a:cs typeface="Consolas"/>
+                <a:sym typeface="Consolas"/>
+              </a:rPr>
+            </a:br>
+            <a:br>
+              <a:rPr lang="en-GB" dirty="0">
+                <a:latin typeface="Consolas"/>
+                <a:ea typeface="Consolas"/>
+                <a:cs typeface="Consolas"/>
+                <a:sym typeface="Consolas"/>
+              </a:rPr>
+            </a:br>
+            <a:endParaRPr lang="en-GB" dirty="0">
+              <a:latin typeface="Consolas"/>
+              <a:ea typeface="Consolas"/>
+              <a:cs typeface="Consolas"/>
+              <a:sym typeface="Consolas"/>
+            </a:endParaRPr>
+          </a:p>
+          <a:p>
+            <a:pPr marL="0" lvl="0" indent="0" algn="l" rtl="0">
+              <a:spcBef>
+                <a:spcPts val="0"/>
+              </a:spcBef>
+              <a:spcAft>
+                <a:spcPts val="0"/>
+              </a:spcAft>
+              <a:buNone/>
+            </a:pPr>
+            <a:endParaRPr dirty="0">
+              <a:latin typeface="Consolas"/>
+              <a:ea typeface="Consolas"/>
+              <a:cs typeface="Consolas"/>
+              <a:sym typeface="Consolas"/>
+            </a:endParaRPr>
+          </a:p>
+        </p:txBody>
+      </p:sp>
+    </p:spTree>
+    <p:extLst>
+      <p:ext uri="{BB962C8B-B14F-4D97-AF65-F5344CB8AC3E}">
+        <p14:creationId xmlns:p14="http://schemas.microsoft.com/office/powerpoint/2010/main" val="3622504100"/>
       </p:ext>
     </p:extLst>
   </p:cSld>
@@ -21846,6 +26623,2322 @@
         </p:txBody>
       </p:sp>
     </p:spTree>
+  </p:cSld>
+  <p:clrMapOvr>
+    <a:masterClrMapping/>
+  </p:clrMapOvr>
+</p:sld>
+</file>
+
+<file path=ppt/slides/slide20.xml><?xml version="1.0" encoding="utf-8"?>
+<p:sld xmlns:a="http://schemas.openxmlformats.org/drawingml/2006/main" xmlns:r="http://schemas.openxmlformats.org/officeDocument/2006/relationships" xmlns:p="http://schemas.openxmlformats.org/presentationml/2006/main">
+  <p:cSld>
+    <p:spTree>
+      <p:nvGrpSpPr>
+        <p:cNvPr id="1" name="Shape 189">
+          <a:extLst>
+            <a:ext uri="{FF2B5EF4-FFF2-40B4-BE49-F238E27FC236}">
+              <a16:creationId xmlns:a16="http://schemas.microsoft.com/office/drawing/2014/main" id="{9BF79E9C-23FF-1414-1633-55F0B86825CD}"/>
+            </a:ext>
+          </a:extLst>
+        </p:cNvPr>
+        <p:cNvGrpSpPr/>
+        <p:nvPr/>
+      </p:nvGrpSpPr>
+      <p:grpSpPr>
+        <a:xfrm>
+          <a:off x="0" y="0"/>
+          <a:ext cx="0" cy="0"/>
+          <a:chOff x="0" y="0"/>
+          <a:chExt cx="0" cy="0"/>
+        </a:xfrm>
+      </p:grpSpPr>
+      <p:cxnSp>
+        <p:nvCxnSpPr>
+          <p:cNvPr id="190" name="Google Shape;190;p19">
+            <a:extLst>
+              <a:ext uri="{FF2B5EF4-FFF2-40B4-BE49-F238E27FC236}">
+                <a16:creationId xmlns:a16="http://schemas.microsoft.com/office/drawing/2014/main" id="{8CB2FD25-E170-08EC-033F-92C4DFB393AD}"/>
+              </a:ext>
+            </a:extLst>
+          </p:cNvPr>
+          <p:cNvCxnSpPr/>
+          <p:nvPr/>
+        </p:nvCxnSpPr>
+        <p:spPr>
+          <a:xfrm>
+            <a:off x="5944724" y="-31500"/>
+            <a:ext cx="0" cy="10857000"/>
+          </a:xfrm>
+          <a:prstGeom prst="straightConnector1">
+            <a:avLst/>
+          </a:prstGeom>
+          <a:noFill/>
+          <a:ln w="38100" cap="flat" cmpd="sng">
+            <a:solidFill>
+              <a:srgbClr val="5B0F00"/>
+            </a:solidFill>
+            <a:prstDash val="solid"/>
+            <a:round/>
+            <a:headEnd type="none" w="med" len="med"/>
+            <a:tailEnd type="none" w="med" len="med"/>
+          </a:ln>
+        </p:spPr>
+      </p:cxnSp>
+      <p:sp>
+        <p:nvSpPr>
+          <p:cNvPr id="191" name="Google Shape;191;p19">
+            <a:extLst>
+              <a:ext uri="{FF2B5EF4-FFF2-40B4-BE49-F238E27FC236}">
+                <a16:creationId xmlns:a16="http://schemas.microsoft.com/office/drawing/2014/main" id="{CB91F41C-543C-7B80-287E-D6449B583A95}"/>
+              </a:ext>
+            </a:extLst>
+          </p:cNvPr>
+          <p:cNvSpPr/>
+          <p:nvPr/>
+        </p:nvSpPr>
+        <p:spPr>
+          <a:xfrm>
+            <a:off x="3197186" y="84312"/>
+            <a:ext cx="2410800" cy="480900"/>
+          </a:xfrm>
+          <a:prstGeom prst="roundRect">
+            <a:avLst>
+              <a:gd name="adj" fmla="val 16667"/>
+            </a:avLst>
+          </a:prstGeom>
+          <a:solidFill>
+            <a:srgbClr val="F9CB9C"/>
+          </a:solidFill>
+          <a:ln w="28575" cap="flat" cmpd="sng">
+            <a:solidFill>
+              <a:srgbClr val="B45F06"/>
+            </a:solidFill>
+            <a:prstDash val="solid"/>
+            <a:round/>
+            <a:headEnd type="none" w="sm" len="sm"/>
+            <a:tailEnd type="none" w="sm" len="sm"/>
+          </a:ln>
+        </p:spPr>
+        <p:txBody>
+          <a:bodyPr spcFirstLastPara="1" wrap="square" lIns="91425" tIns="91425" rIns="91425" bIns="91425" anchor="ctr" anchorCtr="0">
+            <a:noAutofit/>
+          </a:bodyPr>
+          <a:lstStyle/>
+          <a:p>
+            <a:pPr marL="0" lvl="0" indent="0" algn="ctr" rtl="0">
+              <a:spcBef>
+                <a:spcPts val="0"/>
+              </a:spcBef>
+              <a:spcAft>
+                <a:spcPts val="0"/>
+              </a:spcAft>
+              <a:buNone/>
+            </a:pPr>
+            <a:r>
+              <a:rPr lang="en-GB" sz="1800" b="1">
+                <a:latin typeface="Consolas"/>
+                <a:ea typeface="Consolas"/>
+                <a:cs typeface="Consolas"/>
+                <a:sym typeface="Consolas"/>
+              </a:rPr>
+              <a:t>Student ID</a:t>
+            </a:r>
+            <a:endParaRPr sz="1800" b="1">
+              <a:latin typeface="Consolas"/>
+              <a:ea typeface="Consolas"/>
+              <a:cs typeface="Consolas"/>
+              <a:sym typeface="Consolas"/>
+            </a:endParaRPr>
+          </a:p>
+        </p:txBody>
+      </p:sp>
+      <p:sp>
+        <p:nvSpPr>
+          <p:cNvPr id="192" name="Google Shape;192;p19">
+            <a:extLst>
+              <a:ext uri="{FF2B5EF4-FFF2-40B4-BE49-F238E27FC236}">
+                <a16:creationId xmlns:a16="http://schemas.microsoft.com/office/drawing/2014/main" id="{51A77072-BB1A-F531-CF64-C71DEF52C75F}"/>
+              </a:ext>
+            </a:extLst>
+          </p:cNvPr>
+          <p:cNvSpPr/>
+          <p:nvPr/>
+        </p:nvSpPr>
+        <p:spPr>
+          <a:xfrm>
+            <a:off x="6281636" y="84312"/>
+            <a:ext cx="2410800" cy="480900"/>
+          </a:xfrm>
+          <a:prstGeom prst="roundRect">
+            <a:avLst>
+              <a:gd name="adj" fmla="val 16667"/>
+            </a:avLst>
+          </a:prstGeom>
+          <a:solidFill>
+            <a:srgbClr val="F9CB9C"/>
+          </a:solidFill>
+          <a:ln w="28575" cap="flat" cmpd="sng">
+            <a:solidFill>
+              <a:srgbClr val="B45F06"/>
+            </a:solidFill>
+            <a:prstDash val="solid"/>
+            <a:round/>
+            <a:headEnd type="none" w="sm" len="sm"/>
+            <a:tailEnd type="none" w="sm" len="sm"/>
+          </a:ln>
+        </p:spPr>
+        <p:txBody>
+          <a:bodyPr spcFirstLastPara="1" wrap="square" lIns="91425" tIns="91425" rIns="91425" bIns="91425" anchor="ctr" anchorCtr="0">
+            <a:noAutofit/>
+          </a:bodyPr>
+          <a:lstStyle/>
+          <a:p>
+            <a:pPr marL="0" lvl="0" indent="0" algn="ctr" rtl="0">
+              <a:spcBef>
+                <a:spcPts val="0"/>
+              </a:spcBef>
+              <a:spcAft>
+                <a:spcPts val="0"/>
+              </a:spcAft>
+              <a:buNone/>
+            </a:pPr>
+            <a:r>
+              <a:rPr lang="en-GB" sz="1800" b="1">
+                <a:latin typeface="Consolas"/>
+                <a:ea typeface="Consolas"/>
+                <a:cs typeface="Consolas"/>
+                <a:sym typeface="Consolas"/>
+              </a:rPr>
+              <a:t>Story</a:t>
+            </a:r>
+            <a:endParaRPr sz="1800" b="1">
+              <a:latin typeface="Consolas"/>
+              <a:ea typeface="Consolas"/>
+              <a:cs typeface="Consolas"/>
+              <a:sym typeface="Consolas"/>
+            </a:endParaRPr>
+          </a:p>
+        </p:txBody>
+      </p:sp>
+      <p:sp>
+        <p:nvSpPr>
+          <p:cNvPr id="193" name="Google Shape;193;p19">
+            <a:extLst>
+              <a:ext uri="{FF2B5EF4-FFF2-40B4-BE49-F238E27FC236}">
+                <a16:creationId xmlns:a16="http://schemas.microsoft.com/office/drawing/2014/main" id="{9B070276-5101-EBC0-79D9-2AE78AE7B808}"/>
+              </a:ext>
+            </a:extLst>
+          </p:cNvPr>
+          <p:cNvSpPr/>
+          <p:nvPr/>
+        </p:nvSpPr>
+        <p:spPr>
+          <a:xfrm>
+            <a:off x="9366071" y="84312"/>
+            <a:ext cx="2410800" cy="480900"/>
+          </a:xfrm>
+          <a:prstGeom prst="roundRect">
+            <a:avLst>
+              <a:gd name="adj" fmla="val 16667"/>
+            </a:avLst>
+          </a:prstGeom>
+          <a:solidFill>
+            <a:srgbClr val="F9CB9C"/>
+          </a:solidFill>
+          <a:ln w="28575" cap="flat" cmpd="sng">
+            <a:solidFill>
+              <a:srgbClr val="B45F06"/>
+            </a:solidFill>
+            <a:prstDash val="solid"/>
+            <a:round/>
+            <a:headEnd type="none" w="sm" len="sm"/>
+            <a:tailEnd type="none" w="sm" len="sm"/>
+          </a:ln>
+        </p:spPr>
+        <p:txBody>
+          <a:bodyPr spcFirstLastPara="1" wrap="square" lIns="91425" tIns="91425" rIns="91425" bIns="91425" anchor="ctr" anchorCtr="0">
+            <a:noAutofit/>
+          </a:bodyPr>
+          <a:lstStyle/>
+          <a:p>
+            <a:pPr marL="0" lvl="0" indent="0" algn="ctr" rtl="0">
+              <a:spcBef>
+                <a:spcPts val="0"/>
+              </a:spcBef>
+              <a:spcAft>
+                <a:spcPts val="0"/>
+              </a:spcAft>
+              <a:buNone/>
+            </a:pPr>
+            <a:r>
+              <a:rPr lang="en-GB" sz="1800" b="1">
+                <a:latin typeface="Consolas"/>
+                <a:ea typeface="Consolas"/>
+                <a:cs typeface="Consolas"/>
+                <a:sym typeface="Consolas"/>
+              </a:rPr>
+              <a:t>To Do</a:t>
+            </a:r>
+            <a:endParaRPr sz="1800" b="1">
+              <a:latin typeface="Consolas"/>
+              <a:ea typeface="Consolas"/>
+              <a:cs typeface="Consolas"/>
+              <a:sym typeface="Consolas"/>
+            </a:endParaRPr>
+          </a:p>
+        </p:txBody>
+      </p:sp>
+      <p:sp>
+        <p:nvSpPr>
+          <p:cNvPr id="194" name="Google Shape;194;p19">
+            <a:extLst>
+              <a:ext uri="{FF2B5EF4-FFF2-40B4-BE49-F238E27FC236}">
+                <a16:creationId xmlns:a16="http://schemas.microsoft.com/office/drawing/2014/main" id="{9954E637-CFA1-67DD-3BE2-EF24FCC5ADD6}"/>
+              </a:ext>
+            </a:extLst>
+          </p:cNvPr>
+          <p:cNvSpPr/>
+          <p:nvPr/>
+        </p:nvSpPr>
+        <p:spPr>
+          <a:xfrm>
+            <a:off x="12395940" y="84312"/>
+            <a:ext cx="2410800" cy="480900"/>
+          </a:xfrm>
+          <a:prstGeom prst="roundRect">
+            <a:avLst>
+              <a:gd name="adj" fmla="val 16667"/>
+            </a:avLst>
+          </a:prstGeom>
+          <a:solidFill>
+            <a:srgbClr val="F9CB9C"/>
+          </a:solidFill>
+          <a:ln w="28575" cap="flat" cmpd="sng">
+            <a:solidFill>
+              <a:srgbClr val="B45F06"/>
+            </a:solidFill>
+            <a:prstDash val="solid"/>
+            <a:round/>
+            <a:headEnd type="none" w="sm" len="sm"/>
+            <a:tailEnd type="none" w="sm" len="sm"/>
+          </a:ln>
+        </p:spPr>
+        <p:txBody>
+          <a:bodyPr spcFirstLastPara="1" wrap="square" lIns="91425" tIns="91425" rIns="91425" bIns="91425" anchor="ctr" anchorCtr="0">
+            <a:noAutofit/>
+          </a:bodyPr>
+          <a:lstStyle/>
+          <a:p>
+            <a:pPr marL="0" lvl="0" indent="0" algn="ctr" rtl="0">
+              <a:spcBef>
+                <a:spcPts val="0"/>
+              </a:spcBef>
+              <a:spcAft>
+                <a:spcPts val="0"/>
+              </a:spcAft>
+              <a:buNone/>
+            </a:pPr>
+            <a:r>
+              <a:rPr lang="en-GB" sz="1800" b="1">
+                <a:latin typeface="Consolas"/>
+                <a:ea typeface="Consolas"/>
+                <a:cs typeface="Consolas"/>
+                <a:sym typeface="Consolas"/>
+              </a:rPr>
+              <a:t>Doing</a:t>
+            </a:r>
+            <a:endParaRPr sz="1800" b="1">
+              <a:latin typeface="Consolas"/>
+              <a:ea typeface="Consolas"/>
+              <a:cs typeface="Consolas"/>
+              <a:sym typeface="Consolas"/>
+            </a:endParaRPr>
+          </a:p>
+        </p:txBody>
+      </p:sp>
+      <p:sp>
+        <p:nvSpPr>
+          <p:cNvPr id="195" name="Google Shape;195;p19">
+            <a:extLst>
+              <a:ext uri="{FF2B5EF4-FFF2-40B4-BE49-F238E27FC236}">
+                <a16:creationId xmlns:a16="http://schemas.microsoft.com/office/drawing/2014/main" id="{7A6C6064-2889-413F-5D64-C9415A5B8FFD}"/>
+              </a:ext>
+            </a:extLst>
+          </p:cNvPr>
+          <p:cNvSpPr/>
+          <p:nvPr/>
+        </p:nvSpPr>
+        <p:spPr>
+          <a:xfrm>
+            <a:off x="15532407" y="84312"/>
+            <a:ext cx="2410800" cy="480900"/>
+          </a:xfrm>
+          <a:prstGeom prst="roundRect">
+            <a:avLst>
+              <a:gd name="adj" fmla="val 16667"/>
+            </a:avLst>
+          </a:prstGeom>
+          <a:solidFill>
+            <a:srgbClr val="F9CB9C"/>
+          </a:solidFill>
+          <a:ln w="28575" cap="flat" cmpd="sng">
+            <a:solidFill>
+              <a:srgbClr val="B45F06"/>
+            </a:solidFill>
+            <a:prstDash val="solid"/>
+            <a:round/>
+            <a:headEnd type="none" w="sm" len="sm"/>
+            <a:tailEnd type="none" w="sm" len="sm"/>
+          </a:ln>
+        </p:spPr>
+        <p:txBody>
+          <a:bodyPr spcFirstLastPara="1" wrap="square" lIns="91425" tIns="91425" rIns="91425" bIns="91425" anchor="ctr" anchorCtr="0">
+            <a:noAutofit/>
+          </a:bodyPr>
+          <a:lstStyle/>
+          <a:p>
+            <a:pPr marL="0" lvl="0" indent="0" algn="ctr" rtl="0">
+              <a:spcBef>
+                <a:spcPts val="0"/>
+              </a:spcBef>
+              <a:spcAft>
+                <a:spcPts val="0"/>
+              </a:spcAft>
+              <a:buNone/>
+            </a:pPr>
+            <a:r>
+              <a:rPr lang="en-GB" sz="1800" b="1">
+                <a:latin typeface="Consolas"/>
+                <a:ea typeface="Consolas"/>
+                <a:cs typeface="Consolas"/>
+                <a:sym typeface="Consolas"/>
+              </a:rPr>
+              <a:t>Review</a:t>
+            </a:r>
+            <a:endParaRPr sz="1800" b="1">
+              <a:latin typeface="Consolas"/>
+              <a:ea typeface="Consolas"/>
+              <a:cs typeface="Consolas"/>
+              <a:sym typeface="Consolas"/>
+            </a:endParaRPr>
+          </a:p>
+        </p:txBody>
+      </p:sp>
+      <p:sp>
+        <p:nvSpPr>
+          <p:cNvPr id="196" name="Google Shape;196;p19">
+            <a:extLst>
+              <a:ext uri="{FF2B5EF4-FFF2-40B4-BE49-F238E27FC236}">
+                <a16:creationId xmlns:a16="http://schemas.microsoft.com/office/drawing/2014/main" id="{6984E597-5333-CAFD-7931-C42E3E2F2B0B}"/>
+              </a:ext>
+            </a:extLst>
+          </p:cNvPr>
+          <p:cNvSpPr/>
+          <p:nvPr/>
+        </p:nvSpPr>
+        <p:spPr>
+          <a:xfrm>
+            <a:off x="18668888" y="84312"/>
+            <a:ext cx="2410800" cy="480900"/>
+          </a:xfrm>
+          <a:prstGeom prst="roundRect">
+            <a:avLst>
+              <a:gd name="adj" fmla="val 16667"/>
+            </a:avLst>
+          </a:prstGeom>
+          <a:solidFill>
+            <a:srgbClr val="F9CB9C"/>
+          </a:solidFill>
+          <a:ln w="28575" cap="flat" cmpd="sng">
+            <a:solidFill>
+              <a:srgbClr val="B45F06"/>
+            </a:solidFill>
+            <a:prstDash val="solid"/>
+            <a:round/>
+            <a:headEnd type="none" w="sm" len="sm"/>
+            <a:tailEnd type="none" w="sm" len="sm"/>
+          </a:ln>
+        </p:spPr>
+        <p:txBody>
+          <a:bodyPr spcFirstLastPara="1" wrap="square" lIns="91425" tIns="91425" rIns="91425" bIns="91425" anchor="ctr" anchorCtr="0">
+            <a:noAutofit/>
+          </a:bodyPr>
+          <a:lstStyle/>
+          <a:p>
+            <a:pPr marL="0" lvl="0" indent="0" algn="ctr" rtl="0">
+              <a:spcBef>
+                <a:spcPts val="0"/>
+              </a:spcBef>
+              <a:spcAft>
+                <a:spcPts val="0"/>
+              </a:spcAft>
+              <a:buNone/>
+            </a:pPr>
+            <a:r>
+              <a:rPr lang="en-GB" sz="1800" b="1">
+                <a:latin typeface="Consolas"/>
+                <a:ea typeface="Consolas"/>
+                <a:cs typeface="Consolas"/>
+                <a:sym typeface="Consolas"/>
+              </a:rPr>
+              <a:t>Done</a:t>
+            </a:r>
+            <a:endParaRPr sz="1800" b="1">
+              <a:latin typeface="Consolas"/>
+              <a:ea typeface="Consolas"/>
+              <a:cs typeface="Consolas"/>
+              <a:sym typeface="Consolas"/>
+            </a:endParaRPr>
+          </a:p>
+        </p:txBody>
+      </p:sp>
+      <p:sp>
+        <p:nvSpPr>
+          <p:cNvPr id="197" name="Google Shape;197;p19">
+            <a:extLst>
+              <a:ext uri="{FF2B5EF4-FFF2-40B4-BE49-F238E27FC236}">
+                <a16:creationId xmlns:a16="http://schemas.microsoft.com/office/drawing/2014/main" id="{988C9FDB-EA20-45B0-A7A6-0966BEB1D8C3}"/>
+              </a:ext>
+            </a:extLst>
+          </p:cNvPr>
+          <p:cNvSpPr/>
+          <p:nvPr/>
+        </p:nvSpPr>
+        <p:spPr>
+          <a:xfrm>
+            <a:off x="167288" y="84312"/>
+            <a:ext cx="2410800" cy="480900"/>
+          </a:xfrm>
+          <a:prstGeom prst="roundRect">
+            <a:avLst>
+              <a:gd name="adj" fmla="val 16667"/>
+            </a:avLst>
+          </a:prstGeom>
+          <a:solidFill>
+            <a:srgbClr val="F9CB9C"/>
+          </a:solidFill>
+          <a:ln w="28575" cap="flat" cmpd="sng">
+            <a:solidFill>
+              <a:srgbClr val="B45F06"/>
+            </a:solidFill>
+            <a:prstDash val="solid"/>
+            <a:round/>
+            <a:headEnd type="none" w="sm" len="sm"/>
+            <a:tailEnd type="none" w="sm" len="sm"/>
+          </a:ln>
+        </p:spPr>
+        <p:txBody>
+          <a:bodyPr spcFirstLastPara="1" wrap="square" lIns="91425" tIns="91425" rIns="91425" bIns="91425" anchor="ctr" anchorCtr="0">
+            <a:noAutofit/>
+          </a:bodyPr>
+          <a:lstStyle/>
+          <a:p>
+            <a:pPr marL="0" lvl="0" indent="0" algn="ctr" rtl="0">
+              <a:spcBef>
+                <a:spcPts val="0"/>
+              </a:spcBef>
+              <a:spcAft>
+                <a:spcPts val="0"/>
+              </a:spcAft>
+              <a:buNone/>
+            </a:pPr>
+            <a:r>
+              <a:rPr lang="en-GB" sz="1800" b="1">
+                <a:latin typeface="Consolas"/>
+                <a:ea typeface="Consolas"/>
+                <a:cs typeface="Consolas"/>
+                <a:sym typeface="Consolas"/>
+              </a:rPr>
+              <a:t>Backlog</a:t>
+            </a:r>
+            <a:endParaRPr sz="1800" b="1">
+              <a:latin typeface="Consolas"/>
+              <a:ea typeface="Consolas"/>
+              <a:cs typeface="Consolas"/>
+              <a:sym typeface="Consolas"/>
+            </a:endParaRPr>
+          </a:p>
+        </p:txBody>
+      </p:sp>
+      <p:cxnSp>
+        <p:nvCxnSpPr>
+          <p:cNvPr id="204" name="Google Shape;204;p19">
+            <a:extLst>
+              <a:ext uri="{FF2B5EF4-FFF2-40B4-BE49-F238E27FC236}">
+                <a16:creationId xmlns:a16="http://schemas.microsoft.com/office/drawing/2014/main" id="{246903D5-F517-CFD9-029D-46EA8B45855E}"/>
+              </a:ext>
+            </a:extLst>
+          </p:cNvPr>
+          <p:cNvCxnSpPr/>
+          <p:nvPr/>
+        </p:nvCxnSpPr>
+        <p:spPr>
+          <a:xfrm>
+            <a:off x="5607986" y="1626038"/>
+            <a:ext cx="16042200" cy="0"/>
+          </a:xfrm>
+          <a:prstGeom prst="straightConnector1">
+            <a:avLst/>
+          </a:prstGeom>
+          <a:noFill/>
+          <a:ln w="28575" cap="flat" cmpd="sng">
+            <a:solidFill>
+              <a:srgbClr val="999999"/>
+            </a:solidFill>
+            <a:prstDash val="dash"/>
+            <a:round/>
+            <a:headEnd type="none" w="med" len="med"/>
+            <a:tailEnd type="none" w="med" len="med"/>
+          </a:ln>
+        </p:spPr>
+      </p:cxnSp>
+      <p:cxnSp>
+        <p:nvCxnSpPr>
+          <p:cNvPr id="205" name="Google Shape;205;p19">
+            <a:extLst>
+              <a:ext uri="{FF2B5EF4-FFF2-40B4-BE49-F238E27FC236}">
+                <a16:creationId xmlns:a16="http://schemas.microsoft.com/office/drawing/2014/main" id="{1B3FC8C9-F709-3057-9FBD-F20AE40FC08F}"/>
+              </a:ext>
+            </a:extLst>
+          </p:cNvPr>
+          <p:cNvCxnSpPr/>
+          <p:nvPr/>
+        </p:nvCxnSpPr>
+        <p:spPr>
+          <a:xfrm>
+            <a:off x="5607986" y="3203476"/>
+            <a:ext cx="16042200" cy="0"/>
+          </a:xfrm>
+          <a:prstGeom prst="straightConnector1">
+            <a:avLst/>
+          </a:prstGeom>
+          <a:noFill/>
+          <a:ln w="28575" cap="flat" cmpd="sng">
+            <a:solidFill>
+              <a:srgbClr val="999999"/>
+            </a:solidFill>
+            <a:prstDash val="dash"/>
+            <a:round/>
+            <a:headEnd type="none" w="med" len="med"/>
+            <a:tailEnd type="none" w="med" len="med"/>
+          </a:ln>
+        </p:spPr>
+      </p:cxnSp>
+      <p:cxnSp>
+        <p:nvCxnSpPr>
+          <p:cNvPr id="206" name="Google Shape;206;p19">
+            <a:extLst>
+              <a:ext uri="{FF2B5EF4-FFF2-40B4-BE49-F238E27FC236}">
+                <a16:creationId xmlns:a16="http://schemas.microsoft.com/office/drawing/2014/main" id="{8D1FF30C-0E57-330F-7E0A-1597ACB3F83A}"/>
+              </a:ext>
+            </a:extLst>
+          </p:cNvPr>
+          <p:cNvCxnSpPr/>
+          <p:nvPr/>
+        </p:nvCxnSpPr>
+        <p:spPr>
+          <a:xfrm>
+            <a:off x="5607986" y="4777838"/>
+            <a:ext cx="16042200" cy="0"/>
+          </a:xfrm>
+          <a:prstGeom prst="straightConnector1">
+            <a:avLst/>
+          </a:prstGeom>
+          <a:noFill/>
+          <a:ln w="28575" cap="flat" cmpd="sng">
+            <a:solidFill>
+              <a:srgbClr val="999999"/>
+            </a:solidFill>
+            <a:prstDash val="dash"/>
+            <a:round/>
+            <a:headEnd type="none" w="med" len="med"/>
+            <a:tailEnd type="none" w="med" len="med"/>
+          </a:ln>
+        </p:spPr>
+      </p:cxnSp>
+      <p:cxnSp>
+        <p:nvCxnSpPr>
+          <p:cNvPr id="207" name="Google Shape;207;p19">
+            <a:extLst>
+              <a:ext uri="{FF2B5EF4-FFF2-40B4-BE49-F238E27FC236}">
+                <a16:creationId xmlns:a16="http://schemas.microsoft.com/office/drawing/2014/main" id="{4EA3AD75-CE31-C909-74EC-1C6DD50DF1D5}"/>
+              </a:ext>
+            </a:extLst>
+          </p:cNvPr>
+          <p:cNvCxnSpPr/>
+          <p:nvPr/>
+        </p:nvCxnSpPr>
+        <p:spPr>
+          <a:xfrm>
+            <a:off x="5607986" y="6353738"/>
+            <a:ext cx="16042200" cy="0"/>
+          </a:xfrm>
+          <a:prstGeom prst="straightConnector1">
+            <a:avLst/>
+          </a:prstGeom>
+          <a:noFill/>
+          <a:ln w="28575" cap="flat" cmpd="sng">
+            <a:solidFill>
+              <a:srgbClr val="999999"/>
+            </a:solidFill>
+            <a:prstDash val="dash"/>
+            <a:round/>
+            <a:headEnd type="none" w="med" len="med"/>
+            <a:tailEnd type="none" w="med" len="med"/>
+          </a:ln>
+        </p:spPr>
+      </p:cxnSp>
+      <p:cxnSp>
+        <p:nvCxnSpPr>
+          <p:cNvPr id="208" name="Google Shape;208;p19">
+            <a:extLst>
+              <a:ext uri="{FF2B5EF4-FFF2-40B4-BE49-F238E27FC236}">
+                <a16:creationId xmlns:a16="http://schemas.microsoft.com/office/drawing/2014/main" id="{EBEA50E0-EBD8-B815-F6BD-99BCD18A95E6}"/>
+              </a:ext>
+            </a:extLst>
+          </p:cNvPr>
+          <p:cNvCxnSpPr/>
+          <p:nvPr/>
+        </p:nvCxnSpPr>
+        <p:spPr>
+          <a:xfrm>
+            <a:off x="5607986" y="7929638"/>
+            <a:ext cx="16042200" cy="0"/>
+          </a:xfrm>
+          <a:prstGeom prst="straightConnector1">
+            <a:avLst/>
+          </a:prstGeom>
+          <a:noFill/>
+          <a:ln w="28575" cap="flat" cmpd="sng">
+            <a:solidFill>
+              <a:srgbClr val="999999"/>
+            </a:solidFill>
+            <a:prstDash val="dash"/>
+            <a:round/>
+            <a:headEnd type="none" w="med" len="med"/>
+            <a:tailEnd type="none" w="med" len="med"/>
+          </a:ln>
+        </p:spPr>
+      </p:cxnSp>
+      <p:cxnSp>
+        <p:nvCxnSpPr>
+          <p:cNvPr id="209" name="Google Shape;209;p19">
+            <a:extLst>
+              <a:ext uri="{FF2B5EF4-FFF2-40B4-BE49-F238E27FC236}">
+                <a16:creationId xmlns:a16="http://schemas.microsoft.com/office/drawing/2014/main" id="{38A01EF9-F242-A653-28A8-E713A57AF6D4}"/>
+              </a:ext>
+            </a:extLst>
+          </p:cNvPr>
+          <p:cNvCxnSpPr/>
+          <p:nvPr/>
+        </p:nvCxnSpPr>
+        <p:spPr>
+          <a:xfrm>
+            <a:off x="5607986" y="9505538"/>
+            <a:ext cx="16042200" cy="0"/>
+          </a:xfrm>
+          <a:prstGeom prst="straightConnector1">
+            <a:avLst/>
+          </a:prstGeom>
+          <a:noFill/>
+          <a:ln w="28575" cap="flat" cmpd="sng">
+            <a:solidFill>
+              <a:srgbClr val="999999"/>
+            </a:solidFill>
+            <a:prstDash val="dash"/>
+            <a:round/>
+            <a:headEnd type="none" w="med" len="med"/>
+            <a:tailEnd type="none" w="med" len="med"/>
+          </a:ln>
+        </p:spPr>
+      </p:cxnSp>
+      <p:cxnSp>
+        <p:nvCxnSpPr>
+          <p:cNvPr id="215" name="Google Shape;215;p19">
+            <a:extLst>
+              <a:ext uri="{FF2B5EF4-FFF2-40B4-BE49-F238E27FC236}">
+                <a16:creationId xmlns:a16="http://schemas.microsoft.com/office/drawing/2014/main" id="{5044B621-30ED-9C45-4086-D2A2A3914BDC}"/>
+              </a:ext>
+            </a:extLst>
+          </p:cNvPr>
+          <p:cNvCxnSpPr/>
+          <p:nvPr/>
+        </p:nvCxnSpPr>
+        <p:spPr>
+          <a:xfrm>
+            <a:off x="2874374" y="-28500"/>
+            <a:ext cx="0" cy="10857000"/>
+          </a:xfrm>
+          <a:prstGeom prst="straightConnector1">
+            <a:avLst/>
+          </a:prstGeom>
+          <a:noFill/>
+          <a:ln w="38100" cap="flat" cmpd="sng">
+            <a:solidFill>
+              <a:srgbClr val="5B0F00"/>
+            </a:solidFill>
+            <a:prstDash val="solid"/>
+            <a:round/>
+            <a:headEnd type="none" w="med" len="med"/>
+            <a:tailEnd type="none" w="med" len="med"/>
+          </a:ln>
+        </p:spPr>
+      </p:cxnSp>
+      <p:sp>
+        <p:nvSpPr>
+          <p:cNvPr id="2" name="Google Shape;74;p15">
+            <a:extLst>
+              <a:ext uri="{FF2B5EF4-FFF2-40B4-BE49-F238E27FC236}">
+                <a16:creationId xmlns:a16="http://schemas.microsoft.com/office/drawing/2014/main" id="{D2793EA6-FC61-822C-757C-7981A789F335}"/>
+              </a:ext>
+            </a:extLst>
+          </p:cNvPr>
+          <p:cNvSpPr/>
+          <p:nvPr/>
+        </p:nvSpPr>
+        <p:spPr>
+          <a:xfrm>
+            <a:off x="3197186" y="1385588"/>
+            <a:ext cx="2410800" cy="480900"/>
+          </a:xfrm>
+          <a:prstGeom prst="roundRect">
+            <a:avLst>
+              <a:gd name="adj" fmla="val 16667"/>
+            </a:avLst>
+          </a:prstGeom>
+          <a:solidFill>
+            <a:srgbClr val="E6B8AF"/>
+          </a:solidFill>
+          <a:ln w="28575" cap="flat" cmpd="sng">
+            <a:solidFill>
+              <a:srgbClr val="5B0F00"/>
+            </a:solidFill>
+            <a:prstDash val="solid"/>
+            <a:round/>
+            <a:headEnd type="none" w="sm" len="sm"/>
+            <a:tailEnd type="none" w="sm" len="sm"/>
+          </a:ln>
+        </p:spPr>
+        <p:txBody>
+          <a:bodyPr spcFirstLastPara="1" wrap="square" lIns="91425" tIns="91425" rIns="91425" bIns="91425" anchor="ctr" anchorCtr="0">
+            <a:noAutofit/>
+          </a:bodyPr>
+          <a:lstStyle/>
+          <a:p>
+            <a:pPr marL="0" lvl="0" indent="0" algn="ctr" rtl="0">
+              <a:spcBef>
+                <a:spcPts val="0"/>
+              </a:spcBef>
+              <a:spcAft>
+                <a:spcPts val="0"/>
+              </a:spcAft>
+              <a:buNone/>
+            </a:pPr>
+            <a:r>
+              <a:rPr lang="en-GB" sz="1800" b="1" dirty="0">
+                <a:latin typeface="Consolas"/>
+                <a:ea typeface="Consolas"/>
+                <a:cs typeface="Consolas"/>
+                <a:sym typeface="Consolas"/>
+              </a:rPr>
+              <a:t>68338</a:t>
+            </a:r>
+            <a:endParaRPr sz="1800" b="1" dirty="0">
+              <a:latin typeface="Consolas"/>
+              <a:ea typeface="Consolas"/>
+              <a:cs typeface="Consolas"/>
+              <a:sym typeface="Consolas"/>
+            </a:endParaRPr>
+          </a:p>
+        </p:txBody>
+      </p:sp>
+      <p:sp>
+        <p:nvSpPr>
+          <p:cNvPr id="3" name="Google Shape;75;p15">
+            <a:extLst>
+              <a:ext uri="{FF2B5EF4-FFF2-40B4-BE49-F238E27FC236}">
+                <a16:creationId xmlns:a16="http://schemas.microsoft.com/office/drawing/2014/main" id="{0360EF60-0BD4-333B-48BC-8C59873F0162}"/>
+              </a:ext>
+            </a:extLst>
+          </p:cNvPr>
+          <p:cNvSpPr/>
+          <p:nvPr/>
+        </p:nvSpPr>
+        <p:spPr>
+          <a:xfrm>
+            <a:off x="3197186" y="2961501"/>
+            <a:ext cx="2410800" cy="480900"/>
+          </a:xfrm>
+          <a:prstGeom prst="roundRect">
+            <a:avLst>
+              <a:gd name="adj" fmla="val 16667"/>
+            </a:avLst>
+          </a:prstGeom>
+          <a:solidFill>
+            <a:srgbClr val="E6B8AF"/>
+          </a:solidFill>
+          <a:ln w="28575" cap="flat" cmpd="sng">
+            <a:solidFill>
+              <a:srgbClr val="5B0F00"/>
+            </a:solidFill>
+            <a:prstDash val="solid"/>
+            <a:round/>
+            <a:headEnd type="none" w="sm" len="sm"/>
+            <a:tailEnd type="none" w="sm" len="sm"/>
+          </a:ln>
+        </p:spPr>
+        <p:txBody>
+          <a:bodyPr spcFirstLastPara="1" wrap="square" lIns="91425" tIns="91425" rIns="91425" bIns="91425" anchor="ctr" anchorCtr="0">
+            <a:noAutofit/>
+          </a:bodyPr>
+          <a:lstStyle/>
+          <a:p>
+            <a:pPr marL="0" lvl="0" indent="0" algn="ctr" rtl="0">
+              <a:spcBef>
+                <a:spcPts val="0"/>
+              </a:spcBef>
+              <a:spcAft>
+                <a:spcPts val="0"/>
+              </a:spcAft>
+              <a:buNone/>
+            </a:pPr>
+            <a:r>
+              <a:rPr lang="en-GB" sz="1800" b="1" dirty="0">
+                <a:latin typeface="Consolas"/>
+                <a:ea typeface="Consolas"/>
+                <a:cs typeface="Consolas"/>
+                <a:sym typeface="Consolas"/>
+              </a:rPr>
+              <a:t>68245</a:t>
+            </a:r>
+            <a:endParaRPr sz="1800" b="1" dirty="0">
+              <a:latin typeface="Consolas"/>
+              <a:ea typeface="Consolas"/>
+              <a:cs typeface="Consolas"/>
+              <a:sym typeface="Consolas"/>
+            </a:endParaRPr>
+          </a:p>
+        </p:txBody>
+      </p:sp>
+      <p:sp>
+        <p:nvSpPr>
+          <p:cNvPr id="4" name="Google Shape;76;p15">
+            <a:extLst>
+              <a:ext uri="{FF2B5EF4-FFF2-40B4-BE49-F238E27FC236}">
+                <a16:creationId xmlns:a16="http://schemas.microsoft.com/office/drawing/2014/main" id="{60AED093-00B1-95CB-1EC2-DE05E4CE439D}"/>
+              </a:ext>
+            </a:extLst>
+          </p:cNvPr>
+          <p:cNvSpPr/>
+          <p:nvPr/>
+        </p:nvSpPr>
+        <p:spPr>
+          <a:xfrm>
+            <a:off x="3197186" y="4537410"/>
+            <a:ext cx="2410800" cy="480900"/>
+          </a:xfrm>
+          <a:prstGeom prst="roundRect">
+            <a:avLst>
+              <a:gd name="adj" fmla="val 16667"/>
+            </a:avLst>
+          </a:prstGeom>
+          <a:solidFill>
+            <a:srgbClr val="E6B8AF"/>
+          </a:solidFill>
+          <a:ln w="28575" cap="flat" cmpd="sng">
+            <a:solidFill>
+              <a:srgbClr val="5B0F00"/>
+            </a:solidFill>
+            <a:prstDash val="solid"/>
+            <a:round/>
+            <a:headEnd type="none" w="sm" len="sm"/>
+            <a:tailEnd type="none" w="sm" len="sm"/>
+          </a:ln>
+        </p:spPr>
+        <p:txBody>
+          <a:bodyPr spcFirstLastPara="1" wrap="square" lIns="91425" tIns="91425" rIns="91425" bIns="91425" anchor="ctr" anchorCtr="0">
+            <a:noAutofit/>
+          </a:bodyPr>
+          <a:lstStyle/>
+          <a:p>
+            <a:pPr marL="0" lvl="0" indent="0" algn="ctr" rtl="0">
+              <a:spcBef>
+                <a:spcPts val="0"/>
+              </a:spcBef>
+              <a:spcAft>
+                <a:spcPts val="0"/>
+              </a:spcAft>
+              <a:buNone/>
+            </a:pPr>
+            <a:r>
+              <a:rPr lang="en-GB" sz="1800" b="1" dirty="0">
+                <a:latin typeface="Consolas"/>
+                <a:ea typeface="Consolas"/>
+                <a:cs typeface="Consolas"/>
+                <a:sym typeface="Consolas"/>
+              </a:rPr>
+              <a:t>68725</a:t>
+            </a:r>
+            <a:endParaRPr sz="1800" b="1" dirty="0">
+              <a:latin typeface="Consolas"/>
+              <a:ea typeface="Consolas"/>
+              <a:cs typeface="Consolas"/>
+              <a:sym typeface="Consolas"/>
+            </a:endParaRPr>
+          </a:p>
+        </p:txBody>
+      </p:sp>
+      <p:sp>
+        <p:nvSpPr>
+          <p:cNvPr id="5" name="Google Shape;77;p15">
+            <a:extLst>
+              <a:ext uri="{FF2B5EF4-FFF2-40B4-BE49-F238E27FC236}">
+                <a16:creationId xmlns:a16="http://schemas.microsoft.com/office/drawing/2014/main" id="{30A20F4D-8E79-6D7C-3DC1-A73344423460}"/>
+              </a:ext>
+            </a:extLst>
+          </p:cNvPr>
+          <p:cNvSpPr/>
+          <p:nvPr/>
+        </p:nvSpPr>
+        <p:spPr>
+          <a:xfrm>
+            <a:off x="3197186" y="6113307"/>
+            <a:ext cx="2410800" cy="480900"/>
+          </a:xfrm>
+          <a:prstGeom prst="roundRect">
+            <a:avLst>
+              <a:gd name="adj" fmla="val 16667"/>
+            </a:avLst>
+          </a:prstGeom>
+          <a:solidFill>
+            <a:srgbClr val="E6B8AF"/>
+          </a:solidFill>
+          <a:ln w="28575" cap="flat" cmpd="sng">
+            <a:solidFill>
+              <a:srgbClr val="5B0F00"/>
+            </a:solidFill>
+            <a:prstDash val="solid"/>
+            <a:round/>
+            <a:headEnd type="none" w="sm" len="sm"/>
+            <a:tailEnd type="none" w="sm" len="sm"/>
+          </a:ln>
+        </p:spPr>
+        <p:txBody>
+          <a:bodyPr spcFirstLastPara="1" wrap="square" lIns="91425" tIns="91425" rIns="91425" bIns="91425" anchor="ctr" anchorCtr="0">
+            <a:noAutofit/>
+          </a:bodyPr>
+          <a:lstStyle/>
+          <a:p>
+            <a:pPr marL="0" lvl="0" indent="0" algn="ctr" rtl="0">
+              <a:spcBef>
+                <a:spcPts val="0"/>
+              </a:spcBef>
+              <a:spcAft>
+                <a:spcPts val="0"/>
+              </a:spcAft>
+              <a:buNone/>
+            </a:pPr>
+            <a:r>
+              <a:rPr lang="en-GB" sz="1800" b="1" dirty="0">
+                <a:latin typeface="Consolas"/>
+                <a:ea typeface="Consolas"/>
+                <a:cs typeface="Consolas"/>
+                <a:sym typeface="Consolas"/>
+              </a:rPr>
+              <a:t>68180</a:t>
+            </a:r>
+            <a:endParaRPr sz="1800" b="1" dirty="0">
+              <a:latin typeface="Consolas"/>
+              <a:ea typeface="Consolas"/>
+              <a:cs typeface="Consolas"/>
+              <a:sym typeface="Consolas"/>
+            </a:endParaRPr>
+          </a:p>
+        </p:txBody>
+      </p:sp>
+      <p:sp>
+        <p:nvSpPr>
+          <p:cNvPr id="6" name="Google Shape;78;p15">
+            <a:extLst>
+              <a:ext uri="{FF2B5EF4-FFF2-40B4-BE49-F238E27FC236}">
+                <a16:creationId xmlns:a16="http://schemas.microsoft.com/office/drawing/2014/main" id="{5511BEA8-50E3-0030-56D6-5D014FCC874E}"/>
+              </a:ext>
+            </a:extLst>
+          </p:cNvPr>
+          <p:cNvSpPr/>
+          <p:nvPr/>
+        </p:nvSpPr>
+        <p:spPr>
+          <a:xfrm>
+            <a:off x="3197186" y="7689198"/>
+            <a:ext cx="2410800" cy="480900"/>
+          </a:xfrm>
+          <a:prstGeom prst="roundRect">
+            <a:avLst>
+              <a:gd name="adj" fmla="val 16667"/>
+            </a:avLst>
+          </a:prstGeom>
+          <a:solidFill>
+            <a:srgbClr val="E6B8AF"/>
+          </a:solidFill>
+          <a:ln w="28575" cap="flat" cmpd="sng">
+            <a:solidFill>
+              <a:srgbClr val="5B0F00"/>
+            </a:solidFill>
+            <a:prstDash val="solid"/>
+            <a:round/>
+            <a:headEnd type="none" w="sm" len="sm"/>
+            <a:tailEnd type="none" w="sm" len="sm"/>
+          </a:ln>
+        </p:spPr>
+        <p:txBody>
+          <a:bodyPr spcFirstLastPara="1" wrap="square" lIns="91425" tIns="91425" rIns="91425" bIns="91425" anchor="ctr" anchorCtr="0">
+            <a:noAutofit/>
+          </a:bodyPr>
+          <a:lstStyle/>
+          <a:p>
+            <a:pPr marL="0" lvl="0" indent="0" algn="ctr" rtl="0">
+              <a:spcBef>
+                <a:spcPts val="0"/>
+              </a:spcBef>
+              <a:spcAft>
+                <a:spcPts val="0"/>
+              </a:spcAft>
+              <a:buNone/>
+            </a:pPr>
+            <a:r>
+              <a:rPr lang="en-GB" sz="1800" b="1" dirty="0">
+                <a:latin typeface="Consolas"/>
+                <a:ea typeface="Consolas"/>
+                <a:cs typeface="Consolas"/>
+                <a:sym typeface="Consolas"/>
+              </a:rPr>
+              <a:t>67912</a:t>
+            </a:r>
+            <a:endParaRPr sz="1800" b="1" dirty="0">
+              <a:latin typeface="Consolas"/>
+              <a:ea typeface="Consolas"/>
+              <a:cs typeface="Consolas"/>
+              <a:sym typeface="Consolas"/>
+            </a:endParaRPr>
+          </a:p>
+        </p:txBody>
+      </p:sp>
+      <p:sp>
+        <p:nvSpPr>
+          <p:cNvPr id="7" name="Google Shape;79;p15">
+            <a:extLst>
+              <a:ext uri="{FF2B5EF4-FFF2-40B4-BE49-F238E27FC236}">
+                <a16:creationId xmlns:a16="http://schemas.microsoft.com/office/drawing/2014/main" id="{FC2FA3C3-CB58-647D-F9AE-6ACFAC145C1E}"/>
+              </a:ext>
+            </a:extLst>
+          </p:cNvPr>
+          <p:cNvSpPr/>
+          <p:nvPr/>
+        </p:nvSpPr>
+        <p:spPr>
+          <a:xfrm>
+            <a:off x="3197186" y="9265103"/>
+            <a:ext cx="2410800" cy="480900"/>
+          </a:xfrm>
+          <a:prstGeom prst="roundRect">
+            <a:avLst>
+              <a:gd name="adj" fmla="val 16667"/>
+            </a:avLst>
+          </a:prstGeom>
+          <a:solidFill>
+            <a:srgbClr val="E6B8AF"/>
+          </a:solidFill>
+          <a:ln w="28575" cap="flat" cmpd="sng">
+            <a:solidFill>
+              <a:srgbClr val="5B0F00"/>
+            </a:solidFill>
+            <a:prstDash val="solid"/>
+            <a:round/>
+            <a:headEnd type="none" w="sm" len="sm"/>
+            <a:tailEnd type="none" w="sm" len="sm"/>
+          </a:ln>
+        </p:spPr>
+        <p:txBody>
+          <a:bodyPr spcFirstLastPara="1" wrap="square" lIns="91425" tIns="91425" rIns="91425" bIns="91425" anchor="ctr" anchorCtr="0">
+            <a:noAutofit/>
+          </a:bodyPr>
+          <a:lstStyle/>
+          <a:p>
+            <a:pPr marL="0" lvl="0" indent="0" algn="ctr" rtl="0">
+              <a:spcBef>
+                <a:spcPts val="0"/>
+              </a:spcBef>
+              <a:spcAft>
+                <a:spcPts val="0"/>
+              </a:spcAft>
+              <a:buNone/>
+            </a:pPr>
+            <a:r>
+              <a:rPr lang="en-GB" sz="1800" b="1" dirty="0">
+                <a:latin typeface="Consolas"/>
+                <a:ea typeface="Consolas"/>
+                <a:cs typeface="Consolas"/>
+                <a:sym typeface="Consolas"/>
+              </a:rPr>
+              <a:t>67870</a:t>
+            </a:r>
+            <a:endParaRPr sz="1800" b="1" dirty="0">
+              <a:latin typeface="Consolas"/>
+              <a:ea typeface="Consolas"/>
+              <a:cs typeface="Consolas"/>
+              <a:sym typeface="Consolas"/>
+            </a:endParaRPr>
+          </a:p>
+        </p:txBody>
+      </p:sp>
+      <p:sp>
+        <p:nvSpPr>
+          <p:cNvPr id="19" name="Google Shape;86;p15">
+            <a:extLst>
+              <a:ext uri="{FF2B5EF4-FFF2-40B4-BE49-F238E27FC236}">
+                <a16:creationId xmlns:a16="http://schemas.microsoft.com/office/drawing/2014/main" id="{FEC2352D-41DC-AE74-BF73-D8FA71B13D22}"/>
+              </a:ext>
+            </a:extLst>
+          </p:cNvPr>
+          <p:cNvSpPr/>
+          <p:nvPr/>
+        </p:nvSpPr>
+        <p:spPr>
+          <a:xfrm>
+            <a:off x="6113259" y="1088887"/>
+            <a:ext cx="2410800" cy="9069525"/>
+          </a:xfrm>
+          <a:prstGeom prst="roundRect">
+            <a:avLst>
+              <a:gd name="adj" fmla="val 16667"/>
+            </a:avLst>
+          </a:prstGeom>
+          <a:solidFill>
+            <a:srgbClr val="D9EAD3"/>
+          </a:solidFill>
+          <a:ln w="28575" cap="flat" cmpd="sng">
+            <a:solidFill>
+              <a:srgbClr val="274E13"/>
+            </a:solidFill>
+            <a:prstDash val="solid"/>
+            <a:round/>
+            <a:headEnd type="none" w="sm" len="sm"/>
+            <a:tailEnd type="none" w="sm" len="sm"/>
+          </a:ln>
+        </p:spPr>
+        <p:txBody>
+          <a:bodyPr spcFirstLastPara="1" wrap="square" lIns="91425" tIns="91425" rIns="91425" bIns="91425" anchor="t" anchorCtr="0">
+            <a:noAutofit/>
+          </a:bodyPr>
+          <a:lstStyle/>
+          <a:p>
+            <a:pPr marL="0" lvl="0" indent="0" rtl="0">
+              <a:spcBef>
+                <a:spcPts val="0"/>
+              </a:spcBef>
+              <a:spcAft>
+                <a:spcPts val="0"/>
+              </a:spcAft>
+              <a:buNone/>
+            </a:pPr>
+            <a:r>
+              <a:rPr lang="en-GB" dirty="0">
+                <a:latin typeface="Consolas"/>
+                <a:ea typeface="Consolas"/>
+                <a:cs typeface="Consolas"/>
+                <a:sym typeface="Consolas"/>
+              </a:rPr>
+              <a:t>US1: Como </a:t>
+            </a:r>
+            <a:r>
+              <a:rPr lang="en-GB" dirty="0" err="1">
+                <a:latin typeface="Consolas"/>
+                <a:ea typeface="Consolas"/>
+                <a:cs typeface="Consolas"/>
+                <a:sym typeface="Consolas"/>
+              </a:rPr>
+              <a:t>membro</a:t>
+            </a:r>
+            <a:r>
+              <a:rPr lang="en-GB" dirty="0">
+                <a:latin typeface="Consolas"/>
+                <a:ea typeface="Consolas"/>
+                <a:cs typeface="Consolas"/>
+                <a:sym typeface="Consolas"/>
+              </a:rPr>
+              <a:t> da </a:t>
+            </a:r>
+            <a:r>
+              <a:rPr lang="en-GB" dirty="0" err="1">
+                <a:latin typeface="Consolas"/>
+                <a:ea typeface="Consolas"/>
+                <a:cs typeface="Consolas"/>
+                <a:sym typeface="Consolas"/>
+              </a:rPr>
+              <a:t>equipa</a:t>
+            </a:r>
+            <a:r>
+              <a:rPr lang="en-GB" dirty="0">
+                <a:latin typeface="Consolas"/>
+                <a:ea typeface="Consolas"/>
+                <a:cs typeface="Consolas"/>
+                <a:sym typeface="Consolas"/>
+              </a:rPr>
+              <a:t>, </a:t>
+            </a:r>
+            <a:r>
+              <a:rPr lang="en-GB" dirty="0" err="1">
+                <a:latin typeface="Consolas"/>
+                <a:ea typeface="Consolas"/>
+                <a:cs typeface="Consolas"/>
+                <a:sym typeface="Consolas"/>
+              </a:rPr>
+              <a:t>quero</a:t>
+            </a:r>
+            <a:r>
+              <a:rPr lang="en-GB" dirty="0">
+                <a:latin typeface="Consolas"/>
+                <a:ea typeface="Consolas"/>
+                <a:cs typeface="Consolas"/>
+                <a:sym typeface="Consolas"/>
+              </a:rPr>
+              <a:t> </a:t>
+            </a:r>
+            <a:r>
+              <a:rPr lang="en-GB" dirty="0" err="1">
+                <a:latin typeface="Consolas"/>
+                <a:ea typeface="Consolas"/>
+                <a:cs typeface="Consolas"/>
+                <a:sym typeface="Consolas"/>
+              </a:rPr>
+              <a:t>implementar</a:t>
+            </a:r>
+            <a:r>
+              <a:rPr lang="en-GB" dirty="0">
+                <a:latin typeface="Consolas"/>
+                <a:ea typeface="Consolas"/>
+                <a:cs typeface="Consolas"/>
+                <a:sym typeface="Consolas"/>
+              </a:rPr>
+              <a:t> o novo </a:t>
+            </a:r>
+            <a:r>
+              <a:rPr lang="en-GB" dirty="0" err="1">
+                <a:latin typeface="Consolas"/>
+                <a:ea typeface="Consolas"/>
+                <a:cs typeface="Consolas"/>
+                <a:sym typeface="Consolas"/>
+              </a:rPr>
+              <a:t>mapa</a:t>
+            </a:r>
+            <a:r>
+              <a:rPr lang="en-GB" dirty="0">
+                <a:latin typeface="Consolas"/>
+                <a:ea typeface="Consolas"/>
+                <a:cs typeface="Consolas"/>
+                <a:sym typeface="Consolas"/>
+              </a:rPr>
+              <a:t> com </a:t>
+            </a:r>
+            <a:r>
+              <a:rPr lang="en-GB" dirty="0" err="1">
+                <a:latin typeface="Consolas"/>
+                <a:ea typeface="Consolas"/>
+                <a:cs typeface="Consolas"/>
+                <a:sym typeface="Consolas"/>
+              </a:rPr>
+              <a:t>objetivo</a:t>
+            </a:r>
+            <a:r>
+              <a:rPr lang="en-GB" dirty="0">
+                <a:latin typeface="Consolas"/>
+                <a:ea typeface="Consolas"/>
+                <a:cs typeface="Consolas"/>
+                <a:sym typeface="Consolas"/>
+              </a:rPr>
+              <a:t> </a:t>
+            </a:r>
+            <a:r>
+              <a:rPr lang="en-GB" dirty="0" err="1">
+                <a:latin typeface="Consolas"/>
+                <a:ea typeface="Consolas"/>
+                <a:cs typeface="Consolas"/>
+                <a:sym typeface="Consolas"/>
+              </a:rPr>
+              <a:t>semanal</a:t>
+            </a:r>
+            <a:r>
+              <a:rPr lang="en-GB" dirty="0">
+                <a:latin typeface="Consolas"/>
+                <a:ea typeface="Consolas"/>
+                <a:cs typeface="Consolas"/>
+                <a:sym typeface="Consolas"/>
+              </a:rPr>
+              <a:t> e ranking.</a:t>
+            </a:r>
+            <a:endParaRPr dirty="0">
+              <a:latin typeface="Consolas"/>
+              <a:ea typeface="Consolas"/>
+              <a:cs typeface="Consolas"/>
+              <a:sym typeface="Consolas"/>
+            </a:endParaRPr>
+          </a:p>
+        </p:txBody>
+      </p:sp>
+      <p:sp>
+        <p:nvSpPr>
+          <p:cNvPr id="20" name="Google Shape;92;p15">
+            <a:extLst>
+              <a:ext uri="{FF2B5EF4-FFF2-40B4-BE49-F238E27FC236}">
+                <a16:creationId xmlns:a16="http://schemas.microsoft.com/office/drawing/2014/main" id="{DE4E2D31-CAD4-24B8-C57E-9C8751C1E412}"/>
+              </a:ext>
+            </a:extLst>
+          </p:cNvPr>
+          <p:cNvSpPr/>
+          <p:nvPr/>
+        </p:nvSpPr>
+        <p:spPr>
+          <a:xfrm>
+            <a:off x="6220805" y="2536503"/>
+            <a:ext cx="2507514" cy="7634470"/>
+          </a:xfrm>
+          <a:prstGeom prst="roundRect">
+            <a:avLst>
+              <a:gd name="adj" fmla="val 16667"/>
+            </a:avLst>
+          </a:prstGeom>
+          <a:solidFill>
+            <a:srgbClr val="D9EAD3"/>
+          </a:solidFill>
+          <a:ln w="28575" cap="flat" cmpd="sng">
+            <a:solidFill>
+              <a:srgbClr val="274E13"/>
+            </a:solidFill>
+            <a:prstDash val="solid"/>
+            <a:round/>
+            <a:headEnd type="none" w="sm" len="sm"/>
+            <a:tailEnd type="none" w="sm" len="sm"/>
+          </a:ln>
+        </p:spPr>
+        <p:txBody>
+          <a:bodyPr spcFirstLastPara="1" wrap="square" lIns="91425" tIns="91425" rIns="91425" bIns="91425" anchor="t" anchorCtr="0">
+            <a:noAutofit/>
+          </a:bodyPr>
+          <a:lstStyle/>
+          <a:p>
+            <a:pPr lvl="0"/>
+            <a:r>
+              <a:rPr lang="en-GB" dirty="0">
+                <a:latin typeface="Consolas"/>
+                <a:ea typeface="Consolas"/>
+                <a:cs typeface="Consolas"/>
+                <a:sym typeface="Consolas"/>
+              </a:rPr>
+              <a:t>US2: Como </a:t>
+            </a:r>
+            <a:r>
+              <a:rPr lang="en-GB" dirty="0" err="1">
+                <a:latin typeface="Consolas"/>
+                <a:ea typeface="Consolas"/>
+                <a:cs typeface="Consolas"/>
+                <a:sym typeface="Consolas"/>
+              </a:rPr>
+              <a:t>membro</a:t>
+            </a:r>
+            <a:r>
+              <a:rPr lang="en-GB" dirty="0">
+                <a:latin typeface="Consolas"/>
+                <a:ea typeface="Consolas"/>
+                <a:cs typeface="Consolas"/>
+                <a:sym typeface="Consolas"/>
+              </a:rPr>
+              <a:t> da </a:t>
+            </a:r>
+            <a:r>
+              <a:rPr lang="en-GB" dirty="0" err="1">
+                <a:latin typeface="Consolas"/>
+                <a:ea typeface="Consolas"/>
+                <a:cs typeface="Consolas"/>
+                <a:sym typeface="Consolas"/>
+              </a:rPr>
+              <a:t>equipa</a:t>
+            </a:r>
+            <a:r>
+              <a:rPr lang="en-GB" dirty="0">
+                <a:latin typeface="Consolas"/>
+                <a:ea typeface="Consolas"/>
+                <a:cs typeface="Consolas"/>
+                <a:sym typeface="Consolas"/>
+              </a:rPr>
+              <a:t> </a:t>
+            </a:r>
+            <a:r>
+              <a:rPr lang="en-GB" dirty="0" err="1">
+                <a:latin typeface="Consolas"/>
+                <a:ea typeface="Consolas"/>
+                <a:cs typeface="Consolas"/>
+                <a:sym typeface="Consolas"/>
+              </a:rPr>
+              <a:t>quero</a:t>
+            </a:r>
+            <a:r>
+              <a:rPr lang="pt-PT" dirty="0">
+                <a:latin typeface="Consolas"/>
+                <a:ea typeface="Consolas"/>
+                <a:cs typeface="Consolas"/>
+                <a:sym typeface="Consolas"/>
+              </a:rPr>
+              <a:t> implementar a </a:t>
+            </a:r>
+            <a:r>
+              <a:rPr lang="pt-PT" dirty="0" err="1">
+                <a:latin typeface="Consolas"/>
+                <a:ea typeface="Consolas"/>
+                <a:cs typeface="Consolas"/>
+                <a:sym typeface="Consolas"/>
+              </a:rPr>
+              <a:t>Health</a:t>
+            </a:r>
+            <a:r>
+              <a:rPr lang="pt-PT" dirty="0">
+                <a:latin typeface="Consolas"/>
+                <a:ea typeface="Consolas"/>
+                <a:cs typeface="Consolas"/>
+                <a:sym typeface="Consolas"/>
+              </a:rPr>
+              <a:t> Bar de cada </a:t>
+            </a:r>
+            <a:r>
+              <a:rPr lang="pt-PT" dirty="0" err="1">
+                <a:latin typeface="Consolas"/>
+                <a:ea typeface="Consolas"/>
+                <a:cs typeface="Consolas"/>
+                <a:sym typeface="Consolas"/>
+              </a:rPr>
+              <a:t>wave</a:t>
+            </a:r>
+            <a:r>
+              <a:rPr lang="pt-PT" dirty="0">
+                <a:latin typeface="Consolas"/>
+                <a:ea typeface="Consolas"/>
+                <a:cs typeface="Consolas"/>
+                <a:sym typeface="Consolas"/>
+              </a:rPr>
+              <a:t> de inimigos.</a:t>
+            </a:r>
+            <a:endParaRPr dirty="0">
+              <a:latin typeface="Consolas"/>
+              <a:ea typeface="Consolas"/>
+              <a:cs typeface="Consolas"/>
+              <a:sym typeface="Consolas"/>
+            </a:endParaRPr>
+          </a:p>
+        </p:txBody>
+      </p:sp>
+      <p:sp>
+        <p:nvSpPr>
+          <p:cNvPr id="21" name="Google Shape;92;p15">
+            <a:extLst>
+              <a:ext uri="{FF2B5EF4-FFF2-40B4-BE49-F238E27FC236}">
+                <a16:creationId xmlns:a16="http://schemas.microsoft.com/office/drawing/2014/main" id="{1FA25614-593C-60DA-A508-81C3971596F3}"/>
+              </a:ext>
+            </a:extLst>
+          </p:cNvPr>
+          <p:cNvSpPr/>
+          <p:nvPr/>
+        </p:nvSpPr>
+        <p:spPr>
+          <a:xfrm>
+            <a:off x="6294173" y="3994181"/>
+            <a:ext cx="2548762" cy="6176792"/>
+          </a:xfrm>
+          <a:prstGeom prst="roundRect">
+            <a:avLst>
+              <a:gd name="adj" fmla="val 16667"/>
+            </a:avLst>
+          </a:prstGeom>
+          <a:solidFill>
+            <a:srgbClr val="D9EAD3"/>
+          </a:solidFill>
+          <a:ln w="28575" cap="flat" cmpd="sng">
+            <a:solidFill>
+              <a:srgbClr val="274E13"/>
+            </a:solidFill>
+            <a:prstDash val="solid"/>
+            <a:round/>
+            <a:headEnd type="none" w="sm" len="sm"/>
+            <a:tailEnd type="none" w="sm" len="sm"/>
+          </a:ln>
+        </p:spPr>
+        <p:txBody>
+          <a:bodyPr spcFirstLastPara="1" wrap="square" lIns="91425" tIns="91425" rIns="91425" bIns="91425" anchor="t" anchorCtr="0">
+            <a:noAutofit/>
+          </a:bodyPr>
+          <a:lstStyle/>
+          <a:p>
+            <a:pPr lvl="0"/>
+            <a:r>
+              <a:rPr lang="en-GB" dirty="0">
+                <a:latin typeface="Consolas"/>
+                <a:ea typeface="Consolas"/>
+                <a:cs typeface="Consolas"/>
+                <a:sym typeface="Consolas"/>
+              </a:rPr>
+              <a:t>US3: Como </a:t>
+            </a:r>
+            <a:r>
+              <a:rPr lang="en-GB" dirty="0" err="1">
+                <a:latin typeface="Consolas"/>
+                <a:ea typeface="Consolas"/>
+                <a:cs typeface="Consolas"/>
+                <a:sym typeface="Consolas"/>
+              </a:rPr>
+              <a:t>membro</a:t>
+            </a:r>
+            <a:r>
+              <a:rPr lang="en-GB" dirty="0">
+                <a:latin typeface="Consolas"/>
+                <a:ea typeface="Consolas"/>
+                <a:cs typeface="Consolas"/>
+                <a:sym typeface="Consolas"/>
+              </a:rPr>
+              <a:t> da </a:t>
+            </a:r>
+            <a:r>
+              <a:rPr lang="en-GB" dirty="0" err="1">
+                <a:latin typeface="Consolas"/>
+                <a:ea typeface="Consolas"/>
+                <a:cs typeface="Consolas"/>
+                <a:sym typeface="Consolas"/>
+              </a:rPr>
+              <a:t>equipa</a:t>
+            </a:r>
+            <a:r>
+              <a:rPr lang="en-GB" dirty="0">
+                <a:latin typeface="Consolas"/>
+                <a:ea typeface="Consolas"/>
+                <a:cs typeface="Consolas"/>
+                <a:sym typeface="Consolas"/>
+              </a:rPr>
+              <a:t> </a:t>
+            </a:r>
+            <a:r>
+              <a:rPr lang="en-GB" dirty="0" err="1">
+                <a:latin typeface="Consolas"/>
+                <a:ea typeface="Consolas"/>
+                <a:cs typeface="Consolas"/>
+                <a:sym typeface="Consolas"/>
+              </a:rPr>
+              <a:t>quero</a:t>
+            </a:r>
+            <a:r>
+              <a:rPr lang="pt-PT" dirty="0">
+                <a:latin typeface="Consolas"/>
+                <a:ea typeface="Consolas"/>
+                <a:cs typeface="Consolas"/>
+                <a:sym typeface="Consolas"/>
+              </a:rPr>
+              <a:t> implementar as diferentes condições climatéricas.</a:t>
+            </a:r>
+          </a:p>
+        </p:txBody>
+      </p:sp>
+      <p:sp>
+        <p:nvSpPr>
+          <p:cNvPr id="26" name="Google Shape;121;p16">
+            <a:extLst>
+              <a:ext uri="{FF2B5EF4-FFF2-40B4-BE49-F238E27FC236}">
+                <a16:creationId xmlns:a16="http://schemas.microsoft.com/office/drawing/2014/main" id="{28293602-41D8-E9EB-6BC0-B91B22B30CA3}"/>
+              </a:ext>
+            </a:extLst>
+          </p:cNvPr>
+          <p:cNvSpPr/>
+          <p:nvPr/>
+        </p:nvSpPr>
+        <p:spPr>
+          <a:xfrm>
+            <a:off x="12423686" y="8891469"/>
+            <a:ext cx="2410800" cy="1215821"/>
+          </a:xfrm>
+          <a:prstGeom prst="roundRect">
+            <a:avLst>
+              <a:gd name="adj" fmla="val 16667"/>
+            </a:avLst>
+          </a:prstGeom>
+          <a:solidFill>
+            <a:srgbClr val="D0E0E3"/>
+          </a:solidFill>
+          <a:ln w="28575" cap="flat" cmpd="sng">
+            <a:solidFill>
+              <a:srgbClr val="134F5C"/>
+            </a:solidFill>
+            <a:prstDash val="solid"/>
+            <a:round/>
+            <a:headEnd type="none" w="sm" len="sm"/>
+            <a:tailEnd type="none" w="sm" len="sm"/>
+          </a:ln>
+        </p:spPr>
+        <p:txBody>
+          <a:bodyPr spcFirstLastPara="1" wrap="square" lIns="91425" tIns="91425" rIns="91425" bIns="91425" anchor="t" anchorCtr="0">
+            <a:noAutofit/>
+          </a:bodyPr>
+          <a:lstStyle/>
+          <a:p>
+            <a:r>
+              <a:rPr lang="pt-PT" dirty="0">
+                <a:latin typeface="Consolas"/>
+                <a:ea typeface="Consolas"/>
+                <a:cs typeface="Consolas"/>
+                <a:sym typeface="Consolas"/>
+              </a:rPr>
+              <a:t>T2: Implementar a </a:t>
+            </a:r>
+            <a:r>
+              <a:rPr lang="pt-PT" dirty="0" err="1">
+                <a:latin typeface="Consolas"/>
+                <a:ea typeface="Consolas"/>
+                <a:cs typeface="Consolas"/>
+                <a:sym typeface="Consolas"/>
+              </a:rPr>
+              <a:t>Health</a:t>
+            </a:r>
+            <a:r>
+              <a:rPr lang="pt-PT" dirty="0">
+                <a:latin typeface="Consolas"/>
+                <a:ea typeface="Consolas"/>
+                <a:cs typeface="Consolas"/>
+                <a:sym typeface="Consolas"/>
+              </a:rPr>
+              <a:t> Bar de cada </a:t>
+            </a:r>
+            <a:r>
+              <a:rPr lang="pt-PT" dirty="0" err="1">
+                <a:latin typeface="Consolas"/>
+                <a:ea typeface="Consolas"/>
+                <a:cs typeface="Consolas"/>
+                <a:sym typeface="Consolas"/>
+              </a:rPr>
+              <a:t>wave</a:t>
+            </a:r>
+            <a:r>
+              <a:rPr lang="pt-PT" dirty="0">
+                <a:latin typeface="Consolas"/>
+                <a:ea typeface="Consolas"/>
+                <a:cs typeface="Consolas"/>
+                <a:sym typeface="Consolas"/>
+              </a:rPr>
+              <a:t> de inimigos.</a:t>
+            </a:r>
+          </a:p>
+          <a:p>
+            <a:r>
+              <a:rPr lang="en-GB" dirty="0">
+                <a:latin typeface="Consolas"/>
+                <a:ea typeface="Consolas"/>
+                <a:cs typeface="Consolas"/>
+                <a:sym typeface="Consolas"/>
+              </a:rPr>
+              <a:t> </a:t>
+            </a:r>
+            <a:br>
+              <a:rPr lang="en-GB" dirty="0">
+                <a:latin typeface="Consolas"/>
+                <a:ea typeface="Consolas"/>
+                <a:cs typeface="Consolas"/>
+                <a:sym typeface="Consolas"/>
+              </a:rPr>
+            </a:br>
+            <a:br>
+              <a:rPr lang="en-GB" dirty="0">
+                <a:latin typeface="Consolas"/>
+                <a:ea typeface="Consolas"/>
+                <a:cs typeface="Consolas"/>
+                <a:sym typeface="Consolas"/>
+              </a:rPr>
+            </a:br>
+            <a:endParaRPr lang="en-GB" dirty="0">
+              <a:latin typeface="Consolas"/>
+              <a:ea typeface="Consolas"/>
+              <a:cs typeface="Consolas"/>
+              <a:sym typeface="Consolas"/>
+            </a:endParaRPr>
+          </a:p>
+          <a:p>
+            <a:pPr marL="0" lvl="0" indent="0" algn="l" rtl="0">
+              <a:spcBef>
+                <a:spcPts val="0"/>
+              </a:spcBef>
+              <a:spcAft>
+                <a:spcPts val="0"/>
+              </a:spcAft>
+              <a:buNone/>
+            </a:pPr>
+            <a:endParaRPr dirty="0">
+              <a:latin typeface="Consolas"/>
+              <a:ea typeface="Consolas"/>
+              <a:cs typeface="Consolas"/>
+              <a:sym typeface="Consolas"/>
+            </a:endParaRPr>
+          </a:p>
+        </p:txBody>
+      </p:sp>
+      <p:sp>
+        <p:nvSpPr>
+          <p:cNvPr id="27" name="Google Shape;121;p16">
+            <a:extLst>
+              <a:ext uri="{FF2B5EF4-FFF2-40B4-BE49-F238E27FC236}">
+                <a16:creationId xmlns:a16="http://schemas.microsoft.com/office/drawing/2014/main" id="{1A33A008-7FD8-F8C0-C061-C035C1E92AC3}"/>
+              </a:ext>
+            </a:extLst>
+          </p:cNvPr>
+          <p:cNvSpPr/>
+          <p:nvPr/>
+        </p:nvSpPr>
+        <p:spPr>
+          <a:xfrm>
+            <a:off x="12423686" y="5744289"/>
+            <a:ext cx="2410800" cy="1215821"/>
+          </a:xfrm>
+          <a:prstGeom prst="roundRect">
+            <a:avLst>
+              <a:gd name="adj" fmla="val 16667"/>
+            </a:avLst>
+          </a:prstGeom>
+          <a:solidFill>
+            <a:srgbClr val="D0E0E3"/>
+          </a:solidFill>
+          <a:ln w="28575" cap="flat" cmpd="sng">
+            <a:solidFill>
+              <a:srgbClr val="134F5C"/>
+            </a:solidFill>
+            <a:prstDash val="solid"/>
+            <a:round/>
+            <a:headEnd type="none" w="sm" len="sm"/>
+            <a:tailEnd type="none" w="sm" len="sm"/>
+          </a:ln>
+        </p:spPr>
+        <p:txBody>
+          <a:bodyPr spcFirstLastPara="1" wrap="square" lIns="91425" tIns="91425" rIns="91425" bIns="91425" anchor="t" anchorCtr="0">
+            <a:noAutofit/>
+          </a:bodyPr>
+          <a:lstStyle/>
+          <a:p>
+            <a:r>
+              <a:rPr lang="pt-PT" dirty="0">
+                <a:latin typeface="Consolas"/>
+                <a:ea typeface="Consolas"/>
+                <a:cs typeface="Consolas"/>
+                <a:sym typeface="Consolas"/>
+              </a:rPr>
+              <a:t>T2: Implementar a </a:t>
+            </a:r>
+            <a:r>
+              <a:rPr lang="pt-PT" dirty="0" err="1">
+                <a:latin typeface="Consolas"/>
+                <a:ea typeface="Consolas"/>
+                <a:cs typeface="Consolas"/>
+                <a:sym typeface="Consolas"/>
+              </a:rPr>
+              <a:t>Health</a:t>
+            </a:r>
+            <a:r>
+              <a:rPr lang="pt-PT" dirty="0">
+                <a:latin typeface="Consolas"/>
+                <a:ea typeface="Consolas"/>
+                <a:cs typeface="Consolas"/>
+                <a:sym typeface="Consolas"/>
+              </a:rPr>
+              <a:t> Bar de cada </a:t>
+            </a:r>
+            <a:r>
+              <a:rPr lang="pt-PT" dirty="0" err="1">
+                <a:latin typeface="Consolas"/>
+                <a:ea typeface="Consolas"/>
+                <a:cs typeface="Consolas"/>
+                <a:sym typeface="Consolas"/>
+              </a:rPr>
+              <a:t>wave</a:t>
+            </a:r>
+            <a:r>
+              <a:rPr lang="pt-PT" dirty="0">
+                <a:latin typeface="Consolas"/>
+                <a:ea typeface="Consolas"/>
+                <a:cs typeface="Consolas"/>
+                <a:sym typeface="Consolas"/>
+              </a:rPr>
+              <a:t> de inimigos.</a:t>
+            </a:r>
+          </a:p>
+          <a:p>
+            <a:r>
+              <a:rPr lang="en-GB" dirty="0">
+                <a:latin typeface="Consolas"/>
+                <a:ea typeface="Consolas"/>
+                <a:cs typeface="Consolas"/>
+                <a:sym typeface="Consolas"/>
+              </a:rPr>
+              <a:t> </a:t>
+            </a:r>
+            <a:br>
+              <a:rPr lang="en-GB" dirty="0">
+                <a:latin typeface="Consolas"/>
+                <a:ea typeface="Consolas"/>
+                <a:cs typeface="Consolas"/>
+                <a:sym typeface="Consolas"/>
+              </a:rPr>
+            </a:br>
+            <a:br>
+              <a:rPr lang="en-GB" dirty="0">
+                <a:latin typeface="Consolas"/>
+                <a:ea typeface="Consolas"/>
+                <a:cs typeface="Consolas"/>
+                <a:sym typeface="Consolas"/>
+              </a:rPr>
+            </a:br>
+            <a:endParaRPr lang="en-GB" dirty="0">
+              <a:latin typeface="Consolas"/>
+              <a:ea typeface="Consolas"/>
+              <a:cs typeface="Consolas"/>
+              <a:sym typeface="Consolas"/>
+            </a:endParaRPr>
+          </a:p>
+          <a:p>
+            <a:pPr marL="0" lvl="0" indent="0" algn="l" rtl="0">
+              <a:spcBef>
+                <a:spcPts val="0"/>
+              </a:spcBef>
+              <a:spcAft>
+                <a:spcPts val="0"/>
+              </a:spcAft>
+              <a:buNone/>
+            </a:pPr>
+            <a:endParaRPr dirty="0">
+              <a:latin typeface="Consolas"/>
+              <a:ea typeface="Consolas"/>
+              <a:cs typeface="Consolas"/>
+              <a:sym typeface="Consolas"/>
+            </a:endParaRPr>
+          </a:p>
+        </p:txBody>
+      </p:sp>
+      <p:sp>
+        <p:nvSpPr>
+          <p:cNvPr id="28" name="Google Shape;121;p16">
+            <a:extLst>
+              <a:ext uri="{FF2B5EF4-FFF2-40B4-BE49-F238E27FC236}">
+                <a16:creationId xmlns:a16="http://schemas.microsoft.com/office/drawing/2014/main" id="{7B5E1320-893A-F6FF-43B7-F806B0471CE6}"/>
+              </a:ext>
+            </a:extLst>
+          </p:cNvPr>
+          <p:cNvSpPr/>
+          <p:nvPr/>
+        </p:nvSpPr>
+        <p:spPr>
+          <a:xfrm>
+            <a:off x="12395940" y="4165308"/>
+            <a:ext cx="2410800" cy="749592"/>
+          </a:xfrm>
+          <a:prstGeom prst="roundRect">
+            <a:avLst>
+              <a:gd name="adj" fmla="val 16667"/>
+            </a:avLst>
+          </a:prstGeom>
+          <a:solidFill>
+            <a:srgbClr val="D0E0E3"/>
+          </a:solidFill>
+          <a:ln w="28575" cap="flat" cmpd="sng">
+            <a:solidFill>
+              <a:srgbClr val="134F5C"/>
+            </a:solidFill>
+            <a:prstDash val="solid"/>
+            <a:round/>
+            <a:headEnd type="none" w="sm" len="sm"/>
+            <a:tailEnd type="none" w="sm" len="sm"/>
+          </a:ln>
+        </p:spPr>
+        <p:txBody>
+          <a:bodyPr spcFirstLastPara="1" wrap="square" lIns="91425" tIns="91425" rIns="91425" bIns="91425" anchor="t" anchorCtr="0">
+            <a:noAutofit/>
+          </a:bodyPr>
+          <a:lstStyle/>
+          <a:p>
+            <a:r>
+              <a:rPr lang="pt-PT" dirty="0">
+                <a:latin typeface="Consolas"/>
+                <a:ea typeface="Consolas"/>
+                <a:cs typeface="Consolas"/>
+                <a:sym typeface="Consolas"/>
+              </a:rPr>
+              <a:t>T3: Implementar a parte do Terramoto.</a:t>
+            </a:r>
+          </a:p>
+          <a:p>
+            <a:r>
+              <a:rPr lang="en-GB" dirty="0">
+                <a:latin typeface="Consolas"/>
+                <a:ea typeface="Consolas"/>
+                <a:cs typeface="Consolas"/>
+                <a:sym typeface="Consolas"/>
+              </a:rPr>
+              <a:t> </a:t>
+            </a:r>
+            <a:br>
+              <a:rPr lang="en-GB" dirty="0">
+                <a:latin typeface="Consolas"/>
+                <a:ea typeface="Consolas"/>
+                <a:cs typeface="Consolas"/>
+                <a:sym typeface="Consolas"/>
+              </a:rPr>
+            </a:br>
+            <a:br>
+              <a:rPr lang="en-GB" dirty="0">
+                <a:latin typeface="Consolas"/>
+                <a:ea typeface="Consolas"/>
+                <a:cs typeface="Consolas"/>
+                <a:sym typeface="Consolas"/>
+              </a:rPr>
+            </a:br>
+            <a:endParaRPr lang="en-GB" dirty="0">
+              <a:latin typeface="Consolas"/>
+              <a:ea typeface="Consolas"/>
+              <a:cs typeface="Consolas"/>
+              <a:sym typeface="Consolas"/>
+            </a:endParaRPr>
+          </a:p>
+          <a:p>
+            <a:pPr marL="0" lvl="0" indent="0" algn="l" rtl="0">
+              <a:spcBef>
+                <a:spcPts val="0"/>
+              </a:spcBef>
+              <a:spcAft>
+                <a:spcPts val="0"/>
+              </a:spcAft>
+              <a:buNone/>
+            </a:pPr>
+            <a:endParaRPr dirty="0">
+              <a:latin typeface="Consolas"/>
+              <a:ea typeface="Consolas"/>
+              <a:cs typeface="Consolas"/>
+              <a:sym typeface="Consolas"/>
+            </a:endParaRPr>
+          </a:p>
+        </p:txBody>
+      </p:sp>
+      <p:sp>
+        <p:nvSpPr>
+          <p:cNvPr id="30" name="Google Shape;121;p16">
+            <a:extLst>
+              <a:ext uri="{FF2B5EF4-FFF2-40B4-BE49-F238E27FC236}">
+                <a16:creationId xmlns:a16="http://schemas.microsoft.com/office/drawing/2014/main" id="{BAB7DB89-CEFF-D3CD-C38E-B9CB6164CBE2}"/>
+              </a:ext>
+            </a:extLst>
+          </p:cNvPr>
+          <p:cNvSpPr/>
+          <p:nvPr/>
+        </p:nvSpPr>
+        <p:spPr>
+          <a:xfrm>
+            <a:off x="15532407" y="7321727"/>
+            <a:ext cx="2410800" cy="1215821"/>
+          </a:xfrm>
+          <a:prstGeom prst="roundRect">
+            <a:avLst>
+              <a:gd name="adj" fmla="val 16667"/>
+            </a:avLst>
+          </a:prstGeom>
+          <a:solidFill>
+            <a:srgbClr val="D0E0E3"/>
+          </a:solidFill>
+          <a:ln w="28575" cap="flat" cmpd="sng">
+            <a:solidFill>
+              <a:srgbClr val="134F5C"/>
+            </a:solidFill>
+            <a:prstDash val="solid"/>
+            <a:round/>
+            <a:headEnd type="none" w="sm" len="sm"/>
+            <a:tailEnd type="none" w="sm" len="sm"/>
+          </a:ln>
+        </p:spPr>
+        <p:txBody>
+          <a:bodyPr spcFirstLastPara="1" wrap="square" lIns="91425" tIns="91425" rIns="91425" bIns="91425" anchor="t" anchorCtr="0">
+            <a:noAutofit/>
+          </a:bodyPr>
+          <a:lstStyle/>
+          <a:p>
+            <a:r>
+              <a:rPr lang="pt-PT" dirty="0">
+                <a:latin typeface="Consolas"/>
+                <a:ea typeface="Consolas"/>
+                <a:cs typeface="Consolas"/>
+                <a:sym typeface="Consolas"/>
+              </a:rPr>
+              <a:t>T3: Implementar a parte do Meteorito. </a:t>
+            </a:r>
+          </a:p>
+          <a:p>
+            <a:r>
+              <a:rPr lang="en-GB" dirty="0">
+                <a:latin typeface="Consolas"/>
+                <a:ea typeface="Consolas"/>
+                <a:cs typeface="Consolas"/>
+                <a:sym typeface="Consolas"/>
+              </a:rPr>
+              <a:t> </a:t>
+            </a:r>
+            <a:br>
+              <a:rPr lang="en-GB" dirty="0">
+                <a:latin typeface="Consolas"/>
+                <a:ea typeface="Consolas"/>
+                <a:cs typeface="Consolas"/>
+                <a:sym typeface="Consolas"/>
+              </a:rPr>
+            </a:br>
+            <a:br>
+              <a:rPr lang="en-GB" dirty="0">
+                <a:latin typeface="Consolas"/>
+                <a:ea typeface="Consolas"/>
+                <a:cs typeface="Consolas"/>
+                <a:sym typeface="Consolas"/>
+              </a:rPr>
+            </a:br>
+            <a:endParaRPr lang="en-GB" dirty="0">
+              <a:latin typeface="Consolas"/>
+              <a:ea typeface="Consolas"/>
+              <a:cs typeface="Consolas"/>
+              <a:sym typeface="Consolas"/>
+            </a:endParaRPr>
+          </a:p>
+          <a:p>
+            <a:pPr marL="0" lvl="0" indent="0" algn="l" rtl="0">
+              <a:spcBef>
+                <a:spcPts val="0"/>
+              </a:spcBef>
+              <a:spcAft>
+                <a:spcPts val="0"/>
+              </a:spcAft>
+              <a:buNone/>
+            </a:pPr>
+            <a:endParaRPr dirty="0">
+              <a:latin typeface="Consolas"/>
+              <a:ea typeface="Consolas"/>
+              <a:cs typeface="Consolas"/>
+              <a:sym typeface="Consolas"/>
+            </a:endParaRPr>
+          </a:p>
+        </p:txBody>
+      </p:sp>
+      <p:sp>
+        <p:nvSpPr>
+          <p:cNvPr id="8" name="Google Shape;121;p16">
+            <a:extLst>
+              <a:ext uri="{FF2B5EF4-FFF2-40B4-BE49-F238E27FC236}">
+                <a16:creationId xmlns:a16="http://schemas.microsoft.com/office/drawing/2014/main" id="{CFB53F3B-A97C-49DA-93E1-8B1663361130}"/>
+              </a:ext>
+            </a:extLst>
+          </p:cNvPr>
+          <p:cNvSpPr/>
+          <p:nvPr/>
+        </p:nvSpPr>
+        <p:spPr>
+          <a:xfrm>
+            <a:off x="12395940" y="4784311"/>
+            <a:ext cx="2410800" cy="749592"/>
+          </a:xfrm>
+          <a:prstGeom prst="roundRect">
+            <a:avLst>
+              <a:gd name="adj" fmla="val 16667"/>
+            </a:avLst>
+          </a:prstGeom>
+          <a:solidFill>
+            <a:srgbClr val="D0E0E3"/>
+          </a:solidFill>
+          <a:ln w="28575" cap="flat" cmpd="sng">
+            <a:solidFill>
+              <a:srgbClr val="134F5C"/>
+            </a:solidFill>
+            <a:prstDash val="solid"/>
+            <a:round/>
+            <a:headEnd type="none" w="sm" len="sm"/>
+            <a:tailEnd type="none" w="sm" len="sm"/>
+          </a:ln>
+        </p:spPr>
+        <p:txBody>
+          <a:bodyPr spcFirstLastPara="1" wrap="square" lIns="91425" tIns="91425" rIns="91425" bIns="91425" anchor="t" anchorCtr="0">
+            <a:noAutofit/>
+          </a:bodyPr>
+          <a:lstStyle/>
+          <a:p>
+            <a:r>
+              <a:rPr lang="pt-PT" dirty="0">
+                <a:latin typeface="Consolas"/>
+                <a:ea typeface="Consolas"/>
+                <a:cs typeface="Consolas"/>
+                <a:sym typeface="Consolas"/>
+              </a:rPr>
+              <a:t>T3: Implementar a parte do Tsunami.</a:t>
+            </a:r>
+          </a:p>
+          <a:p>
+            <a:r>
+              <a:rPr lang="en-GB" dirty="0">
+                <a:latin typeface="Consolas"/>
+                <a:ea typeface="Consolas"/>
+                <a:cs typeface="Consolas"/>
+                <a:sym typeface="Consolas"/>
+              </a:rPr>
+              <a:t> </a:t>
+            </a:r>
+            <a:br>
+              <a:rPr lang="en-GB" dirty="0">
+                <a:latin typeface="Consolas"/>
+                <a:ea typeface="Consolas"/>
+                <a:cs typeface="Consolas"/>
+                <a:sym typeface="Consolas"/>
+              </a:rPr>
+            </a:br>
+            <a:br>
+              <a:rPr lang="en-GB" dirty="0">
+                <a:latin typeface="Consolas"/>
+                <a:ea typeface="Consolas"/>
+                <a:cs typeface="Consolas"/>
+                <a:sym typeface="Consolas"/>
+              </a:rPr>
+            </a:br>
+            <a:endParaRPr lang="en-GB" dirty="0">
+              <a:latin typeface="Consolas"/>
+              <a:ea typeface="Consolas"/>
+              <a:cs typeface="Consolas"/>
+              <a:sym typeface="Consolas"/>
+            </a:endParaRPr>
+          </a:p>
+          <a:p>
+            <a:pPr marL="0" lvl="0" indent="0" algn="l" rtl="0">
+              <a:spcBef>
+                <a:spcPts val="0"/>
+              </a:spcBef>
+              <a:spcAft>
+                <a:spcPts val="0"/>
+              </a:spcAft>
+              <a:buNone/>
+            </a:pPr>
+            <a:endParaRPr dirty="0">
+              <a:latin typeface="Consolas"/>
+              <a:ea typeface="Consolas"/>
+              <a:cs typeface="Consolas"/>
+              <a:sym typeface="Consolas"/>
+            </a:endParaRPr>
+          </a:p>
+        </p:txBody>
+      </p:sp>
+      <p:sp>
+        <p:nvSpPr>
+          <p:cNvPr id="10" name="Google Shape;121;p16">
+            <a:extLst>
+              <a:ext uri="{FF2B5EF4-FFF2-40B4-BE49-F238E27FC236}">
+                <a16:creationId xmlns:a16="http://schemas.microsoft.com/office/drawing/2014/main" id="{941860DA-5F6B-820F-4866-958C97D3AF99}"/>
+              </a:ext>
+            </a:extLst>
+          </p:cNvPr>
+          <p:cNvSpPr/>
+          <p:nvPr/>
+        </p:nvSpPr>
+        <p:spPr>
+          <a:xfrm>
+            <a:off x="15532407" y="1078588"/>
+            <a:ext cx="2410800" cy="2657243"/>
+          </a:xfrm>
+          <a:prstGeom prst="roundRect">
+            <a:avLst>
+              <a:gd name="adj" fmla="val 16667"/>
+            </a:avLst>
+          </a:prstGeom>
+          <a:solidFill>
+            <a:srgbClr val="D0E0E3"/>
+          </a:solidFill>
+          <a:ln w="28575" cap="flat" cmpd="sng">
+            <a:solidFill>
+              <a:srgbClr val="134F5C"/>
+            </a:solidFill>
+            <a:prstDash val="solid"/>
+            <a:round/>
+            <a:headEnd type="none" w="sm" len="sm"/>
+            <a:tailEnd type="none" w="sm" len="sm"/>
+          </a:ln>
+        </p:spPr>
+        <p:txBody>
+          <a:bodyPr spcFirstLastPara="1" wrap="square" lIns="91425" tIns="91425" rIns="91425" bIns="91425" anchor="t" anchorCtr="0">
+            <a:noAutofit/>
+          </a:bodyPr>
+          <a:lstStyle/>
+          <a:p>
+            <a:r>
+              <a:rPr lang="en-GB" dirty="0">
+                <a:latin typeface="Consolas"/>
+                <a:ea typeface="Consolas"/>
+                <a:cs typeface="Consolas"/>
+                <a:sym typeface="Consolas"/>
+              </a:rPr>
+              <a:t>T1: </a:t>
+            </a:r>
+            <a:r>
+              <a:rPr lang="pt-PT" dirty="0">
+                <a:latin typeface="Consolas"/>
+                <a:ea typeface="Consolas"/>
+                <a:cs typeface="Consolas"/>
+                <a:sym typeface="Consolas"/>
+              </a:rPr>
+              <a:t>Fazer Interface de Rankings e “jogar Desafio Semanal”</a:t>
+            </a:r>
+            <a:br>
+              <a:rPr lang="en-GB" dirty="0">
+                <a:latin typeface="Consolas"/>
+                <a:ea typeface="Consolas"/>
+                <a:cs typeface="Consolas"/>
+                <a:sym typeface="Consolas"/>
+              </a:rPr>
+            </a:br>
+            <a:br>
+              <a:rPr lang="en-GB" dirty="0">
+                <a:latin typeface="Consolas"/>
+                <a:ea typeface="Consolas"/>
+                <a:cs typeface="Consolas"/>
+                <a:sym typeface="Consolas"/>
+              </a:rPr>
+            </a:br>
+            <a:endParaRPr lang="en-GB" dirty="0">
+              <a:latin typeface="Consolas"/>
+              <a:ea typeface="Consolas"/>
+              <a:cs typeface="Consolas"/>
+              <a:sym typeface="Consolas"/>
+            </a:endParaRPr>
+          </a:p>
+          <a:p>
+            <a:pPr marL="0" lvl="0" indent="0" algn="l" rtl="0">
+              <a:spcBef>
+                <a:spcPts val="0"/>
+              </a:spcBef>
+              <a:spcAft>
+                <a:spcPts val="0"/>
+              </a:spcAft>
+              <a:buNone/>
+            </a:pPr>
+            <a:endParaRPr dirty="0">
+              <a:latin typeface="Consolas"/>
+              <a:ea typeface="Consolas"/>
+              <a:cs typeface="Consolas"/>
+              <a:sym typeface="Consolas"/>
+            </a:endParaRPr>
+          </a:p>
+        </p:txBody>
+      </p:sp>
+    </p:spTree>
+    <p:extLst>
+      <p:ext uri="{BB962C8B-B14F-4D97-AF65-F5344CB8AC3E}">
+        <p14:creationId xmlns:p14="http://schemas.microsoft.com/office/powerpoint/2010/main" val="2792438931"/>
+      </p:ext>
+    </p:extLst>
   </p:cSld>
   <p:clrMapOvr>
     <a:masterClrMapping/>

--- a/SE202526/Management/Scrum Board.pptx
+++ b/SE202526/Management/Scrum Board.pptx
@@ -5,7 +5,7 @@
     <p:sldMasterId id="2147483659" r:id="rId1"/>
   </p:sldMasterIdLst>
   <p:notesMasterIdLst>
-    <p:notesMasterId r:id="rId22"/>
+    <p:notesMasterId r:id="rId24"/>
   </p:notesMasterIdLst>
   <p:sldIdLst>
     <p:sldId id="256" r:id="rId2"/>
@@ -28,6 +28,8 @@
     <p:sldId id="275" r:id="rId19"/>
     <p:sldId id="276" r:id="rId20"/>
     <p:sldId id="277" r:id="rId21"/>
+    <p:sldId id="279" r:id="rId22"/>
+    <p:sldId id="280" r:id="rId23"/>
   </p:sldIdLst>
   <p:sldSz cx="21599525" cy="10799763"/>
   <p:notesSz cx="6858000" cy="9144000"/>
@@ -2316,6 +2318,260 @@
     <p:extLst>
       <p:ext uri="{BB962C8B-B14F-4D97-AF65-F5344CB8AC3E}">
         <p14:creationId xmlns:p14="http://schemas.microsoft.com/office/powerpoint/2010/main" val="604953558"/>
+      </p:ext>
+    </p:extLst>
+  </p:cSld>
+  <p:clrMapOvr>
+    <a:masterClrMapping/>
+  </p:clrMapOvr>
+</p:notes>
+</file>
+
+<file path=ppt/notesSlides/notesSlide21.xml><?xml version="1.0" encoding="utf-8"?>
+<p:notes xmlns:a="http://schemas.openxmlformats.org/drawingml/2006/main" xmlns:r="http://schemas.openxmlformats.org/officeDocument/2006/relationships" xmlns:p="http://schemas.openxmlformats.org/presentationml/2006/main" showMasterSp="0" showMasterPhAnim="0">
+  <p:cSld>
+    <p:spTree>
+      <p:nvGrpSpPr>
+        <p:cNvPr id="1" name="Shape 217">
+          <a:extLst>
+            <a:ext uri="{FF2B5EF4-FFF2-40B4-BE49-F238E27FC236}">
+              <a16:creationId xmlns:a16="http://schemas.microsoft.com/office/drawing/2014/main" id="{99B1618B-27A0-70CC-95C7-0E6DB7D4254C}"/>
+            </a:ext>
+          </a:extLst>
+        </p:cNvPr>
+        <p:cNvGrpSpPr/>
+        <p:nvPr/>
+      </p:nvGrpSpPr>
+      <p:grpSpPr>
+        <a:xfrm>
+          <a:off x="0" y="0"/>
+          <a:ext cx="0" cy="0"/>
+          <a:chOff x="0" y="0"/>
+          <a:chExt cx="0" cy="0"/>
+        </a:xfrm>
+      </p:grpSpPr>
+      <p:sp>
+        <p:nvSpPr>
+          <p:cNvPr id="218" name="Google Shape;218;g3850b307b58_0_258:notes">
+            <a:extLst>
+              <a:ext uri="{FF2B5EF4-FFF2-40B4-BE49-F238E27FC236}">
+                <a16:creationId xmlns:a16="http://schemas.microsoft.com/office/drawing/2014/main" id="{E6BF7EC5-11DB-C986-C818-2CC28240D3CF}"/>
+              </a:ext>
+            </a:extLst>
+          </p:cNvPr>
+          <p:cNvSpPr>
+            <a:spLocks noGrp="1" noRot="1" noChangeAspect="1"/>
+          </p:cNvSpPr>
+          <p:nvPr>
+            <p:ph type="sldImg" idx="2"/>
+          </p:nvPr>
+        </p:nvSpPr>
+        <p:spPr>
+          <a:xfrm>
+            <a:off x="0" y="685800"/>
+            <a:ext cx="6858000" cy="3429000"/>
+          </a:xfrm>
+          <a:custGeom>
+            <a:avLst/>
+            <a:gdLst/>
+            <a:ahLst/>
+            <a:cxnLst/>
+            <a:rect l="l" t="t" r="r" b="b"/>
+            <a:pathLst>
+              <a:path w="120000" h="120000" extrusionOk="0">
+                <a:moveTo>
+                  <a:pt x="0" y="0"/>
+                </a:moveTo>
+                <a:lnTo>
+                  <a:pt x="120000" y="0"/>
+                </a:lnTo>
+                <a:lnTo>
+                  <a:pt x="120000" y="120000"/>
+                </a:lnTo>
+                <a:lnTo>
+                  <a:pt x="0" y="120000"/>
+                </a:lnTo>
+                <a:close/>
+              </a:path>
+            </a:pathLst>
+          </a:custGeom>
+        </p:spPr>
+      </p:sp>
+      <p:sp>
+        <p:nvSpPr>
+          <p:cNvPr id="219" name="Google Shape;219;g3850b307b58_0_258:notes">
+            <a:extLst>
+              <a:ext uri="{FF2B5EF4-FFF2-40B4-BE49-F238E27FC236}">
+                <a16:creationId xmlns:a16="http://schemas.microsoft.com/office/drawing/2014/main" id="{6854550A-FCCF-5D83-8AC0-2422D0BDBBDA}"/>
+              </a:ext>
+            </a:extLst>
+          </p:cNvPr>
+          <p:cNvSpPr txBox="1">
+            <a:spLocks noGrp="1"/>
+          </p:cNvSpPr>
+          <p:nvPr>
+            <p:ph type="body" idx="1"/>
+          </p:nvPr>
+        </p:nvSpPr>
+        <p:spPr>
+          <a:xfrm>
+            <a:off x="685800" y="4343400"/>
+            <a:ext cx="5486400" cy="4114800"/>
+          </a:xfrm>
+          <a:prstGeom prst="rect">
+            <a:avLst/>
+          </a:prstGeom>
+        </p:spPr>
+        <p:txBody>
+          <a:bodyPr spcFirstLastPara="1" wrap="square" lIns="91425" tIns="91425" rIns="91425" bIns="91425" anchor="t" anchorCtr="0">
+            <a:noAutofit/>
+          </a:bodyPr>
+          <a:lstStyle/>
+          <a:p>
+            <a:pPr marL="0" lvl="0" indent="0" algn="l" rtl="0">
+              <a:spcBef>
+                <a:spcPts val="0"/>
+              </a:spcBef>
+              <a:spcAft>
+                <a:spcPts val="0"/>
+              </a:spcAft>
+              <a:buNone/>
+            </a:pPr>
+            <a:endParaRPr/>
+          </a:p>
+        </p:txBody>
+      </p:sp>
+    </p:spTree>
+    <p:extLst>
+      <p:ext uri="{BB962C8B-B14F-4D97-AF65-F5344CB8AC3E}">
+        <p14:creationId xmlns:p14="http://schemas.microsoft.com/office/powerpoint/2010/main" val="3628573967"/>
+      </p:ext>
+    </p:extLst>
+  </p:cSld>
+  <p:clrMapOvr>
+    <a:masterClrMapping/>
+  </p:clrMapOvr>
+</p:notes>
+</file>
+
+<file path=ppt/notesSlides/notesSlide22.xml><?xml version="1.0" encoding="utf-8"?>
+<p:notes xmlns:a="http://schemas.openxmlformats.org/drawingml/2006/main" xmlns:r="http://schemas.openxmlformats.org/officeDocument/2006/relationships" xmlns:p="http://schemas.openxmlformats.org/presentationml/2006/main" showMasterSp="0" showMasterPhAnim="0">
+  <p:cSld>
+    <p:spTree>
+      <p:nvGrpSpPr>
+        <p:cNvPr id="1" name="Shape 186">
+          <a:extLst>
+            <a:ext uri="{FF2B5EF4-FFF2-40B4-BE49-F238E27FC236}">
+              <a16:creationId xmlns:a16="http://schemas.microsoft.com/office/drawing/2014/main" id="{E3B6E81E-3FBB-A8B8-B886-C0DE1288F7B6}"/>
+            </a:ext>
+          </a:extLst>
+        </p:cNvPr>
+        <p:cNvGrpSpPr/>
+        <p:nvPr/>
+      </p:nvGrpSpPr>
+      <p:grpSpPr>
+        <a:xfrm>
+          <a:off x="0" y="0"/>
+          <a:ext cx="0" cy="0"/>
+          <a:chOff x="0" y="0"/>
+          <a:chExt cx="0" cy="0"/>
+        </a:xfrm>
+      </p:grpSpPr>
+      <p:sp>
+        <p:nvSpPr>
+          <p:cNvPr id="187" name="Google Shape;187;g3850b307b58_0_218:notes">
+            <a:extLst>
+              <a:ext uri="{FF2B5EF4-FFF2-40B4-BE49-F238E27FC236}">
+                <a16:creationId xmlns:a16="http://schemas.microsoft.com/office/drawing/2014/main" id="{47E5CEE2-BC08-07F4-11B2-A005DBA96694}"/>
+              </a:ext>
+            </a:extLst>
+          </p:cNvPr>
+          <p:cNvSpPr>
+            <a:spLocks noGrp="1" noRot="1" noChangeAspect="1"/>
+          </p:cNvSpPr>
+          <p:nvPr>
+            <p:ph type="sldImg" idx="2"/>
+          </p:nvPr>
+        </p:nvSpPr>
+        <p:spPr>
+          <a:xfrm>
+            <a:off x="0" y="685800"/>
+            <a:ext cx="6858000" cy="3429000"/>
+          </a:xfrm>
+          <a:custGeom>
+            <a:avLst/>
+            <a:gdLst/>
+            <a:ahLst/>
+            <a:cxnLst/>
+            <a:rect l="l" t="t" r="r" b="b"/>
+            <a:pathLst>
+              <a:path w="120000" h="120000" extrusionOk="0">
+                <a:moveTo>
+                  <a:pt x="0" y="0"/>
+                </a:moveTo>
+                <a:lnTo>
+                  <a:pt x="120000" y="0"/>
+                </a:lnTo>
+                <a:lnTo>
+                  <a:pt x="120000" y="120000"/>
+                </a:lnTo>
+                <a:lnTo>
+                  <a:pt x="0" y="120000"/>
+                </a:lnTo>
+                <a:close/>
+              </a:path>
+            </a:pathLst>
+          </a:custGeom>
+        </p:spPr>
+      </p:sp>
+      <p:sp>
+        <p:nvSpPr>
+          <p:cNvPr id="188" name="Google Shape;188;g3850b307b58_0_218:notes">
+            <a:extLst>
+              <a:ext uri="{FF2B5EF4-FFF2-40B4-BE49-F238E27FC236}">
+                <a16:creationId xmlns:a16="http://schemas.microsoft.com/office/drawing/2014/main" id="{400FB9EA-44A4-A59D-B720-8FE2508A4D49}"/>
+              </a:ext>
+            </a:extLst>
+          </p:cNvPr>
+          <p:cNvSpPr txBox="1">
+            <a:spLocks noGrp="1"/>
+          </p:cNvSpPr>
+          <p:nvPr>
+            <p:ph type="body" idx="1"/>
+          </p:nvPr>
+        </p:nvSpPr>
+        <p:spPr>
+          <a:xfrm>
+            <a:off x="685800" y="4343400"/>
+            <a:ext cx="5486400" cy="4114800"/>
+          </a:xfrm>
+          <a:prstGeom prst="rect">
+            <a:avLst/>
+          </a:prstGeom>
+        </p:spPr>
+        <p:txBody>
+          <a:bodyPr spcFirstLastPara="1" wrap="square" lIns="91425" tIns="91425" rIns="91425" bIns="91425" anchor="t" anchorCtr="0">
+            <a:noAutofit/>
+          </a:bodyPr>
+          <a:lstStyle/>
+          <a:p>
+            <a:pPr marL="0" lvl="0" indent="0" algn="l" rtl="0">
+              <a:spcBef>
+                <a:spcPts val="0"/>
+              </a:spcBef>
+              <a:spcAft>
+                <a:spcPts val="0"/>
+              </a:spcAft>
+              <a:buNone/>
+            </a:pPr>
+            <a:endParaRPr/>
+          </a:p>
+        </p:txBody>
+      </p:sp>
+    </p:spTree>
+    <p:extLst>
+      <p:ext uri="{BB962C8B-B14F-4D97-AF65-F5344CB8AC3E}">
+        <p14:creationId xmlns:p14="http://schemas.microsoft.com/office/powerpoint/2010/main" val="2467119470"/>
       </p:ext>
     </p:extLst>
   </p:cSld>
@@ -28946,6 +29202,2919 @@
 </p:sld>
 </file>
 
+<file path=ppt/slides/slide21.xml><?xml version="1.0" encoding="utf-8"?>
+<p:sld xmlns:a="http://schemas.openxmlformats.org/drawingml/2006/main" xmlns:r="http://schemas.openxmlformats.org/officeDocument/2006/relationships" xmlns:p="http://schemas.openxmlformats.org/presentationml/2006/main">
+  <p:cSld>
+    <p:spTree>
+      <p:nvGrpSpPr>
+        <p:cNvPr id="1" name="Shape 220">
+          <a:extLst>
+            <a:ext uri="{FF2B5EF4-FFF2-40B4-BE49-F238E27FC236}">
+              <a16:creationId xmlns:a16="http://schemas.microsoft.com/office/drawing/2014/main" id="{98A453F8-ECD9-7141-CDD6-109E3B8BEED1}"/>
+            </a:ext>
+          </a:extLst>
+        </p:cNvPr>
+        <p:cNvGrpSpPr/>
+        <p:nvPr/>
+      </p:nvGrpSpPr>
+      <p:grpSpPr>
+        <a:xfrm>
+          <a:off x="0" y="0"/>
+          <a:ext cx="0" cy="0"/>
+          <a:chOff x="0" y="0"/>
+          <a:chExt cx="0" cy="0"/>
+        </a:xfrm>
+      </p:grpSpPr>
+      <p:pic>
+        <p:nvPicPr>
+          <p:cNvPr id="221" name="Google Shape;221;p20" title="Vmw_I2.png">
+            <a:extLst>
+              <a:ext uri="{FF2B5EF4-FFF2-40B4-BE49-F238E27FC236}">
+                <a16:creationId xmlns:a16="http://schemas.microsoft.com/office/drawing/2014/main" id="{85D624E0-D4E0-CC9A-3DD9-A4597601F9FE}"/>
+              </a:ext>
+            </a:extLst>
+          </p:cNvPr>
+          <p:cNvPicPr preferRelativeResize="0"/>
+          <p:nvPr/>
+        </p:nvPicPr>
+        <p:blipFill>
+          <a:blip r:embed="rId3">
+            <a:alphaModFix amt="51000"/>
+          </a:blip>
+          <a:stretch>
+            <a:fillRect/>
+          </a:stretch>
+        </p:blipFill>
+        <p:spPr>
+          <a:xfrm>
+            <a:off x="0" y="0"/>
+            <a:ext cx="21600000" cy="10800000"/>
+          </a:xfrm>
+          <a:prstGeom prst="rect">
+            <a:avLst/>
+          </a:prstGeom>
+          <a:noFill/>
+          <a:ln>
+            <a:noFill/>
+          </a:ln>
+        </p:spPr>
+      </p:pic>
+      <p:sp>
+        <p:nvSpPr>
+          <p:cNvPr id="222" name="Google Shape;222;p20">
+            <a:extLst>
+              <a:ext uri="{FF2B5EF4-FFF2-40B4-BE49-F238E27FC236}">
+                <a16:creationId xmlns:a16="http://schemas.microsoft.com/office/drawing/2014/main" id="{9C56FCB9-BF84-7C9F-90D9-4FBBF200DCBC}"/>
+              </a:ext>
+            </a:extLst>
+          </p:cNvPr>
+          <p:cNvSpPr/>
+          <p:nvPr/>
+        </p:nvSpPr>
+        <p:spPr>
+          <a:xfrm>
+            <a:off x="814250" y="3300663"/>
+            <a:ext cx="19957567" cy="4198675"/>
+          </a:xfrm>
+          <a:prstGeom prst="rect">
+            <a:avLst/>
+          </a:prstGeom>
+        </p:spPr>
+        <p:txBody>
+          <a:bodyPr>
+            <a:prstTxWarp prst="textPlain">
+              <a:avLst/>
+            </a:prstTxWarp>
+          </a:bodyPr>
+          <a:lstStyle/>
+          <a:p>
+            <a:pPr lvl="0" algn="ctr"/>
+            <a:r>
+              <a:rPr b="1" i="0" dirty="0">
+                <a:ln w="114300" cap="flat" cmpd="sng">
+                  <a:solidFill>
+                    <a:srgbClr val="434343"/>
+                  </a:solidFill>
+                  <a:prstDash val="solid"/>
+                  <a:round/>
+                  <a:headEnd type="none" w="sm" len="sm"/>
+                  <a:tailEnd type="none" w="sm" len="sm"/>
+                </a:ln>
+                <a:solidFill>
+                  <a:schemeClr val="lt1"/>
+                </a:solidFill>
+                <a:latin typeface="Consolas"/>
+              </a:rPr>
+              <a:t>Sprint </a:t>
+            </a:r>
+            <a:r>
+              <a:rPr lang="pt-PT" b="1" dirty="0">
+                <a:ln w="114300" cap="flat" cmpd="sng">
+                  <a:solidFill>
+                    <a:srgbClr val="434343"/>
+                  </a:solidFill>
+                  <a:prstDash val="solid"/>
+                  <a:round/>
+                  <a:headEnd type="none" w="sm" len="sm"/>
+                  <a:tailEnd type="none" w="sm" len="sm"/>
+                </a:ln>
+                <a:solidFill>
+                  <a:schemeClr val="lt1"/>
+                </a:solidFill>
+                <a:latin typeface="Consolas"/>
+              </a:rPr>
+              <a:t>6</a:t>
+            </a:r>
+            <a:endParaRPr b="1" i="0" dirty="0">
+              <a:ln w="114300" cap="flat" cmpd="sng">
+                <a:solidFill>
+                  <a:srgbClr val="434343"/>
+                </a:solidFill>
+                <a:prstDash val="solid"/>
+                <a:round/>
+                <a:headEnd type="none" w="sm" len="sm"/>
+                <a:tailEnd type="none" w="sm" len="sm"/>
+              </a:ln>
+              <a:solidFill>
+                <a:schemeClr val="lt1"/>
+              </a:solidFill>
+              <a:latin typeface="Consolas"/>
+            </a:endParaRPr>
+          </a:p>
+        </p:txBody>
+      </p:sp>
+    </p:spTree>
+    <p:extLst>
+      <p:ext uri="{BB962C8B-B14F-4D97-AF65-F5344CB8AC3E}">
+        <p14:creationId xmlns:p14="http://schemas.microsoft.com/office/powerpoint/2010/main" val="2449578432"/>
+      </p:ext>
+    </p:extLst>
+  </p:cSld>
+  <p:clrMapOvr>
+    <a:masterClrMapping/>
+  </p:clrMapOvr>
+</p:sld>
+</file>
+
+<file path=ppt/slides/slide22.xml><?xml version="1.0" encoding="utf-8"?>
+<p:sld xmlns:a="http://schemas.openxmlformats.org/drawingml/2006/main" xmlns:r="http://schemas.openxmlformats.org/officeDocument/2006/relationships" xmlns:p="http://schemas.openxmlformats.org/presentationml/2006/main">
+  <p:cSld>
+    <p:spTree>
+      <p:nvGrpSpPr>
+        <p:cNvPr id="1" name="Shape 189">
+          <a:extLst>
+            <a:ext uri="{FF2B5EF4-FFF2-40B4-BE49-F238E27FC236}">
+              <a16:creationId xmlns:a16="http://schemas.microsoft.com/office/drawing/2014/main" id="{988A0C36-91A8-424E-47D0-C9FFA7AA8526}"/>
+            </a:ext>
+          </a:extLst>
+        </p:cNvPr>
+        <p:cNvGrpSpPr/>
+        <p:nvPr/>
+      </p:nvGrpSpPr>
+      <p:grpSpPr>
+        <a:xfrm>
+          <a:off x="0" y="0"/>
+          <a:ext cx="0" cy="0"/>
+          <a:chOff x="0" y="0"/>
+          <a:chExt cx="0" cy="0"/>
+        </a:xfrm>
+      </p:grpSpPr>
+      <p:cxnSp>
+        <p:nvCxnSpPr>
+          <p:cNvPr id="190" name="Google Shape;190;p19">
+            <a:extLst>
+              <a:ext uri="{FF2B5EF4-FFF2-40B4-BE49-F238E27FC236}">
+                <a16:creationId xmlns:a16="http://schemas.microsoft.com/office/drawing/2014/main" id="{A77EDF78-783E-1055-3E26-0C71D312180F}"/>
+              </a:ext>
+            </a:extLst>
+          </p:cNvPr>
+          <p:cNvCxnSpPr/>
+          <p:nvPr/>
+        </p:nvCxnSpPr>
+        <p:spPr>
+          <a:xfrm>
+            <a:off x="5944724" y="-31500"/>
+            <a:ext cx="0" cy="10857000"/>
+          </a:xfrm>
+          <a:prstGeom prst="straightConnector1">
+            <a:avLst/>
+          </a:prstGeom>
+          <a:noFill/>
+          <a:ln w="38100" cap="flat" cmpd="sng">
+            <a:solidFill>
+              <a:srgbClr val="5B0F00"/>
+            </a:solidFill>
+            <a:prstDash val="solid"/>
+            <a:round/>
+            <a:headEnd type="none" w="med" len="med"/>
+            <a:tailEnd type="none" w="med" len="med"/>
+          </a:ln>
+        </p:spPr>
+      </p:cxnSp>
+      <p:sp>
+        <p:nvSpPr>
+          <p:cNvPr id="191" name="Google Shape;191;p19">
+            <a:extLst>
+              <a:ext uri="{FF2B5EF4-FFF2-40B4-BE49-F238E27FC236}">
+                <a16:creationId xmlns:a16="http://schemas.microsoft.com/office/drawing/2014/main" id="{B98D767B-8ACB-D271-F132-A0E445653DAA}"/>
+              </a:ext>
+            </a:extLst>
+          </p:cNvPr>
+          <p:cNvSpPr/>
+          <p:nvPr/>
+        </p:nvSpPr>
+        <p:spPr>
+          <a:xfrm>
+            <a:off x="3197186" y="84312"/>
+            <a:ext cx="2410800" cy="480900"/>
+          </a:xfrm>
+          <a:prstGeom prst="roundRect">
+            <a:avLst>
+              <a:gd name="adj" fmla="val 16667"/>
+            </a:avLst>
+          </a:prstGeom>
+          <a:solidFill>
+            <a:srgbClr val="F9CB9C"/>
+          </a:solidFill>
+          <a:ln w="28575" cap="flat" cmpd="sng">
+            <a:solidFill>
+              <a:srgbClr val="B45F06"/>
+            </a:solidFill>
+            <a:prstDash val="solid"/>
+            <a:round/>
+            <a:headEnd type="none" w="sm" len="sm"/>
+            <a:tailEnd type="none" w="sm" len="sm"/>
+          </a:ln>
+        </p:spPr>
+        <p:txBody>
+          <a:bodyPr spcFirstLastPara="1" wrap="square" lIns="91425" tIns="91425" rIns="91425" bIns="91425" anchor="ctr" anchorCtr="0">
+            <a:noAutofit/>
+          </a:bodyPr>
+          <a:lstStyle/>
+          <a:p>
+            <a:pPr marL="0" lvl="0" indent="0" algn="ctr" rtl="0">
+              <a:spcBef>
+                <a:spcPts val="0"/>
+              </a:spcBef>
+              <a:spcAft>
+                <a:spcPts val="0"/>
+              </a:spcAft>
+              <a:buNone/>
+            </a:pPr>
+            <a:r>
+              <a:rPr lang="en-GB" sz="1800" b="1">
+                <a:latin typeface="Consolas"/>
+                <a:ea typeface="Consolas"/>
+                <a:cs typeface="Consolas"/>
+                <a:sym typeface="Consolas"/>
+              </a:rPr>
+              <a:t>Student ID</a:t>
+            </a:r>
+            <a:endParaRPr sz="1800" b="1">
+              <a:latin typeface="Consolas"/>
+              <a:ea typeface="Consolas"/>
+              <a:cs typeface="Consolas"/>
+              <a:sym typeface="Consolas"/>
+            </a:endParaRPr>
+          </a:p>
+        </p:txBody>
+      </p:sp>
+      <p:sp>
+        <p:nvSpPr>
+          <p:cNvPr id="192" name="Google Shape;192;p19">
+            <a:extLst>
+              <a:ext uri="{FF2B5EF4-FFF2-40B4-BE49-F238E27FC236}">
+                <a16:creationId xmlns:a16="http://schemas.microsoft.com/office/drawing/2014/main" id="{2FCA0D5B-8F24-0836-052A-2EDA5068EB78}"/>
+              </a:ext>
+            </a:extLst>
+          </p:cNvPr>
+          <p:cNvSpPr/>
+          <p:nvPr/>
+        </p:nvSpPr>
+        <p:spPr>
+          <a:xfrm>
+            <a:off x="6281636" y="84312"/>
+            <a:ext cx="2410800" cy="480900"/>
+          </a:xfrm>
+          <a:prstGeom prst="roundRect">
+            <a:avLst>
+              <a:gd name="adj" fmla="val 16667"/>
+            </a:avLst>
+          </a:prstGeom>
+          <a:solidFill>
+            <a:srgbClr val="F9CB9C"/>
+          </a:solidFill>
+          <a:ln w="28575" cap="flat" cmpd="sng">
+            <a:solidFill>
+              <a:srgbClr val="B45F06"/>
+            </a:solidFill>
+            <a:prstDash val="solid"/>
+            <a:round/>
+            <a:headEnd type="none" w="sm" len="sm"/>
+            <a:tailEnd type="none" w="sm" len="sm"/>
+          </a:ln>
+        </p:spPr>
+        <p:txBody>
+          <a:bodyPr spcFirstLastPara="1" wrap="square" lIns="91425" tIns="91425" rIns="91425" bIns="91425" anchor="ctr" anchorCtr="0">
+            <a:noAutofit/>
+          </a:bodyPr>
+          <a:lstStyle/>
+          <a:p>
+            <a:pPr marL="0" lvl="0" indent="0" algn="ctr" rtl="0">
+              <a:spcBef>
+                <a:spcPts val="0"/>
+              </a:spcBef>
+              <a:spcAft>
+                <a:spcPts val="0"/>
+              </a:spcAft>
+              <a:buNone/>
+            </a:pPr>
+            <a:r>
+              <a:rPr lang="en-GB" sz="1800" b="1">
+                <a:latin typeface="Consolas"/>
+                <a:ea typeface="Consolas"/>
+                <a:cs typeface="Consolas"/>
+                <a:sym typeface="Consolas"/>
+              </a:rPr>
+              <a:t>Story</a:t>
+            </a:r>
+            <a:endParaRPr sz="1800" b="1">
+              <a:latin typeface="Consolas"/>
+              <a:ea typeface="Consolas"/>
+              <a:cs typeface="Consolas"/>
+              <a:sym typeface="Consolas"/>
+            </a:endParaRPr>
+          </a:p>
+        </p:txBody>
+      </p:sp>
+      <p:sp>
+        <p:nvSpPr>
+          <p:cNvPr id="193" name="Google Shape;193;p19">
+            <a:extLst>
+              <a:ext uri="{FF2B5EF4-FFF2-40B4-BE49-F238E27FC236}">
+                <a16:creationId xmlns:a16="http://schemas.microsoft.com/office/drawing/2014/main" id="{B6639257-54CA-F8F2-4D34-C5970A254913}"/>
+              </a:ext>
+            </a:extLst>
+          </p:cNvPr>
+          <p:cNvSpPr/>
+          <p:nvPr/>
+        </p:nvSpPr>
+        <p:spPr>
+          <a:xfrm>
+            <a:off x="9366071" y="84312"/>
+            <a:ext cx="2410800" cy="480900"/>
+          </a:xfrm>
+          <a:prstGeom prst="roundRect">
+            <a:avLst>
+              <a:gd name="adj" fmla="val 16667"/>
+            </a:avLst>
+          </a:prstGeom>
+          <a:solidFill>
+            <a:srgbClr val="F9CB9C"/>
+          </a:solidFill>
+          <a:ln w="28575" cap="flat" cmpd="sng">
+            <a:solidFill>
+              <a:srgbClr val="B45F06"/>
+            </a:solidFill>
+            <a:prstDash val="solid"/>
+            <a:round/>
+            <a:headEnd type="none" w="sm" len="sm"/>
+            <a:tailEnd type="none" w="sm" len="sm"/>
+          </a:ln>
+        </p:spPr>
+        <p:txBody>
+          <a:bodyPr spcFirstLastPara="1" wrap="square" lIns="91425" tIns="91425" rIns="91425" bIns="91425" anchor="ctr" anchorCtr="0">
+            <a:noAutofit/>
+          </a:bodyPr>
+          <a:lstStyle/>
+          <a:p>
+            <a:pPr marL="0" lvl="0" indent="0" algn="ctr" rtl="0">
+              <a:spcBef>
+                <a:spcPts val="0"/>
+              </a:spcBef>
+              <a:spcAft>
+                <a:spcPts val="0"/>
+              </a:spcAft>
+              <a:buNone/>
+            </a:pPr>
+            <a:r>
+              <a:rPr lang="en-GB" sz="1800" b="1">
+                <a:latin typeface="Consolas"/>
+                <a:ea typeface="Consolas"/>
+                <a:cs typeface="Consolas"/>
+                <a:sym typeface="Consolas"/>
+              </a:rPr>
+              <a:t>To Do</a:t>
+            </a:r>
+            <a:endParaRPr sz="1800" b="1">
+              <a:latin typeface="Consolas"/>
+              <a:ea typeface="Consolas"/>
+              <a:cs typeface="Consolas"/>
+              <a:sym typeface="Consolas"/>
+            </a:endParaRPr>
+          </a:p>
+        </p:txBody>
+      </p:sp>
+      <p:sp>
+        <p:nvSpPr>
+          <p:cNvPr id="194" name="Google Shape;194;p19">
+            <a:extLst>
+              <a:ext uri="{FF2B5EF4-FFF2-40B4-BE49-F238E27FC236}">
+                <a16:creationId xmlns:a16="http://schemas.microsoft.com/office/drawing/2014/main" id="{F924E555-3E0F-E013-8627-B264192983AB}"/>
+              </a:ext>
+            </a:extLst>
+          </p:cNvPr>
+          <p:cNvSpPr/>
+          <p:nvPr/>
+        </p:nvSpPr>
+        <p:spPr>
+          <a:xfrm>
+            <a:off x="12395940" y="84312"/>
+            <a:ext cx="2410800" cy="480900"/>
+          </a:xfrm>
+          <a:prstGeom prst="roundRect">
+            <a:avLst>
+              <a:gd name="adj" fmla="val 16667"/>
+            </a:avLst>
+          </a:prstGeom>
+          <a:solidFill>
+            <a:srgbClr val="F9CB9C"/>
+          </a:solidFill>
+          <a:ln w="28575" cap="flat" cmpd="sng">
+            <a:solidFill>
+              <a:srgbClr val="B45F06"/>
+            </a:solidFill>
+            <a:prstDash val="solid"/>
+            <a:round/>
+            <a:headEnd type="none" w="sm" len="sm"/>
+            <a:tailEnd type="none" w="sm" len="sm"/>
+          </a:ln>
+        </p:spPr>
+        <p:txBody>
+          <a:bodyPr spcFirstLastPara="1" wrap="square" lIns="91425" tIns="91425" rIns="91425" bIns="91425" anchor="ctr" anchorCtr="0">
+            <a:noAutofit/>
+          </a:bodyPr>
+          <a:lstStyle/>
+          <a:p>
+            <a:pPr marL="0" lvl="0" indent="0" algn="ctr" rtl="0">
+              <a:spcBef>
+                <a:spcPts val="0"/>
+              </a:spcBef>
+              <a:spcAft>
+                <a:spcPts val="0"/>
+              </a:spcAft>
+              <a:buNone/>
+            </a:pPr>
+            <a:r>
+              <a:rPr lang="en-GB" sz="1800" b="1">
+                <a:latin typeface="Consolas"/>
+                <a:ea typeface="Consolas"/>
+                <a:cs typeface="Consolas"/>
+                <a:sym typeface="Consolas"/>
+              </a:rPr>
+              <a:t>Doing</a:t>
+            </a:r>
+            <a:endParaRPr sz="1800" b="1">
+              <a:latin typeface="Consolas"/>
+              <a:ea typeface="Consolas"/>
+              <a:cs typeface="Consolas"/>
+              <a:sym typeface="Consolas"/>
+            </a:endParaRPr>
+          </a:p>
+        </p:txBody>
+      </p:sp>
+      <p:sp>
+        <p:nvSpPr>
+          <p:cNvPr id="195" name="Google Shape;195;p19">
+            <a:extLst>
+              <a:ext uri="{FF2B5EF4-FFF2-40B4-BE49-F238E27FC236}">
+                <a16:creationId xmlns:a16="http://schemas.microsoft.com/office/drawing/2014/main" id="{7E16B341-9D7F-CADA-B9AE-E1125E77F572}"/>
+              </a:ext>
+            </a:extLst>
+          </p:cNvPr>
+          <p:cNvSpPr/>
+          <p:nvPr/>
+        </p:nvSpPr>
+        <p:spPr>
+          <a:xfrm>
+            <a:off x="15532407" y="84312"/>
+            <a:ext cx="2410800" cy="480900"/>
+          </a:xfrm>
+          <a:prstGeom prst="roundRect">
+            <a:avLst>
+              <a:gd name="adj" fmla="val 16667"/>
+            </a:avLst>
+          </a:prstGeom>
+          <a:solidFill>
+            <a:srgbClr val="F9CB9C"/>
+          </a:solidFill>
+          <a:ln w="28575" cap="flat" cmpd="sng">
+            <a:solidFill>
+              <a:srgbClr val="B45F06"/>
+            </a:solidFill>
+            <a:prstDash val="solid"/>
+            <a:round/>
+            <a:headEnd type="none" w="sm" len="sm"/>
+            <a:tailEnd type="none" w="sm" len="sm"/>
+          </a:ln>
+        </p:spPr>
+        <p:txBody>
+          <a:bodyPr spcFirstLastPara="1" wrap="square" lIns="91425" tIns="91425" rIns="91425" bIns="91425" anchor="ctr" anchorCtr="0">
+            <a:noAutofit/>
+          </a:bodyPr>
+          <a:lstStyle/>
+          <a:p>
+            <a:pPr marL="0" lvl="0" indent="0" algn="ctr" rtl="0">
+              <a:spcBef>
+                <a:spcPts val="0"/>
+              </a:spcBef>
+              <a:spcAft>
+                <a:spcPts val="0"/>
+              </a:spcAft>
+              <a:buNone/>
+            </a:pPr>
+            <a:r>
+              <a:rPr lang="en-GB" sz="1800" b="1">
+                <a:latin typeface="Consolas"/>
+                <a:ea typeface="Consolas"/>
+                <a:cs typeface="Consolas"/>
+                <a:sym typeface="Consolas"/>
+              </a:rPr>
+              <a:t>Review</a:t>
+            </a:r>
+            <a:endParaRPr sz="1800" b="1">
+              <a:latin typeface="Consolas"/>
+              <a:ea typeface="Consolas"/>
+              <a:cs typeface="Consolas"/>
+              <a:sym typeface="Consolas"/>
+            </a:endParaRPr>
+          </a:p>
+        </p:txBody>
+      </p:sp>
+      <p:sp>
+        <p:nvSpPr>
+          <p:cNvPr id="196" name="Google Shape;196;p19">
+            <a:extLst>
+              <a:ext uri="{FF2B5EF4-FFF2-40B4-BE49-F238E27FC236}">
+                <a16:creationId xmlns:a16="http://schemas.microsoft.com/office/drawing/2014/main" id="{BAA6B421-B4E1-CC48-6694-DFA17776975B}"/>
+              </a:ext>
+            </a:extLst>
+          </p:cNvPr>
+          <p:cNvSpPr/>
+          <p:nvPr/>
+        </p:nvSpPr>
+        <p:spPr>
+          <a:xfrm>
+            <a:off x="18668888" y="84312"/>
+            <a:ext cx="2410800" cy="480900"/>
+          </a:xfrm>
+          <a:prstGeom prst="roundRect">
+            <a:avLst>
+              <a:gd name="adj" fmla="val 16667"/>
+            </a:avLst>
+          </a:prstGeom>
+          <a:solidFill>
+            <a:srgbClr val="F9CB9C"/>
+          </a:solidFill>
+          <a:ln w="28575" cap="flat" cmpd="sng">
+            <a:solidFill>
+              <a:srgbClr val="B45F06"/>
+            </a:solidFill>
+            <a:prstDash val="solid"/>
+            <a:round/>
+            <a:headEnd type="none" w="sm" len="sm"/>
+            <a:tailEnd type="none" w="sm" len="sm"/>
+          </a:ln>
+        </p:spPr>
+        <p:txBody>
+          <a:bodyPr spcFirstLastPara="1" wrap="square" lIns="91425" tIns="91425" rIns="91425" bIns="91425" anchor="ctr" anchorCtr="0">
+            <a:noAutofit/>
+          </a:bodyPr>
+          <a:lstStyle/>
+          <a:p>
+            <a:pPr marL="0" lvl="0" indent="0" algn="ctr" rtl="0">
+              <a:spcBef>
+                <a:spcPts val="0"/>
+              </a:spcBef>
+              <a:spcAft>
+                <a:spcPts val="0"/>
+              </a:spcAft>
+              <a:buNone/>
+            </a:pPr>
+            <a:r>
+              <a:rPr lang="en-GB" sz="1800" b="1">
+                <a:latin typeface="Consolas"/>
+                <a:ea typeface="Consolas"/>
+                <a:cs typeface="Consolas"/>
+                <a:sym typeface="Consolas"/>
+              </a:rPr>
+              <a:t>Done</a:t>
+            </a:r>
+            <a:endParaRPr sz="1800" b="1">
+              <a:latin typeface="Consolas"/>
+              <a:ea typeface="Consolas"/>
+              <a:cs typeface="Consolas"/>
+              <a:sym typeface="Consolas"/>
+            </a:endParaRPr>
+          </a:p>
+        </p:txBody>
+      </p:sp>
+      <p:sp>
+        <p:nvSpPr>
+          <p:cNvPr id="197" name="Google Shape;197;p19">
+            <a:extLst>
+              <a:ext uri="{FF2B5EF4-FFF2-40B4-BE49-F238E27FC236}">
+                <a16:creationId xmlns:a16="http://schemas.microsoft.com/office/drawing/2014/main" id="{516D7FC1-2721-9ABA-87C7-7ED7F357E81D}"/>
+              </a:ext>
+            </a:extLst>
+          </p:cNvPr>
+          <p:cNvSpPr/>
+          <p:nvPr/>
+        </p:nvSpPr>
+        <p:spPr>
+          <a:xfrm>
+            <a:off x="167288" y="84312"/>
+            <a:ext cx="2410800" cy="480900"/>
+          </a:xfrm>
+          <a:prstGeom prst="roundRect">
+            <a:avLst>
+              <a:gd name="adj" fmla="val 16667"/>
+            </a:avLst>
+          </a:prstGeom>
+          <a:solidFill>
+            <a:srgbClr val="F9CB9C"/>
+          </a:solidFill>
+          <a:ln w="28575" cap="flat" cmpd="sng">
+            <a:solidFill>
+              <a:srgbClr val="B45F06"/>
+            </a:solidFill>
+            <a:prstDash val="solid"/>
+            <a:round/>
+            <a:headEnd type="none" w="sm" len="sm"/>
+            <a:tailEnd type="none" w="sm" len="sm"/>
+          </a:ln>
+        </p:spPr>
+        <p:txBody>
+          <a:bodyPr spcFirstLastPara="1" wrap="square" lIns="91425" tIns="91425" rIns="91425" bIns="91425" anchor="ctr" anchorCtr="0">
+            <a:noAutofit/>
+          </a:bodyPr>
+          <a:lstStyle/>
+          <a:p>
+            <a:pPr marL="0" lvl="0" indent="0" algn="ctr" rtl="0">
+              <a:spcBef>
+                <a:spcPts val="0"/>
+              </a:spcBef>
+              <a:spcAft>
+                <a:spcPts val="0"/>
+              </a:spcAft>
+              <a:buNone/>
+            </a:pPr>
+            <a:r>
+              <a:rPr lang="en-GB" sz="1800" b="1">
+                <a:latin typeface="Consolas"/>
+                <a:ea typeface="Consolas"/>
+                <a:cs typeface="Consolas"/>
+                <a:sym typeface="Consolas"/>
+              </a:rPr>
+              <a:t>Backlog</a:t>
+            </a:r>
+            <a:endParaRPr sz="1800" b="1">
+              <a:latin typeface="Consolas"/>
+              <a:ea typeface="Consolas"/>
+              <a:cs typeface="Consolas"/>
+              <a:sym typeface="Consolas"/>
+            </a:endParaRPr>
+          </a:p>
+        </p:txBody>
+      </p:sp>
+      <p:cxnSp>
+        <p:nvCxnSpPr>
+          <p:cNvPr id="204" name="Google Shape;204;p19">
+            <a:extLst>
+              <a:ext uri="{FF2B5EF4-FFF2-40B4-BE49-F238E27FC236}">
+                <a16:creationId xmlns:a16="http://schemas.microsoft.com/office/drawing/2014/main" id="{0D220198-1226-64AA-ED17-6F832D349B6E}"/>
+              </a:ext>
+            </a:extLst>
+          </p:cNvPr>
+          <p:cNvCxnSpPr/>
+          <p:nvPr/>
+        </p:nvCxnSpPr>
+        <p:spPr>
+          <a:xfrm>
+            <a:off x="5607986" y="1626038"/>
+            <a:ext cx="16042200" cy="0"/>
+          </a:xfrm>
+          <a:prstGeom prst="straightConnector1">
+            <a:avLst/>
+          </a:prstGeom>
+          <a:noFill/>
+          <a:ln w="28575" cap="flat" cmpd="sng">
+            <a:solidFill>
+              <a:srgbClr val="999999"/>
+            </a:solidFill>
+            <a:prstDash val="dash"/>
+            <a:round/>
+            <a:headEnd type="none" w="med" len="med"/>
+            <a:tailEnd type="none" w="med" len="med"/>
+          </a:ln>
+        </p:spPr>
+      </p:cxnSp>
+      <p:cxnSp>
+        <p:nvCxnSpPr>
+          <p:cNvPr id="205" name="Google Shape;205;p19">
+            <a:extLst>
+              <a:ext uri="{FF2B5EF4-FFF2-40B4-BE49-F238E27FC236}">
+                <a16:creationId xmlns:a16="http://schemas.microsoft.com/office/drawing/2014/main" id="{B0061229-9FB6-1392-3177-6FEED81A8725}"/>
+              </a:ext>
+            </a:extLst>
+          </p:cNvPr>
+          <p:cNvCxnSpPr/>
+          <p:nvPr/>
+        </p:nvCxnSpPr>
+        <p:spPr>
+          <a:xfrm>
+            <a:off x="5607986" y="3203476"/>
+            <a:ext cx="16042200" cy="0"/>
+          </a:xfrm>
+          <a:prstGeom prst="straightConnector1">
+            <a:avLst/>
+          </a:prstGeom>
+          <a:noFill/>
+          <a:ln w="28575" cap="flat" cmpd="sng">
+            <a:solidFill>
+              <a:srgbClr val="999999"/>
+            </a:solidFill>
+            <a:prstDash val="dash"/>
+            <a:round/>
+            <a:headEnd type="none" w="med" len="med"/>
+            <a:tailEnd type="none" w="med" len="med"/>
+          </a:ln>
+        </p:spPr>
+      </p:cxnSp>
+      <p:cxnSp>
+        <p:nvCxnSpPr>
+          <p:cNvPr id="206" name="Google Shape;206;p19">
+            <a:extLst>
+              <a:ext uri="{FF2B5EF4-FFF2-40B4-BE49-F238E27FC236}">
+                <a16:creationId xmlns:a16="http://schemas.microsoft.com/office/drawing/2014/main" id="{0FE2DB45-6CA0-0905-DB19-91DA1397CDA9}"/>
+              </a:ext>
+            </a:extLst>
+          </p:cNvPr>
+          <p:cNvCxnSpPr/>
+          <p:nvPr/>
+        </p:nvCxnSpPr>
+        <p:spPr>
+          <a:xfrm>
+            <a:off x="5607986" y="4777838"/>
+            <a:ext cx="16042200" cy="0"/>
+          </a:xfrm>
+          <a:prstGeom prst="straightConnector1">
+            <a:avLst/>
+          </a:prstGeom>
+          <a:noFill/>
+          <a:ln w="28575" cap="flat" cmpd="sng">
+            <a:solidFill>
+              <a:srgbClr val="999999"/>
+            </a:solidFill>
+            <a:prstDash val="dash"/>
+            <a:round/>
+            <a:headEnd type="none" w="med" len="med"/>
+            <a:tailEnd type="none" w="med" len="med"/>
+          </a:ln>
+        </p:spPr>
+      </p:cxnSp>
+      <p:cxnSp>
+        <p:nvCxnSpPr>
+          <p:cNvPr id="207" name="Google Shape;207;p19">
+            <a:extLst>
+              <a:ext uri="{FF2B5EF4-FFF2-40B4-BE49-F238E27FC236}">
+                <a16:creationId xmlns:a16="http://schemas.microsoft.com/office/drawing/2014/main" id="{8497C966-1D35-ED7F-F938-169BBE04EE1A}"/>
+              </a:ext>
+            </a:extLst>
+          </p:cNvPr>
+          <p:cNvCxnSpPr/>
+          <p:nvPr/>
+        </p:nvCxnSpPr>
+        <p:spPr>
+          <a:xfrm>
+            <a:off x="5607986" y="6353738"/>
+            <a:ext cx="16042200" cy="0"/>
+          </a:xfrm>
+          <a:prstGeom prst="straightConnector1">
+            <a:avLst/>
+          </a:prstGeom>
+          <a:noFill/>
+          <a:ln w="28575" cap="flat" cmpd="sng">
+            <a:solidFill>
+              <a:srgbClr val="999999"/>
+            </a:solidFill>
+            <a:prstDash val="dash"/>
+            <a:round/>
+            <a:headEnd type="none" w="med" len="med"/>
+            <a:tailEnd type="none" w="med" len="med"/>
+          </a:ln>
+        </p:spPr>
+      </p:cxnSp>
+      <p:cxnSp>
+        <p:nvCxnSpPr>
+          <p:cNvPr id="208" name="Google Shape;208;p19">
+            <a:extLst>
+              <a:ext uri="{FF2B5EF4-FFF2-40B4-BE49-F238E27FC236}">
+                <a16:creationId xmlns:a16="http://schemas.microsoft.com/office/drawing/2014/main" id="{835B2663-0890-96B6-07DC-4DA497028CE4}"/>
+              </a:ext>
+            </a:extLst>
+          </p:cNvPr>
+          <p:cNvCxnSpPr/>
+          <p:nvPr/>
+        </p:nvCxnSpPr>
+        <p:spPr>
+          <a:xfrm>
+            <a:off x="5607986" y="7929638"/>
+            <a:ext cx="16042200" cy="0"/>
+          </a:xfrm>
+          <a:prstGeom prst="straightConnector1">
+            <a:avLst/>
+          </a:prstGeom>
+          <a:noFill/>
+          <a:ln w="28575" cap="flat" cmpd="sng">
+            <a:solidFill>
+              <a:srgbClr val="999999"/>
+            </a:solidFill>
+            <a:prstDash val="dash"/>
+            <a:round/>
+            <a:headEnd type="none" w="med" len="med"/>
+            <a:tailEnd type="none" w="med" len="med"/>
+          </a:ln>
+        </p:spPr>
+      </p:cxnSp>
+      <p:cxnSp>
+        <p:nvCxnSpPr>
+          <p:cNvPr id="209" name="Google Shape;209;p19">
+            <a:extLst>
+              <a:ext uri="{FF2B5EF4-FFF2-40B4-BE49-F238E27FC236}">
+                <a16:creationId xmlns:a16="http://schemas.microsoft.com/office/drawing/2014/main" id="{89850700-3A1C-F3DA-D4C1-BA2F915CC867}"/>
+              </a:ext>
+            </a:extLst>
+          </p:cNvPr>
+          <p:cNvCxnSpPr/>
+          <p:nvPr/>
+        </p:nvCxnSpPr>
+        <p:spPr>
+          <a:xfrm>
+            <a:off x="5607986" y="9505538"/>
+            <a:ext cx="16042200" cy="0"/>
+          </a:xfrm>
+          <a:prstGeom prst="straightConnector1">
+            <a:avLst/>
+          </a:prstGeom>
+          <a:noFill/>
+          <a:ln w="28575" cap="flat" cmpd="sng">
+            <a:solidFill>
+              <a:srgbClr val="999999"/>
+            </a:solidFill>
+            <a:prstDash val="dash"/>
+            <a:round/>
+            <a:headEnd type="none" w="med" len="med"/>
+            <a:tailEnd type="none" w="med" len="med"/>
+          </a:ln>
+        </p:spPr>
+      </p:cxnSp>
+      <p:cxnSp>
+        <p:nvCxnSpPr>
+          <p:cNvPr id="215" name="Google Shape;215;p19">
+            <a:extLst>
+              <a:ext uri="{FF2B5EF4-FFF2-40B4-BE49-F238E27FC236}">
+                <a16:creationId xmlns:a16="http://schemas.microsoft.com/office/drawing/2014/main" id="{425B3A0D-8E09-8D6D-87F4-6527CB687C31}"/>
+              </a:ext>
+            </a:extLst>
+          </p:cNvPr>
+          <p:cNvCxnSpPr/>
+          <p:nvPr/>
+        </p:nvCxnSpPr>
+        <p:spPr>
+          <a:xfrm>
+            <a:off x="2874374" y="-28500"/>
+            <a:ext cx="0" cy="10857000"/>
+          </a:xfrm>
+          <a:prstGeom prst="straightConnector1">
+            <a:avLst/>
+          </a:prstGeom>
+          <a:noFill/>
+          <a:ln w="38100" cap="flat" cmpd="sng">
+            <a:solidFill>
+              <a:srgbClr val="5B0F00"/>
+            </a:solidFill>
+            <a:prstDash val="solid"/>
+            <a:round/>
+            <a:headEnd type="none" w="med" len="med"/>
+            <a:tailEnd type="none" w="med" len="med"/>
+          </a:ln>
+        </p:spPr>
+      </p:cxnSp>
+      <p:sp>
+        <p:nvSpPr>
+          <p:cNvPr id="2" name="Google Shape;74;p15">
+            <a:extLst>
+              <a:ext uri="{FF2B5EF4-FFF2-40B4-BE49-F238E27FC236}">
+                <a16:creationId xmlns:a16="http://schemas.microsoft.com/office/drawing/2014/main" id="{D4F7ADC3-A67C-C392-602B-A6691E12973F}"/>
+              </a:ext>
+            </a:extLst>
+          </p:cNvPr>
+          <p:cNvSpPr/>
+          <p:nvPr/>
+        </p:nvSpPr>
+        <p:spPr>
+          <a:xfrm>
+            <a:off x="3197186" y="1385588"/>
+            <a:ext cx="2410800" cy="480900"/>
+          </a:xfrm>
+          <a:prstGeom prst="roundRect">
+            <a:avLst>
+              <a:gd name="adj" fmla="val 16667"/>
+            </a:avLst>
+          </a:prstGeom>
+          <a:solidFill>
+            <a:srgbClr val="E6B8AF"/>
+          </a:solidFill>
+          <a:ln w="28575" cap="flat" cmpd="sng">
+            <a:solidFill>
+              <a:srgbClr val="5B0F00"/>
+            </a:solidFill>
+            <a:prstDash val="solid"/>
+            <a:round/>
+            <a:headEnd type="none" w="sm" len="sm"/>
+            <a:tailEnd type="none" w="sm" len="sm"/>
+          </a:ln>
+        </p:spPr>
+        <p:txBody>
+          <a:bodyPr spcFirstLastPara="1" wrap="square" lIns="91425" tIns="91425" rIns="91425" bIns="91425" anchor="ctr" anchorCtr="0">
+            <a:noAutofit/>
+          </a:bodyPr>
+          <a:lstStyle/>
+          <a:p>
+            <a:pPr marL="0" lvl="0" indent="0" algn="ctr" rtl="0">
+              <a:spcBef>
+                <a:spcPts val="0"/>
+              </a:spcBef>
+              <a:spcAft>
+                <a:spcPts val="0"/>
+              </a:spcAft>
+              <a:buNone/>
+            </a:pPr>
+            <a:r>
+              <a:rPr lang="en-GB" sz="1800" b="1" dirty="0">
+                <a:latin typeface="Consolas"/>
+                <a:ea typeface="Consolas"/>
+                <a:cs typeface="Consolas"/>
+                <a:sym typeface="Consolas"/>
+              </a:rPr>
+              <a:t>68338</a:t>
+            </a:r>
+            <a:endParaRPr sz="1800" b="1" dirty="0">
+              <a:latin typeface="Consolas"/>
+              <a:ea typeface="Consolas"/>
+              <a:cs typeface="Consolas"/>
+              <a:sym typeface="Consolas"/>
+            </a:endParaRPr>
+          </a:p>
+        </p:txBody>
+      </p:sp>
+      <p:sp>
+        <p:nvSpPr>
+          <p:cNvPr id="3" name="Google Shape;75;p15">
+            <a:extLst>
+              <a:ext uri="{FF2B5EF4-FFF2-40B4-BE49-F238E27FC236}">
+                <a16:creationId xmlns:a16="http://schemas.microsoft.com/office/drawing/2014/main" id="{68EADD84-B48E-2466-1EBD-CBF5C7DC0600}"/>
+              </a:ext>
+            </a:extLst>
+          </p:cNvPr>
+          <p:cNvSpPr/>
+          <p:nvPr/>
+        </p:nvSpPr>
+        <p:spPr>
+          <a:xfrm>
+            <a:off x="3197186" y="2961501"/>
+            <a:ext cx="2410800" cy="480900"/>
+          </a:xfrm>
+          <a:prstGeom prst="roundRect">
+            <a:avLst>
+              <a:gd name="adj" fmla="val 16667"/>
+            </a:avLst>
+          </a:prstGeom>
+          <a:solidFill>
+            <a:srgbClr val="E6B8AF"/>
+          </a:solidFill>
+          <a:ln w="28575" cap="flat" cmpd="sng">
+            <a:solidFill>
+              <a:srgbClr val="5B0F00"/>
+            </a:solidFill>
+            <a:prstDash val="solid"/>
+            <a:round/>
+            <a:headEnd type="none" w="sm" len="sm"/>
+            <a:tailEnd type="none" w="sm" len="sm"/>
+          </a:ln>
+        </p:spPr>
+        <p:txBody>
+          <a:bodyPr spcFirstLastPara="1" wrap="square" lIns="91425" tIns="91425" rIns="91425" bIns="91425" anchor="ctr" anchorCtr="0">
+            <a:noAutofit/>
+          </a:bodyPr>
+          <a:lstStyle/>
+          <a:p>
+            <a:pPr marL="0" lvl="0" indent="0" algn="ctr" rtl="0">
+              <a:spcBef>
+                <a:spcPts val="0"/>
+              </a:spcBef>
+              <a:spcAft>
+                <a:spcPts val="0"/>
+              </a:spcAft>
+              <a:buNone/>
+            </a:pPr>
+            <a:r>
+              <a:rPr lang="en-GB" sz="1800" b="1" dirty="0">
+                <a:latin typeface="Consolas"/>
+                <a:ea typeface="Consolas"/>
+                <a:cs typeface="Consolas"/>
+                <a:sym typeface="Consolas"/>
+              </a:rPr>
+              <a:t>68245</a:t>
+            </a:r>
+            <a:endParaRPr sz="1800" b="1" dirty="0">
+              <a:latin typeface="Consolas"/>
+              <a:ea typeface="Consolas"/>
+              <a:cs typeface="Consolas"/>
+              <a:sym typeface="Consolas"/>
+            </a:endParaRPr>
+          </a:p>
+        </p:txBody>
+      </p:sp>
+      <p:sp>
+        <p:nvSpPr>
+          <p:cNvPr id="4" name="Google Shape;76;p15">
+            <a:extLst>
+              <a:ext uri="{FF2B5EF4-FFF2-40B4-BE49-F238E27FC236}">
+                <a16:creationId xmlns:a16="http://schemas.microsoft.com/office/drawing/2014/main" id="{3EEB9402-294C-D6EE-0ECD-BDCFE13115EB}"/>
+              </a:ext>
+            </a:extLst>
+          </p:cNvPr>
+          <p:cNvSpPr/>
+          <p:nvPr/>
+        </p:nvSpPr>
+        <p:spPr>
+          <a:xfrm>
+            <a:off x="3197186" y="4537410"/>
+            <a:ext cx="2410800" cy="480900"/>
+          </a:xfrm>
+          <a:prstGeom prst="roundRect">
+            <a:avLst>
+              <a:gd name="adj" fmla="val 16667"/>
+            </a:avLst>
+          </a:prstGeom>
+          <a:solidFill>
+            <a:srgbClr val="E6B8AF"/>
+          </a:solidFill>
+          <a:ln w="28575" cap="flat" cmpd="sng">
+            <a:solidFill>
+              <a:srgbClr val="5B0F00"/>
+            </a:solidFill>
+            <a:prstDash val="solid"/>
+            <a:round/>
+            <a:headEnd type="none" w="sm" len="sm"/>
+            <a:tailEnd type="none" w="sm" len="sm"/>
+          </a:ln>
+        </p:spPr>
+        <p:txBody>
+          <a:bodyPr spcFirstLastPara="1" wrap="square" lIns="91425" tIns="91425" rIns="91425" bIns="91425" anchor="ctr" anchorCtr="0">
+            <a:noAutofit/>
+          </a:bodyPr>
+          <a:lstStyle/>
+          <a:p>
+            <a:pPr marL="0" lvl="0" indent="0" algn="ctr" rtl="0">
+              <a:spcBef>
+                <a:spcPts val="0"/>
+              </a:spcBef>
+              <a:spcAft>
+                <a:spcPts val="0"/>
+              </a:spcAft>
+              <a:buNone/>
+            </a:pPr>
+            <a:r>
+              <a:rPr lang="en-GB" sz="1800" b="1" dirty="0">
+                <a:latin typeface="Consolas"/>
+                <a:ea typeface="Consolas"/>
+                <a:cs typeface="Consolas"/>
+                <a:sym typeface="Consolas"/>
+              </a:rPr>
+              <a:t>68725</a:t>
+            </a:r>
+            <a:endParaRPr sz="1800" b="1" dirty="0">
+              <a:latin typeface="Consolas"/>
+              <a:ea typeface="Consolas"/>
+              <a:cs typeface="Consolas"/>
+              <a:sym typeface="Consolas"/>
+            </a:endParaRPr>
+          </a:p>
+        </p:txBody>
+      </p:sp>
+      <p:sp>
+        <p:nvSpPr>
+          <p:cNvPr id="5" name="Google Shape;77;p15">
+            <a:extLst>
+              <a:ext uri="{FF2B5EF4-FFF2-40B4-BE49-F238E27FC236}">
+                <a16:creationId xmlns:a16="http://schemas.microsoft.com/office/drawing/2014/main" id="{38933AE8-4E26-2CF1-7F39-C385B676EB96}"/>
+              </a:ext>
+            </a:extLst>
+          </p:cNvPr>
+          <p:cNvSpPr/>
+          <p:nvPr/>
+        </p:nvSpPr>
+        <p:spPr>
+          <a:xfrm>
+            <a:off x="3197186" y="6113307"/>
+            <a:ext cx="2410800" cy="480900"/>
+          </a:xfrm>
+          <a:prstGeom prst="roundRect">
+            <a:avLst>
+              <a:gd name="adj" fmla="val 16667"/>
+            </a:avLst>
+          </a:prstGeom>
+          <a:solidFill>
+            <a:srgbClr val="E6B8AF"/>
+          </a:solidFill>
+          <a:ln w="28575" cap="flat" cmpd="sng">
+            <a:solidFill>
+              <a:srgbClr val="5B0F00"/>
+            </a:solidFill>
+            <a:prstDash val="solid"/>
+            <a:round/>
+            <a:headEnd type="none" w="sm" len="sm"/>
+            <a:tailEnd type="none" w="sm" len="sm"/>
+          </a:ln>
+        </p:spPr>
+        <p:txBody>
+          <a:bodyPr spcFirstLastPara="1" wrap="square" lIns="91425" tIns="91425" rIns="91425" bIns="91425" anchor="ctr" anchorCtr="0">
+            <a:noAutofit/>
+          </a:bodyPr>
+          <a:lstStyle/>
+          <a:p>
+            <a:pPr marL="0" lvl="0" indent="0" algn="ctr" rtl="0">
+              <a:spcBef>
+                <a:spcPts val="0"/>
+              </a:spcBef>
+              <a:spcAft>
+                <a:spcPts val="0"/>
+              </a:spcAft>
+              <a:buNone/>
+            </a:pPr>
+            <a:r>
+              <a:rPr lang="en-GB" sz="1800" b="1" dirty="0">
+                <a:latin typeface="Consolas"/>
+                <a:ea typeface="Consolas"/>
+                <a:cs typeface="Consolas"/>
+                <a:sym typeface="Consolas"/>
+              </a:rPr>
+              <a:t>68180</a:t>
+            </a:r>
+            <a:endParaRPr sz="1800" b="1" dirty="0">
+              <a:latin typeface="Consolas"/>
+              <a:ea typeface="Consolas"/>
+              <a:cs typeface="Consolas"/>
+              <a:sym typeface="Consolas"/>
+            </a:endParaRPr>
+          </a:p>
+        </p:txBody>
+      </p:sp>
+      <p:sp>
+        <p:nvSpPr>
+          <p:cNvPr id="6" name="Google Shape;78;p15">
+            <a:extLst>
+              <a:ext uri="{FF2B5EF4-FFF2-40B4-BE49-F238E27FC236}">
+                <a16:creationId xmlns:a16="http://schemas.microsoft.com/office/drawing/2014/main" id="{AA10CF88-7570-5F3D-B88A-F08F621A4BBA}"/>
+              </a:ext>
+            </a:extLst>
+          </p:cNvPr>
+          <p:cNvSpPr/>
+          <p:nvPr/>
+        </p:nvSpPr>
+        <p:spPr>
+          <a:xfrm>
+            <a:off x="3197186" y="7689198"/>
+            <a:ext cx="2410800" cy="480900"/>
+          </a:xfrm>
+          <a:prstGeom prst="roundRect">
+            <a:avLst>
+              <a:gd name="adj" fmla="val 16667"/>
+            </a:avLst>
+          </a:prstGeom>
+          <a:solidFill>
+            <a:srgbClr val="E6B8AF"/>
+          </a:solidFill>
+          <a:ln w="28575" cap="flat" cmpd="sng">
+            <a:solidFill>
+              <a:srgbClr val="5B0F00"/>
+            </a:solidFill>
+            <a:prstDash val="solid"/>
+            <a:round/>
+            <a:headEnd type="none" w="sm" len="sm"/>
+            <a:tailEnd type="none" w="sm" len="sm"/>
+          </a:ln>
+        </p:spPr>
+        <p:txBody>
+          <a:bodyPr spcFirstLastPara="1" wrap="square" lIns="91425" tIns="91425" rIns="91425" bIns="91425" anchor="ctr" anchorCtr="0">
+            <a:noAutofit/>
+          </a:bodyPr>
+          <a:lstStyle/>
+          <a:p>
+            <a:pPr marL="0" lvl="0" indent="0" algn="ctr" rtl="0">
+              <a:spcBef>
+                <a:spcPts val="0"/>
+              </a:spcBef>
+              <a:spcAft>
+                <a:spcPts val="0"/>
+              </a:spcAft>
+              <a:buNone/>
+            </a:pPr>
+            <a:r>
+              <a:rPr lang="en-GB" sz="1800" b="1" dirty="0">
+                <a:latin typeface="Consolas"/>
+                <a:ea typeface="Consolas"/>
+                <a:cs typeface="Consolas"/>
+                <a:sym typeface="Consolas"/>
+              </a:rPr>
+              <a:t>67912</a:t>
+            </a:r>
+            <a:endParaRPr sz="1800" b="1" dirty="0">
+              <a:latin typeface="Consolas"/>
+              <a:ea typeface="Consolas"/>
+              <a:cs typeface="Consolas"/>
+              <a:sym typeface="Consolas"/>
+            </a:endParaRPr>
+          </a:p>
+        </p:txBody>
+      </p:sp>
+      <p:sp>
+        <p:nvSpPr>
+          <p:cNvPr id="7" name="Google Shape;79;p15">
+            <a:extLst>
+              <a:ext uri="{FF2B5EF4-FFF2-40B4-BE49-F238E27FC236}">
+                <a16:creationId xmlns:a16="http://schemas.microsoft.com/office/drawing/2014/main" id="{291A0CC3-4110-4639-1C79-D3DD3C4BE937}"/>
+              </a:ext>
+            </a:extLst>
+          </p:cNvPr>
+          <p:cNvSpPr/>
+          <p:nvPr/>
+        </p:nvSpPr>
+        <p:spPr>
+          <a:xfrm>
+            <a:off x="3197186" y="9265103"/>
+            <a:ext cx="2410800" cy="480900"/>
+          </a:xfrm>
+          <a:prstGeom prst="roundRect">
+            <a:avLst>
+              <a:gd name="adj" fmla="val 16667"/>
+            </a:avLst>
+          </a:prstGeom>
+          <a:solidFill>
+            <a:srgbClr val="E6B8AF"/>
+          </a:solidFill>
+          <a:ln w="28575" cap="flat" cmpd="sng">
+            <a:solidFill>
+              <a:srgbClr val="5B0F00"/>
+            </a:solidFill>
+            <a:prstDash val="solid"/>
+            <a:round/>
+            <a:headEnd type="none" w="sm" len="sm"/>
+            <a:tailEnd type="none" w="sm" len="sm"/>
+          </a:ln>
+        </p:spPr>
+        <p:txBody>
+          <a:bodyPr spcFirstLastPara="1" wrap="square" lIns="91425" tIns="91425" rIns="91425" bIns="91425" anchor="ctr" anchorCtr="0">
+            <a:noAutofit/>
+          </a:bodyPr>
+          <a:lstStyle/>
+          <a:p>
+            <a:pPr marL="0" lvl="0" indent="0" algn="ctr" rtl="0">
+              <a:spcBef>
+                <a:spcPts val="0"/>
+              </a:spcBef>
+              <a:spcAft>
+                <a:spcPts val="0"/>
+              </a:spcAft>
+              <a:buNone/>
+            </a:pPr>
+            <a:r>
+              <a:rPr lang="en-GB" sz="1800" b="1" dirty="0">
+                <a:latin typeface="Consolas"/>
+                <a:ea typeface="Consolas"/>
+                <a:cs typeface="Consolas"/>
+                <a:sym typeface="Consolas"/>
+              </a:rPr>
+              <a:t>67870</a:t>
+            </a:r>
+            <a:endParaRPr sz="1800" b="1" dirty="0">
+              <a:latin typeface="Consolas"/>
+              <a:ea typeface="Consolas"/>
+              <a:cs typeface="Consolas"/>
+              <a:sym typeface="Consolas"/>
+            </a:endParaRPr>
+          </a:p>
+        </p:txBody>
+      </p:sp>
+      <p:sp>
+        <p:nvSpPr>
+          <p:cNvPr id="15" name="Google Shape;92;p15">
+            <a:extLst>
+              <a:ext uri="{FF2B5EF4-FFF2-40B4-BE49-F238E27FC236}">
+                <a16:creationId xmlns:a16="http://schemas.microsoft.com/office/drawing/2014/main" id="{3D597083-EB0F-4290-8143-BF179502298F}"/>
+              </a:ext>
+            </a:extLst>
+          </p:cNvPr>
+          <p:cNvSpPr/>
+          <p:nvPr/>
+        </p:nvSpPr>
+        <p:spPr>
+          <a:xfrm>
+            <a:off x="270828" y="872940"/>
+            <a:ext cx="2185575" cy="1792037"/>
+          </a:xfrm>
+          <a:prstGeom prst="roundRect">
+            <a:avLst>
+              <a:gd name="adj" fmla="val 16667"/>
+            </a:avLst>
+          </a:prstGeom>
+          <a:solidFill>
+            <a:srgbClr val="D9EAD3"/>
+          </a:solidFill>
+          <a:ln w="28575" cap="flat" cmpd="sng">
+            <a:solidFill>
+              <a:srgbClr val="274E13"/>
+            </a:solidFill>
+            <a:prstDash val="solid"/>
+            <a:round/>
+            <a:headEnd type="none" w="sm" len="sm"/>
+            <a:tailEnd type="none" w="sm" len="sm"/>
+          </a:ln>
+        </p:spPr>
+        <p:txBody>
+          <a:bodyPr spcFirstLastPara="1" wrap="square" lIns="91425" tIns="91425" rIns="91425" bIns="91425" anchor="t" anchorCtr="0">
+            <a:noAutofit/>
+          </a:bodyPr>
+          <a:lstStyle/>
+          <a:p>
+            <a:pPr lvl="0"/>
+            <a:r>
+              <a:rPr lang="pt-PT" dirty="0">
+                <a:latin typeface="Consolas"/>
+                <a:ea typeface="Consolas"/>
+                <a:cs typeface="Consolas"/>
+                <a:sym typeface="Consolas"/>
+              </a:rPr>
+              <a:t>T1: Acabar de implementar o gerador de mapa semanal.</a:t>
+            </a:r>
+            <a:endParaRPr dirty="0">
+              <a:latin typeface="Consolas"/>
+              <a:ea typeface="Consolas"/>
+              <a:cs typeface="Consolas"/>
+              <a:sym typeface="Consolas"/>
+            </a:endParaRPr>
+          </a:p>
+        </p:txBody>
+      </p:sp>
+      <p:sp>
+        <p:nvSpPr>
+          <p:cNvPr id="16" name="Google Shape;92;p15">
+            <a:extLst>
+              <a:ext uri="{FF2B5EF4-FFF2-40B4-BE49-F238E27FC236}">
+                <a16:creationId xmlns:a16="http://schemas.microsoft.com/office/drawing/2014/main" id="{07784F17-3532-FD63-B1B6-5CC770A9A748}"/>
+              </a:ext>
+            </a:extLst>
+          </p:cNvPr>
+          <p:cNvSpPr/>
+          <p:nvPr/>
+        </p:nvSpPr>
+        <p:spPr>
+          <a:xfrm>
+            <a:off x="277880" y="2783177"/>
+            <a:ext cx="2185575" cy="1792037"/>
+          </a:xfrm>
+          <a:prstGeom prst="roundRect">
+            <a:avLst>
+              <a:gd name="adj" fmla="val 16667"/>
+            </a:avLst>
+          </a:prstGeom>
+          <a:solidFill>
+            <a:srgbClr val="D9EAD3"/>
+          </a:solidFill>
+          <a:ln w="28575" cap="flat" cmpd="sng">
+            <a:solidFill>
+              <a:srgbClr val="274E13"/>
+            </a:solidFill>
+            <a:prstDash val="solid"/>
+            <a:round/>
+            <a:headEnd type="none" w="sm" len="sm"/>
+            <a:tailEnd type="none" w="sm" len="sm"/>
+          </a:ln>
+        </p:spPr>
+        <p:txBody>
+          <a:bodyPr spcFirstLastPara="1" wrap="square" lIns="91425" tIns="91425" rIns="91425" bIns="91425" anchor="t" anchorCtr="0">
+            <a:noAutofit/>
+          </a:bodyPr>
+          <a:lstStyle/>
+          <a:p>
+            <a:pPr lvl="0"/>
+            <a:r>
+              <a:rPr lang="pt-PT" dirty="0">
+                <a:latin typeface="Consolas"/>
+                <a:ea typeface="Consolas"/>
+                <a:cs typeface="Consolas"/>
+                <a:sym typeface="Consolas"/>
+              </a:rPr>
+              <a:t>T2: Acabar de implementar a </a:t>
+            </a:r>
+            <a:r>
+              <a:rPr lang="pt-PT" dirty="0" err="1">
+                <a:latin typeface="Consolas"/>
+                <a:ea typeface="Consolas"/>
+                <a:cs typeface="Consolas"/>
+                <a:sym typeface="Consolas"/>
+              </a:rPr>
+              <a:t>Health</a:t>
+            </a:r>
+            <a:r>
+              <a:rPr lang="pt-PT" dirty="0">
+                <a:latin typeface="Consolas"/>
+                <a:ea typeface="Consolas"/>
+                <a:cs typeface="Consolas"/>
+                <a:sym typeface="Consolas"/>
+              </a:rPr>
+              <a:t> Bar de cada </a:t>
+            </a:r>
+            <a:r>
+              <a:rPr lang="pt-PT" dirty="0" err="1">
+                <a:latin typeface="Consolas"/>
+                <a:ea typeface="Consolas"/>
+                <a:cs typeface="Consolas"/>
+                <a:sym typeface="Consolas"/>
+              </a:rPr>
+              <a:t>wave</a:t>
+            </a:r>
+            <a:r>
+              <a:rPr lang="pt-PT" dirty="0">
+                <a:latin typeface="Consolas"/>
+                <a:ea typeface="Consolas"/>
+                <a:cs typeface="Consolas"/>
+                <a:sym typeface="Consolas"/>
+              </a:rPr>
+              <a:t> de inimigos e fazer o </a:t>
+            </a:r>
+            <a:r>
+              <a:rPr lang="pt-PT" dirty="0" err="1">
+                <a:latin typeface="Consolas"/>
+                <a:ea typeface="Consolas"/>
+                <a:cs typeface="Consolas"/>
+                <a:sym typeface="Consolas"/>
+              </a:rPr>
+              <a:t>review</a:t>
+            </a:r>
+            <a:r>
+              <a:rPr lang="pt-PT" dirty="0">
+                <a:latin typeface="Consolas"/>
+                <a:ea typeface="Consolas"/>
+                <a:cs typeface="Consolas"/>
+                <a:sym typeface="Consolas"/>
+              </a:rPr>
+              <a:t>.</a:t>
+            </a:r>
+            <a:endParaRPr dirty="0">
+              <a:latin typeface="Consolas"/>
+              <a:ea typeface="Consolas"/>
+              <a:cs typeface="Consolas"/>
+              <a:sym typeface="Consolas"/>
+            </a:endParaRPr>
+          </a:p>
+        </p:txBody>
+      </p:sp>
+      <p:sp>
+        <p:nvSpPr>
+          <p:cNvPr id="17" name="Google Shape;92;p15">
+            <a:extLst>
+              <a:ext uri="{FF2B5EF4-FFF2-40B4-BE49-F238E27FC236}">
+                <a16:creationId xmlns:a16="http://schemas.microsoft.com/office/drawing/2014/main" id="{0FF2637C-A33B-57B4-748E-01BCA8231306}"/>
+              </a:ext>
+            </a:extLst>
+          </p:cNvPr>
+          <p:cNvSpPr/>
+          <p:nvPr/>
+        </p:nvSpPr>
+        <p:spPr>
+          <a:xfrm>
+            <a:off x="277880" y="4699227"/>
+            <a:ext cx="2185575" cy="1792037"/>
+          </a:xfrm>
+          <a:prstGeom prst="roundRect">
+            <a:avLst>
+              <a:gd name="adj" fmla="val 16667"/>
+            </a:avLst>
+          </a:prstGeom>
+          <a:solidFill>
+            <a:srgbClr val="D9EAD3"/>
+          </a:solidFill>
+          <a:ln w="28575" cap="flat" cmpd="sng">
+            <a:solidFill>
+              <a:srgbClr val="274E13"/>
+            </a:solidFill>
+            <a:prstDash val="solid"/>
+            <a:round/>
+            <a:headEnd type="none" w="sm" len="sm"/>
+            <a:tailEnd type="none" w="sm" len="sm"/>
+          </a:ln>
+        </p:spPr>
+        <p:txBody>
+          <a:bodyPr spcFirstLastPara="1" wrap="square" lIns="91425" tIns="91425" rIns="91425" bIns="91425" anchor="t" anchorCtr="0">
+            <a:noAutofit/>
+          </a:bodyPr>
+          <a:lstStyle/>
+          <a:p>
+            <a:pPr lvl="0"/>
+            <a:r>
+              <a:rPr lang="pt-PT" dirty="0">
+                <a:latin typeface="Consolas"/>
+                <a:ea typeface="Consolas"/>
+                <a:cs typeface="Consolas"/>
+                <a:sym typeface="Consolas"/>
+              </a:rPr>
+              <a:t>T3: Acabar de implementar as diferentes condições climatéricas e fazer o </a:t>
+            </a:r>
+            <a:r>
+              <a:rPr lang="pt-PT" dirty="0" err="1">
+                <a:latin typeface="Consolas"/>
+                <a:ea typeface="Consolas"/>
+                <a:cs typeface="Consolas"/>
+                <a:sym typeface="Consolas"/>
+              </a:rPr>
+              <a:t>review</a:t>
+            </a:r>
+            <a:r>
+              <a:rPr lang="pt-PT" dirty="0">
+                <a:latin typeface="Consolas"/>
+                <a:ea typeface="Consolas"/>
+                <a:cs typeface="Consolas"/>
+                <a:sym typeface="Consolas"/>
+              </a:rPr>
+              <a:t>.</a:t>
+            </a:r>
+            <a:endParaRPr dirty="0">
+              <a:latin typeface="Consolas"/>
+              <a:ea typeface="Consolas"/>
+              <a:cs typeface="Consolas"/>
+              <a:sym typeface="Consolas"/>
+            </a:endParaRPr>
+          </a:p>
+        </p:txBody>
+      </p:sp>
+      <p:sp>
+        <p:nvSpPr>
+          <p:cNvPr id="19" name="Google Shape;86;p15">
+            <a:extLst>
+              <a:ext uri="{FF2B5EF4-FFF2-40B4-BE49-F238E27FC236}">
+                <a16:creationId xmlns:a16="http://schemas.microsoft.com/office/drawing/2014/main" id="{5A9D5649-F694-D8B5-7DC3-7475446F2EB4}"/>
+              </a:ext>
+            </a:extLst>
+          </p:cNvPr>
+          <p:cNvSpPr/>
+          <p:nvPr/>
+        </p:nvSpPr>
+        <p:spPr>
+          <a:xfrm>
+            <a:off x="6113258" y="1294224"/>
+            <a:ext cx="2609591" cy="8864188"/>
+          </a:xfrm>
+          <a:prstGeom prst="roundRect">
+            <a:avLst>
+              <a:gd name="adj" fmla="val 16667"/>
+            </a:avLst>
+          </a:prstGeom>
+          <a:solidFill>
+            <a:srgbClr val="D9EAD3"/>
+          </a:solidFill>
+          <a:ln w="28575" cap="flat" cmpd="sng">
+            <a:solidFill>
+              <a:srgbClr val="274E13"/>
+            </a:solidFill>
+            <a:prstDash val="solid"/>
+            <a:round/>
+            <a:headEnd type="none" w="sm" len="sm"/>
+            <a:tailEnd type="none" w="sm" len="sm"/>
+          </a:ln>
+        </p:spPr>
+        <p:txBody>
+          <a:bodyPr spcFirstLastPara="1" wrap="square" lIns="91425" tIns="91425" rIns="91425" bIns="91425" anchor="t" anchorCtr="0">
+            <a:noAutofit/>
+          </a:bodyPr>
+          <a:lstStyle/>
+          <a:p>
+            <a:pPr marL="0" lvl="0" indent="0" rtl="0">
+              <a:spcBef>
+                <a:spcPts val="0"/>
+              </a:spcBef>
+              <a:spcAft>
+                <a:spcPts val="0"/>
+              </a:spcAft>
+              <a:buNone/>
+            </a:pPr>
+            <a:r>
+              <a:rPr lang="en-GB" dirty="0">
+                <a:latin typeface="Consolas"/>
+                <a:ea typeface="Consolas"/>
+                <a:cs typeface="Consolas"/>
+                <a:sym typeface="Consolas"/>
+              </a:rPr>
+              <a:t>US1: Como </a:t>
+            </a:r>
+            <a:r>
+              <a:rPr lang="en-GB" dirty="0" err="1">
+                <a:latin typeface="Consolas"/>
+                <a:ea typeface="Consolas"/>
+                <a:cs typeface="Consolas"/>
+                <a:sym typeface="Consolas"/>
+              </a:rPr>
+              <a:t>membro</a:t>
+            </a:r>
+            <a:r>
+              <a:rPr lang="en-GB" dirty="0">
+                <a:latin typeface="Consolas"/>
+                <a:ea typeface="Consolas"/>
+                <a:cs typeface="Consolas"/>
+                <a:sym typeface="Consolas"/>
+              </a:rPr>
+              <a:t> da </a:t>
+            </a:r>
+            <a:r>
+              <a:rPr lang="en-GB" dirty="0" err="1">
+                <a:latin typeface="Consolas"/>
+                <a:ea typeface="Consolas"/>
+                <a:cs typeface="Consolas"/>
+                <a:sym typeface="Consolas"/>
+              </a:rPr>
+              <a:t>equipa</a:t>
+            </a:r>
+            <a:r>
+              <a:rPr lang="en-GB" dirty="0">
+                <a:latin typeface="Consolas"/>
+                <a:ea typeface="Consolas"/>
+                <a:cs typeface="Consolas"/>
+                <a:sym typeface="Consolas"/>
+              </a:rPr>
+              <a:t>, </a:t>
+            </a:r>
+            <a:r>
+              <a:rPr lang="en-GB" dirty="0" err="1">
+                <a:latin typeface="Consolas"/>
+                <a:ea typeface="Consolas"/>
+                <a:cs typeface="Consolas"/>
+                <a:sym typeface="Consolas"/>
+              </a:rPr>
+              <a:t>quero</a:t>
+            </a:r>
+            <a:r>
+              <a:rPr lang="en-GB" dirty="0">
+                <a:latin typeface="Consolas"/>
+                <a:ea typeface="Consolas"/>
+                <a:cs typeface="Consolas"/>
+                <a:sym typeface="Consolas"/>
+              </a:rPr>
+              <a:t> </a:t>
+            </a:r>
+            <a:r>
+              <a:rPr lang="en-GB" dirty="0" err="1">
+                <a:latin typeface="Consolas"/>
+                <a:ea typeface="Consolas"/>
+                <a:cs typeface="Consolas"/>
+                <a:sym typeface="Consolas"/>
+              </a:rPr>
+              <a:t>implementar</a:t>
+            </a:r>
+            <a:r>
+              <a:rPr lang="en-GB" dirty="0">
+                <a:latin typeface="Consolas"/>
+                <a:ea typeface="Consolas"/>
+                <a:cs typeface="Consolas"/>
+                <a:sym typeface="Consolas"/>
+              </a:rPr>
+              <a:t> um modo de </a:t>
+            </a:r>
+            <a:r>
+              <a:rPr lang="en-GB" dirty="0" err="1">
+                <a:latin typeface="Consolas"/>
+                <a:ea typeface="Consolas"/>
+                <a:cs typeface="Consolas"/>
+                <a:sym typeface="Consolas"/>
+              </a:rPr>
+              <a:t>jogo</a:t>
+            </a:r>
+            <a:r>
+              <a:rPr lang="en-GB" dirty="0">
+                <a:latin typeface="Consolas"/>
+                <a:ea typeface="Consolas"/>
+                <a:cs typeface="Consolas"/>
+                <a:sym typeface="Consolas"/>
+              </a:rPr>
+              <a:t> </a:t>
+            </a:r>
+            <a:r>
+              <a:rPr lang="en-GB" dirty="0" err="1">
+                <a:latin typeface="Consolas"/>
+                <a:ea typeface="Consolas"/>
+                <a:cs typeface="Consolas"/>
+                <a:sym typeface="Consolas"/>
+              </a:rPr>
+              <a:t>onde</a:t>
+            </a:r>
+            <a:r>
+              <a:rPr lang="en-GB" dirty="0">
+                <a:latin typeface="Consolas"/>
+                <a:ea typeface="Consolas"/>
+                <a:cs typeface="Consolas"/>
+                <a:sym typeface="Consolas"/>
+              </a:rPr>
+              <a:t> o </a:t>
+            </a:r>
+            <a:r>
+              <a:rPr lang="en-GB" dirty="0" err="1">
+                <a:latin typeface="Consolas"/>
+                <a:ea typeface="Consolas"/>
+                <a:cs typeface="Consolas"/>
+                <a:sym typeface="Consolas"/>
+              </a:rPr>
+              <a:t>mapa</a:t>
+            </a:r>
+            <a:r>
+              <a:rPr lang="en-GB" dirty="0">
+                <a:latin typeface="Consolas"/>
+                <a:ea typeface="Consolas"/>
+                <a:cs typeface="Consolas"/>
+                <a:sym typeface="Consolas"/>
+              </a:rPr>
+              <a:t> </a:t>
+            </a:r>
+            <a:r>
+              <a:rPr lang="en-GB" dirty="0" err="1">
+                <a:latin typeface="Consolas"/>
+                <a:ea typeface="Consolas"/>
+                <a:cs typeface="Consolas"/>
+                <a:sym typeface="Consolas"/>
+              </a:rPr>
+              <a:t>muda</a:t>
+            </a:r>
+            <a:r>
+              <a:rPr lang="en-GB" dirty="0">
+                <a:latin typeface="Consolas"/>
+                <a:ea typeface="Consolas"/>
+                <a:cs typeface="Consolas"/>
+                <a:sym typeface="Consolas"/>
+              </a:rPr>
+              <a:t> </a:t>
+            </a:r>
+            <a:r>
+              <a:rPr lang="en-GB" dirty="0" err="1">
+                <a:latin typeface="Consolas"/>
+                <a:ea typeface="Consolas"/>
+                <a:cs typeface="Consolas"/>
+                <a:sym typeface="Consolas"/>
+              </a:rPr>
+              <a:t>semanalmente</a:t>
+            </a:r>
+            <a:r>
+              <a:rPr lang="en-GB" dirty="0">
+                <a:latin typeface="Consolas"/>
+                <a:ea typeface="Consolas"/>
+                <a:cs typeface="Consolas"/>
+                <a:sym typeface="Consolas"/>
+              </a:rPr>
+              <a:t> e </a:t>
+            </a:r>
+            <a:r>
+              <a:rPr lang="en-GB" dirty="0" err="1">
+                <a:latin typeface="Consolas"/>
+                <a:ea typeface="Consolas"/>
+                <a:cs typeface="Consolas"/>
+                <a:sym typeface="Consolas"/>
+              </a:rPr>
+              <a:t>possui</a:t>
+            </a:r>
+            <a:r>
+              <a:rPr lang="en-GB" dirty="0">
+                <a:latin typeface="Consolas"/>
+                <a:ea typeface="Consolas"/>
+                <a:cs typeface="Consolas"/>
+                <a:sym typeface="Consolas"/>
+              </a:rPr>
+              <a:t> um ranking </a:t>
+            </a:r>
+            <a:r>
+              <a:rPr lang="en-GB" dirty="0" err="1">
+                <a:latin typeface="Consolas"/>
+                <a:ea typeface="Consolas"/>
+                <a:cs typeface="Consolas"/>
+                <a:sym typeface="Consolas"/>
+              </a:rPr>
+              <a:t>baseado</a:t>
+            </a:r>
+            <a:r>
+              <a:rPr lang="en-GB" dirty="0">
+                <a:latin typeface="Consolas"/>
+                <a:ea typeface="Consolas"/>
+                <a:cs typeface="Consolas"/>
+                <a:sym typeface="Consolas"/>
+              </a:rPr>
+              <a:t> </a:t>
+            </a:r>
+            <a:r>
+              <a:rPr lang="en-GB" dirty="0" err="1">
+                <a:latin typeface="Consolas"/>
+                <a:ea typeface="Consolas"/>
+                <a:cs typeface="Consolas"/>
+                <a:sym typeface="Consolas"/>
+              </a:rPr>
+              <a:t>na</a:t>
+            </a:r>
+            <a:r>
+              <a:rPr lang="en-GB" dirty="0">
+                <a:latin typeface="Consolas"/>
+                <a:ea typeface="Consolas"/>
+                <a:cs typeface="Consolas"/>
+                <a:sym typeface="Consolas"/>
+              </a:rPr>
+              <a:t> performance.</a:t>
+            </a:r>
+            <a:endParaRPr dirty="0">
+              <a:latin typeface="Consolas"/>
+              <a:ea typeface="Consolas"/>
+              <a:cs typeface="Consolas"/>
+              <a:sym typeface="Consolas"/>
+            </a:endParaRPr>
+          </a:p>
+        </p:txBody>
+      </p:sp>
+      <p:sp>
+        <p:nvSpPr>
+          <p:cNvPr id="20" name="Google Shape;92;p15">
+            <a:extLst>
+              <a:ext uri="{FF2B5EF4-FFF2-40B4-BE49-F238E27FC236}">
+                <a16:creationId xmlns:a16="http://schemas.microsoft.com/office/drawing/2014/main" id="{4AA76463-0120-A363-0737-1D738CF2A3BD}"/>
+              </a:ext>
+            </a:extLst>
+          </p:cNvPr>
+          <p:cNvSpPr/>
+          <p:nvPr/>
+        </p:nvSpPr>
+        <p:spPr>
+          <a:xfrm>
+            <a:off x="6113258" y="3203475"/>
+            <a:ext cx="2609587" cy="7609683"/>
+          </a:xfrm>
+          <a:prstGeom prst="roundRect">
+            <a:avLst>
+              <a:gd name="adj" fmla="val 16667"/>
+            </a:avLst>
+          </a:prstGeom>
+          <a:solidFill>
+            <a:srgbClr val="D9EAD3"/>
+          </a:solidFill>
+          <a:ln w="28575" cap="flat" cmpd="sng">
+            <a:solidFill>
+              <a:srgbClr val="274E13"/>
+            </a:solidFill>
+            <a:prstDash val="solid"/>
+            <a:round/>
+            <a:headEnd type="none" w="sm" len="sm"/>
+            <a:tailEnd type="none" w="sm" len="sm"/>
+          </a:ln>
+        </p:spPr>
+        <p:txBody>
+          <a:bodyPr spcFirstLastPara="1" wrap="square" lIns="91425" tIns="91425" rIns="91425" bIns="91425" anchor="t" anchorCtr="0">
+            <a:noAutofit/>
+          </a:bodyPr>
+          <a:lstStyle/>
+          <a:p>
+            <a:pPr lvl="0"/>
+            <a:r>
+              <a:rPr lang="en-GB" dirty="0">
+                <a:latin typeface="Consolas"/>
+                <a:ea typeface="Consolas"/>
+                <a:cs typeface="Consolas"/>
+                <a:sym typeface="Consolas"/>
+              </a:rPr>
+              <a:t>US2: Como </a:t>
+            </a:r>
+            <a:r>
+              <a:rPr lang="en-GB" dirty="0" err="1">
+                <a:latin typeface="Consolas"/>
+                <a:ea typeface="Consolas"/>
+                <a:cs typeface="Consolas"/>
+                <a:sym typeface="Consolas"/>
+              </a:rPr>
+              <a:t>membro</a:t>
+            </a:r>
+            <a:r>
+              <a:rPr lang="en-GB" dirty="0">
+                <a:latin typeface="Consolas"/>
+                <a:ea typeface="Consolas"/>
+                <a:cs typeface="Consolas"/>
+                <a:sym typeface="Consolas"/>
+              </a:rPr>
+              <a:t> da </a:t>
+            </a:r>
+            <a:r>
+              <a:rPr lang="en-GB" dirty="0" err="1">
+                <a:latin typeface="Consolas"/>
+                <a:ea typeface="Consolas"/>
+                <a:cs typeface="Consolas"/>
+                <a:sym typeface="Consolas"/>
+              </a:rPr>
+              <a:t>equipa</a:t>
+            </a:r>
+            <a:r>
+              <a:rPr lang="en-GB" dirty="0">
+                <a:latin typeface="Consolas"/>
+                <a:ea typeface="Consolas"/>
+                <a:cs typeface="Consolas"/>
+                <a:sym typeface="Consolas"/>
+              </a:rPr>
+              <a:t> </a:t>
+            </a:r>
+            <a:r>
+              <a:rPr lang="en-GB" dirty="0" err="1">
+                <a:latin typeface="Consolas"/>
+                <a:ea typeface="Consolas"/>
+                <a:cs typeface="Consolas"/>
+                <a:sym typeface="Consolas"/>
+              </a:rPr>
+              <a:t>quero</a:t>
+            </a:r>
+            <a:r>
+              <a:rPr lang="pt-PT" dirty="0">
+                <a:latin typeface="Consolas"/>
+                <a:ea typeface="Consolas"/>
+                <a:cs typeface="Consolas"/>
+                <a:sym typeface="Consolas"/>
+              </a:rPr>
+              <a:t> implementar a </a:t>
+            </a:r>
+            <a:r>
+              <a:rPr lang="pt-PT" dirty="0" err="1">
+                <a:latin typeface="Consolas"/>
+                <a:ea typeface="Consolas"/>
+                <a:cs typeface="Consolas"/>
+                <a:sym typeface="Consolas"/>
+              </a:rPr>
+              <a:t>Health</a:t>
+            </a:r>
+            <a:r>
+              <a:rPr lang="pt-PT" dirty="0">
+                <a:latin typeface="Consolas"/>
+                <a:ea typeface="Consolas"/>
+                <a:cs typeface="Consolas"/>
+                <a:sym typeface="Consolas"/>
+              </a:rPr>
+              <a:t> Bar de cada </a:t>
+            </a:r>
+            <a:r>
+              <a:rPr lang="pt-PT" dirty="0" err="1">
+                <a:latin typeface="Consolas"/>
+                <a:ea typeface="Consolas"/>
+                <a:cs typeface="Consolas"/>
+                <a:sym typeface="Consolas"/>
+              </a:rPr>
+              <a:t>wave</a:t>
+            </a:r>
+            <a:r>
+              <a:rPr lang="pt-PT" dirty="0">
+                <a:latin typeface="Consolas"/>
+                <a:ea typeface="Consolas"/>
+                <a:cs typeface="Consolas"/>
+                <a:sym typeface="Consolas"/>
+              </a:rPr>
+              <a:t> de inimigos.</a:t>
+            </a:r>
+            <a:endParaRPr dirty="0">
+              <a:latin typeface="Consolas"/>
+              <a:ea typeface="Consolas"/>
+              <a:cs typeface="Consolas"/>
+              <a:sym typeface="Consolas"/>
+            </a:endParaRPr>
+          </a:p>
+        </p:txBody>
+      </p:sp>
+      <p:sp>
+        <p:nvSpPr>
+          <p:cNvPr id="21" name="Google Shape;92;p15">
+            <a:extLst>
+              <a:ext uri="{FF2B5EF4-FFF2-40B4-BE49-F238E27FC236}">
+                <a16:creationId xmlns:a16="http://schemas.microsoft.com/office/drawing/2014/main" id="{232B6B6E-700E-8286-71A1-6EE06569DF3A}"/>
+              </a:ext>
+            </a:extLst>
+          </p:cNvPr>
+          <p:cNvSpPr/>
+          <p:nvPr/>
+        </p:nvSpPr>
+        <p:spPr>
+          <a:xfrm>
+            <a:off x="6136546" y="4644094"/>
+            <a:ext cx="2609586" cy="6208084"/>
+          </a:xfrm>
+          <a:prstGeom prst="roundRect">
+            <a:avLst>
+              <a:gd name="adj" fmla="val 16667"/>
+            </a:avLst>
+          </a:prstGeom>
+          <a:solidFill>
+            <a:srgbClr val="D9EAD3"/>
+          </a:solidFill>
+          <a:ln w="28575" cap="flat" cmpd="sng">
+            <a:solidFill>
+              <a:srgbClr val="274E13"/>
+            </a:solidFill>
+            <a:prstDash val="solid"/>
+            <a:round/>
+            <a:headEnd type="none" w="sm" len="sm"/>
+            <a:tailEnd type="none" w="sm" len="sm"/>
+          </a:ln>
+        </p:spPr>
+        <p:txBody>
+          <a:bodyPr spcFirstLastPara="1" wrap="square" lIns="91425" tIns="91425" rIns="91425" bIns="91425" anchor="t" anchorCtr="0">
+            <a:noAutofit/>
+          </a:bodyPr>
+          <a:lstStyle/>
+          <a:p>
+            <a:pPr lvl="0"/>
+            <a:r>
+              <a:rPr lang="en-GB" dirty="0">
+                <a:latin typeface="Consolas"/>
+                <a:ea typeface="Consolas"/>
+                <a:cs typeface="Consolas"/>
+                <a:sym typeface="Consolas"/>
+              </a:rPr>
+              <a:t>US3: Como </a:t>
+            </a:r>
+            <a:r>
+              <a:rPr lang="en-GB" dirty="0" err="1">
+                <a:latin typeface="Consolas"/>
+                <a:ea typeface="Consolas"/>
+                <a:cs typeface="Consolas"/>
+                <a:sym typeface="Consolas"/>
+              </a:rPr>
+              <a:t>membro</a:t>
+            </a:r>
+            <a:r>
+              <a:rPr lang="en-GB" dirty="0">
+                <a:latin typeface="Consolas"/>
+                <a:ea typeface="Consolas"/>
+                <a:cs typeface="Consolas"/>
+                <a:sym typeface="Consolas"/>
+              </a:rPr>
+              <a:t> da </a:t>
+            </a:r>
+            <a:r>
+              <a:rPr lang="en-GB" dirty="0" err="1">
+                <a:latin typeface="Consolas"/>
+                <a:ea typeface="Consolas"/>
+                <a:cs typeface="Consolas"/>
+                <a:sym typeface="Consolas"/>
+              </a:rPr>
+              <a:t>equipa</a:t>
+            </a:r>
+            <a:r>
+              <a:rPr lang="en-GB" dirty="0">
+                <a:latin typeface="Consolas"/>
+                <a:ea typeface="Consolas"/>
+                <a:cs typeface="Consolas"/>
+                <a:sym typeface="Consolas"/>
+              </a:rPr>
+              <a:t> </a:t>
+            </a:r>
+            <a:r>
+              <a:rPr lang="en-GB" dirty="0" err="1">
+                <a:latin typeface="Consolas"/>
+                <a:ea typeface="Consolas"/>
+                <a:cs typeface="Consolas"/>
+                <a:sym typeface="Consolas"/>
+              </a:rPr>
+              <a:t>quero</a:t>
+            </a:r>
+            <a:r>
+              <a:rPr lang="pt-PT" dirty="0">
+                <a:latin typeface="Consolas"/>
+                <a:ea typeface="Consolas"/>
+                <a:cs typeface="Consolas"/>
+                <a:sym typeface="Consolas"/>
+              </a:rPr>
+              <a:t> implementar as diferentes condições climatéricas.</a:t>
+            </a:r>
+          </a:p>
+        </p:txBody>
+      </p:sp>
+      <p:sp>
+        <p:nvSpPr>
+          <p:cNvPr id="8" name="Google Shape;121;p16">
+            <a:extLst>
+              <a:ext uri="{FF2B5EF4-FFF2-40B4-BE49-F238E27FC236}">
+                <a16:creationId xmlns:a16="http://schemas.microsoft.com/office/drawing/2014/main" id="{805A6E3C-76D1-F106-727D-8DB93F2D4F85}"/>
+              </a:ext>
+            </a:extLst>
+          </p:cNvPr>
+          <p:cNvSpPr/>
+          <p:nvPr/>
+        </p:nvSpPr>
+        <p:spPr>
+          <a:xfrm>
+            <a:off x="18725151" y="1021952"/>
+            <a:ext cx="2410800" cy="2657243"/>
+          </a:xfrm>
+          <a:prstGeom prst="roundRect">
+            <a:avLst>
+              <a:gd name="adj" fmla="val 16667"/>
+            </a:avLst>
+          </a:prstGeom>
+          <a:solidFill>
+            <a:srgbClr val="D0E0E3"/>
+          </a:solidFill>
+          <a:ln w="28575" cap="flat" cmpd="sng">
+            <a:solidFill>
+              <a:srgbClr val="134F5C"/>
+            </a:solidFill>
+            <a:prstDash val="solid"/>
+            <a:round/>
+            <a:headEnd type="none" w="sm" len="sm"/>
+            <a:tailEnd type="none" w="sm" len="sm"/>
+          </a:ln>
+        </p:spPr>
+        <p:txBody>
+          <a:bodyPr spcFirstLastPara="1" wrap="square" lIns="91425" tIns="91425" rIns="91425" bIns="91425" anchor="t" anchorCtr="0">
+            <a:noAutofit/>
+          </a:bodyPr>
+          <a:lstStyle/>
+          <a:p>
+            <a:r>
+              <a:rPr lang="en-GB" dirty="0">
+                <a:latin typeface="Consolas"/>
+                <a:ea typeface="Consolas"/>
+                <a:cs typeface="Consolas"/>
+                <a:sym typeface="Consolas"/>
+              </a:rPr>
+              <a:t>T1: </a:t>
+            </a:r>
+            <a:r>
+              <a:rPr lang="pt-PT" dirty="0">
+                <a:latin typeface="Consolas"/>
+                <a:ea typeface="Consolas"/>
+                <a:cs typeface="Consolas"/>
+                <a:sym typeface="Consolas"/>
+              </a:rPr>
+              <a:t>Fazer Interface de Rankings e “jogar Desafio Semanal”</a:t>
+            </a:r>
+            <a:br>
+              <a:rPr lang="en-GB" dirty="0">
+                <a:latin typeface="Consolas"/>
+                <a:ea typeface="Consolas"/>
+                <a:cs typeface="Consolas"/>
+                <a:sym typeface="Consolas"/>
+              </a:rPr>
+            </a:br>
+            <a:br>
+              <a:rPr lang="en-GB" dirty="0">
+                <a:latin typeface="Consolas"/>
+                <a:ea typeface="Consolas"/>
+                <a:cs typeface="Consolas"/>
+                <a:sym typeface="Consolas"/>
+              </a:rPr>
+            </a:br>
+            <a:endParaRPr lang="en-GB" dirty="0">
+              <a:latin typeface="Consolas"/>
+              <a:ea typeface="Consolas"/>
+              <a:cs typeface="Consolas"/>
+              <a:sym typeface="Consolas"/>
+            </a:endParaRPr>
+          </a:p>
+          <a:p>
+            <a:pPr marL="0" lvl="0" indent="0" algn="l" rtl="0">
+              <a:spcBef>
+                <a:spcPts val="0"/>
+              </a:spcBef>
+              <a:spcAft>
+                <a:spcPts val="0"/>
+              </a:spcAft>
+              <a:buNone/>
+            </a:pPr>
+            <a:endParaRPr dirty="0">
+              <a:latin typeface="Consolas"/>
+              <a:ea typeface="Consolas"/>
+              <a:cs typeface="Consolas"/>
+              <a:sym typeface="Consolas"/>
+            </a:endParaRPr>
+          </a:p>
+        </p:txBody>
+      </p:sp>
+      <p:sp>
+        <p:nvSpPr>
+          <p:cNvPr id="9" name="Google Shape;121;p16">
+            <a:extLst>
+              <a:ext uri="{FF2B5EF4-FFF2-40B4-BE49-F238E27FC236}">
+                <a16:creationId xmlns:a16="http://schemas.microsoft.com/office/drawing/2014/main" id="{28C1938A-8197-12AB-8260-ED0931FE9A60}"/>
+              </a:ext>
+            </a:extLst>
+          </p:cNvPr>
+          <p:cNvSpPr/>
+          <p:nvPr/>
+        </p:nvSpPr>
+        <p:spPr>
+          <a:xfrm>
+            <a:off x="12423686" y="5744289"/>
+            <a:ext cx="2410800" cy="1215821"/>
+          </a:xfrm>
+          <a:prstGeom prst="roundRect">
+            <a:avLst>
+              <a:gd name="adj" fmla="val 16667"/>
+            </a:avLst>
+          </a:prstGeom>
+          <a:solidFill>
+            <a:srgbClr val="D0E0E3"/>
+          </a:solidFill>
+          <a:ln w="28575" cap="flat" cmpd="sng">
+            <a:solidFill>
+              <a:srgbClr val="134F5C"/>
+            </a:solidFill>
+            <a:prstDash val="solid"/>
+            <a:round/>
+            <a:headEnd type="none" w="sm" len="sm"/>
+            <a:tailEnd type="none" w="sm" len="sm"/>
+          </a:ln>
+        </p:spPr>
+        <p:txBody>
+          <a:bodyPr spcFirstLastPara="1" wrap="square" lIns="91425" tIns="91425" rIns="91425" bIns="91425" anchor="t" anchorCtr="0">
+            <a:noAutofit/>
+          </a:bodyPr>
+          <a:lstStyle/>
+          <a:p>
+            <a:r>
+              <a:rPr lang="pt-PT" dirty="0">
+                <a:latin typeface="Consolas"/>
+                <a:ea typeface="Consolas"/>
+                <a:cs typeface="Consolas"/>
+                <a:sym typeface="Consolas"/>
+              </a:rPr>
+              <a:t>T2: Implementar a </a:t>
+            </a:r>
+            <a:r>
+              <a:rPr lang="pt-PT" dirty="0" err="1">
+                <a:latin typeface="Consolas"/>
+                <a:ea typeface="Consolas"/>
+                <a:cs typeface="Consolas"/>
+                <a:sym typeface="Consolas"/>
+              </a:rPr>
+              <a:t>Health</a:t>
+            </a:r>
+            <a:r>
+              <a:rPr lang="pt-PT" dirty="0">
+                <a:latin typeface="Consolas"/>
+                <a:ea typeface="Consolas"/>
+                <a:cs typeface="Consolas"/>
+                <a:sym typeface="Consolas"/>
+              </a:rPr>
+              <a:t> Bar de cada </a:t>
+            </a:r>
+            <a:r>
+              <a:rPr lang="pt-PT" dirty="0" err="1">
+                <a:latin typeface="Consolas"/>
+                <a:ea typeface="Consolas"/>
+                <a:cs typeface="Consolas"/>
+                <a:sym typeface="Consolas"/>
+              </a:rPr>
+              <a:t>wave</a:t>
+            </a:r>
+            <a:r>
+              <a:rPr lang="pt-PT" dirty="0">
+                <a:latin typeface="Consolas"/>
+                <a:ea typeface="Consolas"/>
+                <a:cs typeface="Consolas"/>
+                <a:sym typeface="Consolas"/>
+              </a:rPr>
+              <a:t> de inimigos.</a:t>
+            </a:r>
+          </a:p>
+          <a:p>
+            <a:r>
+              <a:rPr lang="en-GB" dirty="0">
+                <a:latin typeface="Consolas"/>
+                <a:ea typeface="Consolas"/>
+                <a:cs typeface="Consolas"/>
+                <a:sym typeface="Consolas"/>
+              </a:rPr>
+              <a:t> </a:t>
+            </a:r>
+            <a:br>
+              <a:rPr lang="en-GB" dirty="0">
+                <a:latin typeface="Consolas"/>
+                <a:ea typeface="Consolas"/>
+                <a:cs typeface="Consolas"/>
+                <a:sym typeface="Consolas"/>
+              </a:rPr>
+            </a:br>
+            <a:br>
+              <a:rPr lang="en-GB" dirty="0">
+                <a:latin typeface="Consolas"/>
+                <a:ea typeface="Consolas"/>
+                <a:cs typeface="Consolas"/>
+                <a:sym typeface="Consolas"/>
+              </a:rPr>
+            </a:br>
+            <a:endParaRPr lang="en-GB" dirty="0">
+              <a:latin typeface="Consolas"/>
+              <a:ea typeface="Consolas"/>
+              <a:cs typeface="Consolas"/>
+              <a:sym typeface="Consolas"/>
+            </a:endParaRPr>
+          </a:p>
+          <a:p>
+            <a:pPr marL="0" lvl="0" indent="0" algn="l" rtl="0">
+              <a:spcBef>
+                <a:spcPts val="0"/>
+              </a:spcBef>
+              <a:spcAft>
+                <a:spcPts val="0"/>
+              </a:spcAft>
+              <a:buNone/>
+            </a:pPr>
+            <a:endParaRPr dirty="0">
+              <a:latin typeface="Consolas"/>
+              <a:ea typeface="Consolas"/>
+              <a:cs typeface="Consolas"/>
+              <a:sym typeface="Consolas"/>
+            </a:endParaRPr>
+          </a:p>
+        </p:txBody>
+      </p:sp>
+      <p:sp>
+        <p:nvSpPr>
+          <p:cNvPr id="10" name="Google Shape;121;p16">
+            <a:extLst>
+              <a:ext uri="{FF2B5EF4-FFF2-40B4-BE49-F238E27FC236}">
+                <a16:creationId xmlns:a16="http://schemas.microsoft.com/office/drawing/2014/main" id="{A9886EED-CED5-BB23-19B3-3BF9AAFDA0BE}"/>
+              </a:ext>
+            </a:extLst>
+          </p:cNvPr>
+          <p:cNvSpPr/>
+          <p:nvPr/>
+        </p:nvSpPr>
+        <p:spPr>
+          <a:xfrm>
+            <a:off x="12395940" y="4165308"/>
+            <a:ext cx="2410800" cy="749592"/>
+          </a:xfrm>
+          <a:prstGeom prst="roundRect">
+            <a:avLst>
+              <a:gd name="adj" fmla="val 16667"/>
+            </a:avLst>
+          </a:prstGeom>
+          <a:solidFill>
+            <a:srgbClr val="D0E0E3"/>
+          </a:solidFill>
+          <a:ln w="28575" cap="flat" cmpd="sng">
+            <a:solidFill>
+              <a:srgbClr val="134F5C"/>
+            </a:solidFill>
+            <a:prstDash val="solid"/>
+            <a:round/>
+            <a:headEnd type="none" w="sm" len="sm"/>
+            <a:tailEnd type="none" w="sm" len="sm"/>
+          </a:ln>
+        </p:spPr>
+        <p:txBody>
+          <a:bodyPr spcFirstLastPara="1" wrap="square" lIns="91425" tIns="91425" rIns="91425" bIns="91425" anchor="t" anchorCtr="0">
+            <a:noAutofit/>
+          </a:bodyPr>
+          <a:lstStyle/>
+          <a:p>
+            <a:r>
+              <a:rPr lang="pt-PT" dirty="0">
+                <a:latin typeface="Consolas"/>
+                <a:ea typeface="Consolas"/>
+                <a:cs typeface="Consolas"/>
+                <a:sym typeface="Consolas"/>
+              </a:rPr>
+              <a:t>T3: Implementar a parte do Terramoto.</a:t>
+            </a:r>
+          </a:p>
+          <a:p>
+            <a:r>
+              <a:rPr lang="en-GB" dirty="0">
+                <a:latin typeface="Consolas"/>
+                <a:ea typeface="Consolas"/>
+                <a:cs typeface="Consolas"/>
+                <a:sym typeface="Consolas"/>
+              </a:rPr>
+              <a:t> </a:t>
+            </a:r>
+            <a:br>
+              <a:rPr lang="en-GB" dirty="0">
+                <a:latin typeface="Consolas"/>
+                <a:ea typeface="Consolas"/>
+                <a:cs typeface="Consolas"/>
+                <a:sym typeface="Consolas"/>
+              </a:rPr>
+            </a:br>
+            <a:br>
+              <a:rPr lang="en-GB" dirty="0">
+                <a:latin typeface="Consolas"/>
+                <a:ea typeface="Consolas"/>
+                <a:cs typeface="Consolas"/>
+                <a:sym typeface="Consolas"/>
+              </a:rPr>
+            </a:br>
+            <a:endParaRPr lang="en-GB" dirty="0">
+              <a:latin typeface="Consolas"/>
+              <a:ea typeface="Consolas"/>
+              <a:cs typeface="Consolas"/>
+              <a:sym typeface="Consolas"/>
+            </a:endParaRPr>
+          </a:p>
+          <a:p>
+            <a:pPr marL="0" lvl="0" indent="0" algn="l" rtl="0">
+              <a:spcBef>
+                <a:spcPts val="0"/>
+              </a:spcBef>
+              <a:spcAft>
+                <a:spcPts val="0"/>
+              </a:spcAft>
+              <a:buNone/>
+            </a:pPr>
+            <a:endParaRPr dirty="0">
+              <a:latin typeface="Consolas"/>
+              <a:ea typeface="Consolas"/>
+              <a:cs typeface="Consolas"/>
+              <a:sym typeface="Consolas"/>
+            </a:endParaRPr>
+          </a:p>
+        </p:txBody>
+      </p:sp>
+      <p:sp>
+        <p:nvSpPr>
+          <p:cNvPr id="11" name="Google Shape;121;p16">
+            <a:extLst>
+              <a:ext uri="{FF2B5EF4-FFF2-40B4-BE49-F238E27FC236}">
+                <a16:creationId xmlns:a16="http://schemas.microsoft.com/office/drawing/2014/main" id="{EBE4B65A-AE86-108F-6788-C23D95550E8C}"/>
+              </a:ext>
+            </a:extLst>
+          </p:cNvPr>
+          <p:cNvSpPr/>
+          <p:nvPr/>
+        </p:nvSpPr>
+        <p:spPr>
+          <a:xfrm>
+            <a:off x="12395940" y="4784311"/>
+            <a:ext cx="2410800" cy="749592"/>
+          </a:xfrm>
+          <a:prstGeom prst="roundRect">
+            <a:avLst>
+              <a:gd name="adj" fmla="val 16667"/>
+            </a:avLst>
+          </a:prstGeom>
+          <a:solidFill>
+            <a:srgbClr val="D0E0E3"/>
+          </a:solidFill>
+          <a:ln w="28575" cap="flat" cmpd="sng">
+            <a:solidFill>
+              <a:srgbClr val="134F5C"/>
+            </a:solidFill>
+            <a:prstDash val="solid"/>
+            <a:round/>
+            <a:headEnd type="none" w="sm" len="sm"/>
+            <a:tailEnd type="none" w="sm" len="sm"/>
+          </a:ln>
+        </p:spPr>
+        <p:txBody>
+          <a:bodyPr spcFirstLastPara="1" wrap="square" lIns="91425" tIns="91425" rIns="91425" bIns="91425" anchor="t" anchorCtr="0">
+            <a:noAutofit/>
+          </a:bodyPr>
+          <a:lstStyle/>
+          <a:p>
+            <a:r>
+              <a:rPr lang="pt-PT" dirty="0">
+                <a:latin typeface="Consolas"/>
+                <a:ea typeface="Consolas"/>
+                <a:cs typeface="Consolas"/>
+                <a:sym typeface="Consolas"/>
+              </a:rPr>
+              <a:t>T3: Implementar a parte do Tsunami.</a:t>
+            </a:r>
+          </a:p>
+          <a:p>
+            <a:r>
+              <a:rPr lang="en-GB" dirty="0">
+                <a:latin typeface="Consolas"/>
+                <a:ea typeface="Consolas"/>
+                <a:cs typeface="Consolas"/>
+                <a:sym typeface="Consolas"/>
+              </a:rPr>
+              <a:t> </a:t>
+            </a:r>
+            <a:br>
+              <a:rPr lang="en-GB" dirty="0">
+                <a:latin typeface="Consolas"/>
+                <a:ea typeface="Consolas"/>
+                <a:cs typeface="Consolas"/>
+                <a:sym typeface="Consolas"/>
+              </a:rPr>
+            </a:br>
+            <a:br>
+              <a:rPr lang="en-GB" dirty="0">
+                <a:latin typeface="Consolas"/>
+                <a:ea typeface="Consolas"/>
+                <a:cs typeface="Consolas"/>
+                <a:sym typeface="Consolas"/>
+              </a:rPr>
+            </a:br>
+            <a:endParaRPr lang="en-GB" dirty="0">
+              <a:latin typeface="Consolas"/>
+              <a:ea typeface="Consolas"/>
+              <a:cs typeface="Consolas"/>
+              <a:sym typeface="Consolas"/>
+            </a:endParaRPr>
+          </a:p>
+          <a:p>
+            <a:pPr marL="0" lvl="0" indent="0" algn="l" rtl="0">
+              <a:spcBef>
+                <a:spcPts val="0"/>
+              </a:spcBef>
+              <a:spcAft>
+                <a:spcPts val="0"/>
+              </a:spcAft>
+              <a:buNone/>
+            </a:pPr>
+            <a:endParaRPr dirty="0">
+              <a:latin typeface="Consolas"/>
+              <a:ea typeface="Consolas"/>
+              <a:cs typeface="Consolas"/>
+              <a:sym typeface="Consolas"/>
+            </a:endParaRPr>
+          </a:p>
+        </p:txBody>
+      </p:sp>
+      <p:sp>
+        <p:nvSpPr>
+          <p:cNvPr id="18" name="Google Shape;121;p16">
+            <a:extLst>
+              <a:ext uri="{FF2B5EF4-FFF2-40B4-BE49-F238E27FC236}">
+                <a16:creationId xmlns:a16="http://schemas.microsoft.com/office/drawing/2014/main" id="{F0FA35D7-9139-A2A0-6CC2-62013B2B0BBD}"/>
+              </a:ext>
+            </a:extLst>
+          </p:cNvPr>
+          <p:cNvSpPr/>
+          <p:nvPr/>
+        </p:nvSpPr>
+        <p:spPr>
+          <a:xfrm>
+            <a:off x="12423686" y="8891469"/>
+            <a:ext cx="2410800" cy="1215821"/>
+          </a:xfrm>
+          <a:prstGeom prst="roundRect">
+            <a:avLst>
+              <a:gd name="adj" fmla="val 16667"/>
+            </a:avLst>
+          </a:prstGeom>
+          <a:solidFill>
+            <a:srgbClr val="D0E0E3"/>
+          </a:solidFill>
+          <a:ln w="28575" cap="flat" cmpd="sng">
+            <a:solidFill>
+              <a:srgbClr val="134F5C"/>
+            </a:solidFill>
+            <a:prstDash val="solid"/>
+            <a:round/>
+            <a:headEnd type="none" w="sm" len="sm"/>
+            <a:tailEnd type="none" w="sm" len="sm"/>
+          </a:ln>
+        </p:spPr>
+        <p:txBody>
+          <a:bodyPr spcFirstLastPara="1" wrap="square" lIns="91425" tIns="91425" rIns="91425" bIns="91425" anchor="t" anchorCtr="0">
+            <a:noAutofit/>
+          </a:bodyPr>
+          <a:lstStyle/>
+          <a:p>
+            <a:r>
+              <a:rPr lang="pt-PT" dirty="0">
+                <a:latin typeface="Consolas"/>
+                <a:ea typeface="Consolas"/>
+                <a:cs typeface="Consolas"/>
+                <a:sym typeface="Consolas"/>
+              </a:rPr>
+              <a:t>T2: Implementar a </a:t>
+            </a:r>
+            <a:r>
+              <a:rPr lang="pt-PT" dirty="0" err="1">
+                <a:latin typeface="Consolas"/>
+                <a:ea typeface="Consolas"/>
+                <a:cs typeface="Consolas"/>
+                <a:sym typeface="Consolas"/>
+              </a:rPr>
+              <a:t>Health</a:t>
+            </a:r>
+            <a:r>
+              <a:rPr lang="pt-PT" dirty="0">
+                <a:latin typeface="Consolas"/>
+                <a:ea typeface="Consolas"/>
+                <a:cs typeface="Consolas"/>
+                <a:sym typeface="Consolas"/>
+              </a:rPr>
+              <a:t> Bar de cada </a:t>
+            </a:r>
+            <a:r>
+              <a:rPr lang="pt-PT" dirty="0" err="1">
+                <a:latin typeface="Consolas"/>
+                <a:ea typeface="Consolas"/>
+                <a:cs typeface="Consolas"/>
+                <a:sym typeface="Consolas"/>
+              </a:rPr>
+              <a:t>wave</a:t>
+            </a:r>
+            <a:r>
+              <a:rPr lang="pt-PT" dirty="0">
+                <a:latin typeface="Consolas"/>
+                <a:ea typeface="Consolas"/>
+                <a:cs typeface="Consolas"/>
+                <a:sym typeface="Consolas"/>
+              </a:rPr>
+              <a:t> de inimigos.</a:t>
+            </a:r>
+          </a:p>
+          <a:p>
+            <a:r>
+              <a:rPr lang="en-GB" dirty="0">
+                <a:latin typeface="Consolas"/>
+                <a:ea typeface="Consolas"/>
+                <a:cs typeface="Consolas"/>
+                <a:sym typeface="Consolas"/>
+              </a:rPr>
+              <a:t> </a:t>
+            </a:r>
+            <a:br>
+              <a:rPr lang="en-GB" dirty="0">
+                <a:latin typeface="Consolas"/>
+                <a:ea typeface="Consolas"/>
+                <a:cs typeface="Consolas"/>
+                <a:sym typeface="Consolas"/>
+              </a:rPr>
+            </a:br>
+            <a:br>
+              <a:rPr lang="en-GB" dirty="0">
+                <a:latin typeface="Consolas"/>
+                <a:ea typeface="Consolas"/>
+                <a:cs typeface="Consolas"/>
+                <a:sym typeface="Consolas"/>
+              </a:rPr>
+            </a:br>
+            <a:endParaRPr lang="en-GB" dirty="0">
+              <a:latin typeface="Consolas"/>
+              <a:ea typeface="Consolas"/>
+              <a:cs typeface="Consolas"/>
+              <a:sym typeface="Consolas"/>
+            </a:endParaRPr>
+          </a:p>
+          <a:p>
+            <a:pPr marL="0" lvl="0" indent="0" algn="l" rtl="0">
+              <a:spcBef>
+                <a:spcPts val="0"/>
+              </a:spcBef>
+              <a:spcAft>
+                <a:spcPts val="0"/>
+              </a:spcAft>
+              <a:buNone/>
+            </a:pPr>
+            <a:endParaRPr dirty="0">
+              <a:latin typeface="Consolas"/>
+              <a:ea typeface="Consolas"/>
+              <a:cs typeface="Consolas"/>
+              <a:sym typeface="Consolas"/>
+            </a:endParaRPr>
+          </a:p>
+        </p:txBody>
+      </p:sp>
+      <p:sp>
+        <p:nvSpPr>
+          <p:cNvPr id="22" name="Google Shape;121;p16">
+            <a:extLst>
+              <a:ext uri="{FF2B5EF4-FFF2-40B4-BE49-F238E27FC236}">
+                <a16:creationId xmlns:a16="http://schemas.microsoft.com/office/drawing/2014/main" id="{2DA60474-BBB9-8711-8A19-AE7C60FA91EB}"/>
+              </a:ext>
+            </a:extLst>
+          </p:cNvPr>
+          <p:cNvSpPr/>
+          <p:nvPr/>
+        </p:nvSpPr>
+        <p:spPr>
+          <a:xfrm>
+            <a:off x="12423686" y="7368613"/>
+            <a:ext cx="2410800" cy="1215821"/>
+          </a:xfrm>
+          <a:prstGeom prst="roundRect">
+            <a:avLst>
+              <a:gd name="adj" fmla="val 16667"/>
+            </a:avLst>
+          </a:prstGeom>
+          <a:solidFill>
+            <a:srgbClr val="D0E0E3"/>
+          </a:solidFill>
+          <a:ln w="28575" cap="flat" cmpd="sng">
+            <a:solidFill>
+              <a:srgbClr val="134F5C"/>
+            </a:solidFill>
+            <a:prstDash val="solid"/>
+            <a:round/>
+            <a:headEnd type="none" w="sm" len="sm"/>
+            <a:tailEnd type="none" w="sm" len="sm"/>
+          </a:ln>
+        </p:spPr>
+        <p:txBody>
+          <a:bodyPr spcFirstLastPara="1" wrap="square" lIns="91425" tIns="91425" rIns="91425" bIns="91425" anchor="t" anchorCtr="0">
+            <a:noAutofit/>
+          </a:bodyPr>
+          <a:lstStyle/>
+          <a:p>
+            <a:r>
+              <a:rPr lang="pt-PT" dirty="0">
+                <a:latin typeface="Consolas"/>
+                <a:ea typeface="Consolas"/>
+                <a:cs typeface="Consolas"/>
+                <a:sym typeface="Consolas"/>
+              </a:rPr>
+              <a:t>T3: Implementar a parte do Meteorito. </a:t>
+            </a:r>
+          </a:p>
+          <a:p>
+            <a:r>
+              <a:rPr lang="en-GB" dirty="0">
+                <a:latin typeface="Consolas"/>
+                <a:ea typeface="Consolas"/>
+                <a:cs typeface="Consolas"/>
+                <a:sym typeface="Consolas"/>
+              </a:rPr>
+              <a:t> </a:t>
+            </a:r>
+            <a:br>
+              <a:rPr lang="en-GB" dirty="0">
+                <a:latin typeface="Consolas"/>
+                <a:ea typeface="Consolas"/>
+                <a:cs typeface="Consolas"/>
+                <a:sym typeface="Consolas"/>
+              </a:rPr>
+            </a:br>
+            <a:br>
+              <a:rPr lang="en-GB" dirty="0">
+                <a:latin typeface="Consolas"/>
+                <a:ea typeface="Consolas"/>
+                <a:cs typeface="Consolas"/>
+                <a:sym typeface="Consolas"/>
+              </a:rPr>
+            </a:br>
+            <a:endParaRPr lang="en-GB" dirty="0">
+              <a:latin typeface="Consolas"/>
+              <a:ea typeface="Consolas"/>
+              <a:cs typeface="Consolas"/>
+              <a:sym typeface="Consolas"/>
+            </a:endParaRPr>
+          </a:p>
+          <a:p>
+            <a:pPr marL="0" lvl="0" indent="0" algn="l" rtl="0">
+              <a:spcBef>
+                <a:spcPts val="0"/>
+              </a:spcBef>
+              <a:spcAft>
+                <a:spcPts val="0"/>
+              </a:spcAft>
+              <a:buNone/>
+            </a:pPr>
+            <a:endParaRPr lang="en-GB" dirty="0">
+              <a:latin typeface="Consolas"/>
+              <a:ea typeface="Consolas"/>
+              <a:cs typeface="Consolas"/>
+              <a:sym typeface="Consolas"/>
+            </a:endParaRPr>
+          </a:p>
+        </p:txBody>
+      </p:sp>
+      <p:sp>
+        <p:nvSpPr>
+          <p:cNvPr id="24" name="Google Shape;121;p16">
+            <a:extLst>
+              <a:ext uri="{FF2B5EF4-FFF2-40B4-BE49-F238E27FC236}">
+                <a16:creationId xmlns:a16="http://schemas.microsoft.com/office/drawing/2014/main" id="{9AB6F074-F751-26EF-7D7D-8737CC46C84E}"/>
+              </a:ext>
+            </a:extLst>
+          </p:cNvPr>
+          <p:cNvSpPr/>
+          <p:nvPr/>
+        </p:nvSpPr>
+        <p:spPr>
+          <a:xfrm>
+            <a:off x="12395940" y="932272"/>
+            <a:ext cx="2410800" cy="2657243"/>
+          </a:xfrm>
+          <a:prstGeom prst="roundRect">
+            <a:avLst>
+              <a:gd name="adj" fmla="val 16667"/>
+            </a:avLst>
+          </a:prstGeom>
+          <a:solidFill>
+            <a:srgbClr val="D0E0E3"/>
+          </a:solidFill>
+          <a:ln w="28575" cap="flat" cmpd="sng">
+            <a:solidFill>
+              <a:srgbClr val="134F5C"/>
+            </a:solidFill>
+            <a:prstDash val="solid"/>
+            <a:round/>
+            <a:headEnd type="none" w="sm" len="sm"/>
+            <a:tailEnd type="none" w="sm" len="sm"/>
+          </a:ln>
+        </p:spPr>
+        <p:txBody>
+          <a:bodyPr spcFirstLastPara="1" wrap="square" lIns="91425" tIns="91425" rIns="91425" bIns="91425" anchor="t" anchorCtr="0">
+            <a:noAutofit/>
+          </a:bodyPr>
+          <a:lstStyle/>
+          <a:p>
+            <a:r>
+              <a:rPr lang="en-GB" dirty="0">
+                <a:latin typeface="Consolas"/>
+                <a:ea typeface="Consolas"/>
+                <a:cs typeface="Consolas"/>
+                <a:sym typeface="Consolas"/>
+              </a:rPr>
+              <a:t>T1: </a:t>
+            </a:r>
+            <a:r>
+              <a:rPr lang="pt-PT" dirty="0">
+                <a:latin typeface="Consolas"/>
+                <a:ea typeface="Consolas"/>
+                <a:cs typeface="Consolas"/>
+                <a:sym typeface="Consolas"/>
+              </a:rPr>
+              <a:t>Implementar um gerador de mapa semanal.</a:t>
+            </a:r>
+            <a:br>
+              <a:rPr lang="en-GB" dirty="0">
+                <a:latin typeface="Consolas"/>
+                <a:ea typeface="Consolas"/>
+                <a:cs typeface="Consolas"/>
+                <a:sym typeface="Consolas"/>
+              </a:rPr>
+            </a:br>
+            <a:br>
+              <a:rPr lang="en-GB" dirty="0">
+                <a:latin typeface="Consolas"/>
+                <a:ea typeface="Consolas"/>
+                <a:cs typeface="Consolas"/>
+                <a:sym typeface="Consolas"/>
+              </a:rPr>
+            </a:br>
+            <a:endParaRPr lang="en-GB" dirty="0">
+              <a:latin typeface="Consolas"/>
+              <a:ea typeface="Consolas"/>
+              <a:cs typeface="Consolas"/>
+              <a:sym typeface="Consolas"/>
+            </a:endParaRPr>
+          </a:p>
+          <a:p>
+            <a:pPr marL="0" lvl="0" indent="0" algn="l" rtl="0">
+              <a:spcBef>
+                <a:spcPts val="0"/>
+              </a:spcBef>
+              <a:spcAft>
+                <a:spcPts val="0"/>
+              </a:spcAft>
+              <a:buNone/>
+            </a:pPr>
+            <a:endParaRPr dirty="0">
+              <a:latin typeface="Consolas"/>
+              <a:ea typeface="Consolas"/>
+              <a:cs typeface="Consolas"/>
+              <a:sym typeface="Consolas"/>
+            </a:endParaRPr>
+          </a:p>
+        </p:txBody>
+      </p:sp>
+    </p:spTree>
+    <p:extLst>
+      <p:ext uri="{BB962C8B-B14F-4D97-AF65-F5344CB8AC3E}">
+        <p14:creationId xmlns:p14="http://schemas.microsoft.com/office/powerpoint/2010/main" val="1626798297"/>
+      </p:ext>
+    </p:extLst>
+  </p:cSld>
+  <p:clrMapOvr>
+    <a:masterClrMapping/>
+  </p:clrMapOvr>
+</p:sld>
+</file>
+
 <file path=ppt/slides/slide3.xml><?xml version="1.0" encoding="utf-8"?>
 <p:sld xmlns:a="http://schemas.openxmlformats.org/drawingml/2006/main" xmlns:r="http://schemas.openxmlformats.org/officeDocument/2006/relationships" xmlns:p="http://schemas.openxmlformats.org/presentationml/2006/main">
   <p:cSld>

--- a/SE202526/Management/Scrum Board.pptx
+++ b/SE202526/Management/Scrum Board.pptx
@@ -5,7 +5,7 @@
     <p:sldMasterId id="2147483659" r:id="rId1"/>
   </p:sldMasterIdLst>
   <p:notesMasterIdLst>
-    <p:notesMasterId r:id="rId24"/>
+    <p:notesMasterId r:id="rId25"/>
   </p:notesMasterIdLst>
   <p:sldIdLst>
     <p:sldId id="256" r:id="rId2"/>
@@ -30,6 +30,7 @@
     <p:sldId id="277" r:id="rId21"/>
     <p:sldId id="279" r:id="rId22"/>
     <p:sldId id="280" r:id="rId23"/>
+    <p:sldId id="281" r:id="rId24"/>
   </p:sldIdLst>
   <p:sldSz cx="21599525" cy="10799763"/>
   <p:notesSz cx="6858000" cy="9144000"/>
@@ -2572,6 +2573,133 @@
     <p:extLst>
       <p:ext uri="{BB962C8B-B14F-4D97-AF65-F5344CB8AC3E}">
         <p14:creationId xmlns:p14="http://schemas.microsoft.com/office/powerpoint/2010/main" val="2467119470"/>
+      </p:ext>
+    </p:extLst>
+  </p:cSld>
+  <p:clrMapOvr>
+    <a:masterClrMapping/>
+  </p:clrMapOvr>
+</p:notes>
+</file>
+
+<file path=ppt/notesSlides/notesSlide23.xml><?xml version="1.0" encoding="utf-8"?>
+<p:notes xmlns:a="http://schemas.openxmlformats.org/drawingml/2006/main" xmlns:r="http://schemas.openxmlformats.org/officeDocument/2006/relationships" xmlns:p="http://schemas.openxmlformats.org/presentationml/2006/main" showMasterSp="0" showMasterPhAnim="0">
+  <p:cSld>
+    <p:spTree>
+      <p:nvGrpSpPr>
+        <p:cNvPr id="1" name="Shape 186">
+          <a:extLst>
+            <a:ext uri="{FF2B5EF4-FFF2-40B4-BE49-F238E27FC236}">
+              <a16:creationId xmlns:a16="http://schemas.microsoft.com/office/drawing/2014/main" id="{606F21FA-2B21-6043-B52D-E3DD9BD5D28E}"/>
+            </a:ext>
+          </a:extLst>
+        </p:cNvPr>
+        <p:cNvGrpSpPr/>
+        <p:nvPr/>
+      </p:nvGrpSpPr>
+      <p:grpSpPr>
+        <a:xfrm>
+          <a:off x="0" y="0"/>
+          <a:ext cx="0" cy="0"/>
+          <a:chOff x="0" y="0"/>
+          <a:chExt cx="0" cy="0"/>
+        </a:xfrm>
+      </p:grpSpPr>
+      <p:sp>
+        <p:nvSpPr>
+          <p:cNvPr id="187" name="Google Shape;187;g3850b307b58_0_218:notes">
+            <a:extLst>
+              <a:ext uri="{FF2B5EF4-FFF2-40B4-BE49-F238E27FC236}">
+                <a16:creationId xmlns:a16="http://schemas.microsoft.com/office/drawing/2014/main" id="{EF352E9E-C058-66C8-8D1E-CC0542E64826}"/>
+              </a:ext>
+            </a:extLst>
+          </p:cNvPr>
+          <p:cNvSpPr>
+            <a:spLocks noGrp="1" noRot="1" noChangeAspect="1"/>
+          </p:cNvSpPr>
+          <p:nvPr>
+            <p:ph type="sldImg" idx="2"/>
+          </p:nvPr>
+        </p:nvSpPr>
+        <p:spPr>
+          <a:xfrm>
+            <a:off x="0" y="685800"/>
+            <a:ext cx="6858000" cy="3429000"/>
+          </a:xfrm>
+          <a:custGeom>
+            <a:avLst/>
+            <a:gdLst/>
+            <a:ahLst/>
+            <a:cxnLst/>
+            <a:rect l="l" t="t" r="r" b="b"/>
+            <a:pathLst>
+              <a:path w="120000" h="120000" extrusionOk="0">
+                <a:moveTo>
+                  <a:pt x="0" y="0"/>
+                </a:moveTo>
+                <a:lnTo>
+                  <a:pt x="120000" y="0"/>
+                </a:lnTo>
+                <a:lnTo>
+                  <a:pt x="120000" y="120000"/>
+                </a:lnTo>
+                <a:lnTo>
+                  <a:pt x="0" y="120000"/>
+                </a:lnTo>
+                <a:close/>
+              </a:path>
+            </a:pathLst>
+          </a:custGeom>
+        </p:spPr>
+      </p:sp>
+      <p:sp>
+        <p:nvSpPr>
+          <p:cNvPr id="188" name="Google Shape;188;g3850b307b58_0_218:notes">
+            <a:extLst>
+              <a:ext uri="{FF2B5EF4-FFF2-40B4-BE49-F238E27FC236}">
+                <a16:creationId xmlns:a16="http://schemas.microsoft.com/office/drawing/2014/main" id="{62DA8749-FB58-2800-5958-3E1D4014360F}"/>
+              </a:ext>
+            </a:extLst>
+          </p:cNvPr>
+          <p:cNvSpPr txBox="1">
+            <a:spLocks noGrp="1"/>
+          </p:cNvSpPr>
+          <p:nvPr>
+            <p:ph type="body" idx="1"/>
+          </p:nvPr>
+        </p:nvSpPr>
+        <p:spPr>
+          <a:xfrm>
+            <a:off x="685800" y="4343400"/>
+            <a:ext cx="5486400" cy="4114800"/>
+          </a:xfrm>
+          <a:prstGeom prst="rect">
+            <a:avLst/>
+          </a:prstGeom>
+        </p:spPr>
+        <p:txBody>
+          <a:bodyPr spcFirstLastPara="1" wrap="square" lIns="91425" tIns="91425" rIns="91425" bIns="91425" anchor="t" anchorCtr="0">
+            <a:noAutofit/>
+          </a:bodyPr>
+          <a:lstStyle/>
+          <a:p>
+            <a:pPr marL="0" lvl="0" indent="0" algn="l" rtl="0">
+              <a:spcBef>
+                <a:spcPts val="0"/>
+              </a:spcBef>
+              <a:spcAft>
+                <a:spcPts val="0"/>
+              </a:spcAft>
+              <a:buNone/>
+            </a:pPr>
+            <a:endParaRPr/>
+          </a:p>
+        </p:txBody>
+      </p:sp>
+    </p:spTree>
+    <p:extLst>
+      <p:ext uri="{BB962C8B-B14F-4D97-AF65-F5344CB8AC3E}">
+        <p14:creationId xmlns:p14="http://schemas.microsoft.com/office/powerpoint/2010/main" val="3023121137"/>
       </p:ext>
     </p:extLst>
   </p:cSld>
@@ -32115,6 +32243,2513 @@
 </p:sld>
 </file>
 
+<file path=ppt/slides/slide23.xml><?xml version="1.0" encoding="utf-8"?>
+<p:sld xmlns:a="http://schemas.openxmlformats.org/drawingml/2006/main" xmlns:r="http://schemas.openxmlformats.org/officeDocument/2006/relationships" xmlns:p="http://schemas.openxmlformats.org/presentationml/2006/main">
+  <p:cSld>
+    <p:spTree>
+      <p:nvGrpSpPr>
+        <p:cNvPr id="1" name="Shape 189">
+          <a:extLst>
+            <a:ext uri="{FF2B5EF4-FFF2-40B4-BE49-F238E27FC236}">
+              <a16:creationId xmlns:a16="http://schemas.microsoft.com/office/drawing/2014/main" id="{4A943328-785A-E29B-AB2A-4D2A05FC6424}"/>
+            </a:ext>
+          </a:extLst>
+        </p:cNvPr>
+        <p:cNvGrpSpPr/>
+        <p:nvPr/>
+      </p:nvGrpSpPr>
+      <p:grpSpPr>
+        <a:xfrm>
+          <a:off x="0" y="0"/>
+          <a:ext cx="0" cy="0"/>
+          <a:chOff x="0" y="0"/>
+          <a:chExt cx="0" cy="0"/>
+        </a:xfrm>
+      </p:grpSpPr>
+      <p:cxnSp>
+        <p:nvCxnSpPr>
+          <p:cNvPr id="190" name="Google Shape;190;p19">
+            <a:extLst>
+              <a:ext uri="{FF2B5EF4-FFF2-40B4-BE49-F238E27FC236}">
+                <a16:creationId xmlns:a16="http://schemas.microsoft.com/office/drawing/2014/main" id="{09F13374-F78C-AD8E-6990-67454CDB8E12}"/>
+              </a:ext>
+            </a:extLst>
+          </p:cNvPr>
+          <p:cNvCxnSpPr/>
+          <p:nvPr/>
+        </p:nvCxnSpPr>
+        <p:spPr>
+          <a:xfrm>
+            <a:off x="5944724" y="-31500"/>
+            <a:ext cx="0" cy="10857000"/>
+          </a:xfrm>
+          <a:prstGeom prst="straightConnector1">
+            <a:avLst/>
+          </a:prstGeom>
+          <a:noFill/>
+          <a:ln w="38100" cap="flat" cmpd="sng">
+            <a:solidFill>
+              <a:srgbClr val="5B0F00"/>
+            </a:solidFill>
+            <a:prstDash val="solid"/>
+            <a:round/>
+            <a:headEnd type="none" w="med" len="med"/>
+            <a:tailEnd type="none" w="med" len="med"/>
+          </a:ln>
+        </p:spPr>
+      </p:cxnSp>
+      <p:sp>
+        <p:nvSpPr>
+          <p:cNvPr id="191" name="Google Shape;191;p19">
+            <a:extLst>
+              <a:ext uri="{FF2B5EF4-FFF2-40B4-BE49-F238E27FC236}">
+                <a16:creationId xmlns:a16="http://schemas.microsoft.com/office/drawing/2014/main" id="{22B1715B-B0EA-CEE4-5E51-1EC35ECE3A2D}"/>
+              </a:ext>
+            </a:extLst>
+          </p:cNvPr>
+          <p:cNvSpPr/>
+          <p:nvPr/>
+        </p:nvSpPr>
+        <p:spPr>
+          <a:xfrm>
+            <a:off x="3197186" y="84312"/>
+            <a:ext cx="2410800" cy="480900"/>
+          </a:xfrm>
+          <a:prstGeom prst="roundRect">
+            <a:avLst>
+              <a:gd name="adj" fmla="val 16667"/>
+            </a:avLst>
+          </a:prstGeom>
+          <a:solidFill>
+            <a:srgbClr val="F9CB9C"/>
+          </a:solidFill>
+          <a:ln w="28575" cap="flat" cmpd="sng">
+            <a:solidFill>
+              <a:srgbClr val="B45F06"/>
+            </a:solidFill>
+            <a:prstDash val="solid"/>
+            <a:round/>
+            <a:headEnd type="none" w="sm" len="sm"/>
+            <a:tailEnd type="none" w="sm" len="sm"/>
+          </a:ln>
+        </p:spPr>
+        <p:txBody>
+          <a:bodyPr spcFirstLastPara="1" wrap="square" lIns="91425" tIns="91425" rIns="91425" bIns="91425" anchor="ctr" anchorCtr="0">
+            <a:noAutofit/>
+          </a:bodyPr>
+          <a:lstStyle/>
+          <a:p>
+            <a:pPr marL="0" lvl="0" indent="0" algn="ctr" rtl="0">
+              <a:spcBef>
+                <a:spcPts val="0"/>
+              </a:spcBef>
+              <a:spcAft>
+                <a:spcPts val="0"/>
+              </a:spcAft>
+              <a:buNone/>
+            </a:pPr>
+            <a:r>
+              <a:rPr lang="en-GB" sz="1800" b="1">
+                <a:latin typeface="Consolas"/>
+                <a:ea typeface="Consolas"/>
+                <a:cs typeface="Consolas"/>
+                <a:sym typeface="Consolas"/>
+              </a:rPr>
+              <a:t>Student ID</a:t>
+            </a:r>
+            <a:endParaRPr sz="1800" b="1">
+              <a:latin typeface="Consolas"/>
+              <a:ea typeface="Consolas"/>
+              <a:cs typeface="Consolas"/>
+              <a:sym typeface="Consolas"/>
+            </a:endParaRPr>
+          </a:p>
+        </p:txBody>
+      </p:sp>
+      <p:sp>
+        <p:nvSpPr>
+          <p:cNvPr id="192" name="Google Shape;192;p19">
+            <a:extLst>
+              <a:ext uri="{FF2B5EF4-FFF2-40B4-BE49-F238E27FC236}">
+                <a16:creationId xmlns:a16="http://schemas.microsoft.com/office/drawing/2014/main" id="{3BF77B78-4886-1159-6173-545795109F39}"/>
+              </a:ext>
+            </a:extLst>
+          </p:cNvPr>
+          <p:cNvSpPr/>
+          <p:nvPr/>
+        </p:nvSpPr>
+        <p:spPr>
+          <a:xfrm>
+            <a:off x="6281636" y="84312"/>
+            <a:ext cx="2410800" cy="480900"/>
+          </a:xfrm>
+          <a:prstGeom prst="roundRect">
+            <a:avLst>
+              <a:gd name="adj" fmla="val 16667"/>
+            </a:avLst>
+          </a:prstGeom>
+          <a:solidFill>
+            <a:srgbClr val="F9CB9C"/>
+          </a:solidFill>
+          <a:ln w="28575" cap="flat" cmpd="sng">
+            <a:solidFill>
+              <a:srgbClr val="B45F06"/>
+            </a:solidFill>
+            <a:prstDash val="solid"/>
+            <a:round/>
+            <a:headEnd type="none" w="sm" len="sm"/>
+            <a:tailEnd type="none" w="sm" len="sm"/>
+          </a:ln>
+        </p:spPr>
+        <p:txBody>
+          <a:bodyPr spcFirstLastPara="1" wrap="square" lIns="91425" tIns="91425" rIns="91425" bIns="91425" anchor="ctr" anchorCtr="0">
+            <a:noAutofit/>
+          </a:bodyPr>
+          <a:lstStyle/>
+          <a:p>
+            <a:pPr marL="0" lvl="0" indent="0" algn="ctr" rtl="0">
+              <a:spcBef>
+                <a:spcPts val="0"/>
+              </a:spcBef>
+              <a:spcAft>
+                <a:spcPts val="0"/>
+              </a:spcAft>
+              <a:buNone/>
+            </a:pPr>
+            <a:r>
+              <a:rPr lang="en-GB" sz="1800" b="1">
+                <a:latin typeface="Consolas"/>
+                <a:ea typeface="Consolas"/>
+                <a:cs typeface="Consolas"/>
+                <a:sym typeface="Consolas"/>
+              </a:rPr>
+              <a:t>Story</a:t>
+            </a:r>
+            <a:endParaRPr sz="1800" b="1">
+              <a:latin typeface="Consolas"/>
+              <a:ea typeface="Consolas"/>
+              <a:cs typeface="Consolas"/>
+              <a:sym typeface="Consolas"/>
+            </a:endParaRPr>
+          </a:p>
+        </p:txBody>
+      </p:sp>
+      <p:sp>
+        <p:nvSpPr>
+          <p:cNvPr id="193" name="Google Shape;193;p19">
+            <a:extLst>
+              <a:ext uri="{FF2B5EF4-FFF2-40B4-BE49-F238E27FC236}">
+                <a16:creationId xmlns:a16="http://schemas.microsoft.com/office/drawing/2014/main" id="{89CDBF29-B239-8926-7DFC-F090B5F22DB2}"/>
+              </a:ext>
+            </a:extLst>
+          </p:cNvPr>
+          <p:cNvSpPr/>
+          <p:nvPr/>
+        </p:nvSpPr>
+        <p:spPr>
+          <a:xfrm>
+            <a:off x="9366071" y="84312"/>
+            <a:ext cx="2410800" cy="480900"/>
+          </a:xfrm>
+          <a:prstGeom prst="roundRect">
+            <a:avLst>
+              <a:gd name="adj" fmla="val 16667"/>
+            </a:avLst>
+          </a:prstGeom>
+          <a:solidFill>
+            <a:srgbClr val="F9CB9C"/>
+          </a:solidFill>
+          <a:ln w="28575" cap="flat" cmpd="sng">
+            <a:solidFill>
+              <a:srgbClr val="B45F06"/>
+            </a:solidFill>
+            <a:prstDash val="solid"/>
+            <a:round/>
+            <a:headEnd type="none" w="sm" len="sm"/>
+            <a:tailEnd type="none" w="sm" len="sm"/>
+          </a:ln>
+        </p:spPr>
+        <p:txBody>
+          <a:bodyPr spcFirstLastPara="1" wrap="square" lIns="91425" tIns="91425" rIns="91425" bIns="91425" anchor="ctr" anchorCtr="0">
+            <a:noAutofit/>
+          </a:bodyPr>
+          <a:lstStyle/>
+          <a:p>
+            <a:pPr marL="0" lvl="0" indent="0" algn="ctr" rtl="0">
+              <a:spcBef>
+                <a:spcPts val="0"/>
+              </a:spcBef>
+              <a:spcAft>
+                <a:spcPts val="0"/>
+              </a:spcAft>
+              <a:buNone/>
+            </a:pPr>
+            <a:r>
+              <a:rPr lang="en-GB" sz="1800" b="1">
+                <a:latin typeface="Consolas"/>
+                <a:ea typeface="Consolas"/>
+                <a:cs typeface="Consolas"/>
+                <a:sym typeface="Consolas"/>
+              </a:rPr>
+              <a:t>To Do</a:t>
+            </a:r>
+            <a:endParaRPr sz="1800" b="1">
+              <a:latin typeface="Consolas"/>
+              <a:ea typeface="Consolas"/>
+              <a:cs typeface="Consolas"/>
+              <a:sym typeface="Consolas"/>
+            </a:endParaRPr>
+          </a:p>
+        </p:txBody>
+      </p:sp>
+      <p:sp>
+        <p:nvSpPr>
+          <p:cNvPr id="194" name="Google Shape;194;p19">
+            <a:extLst>
+              <a:ext uri="{FF2B5EF4-FFF2-40B4-BE49-F238E27FC236}">
+                <a16:creationId xmlns:a16="http://schemas.microsoft.com/office/drawing/2014/main" id="{42048A09-B4EB-AE5E-FB46-678DF6A685F6}"/>
+              </a:ext>
+            </a:extLst>
+          </p:cNvPr>
+          <p:cNvSpPr/>
+          <p:nvPr/>
+        </p:nvSpPr>
+        <p:spPr>
+          <a:xfrm>
+            <a:off x="12395940" y="84312"/>
+            <a:ext cx="2410800" cy="480900"/>
+          </a:xfrm>
+          <a:prstGeom prst="roundRect">
+            <a:avLst>
+              <a:gd name="adj" fmla="val 16667"/>
+            </a:avLst>
+          </a:prstGeom>
+          <a:solidFill>
+            <a:srgbClr val="F9CB9C"/>
+          </a:solidFill>
+          <a:ln w="28575" cap="flat" cmpd="sng">
+            <a:solidFill>
+              <a:srgbClr val="B45F06"/>
+            </a:solidFill>
+            <a:prstDash val="solid"/>
+            <a:round/>
+            <a:headEnd type="none" w="sm" len="sm"/>
+            <a:tailEnd type="none" w="sm" len="sm"/>
+          </a:ln>
+        </p:spPr>
+        <p:txBody>
+          <a:bodyPr spcFirstLastPara="1" wrap="square" lIns="91425" tIns="91425" rIns="91425" bIns="91425" anchor="ctr" anchorCtr="0">
+            <a:noAutofit/>
+          </a:bodyPr>
+          <a:lstStyle/>
+          <a:p>
+            <a:pPr marL="0" lvl="0" indent="0" algn="ctr" rtl="0">
+              <a:spcBef>
+                <a:spcPts val="0"/>
+              </a:spcBef>
+              <a:spcAft>
+                <a:spcPts val="0"/>
+              </a:spcAft>
+              <a:buNone/>
+            </a:pPr>
+            <a:r>
+              <a:rPr lang="en-GB" sz="1800" b="1">
+                <a:latin typeface="Consolas"/>
+                <a:ea typeface="Consolas"/>
+                <a:cs typeface="Consolas"/>
+                <a:sym typeface="Consolas"/>
+              </a:rPr>
+              <a:t>Doing</a:t>
+            </a:r>
+            <a:endParaRPr sz="1800" b="1">
+              <a:latin typeface="Consolas"/>
+              <a:ea typeface="Consolas"/>
+              <a:cs typeface="Consolas"/>
+              <a:sym typeface="Consolas"/>
+            </a:endParaRPr>
+          </a:p>
+        </p:txBody>
+      </p:sp>
+      <p:sp>
+        <p:nvSpPr>
+          <p:cNvPr id="195" name="Google Shape;195;p19">
+            <a:extLst>
+              <a:ext uri="{FF2B5EF4-FFF2-40B4-BE49-F238E27FC236}">
+                <a16:creationId xmlns:a16="http://schemas.microsoft.com/office/drawing/2014/main" id="{27A5B666-8FEB-C601-F640-AFF6918D6168}"/>
+              </a:ext>
+            </a:extLst>
+          </p:cNvPr>
+          <p:cNvSpPr/>
+          <p:nvPr/>
+        </p:nvSpPr>
+        <p:spPr>
+          <a:xfrm>
+            <a:off x="15532407" y="84312"/>
+            <a:ext cx="2410800" cy="480900"/>
+          </a:xfrm>
+          <a:prstGeom prst="roundRect">
+            <a:avLst>
+              <a:gd name="adj" fmla="val 16667"/>
+            </a:avLst>
+          </a:prstGeom>
+          <a:solidFill>
+            <a:srgbClr val="F9CB9C"/>
+          </a:solidFill>
+          <a:ln w="28575" cap="flat" cmpd="sng">
+            <a:solidFill>
+              <a:srgbClr val="B45F06"/>
+            </a:solidFill>
+            <a:prstDash val="solid"/>
+            <a:round/>
+            <a:headEnd type="none" w="sm" len="sm"/>
+            <a:tailEnd type="none" w="sm" len="sm"/>
+          </a:ln>
+        </p:spPr>
+        <p:txBody>
+          <a:bodyPr spcFirstLastPara="1" wrap="square" lIns="91425" tIns="91425" rIns="91425" bIns="91425" anchor="ctr" anchorCtr="0">
+            <a:noAutofit/>
+          </a:bodyPr>
+          <a:lstStyle/>
+          <a:p>
+            <a:pPr marL="0" lvl="0" indent="0" algn="ctr" rtl="0">
+              <a:spcBef>
+                <a:spcPts val="0"/>
+              </a:spcBef>
+              <a:spcAft>
+                <a:spcPts val="0"/>
+              </a:spcAft>
+              <a:buNone/>
+            </a:pPr>
+            <a:r>
+              <a:rPr lang="en-GB" sz="1800" b="1">
+                <a:latin typeface="Consolas"/>
+                <a:ea typeface="Consolas"/>
+                <a:cs typeface="Consolas"/>
+                <a:sym typeface="Consolas"/>
+              </a:rPr>
+              <a:t>Review</a:t>
+            </a:r>
+            <a:endParaRPr sz="1800" b="1">
+              <a:latin typeface="Consolas"/>
+              <a:ea typeface="Consolas"/>
+              <a:cs typeface="Consolas"/>
+              <a:sym typeface="Consolas"/>
+            </a:endParaRPr>
+          </a:p>
+        </p:txBody>
+      </p:sp>
+      <p:sp>
+        <p:nvSpPr>
+          <p:cNvPr id="196" name="Google Shape;196;p19">
+            <a:extLst>
+              <a:ext uri="{FF2B5EF4-FFF2-40B4-BE49-F238E27FC236}">
+                <a16:creationId xmlns:a16="http://schemas.microsoft.com/office/drawing/2014/main" id="{4686B43A-76A6-F4B8-2BDC-E256EE80F128}"/>
+              </a:ext>
+            </a:extLst>
+          </p:cNvPr>
+          <p:cNvSpPr/>
+          <p:nvPr/>
+        </p:nvSpPr>
+        <p:spPr>
+          <a:xfrm>
+            <a:off x="18668888" y="84312"/>
+            <a:ext cx="2410800" cy="480900"/>
+          </a:xfrm>
+          <a:prstGeom prst="roundRect">
+            <a:avLst>
+              <a:gd name="adj" fmla="val 16667"/>
+            </a:avLst>
+          </a:prstGeom>
+          <a:solidFill>
+            <a:srgbClr val="F9CB9C"/>
+          </a:solidFill>
+          <a:ln w="28575" cap="flat" cmpd="sng">
+            <a:solidFill>
+              <a:srgbClr val="B45F06"/>
+            </a:solidFill>
+            <a:prstDash val="solid"/>
+            <a:round/>
+            <a:headEnd type="none" w="sm" len="sm"/>
+            <a:tailEnd type="none" w="sm" len="sm"/>
+          </a:ln>
+        </p:spPr>
+        <p:txBody>
+          <a:bodyPr spcFirstLastPara="1" wrap="square" lIns="91425" tIns="91425" rIns="91425" bIns="91425" anchor="ctr" anchorCtr="0">
+            <a:noAutofit/>
+          </a:bodyPr>
+          <a:lstStyle/>
+          <a:p>
+            <a:pPr marL="0" lvl="0" indent="0" algn="ctr" rtl="0">
+              <a:spcBef>
+                <a:spcPts val="0"/>
+              </a:spcBef>
+              <a:spcAft>
+                <a:spcPts val="0"/>
+              </a:spcAft>
+              <a:buNone/>
+            </a:pPr>
+            <a:r>
+              <a:rPr lang="en-GB" sz="1800" b="1">
+                <a:latin typeface="Consolas"/>
+                <a:ea typeface="Consolas"/>
+                <a:cs typeface="Consolas"/>
+                <a:sym typeface="Consolas"/>
+              </a:rPr>
+              <a:t>Done</a:t>
+            </a:r>
+            <a:endParaRPr sz="1800" b="1">
+              <a:latin typeface="Consolas"/>
+              <a:ea typeface="Consolas"/>
+              <a:cs typeface="Consolas"/>
+              <a:sym typeface="Consolas"/>
+            </a:endParaRPr>
+          </a:p>
+        </p:txBody>
+      </p:sp>
+      <p:sp>
+        <p:nvSpPr>
+          <p:cNvPr id="197" name="Google Shape;197;p19">
+            <a:extLst>
+              <a:ext uri="{FF2B5EF4-FFF2-40B4-BE49-F238E27FC236}">
+                <a16:creationId xmlns:a16="http://schemas.microsoft.com/office/drawing/2014/main" id="{806F9C96-6E39-79B2-A816-6BD0CAB6DC96}"/>
+              </a:ext>
+            </a:extLst>
+          </p:cNvPr>
+          <p:cNvSpPr/>
+          <p:nvPr/>
+        </p:nvSpPr>
+        <p:spPr>
+          <a:xfrm>
+            <a:off x="167288" y="84312"/>
+            <a:ext cx="2410800" cy="480900"/>
+          </a:xfrm>
+          <a:prstGeom prst="roundRect">
+            <a:avLst>
+              <a:gd name="adj" fmla="val 16667"/>
+            </a:avLst>
+          </a:prstGeom>
+          <a:solidFill>
+            <a:srgbClr val="F9CB9C"/>
+          </a:solidFill>
+          <a:ln w="28575" cap="flat" cmpd="sng">
+            <a:solidFill>
+              <a:srgbClr val="B45F06"/>
+            </a:solidFill>
+            <a:prstDash val="solid"/>
+            <a:round/>
+            <a:headEnd type="none" w="sm" len="sm"/>
+            <a:tailEnd type="none" w="sm" len="sm"/>
+          </a:ln>
+        </p:spPr>
+        <p:txBody>
+          <a:bodyPr spcFirstLastPara="1" wrap="square" lIns="91425" tIns="91425" rIns="91425" bIns="91425" anchor="ctr" anchorCtr="0">
+            <a:noAutofit/>
+          </a:bodyPr>
+          <a:lstStyle/>
+          <a:p>
+            <a:pPr marL="0" lvl="0" indent="0" algn="ctr" rtl="0">
+              <a:spcBef>
+                <a:spcPts val="0"/>
+              </a:spcBef>
+              <a:spcAft>
+                <a:spcPts val="0"/>
+              </a:spcAft>
+              <a:buNone/>
+            </a:pPr>
+            <a:r>
+              <a:rPr lang="en-GB" sz="1800" b="1">
+                <a:latin typeface="Consolas"/>
+                <a:ea typeface="Consolas"/>
+                <a:cs typeface="Consolas"/>
+                <a:sym typeface="Consolas"/>
+              </a:rPr>
+              <a:t>Backlog</a:t>
+            </a:r>
+            <a:endParaRPr sz="1800" b="1">
+              <a:latin typeface="Consolas"/>
+              <a:ea typeface="Consolas"/>
+              <a:cs typeface="Consolas"/>
+              <a:sym typeface="Consolas"/>
+            </a:endParaRPr>
+          </a:p>
+        </p:txBody>
+      </p:sp>
+      <p:cxnSp>
+        <p:nvCxnSpPr>
+          <p:cNvPr id="204" name="Google Shape;204;p19">
+            <a:extLst>
+              <a:ext uri="{FF2B5EF4-FFF2-40B4-BE49-F238E27FC236}">
+                <a16:creationId xmlns:a16="http://schemas.microsoft.com/office/drawing/2014/main" id="{E521A9CC-31A5-5FAA-F7E4-F6C595DF6197}"/>
+              </a:ext>
+            </a:extLst>
+          </p:cNvPr>
+          <p:cNvCxnSpPr/>
+          <p:nvPr/>
+        </p:nvCxnSpPr>
+        <p:spPr>
+          <a:xfrm>
+            <a:off x="5607986" y="1626038"/>
+            <a:ext cx="16042200" cy="0"/>
+          </a:xfrm>
+          <a:prstGeom prst="straightConnector1">
+            <a:avLst/>
+          </a:prstGeom>
+          <a:noFill/>
+          <a:ln w="28575" cap="flat" cmpd="sng">
+            <a:solidFill>
+              <a:srgbClr val="999999"/>
+            </a:solidFill>
+            <a:prstDash val="dash"/>
+            <a:round/>
+            <a:headEnd type="none" w="med" len="med"/>
+            <a:tailEnd type="none" w="med" len="med"/>
+          </a:ln>
+        </p:spPr>
+      </p:cxnSp>
+      <p:cxnSp>
+        <p:nvCxnSpPr>
+          <p:cNvPr id="205" name="Google Shape;205;p19">
+            <a:extLst>
+              <a:ext uri="{FF2B5EF4-FFF2-40B4-BE49-F238E27FC236}">
+                <a16:creationId xmlns:a16="http://schemas.microsoft.com/office/drawing/2014/main" id="{448FECDA-C7BD-14CB-AC1A-C20AF905E499}"/>
+              </a:ext>
+            </a:extLst>
+          </p:cNvPr>
+          <p:cNvCxnSpPr/>
+          <p:nvPr/>
+        </p:nvCxnSpPr>
+        <p:spPr>
+          <a:xfrm>
+            <a:off x="5607986" y="3203476"/>
+            <a:ext cx="16042200" cy="0"/>
+          </a:xfrm>
+          <a:prstGeom prst="straightConnector1">
+            <a:avLst/>
+          </a:prstGeom>
+          <a:noFill/>
+          <a:ln w="28575" cap="flat" cmpd="sng">
+            <a:solidFill>
+              <a:srgbClr val="999999"/>
+            </a:solidFill>
+            <a:prstDash val="dash"/>
+            <a:round/>
+            <a:headEnd type="none" w="med" len="med"/>
+            <a:tailEnd type="none" w="med" len="med"/>
+          </a:ln>
+        </p:spPr>
+      </p:cxnSp>
+      <p:cxnSp>
+        <p:nvCxnSpPr>
+          <p:cNvPr id="206" name="Google Shape;206;p19">
+            <a:extLst>
+              <a:ext uri="{FF2B5EF4-FFF2-40B4-BE49-F238E27FC236}">
+                <a16:creationId xmlns:a16="http://schemas.microsoft.com/office/drawing/2014/main" id="{9AE07E07-62EE-DF0C-BBA1-C0B8BE8B74B5}"/>
+              </a:ext>
+            </a:extLst>
+          </p:cNvPr>
+          <p:cNvCxnSpPr/>
+          <p:nvPr/>
+        </p:nvCxnSpPr>
+        <p:spPr>
+          <a:xfrm>
+            <a:off x="5607986" y="4777838"/>
+            <a:ext cx="16042200" cy="0"/>
+          </a:xfrm>
+          <a:prstGeom prst="straightConnector1">
+            <a:avLst/>
+          </a:prstGeom>
+          <a:noFill/>
+          <a:ln w="28575" cap="flat" cmpd="sng">
+            <a:solidFill>
+              <a:srgbClr val="999999"/>
+            </a:solidFill>
+            <a:prstDash val="dash"/>
+            <a:round/>
+            <a:headEnd type="none" w="med" len="med"/>
+            <a:tailEnd type="none" w="med" len="med"/>
+          </a:ln>
+        </p:spPr>
+      </p:cxnSp>
+      <p:cxnSp>
+        <p:nvCxnSpPr>
+          <p:cNvPr id="207" name="Google Shape;207;p19">
+            <a:extLst>
+              <a:ext uri="{FF2B5EF4-FFF2-40B4-BE49-F238E27FC236}">
+                <a16:creationId xmlns:a16="http://schemas.microsoft.com/office/drawing/2014/main" id="{3C133FF5-D8D7-79AB-DA4A-7B08166C64E8}"/>
+              </a:ext>
+            </a:extLst>
+          </p:cNvPr>
+          <p:cNvCxnSpPr/>
+          <p:nvPr/>
+        </p:nvCxnSpPr>
+        <p:spPr>
+          <a:xfrm>
+            <a:off x="5607986" y="6353738"/>
+            <a:ext cx="16042200" cy="0"/>
+          </a:xfrm>
+          <a:prstGeom prst="straightConnector1">
+            <a:avLst/>
+          </a:prstGeom>
+          <a:noFill/>
+          <a:ln w="28575" cap="flat" cmpd="sng">
+            <a:solidFill>
+              <a:srgbClr val="999999"/>
+            </a:solidFill>
+            <a:prstDash val="dash"/>
+            <a:round/>
+            <a:headEnd type="none" w="med" len="med"/>
+            <a:tailEnd type="none" w="med" len="med"/>
+          </a:ln>
+        </p:spPr>
+      </p:cxnSp>
+      <p:cxnSp>
+        <p:nvCxnSpPr>
+          <p:cNvPr id="208" name="Google Shape;208;p19">
+            <a:extLst>
+              <a:ext uri="{FF2B5EF4-FFF2-40B4-BE49-F238E27FC236}">
+                <a16:creationId xmlns:a16="http://schemas.microsoft.com/office/drawing/2014/main" id="{1C55A161-900E-DD2E-ED6A-1B39AAD8B2AF}"/>
+              </a:ext>
+            </a:extLst>
+          </p:cNvPr>
+          <p:cNvCxnSpPr/>
+          <p:nvPr/>
+        </p:nvCxnSpPr>
+        <p:spPr>
+          <a:xfrm>
+            <a:off x="5607986" y="7929638"/>
+            <a:ext cx="16042200" cy="0"/>
+          </a:xfrm>
+          <a:prstGeom prst="straightConnector1">
+            <a:avLst/>
+          </a:prstGeom>
+          <a:noFill/>
+          <a:ln w="28575" cap="flat" cmpd="sng">
+            <a:solidFill>
+              <a:srgbClr val="999999"/>
+            </a:solidFill>
+            <a:prstDash val="dash"/>
+            <a:round/>
+            <a:headEnd type="none" w="med" len="med"/>
+            <a:tailEnd type="none" w="med" len="med"/>
+          </a:ln>
+        </p:spPr>
+      </p:cxnSp>
+      <p:cxnSp>
+        <p:nvCxnSpPr>
+          <p:cNvPr id="209" name="Google Shape;209;p19">
+            <a:extLst>
+              <a:ext uri="{FF2B5EF4-FFF2-40B4-BE49-F238E27FC236}">
+                <a16:creationId xmlns:a16="http://schemas.microsoft.com/office/drawing/2014/main" id="{8B98A1E3-A2C3-CF04-53CA-F0EB6CF01297}"/>
+              </a:ext>
+            </a:extLst>
+          </p:cNvPr>
+          <p:cNvCxnSpPr/>
+          <p:nvPr/>
+        </p:nvCxnSpPr>
+        <p:spPr>
+          <a:xfrm>
+            <a:off x="5607986" y="9505538"/>
+            <a:ext cx="16042200" cy="0"/>
+          </a:xfrm>
+          <a:prstGeom prst="straightConnector1">
+            <a:avLst/>
+          </a:prstGeom>
+          <a:noFill/>
+          <a:ln w="28575" cap="flat" cmpd="sng">
+            <a:solidFill>
+              <a:srgbClr val="999999"/>
+            </a:solidFill>
+            <a:prstDash val="dash"/>
+            <a:round/>
+            <a:headEnd type="none" w="med" len="med"/>
+            <a:tailEnd type="none" w="med" len="med"/>
+          </a:ln>
+        </p:spPr>
+      </p:cxnSp>
+      <p:cxnSp>
+        <p:nvCxnSpPr>
+          <p:cNvPr id="215" name="Google Shape;215;p19">
+            <a:extLst>
+              <a:ext uri="{FF2B5EF4-FFF2-40B4-BE49-F238E27FC236}">
+                <a16:creationId xmlns:a16="http://schemas.microsoft.com/office/drawing/2014/main" id="{C5E52549-E9B3-FBB3-E232-A78E25647975}"/>
+              </a:ext>
+            </a:extLst>
+          </p:cNvPr>
+          <p:cNvCxnSpPr/>
+          <p:nvPr/>
+        </p:nvCxnSpPr>
+        <p:spPr>
+          <a:xfrm>
+            <a:off x="2874374" y="-28500"/>
+            <a:ext cx="0" cy="10857000"/>
+          </a:xfrm>
+          <a:prstGeom prst="straightConnector1">
+            <a:avLst/>
+          </a:prstGeom>
+          <a:noFill/>
+          <a:ln w="38100" cap="flat" cmpd="sng">
+            <a:solidFill>
+              <a:srgbClr val="5B0F00"/>
+            </a:solidFill>
+            <a:prstDash val="solid"/>
+            <a:round/>
+            <a:headEnd type="none" w="med" len="med"/>
+            <a:tailEnd type="none" w="med" len="med"/>
+          </a:ln>
+        </p:spPr>
+      </p:cxnSp>
+      <p:sp>
+        <p:nvSpPr>
+          <p:cNvPr id="2" name="Google Shape;74;p15">
+            <a:extLst>
+              <a:ext uri="{FF2B5EF4-FFF2-40B4-BE49-F238E27FC236}">
+                <a16:creationId xmlns:a16="http://schemas.microsoft.com/office/drawing/2014/main" id="{B0C8E30B-2B5F-6D0C-0A7B-3E694EC10C9C}"/>
+              </a:ext>
+            </a:extLst>
+          </p:cNvPr>
+          <p:cNvSpPr/>
+          <p:nvPr/>
+        </p:nvSpPr>
+        <p:spPr>
+          <a:xfrm>
+            <a:off x="3197186" y="1385588"/>
+            <a:ext cx="2410800" cy="480900"/>
+          </a:xfrm>
+          <a:prstGeom prst="roundRect">
+            <a:avLst>
+              <a:gd name="adj" fmla="val 16667"/>
+            </a:avLst>
+          </a:prstGeom>
+          <a:solidFill>
+            <a:srgbClr val="E6B8AF"/>
+          </a:solidFill>
+          <a:ln w="28575" cap="flat" cmpd="sng">
+            <a:solidFill>
+              <a:srgbClr val="5B0F00"/>
+            </a:solidFill>
+            <a:prstDash val="solid"/>
+            <a:round/>
+            <a:headEnd type="none" w="sm" len="sm"/>
+            <a:tailEnd type="none" w="sm" len="sm"/>
+          </a:ln>
+        </p:spPr>
+        <p:txBody>
+          <a:bodyPr spcFirstLastPara="1" wrap="square" lIns="91425" tIns="91425" rIns="91425" bIns="91425" anchor="ctr" anchorCtr="0">
+            <a:noAutofit/>
+          </a:bodyPr>
+          <a:lstStyle/>
+          <a:p>
+            <a:pPr marL="0" lvl="0" indent="0" algn="ctr" rtl="0">
+              <a:spcBef>
+                <a:spcPts val="0"/>
+              </a:spcBef>
+              <a:spcAft>
+                <a:spcPts val="0"/>
+              </a:spcAft>
+              <a:buNone/>
+            </a:pPr>
+            <a:r>
+              <a:rPr lang="en-GB" sz="1800" b="1" dirty="0">
+                <a:latin typeface="Consolas"/>
+                <a:ea typeface="Consolas"/>
+                <a:cs typeface="Consolas"/>
+                <a:sym typeface="Consolas"/>
+              </a:rPr>
+              <a:t>68338</a:t>
+            </a:r>
+            <a:endParaRPr sz="1800" b="1" dirty="0">
+              <a:latin typeface="Consolas"/>
+              <a:ea typeface="Consolas"/>
+              <a:cs typeface="Consolas"/>
+              <a:sym typeface="Consolas"/>
+            </a:endParaRPr>
+          </a:p>
+        </p:txBody>
+      </p:sp>
+      <p:sp>
+        <p:nvSpPr>
+          <p:cNvPr id="3" name="Google Shape;75;p15">
+            <a:extLst>
+              <a:ext uri="{FF2B5EF4-FFF2-40B4-BE49-F238E27FC236}">
+                <a16:creationId xmlns:a16="http://schemas.microsoft.com/office/drawing/2014/main" id="{0A9BE16D-E72E-7895-EC5B-8382E9CA171A}"/>
+              </a:ext>
+            </a:extLst>
+          </p:cNvPr>
+          <p:cNvSpPr/>
+          <p:nvPr/>
+        </p:nvSpPr>
+        <p:spPr>
+          <a:xfrm>
+            <a:off x="3197186" y="2961501"/>
+            <a:ext cx="2410800" cy="480900"/>
+          </a:xfrm>
+          <a:prstGeom prst="roundRect">
+            <a:avLst>
+              <a:gd name="adj" fmla="val 16667"/>
+            </a:avLst>
+          </a:prstGeom>
+          <a:solidFill>
+            <a:srgbClr val="E6B8AF"/>
+          </a:solidFill>
+          <a:ln w="28575" cap="flat" cmpd="sng">
+            <a:solidFill>
+              <a:srgbClr val="5B0F00"/>
+            </a:solidFill>
+            <a:prstDash val="solid"/>
+            <a:round/>
+            <a:headEnd type="none" w="sm" len="sm"/>
+            <a:tailEnd type="none" w="sm" len="sm"/>
+          </a:ln>
+        </p:spPr>
+        <p:txBody>
+          <a:bodyPr spcFirstLastPara="1" wrap="square" lIns="91425" tIns="91425" rIns="91425" bIns="91425" anchor="ctr" anchorCtr="0">
+            <a:noAutofit/>
+          </a:bodyPr>
+          <a:lstStyle/>
+          <a:p>
+            <a:pPr marL="0" lvl="0" indent="0" algn="ctr" rtl="0">
+              <a:spcBef>
+                <a:spcPts val="0"/>
+              </a:spcBef>
+              <a:spcAft>
+                <a:spcPts val="0"/>
+              </a:spcAft>
+              <a:buNone/>
+            </a:pPr>
+            <a:r>
+              <a:rPr lang="en-GB" sz="1800" b="1" dirty="0">
+                <a:latin typeface="Consolas"/>
+                <a:ea typeface="Consolas"/>
+                <a:cs typeface="Consolas"/>
+                <a:sym typeface="Consolas"/>
+              </a:rPr>
+              <a:t>68245</a:t>
+            </a:r>
+            <a:endParaRPr sz="1800" b="1" dirty="0">
+              <a:latin typeface="Consolas"/>
+              <a:ea typeface="Consolas"/>
+              <a:cs typeface="Consolas"/>
+              <a:sym typeface="Consolas"/>
+            </a:endParaRPr>
+          </a:p>
+        </p:txBody>
+      </p:sp>
+      <p:sp>
+        <p:nvSpPr>
+          <p:cNvPr id="4" name="Google Shape;76;p15">
+            <a:extLst>
+              <a:ext uri="{FF2B5EF4-FFF2-40B4-BE49-F238E27FC236}">
+                <a16:creationId xmlns:a16="http://schemas.microsoft.com/office/drawing/2014/main" id="{38FD56A0-C44E-03ED-9A4A-4E54E2A5BAE1}"/>
+              </a:ext>
+            </a:extLst>
+          </p:cNvPr>
+          <p:cNvSpPr/>
+          <p:nvPr/>
+        </p:nvSpPr>
+        <p:spPr>
+          <a:xfrm>
+            <a:off x="3197186" y="4537410"/>
+            <a:ext cx="2410800" cy="480900"/>
+          </a:xfrm>
+          <a:prstGeom prst="roundRect">
+            <a:avLst>
+              <a:gd name="adj" fmla="val 16667"/>
+            </a:avLst>
+          </a:prstGeom>
+          <a:solidFill>
+            <a:srgbClr val="E6B8AF"/>
+          </a:solidFill>
+          <a:ln w="28575" cap="flat" cmpd="sng">
+            <a:solidFill>
+              <a:srgbClr val="5B0F00"/>
+            </a:solidFill>
+            <a:prstDash val="solid"/>
+            <a:round/>
+            <a:headEnd type="none" w="sm" len="sm"/>
+            <a:tailEnd type="none" w="sm" len="sm"/>
+          </a:ln>
+        </p:spPr>
+        <p:txBody>
+          <a:bodyPr spcFirstLastPara="1" wrap="square" lIns="91425" tIns="91425" rIns="91425" bIns="91425" anchor="ctr" anchorCtr="0">
+            <a:noAutofit/>
+          </a:bodyPr>
+          <a:lstStyle/>
+          <a:p>
+            <a:pPr marL="0" lvl="0" indent="0" algn="ctr" rtl="0">
+              <a:spcBef>
+                <a:spcPts val="0"/>
+              </a:spcBef>
+              <a:spcAft>
+                <a:spcPts val="0"/>
+              </a:spcAft>
+              <a:buNone/>
+            </a:pPr>
+            <a:r>
+              <a:rPr lang="en-GB" sz="1800" b="1" dirty="0">
+                <a:latin typeface="Consolas"/>
+                <a:ea typeface="Consolas"/>
+                <a:cs typeface="Consolas"/>
+                <a:sym typeface="Consolas"/>
+              </a:rPr>
+              <a:t>68725</a:t>
+            </a:r>
+            <a:endParaRPr sz="1800" b="1" dirty="0">
+              <a:latin typeface="Consolas"/>
+              <a:ea typeface="Consolas"/>
+              <a:cs typeface="Consolas"/>
+              <a:sym typeface="Consolas"/>
+            </a:endParaRPr>
+          </a:p>
+        </p:txBody>
+      </p:sp>
+      <p:sp>
+        <p:nvSpPr>
+          <p:cNvPr id="5" name="Google Shape;77;p15">
+            <a:extLst>
+              <a:ext uri="{FF2B5EF4-FFF2-40B4-BE49-F238E27FC236}">
+                <a16:creationId xmlns:a16="http://schemas.microsoft.com/office/drawing/2014/main" id="{FAD72093-2ACB-0387-C6E8-506A13080931}"/>
+              </a:ext>
+            </a:extLst>
+          </p:cNvPr>
+          <p:cNvSpPr/>
+          <p:nvPr/>
+        </p:nvSpPr>
+        <p:spPr>
+          <a:xfrm>
+            <a:off x="3197186" y="6113307"/>
+            <a:ext cx="2410800" cy="480900"/>
+          </a:xfrm>
+          <a:prstGeom prst="roundRect">
+            <a:avLst>
+              <a:gd name="adj" fmla="val 16667"/>
+            </a:avLst>
+          </a:prstGeom>
+          <a:solidFill>
+            <a:srgbClr val="E6B8AF"/>
+          </a:solidFill>
+          <a:ln w="28575" cap="flat" cmpd="sng">
+            <a:solidFill>
+              <a:srgbClr val="5B0F00"/>
+            </a:solidFill>
+            <a:prstDash val="solid"/>
+            <a:round/>
+            <a:headEnd type="none" w="sm" len="sm"/>
+            <a:tailEnd type="none" w="sm" len="sm"/>
+          </a:ln>
+        </p:spPr>
+        <p:txBody>
+          <a:bodyPr spcFirstLastPara="1" wrap="square" lIns="91425" tIns="91425" rIns="91425" bIns="91425" anchor="ctr" anchorCtr="0">
+            <a:noAutofit/>
+          </a:bodyPr>
+          <a:lstStyle/>
+          <a:p>
+            <a:pPr marL="0" lvl="0" indent="0" algn="ctr" rtl="0">
+              <a:spcBef>
+                <a:spcPts val="0"/>
+              </a:spcBef>
+              <a:spcAft>
+                <a:spcPts val="0"/>
+              </a:spcAft>
+              <a:buNone/>
+            </a:pPr>
+            <a:r>
+              <a:rPr lang="en-GB" sz="1800" b="1" dirty="0">
+                <a:latin typeface="Consolas"/>
+                <a:ea typeface="Consolas"/>
+                <a:cs typeface="Consolas"/>
+                <a:sym typeface="Consolas"/>
+              </a:rPr>
+              <a:t>68180</a:t>
+            </a:r>
+            <a:endParaRPr sz="1800" b="1" dirty="0">
+              <a:latin typeface="Consolas"/>
+              <a:ea typeface="Consolas"/>
+              <a:cs typeface="Consolas"/>
+              <a:sym typeface="Consolas"/>
+            </a:endParaRPr>
+          </a:p>
+        </p:txBody>
+      </p:sp>
+      <p:sp>
+        <p:nvSpPr>
+          <p:cNvPr id="6" name="Google Shape;78;p15">
+            <a:extLst>
+              <a:ext uri="{FF2B5EF4-FFF2-40B4-BE49-F238E27FC236}">
+                <a16:creationId xmlns:a16="http://schemas.microsoft.com/office/drawing/2014/main" id="{85B59DC2-D1CE-EEF1-89BB-609D0FC1CD16}"/>
+              </a:ext>
+            </a:extLst>
+          </p:cNvPr>
+          <p:cNvSpPr/>
+          <p:nvPr/>
+        </p:nvSpPr>
+        <p:spPr>
+          <a:xfrm>
+            <a:off x="3197186" y="7689198"/>
+            <a:ext cx="2410800" cy="480900"/>
+          </a:xfrm>
+          <a:prstGeom prst="roundRect">
+            <a:avLst>
+              <a:gd name="adj" fmla="val 16667"/>
+            </a:avLst>
+          </a:prstGeom>
+          <a:solidFill>
+            <a:srgbClr val="E6B8AF"/>
+          </a:solidFill>
+          <a:ln w="28575" cap="flat" cmpd="sng">
+            <a:solidFill>
+              <a:srgbClr val="5B0F00"/>
+            </a:solidFill>
+            <a:prstDash val="solid"/>
+            <a:round/>
+            <a:headEnd type="none" w="sm" len="sm"/>
+            <a:tailEnd type="none" w="sm" len="sm"/>
+          </a:ln>
+        </p:spPr>
+        <p:txBody>
+          <a:bodyPr spcFirstLastPara="1" wrap="square" lIns="91425" tIns="91425" rIns="91425" bIns="91425" anchor="ctr" anchorCtr="0">
+            <a:noAutofit/>
+          </a:bodyPr>
+          <a:lstStyle/>
+          <a:p>
+            <a:pPr marL="0" lvl="0" indent="0" algn="ctr" rtl="0">
+              <a:spcBef>
+                <a:spcPts val="0"/>
+              </a:spcBef>
+              <a:spcAft>
+                <a:spcPts val="0"/>
+              </a:spcAft>
+              <a:buNone/>
+            </a:pPr>
+            <a:r>
+              <a:rPr lang="en-GB" sz="1800" b="1" dirty="0">
+                <a:latin typeface="Consolas"/>
+                <a:ea typeface="Consolas"/>
+                <a:cs typeface="Consolas"/>
+                <a:sym typeface="Consolas"/>
+              </a:rPr>
+              <a:t>67912</a:t>
+            </a:r>
+            <a:endParaRPr sz="1800" b="1" dirty="0">
+              <a:latin typeface="Consolas"/>
+              <a:ea typeface="Consolas"/>
+              <a:cs typeface="Consolas"/>
+              <a:sym typeface="Consolas"/>
+            </a:endParaRPr>
+          </a:p>
+        </p:txBody>
+      </p:sp>
+      <p:sp>
+        <p:nvSpPr>
+          <p:cNvPr id="7" name="Google Shape;79;p15">
+            <a:extLst>
+              <a:ext uri="{FF2B5EF4-FFF2-40B4-BE49-F238E27FC236}">
+                <a16:creationId xmlns:a16="http://schemas.microsoft.com/office/drawing/2014/main" id="{BC873F4F-6C71-F84A-0DD7-133231249620}"/>
+              </a:ext>
+            </a:extLst>
+          </p:cNvPr>
+          <p:cNvSpPr/>
+          <p:nvPr/>
+        </p:nvSpPr>
+        <p:spPr>
+          <a:xfrm>
+            <a:off x="3197186" y="9265103"/>
+            <a:ext cx="2410800" cy="480900"/>
+          </a:xfrm>
+          <a:prstGeom prst="roundRect">
+            <a:avLst>
+              <a:gd name="adj" fmla="val 16667"/>
+            </a:avLst>
+          </a:prstGeom>
+          <a:solidFill>
+            <a:srgbClr val="E6B8AF"/>
+          </a:solidFill>
+          <a:ln w="28575" cap="flat" cmpd="sng">
+            <a:solidFill>
+              <a:srgbClr val="5B0F00"/>
+            </a:solidFill>
+            <a:prstDash val="solid"/>
+            <a:round/>
+            <a:headEnd type="none" w="sm" len="sm"/>
+            <a:tailEnd type="none" w="sm" len="sm"/>
+          </a:ln>
+        </p:spPr>
+        <p:txBody>
+          <a:bodyPr spcFirstLastPara="1" wrap="square" lIns="91425" tIns="91425" rIns="91425" bIns="91425" anchor="ctr" anchorCtr="0">
+            <a:noAutofit/>
+          </a:bodyPr>
+          <a:lstStyle/>
+          <a:p>
+            <a:pPr marL="0" lvl="0" indent="0" algn="ctr" rtl="0">
+              <a:spcBef>
+                <a:spcPts val="0"/>
+              </a:spcBef>
+              <a:spcAft>
+                <a:spcPts val="0"/>
+              </a:spcAft>
+              <a:buNone/>
+            </a:pPr>
+            <a:r>
+              <a:rPr lang="en-GB" sz="1800" b="1" dirty="0">
+                <a:latin typeface="Consolas"/>
+                <a:ea typeface="Consolas"/>
+                <a:cs typeface="Consolas"/>
+                <a:sym typeface="Consolas"/>
+              </a:rPr>
+              <a:t>67870</a:t>
+            </a:r>
+            <a:endParaRPr sz="1800" b="1" dirty="0">
+              <a:latin typeface="Consolas"/>
+              <a:ea typeface="Consolas"/>
+              <a:cs typeface="Consolas"/>
+              <a:sym typeface="Consolas"/>
+            </a:endParaRPr>
+          </a:p>
+        </p:txBody>
+      </p:sp>
+      <p:sp>
+        <p:nvSpPr>
+          <p:cNvPr id="19" name="Google Shape;86;p15">
+            <a:extLst>
+              <a:ext uri="{FF2B5EF4-FFF2-40B4-BE49-F238E27FC236}">
+                <a16:creationId xmlns:a16="http://schemas.microsoft.com/office/drawing/2014/main" id="{DA10F264-644F-ABE0-7824-34D0F4708A10}"/>
+              </a:ext>
+            </a:extLst>
+          </p:cNvPr>
+          <p:cNvSpPr/>
+          <p:nvPr/>
+        </p:nvSpPr>
+        <p:spPr>
+          <a:xfrm>
+            <a:off x="6113258" y="1294224"/>
+            <a:ext cx="2609591" cy="8864188"/>
+          </a:xfrm>
+          <a:prstGeom prst="roundRect">
+            <a:avLst>
+              <a:gd name="adj" fmla="val 16667"/>
+            </a:avLst>
+          </a:prstGeom>
+          <a:solidFill>
+            <a:srgbClr val="D9EAD3"/>
+          </a:solidFill>
+          <a:ln w="28575" cap="flat" cmpd="sng">
+            <a:solidFill>
+              <a:srgbClr val="274E13"/>
+            </a:solidFill>
+            <a:prstDash val="solid"/>
+            <a:round/>
+            <a:headEnd type="none" w="sm" len="sm"/>
+            <a:tailEnd type="none" w="sm" len="sm"/>
+          </a:ln>
+        </p:spPr>
+        <p:txBody>
+          <a:bodyPr spcFirstLastPara="1" wrap="square" lIns="91425" tIns="91425" rIns="91425" bIns="91425" anchor="t" anchorCtr="0">
+            <a:noAutofit/>
+          </a:bodyPr>
+          <a:lstStyle/>
+          <a:p>
+            <a:pPr marL="0" lvl="0" indent="0" rtl="0">
+              <a:spcBef>
+                <a:spcPts val="0"/>
+              </a:spcBef>
+              <a:spcAft>
+                <a:spcPts val="0"/>
+              </a:spcAft>
+              <a:buNone/>
+            </a:pPr>
+            <a:r>
+              <a:rPr lang="en-GB" dirty="0">
+                <a:latin typeface="Consolas"/>
+                <a:ea typeface="Consolas"/>
+                <a:cs typeface="Consolas"/>
+                <a:sym typeface="Consolas"/>
+              </a:rPr>
+              <a:t>US1: Como </a:t>
+            </a:r>
+            <a:r>
+              <a:rPr lang="en-GB" dirty="0" err="1">
+                <a:latin typeface="Consolas"/>
+                <a:ea typeface="Consolas"/>
+                <a:cs typeface="Consolas"/>
+                <a:sym typeface="Consolas"/>
+              </a:rPr>
+              <a:t>membro</a:t>
+            </a:r>
+            <a:r>
+              <a:rPr lang="en-GB" dirty="0">
+                <a:latin typeface="Consolas"/>
+                <a:ea typeface="Consolas"/>
+                <a:cs typeface="Consolas"/>
+                <a:sym typeface="Consolas"/>
+              </a:rPr>
+              <a:t> da </a:t>
+            </a:r>
+            <a:r>
+              <a:rPr lang="en-GB" dirty="0" err="1">
+                <a:latin typeface="Consolas"/>
+                <a:ea typeface="Consolas"/>
+                <a:cs typeface="Consolas"/>
+                <a:sym typeface="Consolas"/>
+              </a:rPr>
+              <a:t>equipa</a:t>
+            </a:r>
+            <a:r>
+              <a:rPr lang="en-GB" dirty="0">
+                <a:latin typeface="Consolas"/>
+                <a:ea typeface="Consolas"/>
+                <a:cs typeface="Consolas"/>
+                <a:sym typeface="Consolas"/>
+              </a:rPr>
+              <a:t>, </a:t>
+            </a:r>
+            <a:r>
+              <a:rPr lang="en-GB" dirty="0" err="1">
+                <a:latin typeface="Consolas"/>
+                <a:ea typeface="Consolas"/>
+                <a:cs typeface="Consolas"/>
+                <a:sym typeface="Consolas"/>
+              </a:rPr>
+              <a:t>quero</a:t>
+            </a:r>
+            <a:r>
+              <a:rPr lang="en-GB" dirty="0">
+                <a:latin typeface="Consolas"/>
+                <a:ea typeface="Consolas"/>
+                <a:cs typeface="Consolas"/>
+                <a:sym typeface="Consolas"/>
+              </a:rPr>
+              <a:t> </a:t>
+            </a:r>
+            <a:r>
+              <a:rPr lang="en-GB" dirty="0" err="1">
+                <a:latin typeface="Consolas"/>
+                <a:ea typeface="Consolas"/>
+                <a:cs typeface="Consolas"/>
+                <a:sym typeface="Consolas"/>
+              </a:rPr>
+              <a:t>implementar</a:t>
+            </a:r>
+            <a:r>
+              <a:rPr lang="en-GB" dirty="0">
+                <a:latin typeface="Consolas"/>
+                <a:ea typeface="Consolas"/>
+                <a:cs typeface="Consolas"/>
+                <a:sym typeface="Consolas"/>
+              </a:rPr>
+              <a:t> um modo de </a:t>
+            </a:r>
+            <a:r>
+              <a:rPr lang="en-GB" dirty="0" err="1">
+                <a:latin typeface="Consolas"/>
+                <a:ea typeface="Consolas"/>
+                <a:cs typeface="Consolas"/>
+                <a:sym typeface="Consolas"/>
+              </a:rPr>
+              <a:t>jogo</a:t>
+            </a:r>
+            <a:r>
+              <a:rPr lang="en-GB" dirty="0">
+                <a:latin typeface="Consolas"/>
+                <a:ea typeface="Consolas"/>
+                <a:cs typeface="Consolas"/>
+                <a:sym typeface="Consolas"/>
+              </a:rPr>
+              <a:t> </a:t>
+            </a:r>
+            <a:r>
+              <a:rPr lang="en-GB" dirty="0" err="1">
+                <a:latin typeface="Consolas"/>
+                <a:ea typeface="Consolas"/>
+                <a:cs typeface="Consolas"/>
+                <a:sym typeface="Consolas"/>
+              </a:rPr>
+              <a:t>onde</a:t>
+            </a:r>
+            <a:r>
+              <a:rPr lang="en-GB" dirty="0">
+                <a:latin typeface="Consolas"/>
+                <a:ea typeface="Consolas"/>
+                <a:cs typeface="Consolas"/>
+                <a:sym typeface="Consolas"/>
+              </a:rPr>
+              <a:t> o </a:t>
+            </a:r>
+            <a:r>
+              <a:rPr lang="en-GB" dirty="0" err="1">
+                <a:latin typeface="Consolas"/>
+                <a:ea typeface="Consolas"/>
+                <a:cs typeface="Consolas"/>
+                <a:sym typeface="Consolas"/>
+              </a:rPr>
+              <a:t>mapa</a:t>
+            </a:r>
+            <a:r>
+              <a:rPr lang="en-GB" dirty="0">
+                <a:latin typeface="Consolas"/>
+                <a:ea typeface="Consolas"/>
+                <a:cs typeface="Consolas"/>
+                <a:sym typeface="Consolas"/>
+              </a:rPr>
+              <a:t> </a:t>
+            </a:r>
+            <a:r>
+              <a:rPr lang="en-GB" dirty="0" err="1">
+                <a:latin typeface="Consolas"/>
+                <a:ea typeface="Consolas"/>
+                <a:cs typeface="Consolas"/>
+                <a:sym typeface="Consolas"/>
+              </a:rPr>
+              <a:t>muda</a:t>
+            </a:r>
+            <a:r>
+              <a:rPr lang="en-GB" dirty="0">
+                <a:latin typeface="Consolas"/>
+                <a:ea typeface="Consolas"/>
+                <a:cs typeface="Consolas"/>
+                <a:sym typeface="Consolas"/>
+              </a:rPr>
+              <a:t> </a:t>
+            </a:r>
+            <a:r>
+              <a:rPr lang="en-GB" dirty="0" err="1">
+                <a:latin typeface="Consolas"/>
+                <a:ea typeface="Consolas"/>
+                <a:cs typeface="Consolas"/>
+                <a:sym typeface="Consolas"/>
+              </a:rPr>
+              <a:t>semanalmente</a:t>
+            </a:r>
+            <a:r>
+              <a:rPr lang="en-GB" dirty="0">
+                <a:latin typeface="Consolas"/>
+                <a:ea typeface="Consolas"/>
+                <a:cs typeface="Consolas"/>
+                <a:sym typeface="Consolas"/>
+              </a:rPr>
+              <a:t> e </a:t>
+            </a:r>
+            <a:r>
+              <a:rPr lang="en-GB" dirty="0" err="1">
+                <a:latin typeface="Consolas"/>
+                <a:ea typeface="Consolas"/>
+                <a:cs typeface="Consolas"/>
+                <a:sym typeface="Consolas"/>
+              </a:rPr>
+              <a:t>possui</a:t>
+            </a:r>
+            <a:r>
+              <a:rPr lang="en-GB" dirty="0">
+                <a:latin typeface="Consolas"/>
+                <a:ea typeface="Consolas"/>
+                <a:cs typeface="Consolas"/>
+                <a:sym typeface="Consolas"/>
+              </a:rPr>
+              <a:t> um ranking </a:t>
+            </a:r>
+            <a:r>
+              <a:rPr lang="en-GB" dirty="0" err="1">
+                <a:latin typeface="Consolas"/>
+                <a:ea typeface="Consolas"/>
+                <a:cs typeface="Consolas"/>
+                <a:sym typeface="Consolas"/>
+              </a:rPr>
+              <a:t>baseado</a:t>
+            </a:r>
+            <a:r>
+              <a:rPr lang="en-GB" dirty="0">
+                <a:latin typeface="Consolas"/>
+                <a:ea typeface="Consolas"/>
+                <a:cs typeface="Consolas"/>
+                <a:sym typeface="Consolas"/>
+              </a:rPr>
+              <a:t> </a:t>
+            </a:r>
+            <a:r>
+              <a:rPr lang="en-GB" dirty="0" err="1">
+                <a:latin typeface="Consolas"/>
+                <a:ea typeface="Consolas"/>
+                <a:cs typeface="Consolas"/>
+                <a:sym typeface="Consolas"/>
+              </a:rPr>
+              <a:t>na</a:t>
+            </a:r>
+            <a:r>
+              <a:rPr lang="en-GB" dirty="0">
+                <a:latin typeface="Consolas"/>
+                <a:ea typeface="Consolas"/>
+                <a:cs typeface="Consolas"/>
+                <a:sym typeface="Consolas"/>
+              </a:rPr>
+              <a:t> performance.</a:t>
+            </a:r>
+            <a:endParaRPr dirty="0">
+              <a:latin typeface="Consolas"/>
+              <a:ea typeface="Consolas"/>
+              <a:cs typeface="Consolas"/>
+              <a:sym typeface="Consolas"/>
+            </a:endParaRPr>
+          </a:p>
+        </p:txBody>
+      </p:sp>
+      <p:sp>
+        <p:nvSpPr>
+          <p:cNvPr id="20" name="Google Shape;92;p15">
+            <a:extLst>
+              <a:ext uri="{FF2B5EF4-FFF2-40B4-BE49-F238E27FC236}">
+                <a16:creationId xmlns:a16="http://schemas.microsoft.com/office/drawing/2014/main" id="{472925EA-32E9-5AD5-80FE-6685DF5E21DC}"/>
+              </a:ext>
+            </a:extLst>
+          </p:cNvPr>
+          <p:cNvSpPr/>
+          <p:nvPr/>
+        </p:nvSpPr>
+        <p:spPr>
+          <a:xfrm>
+            <a:off x="6113258" y="3203475"/>
+            <a:ext cx="2609587" cy="7609683"/>
+          </a:xfrm>
+          <a:prstGeom prst="roundRect">
+            <a:avLst>
+              <a:gd name="adj" fmla="val 16667"/>
+            </a:avLst>
+          </a:prstGeom>
+          <a:solidFill>
+            <a:srgbClr val="D9EAD3"/>
+          </a:solidFill>
+          <a:ln w="28575" cap="flat" cmpd="sng">
+            <a:solidFill>
+              <a:srgbClr val="274E13"/>
+            </a:solidFill>
+            <a:prstDash val="solid"/>
+            <a:round/>
+            <a:headEnd type="none" w="sm" len="sm"/>
+            <a:tailEnd type="none" w="sm" len="sm"/>
+          </a:ln>
+        </p:spPr>
+        <p:txBody>
+          <a:bodyPr spcFirstLastPara="1" wrap="square" lIns="91425" tIns="91425" rIns="91425" bIns="91425" anchor="t" anchorCtr="0">
+            <a:noAutofit/>
+          </a:bodyPr>
+          <a:lstStyle/>
+          <a:p>
+            <a:pPr lvl="0"/>
+            <a:r>
+              <a:rPr lang="en-GB" dirty="0">
+                <a:latin typeface="Consolas"/>
+                <a:ea typeface="Consolas"/>
+                <a:cs typeface="Consolas"/>
+                <a:sym typeface="Consolas"/>
+              </a:rPr>
+              <a:t>US2: Como </a:t>
+            </a:r>
+            <a:r>
+              <a:rPr lang="en-GB" dirty="0" err="1">
+                <a:latin typeface="Consolas"/>
+                <a:ea typeface="Consolas"/>
+                <a:cs typeface="Consolas"/>
+                <a:sym typeface="Consolas"/>
+              </a:rPr>
+              <a:t>membro</a:t>
+            </a:r>
+            <a:r>
+              <a:rPr lang="en-GB" dirty="0">
+                <a:latin typeface="Consolas"/>
+                <a:ea typeface="Consolas"/>
+                <a:cs typeface="Consolas"/>
+                <a:sym typeface="Consolas"/>
+              </a:rPr>
+              <a:t> da </a:t>
+            </a:r>
+            <a:r>
+              <a:rPr lang="en-GB" dirty="0" err="1">
+                <a:latin typeface="Consolas"/>
+                <a:ea typeface="Consolas"/>
+                <a:cs typeface="Consolas"/>
+                <a:sym typeface="Consolas"/>
+              </a:rPr>
+              <a:t>equipa</a:t>
+            </a:r>
+            <a:r>
+              <a:rPr lang="en-GB" dirty="0">
+                <a:latin typeface="Consolas"/>
+                <a:ea typeface="Consolas"/>
+                <a:cs typeface="Consolas"/>
+                <a:sym typeface="Consolas"/>
+              </a:rPr>
+              <a:t> </a:t>
+            </a:r>
+            <a:r>
+              <a:rPr lang="en-GB" dirty="0" err="1">
+                <a:latin typeface="Consolas"/>
+                <a:ea typeface="Consolas"/>
+                <a:cs typeface="Consolas"/>
+                <a:sym typeface="Consolas"/>
+              </a:rPr>
+              <a:t>quero</a:t>
+            </a:r>
+            <a:r>
+              <a:rPr lang="pt-PT" dirty="0">
+                <a:latin typeface="Consolas"/>
+                <a:ea typeface="Consolas"/>
+                <a:cs typeface="Consolas"/>
+                <a:sym typeface="Consolas"/>
+              </a:rPr>
+              <a:t> implementar a </a:t>
+            </a:r>
+            <a:r>
+              <a:rPr lang="pt-PT" dirty="0" err="1">
+                <a:latin typeface="Consolas"/>
+                <a:ea typeface="Consolas"/>
+                <a:cs typeface="Consolas"/>
+                <a:sym typeface="Consolas"/>
+              </a:rPr>
+              <a:t>Health</a:t>
+            </a:r>
+            <a:r>
+              <a:rPr lang="pt-PT" dirty="0">
+                <a:latin typeface="Consolas"/>
+                <a:ea typeface="Consolas"/>
+                <a:cs typeface="Consolas"/>
+                <a:sym typeface="Consolas"/>
+              </a:rPr>
+              <a:t> Bar de cada </a:t>
+            </a:r>
+            <a:r>
+              <a:rPr lang="pt-PT" dirty="0" err="1">
+                <a:latin typeface="Consolas"/>
+                <a:ea typeface="Consolas"/>
+                <a:cs typeface="Consolas"/>
+                <a:sym typeface="Consolas"/>
+              </a:rPr>
+              <a:t>wave</a:t>
+            </a:r>
+            <a:r>
+              <a:rPr lang="pt-PT" dirty="0">
+                <a:latin typeface="Consolas"/>
+                <a:ea typeface="Consolas"/>
+                <a:cs typeface="Consolas"/>
+                <a:sym typeface="Consolas"/>
+              </a:rPr>
+              <a:t> de inimigos.</a:t>
+            </a:r>
+            <a:endParaRPr dirty="0">
+              <a:latin typeface="Consolas"/>
+              <a:ea typeface="Consolas"/>
+              <a:cs typeface="Consolas"/>
+              <a:sym typeface="Consolas"/>
+            </a:endParaRPr>
+          </a:p>
+        </p:txBody>
+      </p:sp>
+      <p:sp>
+        <p:nvSpPr>
+          <p:cNvPr id="21" name="Google Shape;92;p15">
+            <a:extLst>
+              <a:ext uri="{FF2B5EF4-FFF2-40B4-BE49-F238E27FC236}">
+                <a16:creationId xmlns:a16="http://schemas.microsoft.com/office/drawing/2014/main" id="{ED4BB08E-DED3-DC2B-8E63-4BDA60D6AF64}"/>
+              </a:ext>
+            </a:extLst>
+          </p:cNvPr>
+          <p:cNvSpPr/>
+          <p:nvPr/>
+        </p:nvSpPr>
+        <p:spPr>
+          <a:xfrm>
+            <a:off x="6136546" y="4644094"/>
+            <a:ext cx="2609586" cy="6208084"/>
+          </a:xfrm>
+          <a:prstGeom prst="roundRect">
+            <a:avLst>
+              <a:gd name="adj" fmla="val 16667"/>
+            </a:avLst>
+          </a:prstGeom>
+          <a:solidFill>
+            <a:srgbClr val="D9EAD3"/>
+          </a:solidFill>
+          <a:ln w="28575" cap="flat" cmpd="sng">
+            <a:solidFill>
+              <a:srgbClr val="274E13"/>
+            </a:solidFill>
+            <a:prstDash val="solid"/>
+            <a:round/>
+            <a:headEnd type="none" w="sm" len="sm"/>
+            <a:tailEnd type="none" w="sm" len="sm"/>
+          </a:ln>
+        </p:spPr>
+        <p:txBody>
+          <a:bodyPr spcFirstLastPara="1" wrap="square" lIns="91425" tIns="91425" rIns="91425" bIns="91425" anchor="t" anchorCtr="0">
+            <a:noAutofit/>
+          </a:bodyPr>
+          <a:lstStyle/>
+          <a:p>
+            <a:pPr lvl="0"/>
+            <a:r>
+              <a:rPr lang="en-GB" dirty="0">
+                <a:latin typeface="Consolas"/>
+                <a:ea typeface="Consolas"/>
+                <a:cs typeface="Consolas"/>
+                <a:sym typeface="Consolas"/>
+              </a:rPr>
+              <a:t>US3: Como </a:t>
+            </a:r>
+            <a:r>
+              <a:rPr lang="en-GB" dirty="0" err="1">
+                <a:latin typeface="Consolas"/>
+                <a:ea typeface="Consolas"/>
+                <a:cs typeface="Consolas"/>
+                <a:sym typeface="Consolas"/>
+              </a:rPr>
+              <a:t>membro</a:t>
+            </a:r>
+            <a:r>
+              <a:rPr lang="en-GB" dirty="0">
+                <a:latin typeface="Consolas"/>
+                <a:ea typeface="Consolas"/>
+                <a:cs typeface="Consolas"/>
+                <a:sym typeface="Consolas"/>
+              </a:rPr>
+              <a:t> da </a:t>
+            </a:r>
+            <a:r>
+              <a:rPr lang="en-GB" dirty="0" err="1">
+                <a:latin typeface="Consolas"/>
+                <a:ea typeface="Consolas"/>
+                <a:cs typeface="Consolas"/>
+                <a:sym typeface="Consolas"/>
+              </a:rPr>
+              <a:t>equipa</a:t>
+            </a:r>
+            <a:r>
+              <a:rPr lang="en-GB" dirty="0">
+                <a:latin typeface="Consolas"/>
+                <a:ea typeface="Consolas"/>
+                <a:cs typeface="Consolas"/>
+                <a:sym typeface="Consolas"/>
+              </a:rPr>
+              <a:t> </a:t>
+            </a:r>
+            <a:r>
+              <a:rPr lang="en-GB" dirty="0" err="1">
+                <a:latin typeface="Consolas"/>
+                <a:ea typeface="Consolas"/>
+                <a:cs typeface="Consolas"/>
+                <a:sym typeface="Consolas"/>
+              </a:rPr>
+              <a:t>quero</a:t>
+            </a:r>
+            <a:r>
+              <a:rPr lang="pt-PT" dirty="0">
+                <a:latin typeface="Consolas"/>
+                <a:ea typeface="Consolas"/>
+                <a:cs typeface="Consolas"/>
+                <a:sym typeface="Consolas"/>
+              </a:rPr>
+              <a:t> implementar as diferentes condições climatéricas.</a:t>
+            </a:r>
+          </a:p>
+        </p:txBody>
+      </p:sp>
+      <p:sp>
+        <p:nvSpPr>
+          <p:cNvPr id="8" name="Google Shape;121;p16">
+            <a:extLst>
+              <a:ext uri="{FF2B5EF4-FFF2-40B4-BE49-F238E27FC236}">
+                <a16:creationId xmlns:a16="http://schemas.microsoft.com/office/drawing/2014/main" id="{BEF1B6F1-8FB8-9FE0-1753-62E155ABC3B4}"/>
+              </a:ext>
+            </a:extLst>
+          </p:cNvPr>
+          <p:cNvSpPr/>
+          <p:nvPr/>
+        </p:nvSpPr>
+        <p:spPr>
+          <a:xfrm>
+            <a:off x="18725151" y="1021952"/>
+            <a:ext cx="2410800" cy="2657243"/>
+          </a:xfrm>
+          <a:prstGeom prst="roundRect">
+            <a:avLst>
+              <a:gd name="adj" fmla="val 16667"/>
+            </a:avLst>
+          </a:prstGeom>
+          <a:solidFill>
+            <a:srgbClr val="D0E0E3"/>
+          </a:solidFill>
+          <a:ln w="28575" cap="flat" cmpd="sng">
+            <a:solidFill>
+              <a:srgbClr val="134F5C"/>
+            </a:solidFill>
+            <a:prstDash val="solid"/>
+            <a:round/>
+            <a:headEnd type="none" w="sm" len="sm"/>
+            <a:tailEnd type="none" w="sm" len="sm"/>
+          </a:ln>
+        </p:spPr>
+        <p:txBody>
+          <a:bodyPr spcFirstLastPara="1" wrap="square" lIns="91425" tIns="91425" rIns="91425" bIns="91425" anchor="t" anchorCtr="0">
+            <a:noAutofit/>
+          </a:bodyPr>
+          <a:lstStyle/>
+          <a:p>
+            <a:r>
+              <a:rPr lang="en-GB" dirty="0">
+                <a:latin typeface="Consolas"/>
+                <a:ea typeface="Consolas"/>
+                <a:cs typeface="Consolas"/>
+                <a:sym typeface="Consolas"/>
+              </a:rPr>
+              <a:t>T1: </a:t>
+            </a:r>
+            <a:r>
+              <a:rPr lang="pt-PT" dirty="0">
+                <a:latin typeface="Consolas"/>
+                <a:ea typeface="Consolas"/>
+                <a:cs typeface="Consolas"/>
+                <a:sym typeface="Consolas"/>
+              </a:rPr>
+              <a:t>Fazer Interface de Rankings e “jogar Desafio Semanal”</a:t>
+            </a:r>
+            <a:br>
+              <a:rPr lang="en-GB" dirty="0">
+                <a:latin typeface="Consolas"/>
+                <a:ea typeface="Consolas"/>
+                <a:cs typeface="Consolas"/>
+                <a:sym typeface="Consolas"/>
+              </a:rPr>
+            </a:br>
+            <a:br>
+              <a:rPr lang="en-GB" dirty="0">
+                <a:latin typeface="Consolas"/>
+                <a:ea typeface="Consolas"/>
+                <a:cs typeface="Consolas"/>
+                <a:sym typeface="Consolas"/>
+              </a:rPr>
+            </a:br>
+            <a:endParaRPr lang="en-GB" dirty="0">
+              <a:latin typeface="Consolas"/>
+              <a:ea typeface="Consolas"/>
+              <a:cs typeface="Consolas"/>
+              <a:sym typeface="Consolas"/>
+            </a:endParaRPr>
+          </a:p>
+          <a:p>
+            <a:pPr marL="0" lvl="0" indent="0" algn="l" rtl="0">
+              <a:spcBef>
+                <a:spcPts val="0"/>
+              </a:spcBef>
+              <a:spcAft>
+                <a:spcPts val="0"/>
+              </a:spcAft>
+              <a:buNone/>
+            </a:pPr>
+            <a:endParaRPr dirty="0">
+              <a:latin typeface="Consolas"/>
+              <a:ea typeface="Consolas"/>
+              <a:cs typeface="Consolas"/>
+              <a:sym typeface="Consolas"/>
+            </a:endParaRPr>
+          </a:p>
+        </p:txBody>
+      </p:sp>
+      <p:sp>
+        <p:nvSpPr>
+          <p:cNvPr id="10" name="Google Shape;121;p16">
+            <a:extLst>
+              <a:ext uri="{FF2B5EF4-FFF2-40B4-BE49-F238E27FC236}">
+                <a16:creationId xmlns:a16="http://schemas.microsoft.com/office/drawing/2014/main" id="{A606BEAF-9116-4F00-8812-64682D257184}"/>
+              </a:ext>
+            </a:extLst>
+          </p:cNvPr>
+          <p:cNvSpPr/>
+          <p:nvPr/>
+        </p:nvSpPr>
+        <p:spPr>
+          <a:xfrm>
+            <a:off x="12395940" y="4165308"/>
+            <a:ext cx="2410800" cy="749592"/>
+          </a:xfrm>
+          <a:prstGeom prst="roundRect">
+            <a:avLst>
+              <a:gd name="adj" fmla="val 16667"/>
+            </a:avLst>
+          </a:prstGeom>
+          <a:solidFill>
+            <a:srgbClr val="D0E0E3"/>
+          </a:solidFill>
+          <a:ln w="28575" cap="flat" cmpd="sng">
+            <a:solidFill>
+              <a:srgbClr val="134F5C"/>
+            </a:solidFill>
+            <a:prstDash val="solid"/>
+            <a:round/>
+            <a:headEnd type="none" w="sm" len="sm"/>
+            <a:tailEnd type="none" w="sm" len="sm"/>
+          </a:ln>
+        </p:spPr>
+        <p:txBody>
+          <a:bodyPr spcFirstLastPara="1" wrap="square" lIns="91425" tIns="91425" rIns="91425" bIns="91425" anchor="t" anchorCtr="0">
+            <a:noAutofit/>
+          </a:bodyPr>
+          <a:lstStyle/>
+          <a:p>
+            <a:r>
+              <a:rPr lang="pt-PT" dirty="0">
+                <a:latin typeface="Consolas"/>
+                <a:ea typeface="Consolas"/>
+                <a:cs typeface="Consolas"/>
+                <a:sym typeface="Consolas"/>
+              </a:rPr>
+              <a:t>T3: Implementar a parte do Terramoto.</a:t>
+            </a:r>
+          </a:p>
+          <a:p>
+            <a:r>
+              <a:rPr lang="en-GB" dirty="0">
+                <a:latin typeface="Consolas"/>
+                <a:ea typeface="Consolas"/>
+                <a:cs typeface="Consolas"/>
+                <a:sym typeface="Consolas"/>
+              </a:rPr>
+              <a:t> </a:t>
+            </a:r>
+            <a:br>
+              <a:rPr lang="en-GB" dirty="0">
+                <a:latin typeface="Consolas"/>
+                <a:ea typeface="Consolas"/>
+                <a:cs typeface="Consolas"/>
+                <a:sym typeface="Consolas"/>
+              </a:rPr>
+            </a:br>
+            <a:br>
+              <a:rPr lang="en-GB" dirty="0">
+                <a:latin typeface="Consolas"/>
+                <a:ea typeface="Consolas"/>
+                <a:cs typeface="Consolas"/>
+                <a:sym typeface="Consolas"/>
+              </a:rPr>
+            </a:br>
+            <a:endParaRPr lang="en-GB" dirty="0">
+              <a:latin typeface="Consolas"/>
+              <a:ea typeface="Consolas"/>
+              <a:cs typeface="Consolas"/>
+              <a:sym typeface="Consolas"/>
+            </a:endParaRPr>
+          </a:p>
+          <a:p>
+            <a:pPr marL="0" lvl="0" indent="0" algn="l" rtl="0">
+              <a:spcBef>
+                <a:spcPts val="0"/>
+              </a:spcBef>
+              <a:spcAft>
+                <a:spcPts val="0"/>
+              </a:spcAft>
+              <a:buNone/>
+            </a:pPr>
+            <a:endParaRPr dirty="0">
+              <a:latin typeface="Consolas"/>
+              <a:ea typeface="Consolas"/>
+              <a:cs typeface="Consolas"/>
+              <a:sym typeface="Consolas"/>
+            </a:endParaRPr>
+          </a:p>
+        </p:txBody>
+      </p:sp>
+      <p:sp>
+        <p:nvSpPr>
+          <p:cNvPr id="11" name="Google Shape;121;p16">
+            <a:extLst>
+              <a:ext uri="{FF2B5EF4-FFF2-40B4-BE49-F238E27FC236}">
+                <a16:creationId xmlns:a16="http://schemas.microsoft.com/office/drawing/2014/main" id="{929F78E0-460F-8738-6BAD-E9AC471B3059}"/>
+              </a:ext>
+            </a:extLst>
+          </p:cNvPr>
+          <p:cNvSpPr/>
+          <p:nvPr/>
+        </p:nvSpPr>
+        <p:spPr>
+          <a:xfrm>
+            <a:off x="12395940" y="4784311"/>
+            <a:ext cx="2410800" cy="749592"/>
+          </a:xfrm>
+          <a:prstGeom prst="roundRect">
+            <a:avLst>
+              <a:gd name="adj" fmla="val 16667"/>
+            </a:avLst>
+          </a:prstGeom>
+          <a:solidFill>
+            <a:srgbClr val="D0E0E3"/>
+          </a:solidFill>
+          <a:ln w="28575" cap="flat" cmpd="sng">
+            <a:solidFill>
+              <a:srgbClr val="134F5C"/>
+            </a:solidFill>
+            <a:prstDash val="solid"/>
+            <a:round/>
+            <a:headEnd type="none" w="sm" len="sm"/>
+            <a:tailEnd type="none" w="sm" len="sm"/>
+          </a:ln>
+        </p:spPr>
+        <p:txBody>
+          <a:bodyPr spcFirstLastPara="1" wrap="square" lIns="91425" tIns="91425" rIns="91425" bIns="91425" anchor="t" anchorCtr="0">
+            <a:noAutofit/>
+          </a:bodyPr>
+          <a:lstStyle/>
+          <a:p>
+            <a:r>
+              <a:rPr lang="pt-PT" dirty="0">
+                <a:latin typeface="Consolas"/>
+                <a:ea typeface="Consolas"/>
+                <a:cs typeface="Consolas"/>
+                <a:sym typeface="Consolas"/>
+              </a:rPr>
+              <a:t>T3: Implementar a parte do Tsunami.</a:t>
+            </a:r>
+          </a:p>
+          <a:p>
+            <a:r>
+              <a:rPr lang="en-GB" dirty="0">
+                <a:latin typeface="Consolas"/>
+                <a:ea typeface="Consolas"/>
+                <a:cs typeface="Consolas"/>
+                <a:sym typeface="Consolas"/>
+              </a:rPr>
+              <a:t> </a:t>
+            </a:r>
+            <a:br>
+              <a:rPr lang="en-GB" dirty="0">
+                <a:latin typeface="Consolas"/>
+                <a:ea typeface="Consolas"/>
+                <a:cs typeface="Consolas"/>
+                <a:sym typeface="Consolas"/>
+              </a:rPr>
+            </a:br>
+            <a:br>
+              <a:rPr lang="en-GB" dirty="0">
+                <a:latin typeface="Consolas"/>
+                <a:ea typeface="Consolas"/>
+                <a:cs typeface="Consolas"/>
+                <a:sym typeface="Consolas"/>
+              </a:rPr>
+            </a:br>
+            <a:endParaRPr lang="en-GB" dirty="0">
+              <a:latin typeface="Consolas"/>
+              <a:ea typeface="Consolas"/>
+              <a:cs typeface="Consolas"/>
+              <a:sym typeface="Consolas"/>
+            </a:endParaRPr>
+          </a:p>
+          <a:p>
+            <a:pPr marL="0" lvl="0" indent="0" algn="l" rtl="0">
+              <a:spcBef>
+                <a:spcPts val="0"/>
+              </a:spcBef>
+              <a:spcAft>
+                <a:spcPts val="0"/>
+              </a:spcAft>
+              <a:buNone/>
+            </a:pPr>
+            <a:endParaRPr dirty="0">
+              <a:latin typeface="Consolas"/>
+              <a:ea typeface="Consolas"/>
+              <a:cs typeface="Consolas"/>
+              <a:sym typeface="Consolas"/>
+            </a:endParaRPr>
+          </a:p>
+        </p:txBody>
+      </p:sp>
+      <p:sp>
+        <p:nvSpPr>
+          <p:cNvPr id="22" name="Google Shape;121;p16">
+            <a:extLst>
+              <a:ext uri="{FF2B5EF4-FFF2-40B4-BE49-F238E27FC236}">
+                <a16:creationId xmlns:a16="http://schemas.microsoft.com/office/drawing/2014/main" id="{7941DD71-F202-F4A0-7B0D-8269DED1F424}"/>
+              </a:ext>
+            </a:extLst>
+          </p:cNvPr>
+          <p:cNvSpPr/>
+          <p:nvPr/>
+        </p:nvSpPr>
+        <p:spPr>
+          <a:xfrm>
+            <a:off x="12423686" y="7368613"/>
+            <a:ext cx="2410800" cy="1215821"/>
+          </a:xfrm>
+          <a:prstGeom prst="roundRect">
+            <a:avLst>
+              <a:gd name="adj" fmla="val 16667"/>
+            </a:avLst>
+          </a:prstGeom>
+          <a:solidFill>
+            <a:srgbClr val="D0E0E3"/>
+          </a:solidFill>
+          <a:ln w="28575" cap="flat" cmpd="sng">
+            <a:solidFill>
+              <a:srgbClr val="134F5C"/>
+            </a:solidFill>
+            <a:prstDash val="solid"/>
+            <a:round/>
+            <a:headEnd type="none" w="sm" len="sm"/>
+            <a:tailEnd type="none" w="sm" len="sm"/>
+          </a:ln>
+        </p:spPr>
+        <p:txBody>
+          <a:bodyPr spcFirstLastPara="1" wrap="square" lIns="91425" tIns="91425" rIns="91425" bIns="91425" anchor="t" anchorCtr="0">
+            <a:noAutofit/>
+          </a:bodyPr>
+          <a:lstStyle/>
+          <a:p>
+            <a:r>
+              <a:rPr lang="pt-PT" dirty="0">
+                <a:latin typeface="Consolas"/>
+                <a:ea typeface="Consolas"/>
+                <a:cs typeface="Consolas"/>
+                <a:sym typeface="Consolas"/>
+              </a:rPr>
+              <a:t>T3: Implementar a parte do Meteorito. </a:t>
+            </a:r>
+          </a:p>
+          <a:p>
+            <a:r>
+              <a:rPr lang="en-GB" dirty="0">
+                <a:latin typeface="Consolas"/>
+                <a:ea typeface="Consolas"/>
+                <a:cs typeface="Consolas"/>
+                <a:sym typeface="Consolas"/>
+              </a:rPr>
+              <a:t> </a:t>
+            </a:r>
+            <a:br>
+              <a:rPr lang="en-GB" dirty="0">
+                <a:latin typeface="Consolas"/>
+                <a:ea typeface="Consolas"/>
+                <a:cs typeface="Consolas"/>
+                <a:sym typeface="Consolas"/>
+              </a:rPr>
+            </a:br>
+            <a:br>
+              <a:rPr lang="en-GB" dirty="0">
+                <a:latin typeface="Consolas"/>
+                <a:ea typeface="Consolas"/>
+                <a:cs typeface="Consolas"/>
+                <a:sym typeface="Consolas"/>
+              </a:rPr>
+            </a:br>
+            <a:endParaRPr lang="en-GB" dirty="0">
+              <a:latin typeface="Consolas"/>
+              <a:ea typeface="Consolas"/>
+              <a:cs typeface="Consolas"/>
+              <a:sym typeface="Consolas"/>
+            </a:endParaRPr>
+          </a:p>
+          <a:p>
+            <a:pPr marL="0" lvl="0" indent="0" algn="l" rtl="0">
+              <a:spcBef>
+                <a:spcPts val="0"/>
+              </a:spcBef>
+              <a:spcAft>
+                <a:spcPts val="0"/>
+              </a:spcAft>
+              <a:buNone/>
+            </a:pPr>
+            <a:endParaRPr lang="en-GB" dirty="0">
+              <a:latin typeface="Consolas"/>
+              <a:ea typeface="Consolas"/>
+              <a:cs typeface="Consolas"/>
+              <a:sym typeface="Consolas"/>
+            </a:endParaRPr>
+          </a:p>
+        </p:txBody>
+      </p:sp>
+      <p:sp>
+        <p:nvSpPr>
+          <p:cNvPr id="24" name="Google Shape;121;p16">
+            <a:extLst>
+              <a:ext uri="{FF2B5EF4-FFF2-40B4-BE49-F238E27FC236}">
+                <a16:creationId xmlns:a16="http://schemas.microsoft.com/office/drawing/2014/main" id="{E182894F-059D-7592-5B69-8062FAFEDA38}"/>
+              </a:ext>
+            </a:extLst>
+          </p:cNvPr>
+          <p:cNvSpPr/>
+          <p:nvPr/>
+        </p:nvSpPr>
+        <p:spPr>
+          <a:xfrm>
+            <a:off x="12395940" y="932272"/>
+            <a:ext cx="2410800" cy="2657243"/>
+          </a:xfrm>
+          <a:prstGeom prst="roundRect">
+            <a:avLst>
+              <a:gd name="adj" fmla="val 16667"/>
+            </a:avLst>
+          </a:prstGeom>
+          <a:solidFill>
+            <a:srgbClr val="D0E0E3"/>
+          </a:solidFill>
+          <a:ln w="28575" cap="flat" cmpd="sng">
+            <a:solidFill>
+              <a:srgbClr val="134F5C"/>
+            </a:solidFill>
+            <a:prstDash val="solid"/>
+            <a:round/>
+            <a:headEnd type="none" w="sm" len="sm"/>
+            <a:tailEnd type="none" w="sm" len="sm"/>
+          </a:ln>
+        </p:spPr>
+        <p:txBody>
+          <a:bodyPr spcFirstLastPara="1" wrap="square" lIns="91425" tIns="91425" rIns="91425" bIns="91425" anchor="t" anchorCtr="0">
+            <a:noAutofit/>
+          </a:bodyPr>
+          <a:lstStyle/>
+          <a:p>
+            <a:r>
+              <a:rPr lang="en-GB" dirty="0">
+                <a:latin typeface="Consolas"/>
+                <a:ea typeface="Consolas"/>
+                <a:cs typeface="Consolas"/>
+                <a:sym typeface="Consolas"/>
+              </a:rPr>
+              <a:t>T1: </a:t>
+            </a:r>
+            <a:r>
+              <a:rPr lang="pt-PT" dirty="0">
+                <a:latin typeface="Consolas"/>
+                <a:ea typeface="Consolas"/>
+                <a:cs typeface="Consolas"/>
+                <a:sym typeface="Consolas"/>
+              </a:rPr>
+              <a:t>Implementar um gerador de mapa semanal.</a:t>
+            </a:r>
+            <a:br>
+              <a:rPr lang="en-GB" dirty="0">
+                <a:latin typeface="Consolas"/>
+                <a:ea typeface="Consolas"/>
+                <a:cs typeface="Consolas"/>
+                <a:sym typeface="Consolas"/>
+              </a:rPr>
+            </a:br>
+            <a:br>
+              <a:rPr lang="en-GB" dirty="0">
+                <a:latin typeface="Consolas"/>
+                <a:ea typeface="Consolas"/>
+                <a:cs typeface="Consolas"/>
+                <a:sym typeface="Consolas"/>
+              </a:rPr>
+            </a:br>
+            <a:endParaRPr lang="en-GB" dirty="0">
+              <a:latin typeface="Consolas"/>
+              <a:ea typeface="Consolas"/>
+              <a:cs typeface="Consolas"/>
+              <a:sym typeface="Consolas"/>
+            </a:endParaRPr>
+          </a:p>
+          <a:p>
+            <a:pPr marL="0" lvl="0" indent="0" algn="l" rtl="0">
+              <a:spcBef>
+                <a:spcPts val="0"/>
+              </a:spcBef>
+              <a:spcAft>
+                <a:spcPts val="0"/>
+              </a:spcAft>
+              <a:buNone/>
+            </a:pPr>
+            <a:endParaRPr dirty="0">
+              <a:latin typeface="Consolas"/>
+              <a:ea typeface="Consolas"/>
+              <a:cs typeface="Consolas"/>
+              <a:sym typeface="Consolas"/>
+            </a:endParaRPr>
+          </a:p>
+        </p:txBody>
+      </p:sp>
+      <p:sp>
+        <p:nvSpPr>
+          <p:cNvPr id="23" name="Google Shape;121;p16">
+            <a:extLst>
+              <a:ext uri="{FF2B5EF4-FFF2-40B4-BE49-F238E27FC236}">
+                <a16:creationId xmlns:a16="http://schemas.microsoft.com/office/drawing/2014/main" id="{5DE13A3A-6939-390F-0212-85EBC489CED2}"/>
+              </a:ext>
+            </a:extLst>
+          </p:cNvPr>
+          <p:cNvSpPr/>
+          <p:nvPr/>
+        </p:nvSpPr>
+        <p:spPr>
+          <a:xfrm>
+            <a:off x="12423686" y="5744289"/>
+            <a:ext cx="2410800" cy="1215821"/>
+          </a:xfrm>
+          <a:prstGeom prst="roundRect">
+            <a:avLst>
+              <a:gd name="adj" fmla="val 16667"/>
+            </a:avLst>
+          </a:prstGeom>
+          <a:solidFill>
+            <a:srgbClr val="D0E0E3"/>
+          </a:solidFill>
+          <a:ln w="28575" cap="flat" cmpd="sng">
+            <a:solidFill>
+              <a:srgbClr val="134F5C"/>
+            </a:solidFill>
+            <a:prstDash val="solid"/>
+            <a:round/>
+            <a:headEnd type="none" w="sm" len="sm"/>
+            <a:tailEnd type="none" w="sm" len="sm"/>
+          </a:ln>
+        </p:spPr>
+        <p:txBody>
+          <a:bodyPr spcFirstLastPara="1" wrap="square" lIns="91425" tIns="91425" rIns="91425" bIns="91425" anchor="t" anchorCtr="0">
+            <a:noAutofit/>
+          </a:bodyPr>
+          <a:lstStyle/>
+          <a:p>
+            <a:r>
+              <a:rPr lang="pt-PT" dirty="0">
+                <a:latin typeface="Consolas"/>
+                <a:ea typeface="Consolas"/>
+                <a:cs typeface="Consolas"/>
+                <a:sym typeface="Consolas"/>
+              </a:rPr>
+              <a:t>T2: Implementar a </a:t>
+            </a:r>
+            <a:r>
+              <a:rPr lang="pt-PT" dirty="0" err="1">
+                <a:latin typeface="Consolas"/>
+                <a:ea typeface="Consolas"/>
+                <a:cs typeface="Consolas"/>
+                <a:sym typeface="Consolas"/>
+              </a:rPr>
+              <a:t>Health</a:t>
+            </a:r>
+            <a:r>
+              <a:rPr lang="pt-PT" dirty="0">
+                <a:latin typeface="Consolas"/>
+                <a:ea typeface="Consolas"/>
+                <a:cs typeface="Consolas"/>
+                <a:sym typeface="Consolas"/>
+              </a:rPr>
+              <a:t> Bar de cada </a:t>
+            </a:r>
+            <a:r>
+              <a:rPr lang="pt-PT" dirty="0" err="1">
+                <a:latin typeface="Consolas"/>
+                <a:ea typeface="Consolas"/>
+                <a:cs typeface="Consolas"/>
+                <a:sym typeface="Consolas"/>
+              </a:rPr>
+              <a:t>wave</a:t>
+            </a:r>
+            <a:r>
+              <a:rPr lang="pt-PT" dirty="0">
+                <a:latin typeface="Consolas"/>
+                <a:ea typeface="Consolas"/>
+                <a:cs typeface="Consolas"/>
+                <a:sym typeface="Consolas"/>
+              </a:rPr>
+              <a:t> de inimigos.</a:t>
+            </a:r>
+          </a:p>
+          <a:p>
+            <a:r>
+              <a:rPr lang="en-GB" dirty="0">
+                <a:latin typeface="Consolas"/>
+                <a:ea typeface="Consolas"/>
+                <a:cs typeface="Consolas"/>
+                <a:sym typeface="Consolas"/>
+              </a:rPr>
+              <a:t> </a:t>
+            </a:r>
+            <a:br>
+              <a:rPr lang="en-GB" dirty="0">
+                <a:latin typeface="Consolas"/>
+                <a:ea typeface="Consolas"/>
+                <a:cs typeface="Consolas"/>
+                <a:sym typeface="Consolas"/>
+              </a:rPr>
+            </a:br>
+            <a:br>
+              <a:rPr lang="en-GB" dirty="0">
+                <a:latin typeface="Consolas"/>
+                <a:ea typeface="Consolas"/>
+                <a:cs typeface="Consolas"/>
+                <a:sym typeface="Consolas"/>
+              </a:rPr>
+            </a:br>
+            <a:endParaRPr lang="en-GB" dirty="0">
+              <a:latin typeface="Consolas"/>
+              <a:ea typeface="Consolas"/>
+              <a:cs typeface="Consolas"/>
+              <a:sym typeface="Consolas"/>
+            </a:endParaRPr>
+          </a:p>
+          <a:p>
+            <a:pPr marL="0" lvl="0" indent="0" algn="l" rtl="0">
+              <a:spcBef>
+                <a:spcPts val="0"/>
+              </a:spcBef>
+              <a:spcAft>
+                <a:spcPts val="0"/>
+              </a:spcAft>
+              <a:buNone/>
+            </a:pPr>
+            <a:endParaRPr dirty="0">
+              <a:latin typeface="Consolas"/>
+              <a:ea typeface="Consolas"/>
+              <a:cs typeface="Consolas"/>
+              <a:sym typeface="Consolas"/>
+            </a:endParaRPr>
+          </a:p>
+        </p:txBody>
+      </p:sp>
+      <p:sp>
+        <p:nvSpPr>
+          <p:cNvPr id="25" name="Google Shape;121;p16">
+            <a:extLst>
+              <a:ext uri="{FF2B5EF4-FFF2-40B4-BE49-F238E27FC236}">
+                <a16:creationId xmlns:a16="http://schemas.microsoft.com/office/drawing/2014/main" id="{94350274-4D68-8DD9-B2AD-A15404260A94}"/>
+              </a:ext>
+            </a:extLst>
+          </p:cNvPr>
+          <p:cNvSpPr/>
+          <p:nvPr/>
+        </p:nvSpPr>
+        <p:spPr>
+          <a:xfrm>
+            <a:off x="12395940" y="8946051"/>
+            <a:ext cx="2410800" cy="1215821"/>
+          </a:xfrm>
+          <a:prstGeom prst="roundRect">
+            <a:avLst>
+              <a:gd name="adj" fmla="val 16667"/>
+            </a:avLst>
+          </a:prstGeom>
+          <a:solidFill>
+            <a:srgbClr val="D0E0E3"/>
+          </a:solidFill>
+          <a:ln w="28575" cap="flat" cmpd="sng">
+            <a:solidFill>
+              <a:srgbClr val="134F5C"/>
+            </a:solidFill>
+            <a:prstDash val="solid"/>
+            <a:round/>
+            <a:headEnd type="none" w="sm" len="sm"/>
+            <a:tailEnd type="none" w="sm" len="sm"/>
+          </a:ln>
+        </p:spPr>
+        <p:txBody>
+          <a:bodyPr spcFirstLastPara="1" wrap="square" lIns="91425" tIns="91425" rIns="91425" bIns="91425" anchor="t" anchorCtr="0">
+            <a:noAutofit/>
+          </a:bodyPr>
+          <a:lstStyle/>
+          <a:p>
+            <a:r>
+              <a:rPr lang="pt-PT" dirty="0">
+                <a:latin typeface="Consolas"/>
+                <a:ea typeface="Consolas"/>
+                <a:cs typeface="Consolas"/>
+                <a:sym typeface="Consolas"/>
+              </a:rPr>
+              <a:t>T2: Implementar a </a:t>
+            </a:r>
+            <a:r>
+              <a:rPr lang="pt-PT" dirty="0" err="1">
+                <a:latin typeface="Consolas"/>
+                <a:ea typeface="Consolas"/>
+                <a:cs typeface="Consolas"/>
+                <a:sym typeface="Consolas"/>
+              </a:rPr>
+              <a:t>Health</a:t>
+            </a:r>
+            <a:r>
+              <a:rPr lang="pt-PT" dirty="0">
+                <a:latin typeface="Consolas"/>
+                <a:ea typeface="Consolas"/>
+                <a:cs typeface="Consolas"/>
+                <a:sym typeface="Consolas"/>
+              </a:rPr>
+              <a:t> Bar de cada </a:t>
+            </a:r>
+            <a:r>
+              <a:rPr lang="pt-PT" dirty="0" err="1">
+                <a:latin typeface="Consolas"/>
+                <a:ea typeface="Consolas"/>
+                <a:cs typeface="Consolas"/>
+                <a:sym typeface="Consolas"/>
+              </a:rPr>
+              <a:t>wave</a:t>
+            </a:r>
+            <a:r>
+              <a:rPr lang="pt-PT" dirty="0">
+                <a:latin typeface="Consolas"/>
+                <a:ea typeface="Consolas"/>
+                <a:cs typeface="Consolas"/>
+                <a:sym typeface="Consolas"/>
+              </a:rPr>
+              <a:t> de inimigos.</a:t>
+            </a:r>
+          </a:p>
+          <a:p>
+            <a:r>
+              <a:rPr lang="en-GB" dirty="0">
+                <a:latin typeface="Consolas"/>
+                <a:ea typeface="Consolas"/>
+                <a:cs typeface="Consolas"/>
+                <a:sym typeface="Consolas"/>
+              </a:rPr>
+              <a:t> </a:t>
+            </a:r>
+            <a:br>
+              <a:rPr lang="en-GB" dirty="0">
+                <a:latin typeface="Consolas"/>
+                <a:ea typeface="Consolas"/>
+                <a:cs typeface="Consolas"/>
+                <a:sym typeface="Consolas"/>
+              </a:rPr>
+            </a:br>
+            <a:br>
+              <a:rPr lang="en-GB" dirty="0">
+                <a:latin typeface="Consolas"/>
+                <a:ea typeface="Consolas"/>
+                <a:cs typeface="Consolas"/>
+                <a:sym typeface="Consolas"/>
+              </a:rPr>
+            </a:br>
+            <a:endParaRPr lang="en-GB" dirty="0">
+              <a:latin typeface="Consolas"/>
+              <a:ea typeface="Consolas"/>
+              <a:cs typeface="Consolas"/>
+              <a:sym typeface="Consolas"/>
+            </a:endParaRPr>
+          </a:p>
+          <a:p>
+            <a:pPr marL="0" lvl="0" indent="0" algn="l" rtl="0">
+              <a:spcBef>
+                <a:spcPts val="0"/>
+              </a:spcBef>
+              <a:spcAft>
+                <a:spcPts val="0"/>
+              </a:spcAft>
+              <a:buNone/>
+            </a:pPr>
+            <a:endParaRPr dirty="0">
+              <a:latin typeface="Consolas"/>
+              <a:ea typeface="Consolas"/>
+              <a:cs typeface="Consolas"/>
+              <a:sym typeface="Consolas"/>
+            </a:endParaRPr>
+          </a:p>
+        </p:txBody>
+      </p:sp>
+    </p:spTree>
+    <p:extLst>
+      <p:ext uri="{BB962C8B-B14F-4D97-AF65-F5344CB8AC3E}">
+        <p14:creationId xmlns:p14="http://schemas.microsoft.com/office/powerpoint/2010/main" val="2237403785"/>
+      </p:ext>
+    </p:extLst>
+  </p:cSld>
+  <p:clrMapOvr>
+    <a:masterClrMapping/>
+  </p:clrMapOvr>
+</p:sld>
+</file>
+
 <file path=ppt/slides/slide3.xml><?xml version="1.0" encoding="utf-8"?>
 <p:sld xmlns:a="http://schemas.openxmlformats.org/drawingml/2006/main" xmlns:r="http://schemas.openxmlformats.org/officeDocument/2006/relationships" xmlns:p="http://schemas.openxmlformats.org/presentationml/2006/main">
   <p:cSld>

--- a/SE202526/Management/Scrum Board.pptx
+++ b/SE202526/Management/Scrum Board.pptx
@@ -5,7 +5,7 @@
     <p:sldMasterId id="2147483659" r:id="rId1"/>
   </p:sldMasterIdLst>
   <p:notesMasterIdLst>
-    <p:notesMasterId r:id="rId25"/>
+    <p:notesMasterId r:id="rId26"/>
   </p:notesMasterIdLst>
   <p:sldIdLst>
     <p:sldId id="256" r:id="rId2"/>
@@ -31,6 +31,7 @@
     <p:sldId id="279" r:id="rId22"/>
     <p:sldId id="280" r:id="rId23"/>
     <p:sldId id="281" r:id="rId24"/>
+    <p:sldId id="282" r:id="rId25"/>
   </p:sldIdLst>
   <p:sldSz cx="21599525" cy="10799763"/>
   <p:notesSz cx="6858000" cy="9144000"/>
@@ -2700,6 +2701,133 @@
     <p:extLst>
       <p:ext uri="{BB962C8B-B14F-4D97-AF65-F5344CB8AC3E}">
         <p14:creationId xmlns:p14="http://schemas.microsoft.com/office/powerpoint/2010/main" val="3023121137"/>
+      </p:ext>
+    </p:extLst>
+  </p:cSld>
+  <p:clrMapOvr>
+    <a:masterClrMapping/>
+  </p:clrMapOvr>
+</p:notes>
+</file>
+
+<file path=ppt/notesSlides/notesSlide24.xml><?xml version="1.0" encoding="utf-8"?>
+<p:notes xmlns:a="http://schemas.openxmlformats.org/drawingml/2006/main" xmlns:r="http://schemas.openxmlformats.org/officeDocument/2006/relationships" xmlns:p="http://schemas.openxmlformats.org/presentationml/2006/main" showMasterSp="0" showMasterPhAnim="0">
+  <p:cSld>
+    <p:spTree>
+      <p:nvGrpSpPr>
+        <p:cNvPr id="1" name="Shape 186">
+          <a:extLst>
+            <a:ext uri="{FF2B5EF4-FFF2-40B4-BE49-F238E27FC236}">
+              <a16:creationId xmlns:a16="http://schemas.microsoft.com/office/drawing/2014/main" id="{411F47C8-CD0E-EFC0-BDD5-E64BC118C24F}"/>
+            </a:ext>
+          </a:extLst>
+        </p:cNvPr>
+        <p:cNvGrpSpPr/>
+        <p:nvPr/>
+      </p:nvGrpSpPr>
+      <p:grpSpPr>
+        <a:xfrm>
+          <a:off x="0" y="0"/>
+          <a:ext cx="0" cy="0"/>
+          <a:chOff x="0" y="0"/>
+          <a:chExt cx="0" cy="0"/>
+        </a:xfrm>
+      </p:grpSpPr>
+      <p:sp>
+        <p:nvSpPr>
+          <p:cNvPr id="187" name="Google Shape;187;g3850b307b58_0_218:notes">
+            <a:extLst>
+              <a:ext uri="{FF2B5EF4-FFF2-40B4-BE49-F238E27FC236}">
+                <a16:creationId xmlns:a16="http://schemas.microsoft.com/office/drawing/2014/main" id="{A38726B4-9622-9675-460E-BD2B87E709DF}"/>
+              </a:ext>
+            </a:extLst>
+          </p:cNvPr>
+          <p:cNvSpPr>
+            <a:spLocks noGrp="1" noRot="1" noChangeAspect="1"/>
+          </p:cNvSpPr>
+          <p:nvPr>
+            <p:ph type="sldImg" idx="2"/>
+          </p:nvPr>
+        </p:nvSpPr>
+        <p:spPr>
+          <a:xfrm>
+            <a:off x="0" y="685800"/>
+            <a:ext cx="6858000" cy="3429000"/>
+          </a:xfrm>
+          <a:custGeom>
+            <a:avLst/>
+            <a:gdLst/>
+            <a:ahLst/>
+            <a:cxnLst/>
+            <a:rect l="l" t="t" r="r" b="b"/>
+            <a:pathLst>
+              <a:path w="120000" h="120000" extrusionOk="0">
+                <a:moveTo>
+                  <a:pt x="0" y="0"/>
+                </a:moveTo>
+                <a:lnTo>
+                  <a:pt x="120000" y="0"/>
+                </a:lnTo>
+                <a:lnTo>
+                  <a:pt x="120000" y="120000"/>
+                </a:lnTo>
+                <a:lnTo>
+                  <a:pt x="0" y="120000"/>
+                </a:lnTo>
+                <a:close/>
+              </a:path>
+            </a:pathLst>
+          </a:custGeom>
+        </p:spPr>
+      </p:sp>
+      <p:sp>
+        <p:nvSpPr>
+          <p:cNvPr id="188" name="Google Shape;188;g3850b307b58_0_218:notes">
+            <a:extLst>
+              <a:ext uri="{FF2B5EF4-FFF2-40B4-BE49-F238E27FC236}">
+                <a16:creationId xmlns:a16="http://schemas.microsoft.com/office/drawing/2014/main" id="{FB2F7FEB-CF25-917F-1D6C-A61FEDC41B30}"/>
+              </a:ext>
+            </a:extLst>
+          </p:cNvPr>
+          <p:cNvSpPr txBox="1">
+            <a:spLocks noGrp="1"/>
+          </p:cNvSpPr>
+          <p:nvPr>
+            <p:ph type="body" idx="1"/>
+          </p:nvPr>
+        </p:nvSpPr>
+        <p:spPr>
+          <a:xfrm>
+            <a:off x="685800" y="4343400"/>
+            <a:ext cx="5486400" cy="4114800"/>
+          </a:xfrm>
+          <a:prstGeom prst="rect">
+            <a:avLst/>
+          </a:prstGeom>
+        </p:spPr>
+        <p:txBody>
+          <a:bodyPr spcFirstLastPara="1" wrap="square" lIns="91425" tIns="91425" rIns="91425" bIns="91425" anchor="t" anchorCtr="0">
+            <a:noAutofit/>
+          </a:bodyPr>
+          <a:lstStyle/>
+          <a:p>
+            <a:pPr marL="0" lvl="0" indent="0" algn="l" rtl="0">
+              <a:spcBef>
+                <a:spcPts val="0"/>
+              </a:spcBef>
+              <a:spcAft>
+                <a:spcPts val="0"/>
+              </a:spcAft>
+              <a:buNone/>
+            </a:pPr>
+            <a:endParaRPr/>
+          </a:p>
+        </p:txBody>
+      </p:sp>
+    </p:spTree>
+    <p:extLst>
+      <p:ext uri="{BB962C8B-B14F-4D97-AF65-F5344CB8AC3E}">
+        <p14:creationId xmlns:p14="http://schemas.microsoft.com/office/powerpoint/2010/main" val="3285944390"/>
       </p:ext>
     </p:extLst>
   </p:cSld>
@@ -34750,6 +34878,2513 @@
 </p:sld>
 </file>
 
+<file path=ppt/slides/slide24.xml><?xml version="1.0" encoding="utf-8"?>
+<p:sld xmlns:a="http://schemas.openxmlformats.org/drawingml/2006/main" xmlns:r="http://schemas.openxmlformats.org/officeDocument/2006/relationships" xmlns:p="http://schemas.openxmlformats.org/presentationml/2006/main">
+  <p:cSld>
+    <p:spTree>
+      <p:nvGrpSpPr>
+        <p:cNvPr id="1" name="Shape 189">
+          <a:extLst>
+            <a:ext uri="{FF2B5EF4-FFF2-40B4-BE49-F238E27FC236}">
+              <a16:creationId xmlns:a16="http://schemas.microsoft.com/office/drawing/2014/main" id="{F9E85B5D-FC84-D2D4-4E1F-4727C764A63B}"/>
+            </a:ext>
+          </a:extLst>
+        </p:cNvPr>
+        <p:cNvGrpSpPr/>
+        <p:nvPr/>
+      </p:nvGrpSpPr>
+      <p:grpSpPr>
+        <a:xfrm>
+          <a:off x="0" y="0"/>
+          <a:ext cx="0" cy="0"/>
+          <a:chOff x="0" y="0"/>
+          <a:chExt cx="0" cy="0"/>
+        </a:xfrm>
+      </p:grpSpPr>
+      <p:cxnSp>
+        <p:nvCxnSpPr>
+          <p:cNvPr id="190" name="Google Shape;190;p19">
+            <a:extLst>
+              <a:ext uri="{FF2B5EF4-FFF2-40B4-BE49-F238E27FC236}">
+                <a16:creationId xmlns:a16="http://schemas.microsoft.com/office/drawing/2014/main" id="{47FE4E93-58BE-6BCA-F348-ABFECD54BA21}"/>
+              </a:ext>
+            </a:extLst>
+          </p:cNvPr>
+          <p:cNvCxnSpPr/>
+          <p:nvPr/>
+        </p:nvCxnSpPr>
+        <p:spPr>
+          <a:xfrm>
+            <a:off x="5944724" y="-31500"/>
+            <a:ext cx="0" cy="10857000"/>
+          </a:xfrm>
+          <a:prstGeom prst="straightConnector1">
+            <a:avLst/>
+          </a:prstGeom>
+          <a:noFill/>
+          <a:ln w="38100" cap="flat" cmpd="sng">
+            <a:solidFill>
+              <a:srgbClr val="5B0F00"/>
+            </a:solidFill>
+            <a:prstDash val="solid"/>
+            <a:round/>
+            <a:headEnd type="none" w="med" len="med"/>
+            <a:tailEnd type="none" w="med" len="med"/>
+          </a:ln>
+        </p:spPr>
+      </p:cxnSp>
+      <p:sp>
+        <p:nvSpPr>
+          <p:cNvPr id="191" name="Google Shape;191;p19">
+            <a:extLst>
+              <a:ext uri="{FF2B5EF4-FFF2-40B4-BE49-F238E27FC236}">
+                <a16:creationId xmlns:a16="http://schemas.microsoft.com/office/drawing/2014/main" id="{53E08A80-6406-3243-AA15-9A32B89F703D}"/>
+              </a:ext>
+            </a:extLst>
+          </p:cNvPr>
+          <p:cNvSpPr/>
+          <p:nvPr/>
+        </p:nvSpPr>
+        <p:spPr>
+          <a:xfrm>
+            <a:off x="3197186" y="84312"/>
+            <a:ext cx="2410800" cy="480900"/>
+          </a:xfrm>
+          <a:prstGeom prst="roundRect">
+            <a:avLst>
+              <a:gd name="adj" fmla="val 16667"/>
+            </a:avLst>
+          </a:prstGeom>
+          <a:solidFill>
+            <a:srgbClr val="F9CB9C"/>
+          </a:solidFill>
+          <a:ln w="28575" cap="flat" cmpd="sng">
+            <a:solidFill>
+              <a:srgbClr val="B45F06"/>
+            </a:solidFill>
+            <a:prstDash val="solid"/>
+            <a:round/>
+            <a:headEnd type="none" w="sm" len="sm"/>
+            <a:tailEnd type="none" w="sm" len="sm"/>
+          </a:ln>
+        </p:spPr>
+        <p:txBody>
+          <a:bodyPr spcFirstLastPara="1" wrap="square" lIns="91425" tIns="91425" rIns="91425" bIns="91425" anchor="ctr" anchorCtr="0">
+            <a:noAutofit/>
+          </a:bodyPr>
+          <a:lstStyle/>
+          <a:p>
+            <a:pPr marL="0" lvl="0" indent="0" algn="ctr" rtl="0">
+              <a:spcBef>
+                <a:spcPts val="0"/>
+              </a:spcBef>
+              <a:spcAft>
+                <a:spcPts val="0"/>
+              </a:spcAft>
+              <a:buNone/>
+            </a:pPr>
+            <a:r>
+              <a:rPr lang="en-GB" sz="1800" b="1">
+                <a:latin typeface="Consolas"/>
+                <a:ea typeface="Consolas"/>
+                <a:cs typeface="Consolas"/>
+                <a:sym typeface="Consolas"/>
+              </a:rPr>
+              <a:t>Student ID</a:t>
+            </a:r>
+            <a:endParaRPr sz="1800" b="1">
+              <a:latin typeface="Consolas"/>
+              <a:ea typeface="Consolas"/>
+              <a:cs typeface="Consolas"/>
+              <a:sym typeface="Consolas"/>
+            </a:endParaRPr>
+          </a:p>
+        </p:txBody>
+      </p:sp>
+      <p:sp>
+        <p:nvSpPr>
+          <p:cNvPr id="192" name="Google Shape;192;p19">
+            <a:extLst>
+              <a:ext uri="{FF2B5EF4-FFF2-40B4-BE49-F238E27FC236}">
+                <a16:creationId xmlns:a16="http://schemas.microsoft.com/office/drawing/2014/main" id="{B766C8BB-9C1C-C812-78D6-ADF10B5330C3}"/>
+              </a:ext>
+            </a:extLst>
+          </p:cNvPr>
+          <p:cNvSpPr/>
+          <p:nvPr/>
+        </p:nvSpPr>
+        <p:spPr>
+          <a:xfrm>
+            <a:off x="6281636" y="84312"/>
+            <a:ext cx="2410800" cy="480900"/>
+          </a:xfrm>
+          <a:prstGeom prst="roundRect">
+            <a:avLst>
+              <a:gd name="adj" fmla="val 16667"/>
+            </a:avLst>
+          </a:prstGeom>
+          <a:solidFill>
+            <a:srgbClr val="F9CB9C"/>
+          </a:solidFill>
+          <a:ln w="28575" cap="flat" cmpd="sng">
+            <a:solidFill>
+              <a:srgbClr val="B45F06"/>
+            </a:solidFill>
+            <a:prstDash val="solid"/>
+            <a:round/>
+            <a:headEnd type="none" w="sm" len="sm"/>
+            <a:tailEnd type="none" w="sm" len="sm"/>
+          </a:ln>
+        </p:spPr>
+        <p:txBody>
+          <a:bodyPr spcFirstLastPara="1" wrap="square" lIns="91425" tIns="91425" rIns="91425" bIns="91425" anchor="ctr" anchorCtr="0">
+            <a:noAutofit/>
+          </a:bodyPr>
+          <a:lstStyle/>
+          <a:p>
+            <a:pPr marL="0" lvl="0" indent="0" algn="ctr" rtl="0">
+              <a:spcBef>
+                <a:spcPts val="0"/>
+              </a:spcBef>
+              <a:spcAft>
+                <a:spcPts val="0"/>
+              </a:spcAft>
+              <a:buNone/>
+            </a:pPr>
+            <a:r>
+              <a:rPr lang="en-GB" sz="1800" b="1">
+                <a:latin typeface="Consolas"/>
+                <a:ea typeface="Consolas"/>
+                <a:cs typeface="Consolas"/>
+                <a:sym typeface="Consolas"/>
+              </a:rPr>
+              <a:t>Story</a:t>
+            </a:r>
+            <a:endParaRPr sz="1800" b="1">
+              <a:latin typeface="Consolas"/>
+              <a:ea typeface="Consolas"/>
+              <a:cs typeface="Consolas"/>
+              <a:sym typeface="Consolas"/>
+            </a:endParaRPr>
+          </a:p>
+        </p:txBody>
+      </p:sp>
+      <p:sp>
+        <p:nvSpPr>
+          <p:cNvPr id="193" name="Google Shape;193;p19">
+            <a:extLst>
+              <a:ext uri="{FF2B5EF4-FFF2-40B4-BE49-F238E27FC236}">
+                <a16:creationId xmlns:a16="http://schemas.microsoft.com/office/drawing/2014/main" id="{A2DA2C03-21CB-0279-7188-179D1987853C}"/>
+              </a:ext>
+            </a:extLst>
+          </p:cNvPr>
+          <p:cNvSpPr/>
+          <p:nvPr/>
+        </p:nvSpPr>
+        <p:spPr>
+          <a:xfrm>
+            <a:off x="9366071" y="84312"/>
+            <a:ext cx="2410800" cy="480900"/>
+          </a:xfrm>
+          <a:prstGeom prst="roundRect">
+            <a:avLst>
+              <a:gd name="adj" fmla="val 16667"/>
+            </a:avLst>
+          </a:prstGeom>
+          <a:solidFill>
+            <a:srgbClr val="F9CB9C"/>
+          </a:solidFill>
+          <a:ln w="28575" cap="flat" cmpd="sng">
+            <a:solidFill>
+              <a:srgbClr val="B45F06"/>
+            </a:solidFill>
+            <a:prstDash val="solid"/>
+            <a:round/>
+            <a:headEnd type="none" w="sm" len="sm"/>
+            <a:tailEnd type="none" w="sm" len="sm"/>
+          </a:ln>
+        </p:spPr>
+        <p:txBody>
+          <a:bodyPr spcFirstLastPara="1" wrap="square" lIns="91425" tIns="91425" rIns="91425" bIns="91425" anchor="ctr" anchorCtr="0">
+            <a:noAutofit/>
+          </a:bodyPr>
+          <a:lstStyle/>
+          <a:p>
+            <a:pPr marL="0" lvl="0" indent="0" algn="ctr" rtl="0">
+              <a:spcBef>
+                <a:spcPts val="0"/>
+              </a:spcBef>
+              <a:spcAft>
+                <a:spcPts val="0"/>
+              </a:spcAft>
+              <a:buNone/>
+            </a:pPr>
+            <a:r>
+              <a:rPr lang="en-GB" sz="1800" b="1">
+                <a:latin typeface="Consolas"/>
+                <a:ea typeface="Consolas"/>
+                <a:cs typeface="Consolas"/>
+                <a:sym typeface="Consolas"/>
+              </a:rPr>
+              <a:t>To Do</a:t>
+            </a:r>
+            <a:endParaRPr sz="1800" b="1">
+              <a:latin typeface="Consolas"/>
+              <a:ea typeface="Consolas"/>
+              <a:cs typeface="Consolas"/>
+              <a:sym typeface="Consolas"/>
+            </a:endParaRPr>
+          </a:p>
+        </p:txBody>
+      </p:sp>
+      <p:sp>
+        <p:nvSpPr>
+          <p:cNvPr id="194" name="Google Shape;194;p19">
+            <a:extLst>
+              <a:ext uri="{FF2B5EF4-FFF2-40B4-BE49-F238E27FC236}">
+                <a16:creationId xmlns:a16="http://schemas.microsoft.com/office/drawing/2014/main" id="{D74CCBD2-2A8B-CE03-A44D-2026B1890118}"/>
+              </a:ext>
+            </a:extLst>
+          </p:cNvPr>
+          <p:cNvSpPr/>
+          <p:nvPr/>
+        </p:nvSpPr>
+        <p:spPr>
+          <a:xfrm>
+            <a:off x="12395940" y="84312"/>
+            <a:ext cx="2410800" cy="480900"/>
+          </a:xfrm>
+          <a:prstGeom prst="roundRect">
+            <a:avLst>
+              <a:gd name="adj" fmla="val 16667"/>
+            </a:avLst>
+          </a:prstGeom>
+          <a:solidFill>
+            <a:srgbClr val="F9CB9C"/>
+          </a:solidFill>
+          <a:ln w="28575" cap="flat" cmpd="sng">
+            <a:solidFill>
+              <a:srgbClr val="B45F06"/>
+            </a:solidFill>
+            <a:prstDash val="solid"/>
+            <a:round/>
+            <a:headEnd type="none" w="sm" len="sm"/>
+            <a:tailEnd type="none" w="sm" len="sm"/>
+          </a:ln>
+        </p:spPr>
+        <p:txBody>
+          <a:bodyPr spcFirstLastPara="1" wrap="square" lIns="91425" tIns="91425" rIns="91425" bIns="91425" anchor="ctr" anchorCtr="0">
+            <a:noAutofit/>
+          </a:bodyPr>
+          <a:lstStyle/>
+          <a:p>
+            <a:pPr marL="0" lvl="0" indent="0" algn="ctr" rtl="0">
+              <a:spcBef>
+                <a:spcPts val="0"/>
+              </a:spcBef>
+              <a:spcAft>
+                <a:spcPts val="0"/>
+              </a:spcAft>
+              <a:buNone/>
+            </a:pPr>
+            <a:r>
+              <a:rPr lang="en-GB" sz="1800" b="1">
+                <a:latin typeface="Consolas"/>
+                <a:ea typeface="Consolas"/>
+                <a:cs typeface="Consolas"/>
+                <a:sym typeface="Consolas"/>
+              </a:rPr>
+              <a:t>Doing</a:t>
+            </a:r>
+            <a:endParaRPr sz="1800" b="1">
+              <a:latin typeface="Consolas"/>
+              <a:ea typeface="Consolas"/>
+              <a:cs typeface="Consolas"/>
+              <a:sym typeface="Consolas"/>
+            </a:endParaRPr>
+          </a:p>
+        </p:txBody>
+      </p:sp>
+      <p:sp>
+        <p:nvSpPr>
+          <p:cNvPr id="195" name="Google Shape;195;p19">
+            <a:extLst>
+              <a:ext uri="{FF2B5EF4-FFF2-40B4-BE49-F238E27FC236}">
+                <a16:creationId xmlns:a16="http://schemas.microsoft.com/office/drawing/2014/main" id="{9D76B7A0-C5FB-0F50-0BEB-4AA072E00F33}"/>
+              </a:ext>
+            </a:extLst>
+          </p:cNvPr>
+          <p:cNvSpPr/>
+          <p:nvPr/>
+        </p:nvSpPr>
+        <p:spPr>
+          <a:xfrm>
+            <a:off x="15532407" y="84312"/>
+            <a:ext cx="2410800" cy="480900"/>
+          </a:xfrm>
+          <a:prstGeom prst="roundRect">
+            <a:avLst>
+              <a:gd name="adj" fmla="val 16667"/>
+            </a:avLst>
+          </a:prstGeom>
+          <a:solidFill>
+            <a:srgbClr val="F9CB9C"/>
+          </a:solidFill>
+          <a:ln w="28575" cap="flat" cmpd="sng">
+            <a:solidFill>
+              <a:srgbClr val="B45F06"/>
+            </a:solidFill>
+            <a:prstDash val="solid"/>
+            <a:round/>
+            <a:headEnd type="none" w="sm" len="sm"/>
+            <a:tailEnd type="none" w="sm" len="sm"/>
+          </a:ln>
+        </p:spPr>
+        <p:txBody>
+          <a:bodyPr spcFirstLastPara="1" wrap="square" lIns="91425" tIns="91425" rIns="91425" bIns="91425" anchor="ctr" anchorCtr="0">
+            <a:noAutofit/>
+          </a:bodyPr>
+          <a:lstStyle/>
+          <a:p>
+            <a:pPr marL="0" lvl="0" indent="0" algn="ctr" rtl="0">
+              <a:spcBef>
+                <a:spcPts val="0"/>
+              </a:spcBef>
+              <a:spcAft>
+                <a:spcPts val="0"/>
+              </a:spcAft>
+              <a:buNone/>
+            </a:pPr>
+            <a:r>
+              <a:rPr lang="en-GB" sz="1800" b="1">
+                <a:latin typeface="Consolas"/>
+                <a:ea typeface="Consolas"/>
+                <a:cs typeface="Consolas"/>
+                <a:sym typeface="Consolas"/>
+              </a:rPr>
+              <a:t>Review</a:t>
+            </a:r>
+            <a:endParaRPr sz="1800" b="1">
+              <a:latin typeface="Consolas"/>
+              <a:ea typeface="Consolas"/>
+              <a:cs typeface="Consolas"/>
+              <a:sym typeface="Consolas"/>
+            </a:endParaRPr>
+          </a:p>
+        </p:txBody>
+      </p:sp>
+      <p:sp>
+        <p:nvSpPr>
+          <p:cNvPr id="196" name="Google Shape;196;p19">
+            <a:extLst>
+              <a:ext uri="{FF2B5EF4-FFF2-40B4-BE49-F238E27FC236}">
+                <a16:creationId xmlns:a16="http://schemas.microsoft.com/office/drawing/2014/main" id="{397AA720-78A6-8660-5802-13ABA8179A39}"/>
+              </a:ext>
+            </a:extLst>
+          </p:cNvPr>
+          <p:cNvSpPr/>
+          <p:nvPr/>
+        </p:nvSpPr>
+        <p:spPr>
+          <a:xfrm>
+            <a:off x="18668888" y="84312"/>
+            <a:ext cx="2410800" cy="480900"/>
+          </a:xfrm>
+          <a:prstGeom prst="roundRect">
+            <a:avLst>
+              <a:gd name="adj" fmla="val 16667"/>
+            </a:avLst>
+          </a:prstGeom>
+          <a:solidFill>
+            <a:srgbClr val="F9CB9C"/>
+          </a:solidFill>
+          <a:ln w="28575" cap="flat" cmpd="sng">
+            <a:solidFill>
+              <a:srgbClr val="B45F06"/>
+            </a:solidFill>
+            <a:prstDash val="solid"/>
+            <a:round/>
+            <a:headEnd type="none" w="sm" len="sm"/>
+            <a:tailEnd type="none" w="sm" len="sm"/>
+          </a:ln>
+        </p:spPr>
+        <p:txBody>
+          <a:bodyPr spcFirstLastPara="1" wrap="square" lIns="91425" tIns="91425" rIns="91425" bIns="91425" anchor="ctr" anchorCtr="0">
+            <a:noAutofit/>
+          </a:bodyPr>
+          <a:lstStyle/>
+          <a:p>
+            <a:pPr marL="0" lvl="0" indent="0" algn="ctr" rtl="0">
+              <a:spcBef>
+                <a:spcPts val="0"/>
+              </a:spcBef>
+              <a:spcAft>
+                <a:spcPts val="0"/>
+              </a:spcAft>
+              <a:buNone/>
+            </a:pPr>
+            <a:r>
+              <a:rPr lang="en-GB" sz="1800" b="1">
+                <a:latin typeface="Consolas"/>
+                <a:ea typeface="Consolas"/>
+                <a:cs typeface="Consolas"/>
+                <a:sym typeface="Consolas"/>
+              </a:rPr>
+              <a:t>Done</a:t>
+            </a:r>
+            <a:endParaRPr sz="1800" b="1">
+              <a:latin typeface="Consolas"/>
+              <a:ea typeface="Consolas"/>
+              <a:cs typeface="Consolas"/>
+              <a:sym typeface="Consolas"/>
+            </a:endParaRPr>
+          </a:p>
+        </p:txBody>
+      </p:sp>
+      <p:sp>
+        <p:nvSpPr>
+          <p:cNvPr id="197" name="Google Shape;197;p19">
+            <a:extLst>
+              <a:ext uri="{FF2B5EF4-FFF2-40B4-BE49-F238E27FC236}">
+                <a16:creationId xmlns:a16="http://schemas.microsoft.com/office/drawing/2014/main" id="{EBBFF82B-E7C5-8DA3-48A6-F78E8D19BB64}"/>
+              </a:ext>
+            </a:extLst>
+          </p:cNvPr>
+          <p:cNvSpPr/>
+          <p:nvPr/>
+        </p:nvSpPr>
+        <p:spPr>
+          <a:xfrm>
+            <a:off x="167288" y="84312"/>
+            <a:ext cx="2410800" cy="480900"/>
+          </a:xfrm>
+          <a:prstGeom prst="roundRect">
+            <a:avLst>
+              <a:gd name="adj" fmla="val 16667"/>
+            </a:avLst>
+          </a:prstGeom>
+          <a:solidFill>
+            <a:srgbClr val="F9CB9C"/>
+          </a:solidFill>
+          <a:ln w="28575" cap="flat" cmpd="sng">
+            <a:solidFill>
+              <a:srgbClr val="B45F06"/>
+            </a:solidFill>
+            <a:prstDash val="solid"/>
+            <a:round/>
+            <a:headEnd type="none" w="sm" len="sm"/>
+            <a:tailEnd type="none" w="sm" len="sm"/>
+          </a:ln>
+        </p:spPr>
+        <p:txBody>
+          <a:bodyPr spcFirstLastPara="1" wrap="square" lIns="91425" tIns="91425" rIns="91425" bIns="91425" anchor="ctr" anchorCtr="0">
+            <a:noAutofit/>
+          </a:bodyPr>
+          <a:lstStyle/>
+          <a:p>
+            <a:pPr marL="0" lvl="0" indent="0" algn="ctr" rtl="0">
+              <a:spcBef>
+                <a:spcPts val="0"/>
+              </a:spcBef>
+              <a:spcAft>
+                <a:spcPts val="0"/>
+              </a:spcAft>
+              <a:buNone/>
+            </a:pPr>
+            <a:r>
+              <a:rPr lang="en-GB" sz="1800" b="1">
+                <a:latin typeface="Consolas"/>
+                <a:ea typeface="Consolas"/>
+                <a:cs typeface="Consolas"/>
+                <a:sym typeface="Consolas"/>
+              </a:rPr>
+              <a:t>Backlog</a:t>
+            </a:r>
+            <a:endParaRPr sz="1800" b="1">
+              <a:latin typeface="Consolas"/>
+              <a:ea typeface="Consolas"/>
+              <a:cs typeface="Consolas"/>
+              <a:sym typeface="Consolas"/>
+            </a:endParaRPr>
+          </a:p>
+        </p:txBody>
+      </p:sp>
+      <p:cxnSp>
+        <p:nvCxnSpPr>
+          <p:cNvPr id="204" name="Google Shape;204;p19">
+            <a:extLst>
+              <a:ext uri="{FF2B5EF4-FFF2-40B4-BE49-F238E27FC236}">
+                <a16:creationId xmlns:a16="http://schemas.microsoft.com/office/drawing/2014/main" id="{2259EB59-B273-F2DB-06DF-675D24754971}"/>
+              </a:ext>
+            </a:extLst>
+          </p:cNvPr>
+          <p:cNvCxnSpPr/>
+          <p:nvPr/>
+        </p:nvCxnSpPr>
+        <p:spPr>
+          <a:xfrm>
+            <a:off x="5607986" y="1626038"/>
+            <a:ext cx="16042200" cy="0"/>
+          </a:xfrm>
+          <a:prstGeom prst="straightConnector1">
+            <a:avLst/>
+          </a:prstGeom>
+          <a:noFill/>
+          <a:ln w="28575" cap="flat" cmpd="sng">
+            <a:solidFill>
+              <a:srgbClr val="999999"/>
+            </a:solidFill>
+            <a:prstDash val="dash"/>
+            <a:round/>
+            <a:headEnd type="none" w="med" len="med"/>
+            <a:tailEnd type="none" w="med" len="med"/>
+          </a:ln>
+        </p:spPr>
+      </p:cxnSp>
+      <p:cxnSp>
+        <p:nvCxnSpPr>
+          <p:cNvPr id="205" name="Google Shape;205;p19">
+            <a:extLst>
+              <a:ext uri="{FF2B5EF4-FFF2-40B4-BE49-F238E27FC236}">
+                <a16:creationId xmlns:a16="http://schemas.microsoft.com/office/drawing/2014/main" id="{55DC087E-745A-CF31-CAC7-0B8C8673F78F}"/>
+              </a:ext>
+            </a:extLst>
+          </p:cNvPr>
+          <p:cNvCxnSpPr/>
+          <p:nvPr/>
+        </p:nvCxnSpPr>
+        <p:spPr>
+          <a:xfrm>
+            <a:off x="5607986" y="3203476"/>
+            <a:ext cx="16042200" cy="0"/>
+          </a:xfrm>
+          <a:prstGeom prst="straightConnector1">
+            <a:avLst/>
+          </a:prstGeom>
+          <a:noFill/>
+          <a:ln w="28575" cap="flat" cmpd="sng">
+            <a:solidFill>
+              <a:srgbClr val="999999"/>
+            </a:solidFill>
+            <a:prstDash val="dash"/>
+            <a:round/>
+            <a:headEnd type="none" w="med" len="med"/>
+            <a:tailEnd type="none" w="med" len="med"/>
+          </a:ln>
+        </p:spPr>
+      </p:cxnSp>
+      <p:cxnSp>
+        <p:nvCxnSpPr>
+          <p:cNvPr id="206" name="Google Shape;206;p19">
+            <a:extLst>
+              <a:ext uri="{FF2B5EF4-FFF2-40B4-BE49-F238E27FC236}">
+                <a16:creationId xmlns:a16="http://schemas.microsoft.com/office/drawing/2014/main" id="{1DA534EC-E995-21D9-4ACF-4F2A6AD07B77}"/>
+              </a:ext>
+            </a:extLst>
+          </p:cNvPr>
+          <p:cNvCxnSpPr/>
+          <p:nvPr/>
+        </p:nvCxnSpPr>
+        <p:spPr>
+          <a:xfrm>
+            <a:off x="5607986" y="4777838"/>
+            <a:ext cx="16042200" cy="0"/>
+          </a:xfrm>
+          <a:prstGeom prst="straightConnector1">
+            <a:avLst/>
+          </a:prstGeom>
+          <a:noFill/>
+          <a:ln w="28575" cap="flat" cmpd="sng">
+            <a:solidFill>
+              <a:srgbClr val="999999"/>
+            </a:solidFill>
+            <a:prstDash val="dash"/>
+            <a:round/>
+            <a:headEnd type="none" w="med" len="med"/>
+            <a:tailEnd type="none" w="med" len="med"/>
+          </a:ln>
+        </p:spPr>
+      </p:cxnSp>
+      <p:cxnSp>
+        <p:nvCxnSpPr>
+          <p:cNvPr id="207" name="Google Shape;207;p19">
+            <a:extLst>
+              <a:ext uri="{FF2B5EF4-FFF2-40B4-BE49-F238E27FC236}">
+                <a16:creationId xmlns:a16="http://schemas.microsoft.com/office/drawing/2014/main" id="{A76697D3-F098-B859-4770-1D8FF517EA5D}"/>
+              </a:ext>
+            </a:extLst>
+          </p:cNvPr>
+          <p:cNvCxnSpPr/>
+          <p:nvPr/>
+        </p:nvCxnSpPr>
+        <p:spPr>
+          <a:xfrm>
+            <a:off x="5607986" y="6353738"/>
+            <a:ext cx="16042200" cy="0"/>
+          </a:xfrm>
+          <a:prstGeom prst="straightConnector1">
+            <a:avLst/>
+          </a:prstGeom>
+          <a:noFill/>
+          <a:ln w="28575" cap="flat" cmpd="sng">
+            <a:solidFill>
+              <a:srgbClr val="999999"/>
+            </a:solidFill>
+            <a:prstDash val="dash"/>
+            <a:round/>
+            <a:headEnd type="none" w="med" len="med"/>
+            <a:tailEnd type="none" w="med" len="med"/>
+          </a:ln>
+        </p:spPr>
+      </p:cxnSp>
+      <p:cxnSp>
+        <p:nvCxnSpPr>
+          <p:cNvPr id="208" name="Google Shape;208;p19">
+            <a:extLst>
+              <a:ext uri="{FF2B5EF4-FFF2-40B4-BE49-F238E27FC236}">
+                <a16:creationId xmlns:a16="http://schemas.microsoft.com/office/drawing/2014/main" id="{52A52FAC-76B2-F704-781C-CD0063BE627E}"/>
+              </a:ext>
+            </a:extLst>
+          </p:cNvPr>
+          <p:cNvCxnSpPr/>
+          <p:nvPr/>
+        </p:nvCxnSpPr>
+        <p:spPr>
+          <a:xfrm>
+            <a:off x="5607986" y="7929638"/>
+            <a:ext cx="16042200" cy="0"/>
+          </a:xfrm>
+          <a:prstGeom prst="straightConnector1">
+            <a:avLst/>
+          </a:prstGeom>
+          <a:noFill/>
+          <a:ln w="28575" cap="flat" cmpd="sng">
+            <a:solidFill>
+              <a:srgbClr val="999999"/>
+            </a:solidFill>
+            <a:prstDash val="dash"/>
+            <a:round/>
+            <a:headEnd type="none" w="med" len="med"/>
+            <a:tailEnd type="none" w="med" len="med"/>
+          </a:ln>
+        </p:spPr>
+      </p:cxnSp>
+      <p:cxnSp>
+        <p:nvCxnSpPr>
+          <p:cNvPr id="209" name="Google Shape;209;p19">
+            <a:extLst>
+              <a:ext uri="{FF2B5EF4-FFF2-40B4-BE49-F238E27FC236}">
+                <a16:creationId xmlns:a16="http://schemas.microsoft.com/office/drawing/2014/main" id="{4ECB4353-E440-A9BB-BD0C-1A56B112E6ED}"/>
+              </a:ext>
+            </a:extLst>
+          </p:cNvPr>
+          <p:cNvCxnSpPr/>
+          <p:nvPr/>
+        </p:nvCxnSpPr>
+        <p:spPr>
+          <a:xfrm>
+            <a:off x="5607986" y="9505538"/>
+            <a:ext cx="16042200" cy="0"/>
+          </a:xfrm>
+          <a:prstGeom prst="straightConnector1">
+            <a:avLst/>
+          </a:prstGeom>
+          <a:noFill/>
+          <a:ln w="28575" cap="flat" cmpd="sng">
+            <a:solidFill>
+              <a:srgbClr val="999999"/>
+            </a:solidFill>
+            <a:prstDash val="dash"/>
+            <a:round/>
+            <a:headEnd type="none" w="med" len="med"/>
+            <a:tailEnd type="none" w="med" len="med"/>
+          </a:ln>
+        </p:spPr>
+      </p:cxnSp>
+      <p:cxnSp>
+        <p:nvCxnSpPr>
+          <p:cNvPr id="215" name="Google Shape;215;p19">
+            <a:extLst>
+              <a:ext uri="{FF2B5EF4-FFF2-40B4-BE49-F238E27FC236}">
+                <a16:creationId xmlns:a16="http://schemas.microsoft.com/office/drawing/2014/main" id="{EEC22EA1-A931-13F1-9761-991C769F43F3}"/>
+              </a:ext>
+            </a:extLst>
+          </p:cNvPr>
+          <p:cNvCxnSpPr/>
+          <p:nvPr/>
+        </p:nvCxnSpPr>
+        <p:spPr>
+          <a:xfrm>
+            <a:off x="2874374" y="-28500"/>
+            <a:ext cx="0" cy="10857000"/>
+          </a:xfrm>
+          <a:prstGeom prst="straightConnector1">
+            <a:avLst/>
+          </a:prstGeom>
+          <a:noFill/>
+          <a:ln w="38100" cap="flat" cmpd="sng">
+            <a:solidFill>
+              <a:srgbClr val="5B0F00"/>
+            </a:solidFill>
+            <a:prstDash val="solid"/>
+            <a:round/>
+            <a:headEnd type="none" w="med" len="med"/>
+            <a:tailEnd type="none" w="med" len="med"/>
+          </a:ln>
+        </p:spPr>
+      </p:cxnSp>
+      <p:sp>
+        <p:nvSpPr>
+          <p:cNvPr id="2" name="Google Shape;74;p15">
+            <a:extLst>
+              <a:ext uri="{FF2B5EF4-FFF2-40B4-BE49-F238E27FC236}">
+                <a16:creationId xmlns:a16="http://schemas.microsoft.com/office/drawing/2014/main" id="{33251596-01CF-6617-6B2B-D9144C95B4AB}"/>
+              </a:ext>
+            </a:extLst>
+          </p:cNvPr>
+          <p:cNvSpPr/>
+          <p:nvPr/>
+        </p:nvSpPr>
+        <p:spPr>
+          <a:xfrm>
+            <a:off x="3197186" y="1385588"/>
+            <a:ext cx="2410800" cy="480900"/>
+          </a:xfrm>
+          <a:prstGeom prst="roundRect">
+            <a:avLst>
+              <a:gd name="adj" fmla="val 16667"/>
+            </a:avLst>
+          </a:prstGeom>
+          <a:solidFill>
+            <a:srgbClr val="E6B8AF"/>
+          </a:solidFill>
+          <a:ln w="28575" cap="flat" cmpd="sng">
+            <a:solidFill>
+              <a:srgbClr val="5B0F00"/>
+            </a:solidFill>
+            <a:prstDash val="solid"/>
+            <a:round/>
+            <a:headEnd type="none" w="sm" len="sm"/>
+            <a:tailEnd type="none" w="sm" len="sm"/>
+          </a:ln>
+        </p:spPr>
+        <p:txBody>
+          <a:bodyPr spcFirstLastPara="1" wrap="square" lIns="91425" tIns="91425" rIns="91425" bIns="91425" anchor="ctr" anchorCtr="0">
+            <a:noAutofit/>
+          </a:bodyPr>
+          <a:lstStyle/>
+          <a:p>
+            <a:pPr marL="0" lvl="0" indent="0" algn="ctr" rtl="0">
+              <a:spcBef>
+                <a:spcPts val="0"/>
+              </a:spcBef>
+              <a:spcAft>
+                <a:spcPts val="0"/>
+              </a:spcAft>
+              <a:buNone/>
+            </a:pPr>
+            <a:r>
+              <a:rPr lang="en-GB" sz="1800" b="1" dirty="0">
+                <a:latin typeface="Consolas"/>
+                <a:ea typeface="Consolas"/>
+                <a:cs typeface="Consolas"/>
+                <a:sym typeface="Consolas"/>
+              </a:rPr>
+              <a:t>68338</a:t>
+            </a:r>
+            <a:endParaRPr sz="1800" b="1" dirty="0">
+              <a:latin typeface="Consolas"/>
+              <a:ea typeface="Consolas"/>
+              <a:cs typeface="Consolas"/>
+              <a:sym typeface="Consolas"/>
+            </a:endParaRPr>
+          </a:p>
+        </p:txBody>
+      </p:sp>
+      <p:sp>
+        <p:nvSpPr>
+          <p:cNvPr id="3" name="Google Shape;75;p15">
+            <a:extLst>
+              <a:ext uri="{FF2B5EF4-FFF2-40B4-BE49-F238E27FC236}">
+                <a16:creationId xmlns:a16="http://schemas.microsoft.com/office/drawing/2014/main" id="{1E7C6928-90D1-CF6D-BD5E-3436820C16A5}"/>
+              </a:ext>
+            </a:extLst>
+          </p:cNvPr>
+          <p:cNvSpPr/>
+          <p:nvPr/>
+        </p:nvSpPr>
+        <p:spPr>
+          <a:xfrm>
+            <a:off x="3197186" y="2961501"/>
+            <a:ext cx="2410800" cy="480900"/>
+          </a:xfrm>
+          <a:prstGeom prst="roundRect">
+            <a:avLst>
+              <a:gd name="adj" fmla="val 16667"/>
+            </a:avLst>
+          </a:prstGeom>
+          <a:solidFill>
+            <a:srgbClr val="E6B8AF"/>
+          </a:solidFill>
+          <a:ln w="28575" cap="flat" cmpd="sng">
+            <a:solidFill>
+              <a:srgbClr val="5B0F00"/>
+            </a:solidFill>
+            <a:prstDash val="solid"/>
+            <a:round/>
+            <a:headEnd type="none" w="sm" len="sm"/>
+            <a:tailEnd type="none" w="sm" len="sm"/>
+          </a:ln>
+        </p:spPr>
+        <p:txBody>
+          <a:bodyPr spcFirstLastPara="1" wrap="square" lIns="91425" tIns="91425" rIns="91425" bIns="91425" anchor="ctr" anchorCtr="0">
+            <a:noAutofit/>
+          </a:bodyPr>
+          <a:lstStyle/>
+          <a:p>
+            <a:pPr marL="0" lvl="0" indent="0" algn="ctr" rtl="0">
+              <a:spcBef>
+                <a:spcPts val="0"/>
+              </a:spcBef>
+              <a:spcAft>
+                <a:spcPts val="0"/>
+              </a:spcAft>
+              <a:buNone/>
+            </a:pPr>
+            <a:r>
+              <a:rPr lang="en-GB" sz="1800" b="1" dirty="0">
+                <a:latin typeface="Consolas"/>
+                <a:ea typeface="Consolas"/>
+                <a:cs typeface="Consolas"/>
+                <a:sym typeface="Consolas"/>
+              </a:rPr>
+              <a:t>68245</a:t>
+            </a:r>
+            <a:endParaRPr sz="1800" b="1" dirty="0">
+              <a:latin typeface="Consolas"/>
+              <a:ea typeface="Consolas"/>
+              <a:cs typeface="Consolas"/>
+              <a:sym typeface="Consolas"/>
+            </a:endParaRPr>
+          </a:p>
+        </p:txBody>
+      </p:sp>
+      <p:sp>
+        <p:nvSpPr>
+          <p:cNvPr id="4" name="Google Shape;76;p15">
+            <a:extLst>
+              <a:ext uri="{FF2B5EF4-FFF2-40B4-BE49-F238E27FC236}">
+                <a16:creationId xmlns:a16="http://schemas.microsoft.com/office/drawing/2014/main" id="{6CFEA7C7-F3F9-84A8-77E2-A78AE9233EE8}"/>
+              </a:ext>
+            </a:extLst>
+          </p:cNvPr>
+          <p:cNvSpPr/>
+          <p:nvPr/>
+        </p:nvSpPr>
+        <p:spPr>
+          <a:xfrm>
+            <a:off x="3197186" y="4537410"/>
+            <a:ext cx="2410800" cy="480900"/>
+          </a:xfrm>
+          <a:prstGeom prst="roundRect">
+            <a:avLst>
+              <a:gd name="adj" fmla="val 16667"/>
+            </a:avLst>
+          </a:prstGeom>
+          <a:solidFill>
+            <a:srgbClr val="E6B8AF"/>
+          </a:solidFill>
+          <a:ln w="28575" cap="flat" cmpd="sng">
+            <a:solidFill>
+              <a:srgbClr val="5B0F00"/>
+            </a:solidFill>
+            <a:prstDash val="solid"/>
+            <a:round/>
+            <a:headEnd type="none" w="sm" len="sm"/>
+            <a:tailEnd type="none" w="sm" len="sm"/>
+          </a:ln>
+        </p:spPr>
+        <p:txBody>
+          <a:bodyPr spcFirstLastPara="1" wrap="square" lIns="91425" tIns="91425" rIns="91425" bIns="91425" anchor="ctr" anchorCtr="0">
+            <a:noAutofit/>
+          </a:bodyPr>
+          <a:lstStyle/>
+          <a:p>
+            <a:pPr marL="0" lvl="0" indent="0" algn="ctr" rtl="0">
+              <a:spcBef>
+                <a:spcPts val="0"/>
+              </a:spcBef>
+              <a:spcAft>
+                <a:spcPts val="0"/>
+              </a:spcAft>
+              <a:buNone/>
+            </a:pPr>
+            <a:r>
+              <a:rPr lang="en-GB" sz="1800" b="1" dirty="0">
+                <a:latin typeface="Consolas"/>
+                <a:ea typeface="Consolas"/>
+                <a:cs typeface="Consolas"/>
+                <a:sym typeface="Consolas"/>
+              </a:rPr>
+              <a:t>68725</a:t>
+            </a:r>
+            <a:endParaRPr sz="1800" b="1" dirty="0">
+              <a:latin typeface="Consolas"/>
+              <a:ea typeface="Consolas"/>
+              <a:cs typeface="Consolas"/>
+              <a:sym typeface="Consolas"/>
+            </a:endParaRPr>
+          </a:p>
+        </p:txBody>
+      </p:sp>
+      <p:sp>
+        <p:nvSpPr>
+          <p:cNvPr id="5" name="Google Shape;77;p15">
+            <a:extLst>
+              <a:ext uri="{FF2B5EF4-FFF2-40B4-BE49-F238E27FC236}">
+                <a16:creationId xmlns:a16="http://schemas.microsoft.com/office/drawing/2014/main" id="{85273765-67E8-BB48-AD7C-8C86130B67F1}"/>
+              </a:ext>
+            </a:extLst>
+          </p:cNvPr>
+          <p:cNvSpPr/>
+          <p:nvPr/>
+        </p:nvSpPr>
+        <p:spPr>
+          <a:xfrm>
+            <a:off x="3197186" y="6113307"/>
+            <a:ext cx="2410800" cy="480900"/>
+          </a:xfrm>
+          <a:prstGeom prst="roundRect">
+            <a:avLst>
+              <a:gd name="adj" fmla="val 16667"/>
+            </a:avLst>
+          </a:prstGeom>
+          <a:solidFill>
+            <a:srgbClr val="E6B8AF"/>
+          </a:solidFill>
+          <a:ln w="28575" cap="flat" cmpd="sng">
+            <a:solidFill>
+              <a:srgbClr val="5B0F00"/>
+            </a:solidFill>
+            <a:prstDash val="solid"/>
+            <a:round/>
+            <a:headEnd type="none" w="sm" len="sm"/>
+            <a:tailEnd type="none" w="sm" len="sm"/>
+          </a:ln>
+        </p:spPr>
+        <p:txBody>
+          <a:bodyPr spcFirstLastPara="1" wrap="square" lIns="91425" tIns="91425" rIns="91425" bIns="91425" anchor="ctr" anchorCtr="0">
+            <a:noAutofit/>
+          </a:bodyPr>
+          <a:lstStyle/>
+          <a:p>
+            <a:pPr marL="0" lvl="0" indent="0" algn="ctr" rtl="0">
+              <a:spcBef>
+                <a:spcPts val="0"/>
+              </a:spcBef>
+              <a:spcAft>
+                <a:spcPts val="0"/>
+              </a:spcAft>
+              <a:buNone/>
+            </a:pPr>
+            <a:r>
+              <a:rPr lang="en-GB" sz="1800" b="1" dirty="0">
+                <a:latin typeface="Consolas"/>
+                <a:ea typeface="Consolas"/>
+                <a:cs typeface="Consolas"/>
+                <a:sym typeface="Consolas"/>
+              </a:rPr>
+              <a:t>68180</a:t>
+            </a:r>
+            <a:endParaRPr sz="1800" b="1" dirty="0">
+              <a:latin typeface="Consolas"/>
+              <a:ea typeface="Consolas"/>
+              <a:cs typeface="Consolas"/>
+              <a:sym typeface="Consolas"/>
+            </a:endParaRPr>
+          </a:p>
+        </p:txBody>
+      </p:sp>
+      <p:sp>
+        <p:nvSpPr>
+          <p:cNvPr id="6" name="Google Shape;78;p15">
+            <a:extLst>
+              <a:ext uri="{FF2B5EF4-FFF2-40B4-BE49-F238E27FC236}">
+                <a16:creationId xmlns:a16="http://schemas.microsoft.com/office/drawing/2014/main" id="{22F3ED50-C031-2025-955B-D50A506816B8}"/>
+              </a:ext>
+            </a:extLst>
+          </p:cNvPr>
+          <p:cNvSpPr/>
+          <p:nvPr/>
+        </p:nvSpPr>
+        <p:spPr>
+          <a:xfrm>
+            <a:off x="3197186" y="7689198"/>
+            <a:ext cx="2410800" cy="480900"/>
+          </a:xfrm>
+          <a:prstGeom prst="roundRect">
+            <a:avLst>
+              <a:gd name="adj" fmla="val 16667"/>
+            </a:avLst>
+          </a:prstGeom>
+          <a:solidFill>
+            <a:srgbClr val="E6B8AF"/>
+          </a:solidFill>
+          <a:ln w="28575" cap="flat" cmpd="sng">
+            <a:solidFill>
+              <a:srgbClr val="5B0F00"/>
+            </a:solidFill>
+            <a:prstDash val="solid"/>
+            <a:round/>
+            <a:headEnd type="none" w="sm" len="sm"/>
+            <a:tailEnd type="none" w="sm" len="sm"/>
+          </a:ln>
+        </p:spPr>
+        <p:txBody>
+          <a:bodyPr spcFirstLastPara="1" wrap="square" lIns="91425" tIns="91425" rIns="91425" bIns="91425" anchor="ctr" anchorCtr="0">
+            <a:noAutofit/>
+          </a:bodyPr>
+          <a:lstStyle/>
+          <a:p>
+            <a:pPr marL="0" lvl="0" indent="0" algn="ctr" rtl="0">
+              <a:spcBef>
+                <a:spcPts val="0"/>
+              </a:spcBef>
+              <a:spcAft>
+                <a:spcPts val="0"/>
+              </a:spcAft>
+              <a:buNone/>
+            </a:pPr>
+            <a:r>
+              <a:rPr lang="en-GB" sz="1800" b="1" dirty="0">
+                <a:latin typeface="Consolas"/>
+                <a:ea typeface="Consolas"/>
+                <a:cs typeface="Consolas"/>
+                <a:sym typeface="Consolas"/>
+              </a:rPr>
+              <a:t>67912</a:t>
+            </a:r>
+            <a:endParaRPr sz="1800" b="1" dirty="0">
+              <a:latin typeface="Consolas"/>
+              <a:ea typeface="Consolas"/>
+              <a:cs typeface="Consolas"/>
+              <a:sym typeface="Consolas"/>
+            </a:endParaRPr>
+          </a:p>
+        </p:txBody>
+      </p:sp>
+      <p:sp>
+        <p:nvSpPr>
+          <p:cNvPr id="7" name="Google Shape;79;p15">
+            <a:extLst>
+              <a:ext uri="{FF2B5EF4-FFF2-40B4-BE49-F238E27FC236}">
+                <a16:creationId xmlns:a16="http://schemas.microsoft.com/office/drawing/2014/main" id="{AA0E5BFF-83AC-CFFD-C788-1B75F342BDDF}"/>
+              </a:ext>
+            </a:extLst>
+          </p:cNvPr>
+          <p:cNvSpPr/>
+          <p:nvPr/>
+        </p:nvSpPr>
+        <p:spPr>
+          <a:xfrm>
+            <a:off x="3197186" y="9265103"/>
+            <a:ext cx="2410800" cy="480900"/>
+          </a:xfrm>
+          <a:prstGeom prst="roundRect">
+            <a:avLst>
+              <a:gd name="adj" fmla="val 16667"/>
+            </a:avLst>
+          </a:prstGeom>
+          <a:solidFill>
+            <a:srgbClr val="E6B8AF"/>
+          </a:solidFill>
+          <a:ln w="28575" cap="flat" cmpd="sng">
+            <a:solidFill>
+              <a:srgbClr val="5B0F00"/>
+            </a:solidFill>
+            <a:prstDash val="solid"/>
+            <a:round/>
+            <a:headEnd type="none" w="sm" len="sm"/>
+            <a:tailEnd type="none" w="sm" len="sm"/>
+          </a:ln>
+        </p:spPr>
+        <p:txBody>
+          <a:bodyPr spcFirstLastPara="1" wrap="square" lIns="91425" tIns="91425" rIns="91425" bIns="91425" anchor="ctr" anchorCtr="0">
+            <a:noAutofit/>
+          </a:bodyPr>
+          <a:lstStyle/>
+          <a:p>
+            <a:pPr marL="0" lvl="0" indent="0" algn="ctr" rtl="0">
+              <a:spcBef>
+                <a:spcPts val="0"/>
+              </a:spcBef>
+              <a:spcAft>
+                <a:spcPts val="0"/>
+              </a:spcAft>
+              <a:buNone/>
+            </a:pPr>
+            <a:r>
+              <a:rPr lang="en-GB" sz="1800" b="1" dirty="0">
+                <a:latin typeface="Consolas"/>
+                <a:ea typeface="Consolas"/>
+                <a:cs typeface="Consolas"/>
+                <a:sym typeface="Consolas"/>
+              </a:rPr>
+              <a:t>67870</a:t>
+            </a:r>
+            <a:endParaRPr sz="1800" b="1" dirty="0">
+              <a:latin typeface="Consolas"/>
+              <a:ea typeface="Consolas"/>
+              <a:cs typeface="Consolas"/>
+              <a:sym typeface="Consolas"/>
+            </a:endParaRPr>
+          </a:p>
+        </p:txBody>
+      </p:sp>
+      <p:sp>
+        <p:nvSpPr>
+          <p:cNvPr id="19" name="Google Shape;86;p15">
+            <a:extLst>
+              <a:ext uri="{FF2B5EF4-FFF2-40B4-BE49-F238E27FC236}">
+                <a16:creationId xmlns:a16="http://schemas.microsoft.com/office/drawing/2014/main" id="{6CA111D6-AFBA-EBD9-48F0-7FACABD6E572}"/>
+              </a:ext>
+            </a:extLst>
+          </p:cNvPr>
+          <p:cNvSpPr/>
+          <p:nvPr/>
+        </p:nvSpPr>
+        <p:spPr>
+          <a:xfrm>
+            <a:off x="6113258" y="1294224"/>
+            <a:ext cx="2609591" cy="8864188"/>
+          </a:xfrm>
+          <a:prstGeom prst="roundRect">
+            <a:avLst>
+              <a:gd name="adj" fmla="val 16667"/>
+            </a:avLst>
+          </a:prstGeom>
+          <a:solidFill>
+            <a:srgbClr val="D9EAD3"/>
+          </a:solidFill>
+          <a:ln w="28575" cap="flat" cmpd="sng">
+            <a:solidFill>
+              <a:srgbClr val="274E13"/>
+            </a:solidFill>
+            <a:prstDash val="solid"/>
+            <a:round/>
+            <a:headEnd type="none" w="sm" len="sm"/>
+            <a:tailEnd type="none" w="sm" len="sm"/>
+          </a:ln>
+        </p:spPr>
+        <p:txBody>
+          <a:bodyPr spcFirstLastPara="1" wrap="square" lIns="91425" tIns="91425" rIns="91425" bIns="91425" anchor="t" anchorCtr="0">
+            <a:noAutofit/>
+          </a:bodyPr>
+          <a:lstStyle/>
+          <a:p>
+            <a:pPr marL="0" lvl="0" indent="0" rtl="0">
+              <a:spcBef>
+                <a:spcPts val="0"/>
+              </a:spcBef>
+              <a:spcAft>
+                <a:spcPts val="0"/>
+              </a:spcAft>
+              <a:buNone/>
+            </a:pPr>
+            <a:r>
+              <a:rPr lang="en-GB" dirty="0">
+                <a:latin typeface="Consolas"/>
+                <a:ea typeface="Consolas"/>
+                <a:cs typeface="Consolas"/>
+                <a:sym typeface="Consolas"/>
+              </a:rPr>
+              <a:t>US1: Como </a:t>
+            </a:r>
+            <a:r>
+              <a:rPr lang="en-GB" dirty="0" err="1">
+                <a:latin typeface="Consolas"/>
+                <a:ea typeface="Consolas"/>
+                <a:cs typeface="Consolas"/>
+                <a:sym typeface="Consolas"/>
+              </a:rPr>
+              <a:t>membro</a:t>
+            </a:r>
+            <a:r>
+              <a:rPr lang="en-GB" dirty="0">
+                <a:latin typeface="Consolas"/>
+                <a:ea typeface="Consolas"/>
+                <a:cs typeface="Consolas"/>
+                <a:sym typeface="Consolas"/>
+              </a:rPr>
+              <a:t> da </a:t>
+            </a:r>
+            <a:r>
+              <a:rPr lang="en-GB" dirty="0" err="1">
+                <a:latin typeface="Consolas"/>
+                <a:ea typeface="Consolas"/>
+                <a:cs typeface="Consolas"/>
+                <a:sym typeface="Consolas"/>
+              </a:rPr>
+              <a:t>equipa</a:t>
+            </a:r>
+            <a:r>
+              <a:rPr lang="en-GB" dirty="0">
+                <a:latin typeface="Consolas"/>
+                <a:ea typeface="Consolas"/>
+                <a:cs typeface="Consolas"/>
+                <a:sym typeface="Consolas"/>
+              </a:rPr>
+              <a:t>, </a:t>
+            </a:r>
+            <a:r>
+              <a:rPr lang="en-GB" dirty="0" err="1">
+                <a:latin typeface="Consolas"/>
+                <a:ea typeface="Consolas"/>
+                <a:cs typeface="Consolas"/>
+                <a:sym typeface="Consolas"/>
+              </a:rPr>
+              <a:t>quero</a:t>
+            </a:r>
+            <a:r>
+              <a:rPr lang="en-GB" dirty="0">
+                <a:latin typeface="Consolas"/>
+                <a:ea typeface="Consolas"/>
+                <a:cs typeface="Consolas"/>
+                <a:sym typeface="Consolas"/>
+              </a:rPr>
+              <a:t> </a:t>
+            </a:r>
+            <a:r>
+              <a:rPr lang="en-GB" dirty="0" err="1">
+                <a:latin typeface="Consolas"/>
+                <a:ea typeface="Consolas"/>
+                <a:cs typeface="Consolas"/>
+                <a:sym typeface="Consolas"/>
+              </a:rPr>
+              <a:t>implementar</a:t>
+            </a:r>
+            <a:r>
+              <a:rPr lang="en-GB" dirty="0">
+                <a:latin typeface="Consolas"/>
+                <a:ea typeface="Consolas"/>
+                <a:cs typeface="Consolas"/>
+                <a:sym typeface="Consolas"/>
+              </a:rPr>
+              <a:t> um modo de </a:t>
+            </a:r>
+            <a:r>
+              <a:rPr lang="en-GB" dirty="0" err="1">
+                <a:latin typeface="Consolas"/>
+                <a:ea typeface="Consolas"/>
+                <a:cs typeface="Consolas"/>
+                <a:sym typeface="Consolas"/>
+              </a:rPr>
+              <a:t>jogo</a:t>
+            </a:r>
+            <a:r>
+              <a:rPr lang="en-GB" dirty="0">
+                <a:latin typeface="Consolas"/>
+                <a:ea typeface="Consolas"/>
+                <a:cs typeface="Consolas"/>
+                <a:sym typeface="Consolas"/>
+              </a:rPr>
+              <a:t> </a:t>
+            </a:r>
+            <a:r>
+              <a:rPr lang="en-GB" dirty="0" err="1">
+                <a:latin typeface="Consolas"/>
+                <a:ea typeface="Consolas"/>
+                <a:cs typeface="Consolas"/>
+                <a:sym typeface="Consolas"/>
+              </a:rPr>
+              <a:t>onde</a:t>
+            </a:r>
+            <a:r>
+              <a:rPr lang="en-GB" dirty="0">
+                <a:latin typeface="Consolas"/>
+                <a:ea typeface="Consolas"/>
+                <a:cs typeface="Consolas"/>
+                <a:sym typeface="Consolas"/>
+              </a:rPr>
+              <a:t> o </a:t>
+            </a:r>
+            <a:r>
+              <a:rPr lang="en-GB" dirty="0" err="1">
+                <a:latin typeface="Consolas"/>
+                <a:ea typeface="Consolas"/>
+                <a:cs typeface="Consolas"/>
+                <a:sym typeface="Consolas"/>
+              </a:rPr>
+              <a:t>mapa</a:t>
+            </a:r>
+            <a:r>
+              <a:rPr lang="en-GB" dirty="0">
+                <a:latin typeface="Consolas"/>
+                <a:ea typeface="Consolas"/>
+                <a:cs typeface="Consolas"/>
+                <a:sym typeface="Consolas"/>
+              </a:rPr>
+              <a:t> </a:t>
+            </a:r>
+            <a:r>
+              <a:rPr lang="en-GB" dirty="0" err="1">
+                <a:latin typeface="Consolas"/>
+                <a:ea typeface="Consolas"/>
+                <a:cs typeface="Consolas"/>
+                <a:sym typeface="Consolas"/>
+              </a:rPr>
+              <a:t>muda</a:t>
+            </a:r>
+            <a:r>
+              <a:rPr lang="en-GB" dirty="0">
+                <a:latin typeface="Consolas"/>
+                <a:ea typeface="Consolas"/>
+                <a:cs typeface="Consolas"/>
+                <a:sym typeface="Consolas"/>
+              </a:rPr>
+              <a:t> </a:t>
+            </a:r>
+            <a:r>
+              <a:rPr lang="en-GB" dirty="0" err="1">
+                <a:latin typeface="Consolas"/>
+                <a:ea typeface="Consolas"/>
+                <a:cs typeface="Consolas"/>
+                <a:sym typeface="Consolas"/>
+              </a:rPr>
+              <a:t>semanalmente</a:t>
+            </a:r>
+            <a:r>
+              <a:rPr lang="en-GB" dirty="0">
+                <a:latin typeface="Consolas"/>
+                <a:ea typeface="Consolas"/>
+                <a:cs typeface="Consolas"/>
+                <a:sym typeface="Consolas"/>
+              </a:rPr>
+              <a:t> e </a:t>
+            </a:r>
+            <a:r>
+              <a:rPr lang="en-GB" dirty="0" err="1">
+                <a:latin typeface="Consolas"/>
+                <a:ea typeface="Consolas"/>
+                <a:cs typeface="Consolas"/>
+                <a:sym typeface="Consolas"/>
+              </a:rPr>
+              <a:t>possui</a:t>
+            </a:r>
+            <a:r>
+              <a:rPr lang="en-GB" dirty="0">
+                <a:latin typeface="Consolas"/>
+                <a:ea typeface="Consolas"/>
+                <a:cs typeface="Consolas"/>
+                <a:sym typeface="Consolas"/>
+              </a:rPr>
+              <a:t> um ranking </a:t>
+            </a:r>
+            <a:r>
+              <a:rPr lang="en-GB" dirty="0" err="1">
+                <a:latin typeface="Consolas"/>
+                <a:ea typeface="Consolas"/>
+                <a:cs typeface="Consolas"/>
+                <a:sym typeface="Consolas"/>
+              </a:rPr>
+              <a:t>baseado</a:t>
+            </a:r>
+            <a:r>
+              <a:rPr lang="en-GB" dirty="0">
+                <a:latin typeface="Consolas"/>
+                <a:ea typeface="Consolas"/>
+                <a:cs typeface="Consolas"/>
+                <a:sym typeface="Consolas"/>
+              </a:rPr>
+              <a:t> </a:t>
+            </a:r>
+            <a:r>
+              <a:rPr lang="en-GB" dirty="0" err="1">
+                <a:latin typeface="Consolas"/>
+                <a:ea typeface="Consolas"/>
+                <a:cs typeface="Consolas"/>
+                <a:sym typeface="Consolas"/>
+              </a:rPr>
+              <a:t>na</a:t>
+            </a:r>
+            <a:r>
+              <a:rPr lang="en-GB" dirty="0">
+                <a:latin typeface="Consolas"/>
+                <a:ea typeface="Consolas"/>
+                <a:cs typeface="Consolas"/>
+                <a:sym typeface="Consolas"/>
+              </a:rPr>
+              <a:t> performance.</a:t>
+            </a:r>
+            <a:endParaRPr dirty="0">
+              <a:latin typeface="Consolas"/>
+              <a:ea typeface="Consolas"/>
+              <a:cs typeface="Consolas"/>
+              <a:sym typeface="Consolas"/>
+            </a:endParaRPr>
+          </a:p>
+        </p:txBody>
+      </p:sp>
+      <p:sp>
+        <p:nvSpPr>
+          <p:cNvPr id="20" name="Google Shape;92;p15">
+            <a:extLst>
+              <a:ext uri="{FF2B5EF4-FFF2-40B4-BE49-F238E27FC236}">
+                <a16:creationId xmlns:a16="http://schemas.microsoft.com/office/drawing/2014/main" id="{039AC44D-89BA-A4D7-E2B9-854A90D3B1F4}"/>
+              </a:ext>
+            </a:extLst>
+          </p:cNvPr>
+          <p:cNvSpPr/>
+          <p:nvPr/>
+        </p:nvSpPr>
+        <p:spPr>
+          <a:xfrm>
+            <a:off x="6113258" y="3203475"/>
+            <a:ext cx="2609587" cy="7609683"/>
+          </a:xfrm>
+          <a:prstGeom prst="roundRect">
+            <a:avLst>
+              <a:gd name="adj" fmla="val 16667"/>
+            </a:avLst>
+          </a:prstGeom>
+          <a:solidFill>
+            <a:srgbClr val="D9EAD3"/>
+          </a:solidFill>
+          <a:ln w="28575" cap="flat" cmpd="sng">
+            <a:solidFill>
+              <a:srgbClr val="274E13"/>
+            </a:solidFill>
+            <a:prstDash val="solid"/>
+            <a:round/>
+            <a:headEnd type="none" w="sm" len="sm"/>
+            <a:tailEnd type="none" w="sm" len="sm"/>
+          </a:ln>
+        </p:spPr>
+        <p:txBody>
+          <a:bodyPr spcFirstLastPara="1" wrap="square" lIns="91425" tIns="91425" rIns="91425" bIns="91425" anchor="t" anchorCtr="0">
+            <a:noAutofit/>
+          </a:bodyPr>
+          <a:lstStyle/>
+          <a:p>
+            <a:pPr lvl="0"/>
+            <a:r>
+              <a:rPr lang="en-GB" dirty="0">
+                <a:latin typeface="Consolas"/>
+                <a:ea typeface="Consolas"/>
+                <a:cs typeface="Consolas"/>
+                <a:sym typeface="Consolas"/>
+              </a:rPr>
+              <a:t>US2: Como </a:t>
+            </a:r>
+            <a:r>
+              <a:rPr lang="en-GB" dirty="0" err="1">
+                <a:latin typeface="Consolas"/>
+                <a:ea typeface="Consolas"/>
+                <a:cs typeface="Consolas"/>
+                <a:sym typeface="Consolas"/>
+              </a:rPr>
+              <a:t>membro</a:t>
+            </a:r>
+            <a:r>
+              <a:rPr lang="en-GB" dirty="0">
+                <a:latin typeface="Consolas"/>
+                <a:ea typeface="Consolas"/>
+                <a:cs typeface="Consolas"/>
+                <a:sym typeface="Consolas"/>
+              </a:rPr>
+              <a:t> da </a:t>
+            </a:r>
+            <a:r>
+              <a:rPr lang="en-GB" dirty="0" err="1">
+                <a:latin typeface="Consolas"/>
+                <a:ea typeface="Consolas"/>
+                <a:cs typeface="Consolas"/>
+                <a:sym typeface="Consolas"/>
+              </a:rPr>
+              <a:t>equipa</a:t>
+            </a:r>
+            <a:r>
+              <a:rPr lang="en-GB" dirty="0">
+                <a:latin typeface="Consolas"/>
+                <a:ea typeface="Consolas"/>
+                <a:cs typeface="Consolas"/>
+                <a:sym typeface="Consolas"/>
+              </a:rPr>
+              <a:t> </a:t>
+            </a:r>
+            <a:r>
+              <a:rPr lang="en-GB" dirty="0" err="1">
+                <a:latin typeface="Consolas"/>
+                <a:ea typeface="Consolas"/>
+                <a:cs typeface="Consolas"/>
+                <a:sym typeface="Consolas"/>
+              </a:rPr>
+              <a:t>quero</a:t>
+            </a:r>
+            <a:r>
+              <a:rPr lang="pt-PT" dirty="0">
+                <a:latin typeface="Consolas"/>
+                <a:ea typeface="Consolas"/>
+                <a:cs typeface="Consolas"/>
+                <a:sym typeface="Consolas"/>
+              </a:rPr>
+              <a:t> implementar a </a:t>
+            </a:r>
+            <a:r>
+              <a:rPr lang="pt-PT" dirty="0" err="1">
+                <a:latin typeface="Consolas"/>
+                <a:ea typeface="Consolas"/>
+                <a:cs typeface="Consolas"/>
+                <a:sym typeface="Consolas"/>
+              </a:rPr>
+              <a:t>Health</a:t>
+            </a:r>
+            <a:r>
+              <a:rPr lang="pt-PT" dirty="0">
+                <a:latin typeface="Consolas"/>
+                <a:ea typeface="Consolas"/>
+                <a:cs typeface="Consolas"/>
+                <a:sym typeface="Consolas"/>
+              </a:rPr>
+              <a:t> Bar de cada </a:t>
+            </a:r>
+            <a:r>
+              <a:rPr lang="pt-PT" dirty="0" err="1">
+                <a:latin typeface="Consolas"/>
+                <a:ea typeface="Consolas"/>
+                <a:cs typeface="Consolas"/>
+                <a:sym typeface="Consolas"/>
+              </a:rPr>
+              <a:t>wave</a:t>
+            </a:r>
+            <a:r>
+              <a:rPr lang="pt-PT" dirty="0">
+                <a:latin typeface="Consolas"/>
+                <a:ea typeface="Consolas"/>
+                <a:cs typeface="Consolas"/>
+                <a:sym typeface="Consolas"/>
+              </a:rPr>
+              <a:t> de inimigos.</a:t>
+            </a:r>
+            <a:endParaRPr dirty="0">
+              <a:latin typeface="Consolas"/>
+              <a:ea typeface="Consolas"/>
+              <a:cs typeface="Consolas"/>
+              <a:sym typeface="Consolas"/>
+            </a:endParaRPr>
+          </a:p>
+        </p:txBody>
+      </p:sp>
+      <p:sp>
+        <p:nvSpPr>
+          <p:cNvPr id="21" name="Google Shape;92;p15">
+            <a:extLst>
+              <a:ext uri="{FF2B5EF4-FFF2-40B4-BE49-F238E27FC236}">
+                <a16:creationId xmlns:a16="http://schemas.microsoft.com/office/drawing/2014/main" id="{38E0B706-5871-FBBB-1A01-B68FF5359838}"/>
+              </a:ext>
+            </a:extLst>
+          </p:cNvPr>
+          <p:cNvSpPr/>
+          <p:nvPr/>
+        </p:nvSpPr>
+        <p:spPr>
+          <a:xfrm>
+            <a:off x="6136546" y="4644094"/>
+            <a:ext cx="2609586" cy="6208084"/>
+          </a:xfrm>
+          <a:prstGeom prst="roundRect">
+            <a:avLst>
+              <a:gd name="adj" fmla="val 16667"/>
+            </a:avLst>
+          </a:prstGeom>
+          <a:solidFill>
+            <a:srgbClr val="D9EAD3"/>
+          </a:solidFill>
+          <a:ln w="28575" cap="flat" cmpd="sng">
+            <a:solidFill>
+              <a:srgbClr val="274E13"/>
+            </a:solidFill>
+            <a:prstDash val="solid"/>
+            <a:round/>
+            <a:headEnd type="none" w="sm" len="sm"/>
+            <a:tailEnd type="none" w="sm" len="sm"/>
+          </a:ln>
+        </p:spPr>
+        <p:txBody>
+          <a:bodyPr spcFirstLastPara="1" wrap="square" lIns="91425" tIns="91425" rIns="91425" bIns="91425" anchor="t" anchorCtr="0">
+            <a:noAutofit/>
+          </a:bodyPr>
+          <a:lstStyle/>
+          <a:p>
+            <a:pPr lvl="0"/>
+            <a:r>
+              <a:rPr lang="en-GB" dirty="0">
+                <a:latin typeface="Consolas"/>
+                <a:ea typeface="Consolas"/>
+                <a:cs typeface="Consolas"/>
+                <a:sym typeface="Consolas"/>
+              </a:rPr>
+              <a:t>US3: Como </a:t>
+            </a:r>
+            <a:r>
+              <a:rPr lang="en-GB" dirty="0" err="1">
+                <a:latin typeface="Consolas"/>
+                <a:ea typeface="Consolas"/>
+                <a:cs typeface="Consolas"/>
+                <a:sym typeface="Consolas"/>
+              </a:rPr>
+              <a:t>membro</a:t>
+            </a:r>
+            <a:r>
+              <a:rPr lang="en-GB" dirty="0">
+                <a:latin typeface="Consolas"/>
+                <a:ea typeface="Consolas"/>
+                <a:cs typeface="Consolas"/>
+                <a:sym typeface="Consolas"/>
+              </a:rPr>
+              <a:t> da </a:t>
+            </a:r>
+            <a:r>
+              <a:rPr lang="en-GB" dirty="0" err="1">
+                <a:latin typeface="Consolas"/>
+                <a:ea typeface="Consolas"/>
+                <a:cs typeface="Consolas"/>
+                <a:sym typeface="Consolas"/>
+              </a:rPr>
+              <a:t>equipa</a:t>
+            </a:r>
+            <a:r>
+              <a:rPr lang="en-GB" dirty="0">
+                <a:latin typeface="Consolas"/>
+                <a:ea typeface="Consolas"/>
+                <a:cs typeface="Consolas"/>
+                <a:sym typeface="Consolas"/>
+              </a:rPr>
+              <a:t> </a:t>
+            </a:r>
+            <a:r>
+              <a:rPr lang="en-GB" dirty="0" err="1">
+                <a:latin typeface="Consolas"/>
+                <a:ea typeface="Consolas"/>
+                <a:cs typeface="Consolas"/>
+                <a:sym typeface="Consolas"/>
+              </a:rPr>
+              <a:t>quero</a:t>
+            </a:r>
+            <a:r>
+              <a:rPr lang="pt-PT" dirty="0">
+                <a:latin typeface="Consolas"/>
+                <a:ea typeface="Consolas"/>
+                <a:cs typeface="Consolas"/>
+                <a:sym typeface="Consolas"/>
+              </a:rPr>
+              <a:t> implementar as diferentes condições climatéricas.</a:t>
+            </a:r>
+          </a:p>
+        </p:txBody>
+      </p:sp>
+      <p:sp>
+        <p:nvSpPr>
+          <p:cNvPr id="8" name="Google Shape;121;p16">
+            <a:extLst>
+              <a:ext uri="{FF2B5EF4-FFF2-40B4-BE49-F238E27FC236}">
+                <a16:creationId xmlns:a16="http://schemas.microsoft.com/office/drawing/2014/main" id="{6D7B61FE-FF7D-243C-505F-53C496B5D7E5}"/>
+              </a:ext>
+            </a:extLst>
+          </p:cNvPr>
+          <p:cNvSpPr/>
+          <p:nvPr/>
+        </p:nvSpPr>
+        <p:spPr>
+          <a:xfrm>
+            <a:off x="18725151" y="1021952"/>
+            <a:ext cx="2410800" cy="2657243"/>
+          </a:xfrm>
+          <a:prstGeom prst="roundRect">
+            <a:avLst>
+              <a:gd name="adj" fmla="val 16667"/>
+            </a:avLst>
+          </a:prstGeom>
+          <a:solidFill>
+            <a:srgbClr val="D0E0E3"/>
+          </a:solidFill>
+          <a:ln w="28575" cap="flat" cmpd="sng">
+            <a:solidFill>
+              <a:srgbClr val="134F5C"/>
+            </a:solidFill>
+            <a:prstDash val="solid"/>
+            <a:round/>
+            <a:headEnd type="none" w="sm" len="sm"/>
+            <a:tailEnd type="none" w="sm" len="sm"/>
+          </a:ln>
+        </p:spPr>
+        <p:txBody>
+          <a:bodyPr spcFirstLastPara="1" wrap="square" lIns="91425" tIns="91425" rIns="91425" bIns="91425" anchor="t" anchorCtr="0">
+            <a:noAutofit/>
+          </a:bodyPr>
+          <a:lstStyle/>
+          <a:p>
+            <a:r>
+              <a:rPr lang="en-GB" dirty="0">
+                <a:latin typeface="Consolas"/>
+                <a:ea typeface="Consolas"/>
+                <a:cs typeface="Consolas"/>
+                <a:sym typeface="Consolas"/>
+              </a:rPr>
+              <a:t>T1: </a:t>
+            </a:r>
+            <a:r>
+              <a:rPr lang="pt-PT" dirty="0">
+                <a:latin typeface="Consolas"/>
+                <a:ea typeface="Consolas"/>
+                <a:cs typeface="Consolas"/>
+                <a:sym typeface="Consolas"/>
+              </a:rPr>
+              <a:t>Fazer Interface de Rankings e “jogar Desafio Semanal”</a:t>
+            </a:r>
+            <a:br>
+              <a:rPr lang="en-GB" dirty="0">
+                <a:latin typeface="Consolas"/>
+                <a:ea typeface="Consolas"/>
+                <a:cs typeface="Consolas"/>
+                <a:sym typeface="Consolas"/>
+              </a:rPr>
+            </a:br>
+            <a:br>
+              <a:rPr lang="en-GB" dirty="0">
+                <a:latin typeface="Consolas"/>
+                <a:ea typeface="Consolas"/>
+                <a:cs typeface="Consolas"/>
+                <a:sym typeface="Consolas"/>
+              </a:rPr>
+            </a:br>
+            <a:endParaRPr lang="en-GB" dirty="0">
+              <a:latin typeface="Consolas"/>
+              <a:ea typeface="Consolas"/>
+              <a:cs typeface="Consolas"/>
+              <a:sym typeface="Consolas"/>
+            </a:endParaRPr>
+          </a:p>
+          <a:p>
+            <a:pPr marL="0" lvl="0" indent="0" algn="l" rtl="0">
+              <a:spcBef>
+                <a:spcPts val="0"/>
+              </a:spcBef>
+              <a:spcAft>
+                <a:spcPts val="0"/>
+              </a:spcAft>
+              <a:buNone/>
+            </a:pPr>
+            <a:endParaRPr dirty="0">
+              <a:latin typeface="Consolas"/>
+              <a:ea typeface="Consolas"/>
+              <a:cs typeface="Consolas"/>
+              <a:sym typeface="Consolas"/>
+            </a:endParaRPr>
+          </a:p>
+        </p:txBody>
+      </p:sp>
+      <p:sp>
+        <p:nvSpPr>
+          <p:cNvPr id="10" name="Google Shape;121;p16">
+            <a:extLst>
+              <a:ext uri="{FF2B5EF4-FFF2-40B4-BE49-F238E27FC236}">
+                <a16:creationId xmlns:a16="http://schemas.microsoft.com/office/drawing/2014/main" id="{708FE690-0101-BE6B-CCF2-D391717C05CA}"/>
+              </a:ext>
+            </a:extLst>
+          </p:cNvPr>
+          <p:cNvSpPr/>
+          <p:nvPr/>
+        </p:nvSpPr>
+        <p:spPr>
+          <a:xfrm>
+            <a:off x="12395940" y="4165308"/>
+            <a:ext cx="2410800" cy="749592"/>
+          </a:xfrm>
+          <a:prstGeom prst="roundRect">
+            <a:avLst>
+              <a:gd name="adj" fmla="val 16667"/>
+            </a:avLst>
+          </a:prstGeom>
+          <a:solidFill>
+            <a:srgbClr val="D0E0E3"/>
+          </a:solidFill>
+          <a:ln w="28575" cap="flat" cmpd="sng">
+            <a:solidFill>
+              <a:srgbClr val="134F5C"/>
+            </a:solidFill>
+            <a:prstDash val="solid"/>
+            <a:round/>
+            <a:headEnd type="none" w="sm" len="sm"/>
+            <a:tailEnd type="none" w="sm" len="sm"/>
+          </a:ln>
+        </p:spPr>
+        <p:txBody>
+          <a:bodyPr spcFirstLastPara="1" wrap="square" lIns="91425" tIns="91425" rIns="91425" bIns="91425" anchor="t" anchorCtr="0">
+            <a:noAutofit/>
+          </a:bodyPr>
+          <a:lstStyle/>
+          <a:p>
+            <a:r>
+              <a:rPr lang="pt-PT" dirty="0">
+                <a:latin typeface="Consolas"/>
+                <a:ea typeface="Consolas"/>
+                <a:cs typeface="Consolas"/>
+                <a:sym typeface="Consolas"/>
+              </a:rPr>
+              <a:t>T3: Implementar a parte do Terramoto.</a:t>
+            </a:r>
+          </a:p>
+          <a:p>
+            <a:r>
+              <a:rPr lang="en-GB" dirty="0">
+                <a:latin typeface="Consolas"/>
+                <a:ea typeface="Consolas"/>
+                <a:cs typeface="Consolas"/>
+                <a:sym typeface="Consolas"/>
+              </a:rPr>
+              <a:t> </a:t>
+            </a:r>
+            <a:br>
+              <a:rPr lang="en-GB" dirty="0">
+                <a:latin typeface="Consolas"/>
+                <a:ea typeface="Consolas"/>
+                <a:cs typeface="Consolas"/>
+                <a:sym typeface="Consolas"/>
+              </a:rPr>
+            </a:br>
+            <a:br>
+              <a:rPr lang="en-GB" dirty="0">
+                <a:latin typeface="Consolas"/>
+                <a:ea typeface="Consolas"/>
+                <a:cs typeface="Consolas"/>
+                <a:sym typeface="Consolas"/>
+              </a:rPr>
+            </a:br>
+            <a:endParaRPr lang="en-GB" dirty="0">
+              <a:latin typeface="Consolas"/>
+              <a:ea typeface="Consolas"/>
+              <a:cs typeface="Consolas"/>
+              <a:sym typeface="Consolas"/>
+            </a:endParaRPr>
+          </a:p>
+          <a:p>
+            <a:pPr marL="0" lvl="0" indent="0" algn="l" rtl="0">
+              <a:spcBef>
+                <a:spcPts val="0"/>
+              </a:spcBef>
+              <a:spcAft>
+                <a:spcPts val="0"/>
+              </a:spcAft>
+              <a:buNone/>
+            </a:pPr>
+            <a:endParaRPr dirty="0">
+              <a:latin typeface="Consolas"/>
+              <a:ea typeface="Consolas"/>
+              <a:cs typeface="Consolas"/>
+              <a:sym typeface="Consolas"/>
+            </a:endParaRPr>
+          </a:p>
+        </p:txBody>
+      </p:sp>
+      <p:sp>
+        <p:nvSpPr>
+          <p:cNvPr id="11" name="Google Shape;121;p16">
+            <a:extLst>
+              <a:ext uri="{FF2B5EF4-FFF2-40B4-BE49-F238E27FC236}">
+                <a16:creationId xmlns:a16="http://schemas.microsoft.com/office/drawing/2014/main" id="{FB81A080-CF90-FB94-50B9-82E6886A5A59}"/>
+              </a:ext>
+            </a:extLst>
+          </p:cNvPr>
+          <p:cNvSpPr/>
+          <p:nvPr/>
+        </p:nvSpPr>
+        <p:spPr>
+          <a:xfrm>
+            <a:off x="12395940" y="4784311"/>
+            <a:ext cx="2410800" cy="749592"/>
+          </a:xfrm>
+          <a:prstGeom prst="roundRect">
+            <a:avLst>
+              <a:gd name="adj" fmla="val 16667"/>
+            </a:avLst>
+          </a:prstGeom>
+          <a:solidFill>
+            <a:srgbClr val="D0E0E3"/>
+          </a:solidFill>
+          <a:ln w="28575" cap="flat" cmpd="sng">
+            <a:solidFill>
+              <a:srgbClr val="134F5C"/>
+            </a:solidFill>
+            <a:prstDash val="solid"/>
+            <a:round/>
+            <a:headEnd type="none" w="sm" len="sm"/>
+            <a:tailEnd type="none" w="sm" len="sm"/>
+          </a:ln>
+        </p:spPr>
+        <p:txBody>
+          <a:bodyPr spcFirstLastPara="1" wrap="square" lIns="91425" tIns="91425" rIns="91425" bIns="91425" anchor="t" anchorCtr="0">
+            <a:noAutofit/>
+          </a:bodyPr>
+          <a:lstStyle/>
+          <a:p>
+            <a:r>
+              <a:rPr lang="pt-PT" dirty="0">
+                <a:latin typeface="Consolas"/>
+                <a:ea typeface="Consolas"/>
+                <a:cs typeface="Consolas"/>
+                <a:sym typeface="Consolas"/>
+              </a:rPr>
+              <a:t>T3: Implementar a parte do Tsunami.</a:t>
+            </a:r>
+          </a:p>
+          <a:p>
+            <a:r>
+              <a:rPr lang="en-GB" dirty="0">
+                <a:latin typeface="Consolas"/>
+                <a:ea typeface="Consolas"/>
+                <a:cs typeface="Consolas"/>
+                <a:sym typeface="Consolas"/>
+              </a:rPr>
+              <a:t> </a:t>
+            </a:r>
+            <a:br>
+              <a:rPr lang="en-GB" dirty="0">
+                <a:latin typeface="Consolas"/>
+                <a:ea typeface="Consolas"/>
+                <a:cs typeface="Consolas"/>
+                <a:sym typeface="Consolas"/>
+              </a:rPr>
+            </a:br>
+            <a:br>
+              <a:rPr lang="en-GB" dirty="0">
+                <a:latin typeface="Consolas"/>
+                <a:ea typeface="Consolas"/>
+                <a:cs typeface="Consolas"/>
+                <a:sym typeface="Consolas"/>
+              </a:rPr>
+            </a:br>
+            <a:endParaRPr lang="en-GB" dirty="0">
+              <a:latin typeface="Consolas"/>
+              <a:ea typeface="Consolas"/>
+              <a:cs typeface="Consolas"/>
+              <a:sym typeface="Consolas"/>
+            </a:endParaRPr>
+          </a:p>
+          <a:p>
+            <a:pPr marL="0" lvl="0" indent="0" algn="l" rtl="0">
+              <a:spcBef>
+                <a:spcPts val="0"/>
+              </a:spcBef>
+              <a:spcAft>
+                <a:spcPts val="0"/>
+              </a:spcAft>
+              <a:buNone/>
+            </a:pPr>
+            <a:endParaRPr dirty="0">
+              <a:latin typeface="Consolas"/>
+              <a:ea typeface="Consolas"/>
+              <a:cs typeface="Consolas"/>
+              <a:sym typeface="Consolas"/>
+            </a:endParaRPr>
+          </a:p>
+        </p:txBody>
+      </p:sp>
+      <p:sp>
+        <p:nvSpPr>
+          <p:cNvPr id="22" name="Google Shape;121;p16">
+            <a:extLst>
+              <a:ext uri="{FF2B5EF4-FFF2-40B4-BE49-F238E27FC236}">
+                <a16:creationId xmlns:a16="http://schemas.microsoft.com/office/drawing/2014/main" id="{F8620EEB-DBF2-7CC7-E189-D55301A96F58}"/>
+              </a:ext>
+            </a:extLst>
+          </p:cNvPr>
+          <p:cNvSpPr/>
+          <p:nvPr/>
+        </p:nvSpPr>
+        <p:spPr>
+          <a:xfrm>
+            <a:off x="12423686" y="7368613"/>
+            <a:ext cx="2410800" cy="1215821"/>
+          </a:xfrm>
+          <a:prstGeom prst="roundRect">
+            <a:avLst>
+              <a:gd name="adj" fmla="val 16667"/>
+            </a:avLst>
+          </a:prstGeom>
+          <a:solidFill>
+            <a:srgbClr val="D0E0E3"/>
+          </a:solidFill>
+          <a:ln w="28575" cap="flat" cmpd="sng">
+            <a:solidFill>
+              <a:srgbClr val="134F5C"/>
+            </a:solidFill>
+            <a:prstDash val="solid"/>
+            <a:round/>
+            <a:headEnd type="none" w="sm" len="sm"/>
+            <a:tailEnd type="none" w="sm" len="sm"/>
+          </a:ln>
+        </p:spPr>
+        <p:txBody>
+          <a:bodyPr spcFirstLastPara="1" wrap="square" lIns="91425" tIns="91425" rIns="91425" bIns="91425" anchor="t" anchorCtr="0">
+            <a:noAutofit/>
+          </a:bodyPr>
+          <a:lstStyle/>
+          <a:p>
+            <a:r>
+              <a:rPr lang="pt-PT" dirty="0">
+                <a:latin typeface="Consolas"/>
+                <a:ea typeface="Consolas"/>
+                <a:cs typeface="Consolas"/>
+                <a:sym typeface="Consolas"/>
+              </a:rPr>
+              <a:t>T3: Implementar a parte do Meteorito. </a:t>
+            </a:r>
+          </a:p>
+          <a:p>
+            <a:r>
+              <a:rPr lang="en-GB" dirty="0">
+                <a:latin typeface="Consolas"/>
+                <a:ea typeface="Consolas"/>
+                <a:cs typeface="Consolas"/>
+                <a:sym typeface="Consolas"/>
+              </a:rPr>
+              <a:t> </a:t>
+            </a:r>
+            <a:br>
+              <a:rPr lang="en-GB" dirty="0">
+                <a:latin typeface="Consolas"/>
+                <a:ea typeface="Consolas"/>
+                <a:cs typeface="Consolas"/>
+                <a:sym typeface="Consolas"/>
+              </a:rPr>
+            </a:br>
+            <a:br>
+              <a:rPr lang="en-GB" dirty="0">
+                <a:latin typeface="Consolas"/>
+                <a:ea typeface="Consolas"/>
+                <a:cs typeface="Consolas"/>
+                <a:sym typeface="Consolas"/>
+              </a:rPr>
+            </a:br>
+            <a:endParaRPr lang="en-GB" dirty="0">
+              <a:latin typeface="Consolas"/>
+              <a:ea typeface="Consolas"/>
+              <a:cs typeface="Consolas"/>
+              <a:sym typeface="Consolas"/>
+            </a:endParaRPr>
+          </a:p>
+          <a:p>
+            <a:pPr marL="0" lvl="0" indent="0" algn="l" rtl="0">
+              <a:spcBef>
+                <a:spcPts val="0"/>
+              </a:spcBef>
+              <a:spcAft>
+                <a:spcPts val="0"/>
+              </a:spcAft>
+              <a:buNone/>
+            </a:pPr>
+            <a:endParaRPr lang="en-GB" dirty="0">
+              <a:latin typeface="Consolas"/>
+              <a:ea typeface="Consolas"/>
+              <a:cs typeface="Consolas"/>
+              <a:sym typeface="Consolas"/>
+            </a:endParaRPr>
+          </a:p>
+        </p:txBody>
+      </p:sp>
+      <p:sp>
+        <p:nvSpPr>
+          <p:cNvPr id="24" name="Google Shape;121;p16">
+            <a:extLst>
+              <a:ext uri="{FF2B5EF4-FFF2-40B4-BE49-F238E27FC236}">
+                <a16:creationId xmlns:a16="http://schemas.microsoft.com/office/drawing/2014/main" id="{DFA277F6-FAC1-F983-E958-3655E8AF52C5}"/>
+              </a:ext>
+            </a:extLst>
+          </p:cNvPr>
+          <p:cNvSpPr/>
+          <p:nvPr/>
+        </p:nvSpPr>
+        <p:spPr>
+          <a:xfrm>
+            <a:off x="12395940" y="932272"/>
+            <a:ext cx="2410800" cy="2657243"/>
+          </a:xfrm>
+          <a:prstGeom prst="roundRect">
+            <a:avLst>
+              <a:gd name="adj" fmla="val 16667"/>
+            </a:avLst>
+          </a:prstGeom>
+          <a:solidFill>
+            <a:srgbClr val="D0E0E3"/>
+          </a:solidFill>
+          <a:ln w="28575" cap="flat" cmpd="sng">
+            <a:solidFill>
+              <a:srgbClr val="134F5C"/>
+            </a:solidFill>
+            <a:prstDash val="solid"/>
+            <a:round/>
+            <a:headEnd type="none" w="sm" len="sm"/>
+            <a:tailEnd type="none" w="sm" len="sm"/>
+          </a:ln>
+        </p:spPr>
+        <p:txBody>
+          <a:bodyPr spcFirstLastPara="1" wrap="square" lIns="91425" tIns="91425" rIns="91425" bIns="91425" anchor="t" anchorCtr="0">
+            <a:noAutofit/>
+          </a:bodyPr>
+          <a:lstStyle/>
+          <a:p>
+            <a:r>
+              <a:rPr lang="en-GB" dirty="0">
+                <a:latin typeface="Consolas"/>
+                <a:ea typeface="Consolas"/>
+                <a:cs typeface="Consolas"/>
+                <a:sym typeface="Consolas"/>
+              </a:rPr>
+              <a:t>T1: </a:t>
+            </a:r>
+            <a:r>
+              <a:rPr lang="pt-PT" dirty="0">
+                <a:latin typeface="Consolas"/>
+                <a:ea typeface="Consolas"/>
+                <a:cs typeface="Consolas"/>
+                <a:sym typeface="Consolas"/>
+              </a:rPr>
+              <a:t>Implementar um gerador de mapa semanal.</a:t>
+            </a:r>
+            <a:br>
+              <a:rPr lang="en-GB" dirty="0">
+                <a:latin typeface="Consolas"/>
+                <a:ea typeface="Consolas"/>
+                <a:cs typeface="Consolas"/>
+                <a:sym typeface="Consolas"/>
+              </a:rPr>
+            </a:br>
+            <a:br>
+              <a:rPr lang="en-GB" dirty="0">
+                <a:latin typeface="Consolas"/>
+                <a:ea typeface="Consolas"/>
+                <a:cs typeface="Consolas"/>
+                <a:sym typeface="Consolas"/>
+              </a:rPr>
+            </a:br>
+            <a:endParaRPr lang="en-GB" dirty="0">
+              <a:latin typeface="Consolas"/>
+              <a:ea typeface="Consolas"/>
+              <a:cs typeface="Consolas"/>
+              <a:sym typeface="Consolas"/>
+            </a:endParaRPr>
+          </a:p>
+          <a:p>
+            <a:pPr marL="0" lvl="0" indent="0" algn="l" rtl="0">
+              <a:spcBef>
+                <a:spcPts val="0"/>
+              </a:spcBef>
+              <a:spcAft>
+                <a:spcPts val="0"/>
+              </a:spcAft>
+              <a:buNone/>
+            </a:pPr>
+            <a:endParaRPr dirty="0">
+              <a:latin typeface="Consolas"/>
+              <a:ea typeface="Consolas"/>
+              <a:cs typeface="Consolas"/>
+              <a:sym typeface="Consolas"/>
+            </a:endParaRPr>
+          </a:p>
+        </p:txBody>
+      </p:sp>
+      <p:sp>
+        <p:nvSpPr>
+          <p:cNvPr id="23" name="Google Shape;121;p16">
+            <a:extLst>
+              <a:ext uri="{FF2B5EF4-FFF2-40B4-BE49-F238E27FC236}">
+                <a16:creationId xmlns:a16="http://schemas.microsoft.com/office/drawing/2014/main" id="{87533D02-062A-4DEB-31C2-2FCBBD1A55C5}"/>
+              </a:ext>
+            </a:extLst>
+          </p:cNvPr>
+          <p:cNvSpPr/>
+          <p:nvPr/>
+        </p:nvSpPr>
+        <p:spPr>
+          <a:xfrm>
+            <a:off x="15532407" y="5825394"/>
+            <a:ext cx="2410800" cy="1215821"/>
+          </a:xfrm>
+          <a:prstGeom prst="roundRect">
+            <a:avLst>
+              <a:gd name="adj" fmla="val 16667"/>
+            </a:avLst>
+          </a:prstGeom>
+          <a:solidFill>
+            <a:srgbClr val="D0E0E3"/>
+          </a:solidFill>
+          <a:ln w="28575" cap="flat" cmpd="sng">
+            <a:solidFill>
+              <a:srgbClr val="134F5C"/>
+            </a:solidFill>
+            <a:prstDash val="solid"/>
+            <a:round/>
+            <a:headEnd type="none" w="sm" len="sm"/>
+            <a:tailEnd type="none" w="sm" len="sm"/>
+          </a:ln>
+        </p:spPr>
+        <p:txBody>
+          <a:bodyPr spcFirstLastPara="1" wrap="square" lIns="91425" tIns="91425" rIns="91425" bIns="91425" anchor="t" anchorCtr="0">
+            <a:noAutofit/>
+          </a:bodyPr>
+          <a:lstStyle/>
+          <a:p>
+            <a:r>
+              <a:rPr lang="pt-PT" dirty="0">
+                <a:latin typeface="Consolas"/>
+                <a:ea typeface="Consolas"/>
+                <a:cs typeface="Consolas"/>
+                <a:sym typeface="Consolas"/>
+              </a:rPr>
+              <a:t>T2: Implementar a </a:t>
+            </a:r>
+            <a:r>
+              <a:rPr lang="pt-PT" dirty="0" err="1">
+                <a:latin typeface="Consolas"/>
+                <a:ea typeface="Consolas"/>
+                <a:cs typeface="Consolas"/>
+                <a:sym typeface="Consolas"/>
+              </a:rPr>
+              <a:t>Health</a:t>
+            </a:r>
+            <a:r>
+              <a:rPr lang="pt-PT" dirty="0">
+                <a:latin typeface="Consolas"/>
+                <a:ea typeface="Consolas"/>
+                <a:cs typeface="Consolas"/>
+                <a:sym typeface="Consolas"/>
+              </a:rPr>
+              <a:t> Bar de cada </a:t>
+            </a:r>
+            <a:r>
+              <a:rPr lang="pt-PT" dirty="0" err="1">
+                <a:latin typeface="Consolas"/>
+                <a:ea typeface="Consolas"/>
+                <a:cs typeface="Consolas"/>
+                <a:sym typeface="Consolas"/>
+              </a:rPr>
+              <a:t>wave</a:t>
+            </a:r>
+            <a:r>
+              <a:rPr lang="pt-PT" dirty="0">
+                <a:latin typeface="Consolas"/>
+                <a:ea typeface="Consolas"/>
+                <a:cs typeface="Consolas"/>
+                <a:sym typeface="Consolas"/>
+              </a:rPr>
+              <a:t> de inimigos.</a:t>
+            </a:r>
+          </a:p>
+          <a:p>
+            <a:r>
+              <a:rPr lang="en-GB" dirty="0">
+                <a:latin typeface="Consolas"/>
+                <a:ea typeface="Consolas"/>
+                <a:cs typeface="Consolas"/>
+                <a:sym typeface="Consolas"/>
+              </a:rPr>
+              <a:t> </a:t>
+            </a:r>
+            <a:br>
+              <a:rPr lang="en-GB" dirty="0">
+                <a:latin typeface="Consolas"/>
+                <a:ea typeface="Consolas"/>
+                <a:cs typeface="Consolas"/>
+                <a:sym typeface="Consolas"/>
+              </a:rPr>
+            </a:br>
+            <a:br>
+              <a:rPr lang="en-GB" dirty="0">
+                <a:latin typeface="Consolas"/>
+                <a:ea typeface="Consolas"/>
+                <a:cs typeface="Consolas"/>
+                <a:sym typeface="Consolas"/>
+              </a:rPr>
+            </a:br>
+            <a:endParaRPr lang="en-GB" dirty="0">
+              <a:latin typeface="Consolas"/>
+              <a:ea typeface="Consolas"/>
+              <a:cs typeface="Consolas"/>
+              <a:sym typeface="Consolas"/>
+            </a:endParaRPr>
+          </a:p>
+          <a:p>
+            <a:pPr marL="0" lvl="0" indent="0" algn="l" rtl="0">
+              <a:spcBef>
+                <a:spcPts val="0"/>
+              </a:spcBef>
+              <a:spcAft>
+                <a:spcPts val="0"/>
+              </a:spcAft>
+              <a:buNone/>
+            </a:pPr>
+            <a:endParaRPr dirty="0">
+              <a:latin typeface="Consolas"/>
+              <a:ea typeface="Consolas"/>
+              <a:cs typeface="Consolas"/>
+              <a:sym typeface="Consolas"/>
+            </a:endParaRPr>
+          </a:p>
+        </p:txBody>
+      </p:sp>
+      <p:sp>
+        <p:nvSpPr>
+          <p:cNvPr id="25" name="Google Shape;121;p16">
+            <a:extLst>
+              <a:ext uri="{FF2B5EF4-FFF2-40B4-BE49-F238E27FC236}">
+                <a16:creationId xmlns:a16="http://schemas.microsoft.com/office/drawing/2014/main" id="{B34C950C-E7E1-AD55-EA22-8FC5D1D0E711}"/>
+              </a:ext>
+            </a:extLst>
+          </p:cNvPr>
+          <p:cNvSpPr/>
+          <p:nvPr/>
+        </p:nvSpPr>
+        <p:spPr>
+          <a:xfrm>
+            <a:off x="15532407" y="8942591"/>
+            <a:ext cx="2410800" cy="1215821"/>
+          </a:xfrm>
+          <a:prstGeom prst="roundRect">
+            <a:avLst>
+              <a:gd name="adj" fmla="val 16667"/>
+            </a:avLst>
+          </a:prstGeom>
+          <a:solidFill>
+            <a:srgbClr val="D0E0E3"/>
+          </a:solidFill>
+          <a:ln w="28575" cap="flat" cmpd="sng">
+            <a:solidFill>
+              <a:srgbClr val="134F5C"/>
+            </a:solidFill>
+            <a:prstDash val="solid"/>
+            <a:round/>
+            <a:headEnd type="none" w="sm" len="sm"/>
+            <a:tailEnd type="none" w="sm" len="sm"/>
+          </a:ln>
+        </p:spPr>
+        <p:txBody>
+          <a:bodyPr spcFirstLastPara="1" wrap="square" lIns="91425" tIns="91425" rIns="91425" bIns="91425" anchor="t" anchorCtr="0">
+            <a:noAutofit/>
+          </a:bodyPr>
+          <a:lstStyle/>
+          <a:p>
+            <a:r>
+              <a:rPr lang="pt-PT" dirty="0">
+                <a:latin typeface="Consolas"/>
+                <a:ea typeface="Consolas"/>
+                <a:cs typeface="Consolas"/>
+                <a:sym typeface="Consolas"/>
+              </a:rPr>
+              <a:t>T2: Implementar a </a:t>
+            </a:r>
+            <a:r>
+              <a:rPr lang="pt-PT" dirty="0" err="1">
+                <a:latin typeface="Consolas"/>
+                <a:ea typeface="Consolas"/>
+                <a:cs typeface="Consolas"/>
+                <a:sym typeface="Consolas"/>
+              </a:rPr>
+              <a:t>Health</a:t>
+            </a:r>
+            <a:r>
+              <a:rPr lang="pt-PT" dirty="0">
+                <a:latin typeface="Consolas"/>
+                <a:ea typeface="Consolas"/>
+                <a:cs typeface="Consolas"/>
+                <a:sym typeface="Consolas"/>
+              </a:rPr>
+              <a:t> Bar de cada </a:t>
+            </a:r>
+            <a:r>
+              <a:rPr lang="pt-PT" dirty="0" err="1">
+                <a:latin typeface="Consolas"/>
+                <a:ea typeface="Consolas"/>
+                <a:cs typeface="Consolas"/>
+                <a:sym typeface="Consolas"/>
+              </a:rPr>
+              <a:t>wave</a:t>
+            </a:r>
+            <a:r>
+              <a:rPr lang="pt-PT" dirty="0">
+                <a:latin typeface="Consolas"/>
+                <a:ea typeface="Consolas"/>
+                <a:cs typeface="Consolas"/>
+                <a:sym typeface="Consolas"/>
+              </a:rPr>
+              <a:t> de inimigos.</a:t>
+            </a:r>
+          </a:p>
+          <a:p>
+            <a:r>
+              <a:rPr lang="en-GB" dirty="0">
+                <a:latin typeface="Consolas"/>
+                <a:ea typeface="Consolas"/>
+                <a:cs typeface="Consolas"/>
+                <a:sym typeface="Consolas"/>
+              </a:rPr>
+              <a:t> </a:t>
+            </a:r>
+            <a:br>
+              <a:rPr lang="en-GB" dirty="0">
+                <a:latin typeface="Consolas"/>
+                <a:ea typeface="Consolas"/>
+                <a:cs typeface="Consolas"/>
+                <a:sym typeface="Consolas"/>
+              </a:rPr>
+            </a:br>
+            <a:br>
+              <a:rPr lang="en-GB" dirty="0">
+                <a:latin typeface="Consolas"/>
+                <a:ea typeface="Consolas"/>
+                <a:cs typeface="Consolas"/>
+                <a:sym typeface="Consolas"/>
+              </a:rPr>
+            </a:br>
+            <a:endParaRPr lang="en-GB" dirty="0">
+              <a:latin typeface="Consolas"/>
+              <a:ea typeface="Consolas"/>
+              <a:cs typeface="Consolas"/>
+              <a:sym typeface="Consolas"/>
+            </a:endParaRPr>
+          </a:p>
+          <a:p>
+            <a:pPr marL="0" lvl="0" indent="0" algn="l" rtl="0">
+              <a:spcBef>
+                <a:spcPts val="0"/>
+              </a:spcBef>
+              <a:spcAft>
+                <a:spcPts val="0"/>
+              </a:spcAft>
+              <a:buNone/>
+            </a:pPr>
+            <a:endParaRPr dirty="0">
+              <a:latin typeface="Consolas"/>
+              <a:ea typeface="Consolas"/>
+              <a:cs typeface="Consolas"/>
+              <a:sym typeface="Consolas"/>
+            </a:endParaRPr>
+          </a:p>
+        </p:txBody>
+      </p:sp>
+    </p:spTree>
+    <p:extLst>
+      <p:ext uri="{BB962C8B-B14F-4D97-AF65-F5344CB8AC3E}">
+        <p14:creationId xmlns:p14="http://schemas.microsoft.com/office/powerpoint/2010/main" val="3611577896"/>
+      </p:ext>
+    </p:extLst>
+  </p:cSld>
+  <p:clrMapOvr>
+    <a:masterClrMapping/>
+  </p:clrMapOvr>
+</p:sld>
+</file>
+
 <file path=ppt/slides/slide3.xml><?xml version="1.0" encoding="utf-8"?>
 <p:sld xmlns:a="http://schemas.openxmlformats.org/drawingml/2006/main" xmlns:r="http://schemas.openxmlformats.org/officeDocument/2006/relationships" xmlns:p="http://schemas.openxmlformats.org/presentationml/2006/main">
   <p:cSld>

--- a/SE202526/Management/Scrum Board.pptx
+++ b/SE202526/Management/Scrum Board.pptx
@@ -5,7 +5,7 @@
     <p:sldMasterId id="2147483659" r:id="rId1"/>
   </p:sldMasterIdLst>
   <p:notesMasterIdLst>
-    <p:notesMasterId r:id="rId26"/>
+    <p:notesMasterId r:id="rId28"/>
   </p:notesMasterIdLst>
   <p:sldIdLst>
     <p:sldId id="256" r:id="rId2"/>
@@ -32,6 +32,8 @@
     <p:sldId id="280" r:id="rId23"/>
     <p:sldId id="281" r:id="rId24"/>
     <p:sldId id="282" r:id="rId25"/>
+    <p:sldId id="283" r:id="rId26"/>
+    <p:sldId id="284" r:id="rId27"/>
   </p:sldIdLst>
   <p:sldSz cx="21599525" cy="10799763"/>
   <p:notesSz cx="6858000" cy="9144000"/>
@@ -2837,6 +2839,260 @@
 </p:notes>
 </file>
 
+<file path=ppt/notesSlides/notesSlide25.xml><?xml version="1.0" encoding="utf-8"?>
+<p:notes xmlns:a="http://schemas.openxmlformats.org/drawingml/2006/main" xmlns:r="http://schemas.openxmlformats.org/officeDocument/2006/relationships" xmlns:p="http://schemas.openxmlformats.org/presentationml/2006/main" showMasterSp="0" showMasterPhAnim="0">
+  <p:cSld>
+    <p:spTree>
+      <p:nvGrpSpPr>
+        <p:cNvPr id="1" name="Shape 217">
+          <a:extLst>
+            <a:ext uri="{FF2B5EF4-FFF2-40B4-BE49-F238E27FC236}">
+              <a16:creationId xmlns:a16="http://schemas.microsoft.com/office/drawing/2014/main" id="{A7C990A4-4BC8-B752-C7CE-7A6FF64E7F16}"/>
+            </a:ext>
+          </a:extLst>
+        </p:cNvPr>
+        <p:cNvGrpSpPr/>
+        <p:nvPr/>
+      </p:nvGrpSpPr>
+      <p:grpSpPr>
+        <a:xfrm>
+          <a:off x="0" y="0"/>
+          <a:ext cx="0" cy="0"/>
+          <a:chOff x="0" y="0"/>
+          <a:chExt cx="0" cy="0"/>
+        </a:xfrm>
+      </p:grpSpPr>
+      <p:sp>
+        <p:nvSpPr>
+          <p:cNvPr id="218" name="Google Shape;218;g3850b307b58_0_258:notes">
+            <a:extLst>
+              <a:ext uri="{FF2B5EF4-FFF2-40B4-BE49-F238E27FC236}">
+                <a16:creationId xmlns:a16="http://schemas.microsoft.com/office/drawing/2014/main" id="{ACA9AAF5-D601-17BD-F402-FBAED6BAC4A3}"/>
+              </a:ext>
+            </a:extLst>
+          </p:cNvPr>
+          <p:cNvSpPr>
+            <a:spLocks noGrp="1" noRot="1" noChangeAspect="1"/>
+          </p:cNvSpPr>
+          <p:nvPr>
+            <p:ph type="sldImg" idx="2"/>
+          </p:nvPr>
+        </p:nvSpPr>
+        <p:spPr>
+          <a:xfrm>
+            <a:off x="0" y="685800"/>
+            <a:ext cx="6858000" cy="3429000"/>
+          </a:xfrm>
+          <a:custGeom>
+            <a:avLst/>
+            <a:gdLst/>
+            <a:ahLst/>
+            <a:cxnLst/>
+            <a:rect l="l" t="t" r="r" b="b"/>
+            <a:pathLst>
+              <a:path w="120000" h="120000" extrusionOk="0">
+                <a:moveTo>
+                  <a:pt x="0" y="0"/>
+                </a:moveTo>
+                <a:lnTo>
+                  <a:pt x="120000" y="0"/>
+                </a:lnTo>
+                <a:lnTo>
+                  <a:pt x="120000" y="120000"/>
+                </a:lnTo>
+                <a:lnTo>
+                  <a:pt x="0" y="120000"/>
+                </a:lnTo>
+                <a:close/>
+              </a:path>
+            </a:pathLst>
+          </a:custGeom>
+        </p:spPr>
+      </p:sp>
+      <p:sp>
+        <p:nvSpPr>
+          <p:cNvPr id="219" name="Google Shape;219;g3850b307b58_0_258:notes">
+            <a:extLst>
+              <a:ext uri="{FF2B5EF4-FFF2-40B4-BE49-F238E27FC236}">
+                <a16:creationId xmlns:a16="http://schemas.microsoft.com/office/drawing/2014/main" id="{1BACFEDD-E386-13B7-A3ED-5DF801ECB07F}"/>
+              </a:ext>
+            </a:extLst>
+          </p:cNvPr>
+          <p:cNvSpPr txBox="1">
+            <a:spLocks noGrp="1"/>
+          </p:cNvSpPr>
+          <p:nvPr>
+            <p:ph type="body" idx="1"/>
+          </p:nvPr>
+        </p:nvSpPr>
+        <p:spPr>
+          <a:xfrm>
+            <a:off x="685800" y="4343400"/>
+            <a:ext cx="5486400" cy="4114800"/>
+          </a:xfrm>
+          <a:prstGeom prst="rect">
+            <a:avLst/>
+          </a:prstGeom>
+        </p:spPr>
+        <p:txBody>
+          <a:bodyPr spcFirstLastPara="1" wrap="square" lIns="91425" tIns="91425" rIns="91425" bIns="91425" anchor="t" anchorCtr="0">
+            <a:noAutofit/>
+          </a:bodyPr>
+          <a:lstStyle/>
+          <a:p>
+            <a:pPr marL="0" lvl="0" indent="0" algn="l" rtl="0">
+              <a:spcBef>
+                <a:spcPts val="0"/>
+              </a:spcBef>
+              <a:spcAft>
+                <a:spcPts val="0"/>
+              </a:spcAft>
+              <a:buNone/>
+            </a:pPr>
+            <a:endParaRPr/>
+          </a:p>
+        </p:txBody>
+      </p:sp>
+    </p:spTree>
+    <p:extLst>
+      <p:ext uri="{BB962C8B-B14F-4D97-AF65-F5344CB8AC3E}">
+        <p14:creationId xmlns:p14="http://schemas.microsoft.com/office/powerpoint/2010/main" val="1026136028"/>
+      </p:ext>
+    </p:extLst>
+  </p:cSld>
+  <p:clrMapOvr>
+    <a:masterClrMapping/>
+  </p:clrMapOvr>
+</p:notes>
+</file>
+
+<file path=ppt/notesSlides/notesSlide26.xml><?xml version="1.0" encoding="utf-8"?>
+<p:notes xmlns:a="http://schemas.openxmlformats.org/drawingml/2006/main" xmlns:r="http://schemas.openxmlformats.org/officeDocument/2006/relationships" xmlns:p="http://schemas.openxmlformats.org/presentationml/2006/main" showMasterSp="0" showMasterPhAnim="0">
+  <p:cSld>
+    <p:spTree>
+      <p:nvGrpSpPr>
+        <p:cNvPr id="1" name="Shape 186">
+          <a:extLst>
+            <a:ext uri="{FF2B5EF4-FFF2-40B4-BE49-F238E27FC236}">
+              <a16:creationId xmlns:a16="http://schemas.microsoft.com/office/drawing/2014/main" id="{3E62D5AC-25CF-CD2A-4080-A2E81C1FEEF7}"/>
+            </a:ext>
+          </a:extLst>
+        </p:cNvPr>
+        <p:cNvGrpSpPr/>
+        <p:nvPr/>
+      </p:nvGrpSpPr>
+      <p:grpSpPr>
+        <a:xfrm>
+          <a:off x="0" y="0"/>
+          <a:ext cx="0" cy="0"/>
+          <a:chOff x="0" y="0"/>
+          <a:chExt cx="0" cy="0"/>
+        </a:xfrm>
+      </p:grpSpPr>
+      <p:sp>
+        <p:nvSpPr>
+          <p:cNvPr id="187" name="Google Shape;187;g3850b307b58_0_218:notes">
+            <a:extLst>
+              <a:ext uri="{FF2B5EF4-FFF2-40B4-BE49-F238E27FC236}">
+                <a16:creationId xmlns:a16="http://schemas.microsoft.com/office/drawing/2014/main" id="{8838AE70-AA20-AF1F-AEC4-91C5C0DC174B}"/>
+              </a:ext>
+            </a:extLst>
+          </p:cNvPr>
+          <p:cNvSpPr>
+            <a:spLocks noGrp="1" noRot="1" noChangeAspect="1"/>
+          </p:cNvSpPr>
+          <p:nvPr>
+            <p:ph type="sldImg" idx="2"/>
+          </p:nvPr>
+        </p:nvSpPr>
+        <p:spPr>
+          <a:xfrm>
+            <a:off x="0" y="685800"/>
+            <a:ext cx="6858000" cy="3429000"/>
+          </a:xfrm>
+          <a:custGeom>
+            <a:avLst/>
+            <a:gdLst/>
+            <a:ahLst/>
+            <a:cxnLst/>
+            <a:rect l="l" t="t" r="r" b="b"/>
+            <a:pathLst>
+              <a:path w="120000" h="120000" extrusionOk="0">
+                <a:moveTo>
+                  <a:pt x="0" y="0"/>
+                </a:moveTo>
+                <a:lnTo>
+                  <a:pt x="120000" y="0"/>
+                </a:lnTo>
+                <a:lnTo>
+                  <a:pt x="120000" y="120000"/>
+                </a:lnTo>
+                <a:lnTo>
+                  <a:pt x="0" y="120000"/>
+                </a:lnTo>
+                <a:close/>
+              </a:path>
+            </a:pathLst>
+          </a:custGeom>
+        </p:spPr>
+      </p:sp>
+      <p:sp>
+        <p:nvSpPr>
+          <p:cNvPr id="188" name="Google Shape;188;g3850b307b58_0_218:notes">
+            <a:extLst>
+              <a:ext uri="{FF2B5EF4-FFF2-40B4-BE49-F238E27FC236}">
+                <a16:creationId xmlns:a16="http://schemas.microsoft.com/office/drawing/2014/main" id="{945DDB21-10D2-9DF2-2D5B-3907145659FB}"/>
+              </a:ext>
+            </a:extLst>
+          </p:cNvPr>
+          <p:cNvSpPr txBox="1">
+            <a:spLocks noGrp="1"/>
+          </p:cNvSpPr>
+          <p:nvPr>
+            <p:ph type="body" idx="1"/>
+          </p:nvPr>
+        </p:nvSpPr>
+        <p:spPr>
+          <a:xfrm>
+            <a:off x="685800" y="4343400"/>
+            <a:ext cx="5486400" cy="4114800"/>
+          </a:xfrm>
+          <a:prstGeom prst="rect">
+            <a:avLst/>
+          </a:prstGeom>
+        </p:spPr>
+        <p:txBody>
+          <a:bodyPr spcFirstLastPara="1" wrap="square" lIns="91425" tIns="91425" rIns="91425" bIns="91425" anchor="t" anchorCtr="0">
+            <a:noAutofit/>
+          </a:bodyPr>
+          <a:lstStyle/>
+          <a:p>
+            <a:pPr marL="0" lvl="0" indent="0" algn="l" rtl="0">
+              <a:spcBef>
+                <a:spcPts val="0"/>
+              </a:spcBef>
+              <a:spcAft>
+                <a:spcPts val="0"/>
+              </a:spcAft>
+              <a:buNone/>
+            </a:pPr>
+            <a:endParaRPr/>
+          </a:p>
+        </p:txBody>
+      </p:sp>
+    </p:spTree>
+    <p:extLst>
+      <p:ext uri="{BB962C8B-B14F-4D97-AF65-F5344CB8AC3E}">
+        <p14:creationId xmlns:p14="http://schemas.microsoft.com/office/powerpoint/2010/main" val="1467835178"/>
+      </p:ext>
+    </p:extLst>
+  </p:cSld>
+  <p:clrMapOvr>
+    <a:masterClrMapping/>
+  </p:clrMapOvr>
+</p:notes>
+</file>
+
 <file path=ppt/notesSlides/notesSlide3.xml><?xml version="1.0" encoding="utf-8"?>
 <p:notes xmlns:a="http://schemas.openxmlformats.org/drawingml/2006/main" xmlns:r="http://schemas.openxmlformats.org/officeDocument/2006/relationships" xmlns:p="http://schemas.openxmlformats.org/presentationml/2006/main" showMasterSp="0" showMasterPhAnim="0">
   <p:cSld>
@@ -4009,7 +4265,7 @@
             </a:pPr>
             <a:fld id="{00000000-1234-1234-1234-123412341234}" type="slidenum">
               <a:rPr lang="en-GB"/>
-              <a:t>‹nº›</a:t>
+              <a:t>‹#›</a:t>
             </a:fld>
             <a:endParaRPr/>
           </a:p>
@@ -4373,7 +4629,7 @@
             </a:pPr>
             <a:fld id="{00000000-1234-1234-1234-123412341234}" type="slidenum">
               <a:rPr lang="en-GB"/>
-              <a:t>‹nº›</a:t>
+              <a:t>‹#›</a:t>
             </a:fld>
             <a:endParaRPr/>
           </a:p>
@@ -4477,7 +4733,7 @@
             </a:pPr>
             <a:fld id="{00000000-1234-1234-1234-123412341234}" type="slidenum">
               <a:rPr lang="en-GB"/>
-              <a:t>‹nº›</a:t>
+              <a:t>‹#›</a:t>
             </a:fld>
             <a:endParaRPr/>
           </a:p>
@@ -4710,7 +4966,7 @@
             </a:pPr>
             <a:fld id="{00000000-1234-1234-1234-123412341234}" type="slidenum">
               <a:rPr lang="en-GB"/>
-              <a:t>‹nº›</a:t>
+              <a:t>‹#›</a:t>
             </a:fld>
             <a:endParaRPr/>
           </a:p>
@@ -5072,7 +5328,7 @@
             </a:pPr>
             <a:fld id="{00000000-1234-1234-1234-123412341234}" type="slidenum">
               <a:rPr lang="en-GB"/>
-              <a:t>‹nº›</a:t>
+              <a:t>‹#›</a:t>
             </a:fld>
             <a:endParaRPr/>
           </a:p>
@@ -5563,7 +5819,7 @@
             </a:pPr>
             <a:fld id="{00000000-1234-1234-1234-123412341234}" type="slidenum">
               <a:rPr lang="en-GB"/>
-              <a:t>‹nº›</a:t>
+              <a:t>‹#›</a:t>
             </a:fld>
             <a:endParaRPr/>
           </a:p>
@@ -5796,7 +6052,7 @@
             </a:pPr>
             <a:fld id="{00000000-1234-1234-1234-123412341234}" type="slidenum">
               <a:rPr lang="en-GB"/>
-              <a:t>‹nº›</a:t>
+              <a:t>‹#›</a:t>
             </a:fld>
             <a:endParaRPr/>
           </a:p>
@@ -6158,7 +6414,7 @@
             </a:pPr>
             <a:fld id="{00000000-1234-1234-1234-123412341234}" type="slidenum">
               <a:rPr lang="en-GB"/>
-              <a:t>‹nº›</a:t>
+              <a:t>‹#›</a:t>
             </a:fld>
             <a:endParaRPr/>
           </a:p>
@@ -6391,7 +6647,7 @@
             </a:pPr>
             <a:fld id="{00000000-1234-1234-1234-123412341234}" type="slidenum">
               <a:rPr lang="en-GB"/>
-              <a:t>‹nº›</a:t>
+              <a:t>‹#›</a:t>
             </a:fld>
             <a:endParaRPr/>
           </a:p>
@@ -6949,7 +7205,7 @@
             </a:pPr>
             <a:fld id="{00000000-1234-1234-1234-123412341234}" type="slidenum">
               <a:rPr lang="en-GB"/>
-              <a:t>‹nº›</a:t>
+              <a:t>‹#›</a:t>
             </a:fld>
             <a:endParaRPr/>
           </a:p>
@@ -7097,7 +7353,7 @@
             </a:pPr>
             <a:fld id="{00000000-1234-1234-1234-123412341234}" type="slidenum">
               <a:rPr lang="en-GB"/>
-              <a:t>‹nº›</a:t>
+              <a:t>‹#›</a:t>
             </a:fld>
             <a:endParaRPr/>
           </a:p>
@@ -7668,7 +7924,7 @@
             </a:pPr>
             <a:fld id="{00000000-1234-1234-1234-123412341234}" type="slidenum">
               <a:rPr lang="en-GB"/>
-              <a:t>‹nº›</a:t>
+              <a:t>‹#›</a:t>
             </a:fld>
             <a:endParaRPr/>
           </a:p>
@@ -37385,6 +37641,2711 @@
 </p:sld>
 </file>
 
+<file path=ppt/slides/slide25.xml><?xml version="1.0" encoding="utf-8"?>
+<p:sld xmlns:a="http://schemas.openxmlformats.org/drawingml/2006/main" xmlns:r="http://schemas.openxmlformats.org/officeDocument/2006/relationships" xmlns:p="http://schemas.openxmlformats.org/presentationml/2006/main">
+  <p:cSld>
+    <p:spTree>
+      <p:nvGrpSpPr>
+        <p:cNvPr id="1" name="Shape 220">
+          <a:extLst>
+            <a:ext uri="{FF2B5EF4-FFF2-40B4-BE49-F238E27FC236}">
+              <a16:creationId xmlns:a16="http://schemas.microsoft.com/office/drawing/2014/main" id="{8367BCF3-4EEE-F954-B31F-231A955F43BC}"/>
+            </a:ext>
+          </a:extLst>
+        </p:cNvPr>
+        <p:cNvGrpSpPr/>
+        <p:nvPr/>
+      </p:nvGrpSpPr>
+      <p:grpSpPr>
+        <a:xfrm>
+          <a:off x="0" y="0"/>
+          <a:ext cx="0" cy="0"/>
+          <a:chOff x="0" y="0"/>
+          <a:chExt cx="0" cy="0"/>
+        </a:xfrm>
+      </p:grpSpPr>
+      <p:pic>
+        <p:nvPicPr>
+          <p:cNvPr id="221" name="Google Shape;221;p20" title="Vmw_I2.png">
+            <a:extLst>
+              <a:ext uri="{FF2B5EF4-FFF2-40B4-BE49-F238E27FC236}">
+                <a16:creationId xmlns:a16="http://schemas.microsoft.com/office/drawing/2014/main" id="{C96BC3E2-3910-46E0-22E5-9966B070CFDA}"/>
+              </a:ext>
+            </a:extLst>
+          </p:cNvPr>
+          <p:cNvPicPr preferRelativeResize="0"/>
+          <p:nvPr/>
+        </p:nvPicPr>
+        <p:blipFill>
+          <a:blip r:embed="rId3">
+            <a:alphaModFix amt="51000"/>
+          </a:blip>
+          <a:stretch>
+            <a:fillRect/>
+          </a:stretch>
+        </p:blipFill>
+        <p:spPr>
+          <a:xfrm>
+            <a:off x="0" y="0"/>
+            <a:ext cx="21600000" cy="10800000"/>
+          </a:xfrm>
+          <a:prstGeom prst="rect">
+            <a:avLst/>
+          </a:prstGeom>
+          <a:noFill/>
+          <a:ln>
+            <a:noFill/>
+          </a:ln>
+        </p:spPr>
+      </p:pic>
+      <p:sp>
+        <p:nvSpPr>
+          <p:cNvPr id="222" name="Google Shape;222;p20">
+            <a:extLst>
+              <a:ext uri="{FF2B5EF4-FFF2-40B4-BE49-F238E27FC236}">
+                <a16:creationId xmlns:a16="http://schemas.microsoft.com/office/drawing/2014/main" id="{A584C17B-83DF-B6AE-9CA8-2F3EF7AEBB32}"/>
+              </a:ext>
+            </a:extLst>
+          </p:cNvPr>
+          <p:cNvSpPr/>
+          <p:nvPr/>
+        </p:nvSpPr>
+        <p:spPr>
+          <a:xfrm>
+            <a:off x="814250" y="3300663"/>
+            <a:ext cx="19957567" cy="4198675"/>
+          </a:xfrm>
+          <a:prstGeom prst="rect">
+            <a:avLst/>
+          </a:prstGeom>
+        </p:spPr>
+        <p:txBody>
+          <a:bodyPr>
+            <a:prstTxWarp prst="textPlain">
+              <a:avLst/>
+            </a:prstTxWarp>
+          </a:bodyPr>
+          <a:lstStyle/>
+          <a:p>
+            <a:pPr lvl="0" algn="ctr"/>
+            <a:r>
+              <a:rPr b="1" i="0" dirty="0">
+                <a:ln w="114300" cap="flat" cmpd="sng">
+                  <a:solidFill>
+                    <a:srgbClr val="434343"/>
+                  </a:solidFill>
+                  <a:prstDash val="solid"/>
+                  <a:round/>
+                  <a:headEnd type="none" w="sm" len="sm"/>
+                  <a:tailEnd type="none" w="sm" len="sm"/>
+                </a:ln>
+                <a:solidFill>
+                  <a:schemeClr val="lt1"/>
+                </a:solidFill>
+                <a:latin typeface="Consolas"/>
+              </a:rPr>
+              <a:t>Sprint </a:t>
+            </a:r>
+            <a:r>
+              <a:rPr lang="pt-PT" b="1" dirty="0">
+                <a:ln w="114300" cap="flat" cmpd="sng">
+                  <a:solidFill>
+                    <a:srgbClr val="434343"/>
+                  </a:solidFill>
+                  <a:prstDash val="solid"/>
+                  <a:round/>
+                  <a:headEnd type="none" w="sm" len="sm"/>
+                  <a:tailEnd type="none" w="sm" len="sm"/>
+                </a:ln>
+                <a:solidFill>
+                  <a:schemeClr val="lt1"/>
+                </a:solidFill>
+                <a:latin typeface="Consolas"/>
+              </a:rPr>
+              <a:t>7</a:t>
+            </a:r>
+            <a:endParaRPr b="1" i="0" dirty="0">
+              <a:ln w="114300" cap="flat" cmpd="sng">
+                <a:solidFill>
+                  <a:srgbClr val="434343"/>
+                </a:solidFill>
+                <a:prstDash val="solid"/>
+                <a:round/>
+                <a:headEnd type="none" w="sm" len="sm"/>
+                <a:tailEnd type="none" w="sm" len="sm"/>
+              </a:ln>
+              <a:solidFill>
+                <a:schemeClr val="lt1"/>
+              </a:solidFill>
+              <a:latin typeface="Consolas"/>
+            </a:endParaRPr>
+          </a:p>
+        </p:txBody>
+      </p:sp>
+    </p:spTree>
+    <p:extLst>
+      <p:ext uri="{BB962C8B-B14F-4D97-AF65-F5344CB8AC3E}">
+        <p14:creationId xmlns:p14="http://schemas.microsoft.com/office/powerpoint/2010/main" val="3284079867"/>
+      </p:ext>
+    </p:extLst>
+  </p:cSld>
+  <p:clrMapOvr>
+    <a:masterClrMapping/>
+  </p:clrMapOvr>
+</p:sld>
+</file>
+
+<file path=ppt/slides/slide26.xml><?xml version="1.0" encoding="utf-8"?>
+<p:sld xmlns:a="http://schemas.openxmlformats.org/drawingml/2006/main" xmlns:r="http://schemas.openxmlformats.org/officeDocument/2006/relationships" xmlns:p="http://schemas.openxmlformats.org/presentationml/2006/main">
+  <p:cSld>
+    <p:spTree>
+      <p:nvGrpSpPr>
+        <p:cNvPr id="1" name="Shape 189">
+          <a:extLst>
+            <a:ext uri="{FF2B5EF4-FFF2-40B4-BE49-F238E27FC236}">
+              <a16:creationId xmlns:a16="http://schemas.microsoft.com/office/drawing/2014/main" id="{7C1B8A25-C821-AD96-D37C-2201BBCEE74D}"/>
+            </a:ext>
+          </a:extLst>
+        </p:cNvPr>
+        <p:cNvGrpSpPr/>
+        <p:nvPr/>
+      </p:nvGrpSpPr>
+      <p:grpSpPr>
+        <a:xfrm>
+          <a:off x="0" y="0"/>
+          <a:ext cx="0" cy="0"/>
+          <a:chOff x="0" y="0"/>
+          <a:chExt cx="0" cy="0"/>
+        </a:xfrm>
+      </p:grpSpPr>
+      <p:cxnSp>
+        <p:nvCxnSpPr>
+          <p:cNvPr id="190" name="Google Shape;190;p19">
+            <a:extLst>
+              <a:ext uri="{FF2B5EF4-FFF2-40B4-BE49-F238E27FC236}">
+                <a16:creationId xmlns:a16="http://schemas.microsoft.com/office/drawing/2014/main" id="{FE9FC7AE-4350-FFDD-A663-9151401CEF43}"/>
+              </a:ext>
+            </a:extLst>
+          </p:cNvPr>
+          <p:cNvCxnSpPr/>
+          <p:nvPr/>
+        </p:nvCxnSpPr>
+        <p:spPr>
+          <a:xfrm>
+            <a:off x="5944724" y="-31500"/>
+            <a:ext cx="0" cy="10857000"/>
+          </a:xfrm>
+          <a:prstGeom prst="straightConnector1">
+            <a:avLst/>
+          </a:prstGeom>
+          <a:noFill/>
+          <a:ln w="38100" cap="flat" cmpd="sng">
+            <a:solidFill>
+              <a:srgbClr val="5B0F00"/>
+            </a:solidFill>
+            <a:prstDash val="solid"/>
+            <a:round/>
+            <a:headEnd type="none" w="med" len="med"/>
+            <a:tailEnd type="none" w="med" len="med"/>
+          </a:ln>
+        </p:spPr>
+      </p:cxnSp>
+      <p:sp>
+        <p:nvSpPr>
+          <p:cNvPr id="191" name="Google Shape;191;p19">
+            <a:extLst>
+              <a:ext uri="{FF2B5EF4-FFF2-40B4-BE49-F238E27FC236}">
+                <a16:creationId xmlns:a16="http://schemas.microsoft.com/office/drawing/2014/main" id="{B8554E17-F288-2485-C4F3-1C73E573BEB6}"/>
+              </a:ext>
+            </a:extLst>
+          </p:cNvPr>
+          <p:cNvSpPr/>
+          <p:nvPr/>
+        </p:nvSpPr>
+        <p:spPr>
+          <a:xfrm>
+            <a:off x="3197186" y="84312"/>
+            <a:ext cx="2410800" cy="480900"/>
+          </a:xfrm>
+          <a:prstGeom prst="roundRect">
+            <a:avLst>
+              <a:gd name="adj" fmla="val 16667"/>
+            </a:avLst>
+          </a:prstGeom>
+          <a:solidFill>
+            <a:srgbClr val="F9CB9C"/>
+          </a:solidFill>
+          <a:ln w="28575" cap="flat" cmpd="sng">
+            <a:solidFill>
+              <a:srgbClr val="B45F06"/>
+            </a:solidFill>
+            <a:prstDash val="solid"/>
+            <a:round/>
+            <a:headEnd type="none" w="sm" len="sm"/>
+            <a:tailEnd type="none" w="sm" len="sm"/>
+          </a:ln>
+        </p:spPr>
+        <p:txBody>
+          <a:bodyPr spcFirstLastPara="1" wrap="square" lIns="91425" tIns="91425" rIns="91425" bIns="91425" anchor="ctr" anchorCtr="0">
+            <a:noAutofit/>
+          </a:bodyPr>
+          <a:lstStyle/>
+          <a:p>
+            <a:pPr marL="0" lvl="0" indent="0" algn="ctr" rtl="0">
+              <a:spcBef>
+                <a:spcPts val="0"/>
+              </a:spcBef>
+              <a:spcAft>
+                <a:spcPts val="0"/>
+              </a:spcAft>
+              <a:buNone/>
+            </a:pPr>
+            <a:r>
+              <a:rPr lang="en-GB" sz="1800" b="1">
+                <a:latin typeface="Consolas"/>
+                <a:ea typeface="Consolas"/>
+                <a:cs typeface="Consolas"/>
+                <a:sym typeface="Consolas"/>
+              </a:rPr>
+              <a:t>Student ID</a:t>
+            </a:r>
+            <a:endParaRPr sz="1800" b="1">
+              <a:latin typeface="Consolas"/>
+              <a:ea typeface="Consolas"/>
+              <a:cs typeface="Consolas"/>
+              <a:sym typeface="Consolas"/>
+            </a:endParaRPr>
+          </a:p>
+        </p:txBody>
+      </p:sp>
+      <p:sp>
+        <p:nvSpPr>
+          <p:cNvPr id="192" name="Google Shape;192;p19">
+            <a:extLst>
+              <a:ext uri="{FF2B5EF4-FFF2-40B4-BE49-F238E27FC236}">
+                <a16:creationId xmlns:a16="http://schemas.microsoft.com/office/drawing/2014/main" id="{EEE63DA7-371E-31F8-4802-56192351BEDD}"/>
+              </a:ext>
+            </a:extLst>
+          </p:cNvPr>
+          <p:cNvSpPr/>
+          <p:nvPr/>
+        </p:nvSpPr>
+        <p:spPr>
+          <a:xfrm>
+            <a:off x="6281636" y="84312"/>
+            <a:ext cx="2410800" cy="480900"/>
+          </a:xfrm>
+          <a:prstGeom prst="roundRect">
+            <a:avLst>
+              <a:gd name="adj" fmla="val 16667"/>
+            </a:avLst>
+          </a:prstGeom>
+          <a:solidFill>
+            <a:srgbClr val="F9CB9C"/>
+          </a:solidFill>
+          <a:ln w="28575" cap="flat" cmpd="sng">
+            <a:solidFill>
+              <a:srgbClr val="B45F06"/>
+            </a:solidFill>
+            <a:prstDash val="solid"/>
+            <a:round/>
+            <a:headEnd type="none" w="sm" len="sm"/>
+            <a:tailEnd type="none" w="sm" len="sm"/>
+          </a:ln>
+        </p:spPr>
+        <p:txBody>
+          <a:bodyPr spcFirstLastPara="1" wrap="square" lIns="91425" tIns="91425" rIns="91425" bIns="91425" anchor="ctr" anchorCtr="0">
+            <a:noAutofit/>
+          </a:bodyPr>
+          <a:lstStyle/>
+          <a:p>
+            <a:pPr marL="0" lvl="0" indent="0" algn="ctr" rtl="0">
+              <a:spcBef>
+                <a:spcPts val="0"/>
+              </a:spcBef>
+              <a:spcAft>
+                <a:spcPts val="0"/>
+              </a:spcAft>
+              <a:buNone/>
+            </a:pPr>
+            <a:r>
+              <a:rPr lang="en-GB" sz="1800" b="1">
+                <a:latin typeface="Consolas"/>
+                <a:ea typeface="Consolas"/>
+                <a:cs typeface="Consolas"/>
+                <a:sym typeface="Consolas"/>
+              </a:rPr>
+              <a:t>Story</a:t>
+            </a:r>
+            <a:endParaRPr sz="1800" b="1">
+              <a:latin typeface="Consolas"/>
+              <a:ea typeface="Consolas"/>
+              <a:cs typeface="Consolas"/>
+              <a:sym typeface="Consolas"/>
+            </a:endParaRPr>
+          </a:p>
+        </p:txBody>
+      </p:sp>
+      <p:sp>
+        <p:nvSpPr>
+          <p:cNvPr id="193" name="Google Shape;193;p19">
+            <a:extLst>
+              <a:ext uri="{FF2B5EF4-FFF2-40B4-BE49-F238E27FC236}">
+                <a16:creationId xmlns:a16="http://schemas.microsoft.com/office/drawing/2014/main" id="{C6AD373A-D0E8-6C85-95B8-61EE6C466822}"/>
+              </a:ext>
+            </a:extLst>
+          </p:cNvPr>
+          <p:cNvSpPr/>
+          <p:nvPr/>
+        </p:nvSpPr>
+        <p:spPr>
+          <a:xfrm>
+            <a:off x="9366071" y="84312"/>
+            <a:ext cx="2410800" cy="480900"/>
+          </a:xfrm>
+          <a:prstGeom prst="roundRect">
+            <a:avLst>
+              <a:gd name="adj" fmla="val 16667"/>
+            </a:avLst>
+          </a:prstGeom>
+          <a:solidFill>
+            <a:srgbClr val="F9CB9C"/>
+          </a:solidFill>
+          <a:ln w="28575" cap="flat" cmpd="sng">
+            <a:solidFill>
+              <a:srgbClr val="B45F06"/>
+            </a:solidFill>
+            <a:prstDash val="solid"/>
+            <a:round/>
+            <a:headEnd type="none" w="sm" len="sm"/>
+            <a:tailEnd type="none" w="sm" len="sm"/>
+          </a:ln>
+        </p:spPr>
+        <p:txBody>
+          <a:bodyPr spcFirstLastPara="1" wrap="square" lIns="91425" tIns="91425" rIns="91425" bIns="91425" anchor="ctr" anchorCtr="0">
+            <a:noAutofit/>
+          </a:bodyPr>
+          <a:lstStyle/>
+          <a:p>
+            <a:pPr marL="0" lvl="0" indent="0" algn="ctr" rtl="0">
+              <a:spcBef>
+                <a:spcPts val="0"/>
+              </a:spcBef>
+              <a:spcAft>
+                <a:spcPts val="0"/>
+              </a:spcAft>
+              <a:buNone/>
+            </a:pPr>
+            <a:r>
+              <a:rPr lang="en-GB" sz="1800" b="1">
+                <a:latin typeface="Consolas"/>
+                <a:ea typeface="Consolas"/>
+                <a:cs typeface="Consolas"/>
+                <a:sym typeface="Consolas"/>
+              </a:rPr>
+              <a:t>To Do</a:t>
+            </a:r>
+            <a:endParaRPr sz="1800" b="1">
+              <a:latin typeface="Consolas"/>
+              <a:ea typeface="Consolas"/>
+              <a:cs typeface="Consolas"/>
+              <a:sym typeface="Consolas"/>
+            </a:endParaRPr>
+          </a:p>
+        </p:txBody>
+      </p:sp>
+      <p:sp>
+        <p:nvSpPr>
+          <p:cNvPr id="194" name="Google Shape;194;p19">
+            <a:extLst>
+              <a:ext uri="{FF2B5EF4-FFF2-40B4-BE49-F238E27FC236}">
+                <a16:creationId xmlns:a16="http://schemas.microsoft.com/office/drawing/2014/main" id="{0FB97E51-61C7-2F8A-1B09-8B30499A060B}"/>
+              </a:ext>
+            </a:extLst>
+          </p:cNvPr>
+          <p:cNvSpPr/>
+          <p:nvPr/>
+        </p:nvSpPr>
+        <p:spPr>
+          <a:xfrm>
+            <a:off x="12395940" y="84312"/>
+            <a:ext cx="2410800" cy="480900"/>
+          </a:xfrm>
+          <a:prstGeom prst="roundRect">
+            <a:avLst>
+              <a:gd name="adj" fmla="val 16667"/>
+            </a:avLst>
+          </a:prstGeom>
+          <a:solidFill>
+            <a:srgbClr val="F9CB9C"/>
+          </a:solidFill>
+          <a:ln w="28575" cap="flat" cmpd="sng">
+            <a:solidFill>
+              <a:srgbClr val="B45F06"/>
+            </a:solidFill>
+            <a:prstDash val="solid"/>
+            <a:round/>
+            <a:headEnd type="none" w="sm" len="sm"/>
+            <a:tailEnd type="none" w="sm" len="sm"/>
+          </a:ln>
+        </p:spPr>
+        <p:txBody>
+          <a:bodyPr spcFirstLastPara="1" wrap="square" lIns="91425" tIns="91425" rIns="91425" bIns="91425" anchor="ctr" anchorCtr="0">
+            <a:noAutofit/>
+          </a:bodyPr>
+          <a:lstStyle/>
+          <a:p>
+            <a:pPr marL="0" lvl="0" indent="0" algn="ctr" rtl="0">
+              <a:spcBef>
+                <a:spcPts val="0"/>
+              </a:spcBef>
+              <a:spcAft>
+                <a:spcPts val="0"/>
+              </a:spcAft>
+              <a:buNone/>
+            </a:pPr>
+            <a:r>
+              <a:rPr lang="en-GB" sz="1800" b="1">
+                <a:latin typeface="Consolas"/>
+                <a:ea typeface="Consolas"/>
+                <a:cs typeface="Consolas"/>
+                <a:sym typeface="Consolas"/>
+              </a:rPr>
+              <a:t>Doing</a:t>
+            </a:r>
+            <a:endParaRPr sz="1800" b="1">
+              <a:latin typeface="Consolas"/>
+              <a:ea typeface="Consolas"/>
+              <a:cs typeface="Consolas"/>
+              <a:sym typeface="Consolas"/>
+            </a:endParaRPr>
+          </a:p>
+        </p:txBody>
+      </p:sp>
+      <p:sp>
+        <p:nvSpPr>
+          <p:cNvPr id="195" name="Google Shape;195;p19">
+            <a:extLst>
+              <a:ext uri="{FF2B5EF4-FFF2-40B4-BE49-F238E27FC236}">
+                <a16:creationId xmlns:a16="http://schemas.microsoft.com/office/drawing/2014/main" id="{F024E59C-02FE-6BA9-EF4F-6E127DF6FB26}"/>
+              </a:ext>
+            </a:extLst>
+          </p:cNvPr>
+          <p:cNvSpPr/>
+          <p:nvPr/>
+        </p:nvSpPr>
+        <p:spPr>
+          <a:xfrm>
+            <a:off x="15532407" y="84312"/>
+            <a:ext cx="2410800" cy="480900"/>
+          </a:xfrm>
+          <a:prstGeom prst="roundRect">
+            <a:avLst>
+              <a:gd name="adj" fmla="val 16667"/>
+            </a:avLst>
+          </a:prstGeom>
+          <a:solidFill>
+            <a:srgbClr val="F9CB9C"/>
+          </a:solidFill>
+          <a:ln w="28575" cap="flat" cmpd="sng">
+            <a:solidFill>
+              <a:srgbClr val="B45F06"/>
+            </a:solidFill>
+            <a:prstDash val="solid"/>
+            <a:round/>
+            <a:headEnd type="none" w="sm" len="sm"/>
+            <a:tailEnd type="none" w="sm" len="sm"/>
+          </a:ln>
+        </p:spPr>
+        <p:txBody>
+          <a:bodyPr spcFirstLastPara="1" wrap="square" lIns="91425" tIns="91425" rIns="91425" bIns="91425" anchor="ctr" anchorCtr="0">
+            <a:noAutofit/>
+          </a:bodyPr>
+          <a:lstStyle/>
+          <a:p>
+            <a:pPr marL="0" lvl="0" indent="0" algn="ctr" rtl="0">
+              <a:spcBef>
+                <a:spcPts val="0"/>
+              </a:spcBef>
+              <a:spcAft>
+                <a:spcPts val="0"/>
+              </a:spcAft>
+              <a:buNone/>
+            </a:pPr>
+            <a:r>
+              <a:rPr lang="en-GB" sz="1800" b="1">
+                <a:latin typeface="Consolas"/>
+                <a:ea typeface="Consolas"/>
+                <a:cs typeface="Consolas"/>
+                <a:sym typeface="Consolas"/>
+              </a:rPr>
+              <a:t>Review</a:t>
+            </a:r>
+            <a:endParaRPr sz="1800" b="1">
+              <a:latin typeface="Consolas"/>
+              <a:ea typeface="Consolas"/>
+              <a:cs typeface="Consolas"/>
+              <a:sym typeface="Consolas"/>
+            </a:endParaRPr>
+          </a:p>
+        </p:txBody>
+      </p:sp>
+      <p:sp>
+        <p:nvSpPr>
+          <p:cNvPr id="196" name="Google Shape;196;p19">
+            <a:extLst>
+              <a:ext uri="{FF2B5EF4-FFF2-40B4-BE49-F238E27FC236}">
+                <a16:creationId xmlns:a16="http://schemas.microsoft.com/office/drawing/2014/main" id="{96EA5CF9-C618-437F-5A70-08B7FB006172}"/>
+              </a:ext>
+            </a:extLst>
+          </p:cNvPr>
+          <p:cNvSpPr/>
+          <p:nvPr/>
+        </p:nvSpPr>
+        <p:spPr>
+          <a:xfrm>
+            <a:off x="18668888" y="84312"/>
+            <a:ext cx="2410800" cy="480900"/>
+          </a:xfrm>
+          <a:prstGeom prst="roundRect">
+            <a:avLst>
+              <a:gd name="adj" fmla="val 16667"/>
+            </a:avLst>
+          </a:prstGeom>
+          <a:solidFill>
+            <a:srgbClr val="F9CB9C"/>
+          </a:solidFill>
+          <a:ln w="28575" cap="flat" cmpd="sng">
+            <a:solidFill>
+              <a:srgbClr val="B45F06"/>
+            </a:solidFill>
+            <a:prstDash val="solid"/>
+            <a:round/>
+            <a:headEnd type="none" w="sm" len="sm"/>
+            <a:tailEnd type="none" w="sm" len="sm"/>
+          </a:ln>
+        </p:spPr>
+        <p:txBody>
+          <a:bodyPr spcFirstLastPara="1" wrap="square" lIns="91425" tIns="91425" rIns="91425" bIns="91425" anchor="ctr" anchorCtr="0">
+            <a:noAutofit/>
+          </a:bodyPr>
+          <a:lstStyle/>
+          <a:p>
+            <a:pPr marL="0" lvl="0" indent="0" algn="ctr" rtl="0">
+              <a:spcBef>
+                <a:spcPts val="0"/>
+              </a:spcBef>
+              <a:spcAft>
+                <a:spcPts val="0"/>
+              </a:spcAft>
+              <a:buNone/>
+            </a:pPr>
+            <a:r>
+              <a:rPr lang="en-GB" sz="1800" b="1">
+                <a:latin typeface="Consolas"/>
+                <a:ea typeface="Consolas"/>
+                <a:cs typeface="Consolas"/>
+                <a:sym typeface="Consolas"/>
+              </a:rPr>
+              <a:t>Done</a:t>
+            </a:r>
+            <a:endParaRPr sz="1800" b="1">
+              <a:latin typeface="Consolas"/>
+              <a:ea typeface="Consolas"/>
+              <a:cs typeface="Consolas"/>
+              <a:sym typeface="Consolas"/>
+            </a:endParaRPr>
+          </a:p>
+        </p:txBody>
+      </p:sp>
+      <p:sp>
+        <p:nvSpPr>
+          <p:cNvPr id="197" name="Google Shape;197;p19">
+            <a:extLst>
+              <a:ext uri="{FF2B5EF4-FFF2-40B4-BE49-F238E27FC236}">
+                <a16:creationId xmlns:a16="http://schemas.microsoft.com/office/drawing/2014/main" id="{09F45951-51C3-6918-0A63-F119FAB29588}"/>
+              </a:ext>
+            </a:extLst>
+          </p:cNvPr>
+          <p:cNvSpPr/>
+          <p:nvPr/>
+        </p:nvSpPr>
+        <p:spPr>
+          <a:xfrm>
+            <a:off x="167288" y="84312"/>
+            <a:ext cx="2410800" cy="480900"/>
+          </a:xfrm>
+          <a:prstGeom prst="roundRect">
+            <a:avLst>
+              <a:gd name="adj" fmla="val 16667"/>
+            </a:avLst>
+          </a:prstGeom>
+          <a:solidFill>
+            <a:srgbClr val="F9CB9C"/>
+          </a:solidFill>
+          <a:ln w="28575" cap="flat" cmpd="sng">
+            <a:solidFill>
+              <a:srgbClr val="B45F06"/>
+            </a:solidFill>
+            <a:prstDash val="solid"/>
+            <a:round/>
+            <a:headEnd type="none" w="sm" len="sm"/>
+            <a:tailEnd type="none" w="sm" len="sm"/>
+          </a:ln>
+        </p:spPr>
+        <p:txBody>
+          <a:bodyPr spcFirstLastPara="1" wrap="square" lIns="91425" tIns="91425" rIns="91425" bIns="91425" anchor="ctr" anchorCtr="0">
+            <a:noAutofit/>
+          </a:bodyPr>
+          <a:lstStyle/>
+          <a:p>
+            <a:pPr marL="0" lvl="0" indent="0" algn="ctr" rtl="0">
+              <a:spcBef>
+                <a:spcPts val="0"/>
+              </a:spcBef>
+              <a:spcAft>
+                <a:spcPts val="0"/>
+              </a:spcAft>
+              <a:buNone/>
+            </a:pPr>
+            <a:r>
+              <a:rPr lang="en-GB" sz="1800" b="1">
+                <a:latin typeface="Consolas"/>
+                <a:ea typeface="Consolas"/>
+                <a:cs typeface="Consolas"/>
+                <a:sym typeface="Consolas"/>
+              </a:rPr>
+              <a:t>Backlog</a:t>
+            </a:r>
+            <a:endParaRPr sz="1800" b="1">
+              <a:latin typeface="Consolas"/>
+              <a:ea typeface="Consolas"/>
+              <a:cs typeface="Consolas"/>
+              <a:sym typeface="Consolas"/>
+            </a:endParaRPr>
+          </a:p>
+        </p:txBody>
+      </p:sp>
+      <p:cxnSp>
+        <p:nvCxnSpPr>
+          <p:cNvPr id="204" name="Google Shape;204;p19">
+            <a:extLst>
+              <a:ext uri="{FF2B5EF4-FFF2-40B4-BE49-F238E27FC236}">
+                <a16:creationId xmlns:a16="http://schemas.microsoft.com/office/drawing/2014/main" id="{AAB4011C-C097-FECA-EE7E-BBCADB77304A}"/>
+              </a:ext>
+            </a:extLst>
+          </p:cNvPr>
+          <p:cNvCxnSpPr/>
+          <p:nvPr/>
+        </p:nvCxnSpPr>
+        <p:spPr>
+          <a:xfrm>
+            <a:off x="5607986" y="1626038"/>
+            <a:ext cx="16042200" cy="0"/>
+          </a:xfrm>
+          <a:prstGeom prst="straightConnector1">
+            <a:avLst/>
+          </a:prstGeom>
+          <a:noFill/>
+          <a:ln w="28575" cap="flat" cmpd="sng">
+            <a:solidFill>
+              <a:srgbClr val="999999"/>
+            </a:solidFill>
+            <a:prstDash val="dash"/>
+            <a:round/>
+            <a:headEnd type="none" w="med" len="med"/>
+            <a:tailEnd type="none" w="med" len="med"/>
+          </a:ln>
+        </p:spPr>
+      </p:cxnSp>
+      <p:cxnSp>
+        <p:nvCxnSpPr>
+          <p:cNvPr id="205" name="Google Shape;205;p19">
+            <a:extLst>
+              <a:ext uri="{FF2B5EF4-FFF2-40B4-BE49-F238E27FC236}">
+                <a16:creationId xmlns:a16="http://schemas.microsoft.com/office/drawing/2014/main" id="{45008102-40A6-D1DF-96BD-C4F3480FED5D}"/>
+              </a:ext>
+            </a:extLst>
+          </p:cNvPr>
+          <p:cNvCxnSpPr/>
+          <p:nvPr/>
+        </p:nvCxnSpPr>
+        <p:spPr>
+          <a:xfrm>
+            <a:off x="5607986" y="3203476"/>
+            <a:ext cx="16042200" cy="0"/>
+          </a:xfrm>
+          <a:prstGeom prst="straightConnector1">
+            <a:avLst/>
+          </a:prstGeom>
+          <a:noFill/>
+          <a:ln w="28575" cap="flat" cmpd="sng">
+            <a:solidFill>
+              <a:srgbClr val="999999"/>
+            </a:solidFill>
+            <a:prstDash val="dash"/>
+            <a:round/>
+            <a:headEnd type="none" w="med" len="med"/>
+            <a:tailEnd type="none" w="med" len="med"/>
+          </a:ln>
+        </p:spPr>
+      </p:cxnSp>
+      <p:cxnSp>
+        <p:nvCxnSpPr>
+          <p:cNvPr id="206" name="Google Shape;206;p19">
+            <a:extLst>
+              <a:ext uri="{FF2B5EF4-FFF2-40B4-BE49-F238E27FC236}">
+                <a16:creationId xmlns:a16="http://schemas.microsoft.com/office/drawing/2014/main" id="{D957ABBE-AA3F-70B1-E50E-8F3611AA10B2}"/>
+              </a:ext>
+            </a:extLst>
+          </p:cNvPr>
+          <p:cNvCxnSpPr/>
+          <p:nvPr/>
+        </p:nvCxnSpPr>
+        <p:spPr>
+          <a:xfrm>
+            <a:off x="5607986" y="4777838"/>
+            <a:ext cx="16042200" cy="0"/>
+          </a:xfrm>
+          <a:prstGeom prst="straightConnector1">
+            <a:avLst/>
+          </a:prstGeom>
+          <a:noFill/>
+          <a:ln w="28575" cap="flat" cmpd="sng">
+            <a:solidFill>
+              <a:srgbClr val="999999"/>
+            </a:solidFill>
+            <a:prstDash val="dash"/>
+            <a:round/>
+            <a:headEnd type="none" w="med" len="med"/>
+            <a:tailEnd type="none" w="med" len="med"/>
+          </a:ln>
+        </p:spPr>
+      </p:cxnSp>
+      <p:cxnSp>
+        <p:nvCxnSpPr>
+          <p:cNvPr id="207" name="Google Shape;207;p19">
+            <a:extLst>
+              <a:ext uri="{FF2B5EF4-FFF2-40B4-BE49-F238E27FC236}">
+                <a16:creationId xmlns:a16="http://schemas.microsoft.com/office/drawing/2014/main" id="{1EAFF5A6-D492-1049-DE1E-BD06B51C2E93}"/>
+              </a:ext>
+            </a:extLst>
+          </p:cNvPr>
+          <p:cNvCxnSpPr/>
+          <p:nvPr/>
+        </p:nvCxnSpPr>
+        <p:spPr>
+          <a:xfrm>
+            <a:off x="5607986" y="6353738"/>
+            <a:ext cx="16042200" cy="0"/>
+          </a:xfrm>
+          <a:prstGeom prst="straightConnector1">
+            <a:avLst/>
+          </a:prstGeom>
+          <a:noFill/>
+          <a:ln w="28575" cap="flat" cmpd="sng">
+            <a:solidFill>
+              <a:srgbClr val="999999"/>
+            </a:solidFill>
+            <a:prstDash val="dash"/>
+            <a:round/>
+            <a:headEnd type="none" w="med" len="med"/>
+            <a:tailEnd type="none" w="med" len="med"/>
+          </a:ln>
+        </p:spPr>
+      </p:cxnSp>
+      <p:cxnSp>
+        <p:nvCxnSpPr>
+          <p:cNvPr id="208" name="Google Shape;208;p19">
+            <a:extLst>
+              <a:ext uri="{FF2B5EF4-FFF2-40B4-BE49-F238E27FC236}">
+                <a16:creationId xmlns:a16="http://schemas.microsoft.com/office/drawing/2014/main" id="{74EBAD19-4E4C-FA6C-AE9A-539B811A77A7}"/>
+              </a:ext>
+            </a:extLst>
+          </p:cNvPr>
+          <p:cNvCxnSpPr/>
+          <p:nvPr/>
+        </p:nvCxnSpPr>
+        <p:spPr>
+          <a:xfrm>
+            <a:off x="5607986" y="7929638"/>
+            <a:ext cx="16042200" cy="0"/>
+          </a:xfrm>
+          <a:prstGeom prst="straightConnector1">
+            <a:avLst/>
+          </a:prstGeom>
+          <a:noFill/>
+          <a:ln w="28575" cap="flat" cmpd="sng">
+            <a:solidFill>
+              <a:srgbClr val="999999"/>
+            </a:solidFill>
+            <a:prstDash val="dash"/>
+            <a:round/>
+            <a:headEnd type="none" w="med" len="med"/>
+            <a:tailEnd type="none" w="med" len="med"/>
+          </a:ln>
+        </p:spPr>
+      </p:cxnSp>
+      <p:cxnSp>
+        <p:nvCxnSpPr>
+          <p:cNvPr id="209" name="Google Shape;209;p19">
+            <a:extLst>
+              <a:ext uri="{FF2B5EF4-FFF2-40B4-BE49-F238E27FC236}">
+                <a16:creationId xmlns:a16="http://schemas.microsoft.com/office/drawing/2014/main" id="{A47C608B-763E-4E56-53CD-7DC9E35FB246}"/>
+              </a:ext>
+            </a:extLst>
+          </p:cNvPr>
+          <p:cNvCxnSpPr/>
+          <p:nvPr/>
+        </p:nvCxnSpPr>
+        <p:spPr>
+          <a:xfrm>
+            <a:off x="5607986" y="9505538"/>
+            <a:ext cx="16042200" cy="0"/>
+          </a:xfrm>
+          <a:prstGeom prst="straightConnector1">
+            <a:avLst/>
+          </a:prstGeom>
+          <a:noFill/>
+          <a:ln w="28575" cap="flat" cmpd="sng">
+            <a:solidFill>
+              <a:srgbClr val="999999"/>
+            </a:solidFill>
+            <a:prstDash val="dash"/>
+            <a:round/>
+            <a:headEnd type="none" w="med" len="med"/>
+            <a:tailEnd type="none" w="med" len="med"/>
+          </a:ln>
+        </p:spPr>
+      </p:cxnSp>
+      <p:cxnSp>
+        <p:nvCxnSpPr>
+          <p:cNvPr id="215" name="Google Shape;215;p19">
+            <a:extLst>
+              <a:ext uri="{FF2B5EF4-FFF2-40B4-BE49-F238E27FC236}">
+                <a16:creationId xmlns:a16="http://schemas.microsoft.com/office/drawing/2014/main" id="{3F5BE43E-E3B7-487C-50CF-56D0A99A16E2}"/>
+              </a:ext>
+            </a:extLst>
+          </p:cNvPr>
+          <p:cNvCxnSpPr/>
+          <p:nvPr/>
+        </p:nvCxnSpPr>
+        <p:spPr>
+          <a:xfrm>
+            <a:off x="2874374" y="-28500"/>
+            <a:ext cx="0" cy="10857000"/>
+          </a:xfrm>
+          <a:prstGeom prst="straightConnector1">
+            <a:avLst/>
+          </a:prstGeom>
+          <a:noFill/>
+          <a:ln w="38100" cap="flat" cmpd="sng">
+            <a:solidFill>
+              <a:srgbClr val="5B0F00"/>
+            </a:solidFill>
+            <a:prstDash val="solid"/>
+            <a:round/>
+            <a:headEnd type="none" w="med" len="med"/>
+            <a:tailEnd type="none" w="med" len="med"/>
+          </a:ln>
+        </p:spPr>
+      </p:cxnSp>
+      <p:sp>
+        <p:nvSpPr>
+          <p:cNvPr id="2" name="Google Shape;74;p15">
+            <a:extLst>
+              <a:ext uri="{FF2B5EF4-FFF2-40B4-BE49-F238E27FC236}">
+                <a16:creationId xmlns:a16="http://schemas.microsoft.com/office/drawing/2014/main" id="{AE969579-889B-4F34-6B53-3B1A2E0FC744}"/>
+              </a:ext>
+            </a:extLst>
+          </p:cNvPr>
+          <p:cNvSpPr/>
+          <p:nvPr/>
+        </p:nvSpPr>
+        <p:spPr>
+          <a:xfrm>
+            <a:off x="3197186" y="1385588"/>
+            <a:ext cx="2410800" cy="480900"/>
+          </a:xfrm>
+          <a:prstGeom prst="roundRect">
+            <a:avLst>
+              <a:gd name="adj" fmla="val 16667"/>
+            </a:avLst>
+          </a:prstGeom>
+          <a:solidFill>
+            <a:srgbClr val="E6B8AF"/>
+          </a:solidFill>
+          <a:ln w="28575" cap="flat" cmpd="sng">
+            <a:solidFill>
+              <a:srgbClr val="5B0F00"/>
+            </a:solidFill>
+            <a:prstDash val="solid"/>
+            <a:round/>
+            <a:headEnd type="none" w="sm" len="sm"/>
+            <a:tailEnd type="none" w="sm" len="sm"/>
+          </a:ln>
+        </p:spPr>
+        <p:txBody>
+          <a:bodyPr spcFirstLastPara="1" wrap="square" lIns="91425" tIns="91425" rIns="91425" bIns="91425" anchor="ctr" anchorCtr="0">
+            <a:noAutofit/>
+          </a:bodyPr>
+          <a:lstStyle/>
+          <a:p>
+            <a:pPr marL="0" lvl="0" indent="0" algn="ctr" rtl="0">
+              <a:spcBef>
+                <a:spcPts val="0"/>
+              </a:spcBef>
+              <a:spcAft>
+                <a:spcPts val="0"/>
+              </a:spcAft>
+              <a:buNone/>
+            </a:pPr>
+            <a:r>
+              <a:rPr lang="en-GB" sz="1800" b="1" dirty="0">
+                <a:latin typeface="Consolas"/>
+                <a:ea typeface="Consolas"/>
+                <a:cs typeface="Consolas"/>
+                <a:sym typeface="Consolas"/>
+              </a:rPr>
+              <a:t>68338</a:t>
+            </a:r>
+            <a:endParaRPr sz="1800" b="1" dirty="0">
+              <a:latin typeface="Consolas"/>
+              <a:ea typeface="Consolas"/>
+              <a:cs typeface="Consolas"/>
+              <a:sym typeface="Consolas"/>
+            </a:endParaRPr>
+          </a:p>
+        </p:txBody>
+      </p:sp>
+      <p:sp>
+        <p:nvSpPr>
+          <p:cNvPr id="3" name="Google Shape;75;p15">
+            <a:extLst>
+              <a:ext uri="{FF2B5EF4-FFF2-40B4-BE49-F238E27FC236}">
+                <a16:creationId xmlns:a16="http://schemas.microsoft.com/office/drawing/2014/main" id="{0F891185-8E1D-56B1-6084-57C91FA76442}"/>
+              </a:ext>
+            </a:extLst>
+          </p:cNvPr>
+          <p:cNvSpPr/>
+          <p:nvPr/>
+        </p:nvSpPr>
+        <p:spPr>
+          <a:xfrm>
+            <a:off x="3197186" y="2961501"/>
+            <a:ext cx="2410800" cy="480900"/>
+          </a:xfrm>
+          <a:prstGeom prst="roundRect">
+            <a:avLst>
+              <a:gd name="adj" fmla="val 16667"/>
+            </a:avLst>
+          </a:prstGeom>
+          <a:solidFill>
+            <a:srgbClr val="E6B8AF"/>
+          </a:solidFill>
+          <a:ln w="28575" cap="flat" cmpd="sng">
+            <a:solidFill>
+              <a:srgbClr val="5B0F00"/>
+            </a:solidFill>
+            <a:prstDash val="solid"/>
+            <a:round/>
+            <a:headEnd type="none" w="sm" len="sm"/>
+            <a:tailEnd type="none" w="sm" len="sm"/>
+          </a:ln>
+        </p:spPr>
+        <p:txBody>
+          <a:bodyPr spcFirstLastPara="1" wrap="square" lIns="91425" tIns="91425" rIns="91425" bIns="91425" anchor="ctr" anchorCtr="0">
+            <a:noAutofit/>
+          </a:bodyPr>
+          <a:lstStyle/>
+          <a:p>
+            <a:pPr marL="0" lvl="0" indent="0" algn="ctr" rtl="0">
+              <a:spcBef>
+                <a:spcPts val="0"/>
+              </a:spcBef>
+              <a:spcAft>
+                <a:spcPts val="0"/>
+              </a:spcAft>
+              <a:buNone/>
+            </a:pPr>
+            <a:r>
+              <a:rPr lang="en-GB" sz="1800" b="1" dirty="0">
+                <a:latin typeface="Consolas"/>
+                <a:ea typeface="Consolas"/>
+                <a:cs typeface="Consolas"/>
+                <a:sym typeface="Consolas"/>
+              </a:rPr>
+              <a:t>68245</a:t>
+            </a:r>
+            <a:endParaRPr sz="1800" b="1" dirty="0">
+              <a:latin typeface="Consolas"/>
+              <a:ea typeface="Consolas"/>
+              <a:cs typeface="Consolas"/>
+              <a:sym typeface="Consolas"/>
+            </a:endParaRPr>
+          </a:p>
+        </p:txBody>
+      </p:sp>
+      <p:sp>
+        <p:nvSpPr>
+          <p:cNvPr id="4" name="Google Shape;76;p15">
+            <a:extLst>
+              <a:ext uri="{FF2B5EF4-FFF2-40B4-BE49-F238E27FC236}">
+                <a16:creationId xmlns:a16="http://schemas.microsoft.com/office/drawing/2014/main" id="{46C4BE80-BC25-8FB5-90F6-0F017EAFC7EC}"/>
+              </a:ext>
+            </a:extLst>
+          </p:cNvPr>
+          <p:cNvSpPr/>
+          <p:nvPr/>
+        </p:nvSpPr>
+        <p:spPr>
+          <a:xfrm>
+            <a:off x="3197186" y="4537410"/>
+            <a:ext cx="2410800" cy="480900"/>
+          </a:xfrm>
+          <a:prstGeom prst="roundRect">
+            <a:avLst>
+              <a:gd name="adj" fmla="val 16667"/>
+            </a:avLst>
+          </a:prstGeom>
+          <a:solidFill>
+            <a:srgbClr val="E6B8AF"/>
+          </a:solidFill>
+          <a:ln w="28575" cap="flat" cmpd="sng">
+            <a:solidFill>
+              <a:srgbClr val="5B0F00"/>
+            </a:solidFill>
+            <a:prstDash val="solid"/>
+            <a:round/>
+            <a:headEnd type="none" w="sm" len="sm"/>
+            <a:tailEnd type="none" w="sm" len="sm"/>
+          </a:ln>
+        </p:spPr>
+        <p:txBody>
+          <a:bodyPr spcFirstLastPara="1" wrap="square" lIns="91425" tIns="91425" rIns="91425" bIns="91425" anchor="ctr" anchorCtr="0">
+            <a:noAutofit/>
+          </a:bodyPr>
+          <a:lstStyle/>
+          <a:p>
+            <a:pPr marL="0" lvl="0" indent="0" algn="ctr" rtl="0">
+              <a:spcBef>
+                <a:spcPts val="0"/>
+              </a:spcBef>
+              <a:spcAft>
+                <a:spcPts val="0"/>
+              </a:spcAft>
+              <a:buNone/>
+            </a:pPr>
+            <a:r>
+              <a:rPr lang="en-GB" sz="1800" b="1" dirty="0">
+                <a:latin typeface="Consolas"/>
+                <a:ea typeface="Consolas"/>
+                <a:cs typeface="Consolas"/>
+                <a:sym typeface="Consolas"/>
+              </a:rPr>
+              <a:t>68725</a:t>
+            </a:r>
+            <a:endParaRPr sz="1800" b="1" dirty="0">
+              <a:latin typeface="Consolas"/>
+              <a:ea typeface="Consolas"/>
+              <a:cs typeface="Consolas"/>
+              <a:sym typeface="Consolas"/>
+            </a:endParaRPr>
+          </a:p>
+        </p:txBody>
+      </p:sp>
+      <p:sp>
+        <p:nvSpPr>
+          <p:cNvPr id="5" name="Google Shape;77;p15">
+            <a:extLst>
+              <a:ext uri="{FF2B5EF4-FFF2-40B4-BE49-F238E27FC236}">
+                <a16:creationId xmlns:a16="http://schemas.microsoft.com/office/drawing/2014/main" id="{293C3D12-CDEB-E2DA-3FDB-03BA6A95EAB2}"/>
+              </a:ext>
+            </a:extLst>
+          </p:cNvPr>
+          <p:cNvSpPr/>
+          <p:nvPr/>
+        </p:nvSpPr>
+        <p:spPr>
+          <a:xfrm>
+            <a:off x="3197186" y="6113307"/>
+            <a:ext cx="2410800" cy="480900"/>
+          </a:xfrm>
+          <a:prstGeom prst="roundRect">
+            <a:avLst>
+              <a:gd name="adj" fmla="val 16667"/>
+            </a:avLst>
+          </a:prstGeom>
+          <a:solidFill>
+            <a:srgbClr val="E6B8AF"/>
+          </a:solidFill>
+          <a:ln w="28575" cap="flat" cmpd="sng">
+            <a:solidFill>
+              <a:srgbClr val="5B0F00"/>
+            </a:solidFill>
+            <a:prstDash val="solid"/>
+            <a:round/>
+            <a:headEnd type="none" w="sm" len="sm"/>
+            <a:tailEnd type="none" w="sm" len="sm"/>
+          </a:ln>
+        </p:spPr>
+        <p:txBody>
+          <a:bodyPr spcFirstLastPara="1" wrap="square" lIns="91425" tIns="91425" rIns="91425" bIns="91425" anchor="ctr" anchorCtr="0">
+            <a:noAutofit/>
+          </a:bodyPr>
+          <a:lstStyle/>
+          <a:p>
+            <a:pPr marL="0" lvl="0" indent="0" algn="ctr" rtl="0">
+              <a:spcBef>
+                <a:spcPts val="0"/>
+              </a:spcBef>
+              <a:spcAft>
+                <a:spcPts val="0"/>
+              </a:spcAft>
+              <a:buNone/>
+            </a:pPr>
+            <a:r>
+              <a:rPr lang="en-GB" sz="1800" b="1" dirty="0">
+                <a:latin typeface="Consolas"/>
+                <a:ea typeface="Consolas"/>
+                <a:cs typeface="Consolas"/>
+                <a:sym typeface="Consolas"/>
+              </a:rPr>
+              <a:t>68180</a:t>
+            </a:r>
+            <a:endParaRPr sz="1800" b="1" dirty="0">
+              <a:latin typeface="Consolas"/>
+              <a:ea typeface="Consolas"/>
+              <a:cs typeface="Consolas"/>
+              <a:sym typeface="Consolas"/>
+            </a:endParaRPr>
+          </a:p>
+        </p:txBody>
+      </p:sp>
+      <p:sp>
+        <p:nvSpPr>
+          <p:cNvPr id="6" name="Google Shape;78;p15">
+            <a:extLst>
+              <a:ext uri="{FF2B5EF4-FFF2-40B4-BE49-F238E27FC236}">
+                <a16:creationId xmlns:a16="http://schemas.microsoft.com/office/drawing/2014/main" id="{ADEDD67D-ED1D-3329-E03F-C4B9C3F2A3EE}"/>
+              </a:ext>
+            </a:extLst>
+          </p:cNvPr>
+          <p:cNvSpPr/>
+          <p:nvPr/>
+        </p:nvSpPr>
+        <p:spPr>
+          <a:xfrm>
+            <a:off x="3197186" y="7689198"/>
+            <a:ext cx="2410800" cy="480900"/>
+          </a:xfrm>
+          <a:prstGeom prst="roundRect">
+            <a:avLst>
+              <a:gd name="adj" fmla="val 16667"/>
+            </a:avLst>
+          </a:prstGeom>
+          <a:solidFill>
+            <a:srgbClr val="E6B8AF"/>
+          </a:solidFill>
+          <a:ln w="28575" cap="flat" cmpd="sng">
+            <a:solidFill>
+              <a:srgbClr val="5B0F00"/>
+            </a:solidFill>
+            <a:prstDash val="solid"/>
+            <a:round/>
+            <a:headEnd type="none" w="sm" len="sm"/>
+            <a:tailEnd type="none" w="sm" len="sm"/>
+          </a:ln>
+        </p:spPr>
+        <p:txBody>
+          <a:bodyPr spcFirstLastPara="1" wrap="square" lIns="91425" tIns="91425" rIns="91425" bIns="91425" anchor="ctr" anchorCtr="0">
+            <a:noAutofit/>
+          </a:bodyPr>
+          <a:lstStyle/>
+          <a:p>
+            <a:pPr marL="0" lvl="0" indent="0" algn="ctr" rtl="0">
+              <a:spcBef>
+                <a:spcPts val="0"/>
+              </a:spcBef>
+              <a:spcAft>
+                <a:spcPts val="0"/>
+              </a:spcAft>
+              <a:buNone/>
+            </a:pPr>
+            <a:r>
+              <a:rPr lang="en-GB" sz="1800" b="1" dirty="0">
+                <a:latin typeface="Consolas"/>
+                <a:ea typeface="Consolas"/>
+                <a:cs typeface="Consolas"/>
+                <a:sym typeface="Consolas"/>
+              </a:rPr>
+              <a:t>67912</a:t>
+            </a:r>
+            <a:endParaRPr sz="1800" b="1" dirty="0">
+              <a:latin typeface="Consolas"/>
+              <a:ea typeface="Consolas"/>
+              <a:cs typeface="Consolas"/>
+              <a:sym typeface="Consolas"/>
+            </a:endParaRPr>
+          </a:p>
+        </p:txBody>
+      </p:sp>
+      <p:sp>
+        <p:nvSpPr>
+          <p:cNvPr id="7" name="Google Shape;79;p15">
+            <a:extLst>
+              <a:ext uri="{FF2B5EF4-FFF2-40B4-BE49-F238E27FC236}">
+                <a16:creationId xmlns:a16="http://schemas.microsoft.com/office/drawing/2014/main" id="{F756FE5E-D13D-D08A-2B42-EF680989A32F}"/>
+              </a:ext>
+            </a:extLst>
+          </p:cNvPr>
+          <p:cNvSpPr/>
+          <p:nvPr/>
+        </p:nvSpPr>
+        <p:spPr>
+          <a:xfrm>
+            <a:off x="3197186" y="9265103"/>
+            <a:ext cx="2410800" cy="480900"/>
+          </a:xfrm>
+          <a:prstGeom prst="roundRect">
+            <a:avLst>
+              <a:gd name="adj" fmla="val 16667"/>
+            </a:avLst>
+          </a:prstGeom>
+          <a:solidFill>
+            <a:srgbClr val="E6B8AF"/>
+          </a:solidFill>
+          <a:ln w="28575" cap="flat" cmpd="sng">
+            <a:solidFill>
+              <a:srgbClr val="5B0F00"/>
+            </a:solidFill>
+            <a:prstDash val="solid"/>
+            <a:round/>
+            <a:headEnd type="none" w="sm" len="sm"/>
+            <a:tailEnd type="none" w="sm" len="sm"/>
+          </a:ln>
+        </p:spPr>
+        <p:txBody>
+          <a:bodyPr spcFirstLastPara="1" wrap="square" lIns="91425" tIns="91425" rIns="91425" bIns="91425" anchor="ctr" anchorCtr="0">
+            <a:noAutofit/>
+          </a:bodyPr>
+          <a:lstStyle/>
+          <a:p>
+            <a:pPr marL="0" lvl="0" indent="0" algn="ctr" rtl="0">
+              <a:spcBef>
+                <a:spcPts val="0"/>
+              </a:spcBef>
+              <a:spcAft>
+                <a:spcPts val="0"/>
+              </a:spcAft>
+              <a:buNone/>
+            </a:pPr>
+            <a:r>
+              <a:rPr lang="en-GB" sz="1800" b="1" dirty="0">
+                <a:latin typeface="Consolas"/>
+                <a:ea typeface="Consolas"/>
+                <a:cs typeface="Consolas"/>
+                <a:sym typeface="Consolas"/>
+              </a:rPr>
+              <a:t>67870</a:t>
+            </a:r>
+            <a:endParaRPr sz="1800" b="1" dirty="0">
+              <a:latin typeface="Consolas"/>
+              <a:ea typeface="Consolas"/>
+              <a:cs typeface="Consolas"/>
+              <a:sym typeface="Consolas"/>
+            </a:endParaRPr>
+          </a:p>
+        </p:txBody>
+      </p:sp>
+      <p:sp>
+        <p:nvSpPr>
+          <p:cNvPr id="10" name="Google Shape;86;p15">
+            <a:extLst>
+              <a:ext uri="{FF2B5EF4-FFF2-40B4-BE49-F238E27FC236}">
+                <a16:creationId xmlns:a16="http://schemas.microsoft.com/office/drawing/2014/main" id="{9B7BE298-0344-D3DC-EDE1-D67A5BE797E0}"/>
+              </a:ext>
+            </a:extLst>
+          </p:cNvPr>
+          <p:cNvSpPr/>
+          <p:nvPr/>
+        </p:nvSpPr>
+        <p:spPr>
+          <a:xfrm>
+            <a:off x="6127942" y="3789573"/>
+            <a:ext cx="3204918" cy="1537318"/>
+          </a:xfrm>
+          <a:prstGeom prst="roundRect">
+            <a:avLst>
+              <a:gd name="adj" fmla="val 16667"/>
+            </a:avLst>
+          </a:prstGeom>
+          <a:solidFill>
+            <a:srgbClr val="D9EAD3"/>
+          </a:solidFill>
+          <a:ln w="28575" cap="flat" cmpd="sng">
+            <a:solidFill>
+              <a:srgbClr val="274E13"/>
+            </a:solidFill>
+            <a:prstDash val="solid"/>
+            <a:round/>
+            <a:headEnd type="none" w="sm" len="sm"/>
+            <a:tailEnd type="none" w="sm" len="sm"/>
+          </a:ln>
+        </p:spPr>
+        <p:txBody>
+          <a:bodyPr spcFirstLastPara="1" wrap="square" lIns="91425" tIns="91425" rIns="91425" bIns="91425" anchor="t" anchorCtr="0">
+            <a:noAutofit/>
+          </a:bodyPr>
+          <a:lstStyle/>
+          <a:p>
+            <a:pPr lvl="0"/>
+            <a:r>
+              <a:rPr lang="en-GB" dirty="0">
+                <a:latin typeface="Consolas"/>
+                <a:ea typeface="Consolas"/>
+                <a:cs typeface="Consolas"/>
+                <a:sym typeface="Consolas"/>
+              </a:rPr>
+              <a:t>US1: Como </a:t>
+            </a:r>
+            <a:r>
+              <a:rPr lang="en-GB" dirty="0" err="1">
+                <a:latin typeface="Consolas"/>
+                <a:ea typeface="Consolas"/>
+                <a:cs typeface="Consolas"/>
+                <a:sym typeface="Consolas"/>
+              </a:rPr>
+              <a:t>membro</a:t>
+            </a:r>
+            <a:r>
+              <a:rPr lang="en-GB" dirty="0">
+                <a:latin typeface="Consolas"/>
+                <a:ea typeface="Consolas"/>
+                <a:cs typeface="Consolas"/>
+                <a:sym typeface="Consolas"/>
+              </a:rPr>
+              <a:t> da </a:t>
+            </a:r>
+            <a:r>
+              <a:rPr lang="en-GB" dirty="0" err="1">
+                <a:latin typeface="Consolas"/>
+                <a:ea typeface="Consolas"/>
+                <a:cs typeface="Consolas"/>
+                <a:sym typeface="Consolas"/>
+              </a:rPr>
+              <a:t>equipa</a:t>
+            </a:r>
+            <a:r>
+              <a:rPr lang="en-GB" dirty="0">
+                <a:latin typeface="Consolas"/>
+                <a:ea typeface="Consolas"/>
+                <a:cs typeface="Consolas"/>
+                <a:sym typeface="Consolas"/>
+              </a:rPr>
+              <a:t> </a:t>
+            </a:r>
+            <a:r>
+              <a:rPr lang="en-GB" dirty="0" err="1">
+                <a:latin typeface="Consolas"/>
+                <a:ea typeface="Consolas"/>
+                <a:cs typeface="Consolas"/>
+                <a:sym typeface="Consolas"/>
+              </a:rPr>
+              <a:t>quero</a:t>
+            </a:r>
+            <a:r>
+              <a:rPr lang="en-GB" dirty="0">
+                <a:latin typeface="Consolas"/>
+                <a:ea typeface="Consolas"/>
+                <a:cs typeface="Consolas"/>
+                <a:sym typeface="Consolas"/>
+              </a:rPr>
+              <a:t> </a:t>
+            </a:r>
+            <a:r>
+              <a:rPr lang="pt-PT" dirty="0">
+                <a:latin typeface="Consolas"/>
+                <a:ea typeface="Consolas"/>
+                <a:cs typeface="Consolas"/>
+                <a:sym typeface="Consolas"/>
+              </a:rPr>
+              <a:t>terminar tsunami e earthquake spawners, no que toca às suas animações bem como alguma lógica de movimento de “builds”.</a:t>
+            </a:r>
+            <a:endParaRPr dirty="0">
+              <a:latin typeface="Consolas"/>
+              <a:ea typeface="Consolas"/>
+              <a:cs typeface="Consolas"/>
+              <a:sym typeface="Consolas"/>
+            </a:endParaRPr>
+          </a:p>
+        </p:txBody>
+      </p:sp>
+      <p:sp>
+        <p:nvSpPr>
+          <p:cNvPr id="11" name="Google Shape;92;p15">
+            <a:extLst>
+              <a:ext uri="{FF2B5EF4-FFF2-40B4-BE49-F238E27FC236}">
+                <a16:creationId xmlns:a16="http://schemas.microsoft.com/office/drawing/2014/main" id="{25B559BB-F940-760D-08AA-F65F031BD451}"/>
+              </a:ext>
+            </a:extLst>
+          </p:cNvPr>
+          <p:cNvSpPr/>
+          <p:nvPr/>
+        </p:nvSpPr>
+        <p:spPr>
+          <a:xfrm>
+            <a:off x="6127942" y="7203407"/>
+            <a:ext cx="3184194" cy="1514182"/>
+          </a:xfrm>
+          <a:prstGeom prst="roundRect">
+            <a:avLst>
+              <a:gd name="adj" fmla="val 16667"/>
+            </a:avLst>
+          </a:prstGeom>
+          <a:solidFill>
+            <a:srgbClr val="D9EAD3"/>
+          </a:solidFill>
+          <a:ln w="28575" cap="flat" cmpd="sng">
+            <a:solidFill>
+              <a:srgbClr val="274E13"/>
+            </a:solidFill>
+            <a:prstDash val="solid"/>
+            <a:round/>
+            <a:headEnd type="none" w="sm" len="sm"/>
+            <a:tailEnd type="none" w="sm" len="sm"/>
+          </a:ln>
+        </p:spPr>
+        <p:txBody>
+          <a:bodyPr spcFirstLastPara="1" wrap="square" lIns="91425" tIns="91425" rIns="91425" bIns="91425" anchor="t" anchorCtr="0">
+            <a:noAutofit/>
+          </a:bodyPr>
+          <a:lstStyle/>
+          <a:p>
+            <a:pPr lvl="0"/>
+            <a:r>
+              <a:rPr lang="en-GB" dirty="0">
+                <a:latin typeface="Consolas"/>
+                <a:ea typeface="Consolas"/>
+                <a:cs typeface="Consolas"/>
+                <a:sym typeface="Consolas"/>
+              </a:rPr>
+              <a:t>US2: Como </a:t>
+            </a:r>
+            <a:r>
+              <a:rPr lang="en-GB" dirty="0" err="1">
+                <a:latin typeface="Consolas"/>
+                <a:ea typeface="Consolas"/>
+                <a:cs typeface="Consolas"/>
+                <a:sym typeface="Consolas"/>
+              </a:rPr>
+              <a:t>membro</a:t>
+            </a:r>
+            <a:r>
+              <a:rPr lang="en-GB" dirty="0">
+                <a:latin typeface="Consolas"/>
+                <a:ea typeface="Consolas"/>
+                <a:cs typeface="Consolas"/>
+                <a:sym typeface="Consolas"/>
+              </a:rPr>
+              <a:t> da </a:t>
+            </a:r>
+            <a:r>
+              <a:rPr lang="en-GB" dirty="0" err="1">
+                <a:latin typeface="Consolas"/>
+                <a:ea typeface="Consolas"/>
+                <a:cs typeface="Consolas"/>
+                <a:sym typeface="Consolas"/>
+              </a:rPr>
+              <a:t>equipa</a:t>
+            </a:r>
+            <a:r>
+              <a:rPr lang="en-GB" dirty="0">
+                <a:latin typeface="Consolas"/>
+                <a:ea typeface="Consolas"/>
+                <a:cs typeface="Consolas"/>
+                <a:sym typeface="Consolas"/>
+              </a:rPr>
+              <a:t> </a:t>
+            </a:r>
+            <a:r>
+              <a:rPr lang="en-GB" dirty="0" err="1">
+                <a:latin typeface="Consolas"/>
+                <a:ea typeface="Consolas"/>
+                <a:cs typeface="Consolas"/>
+                <a:sym typeface="Consolas"/>
+              </a:rPr>
+              <a:t>quero</a:t>
+            </a:r>
+            <a:r>
+              <a:rPr lang="en-GB" dirty="0">
+                <a:latin typeface="Consolas"/>
+                <a:ea typeface="Consolas"/>
+                <a:cs typeface="Consolas"/>
+                <a:sym typeface="Consolas"/>
+              </a:rPr>
+              <a:t> f</a:t>
+            </a:r>
+            <a:r>
+              <a:rPr lang="pt-PT" dirty="0">
+                <a:latin typeface="Consolas"/>
+                <a:ea typeface="Consolas"/>
+                <a:cs typeface="Consolas"/>
+                <a:sym typeface="Consolas"/>
+              </a:rPr>
+              <a:t>azer uma abstract class que ligue as 3 catastrofes naturais, para melhorar a qualidade do código.</a:t>
+            </a:r>
+            <a:endParaRPr dirty="0">
+              <a:latin typeface="Consolas"/>
+              <a:ea typeface="Consolas"/>
+              <a:cs typeface="Consolas"/>
+              <a:sym typeface="Consolas"/>
+            </a:endParaRPr>
+          </a:p>
+        </p:txBody>
+      </p:sp>
+      <p:sp>
+        <p:nvSpPr>
+          <p:cNvPr id="8" name="Google Shape;92;p15">
+            <a:extLst>
+              <a:ext uri="{FF2B5EF4-FFF2-40B4-BE49-F238E27FC236}">
+                <a16:creationId xmlns:a16="http://schemas.microsoft.com/office/drawing/2014/main" id="{DA9B6304-D657-E982-7FD4-64FA8B96F0AF}"/>
+              </a:ext>
+            </a:extLst>
+          </p:cNvPr>
+          <p:cNvSpPr/>
+          <p:nvPr/>
+        </p:nvSpPr>
+        <p:spPr>
+          <a:xfrm>
+            <a:off x="6200057" y="917871"/>
+            <a:ext cx="2943942" cy="2682459"/>
+          </a:xfrm>
+          <a:prstGeom prst="roundRect">
+            <a:avLst>
+              <a:gd name="adj" fmla="val 16667"/>
+            </a:avLst>
+          </a:prstGeom>
+          <a:solidFill>
+            <a:srgbClr val="D9EAD3"/>
+          </a:solidFill>
+          <a:ln w="28575" cap="flat" cmpd="sng">
+            <a:solidFill>
+              <a:srgbClr val="274E13"/>
+            </a:solidFill>
+            <a:prstDash val="solid"/>
+            <a:round/>
+            <a:headEnd type="none" w="sm" len="sm"/>
+            <a:tailEnd type="none" w="sm" len="sm"/>
+          </a:ln>
+        </p:spPr>
+        <p:txBody>
+          <a:bodyPr spcFirstLastPara="1" wrap="square" lIns="91425" tIns="91425" rIns="91425" bIns="91425" anchor="t" anchorCtr="0">
+            <a:noAutofit/>
+          </a:bodyPr>
+          <a:lstStyle/>
+          <a:p>
+            <a:pPr lvl="0"/>
+            <a:r>
+              <a:rPr lang="en-GB" dirty="0">
+                <a:latin typeface="Consolas"/>
+                <a:ea typeface="Consolas"/>
+                <a:cs typeface="Consolas"/>
+                <a:sym typeface="Consolas"/>
+              </a:rPr>
+              <a:t>US3: Como </a:t>
+            </a:r>
+            <a:r>
+              <a:rPr lang="en-GB" dirty="0" err="1">
+                <a:latin typeface="Consolas"/>
+                <a:ea typeface="Consolas"/>
+                <a:cs typeface="Consolas"/>
+                <a:sym typeface="Consolas"/>
+              </a:rPr>
+              <a:t>membro</a:t>
+            </a:r>
+            <a:r>
+              <a:rPr lang="en-GB" dirty="0">
+                <a:latin typeface="Consolas"/>
+                <a:ea typeface="Consolas"/>
+                <a:cs typeface="Consolas"/>
+                <a:sym typeface="Consolas"/>
+              </a:rPr>
+              <a:t> da </a:t>
+            </a:r>
+            <a:r>
+              <a:rPr lang="en-GB" dirty="0" err="1">
+                <a:latin typeface="Consolas"/>
+                <a:ea typeface="Consolas"/>
+                <a:cs typeface="Consolas"/>
+                <a:sym typeface="Consolas"/>
+              </a:rPr>
+              <a:t>equipa</a:t>
+            </a:r>
+            <a:r>
+              <a:rPr lang="en-GB" dirty="0">
+                <a:latin typeface="Consolas"/>
+                <a:ea typeface="Consolas"/>
+                <a:cs typeface="Consolas"/>
+                <a:sym typeface="Consolas"/>
+              </a:rPr>
+              <a:t> </a:t>
+            </a:r>
+            <a:r>
+              <a:rPr lang="en-GB" dirty="0" err="1">
+                <a:latin typeface="Consolas"/>
+                <a:ea typeface="Consolas"/>
+                <a:cs typeface="Consolas"/>
+                <a:sym typeface="Consolas"/>
+              </a:rPr>
+              <a:t>quero</a:t>
+            </a:r>
+            <a:r>
+              <a:rPr lang="en-GB" dirty="0">
+                <a:latin typeface="Consolas"/>
+                <a:ea typeface="Consolas"/>
+                <a:cs typeface="Consolas"/>
+                <a:sym typeface="Consolas"/>
+              </a:rPr>
+              <a:t> a</a:t>
+            </a:r>
+            <a:r>
+              <a:rPr lang="pt-PT" dirty="0">
+                <a:latin typeface="Consolas"/>
+                <a:ea typeface="Consolas"/>
+                <a:cs typeface="Consolas"/>
+                <a:sym typeface="Consolas"/>
+              </a:rPr>
+              <a:t>plicar sistema de ranking baseado nas waves derrotadas ecriar uma interface apelativa para o jogador, bem como finalizar as waves do modo semanal.</a:t>
+            </a:r>
+            <a:r>
+              <a:rPr lang="en-GB" dirty="0">
+                <a:latin typeface="Consolas"/>
+                <a:ea typeface="Consolas"/>
+                <a:cs typeface="Consolas"/>
+                <a:sym typeface="Consolas"/>
+              </a:rPr>
+              <a:t> </a:t>
+            </a:r>
+            <a:endParaRPr dirty="0">
+              <a:latin typeface="Consolas"/>
+              <a:ea typeface="Consolas"/>
+              <a:cs typeface="Consolas"/>
+              <a:sym typeface="Consolas"/>
+            </a:endParaRPr>
+          </a:p>
+        </p:txBody>
+      </p:sp>
+      <p:sp>
+        <p:nvSpPr>
+          <p:cNvPr id="9" name="Google Shape;92;p15">
+            <a:extLst>
+              <a:ext uri="{FF2B5EF4-FFF2-40B4-BE49-F238E27FC236}">
+                <a16:creationId xmlns:a16="http://schemas.microsoft.com/office/drawing/2014/main" id="{B8D595D3-F6C8-B740-019D-3C36A4D731CA}"/>
+              </a:ext>
+            </a:extLst>
+          </p:cNvPr>
+          <p:cNvSpPr/>
+          <p:nvPr/>
+        </p:nvSpPr>
+        <p:spPr>
+          <a:xfrm>
+            <a:off x="6127942" y="5530416"/>
+            <a:ext cx="3184191" cy="1552771"/>
+          </a:xfrm>
+          <a:prstGeom prst="roundRect">
+            <a:avLst>
+              <a:gd name="adj" fmla="val 16667"/>
+            </a:avLst>
+          </a:prstGeom>
+          <a:solidFill>
+            <a:srgbClr val="D9EAD3"/>
+          </a:solidFill>
+          <a:ln w="28575" cap="flat" cmpd="sng">
+            <a:solidFill>
+              <a:srgbClr val="274E13"/>
+            </a:solidFill>
+            <a:prstDash val="solid"/>
+            <a:round/>
+            <a:headEnd type="none" w="sm" len="sm"/>
+            <a:tailEnd type="none" w="sm" len="sm"/>
+          </a:ln>
+        </p:spPr>
+        <p:txBody>
+          <a:bodyPr spcFirstLastPara="1" wrap="square" lIns="91425" tIns="91425" rIns="91425" bIns="91425" anchor="t" anchorCtr="0">
+            <a:noAutofit/>
+          </a:bodyPr>
+          <a:lstStyle/>
+          <a:p>
+            <a:pPr lvl="0"/>
+            <a:r>
+              <a:rPr lang="en-GB" dirty="0">
+                <a:latin typeface="Consolas"/>
+                <a:ea typeface="Consolas"/>
+                <a:cs typeface="Consolas"/>
+                <a:sym typeface="Consolas"/>
+              </a:rPr>
+              <a:t>US4: Como </a:t>
+            </a:r>
+            <a:r>
+              <a:rPr lang="en-GB" dirty="0" err="1">
+                <a:latin typeface="Consolas"/>
+                <a:ea typeface="Consolas"/>
+                <a:cs typeface="Consolas"/>
+                <a:sym typeface="Consolas"/>
+              </a:rPr>
+              <a:t>membro</a:t>
+            </a:r>
+            <a:r>
+              <a:rPr lang="en-GB" dirty="0">
+                <a:latin typeface="Consolas"/>
+                <a:ea typeface="Consolas"/>
+                <a:cs typeface="Consolas"/>
+                <a:sym typeface="Consolas"/>
+              </a:rPr>
+              <a:t> da </a:t>
+            </a:r>
+            <a:r>
+              <a:rPr lang="en-GB" dirty="0" err="1">
+                <a:latin typeface="Consolas"/>
+                <a:ea typeface="Consolas"/>
+                <a:cs typeface="Consolas"/>
+                <a:sym typeface="Consolas"/>
+              </a:rPr>
+              <a:t>equipa</a:t>
+            </a:r>
+            <a:r>
+              <a:rPr lang="en-GB" dirty="0">
+                <a:latin typeface="Consolas"/>
+                <a:ea typeface="Consolas"/>
+                <a:cs typeface="Consolas"/>
+                <a:sym typeface="Consolas"/>
+              </a:rPr>
+              <a:t> </a:t>
+            </a:r>
+            <a:r>
+              <a:rPr lang="en-GB" dirty="0" err="1">
+                <a:latin typeface="Consolas"/>
+                <a:ea typeface="Consolas"/>
+                <a:cs typeface="Consolas"/>
+                <a:sym typeface="Consolas"/>
+              </a:rPr>
+              <a:t>quero</a:t>
+            </a:r>
+            <a:r>
+              <a:rPr lang="en-GB" dirty="0">
+                <a:latin typeface="Consolas"/>
+                <a:ea typeface="Consolas"/>
+                <a:cs typeface="Consolas"/>
+                <a:sym typeface="Consolas"/>
+              </a:rPr>
+              <a:t> f</a:t>
+            </a:r>
+            <a:r>
+              <a:rPr lang="pt-PT" dirty="0">
+                <a:latin typeface="Consolas"/>
+                <a:ea typeface="Consolas"/>
+                <a:cs typeface="Consolas"/>
+                <a:sym typeface="Consolas"/>
+              </a:rPr>
+              <a:t>azer resource trader bot feature, com o qual os jogadores podem fazer trocas de uns recursos por outros durante o jogo</a:t>
+            </a:r>
+            <a:endParaRPr dirty="0">
+              <a:latin typeface="Consolas"/>
+              <a:ea typeface="Consolas"/>
+              <a:cs typeface="Consolas"/>
+              <a:sym typeface="Consolas"/>
+            </a:endParaRPr>
+          </a:p>
+        </p:txBody>
+      </p:sp>
+      <p:sp>
+        <p:nvSpPr>
+          <p:cNvPr id="23" name="Google Shape;121;p16">
+            <a:extLst>
+              <a:ext uri="{FF2B5EF4-FFF2-40B4-BE49-F238E27FC236}">
+                <a16:creationId xmlns:a16="http://schemas.microsoft.com/office/drawing/2014/main" id="{0EB0AA07-673C-E198-DD15-32AD87C01227}"/>
+              </a:ext>
+            </a:extLst>
+          </p:cNvPr>
+          <p:cNvSpPr/>
+          <p:nvPr/>
+        </p:nvSpPr>
+        <p:spPr>
+          <a:xfrm>
+            <a:off x="9555665" y="4360319"/>
+            <a:ext cx="2449608" cy="946153"/>
+          </a:xfrm>
+          <a:prstGeom prst="roundRect">
+            <a:avLst>
+              <a:gd name="adj" fmla="val 16667"/>
+            </a:avLst>
+          </a:prstGeom>
+          <a:solidFill>
+            <a:srgbClr val="D0E0E3"/>
+          </a:solidFill>
+          <a:ln w="28575" cap="flat" cmpd="sng">
+            <a:solidFill>
+              <a:srgbClr val="134F5C"/>
+            </a:solidFill>
+            <a:prstDash val="solid"/>
+            <a:round/>
+            <a:headEnd type="none" w="sm" len="sm"/>
+            <a:tailEnd type="none" w="sm" len="sm"/>
+          </a:ln>
+        </p:spPr>
+        <p:txBody>
+          <a:bodyPr spcFirstLastPara="1" wrap="square" lIns="91425" tIns="91425" rIns="91425" bIns="91425" anchor="t" anchorCtr="0">
+            <a:noAutofit/>
+          </a:bodyPr>
+          <a:lstStyle/>
+          <a:p>
+            <a:pPr lvl="0"/>
+            <a:r>
+              <a:rPr lang="en-US" dirty="0">
+                <a:latin typeface="Consolas"/>
+                <a:ea typeface="Consolas"/>
+                <a:cs typeface="Consolas"/>
+                <a:sym typeface="Consolas"/>
+              </a:rPr>
+              <a:t>T1: </a:t>
+            </a:r>
+            <a:r>
+              <a:rPr lang="en-US" dirty="0" err="1">
+                <a:latin typeface="Consolas"/>
+                <a:ea typeface="Consolas"/>
+                <a:cs typeface="Consolas"/>
+                <a:sym typeface="Consolas"/>
+              </a:rPr>
+              <a:t>Terminar</a:t>
+            </a:r>
+            <a:r>
+              <a:rPr lang="en-US" dirty="0">
+                <a:latin typeface="Consolas"/>
+                <a:ea typeface="Consolas"/>
+                <a:cs typeface="Consolas"/>
+                <a:sym typeface="Consolas"/>
+              </a:rPr>
+              <a:t> tsunami e earthquake spawners.</a:t>
+            </a:r>
+          </a:p>
+          <a:p>
+            <a:pPr marL="0" lvl="0" indent="0" algn="l" rtl="0">
+              <a:spcBef>
+                <a:spcPts val="0"/>
+              </a:spcBef>
+              <a:spcAft>
+                <a:spcPts val="0"/>
+              </a:spcAft>
+              <a:buNone/>
+            </a:pPr>
+            <a:br>
+              <a:rPr lang="en-GB" dirty="0">
+                <a:latin typeface="Consolas"/>
+                <a:ea typeface="Consolas"/>
+                <a:cs typeface="Consolas"/>
+                <a:sym typeface="Consolas"/>
+              </a:rPr>
+            </a:br>
+            <a:endParaRPr lang="en-GB" dirty="0">
+              <a:latin typeface="Consolas"/>
+              <a:ea typeface="Consolas"/>
+              <a:cs typeface="Consolas"/>
+              <a:sym typeface="Consolas"/>
+            </a:endParaRPr>
+          </a:p>
+          <a:p>
+            <a:pPr marL="0" lvl="0" indent="0" algn="l" rtl="0">
+              <a:spcBef>
+                <a:spcPts val="0"/>
+              </a:spcBef>
+              <a:spcAft>
+                <a:spcPts val="0"/>
+              </a:spcAft>
+              <a:buNone/>
+            </a:pPr>
+            <a:endParaRPr dirty="0">
+              <a:latin typeface="Consolas"/>
+              <a:ea typeface="Consolas"/>
+              <a:cs typeface="Consolas"/>
+              <a:sym typeface="Consolas"/>
+            </a:endParaRPr>
+          </a:p>
+        </p:txBody>
+      </p:sp>
+      <p:sp>
+        <p:nvSpPr>
+          <p:cNvPr id="12" name="Google Shape;121;p16">
+            <a:extLst>
+              <a:ext uri="{FF2B5EF4-FFF2-40B4-BE49-F238E27FC236}">
+                <a16:creationId xmlns:a16="http://schemas.microsoft.com/office/drawing/2014/main" id="{CA3E6AF5-C65C-7254-22F7-C651418ADFBF}"/>
+              </a:ext>
+            </a:extLst>
+          </p:cNvPr>
+          <p:cNvSpPr/>
+          <p:nvPr/>
+        </p:nvSpPr>
+        <p:spPr>
+          <a:xfrm>
+            <a:off x="9594473" y="7365723"/>
+            <a:ext cx="2410800" cy="1041591"/>
+          </a:xfrm>
+          <a:prstGeom prst="roundRect">
+            <a:avLst>
+              <a:gd name="adj" fmla="val 16667"/>
+            </a:avLst>
+          </a:prstGeom>
+          <a:solidFill>
+            <a:srgbClr val="D0E0E3"/>
+          </a:solidFill>
+          <a:ln w="28575" cap="flat" cmpd="sng">
+            <a:solidFill>
+              <a:srgbClr val="134F5C"/>
+            </a:solidFill>
+            <a:prstDash val="solid"/>
+            <a:round/>
+            <a:headEnd type="none" w="sm" len="sm"/>
+            <a:tailEnd type="none" w="sm" len="sm"/>
+          </a:ln>
+        </p:spPr>
+        <p:txBody>
+          <a:bodyPr spcFirstLastPara="1" wrap="square" lIns="91425" tIns="91425" rIns="91425" bIns="91425" anchor="t" anchorCtr="0">
+            <a:noAutofit/>
+          </a:bodyPr>
+          <a:lstStyle/>
+          <a:p>
+            <a:pPr lvl="0"/>
+            <a:r>
+              <a:rPr lang="pt-PT" dirty="0">
+                <a:latin typeface="Consolas"/>
+                <a:ea typeface="Consolas"/>
+                <a:cs typeface="Consolas"/>
+                <a:sym typeface="Consolas"/>
+              </a:rPr>
+              <a:t>T2: Fazer abstract class para as catastrofes naturais.</a:t>
+            </a:r>
+            <a:br>
+              <a:rPr lang="en-GB" dirty="0">
+                <a:latin typeface="Consolas"/>
+                <a:ea typeface="Consolas"/>
+                <a:cs typeface="Consolas"/>
+                <a:sym typeface="Consolas"/>
+              </a:rPr>
+            </a:br>
+            <a:endParaRPr lang="en-GB" dirty="0">
+              <a:latin typeface="Consolas"/>
+              <a:ea typeface="Consolas"/>
+              <a:cs typeface="Consolas"/>
+              <a:sym typeface="Consolas"/>
+            </a:endParaRPr>
+          </a:p>
+          <a:p>
+            <a:pPr marL="0" lvl="0" indent="0" algn="l" rtl="0">
+              <a:spcBef>
+                <a:spcPts val="0"/>
+              </a:spcBef>
+              <a:spcAft>
+                <a:spcPts val="0"/>
+              </a:spcAft>
+              <a:buNone/>
+            </a:pPr>
+            <a:endParaRPr dirty="0">
+              <a:latin typeface="Consolas"/>
+              <a:ea typeface="Consolas"/>
+              <a:cs typeface="Consolas"/>
+              <a:sym typeface="Consolas"/>
+            </a:endParaRPr>
+          </a:p>
+        </p:txBody>
+      </p:sp>
+      <p:sp>
+        <p:nvSpPr>
+          <p:cNvPr id="13" name="Google Shape;121;p16">
+            <a:extLst>
+              <a:ext uri="{FF2B5EF4-FFF2-40B4-BE49-F238E27FC236}">
+                <a16:creationId xmlns:a16="http://schemas.microsoft.com/office/drawing/2014/main" id="{B39DDB29-43EA-2E91-1C24-34E9FA3317B9}"/>
+              </a:ext>
+            </a:extLst>
+          </p:cNvPr>
+          <p:cNvSpPr/>
+          <p:nvPr/>
+        </p:nvSpPr>
+        <p:spPr>
+          <a:xfrm>
+            <a:off x="9555665" y="977068"/>
+            <a:ext cx="2410800" cy="2549628"/>
+          </a:xfrm>
+          <a:prstGeom prst="roundRect">
+            <a:avLst>
+              <a:gd name="adj" fmla="val 16667"/>
+            </a:avLst>
+          </a:prstGeom>
+          <a:solidFill>
+            <a:srgbClr val="D0E0E3"/>
+          </a:solidFill>
+          <a:ln w="28575" cap="flat" cmpd="sng">
+            <a:solidFill>
+              <a:srgbClr val="134F5C"/>
+            </a:solidFill>
+            <a:prstDash val="solid"/>
+            <a:round/>
+            <a:headEnd type="none" w="sm" len="sm"/>
+            <a:tailEnd type="none" w="sm" len="sm"/>
+          </a:ln>
+        </p:spPr>
+        <p:txBody>
+          <a:bodyPr spcFirstLastPara="1" wrap="square" lIns="91425" tIns="91425" rIns="91425" bIns="91425" anchor="t" anchorCtr="0">
+            <a:noAutofit/>
+          </a:bodyPr>
+          <a:lstStyle/>
+          <a:p>
+            <a:pPr lvl="0"/>
+            <a:r>
+              <a:rPr lang="pt-PT" dirty="0">
+                <a:latin typeface="Consolas"/>
+                <a:ea typeface="Consolas"/>
+                <a:cs typeface="Consolas"/>
+                <a:sym typeface="Consolas"/>
+              </a:rPr>
+              <a:t>T3: Aplicar sistema de ranking e finalizar as waves do mode semanal.</a:t>
+            </a:r>
+          </a:p>
+          <a:p>
+            <a:pPr marL="0" lvl="0" indent="0" algn="l" rtl="0">
+              <a:spcBef>
+                <a:spcPts val="0"/>
+              </a:spcBef>
+              <a:spcAft>
+                <a:spcPts val="0"/>
+              </a:spcAft>
+              <a:buNone/>
+            </a:pPr>
+            <a:br>
+              <a:rPr lang="en-GB" dirty="0">
+                <a:latin typeface="Consolas"/>
+                <a:ea typeface="Consolas"/>
+                <a:cs typeface="Consolas"/>
+                <a:sym typeface="Consolas"/>
+              </a:rPr>
+            </a:br>
+            <a:br>
+              <a:rPr lang="en-GB" dirty="0">
+                <a:latin typeface="Consolas"/>
+                <a:ea typeface="Consolas"/>
+                <a:cs typeface="Consolas"/>
+                <a:sym typeface="Consolas"/>
+              </a:rPr>
+            </a:br>
+            <a:endParaRPr lang="en-GB" dirty="0">
+              <a:latin typeface="Consolas"/>
+              <a:ea typeface="Consolas"/>
+              <a:cs typeface="Consolas"/>
+              <a:sym typeface="Consolas"/>
+            </a:endParaRPr>
+          </a:p>
+          <a:p>
+            <a:pPr marL="0" lvl="0" indent="0" algn="l" rtl="0">
+              <a:spcBef>
+                <a:spcPts val="0"/>
+              </a:spcBef>
+              <a:spcAft>
+                <a:spcPts val="0"/>
+              </a:spcAft>
+              <a:buNone/>
+            </a:pPr>
+            <a:endParaRPr dirty="0">
+              <a:latin typeface="Consolas"/>
+              <a:ea typeface="Consolas"/>
+              <a:cs typeface="Consolas"/>
+              <a:sym typeface="Consolas"/>
+            </a:endParaRPr>
+          </a:p>
+        </p:txBody>
+      </p:sp>
+      <p:sp>
+        <p:nvSpPr>
+          <p:cNvPr id="14" name="Google Shape;121;p16">
+            <a:extLst>
+              <a:ext uri="{FF2B5EF4-FFF2-40B4-BE49-F238E27FC236}">
+                <a16:creationId xmlns:a16="http://schemas.microsoft.com/office/drawing/2014/main" id="{F9FA722D-0C29-FFD6-3A52-F1EFAF774B80}"/>
+              </a:ext>
+            </a:extLst>
+          </p:cNvPr>
+          <p:cNvSpPr/>
+          <p:nvPr/>
+        </p:nvSpPr>
+        <p:spPr>
+          <a:xfrm>
+            <a:off x="9594473" y="9115374"/>
+            <a:ext cx="2410800" cy="780327"/>
+          </a:xfrm>
+          <a:prstGeom prst="roundRect">
+            <a:avLst>
+              <a:gd name="adj" fmla="val 16667"/>
+            </a:avLst>
+          </a:prstGeom>
+          <a:solidFill>
+            <a:srgbClr val="D0E0E3"/>
+          </a:solidFill>
+          <a:ln w="28575" cap="flat" cmpd="sng">
+            <a:solidFill>
+              <a:srgbClr val="134F5C"/>
+            </a:solidFill>
+            <a:prstDash val="solid"/>
+            <a:round/>
+            <a:headEnd type="none" w="sm" len="sm"/>
+            <a:tailEnd type="none" w="sm" len="sm"/>
+          </a:ln>
+        </p:spPr>
+        <p:txBody>
+          <a:bodyPr spcFirstLastPara="1" wrap="square" lIns="91425" tIns="91425" rIns="91425" bIns="91425" anchor="t" anchorCtr="0">
+            <a:noAutofit/>
+          </a:bodyPr>
+          <a:lstStyle/>
+          <a:p>
+            <a:pPr lvl="0"/>
+            <a:r>
+              <a:rPr lang="pt-PT" dirty="0">
+                <a:latin typeface="Consolas"/>
+                <a:ea typeface="Consolas"/>
+                <a:cs typeface="Consolas"/>
+                <a:sym typeface="Consolas"/>
+              </a:rPr>
+              <a:t>T4: Fazer resource trader bot feature.</a:t>
+            </a:r>
+          </a:p>
+          <a:p>
+            <a:pPr marL="0" lvl="0" indent="0" algn="l" rtl="0">
+              <a:spcBef>
+                <a:spcPts val="0"/>
+              </a:spcBef>
+              <a:spcAft>
+                <a:spcPts val="0"/>
+              </a:spcAft>
+              <a:buNone/>
+            </a:pPr>
+            <a:br>
+              <a:rPr lang="en-GB" dirty="0">
+                <a:latin typeface="Consolas"/>
+                <a:ea typeface="Consolas"/>
+                <a:cs typeface="Consolas"/>
+                <a:sym typeface="Consolas"/>
+              </a:rPr>
+            </a:br>
+            <a:br>
+              <a:rPr lang="en-GB" dirty="0">
+                <a:latin typeface="Consolas"/>
+                <a:ea typeface="Consolas"/>
+                <a:cs typeface="Consolas"/>
+                <a:sym typeface="Consolas"/>
+              </a:rPr>
+            </a:br>
+            <a:endParaRPr lang="en-GB" dirty="0">
+              <a:latin typeface="Consolas"/>
+              <a:ea typeface="Consolas"/>
+              <a:cs typeface="Consolas"/>
+              <a:sym typeface="Consolas"/>
+            </a:endParaRPr>
+          </a:p>
+          <a:p>
+            <a:pPr marL="0" lvl="0" indent="0" algn="l" rtl="0">
+              <a:spcBef>
+                <a:spcPts val="0"/>
+              </a:spcBef>
+              <a:spcAft>
+                <a:spcPts val="0"/>
+              </a:spcAft>
+              <a:buNone/>
+            </a:pPr>
+            <a:endParaRPr dirty="0">
+              <a:latin typeface="Consolas"/>
+              <a:ea typeface="Consolas"/>
+              <a:cs typeface="Consolas"/>
+              <a:sym typeface="Consolas"/>
+            </a:endParaRPr>
+          </a:p>
+        </p:txBody>
+      </p:sp>
+      <p:sp>
+        <p:nvSpPr>
+          <p:cNvPr id="15" name="Google Shape;92;p15">
+            <a:extLst>
+              <a:ext uri="{FF2B5EF4-FFF2-40B4-BE49-F238E27FC236}">
+                <a16:creationId xmlns:a16="http://schemas.microsoft.com/office/drawing/2014/main" id="{774F3E31-8F85-7DC1-FE80-F7EBB8F71207}"/>
+              </a:ext>
+            </a:extLst>
+          </p:cNvPr>
+          <p:cNvSpPr/>
+          <p:nvPr/>
+        </p:nvSpPr>
+        <p:spPr>
+          <a:xfrm>
+            <a:off x="270828" y="872940"/>
+            <a:ext cx="2185575" cy="1792037"/>
+          </a:xfrm>
+          <a:prstGeom prst="roundRect">
+            <a:avLst>
+              <a:gd name="adj" fmla="val 16667"/>
+            </a:avLst>
+          </a:prstGeom>
+          <a:solidFill>
+            <a:srgbClr val="D9EAD3"/>
+          </a:solidFill>
+          <a:ln w="28575" cap="flat" cmpd="sng">
+            <a:solidFill>
+              <a:srgbClr val="274E13"/>
+            </a:solidFill>
+            <a:prstDash val="solid"/>
+            <a:round/>
+            <a:headEnd type="none" w="sm" len="sm"/>
+            <a:tailEnd type="none" w="sm" len="sm"/>
+          </a:ln>
+        </p:spPr>
+        <p:txBody>
+          <a:bodyPr spcFirstLastPara="1" wrap="square" lIns="91425" tIns="91425" rIns="91425" bIns="91425" anchor="t" anchorCtr="0">
+            <a:noAutofit/>
+          </a:bodyPr>
+          <a:lstStyle/>
+          <a:p>
+            <a:pPr lvl="0"/>
+            <a:r>
+              <a:rPr lang="pt-PT" dirty="0">
+                <a:latin typeface="Consolas"/>
+                <a:ea typeface="Consolas"/>
+                <a:cs typeface="Consolas"/>
+                <a:sym typeface="Consolas"/>
+              </a:rPr>
+              <a:t>T1: Terminar tsunami e earthquake spawners.</a:t>
+            </a:r>
+            <a:endParaRPr dirty="0">
+              <a:latin typeface="Consolas"/>
+              <a:ea typeface="Consolas"/>
+              <a:cs typeface="Consolas"/>
+              <a:sym typeface="Consolas"/>
+            </a:endParaRPr>
+          </a:p>
+        </p:txBody>
+      </p:sp>
+      <p:sp>
+        <p:nvSpPr>
+          <p:cNvPr id="16" name="Google Shape;92;p15">
+            <a:extLst>
+              <a:ext uri="{FF2B5EF4-FFF2-40B4-BE49-F238E27FC236}">
+                <a16:creationId xmlns:a16="http://schemas.microsoft.com/office/drawing/2014/main" id="{2E70AA5A-8D44-4BAA-3E72-972613D1910B}"/>
+              </a:ext>
+            </a:extLst>
+          </p:cNvPr>
+          <p:cNvSpPr/>
+          <p:nvPr/>
+        </p:nvSpPr>
+        <p:spPr>
+          <a:xfrm>
+            <a:off x="277880" y="2783177"/>
+            <a:ext cx="2185575" cy="1792037"/>
+          </a:xfrm>
+          <a:prstGeom prst="roundRect">
+            <a:avLst>
+              <a:gd name="adj" fmla="val 16667"/>
+            </a:avLst>
+          </a:prstGeom>
+          <a:solidFill>
+            <a:srgbClr val="D9EAD3"/>
+          </a:solidFill>
+          <a:ln w="28575" cap="flat" cmpd="sng">
+            <a:solidFill>
+              <a:srgbClr val="274E13"/>
+            </a:solidFill>
+            <a:prstDash val="solid"/>
+            <a:round/>
+            <a:headEnd type="none" w="sm" len="sm"/>
+            <a:tailEnd type="none" w="sm" len="sm"/>
+          </a:ln>
+        </p:spPr>
+        <p:txBody>
+          <a:bodyPr spcFirstLastPara="1" wrap="square" lIns="91425" tIns="91425" rIns="91425" bIns="91425" anchor="t" anchorCtr="0">
+            <a:noAutofit/>
+          </a:bodyPr>
+          <a:lstStyle/>
+          <a:p>
+            <a:pPr lvl="0"/>
+            <a:r>
+              <a:rPr lang="pt-PT" dirty="0">
+                <a:latin typeface="Consolas"/>
+                <a:ea typeface="Consolas"/>
+                <a:cs typeface="Consolas"/>
+                <a:sym typeface="Consolas"/>
+              </a:rPr>
+              <a:t>T2: Fazer abstract class para as catastrofes naturais.</a:t>
+            </a:r>
+            <a:endParaRPr dirty="0">
+              <a:latin typeface="Consolas"/>
+              <a:ea typeface="Consolas"/>
+              <a:cs typeface="Consolas"/>
+              <a:sym typeface="Consolas"/>
+            </a:endParaRPr>
+          </a:p>
+        </p:txBody>
+      </p:sp>
+      <p:sp>
+        <p:nvSpPr>
+          <p:cNvPr id="17" name="Google Shape;92;p15">
+            <a:extLst>
+              <a:ext uri="{FF2B5EF4-FFF2-40B4-BE49-F238E27FC236}">
+                <a16:creationId xmlns:a16="http://schemas.microsoft.com/office/drawing/2014/main" id="{D35345B3-FE6D-E59C-3F4E-4B74316595DA}"/>
+              </a:ext>
+            </a:extLst>
+          </p:cNvPr>
+          <p:cNvSpPr/>
+          <p:nvPr/>
+        </p:nvSpPr>
+        <p:spPr>
+          <a:xfrm>
+            <a:off x="277880" y="4699227"/>
+            <a:ext cx="2185575" cy="1792037"/>
+          </a:xfrm>
+          <a:prstGeom prst="roundRect">
+            <a:avLst>
+              <a:gd name="adj" fmla="val 16667"/>
+            </a:avLst>
+          </a:prstGeom>
+          <a:solidFill>
+            <a:srgbClr val="D9EAD3"/>
+          </a:solidFill>
+          <a:ln w="28575" cap="flat" cmpd="sng">
+            <a:solidFill>
+              <a:srgbClr val="274E13"/>
+            </a:solidFill>
+            <a:prstDash val="solid"/>
+            <a:round/>
+            <a:headEnd type="none" w="sm" len="sm"/>
+            <a:tailEnd type="none" w="sm" len="sm"/>
+          </a:ln>
+        </p:spPr>
+        <p:txBody>
+          <a:bodyPr spcFirstLastPara="1" wrap="square" lIns="91425" tIns="91425" rIns="91425" bIns="91425" anchor="t" anchorCtr="0">
+            <a:noAutofit/>
+          </a:bodyPr>
+          <a:lstStyle/>
+          <a:p>
+            <a:pPr lvl="0"/>
+            <a:r>
+              <a:rPr lang="pt-PT" dirty="0">
+                <a:latin typeface="Consolas"/>
+                <a:ea typeface="Consolas"/>
+                <a:cs typeface="Consolas"/>
+                <a:sym typeface="Consolas"/>
+              </a:rPr>
+              <a:t>T3: Aplicar sistema de ranking e finalizar as waves do mode semanal.</a:t>
+            </a:r>
+            <a:endParaRPr dirty="0">
+              <a:latin typeface="Consolas"/>
+              <a:ea typeface="Consolas"/>
+              <a:cs typeface="Consolas"/>
+              <a:sym typeface="Consolas"/>
+            </a:endParaRPr>
+          </a:p>
+        </p:txBody>
+      </p:sp>
+      <p:sp>
+        <p:nvSpPr>
+          <p:cNvPr id="18" name="Google Shape;92;p15">
+            <a:extLst>
+              <a:ext uri="{FF2B5EF4-FFF2-40B4-BE49-F238E27FC236}">
+                <a16:creationId xmlns:a16="http://schemas.microsoft.com/office/drawing/2014/main" id="{C26CAFA7-BD7F-EA68-2370-3B25E91E09FB}"/>
+              </a:ext>
+            </a:extLst>
+          </p:cNvPr>
+          <p:cNvSpPr/>
+          <p:nvPr/>
+        </p:nvSpPr>
+        <p:spPr>
+          <a:xfrm>
+            <a:off x="277880" y="6615277"/>
+            <a:ext cx="2185575" cy="1792037"/>
+          </a:xfrm>
+          <a:prstGeom prst="roundRect">
+            <a:avLst>
+              <a:gd name="adj" fmla="val 16667"/>
+            </a:avLst>
+          </a:prstGeom>
+          <a:solidFill>
+            <a:srgbClr val="D9EAD3"/>
+          </a:solidFill>
+          <a:ln w="28575" cap="flat" cmpd="sng">
+            <a:solidFill>
+              <a:srgbClr val="274E13"/>
+            </a:solidFill>
+            <a:prstDash val="solid"/>
+            <a:round/>
+            <a:headEnd type="none" w="sm" len="sm"/>
+            <a:tailEnd type="none" w="sm" len="sm"/>
+          </a:ln>
+        </p:spPr>
+        <p:txBody>
+          <a:bodyPr spcFirstLastPara="1" wrap="square" lIns="91425" tIns="91425" rIns="91425" bIns="91425" anchor="t" anchorCtr="0">
+            <a:noAutofit/>
+          </a:bodyPr>
+          <a:lstStyle/>
+          <a:p>
+            <a:pPr lvl="0"/>
+            <a:r>
+              <a:rPr lang="pt-PT" dirty="0">
+                <a:latin typeface="Consolas"/>
+                <a:ea typeface="Consolas"/>
+                <a:cs typeface="Consolas"/>
+                <a:sym typeface="Consolas"/>
+              </a:rPr>
+              <a:t>T4: Fazer resource trader bot feature.</a:t>
+            </a:r>
+            <a:endParaRPr dirty="0">
+              <a:latin typeface="Consolas"/>
+              <a:ea typeface="Consolas"/>
+              <a:cs typeface="Consolas"/>
+              <a:sym typeface="Consolas"/>
+            </a:endParaRPr>
+          </a:p>
+        </p:txBody>
+      </p:sp>
+      <p:sp>
+        <p:nvSpPr>
+          <p:cNvPr id="19" name="Google Shape;92;p15">
+            <a:extLst>
+              <a:ext uri="{FF2B5EF4-FFF2-40B4-BE49-F238E27FC236}">
+                <a16:creationId xmlns:a16="http://schemas.microsoft.com/office/drawing/2014/main" id="{9174B470-1A69-92FC-6E0D-8AF9B2BEDEE6}"/>
+              </a:ext>
+            </a:extLst>
+          </p:cNvPr>
+          <p:cNvSpPr/>
+          <p:nvPr/>
+        </p:nvSpPr>
+        <p:spPr>
+          <a:xfrm>
+            <a:off x="6073006" y="8884240"/>
+            <a:ext cx="3239127" cy="1552771"/>
+          </a:xfrm>
+          <a:prstGeom prst="roundRect">
+            <a:avLst>
+              <a:gd name="adj" fmla="val 16667"/>
+            </a:avLst>
+          </a:prstGeom>
+          <a:solidFill>
+            <a:srgbClr val="D9EAD3"/>
+          </a:solidFill>
+          <a:ln w="28575" cap="flat" cmpd="sng">
+            <a:solidFill>
+              <a:srgbClr val="274E13"/>
+            </a:solidFill>
+            <a:prstDash val="solid"/>
+            <a:round/>
+            <a:headEnd type="none" w="sm" len="sm"/>
+            <a:tailEnd type="none" w="sm" len="sm"/>
+          </a:ln>
+        </p:spPr>
+        <p:txBody>
+          <a:bodyPr spcFirstLastPara="1" wrap="square" lIns="91425" tIns="91425" rIns="91425" bIns="91425" anchor="t" anchorCtr="0">
+            <a:noAutofit/>
+          </a:bodyPr>
+          <a:lstStyle/>
+          <a:p>
+            <a:pPr lvl="0"/>
+            <a:r>
+              <a:rPr lang="en-GB" dirty="0">
+                <a:latin typeface="Consolas"/>
+                <a:ea typeface="Consolas"/>
+                <a:cs typeface="Consolas"/>
+                <a:sym typeface="Consolas"/>
+              </a:rPr>
+              <a:t>US4: Como </a:t>
+            </a:r>
+            <a:r>
+              <a:rPr lang="en-GB" dirty="0" err="1">
+                <a:latin typeface="Consolas"/>
+                <a:ea typeface="Consolas"/>
+                <a:cs typeface="Consolas"/>
+                <a:sym typeface="Consolas"/>
+              </a:rPr>
+              <a:t>membro</a:t>
+            </a:r>
+            <a:r>
+              <a:rPr lang="en-GB" dirty="0">
+                <a:latin typeface="Consolas"/>
+                <a:ea typeface="Consolas"/>
+                <a:cs typeface="Consolas"/>
+                <a:sym typeface="Consolas"/>
+              </a:rPr>
+              <a:t> da </a:t>
+            </a:r>
+            <a:r>
+              <a:rPr lang="en-GB" dirty="0" err="1">
+                <a:latin typeface="Consolas"/>
+                <a:ea typeface="Consolas"/>
+                <a:cs typeface="Consolas"/>
+                <a:sym typeface="Consolas"/>
+              </a:rPr>
+              <a:t>equipa</a:t>
+            </a:r>
+            <a:r>
+              <a:rPr lang="en-GB" dirty="0">
+                <a:latin typeface="Consolas"/>
+                <a:ea typeface="Consolas"/>
+                <a:cs typeface="Consolas"/>
+                <a:sym typeface="Consolas"/>
+              </a:rPr>
+              <a:t> </a:t>
+            </a:r>
+            <a:r>
+              <a:rPr lang="en-GB" dirty="0" err="1">
+                <a:latin typeface="Consolas"/>
+                <a:ea typeface="Consolas"/>
+                <a:cs typeface="Consolas"/>
+                <a:sym typeface="Consolas"/>
+              </a:rPr>
+              <a:t>quero</a:t>
+            </a:r>
+            <a:r>
+              <a:rPr lang="en-GB" dirty="0">
+                <a:latin typeface="Consolas"/>
+                <a:ea typeface="Consolas"/>
+                <a:cs typeface="Consolas"/>
+                <a:sym typeface="Consolas"/>
+              </a:rPr>
+              <a:t> f</a:t>
+            </a:r>
+            <a:r>
+              <a:rPr lang="pt-PT" dirty="0">
+                <a:latin typeface="Consolas"/>
+                <a:ea typeface="Consolas"/>
+                <a:cs typeface="Consolas"/>
+                <a:sym typeface="Consolas"/>
+              </a:rPr>
+              <a:t>azer resource trader bot feature, com o qual os jogadores podem fazer trocas de uns recursos por outros durante o jogo</a:t>
+            </a:r>
+            <a:endParaRPr dirty="0">
+              <a:latin typeface="Consolas"/>
+              <a:ea typeface="Consolas"/>
+              <a:cs typeface="Consolas"/>
+              <a:sym typeface="Consolas"/>
+            </a:endParaRPr>
+          </a:p>
+        </p:txBody>
+      </p:sp>
+      <p:sp>
+        <p:nvSpPr>
+          <p:cNvPr id="20" name="Google Shape;121;p16">
+            <a:extLst>
+              <a:ext uri="{FF2B5EF4-FFF2-40B4-BE49-F238E27FC236}">
+                <a16:creationId xmlns:a16="http://schemas.microsoft.com/office/drawing/2014/main" id="{2B47F683-630C-9164-86A5-E9DA21ACA18F}"/>
+              </a:ext>
+            </a:extLst>
+          </p:cNvPr>
+          <p:cNvSpPr/>
+          <p:nvPr/>
+        </p:nvSpPr>
+        <p:spPr>
+          <a:xfrm>
+            <a:off x="9555665" y="6101100"/>
+            <a:ext cx="2410800" cy="780327"/>
+          </a:xfrm>
+          <a:prstGeom prst="roundRect">
+            <a:avLst>
+              <a:gd name="adj" fmla="val 16667"/>
+            </a:avLst>
+          </a:prstGeom>
+          <a:solidFill>
+            <a:srgbClr val="D0E0E3"/>
+          </a:solidFill>
+          <a:ln w="28575" cap="flat" cmpd="sng">
+            <a:solidFill>
+              <a:srgbClr val="134F5C"/>
+            </a:solidFill>
+            <a:prstDash val="solid"/>
+            <a:round/>
+            <a:headEnd type="none" w="sm" len="sm"/>
+            <a:tailEnd type="none" w="sm" len="sm"/>
+          </a:ln>
+        </p:spPr>
+        <p:txBody>
+          <a:bodyPr spcFirstLastPara="1" wrap="square" lIns="91425" tIns="91425" rIns="91425" bIns="91425" anchor="t" anchorCtr="0">
+            <a:noAutofit/>
+          </a:bodyPr>
+          <a:lstStyle/>
+          <a:p>
+            <a:pPr lvl="0"/>
+            <a:r>
+              <a:rPr lang="pt-PT" dirty="0">
+                <a:latin typeface="Consolas"/>
+                <a:ea typeface="Consolas"/>
+                <a:cs typeface="Consolas"/>
+                <a:sym typeface="Consolas"/>
+              </a:rPr>
+              <a:t>T4: Fazer resource trader bot feature.</a:t>
+            </a:r>
+          </a:p>
+          <a:p>
+            <a:pPr marL="0" lvl="0" indent="0" algn="l" rtl="0">
+              <a:spcBef>
+                <a:spcPts val="0"/>
+              </a:spcBef>
+              <a:spcAft>
+                <a:spcPts val="0"/>
+              </a:spcAft>
+              <a:buNone/>
+            </a:pPr>
+            <a:br>
+              <a:rPr lang="en-GB" dirty="0">
+                <a:latin typeface="Consolas"/>
+                <a:ea typeface="Consolas"/>
+                <a:cs typeface="Consolas"/>
+                <a:sym typeface="Consolas"/>
+              </a:rPr>
+            </a:br>
+            <a:br>
+              <a:rPr lang="en-GB" dirty="0">
+                <a:latin typeface="Consolas"/>
+                <a:ea typeface="Consolas"/>
+                <a:cs typeface="Consolas"/>
+                <a:sym typeface="Consolas"/>
+              </a:rPr>
+            </a:br>
+            <a:endParaRPr lang="en-GB" dirty="0">
+              <a:latin typeface="Consolas"/>
+              <a:ea typeface="Consolas"/>
+              <a:cs typeface="Consolas"/>
+              <a:sym typeface="Consolas"/>
+            </a:endParaRPr>
+          </a:p>
+          <a:p>
+            <a:pPr marL="0" lvl="0" indent="0" algn="l" rtl="0">
+              <a:spcBef>
+                <a:spcPts val="0"/>
+              </a:spcBef>
+              <a:spcAft>
+                <a:spcPts val="0"/>
+              </a:spcAft>
+              <a:buNone/>
+            </a:pPr>
+            <a:endParaRPr dirty="0">
+              <a:latin typeface="Consolas"/>
+              <a:ea typeface="Consolas"/>
+              <a:cs typeface="Consolas"/>
+              <a:sym typeface="Consolas"/>
+            </a:endParaRPr>
+          </a:p>
+        </p:txBody>
+      </p:sp>
+    </p:spTree>
+    <p:extLst>
+      <p:ext uri="{BB962C8B-B14F-4D97-AF65-F5344CB8AC3E}">
+        <p14:creationId xmlns:p14="http://schemas.microsoft.com/office/powerpoint/2010/main" val="2062749016"/>
+      </p:ext>
+    </p:extLst>
+  </p:cSld>
+  <p:clrMapOvr>
+    <a:masterClrMapping/>
+  </p:clrMapOvr>
+</p:sld>
+</file>
+
 <file path=ppt/slides/slide3.xml><?xml version="1.0" encoding="utf-8"?>
 <p:sld xmlns:a="http://schemas.openxmlformats.org/drawingml/2006/main" xmlns:r="http://schemas.openxmlformats.org/officeDocument/2006/relationships" xmlns:p="http://schemas.openxmlformats.org/presentationml/2006/main">
   <p:cSld>

--- a/SE202526/Management/Scrum Board.pptx
+++ b/SE202526/Management/Scrum Board.pptx
@@ -5,7 +5,7 @@
     <p:sldMasterId id="2147483659" r:id="rId1"/>
   </p:sldMasterIdLst>
   <p:notesMasterIdLst>
-    <p:notesMasterId r:id="rId28"/>
+    <p:notesMasterId r:id="rId29"/>
   </p:notesMasterIdLst>
   <p:sldIdLst>
     <p:sldId id="256" r:id="rId2"/>
@@ -34,6 +34,7 @@
     <p:sldId id="282" r:id="rId25"/>
     <p:sldId id="283" r:id="rId26"/>
     <p:sldId id="284" r:id="rId27"/>
+    <p:sldId id="285" r:id="rId28"/>
   </p:sldIdLst>
   <p:sldSz cx="21599525" cy="10799763"/>
   <p:notesSz cx="6858000" cy="9144000"/>
@@ -3084,6 +3085,133 @@
     <p:extLst>
       <p:ext uri="{BB962C8B-B14F-4D97-AF65-F5344CB8AC3E}">
         <p14:creationId xmlns:p14="http://schemas.microsoft.com/office/powerpoint/2010/main" val="1467835178"/>
+      </p:ext>
+    </p:extLst>
+  </p:cSld>
+  <p:clrMapOvr>
+    <a:masterClrMapping/>
+  </p:clrMapOvr>
+</p:notes>
+</file>
+
+<file path=ppt/notesSlides/notesSlide27.xml><?xml version="1.0" encoding="utf-8"?>
+<p:notes xmlns:a="http://schemas.openxmlformats.org/drawingml/2006/main" xmlns:r="http://schemas.openxmlformats.org/officeDocument/2006/relationships" xmlns:p="http://schemas.openxmlformats.org/presentationml/2006/main" showMasterSp="0" showMasterPhAnim="0">
+  <p:cSld>
+    <p:spTree>
+      <p:nvGrpSpPr>
+        <p:cNvPr id="1" name="Shape 186">
+          <a:extLst>
+            <a:ext uri="{FF2B5EF4-FFF2-40B4-BE49-F238E27FC236}">
+              <a16:creationId xmlns:a16="http://schemas.microsoft.com/office/drawing/2014/main" id="{D5FEDCF4-1D3F-A876-EC7F-E063FB170265}"/>
+            </a:ext>
+          </a:extLst>
+        </p:cNvPr>
+        <p:cNvGrpSpPr/>
+        <p:nvPr/>
+      </p:nvGrpSpPr>
+      <p:grpSpPr>
+        <a:xfrm>
+          <a:off x="0" y="0"/>
+          <a:ext cx="0" cy="0"/>
+          <a:chOff x="0" y="0"/>
+          <a:chExt cx="0" cy="0"/>
+        </a:xfrm>
+      </p:grpSpPr>
+      <p:sp>
+        <p:nvSpPr>
+          <p:cNvPr id="187" name="Google Shape;187;g3850b307b58_0_218:notes">
+            <a:extLst>
+              <a:ext uri="{FF2B5EF4-FFF2-40B4-BE49-F238E27FC236}">
+                <a16:creationId xmlns:a16="http://schemas.microsoft.com/office/drawing/2014/main" id="{CFDEC4F2-FB39-8EF1-AF8A-6BA7BF2E9916}"/>
+              </a:ext>
+            </a:extLst>
+          </p:cNvPr>
+          <p:cNvSpPr>
+            <a:spLocks noGrp="1" noRot="1" noChangeAspect="1"/>
+          </p:cNvSpPr>
+          <p:nvPr>
+            <p:ph type="sldImg" idx="2"/>
+          </p:nvPr>
+        </p:nvSpPr>
+        <p:spPr>
+          <a:xfrm>
+            <a:off x="0" y="685800"/>
+            <a:ext cx="6858000" cy="3429000"/>
+          </a:xfrm>
+          <a:custGeom>
+            <a:avLst/>
+            <a:gdLst/>
+            <a:ahLst/>
+            <a:cxnLst/>
+            <a:rect l="l" t="t" r="r" b="b"/>
+            <a:pathLst>
+              <a:path w="120000" h="120000" extrusionOk="0">
+                <a:moveTo>
+                  <a:pt x="0" y="0"/>
+                </a:moveTo>
+                <a:lnTo>
+                  <a:pt x="120000" y="0"/>
+                </a:lnTo>
+                <a:lnTo>
+                  <a:pt x="120000" y="120000"/>
+                </a:lnTo>
+                <a:lnTo>
+                  <a:pt x="0" y="120000"/>
+                </a:lnTo>
+                <a:close/>
+              </a:path>
+            </a:pathLst>
+          </a:custGeom>
+        </p:spPr>
+      </p:sp>
+      <p:sp>
+        <p:nvSpPr>
+          <p:cNvPr id="188" name="Google Shape;188;g3850b307b58_0_218:notes">
+            <a:extLst>
+              <a:ext uri="{FF2B5EF4-FFF2-40B4-BE49-F238E27FC236}">
+                <a16:creationId xmlns:a16="http://schemas.microsoft.com/office/drawing/2014/main" id="{E7B83622-7EF1-000E-F7B3-8D56357C5814}"/>
+              </a:ext>
+            </a:extLst>
+          </p:cNvPr>
+          <p:cNvSpPr txBox="1">
+            <a:spLocks noGrp="1"/>
+          </p:cNvSpPr>
+          <p:nvPr>
+            <p:ph type="body" idx="1"/>
+          </p:nvPr>
+        </p:nvSpPr>
+        <p:spPr>
+          <a:xfrm>
+            <a:off x="685800" y="4343400"/>
+            <a:ext cx="5486400" cy="4114800"/>
+          </a:xfrm>
+          <a:prstGeom prst="rect">
+            <a:avLst/>
+          </a:prstGeom>
+        </p:spPr>
+        <p:txBody>
+          <a:bodyPr spcFirstLastPara="1" wrap="square" lIns="91425" tIns="91425" rIns="91425" bIns="91425" anchor="t" anchorCtr="0">
+            <a:noAutofit/>
+          </a:bodyPr>
+          <a:lstStyle/>
+          <a:p>
+            <a:pPr marL="0" lvl="0" indent="0" algn="l" rtl="0">
+              <a:spcBef>
+                <a:spcPts val="0"/>
+              </a:spcBef>
+              <a:spcAft>
+                <a:spcPts val="0"/>
+              </a:spcAft>
+              <a:buNone/>
+            </a:pPr>
+            <a:endParaRPr/>
+          </a:p>
+        </p:txBody>
+      </p:sp>
+    </p:spTree>
+    <p:extLst>
+      <p:ext uri="{BB962C8B-B14F-4D97-AF65-F5344CB8AC3E}">
+        <p14:creationId xmlns:p14="http://schemas.microsoft.com/office/powerpoint/2010/main" val="3464284141"/>
       </p:ext>
     </p:extLst>
   </p:cSld>
@@ -40346,6 +40474,2317 @@
 </p:sld>
 </file>
 
+<file path=ppt/slides/slide27.xml><?xml version="1.0" encoding="utf-8"?>
+<p:sld xmlns:a="http://schemas.openxmlformats.org/drawingml/2006/main" xmlns:r="http://schemas.openxmlformats.org/officeDocument/2006/relationships" xmlns:p="http://schemas.openxmlformats.org/presentationml/2006/main">
+  <p:cSld>
+    <p:spTree>
+      <p:nvGrpSpPr>
+        <p:cNvPr id="1" name="Shape 189">
+          <a:extLst>
+            <a:ext uri="{FF2B5EF4-FFF2-40B4-BE49-F238E27FC236}">
+              <a16:creationId xmlns:a16="http://schemas.microsoft.com/office/drawing/2014/main" id="{38B40F53-7C80-5485-64A7-49C6B6A8D225}"/>
+            </a:ext>
+          </a:extLst>
+        </p:cNvPr>
+        <p:cNvGrpSpPr/>
+        <p:nvPr/>
+      </p:nvGrpSpPr>
+      <p:grpSpPr>
+        <a:xfrm>
+          <a:off x="0" y="0"/>
+          <a:ext cx="0" cy="0"/>
+          <a:chOff x="0" y="0"/>
+          <a:chExt cx="0" cy="0"/>
+        </a:xfrm>
+      </p:grpSpPr>
+      <p:cxnSp>
+        <p:nvCxnSpPr>
+          <p:cNvPr id="190" name="Google Shape;190;p19">
+            <a:extLst>
+              <a:ext uri="{FF2B5EF4-FFF2-40B4-BE49-F238E27FC236}">
+                <a16:creationId xmlns:a16="http://schemas.microsoft.com/office/drawing/2014/main" id="{542070C5-6431-B5F0-8372-E369FDB6D570}"/>
+              </a:ext>
+            </a:extLst>
+          </p:cNvPr>
+          <p:cNvCxnSpPr/>
+          <p:nvPr/>
+        </p:nvCxnSpPr>
+        <p:spPr>
+          <a:xfrm>
+            <a:off x="5944724" y="-31500"/>
+            <a:ext cx="0" cy="10857000"/>
+          </a:xfrm>
+          <a:prstGeom prst="straightConnector1">
+            <a:avLst/>
+          </a:prstGeom>
+          <a:noFill/>
+          <a:ln w="38100" cap="flat" cmpd="sng">
+            <a:solidFill>
+              <a:srgbClr val="5B0F00"/>
+            </a:solidFill>
+            <a:prstDash val="solid"/>
+            <a:round/>
+            <a:headEnd type="none" w="med" len="med"/>
+            <a:tailEnd type="none" w="med" len="med"/>
+          </a:ln>
+        </p:spPr>
+      </p:cxnSp>
+      <p:sp>
+        <p:nvSpPr>
+          <p:cNvPr id="191" name="Google Shape;191;p19">
+            <a:extLst>
+              <a:ext uri="{FF2B5EF4-FFF2-40B4-BE49-F238E27FC236}">
+                <a16:creationId xmlns:a16="http://schemas.microsoft.com/office/drawing/2014/main" id="{A475E9F0-077B-640C-CC2C-431DBA9CE48A}"/>
+              </a:ext>
+            </a:extLst>
+          </p:cNvPr>
+          <p:cNvSpPr/>
+          <p:nvPr/>
+        </p:nvSpPr>
+        <p:spPr>
+          <a:xfrm>
+            <a:off x="3197186" y="84312"/>
+            <a:ext cx="2410800" cy="480900"/>
+          </a:xfrm>
+          <a:prstGeom prst="roundRect">
+            <a:avLst>
+              <a:gd name="adj" fmla="val 16667"/>
+            </a:avLst>
+          </a:prstGeom>
+          <a:solidFill>
+            <a:srgbClr val="F9CB9C"/>
+          </a:solidFill>
+          <a:ln w="28575" cap="flat" cmpd="sng">
+            <a:solidFill>
+              <a:srgbClr val="B45F06"/>
+            </a:solidFill>
+            <a:prstDash val="solid"/>
+            <a:round/>
+            <a:headEnd type="none" w="sm" len="sm"/>
+            <a:tailEnd type="none" w="sm" len="sm"/>
+          </a:ln>
+        </p:spPr>
+        <p:txBody>
+          <a:bodyPr spcFirstLastPara="1" wrap="square" lIns="91425" tIns="91425" rIns="91425" bIns="91425" anchor="ctr" anchorCtr="0">
+            <a:noAutofit/>
+          </a:bodyPr>
+          <a:lstStyle/>
+          <a:p>
+            <a:pPr marL="0" lvl="0" indent="0" algn="ctr" rtl="0">
+              <a:spcBef>
+                <a:spcPts val="0"/>
+              </a:spcBef>
+              <a:spcAft>
+                <a:spcPts val="0"/>
+              </a:spcAft>
+              <a:buNone/>
+            </a:pPr>
+            <a:r>
+              <a:rPr lang="en-GB" sz="1800" b="1">
+                <a:latin typeface="Consolas"/>
+                <a:ea typeface="Consolas"/>
+                <a:cs typeface="Consolas"/>
+                <a:sym typeface="Consolas"/>
+              </a:rPr>
+              <a:t>Student ID</a:t>
+            </a:r>
+            <a:endParaRPr sz="1800" b="1">
+              <a:latin typeface="Consolas"/>
+              <a:ea typeface="Consolas"/>
+              <a:cs typeface="Consolas"/>
+              <a:sym typeface="Consolas"/>
+            </a:endParaRPr>
+          </a:p>
+        </p:txBody>
+      </p:sp>
+      <p:sp>
+        <p:nvSpPr>
+          <p:cNvPr id="192" name="Google Shape;192;p19">
+            <a:extLst>
+              <a:ext uri="{FF2B5EF4-FFF2-40B4-BE49-F238E27FC236}">
+                <a16:creationId xmlns:a16="http://schemas.microsoft.com/office/drawing/2014/main" id="{EAAFB6FC-A304-815E-465B-46CE5E66C3DD}"/>
+              </a:ext>
+            </a:extLst>
+          </p:cNvPr>
+          <p:cNvSpPr/>
+          <p:nvPr/>
+        </p:nvSpPr>
+        <p:spPr>
+          <a:xfrm>
+            <a:off x="6281636" y="84312"/>
+            <a:ext cx="2410800" cy="480900"/>
+          </a:xfrm>
+          <a:prstGeom prst="roundRect">
+            <a:avLst>
+              <a:gd name="adj" fmla="val 16667"/>
+            </a:avLst>
+          </a:prstGeom>
+          <a:solidFill>
+            <a:srgbClr val="F9CB9C"/>
+          </a:solidFill>
+          <a:ln w="28575" cap="flat" cmpd="sng">
+            <a:solidFill>
+              <a:srgbClr val="B45F06"/>
+            </a:solidFill>
+            <a:prstDash val="solid"/>
+            <a:round/>
+            <a:headEnd type="none" w="sm" len="sm"/>
+            <a:tailEnd type="none" w="sm" len="sm"/>
+          </a:ln>
+        </p:spPr>
+        <p:txBody>
+          <a:bodyPr spcFirstLastPara="1" wrap="square" lIns="91425" tIns="91425" rIns="91425" bIns="91425" anchor="ctr" anchorCtr="0">
+            <a:noAutofit/>
+          </a:bodyPr>
+          <a:lstStyle/>
+          <a:p>
+            <a:pPr marL="0" lvl="0" indent="0" algn="ctr" rtl="0">
+              <a:spcBef>
+                <a:spcPts val="0"/>
+              </a:spcBef>
+              <a:spcAft>
+                <a:spcPts val="0"/>
+              </a:spcAft>
+              <a:buNone/>
+            </a:pPr>
+            <a:r>
+              <a:rPr lang="en-GB" sz="1800" b="1">
+                <a:latin typeface="Consolas"/>
+                <a:ea typeface="Consolas"/>
+                <a:cs typeface="Consolas"/>
+                <a:sym typeface="Consolas"/>
+              </a:rPr>
+              <a:t>Story</a:t>
+            </a:r>
+            <a:endParaRPr sz="1800" b="1">
+              <a:latin typeface="Consolas"/>
+              <a:ea typeface="Consolas"/>
+              <a:cs typeface="Consolas"/>
+              <a:sym typeface="Consolas"/>
+            </a:endParaRPr>
+          </a:p>
+        </p:txBody>
+      </p:sp>
+      <p:sp>
+        <p:nvSpPr>
+          <p:cNvPr id="193" name="Google Shape;193;p19">
+            <a:extLst>
+              <a:ext uri="{FF2B5EF4-FFF2-40B4-BE49-F238E27FC236}">
+                <a16:creationId xmlns:a16="http://schemas.microsoft.com/office/drawing/2014/main" id="{C05F7EE9-B3DE-C9A5-5559-FE2DEE5C2EFF}"/>
+              </a:ext>
+            </a:extLst>
+          </p:cNvPr>
+          <p:cNvSpPr/>
+          <p:nvPr/>
+        </p:nvSpPr>
+        <p:spPr>
+          <a:xfrm>
+            <a:off x="9366071" y="84312"/>
+            <a:ext cx="2410800" cy="480900"/>
+          </a:xfrm>
+          <a:prstGeom prst="roundRect">
+            <a:avLst>
+              <a:gd name="adj" fmla="val 16667"/>
+            </a:avLst>
+          </a:prstGeom>
+          <a:solidFill>
+            <a:srgbClr val="F9CB9C"/>
+          </a:solidFill>
+          <a:ln w="28575" cap="flat" cmpd="sng">
+            <a:solidFill>
+              <a:srgbClr val="B45F06"/>
+            </a:solidFill>
+            <a:prstDash val="solid"/>
+            <a:round/>
+            <a:headEnd type="none" w="sm" len="sm"/>
+            <a:tailEnd type="none" w="sm" len="sm"/>
+          </a:ln>
+        </p:spPr>
+        <p:txBody>
+          <a:bodyPr spcFirstLastPara="1" wrap="square" lIns="91425" tIns="91425" rIns="91425" bIns="91425" anchor="ctr" anchorCtr="0">
+            <a:noAutofit/>
+          </a:bodyPr>
+          <a:lstStyle/>
+          <a:p>
+            <a:pPr marL="0" lvl="0" indent="0" algn="ctr" rtl="0">
+              <a:spcBef>
+                <a:spcPts val="0"/>
+              </a:spcBef>
+              <a:spcAft>
+                <a:spcPts val="0"/>
+              </a:spcAft>
+              <a:buNone/>
+            </a:pPr>
+            <a:r>
+              <a:rPr lang="en-GB" sz="1800" b="1">
+                <a:latin typeface="Consolas"/>
+                <a:ea typeface="Consolas"/>
+                <a:cs typeface="Consolas"/>
+                <a:sym typeface="Consolas"/>
+              </a:rPr>
+              <a:t>To Do</a:t>
+            </a:r>
+            <a:endParaRPr sz="1800" b="1">
+              <a:latin typeface="Consolas"/>
+              <a:ea typeface="Consolas"/>
+              <a:cs typeface="Consolas"/>
+              <a:sym typeface="Consolas"/>
+            </a:endParaRPr>
+          </a:p>
+        </p:txBody>
+      </p:sp>
+      <p:sp>
+        <p:nvSpPr>
+          <p:cNvPr id="194" name="Google Shape;194;p19">
+            <a:extLst>
+              <a:ext uri="{FF2B5EF4-FFF2-40B4-BE49-F238E27FC236}">
+                <a16:creationId xmlns:a16="http://schemas.microsoft.com/office/drawing/2014/main" id="{2772A143-6B7D-B705-CB8F-DE3A787555FC}"/>
+              </a:ext>
+            </a:extLst>
+          </p:cNvPr>
+          <p:cNvSpPr/>
+          <p:nvPr/>
+        </p:nvSpPr>
+        <p:spPr>
+          <a:xfrm>
+            <a:off x="12395940" y="84312"/>
+            <a:ext cx="2410800" cy="480900"/>
+          </a:xfrm>
+          <a:prstGeom prst="roundRect">
+            <a:avLst>
+              <a:gd name="adj" fmla="val 16667"/>
+            </a:avLst>
+          </a:prstGeom>
+          <a:solidFill>
+            <a:srgbClr val="F9CB9C"/>
+          </a:solidFill>
+          <a:ln w="28575" cap="flat" cmpd="sng">
+            <a:solidFill>
+              <a:srgbClr val="B45F06"/>
+            </a:solidFill>
+            <a:prstDash val="solid"/>
+            <a:round/>
+            <a:headEnd type="none" w="sm" len="sm"/>
+            <a:tailEnd type="none" w="sm" len="sm"/>
+          </a:ln>
+        </p:spPr>
+        <p:txBody>
+          <a:bodyPr spcFirstLastPara="1" wrap="square" lIns="91425" tIns="91425" rIns="91425" bIns="91425" anchor="ctr" anchorCtr="0">
+            <a:noAutofit/>
+          </a:bodyPr>
+          <a:lstStyle/>
+          <a:p>
+            <a:pPr marL="0" lvl="0" indent="0" algn="ctr" rtl="0">
+              <a:spcBef>
+                <a:spcPts val="0"/>
+              </a:spcBef>
+              <a:spcAft>
+                <a:spcPts val="0"/>
+              </a:spcAft>
+              <a:buNone/>
+            </a:pPr>
+            <a:r>
+              <a:rPr lang="en-GB" sz="1800" b="1">
+                <a:latin typeface="Consolas"/>
+                <a:ea typeface="Consolas"/>
+                <a:cs typeface="Consolas"/>
+                <a:sym typeface="Consolas"/>
+              </a:rPr>
+              <a:t>Doing</a:t>
+            </a:r>
+            <a:endParaRPr sz="1800" b="1">
+              <a:latin typeface="Consolas"/>
+              <a:ea typeface="Consolas"/>
+              <a:cs typeface="Consolas"/>
+              <a:sym typeface="Consolas"/>
+            </a:endParaRPr>
+          </a:p>
+        </p:txBody>
+      </p:sp>
+      <p:sp>
+        <p:nvSpPr>
+          <p:cNvPr id="195" name="Google Shape;195;p19">
+            <a:extLst>
+              <a:ext uri="{FF2B5EF4-FFF2-40B4-BE49-F238E27FC236}">
+                <a16:creationId xmlns:a16="http://schemas.microsoft.com/office/drawing/2014/main" id="{E825F796-654E-471F-F89C-57464C79DC55}"/>
+              </a:ext>
+            </a:extLst>
+          </p:cNvPr>
+          <p:cNvSpPr/>
+          <p:nvPr/>
+        </p:nvSpPr>
+        <p:spPr>
+          <a:xfrm>
+            <a:off x="15532407" y="84312"/>
+            <a:ext cx="2410800" cy="480900"/>
+          </a:xfrm>
+          <a:prstGeom prst="roundRect">
+            <a:avLst>
+              <a:gd name="adj" fmla="val 16667"/>
+            </a:avLst>
+          </a:prstGeom>
+          <a:solidFill>
+            <a:srgbClr val="F9CB9C"/>
+          </a:solidFill>
+          <a:ln w="28575" cap="flat" cmpd="sng">
+            <a:solidFill>
+              <a:srgbClr val="B45F06"/>
+            </a:solidFill>
+            <a:prstDash val="solid"/>
+            <a:round/>
+            <a:headEnd type="none" w="sm" len="sm"/>
+            <a:tailEnd type="none" w="sm" len="sm"/>
+          </a:ln>
+        </p:spPr>
+        <p:txBody>
+          <a:bodyPr spcFirstLastPara="1" wrap="square" lIns="91425" tIns="91425" rIns="91425" bIns="91425" anchor="ctr" anchorCtr="0">
+            <a:noAutofit/>
+          </a:bodyPr>
+          <a:lstStyle/>
+          <a:p>
+            <a:pPr marL="0" lvl="0" indent="0" algn="ctr" rtl="0">
+              <a:spcBef>
+                <a:spcPts val="0"/>
+              </a:spcBef>
+              <a:spcAft>
+                <a:spcPts val="0"/>
+              </a:spcAft>
+              <a:buNone/>
+            </a:pPr>
+            <a:r>
+              <a:rPr lang="en-GB" sz="1800" b="1">
+                <a:latin typeface="Consolas"/>
+                <a:ea typeface="Consolas"/>
+                <a:cs typeface="Consolas"/>
+                <a:sym typeface="Consolas"/>
+              </a:rPr>
+              <a:t>Review</a:t>
+            </a:r>
+            <a:endParaRPr sz="1800" b="1">
+              <a:latin typeface="Consolas"/>
+              <a:ea typeface="Consolas"/>
+              <a:cs typeface="Consolas"/>
+              <a:sym typeface="Consolas"/>
+            </a:endParaRPr>
+          </a:p>
+        </p:txBody>
+      </p:sp>
+      <p:sp>
+        <p:nvSpPr>
+          <p:cNvPr id="196" name="Google Shape;196;p19">
+            <a:extLst>
+              <a:ext uri="{FF2B5EF4-FFF2-40B4-BE49-F238E27FC236}">
+                <a16:creationId xmlns:a16="http://schemas.microsoft.com/office/drawing/2014/main" id="{7ED55001-6730-D01F-A5DD-E307994EC050}"/>
+              </a:ext>
+            </a:extLst>
+          </p:cNvPr>
+          <p:cNvSpPr/>
+          <p:nvPr/>
+        </p:nvSpPr>
+        <p:spPr>
+          <a:xfrm>
+            <a:off x="18668888" y="84312"/>
+            <a:ext cx="2410800" cy="480900"/>
+          </a:xfrm>
+          <a:prstGeom prst="roundRect">
+            <a:avLst>
+              <a:gd name="adj" fmla="val 16667"/>
+            </a:avLst>
+          </a:prstGeom>
+          <a:solidFill>
+            <a:srgbClr val="F9CB9C"/>
+          </a:solidFill>
+          <a:ln w="28575" cap="flat" cmpd="sng">
+            <a:solidFill>
+              <a:srgbClr val="B45F06"/>
+            </a:solidFill>
+            <a:prstDash val="solid"/>
+            <a:round/>
+            <a:headEnd type="none" w="sm" len="sm"/>
+            <a:tailEnd type="none" w="sm" len="sm"/>
+          </a:ln>
+        </p:spPr>
+        <p:txBody>
+          <a:bodyPr spcFirstLastPara="1" wrap="square" lIns="91425" tIns="91425" rIns="91425" bIns="91425" anchor="ctr" anchorCtr="0">
+            <a:noAutofit/>
+          </a:bodyPr>
+          <a:lstStyle/>
+          <a:p>
+            <a:pPr marL="0" lvl="0" indent="0" algn="ctr" rtl="0">
+              <a:spcBef>
+                <a:spcPts val="0"/>
+              </a:spcBef>
+              <a:spcAft>
+                <a:spcPts val="0"/>
+              </a:spcAft>
+              <a:buNone/>
+            </a:pPr>
+            <a:r>
+              <a:rPr lang="en-GB" sz="1800" b="1">
+                <a:latin typeface="Consolas"/>
+                <a:ea typeface="Consolas"/>
+                <a:cs typeface="Consolas"/>
+                <a:sym typeface="Consolas"/>
+              </a:rPr>
+              <a:t>Done</a:t>
+            </a:r>
+            <a:endParaRPr sz="1800" b="1">
+              <a:latin typeface="Consolas"/>
+              <a:ea typeface="Consolas"/>
+              <a:cs typeface="Consolas"/>
+              <a:sym typeface="Consolas"/>
+            </a:endParaRPr>
+          </a:p>
+        </p:txBody>
+      </p:sp>
+      <p:sp>
+        <p:nvSpPr>
+          <p:cNvPr id="197" name="Google Shape;197;p19">
+            <a:extLst>
+              <a:ext uri="{FF2B5EF4-FFF2-40B4-BE49-F238E27FC236}">
+                <a16:creationId xmlns:a16="http://schemas.microsoft.com/office/drawing/2014/main" id="{B668A3DD-B32E-93AD-C5BD-4658382ED89A}"/>
+              </a:ext>
+            </a:extLst>
+          </p:cNvPr>
+          <p:cNvSpPr/>
+          <p:nvPr/>
+        </p:nvSpPr>
+        <p:spPr>
+          <a:xfrm>
+            <a:off x="167288" y="84312"/>
+            <a:ext cx="2410800" cy="480900"/>
+          </a:xfrm>
+          <a:prstGeom prst="roundRect">
+            <a:avLst>
+              <a:gd name="adj" fmla="val 16667"/>
+            </a:avLst>
+          </a:prstGeom>
+          <a:solidFill>
+            <a:srgbClr val="F9CB9C"/>
+          </a:solidFill>
+          <a:ln w="28575" cap="flat" cmpd="sng">
+            <a:solidFill>
+              <a:srgbClr val="B45F06"/>
+            </a:solidFill>
+            <a:prstDash val="solid"/>
+            <a:round/>
+            <a:headEnd type="none" w="sm" len="sm"/>
+            <a:tailEnd type="none" w="sm" len="sm"/>
+          </a:ln>
+        </p:spPr>
+        <p:txBody>
+          <a:bodyPr spcFirstLastPara="1" wrap="square" lIns="91425" tIns="91425" rIns="91425" bIns="91425" anchor="ctr" anchorCtr="0">
+            <a:noAutofit/>
+          </a:bodyPr>
+          <a:lstStyle/>
+          <a:p>
+            <a:pPr marL="0" lvl="0" indent="0" algn="ctr" rtl="0">
+              <a:spcBef>
+                <a:spcPts val="0"/>
+              </a:spcBef>
+              <a:spcAft>
+                <a:spcPts val="0"/>
+              </a:spcAft>
+              <a:buNone/>
+            </a:pPr>
+            <a:r>
+              <a:rPr lang="en-GB" sz="1800" b="1">
+                <a:latin typeface="Consolas"/>
+                <a:ea typeface="Consolas"/>
+                <a:cs typeface="Consolas"/>
+                <a:sym typeface="Consolas"/>
+              </a:rPr>
+              <a:t>Backlog</a:t>
+            </a:r>
+            <a:endParaRPr sz="1800" b="1">
+              <a:latin typeface="Consolas"/>
+              <a:ea typeface="Consolas"/>
+              <a:cs typeface="Consolas"/>
+              <a:sym typeface="Consolas"/>
+            </a:endParaRPr>
+          </a:p>
+        </p:txBody>
+      </p:sp>
+      <p:cxnSp>
+        <p:nvCxnSpPr>
+          <p:cNvPr id="204" name="Google Shape;204;p19">
+            <a:extLst>
+              <a:ext uri="{FF2B5EF4-FFF2-40B4-BE49-F238E27FC236}">
+                <a16:creationId xmlns:a16="http://schemas.microsoft.com/office/drawing/2014/main" id="{6955466E-5E95-1672-BF12-C595137AC2F5}"/>
+              </a:ext>
+            </a:extLst>
+          </p:cNvPr>
+          <p:cNvCxnSpPr/>
+          <p:nvPr/>
+        </p:nvCxnSpPr>
+        <p:spPr>
+          <a:xfrm>
+            <a:off x="5607986" y="1626038"/>
+            <a:ext cx="16042200" cy="0"/>
+          </a:xfrm>
+          <a:prstGeom prst="straightConnector1">
+            <a:avLst/>
+          </a:prstGeom>
+          <a:noFill/>
+          <a:ln w="28575" cap="flat" cmpd="sng">
+            <a:solidFill>
+              <a:srgbClr val="999999"/>
+            </a:solidFill>
+            <a:prstDash val="dash"/>
+            <a:round/>
+            <a:headEnd type="none" w="med" len="med"/>
+            <a:tailEnd type="none" w="med" len="med"/>
+          </a:ln>
+        </p:spPr>
+      </p:cxnSp>
+      <p:cxnSp>
+        <p:nvCxnSpPr>
+          <p:cNvPr id="205" name="Google Shape;205;p19">
+            <a:extLst>
+              <a:ext uri="{FF2B5EF4-FFF2-40B4-BE49-F238E27FC236}">
+                <a16:creationId xmlns:a16="http://schemas.microsoft.com/office/drawing/2014/main" id="{5C747A2C-69F0-E415-453A-0694816748B8}"/>
+              </a:ext>
+            </a:extLst>
+          </p:cNvPr>
+          <p:cNvCxnSpPr/>
+          <p:nvPr/>
+        </p:nvCxnSpPr>
+        <p:spPr>
+          <a:xfrm>
+            <a:off x="5607986" y="3203476"/>
+            <a:ext cx="16042200" cy="0"/>
+          </a:xfrm>
+          <a:prstGeom prst="straightConnector1">
+            <a:avLst/>
+          </a:prstGeom>
+          <a:noFill/>
+          <a:ln w="28575" cap="flat" cmpd="sng">
+            <a:solidFill>
+              <a:srgbClr val="999999"/>
+            </a:solidFill>
+            <a:prstDash val="dash"/>
+            <a:round/>
+            <a:headEnd type="none" w="med" len="med"/>
+            <a:tailEnd type="none" w="med" len="med"/>
+          </a:ln>
+        </p:spPr>
+      </p:cxnSp>
+      <p:cxnSp>
+        <p:nvCxnSpPr>
+          <p:cNvPr id="206" name="Google Shape;206;p19">
+            <a:extLst>
+              <a:ext uri="{FF2B5EF4-FFF2-40B4-BE49-F238E27FC236}">
+                <a16:creationId xmlns:a16="http://schemas.microsoft.com/office/drawing/2014/main" id="{00D0F128-CB48-3992-A275-7D3321E4BAED}"/>
+              </a:ext>
+            </a:extLst>
+          </p:cNvPr>
+          <p:cNvCxnSpPr/>
+          <p:nvPr/>
+        </p:nvCxnSpPr>
+        <p:spPr>
+          <a:xfrm>
+            <a:off x="5607986" y="4777838"/>
+            <a:ext cx="16042200" cy="0"/>
+          </a:xfrm>
+          <a:prstGeom prst="straightConnector1">
+            <a:avLst/>
+          </a:prstGeom>
+          <a:noFill/>
+          <a:ln w="28575" cap="flat" cmpd="sng">
+            <a:solidFill>
+              <a:srgbClr val="999999"/>
+            </a:solidFill>
+            <a:prstDash val="dash"/>
+            <a:round/>
+            <a:headEnd type="none" w="med" len="med"/>
+            <a:tailEnd type="none" w="med" len="med"/>
+          </a:ln>
+        </p:spPr>
+      </p:cxnSp>
+      <p:cxnSp>
+        <p:nvCxnSpPr>
+          <p:cNvPr id="207" name="Google Shape;207;p19">
+            <a:extLst>
+              <a:ext uri="{FF2B5EF4-FFF2-40B4-BE49-F238E27FC236}">
+                <a16:creationId xmlns:a16="http://schemas.microsoft.com/office/drawing/2014/main" id="{9F8FB354-8780-7D79-3499-0656846FFB04}"/>
+              </a:ext>
+            </a:extLst>
+          </p:cNvPr>
+          <p:cNvCxnSpPr/>
+          <p:nvPr/>
+        </p:nvCxnSpPr>
+        <p:spPr>
+          <a:xfrm>
+            <a:off x="5607986" y="6353738"/>
+            <a:ext cx="16042200" cy="0"/>
+          </a:xfrm>
+          <a:prstGeom prst="straightConnector1">
+            <a:avLst/>
+          </a:prstGeom>
+          <a:noFill/>
+          <a:ln w="28575" cap="flat" cmpd="sng">
+            <a:solidFill>
+              <a:srgbClr val="999999"/>
+            </a:solidFill>
+            <a:prstDash val="dash"/>
+            <a:round/>
+            <a:headEnd type="none" w="med" len="med"/>
+            <a:tailEnd type="none" w="med" len="med"/>
+          </a:ln>
+        </p:spPr>
+      </p:cxnSp>
+      <p:cxnSp>
+        <p:nvCxnSpPr>
+          <p:cNvPr id="208" name="Google Shape;208;p19">
+            <a:extLst>
+              <a:ext uri="{FF2B5EF4-FFF2-40B4-BE49-F238E27FC236}">
+                <a16:creationId xmlns:a16="http://schemas.microsoft.com/office/drawing/2014/main" id="{E0F90484-CDB3-AABB-CFE7-D00AD45D9DF6}"/>
+              </a:ext>
+            </a:extLst>
+          </p:cNvPr>
+          <p:cNvCxnSpPr/>
+          <p:nvPr/>
+        </p:nvCxnSpPr>
+        <p:spPr>
+          <a:xfrm>
+            <a:off x="5607986" y="7929638"/>
+            <a:ext cx="16042200" cy="0"/>
+          </a:xfrm>
+          <a:prstGeom prst="straightConnector1">
+            <a:avLst/>
+          </a:prstGeom>
+          <a:noFill/>
+          <a:ln w="28575" cap="flat" cmpd="sng">
+            <a:solidFill>
+              <a:srgbClr val="999999"/>
+            </a:solidFill>
+            <a:prstDash val="dash"/>
+            <a:round/>
+            <a:headEnd type="none" w="med" len="med"/>
+            <a:tailEnd type="none" w="med" len="med"/>
+          </a:ln>
+        </p:spPr>
+      </p:cxnSp>
+      <p:cxnSp>
+        <p:nvCxnSpPr>
+          <p:cNvPr id="209" name="Google Shape;209;p19">
+            <a:extLst>
+              <a:ext uri="{FF2B5EF4-FFF2-40B4-BE49-F238E27FC236}">
+                <a16:creationId xmlns:a16="http://schemas.microsoft.com/office/drawing/2014/main" id="{8D97126C-2194-7CA4-A3DB-040305EFBAF4}"/>
+              </a:ext>
+            </a:extLst>
+          </p:cNvPr>
+          <p:cNvCxnSpPr/>
+          <p:nvPr/>
+        </p:nvCxnSpPr>
+        <p:spPr>
+          <a:xfrm>
+            <a:off x="5607986" y="9505538"/>
+            <a:ext cx="16042200" cy="0"/>
+          </a:xfrm>
+          <a:prstGeom prst="straightConnector1">
+            <a:avLst/>
+          </a:prstGeom>
+          <a:noFill/>
+          <a:ln w="28575" cap="flat" cmpd="sng">
+            <a:solidFill>
+              <a:srgbClr val="999999"/>
+            </a:solidFill>
+            <a:prstDash val="dash"/>
+            <a:round/>
+            <a:headEnd type="none" w="med" len="med"/>
+            <a:tailEnd type="none" w="med" len="med"/>
+          </a:ln>
+        </p:spPr>
+      </p:cxnSp>
+      <p:cxnSp>
+        <p:nvCxnSpPr>
+          <p:cNvPr id="215" name="Google Shape;215;p19">
+            <a:extLst>
+              <a:ext uri="{FF2B5EF4-FFF2-40B4-BE49-F238E27FC236}">
+                <a16:creationId xmlns:a16="http://schemas.microsoft.com/office/drawing/2014/main" id="{6515A5F8-EE33-DF07-886D-83332148AEAD}"/>
+              </a:ext>
+            </a:extLst>
+          </p:cNvPr>
+          <p:cNvCxnSpPr/>
+          <p:nvPr/>
+        </p:nvCxnSpPr>
+        <p:spPr>
+          <a:xfrm>
+            <a:off x="2874374" y="-28500"/>
+            <a:ext cx="0" cy="10857000"/>
+          </a:xfrm>
+          <a:prstGeom prst="straightConnector1">
+            <a:avLst/>
+          </a:prstGeom>
+          <a:noFill/>
+          <a:ln w="38100" cap="flat" cmpd="sng">
+            <a:solidFill>
+              <a:srgbClr val="5B0F00"/>
+            </a:solidFill>
+            <a:prstDash val="solid"/>
+            <a:round/>
+            <a:headEnd type="none" w="med" len="med"/>
+            <a:tailEnd type="none" w="med" len="med"/>
+          </a:ln>
+        </p:spPr>
+      </p:cxnSp>
+      <p:sp>
+        <p:nvSpPr>
+          <p:cNvPr id="2" name="Google Shape;74;p15">
+            <a:extLst>
+              <a:ext uri="{FF2B5EF4-FFF2-40B4-BE49-F238E27FC236}">
+                <a16:creationId xmlns:a16="http://schemas.microsoft.com/office/drawing/2014/main" id="{CEBE4865-C87B-9909-2CFE-8EA80F10ADB6}"/>
+              </a:ext>
+            </a:extLst>
+          </p:cNvPr>
+          <p:cNvSpPr/>
+          <p:nvPr/>
+        </p:nvSpPr>
+        <p:spPr>
+          <a:xfrm>
+            <a:off x="3197186" y="1385588"/>
+            <a:ext cx="2410800" cy="480900"/>
+          </a:xfrm>
+          <a:prstGeom prst="roundRect">
+            <a:avLst>
+              <a:gd name="adj" fmla="val 16667"/>
+            </a:avLst>
+          </a:prstGeom>
+          <a:solidFill>
+            <a:srgbClr val="E6B8AF"/>
+          </a:solidFill>
+          <a:ln w="28575" cap="flat" cmpd="sng">
+            <a:solidFill>
+              <a:srgbClr val="5B0F00"/>
+            </a:solidFill>
+            <a:prstDash val="solid"/>
+            <a:round/>
+            <a:headEnd type="none" w="sm" len="sm"/>
+            <a:tailEnd type="none" w="sm" len="sm"/>
+          </a:ln>
+        </p:spPr>
+        <p:txBody>
+          <a:bodyPr spcFirstLastPara="1" wrap="square" lIns="91425" tIns="91425" rIns="91425" bIns="91425" anchor="ctr" anchorCtr="0">
+            <a:noAutofit/>
+          </a:bodyPr>
+          <a:lstStyle/>
+          <a:p>
+            <a:pPr marL="0" lvl="0" indent="0" algn="ctr" rtl="0">
+              <a:spcBef>
+                <a:spcPts val="0"/>
+              </a:spcBef>
+              <a:spcAft>
+                <a:spcPts val="0"/>
+              </a:spcAft>
+              <a:buNone/>
+            </a:pPr>
+            <a:r>
+              <a:rPr lang="en-GB" sz="1800" b="1" dirty="0">
+                <a:latin typeface="Consolas"/>
+                <a:ea typeface="Consolas"/>
+                <a:cs typeface="Consolas"/>
+                <a:sym typeface="Consolas"/>
+              </a:rPr>
+              <a:t>68338</a:t>
+            </a:r>
+            <a:endParaRPr sz="1800" b="1" dirty="0">
+              <a:latin typeface="Consolas"/>
+              <a:ea typeface="Consolas"/>
+              <a:cs typeface="Consolas"/>
+              <a:sym typeface="Consolas"/>
+            </a:endParaRPr>
+          </a:p>
+        </p:txBody>
+      </p:sp>
+      <p:sp>
+        <p:nvSpPr>
+          <p:cNvPr id="3" name="Google Shape;75;p15">
+            <a:extLst>
+              <a:ext uri="{FF2B5EF4-FFF2-40B4-BE49-F238E27FC236}">
+                <a16:creationId xmlns:a16="http://schemas.microsoft.com/office/drawing/2014/main" id="{EA2F84E6-CDC0-C8DB-A9EB-A5CED20F8BB5}"/>
+              </a:ext>
+            </a:extLst>
+          </p:cNvPr>
+          <p:cNvSpPr/>
+          <p:nvPr/>
+        </p:nvSpPr>
+        <p:spPr>
+          <a:xfrm>
+            <a:off x="3197186" y="2961501"/>
+            <a:ext cx="2410800" cy="480900"/>
+          </a:xfrm>
+          <a:prstGeom prst="roundRect">
+            <a:avLst>
+              <a:gd name="adj" fmla="val 16667"/>
+            </a:avLst>
+          </a:prstGeom>
+          <a:solidFill>
+            <a:srgbClr val="E6B8AF"/>
+          </a:solidFill>
+          <a:ln w="28575" cap="flat" cmpd="sng">
+            <a:solidFill>
+              <a:srgbClr val="5B0F00"/>
+            </a:solidFill>
+            <a:prstDash val="solid"/>
+            <a:round/>
+            <a:headEnd type="none" w="sm" len="sm"/>
+            <a:tailEnd type="none" w="sm" len="sm"/>
+          </a:ln>
+        </p:spPr>
+        <p:txBody>
+          <a:bodyPr spcFirstLastPara="1" wrap="square" lIns="91425" tIns="91425" rIns="91425" bIns="91425" anchor="ctr" anchorCtr="0">
+            <a:noAutofit/>
+          </a:bodyPr>
+          <a:lstStyle/>
+          <a:p>
+            <a:pPr marL="0" lvl="0" indent="0" algn="ctr" rtl="0">
+              <a:spcBef>
+                <a:spcPts val="0"/>
+              </a:spcBef>
+              <a:spcAft>
+                <a:spcPts val="0"/>
+              </a:spcAft>
+              <a:buNone/>
+            </a:pPr>
+            <a:r>
+              <a:rPr lang="en-GB" sz="1800" b="1" dirty="0">
+                <a:latin typeface="Consolas"/>
+                <a:ea typeface="Consolas"/>
+                <a:cs typeface="Consolas"/>
+                <a:sym typeface="Consolas"/>
+              </a:rPr>
+              <a:t>68245</a:t>
+            </a:r>
+            <a:endParaRPr sz="1800" b="1" dirty="0">
+              <a:latin typeface="Consolas"/>
+              <a:ea typeface="Consolas"/>
+              <a:cs typeface="Consolas"/>
+              <a:sym typeface="Consolas"/>
+            </a:endParaRPr>
+          </a:p>
+        </p:txBody>
+      </p:sp>
+      <p:sp>
+        <p:nvSpPr>
+          <p:cNvPr id="4" name="Google Shape;76;p15">
+            <a:extLst>
+              <a:ext uri="{FF2B5EF4-FFF2-40B4-BE49-F238E27FC236}">
+                <a16:creationId xmlns:a16="http://schemas.microsoft.com/office/drawing/2014/main" id="{78EE480A-111E-47E8-85AE-F2AE29A81500}"/>
+              </a:ext>
+            </a:extLst>
+          </p:cNvPr>
+          <p:cNvSpPr/>
+          <p:nvPr/>
+        </p:nvSpPr>
+        <p:spPr>
+          <a:xfrm>
+            <a:off x="3197186" y="4537410"/>
+            <a:ext cx="2410800" cy="480900"/>
+          </a:xfrm>
+          <a:prstGeom prst="roundRect">
+            <a:avLst>
+              <a:gd name="adj" fmla="val 16667"/>
+            </a:avLst>
+          </a:prstGeom>
+          <a:solidFill>
+            <a:srgbClr val="E6B8AF"/>
+          </a:solidFill>
+          <a:ln w="28575" cap="flat" cmpd="sng">
+            <a:solidFill>
+              <a:srgbClr val="5B0F00"/>
+            </a:solidFill>
+            <a:prstDash val="solid"/>
+            <a:round/>
+            <a:headEnd type="none" w="sm" len="sm"/>
+            <a:tailEnd type="none" w="sm" len="sm"/>
+          </a:ln>
+        </p:spPr>
+        <p:txBody>
+          <a:bodyPr spcFirstLastPara="1" wrap="square" lIns="91425" tIns="91425" rIns="91425" bIns="91425" anchor="ctr" anchorCtr="0">
+            <a:noAutofit/>
+          </a:bodyPr>
+          <a:lstStyle/>
+          <a:p>
+            <a:pPr marL="0" lvl="0" indent="0" algn="ctr" rtl="0">
+              <a:spcBef>
+                <a:spcPts val="0"/>
+              </a:spcBef>
+              <a:spcAft>
+                <a:spcPts val="0"/>
+              </a:spcAft>
+              <a:buNone/>
+            </a:pPr>
+            <a:r>
+              <a:rPr lang="en-GB" sz="1800" b="1" dirty="0">
+                <a:latin typeface="Consolas"/>
+                <a:ea typeface="Consolas"/>
+                <a:cs typeface="Consolas"/>
+                <a:sym typeface="Consolas"/>
+              </a:rPr>
+              <a:t>68725</a:t>
+            </a:r>
+            <a:endParaRPr sz="1800" b="1" dirty="0">
+              <a:latin typeface="Consolas"/>
+              <a:ea typeface="Consolas"/>
+              <a:cs typeface="Consolas"/>
+              <a:sym typeface="Consolas"/>
+            </a:endParaRPr>
+          </a:p>
+        </p:txBody>
+      </p:sp>
+      <p:sp>
+        <p:nvSpPr>
+          <p:cNvPr id="5" name="Google Shape;77;p15">
+            <a:extLst>
+              <a:ext uri="{FF2B5EF4-FFF2-40B4-BE49-F238E27FC236}">
+                <a16:creationId xmlns:a16="http://schemas.microsoft.com/office/drawing/2014/main" id="{E2FC4B4F-39A1-0988-C550-C1F4AE228169}"/>
+              </a:ext>
+            </a:extLst>
+          </p:cNvPr>
+          <p:cNvSpPr/>
+          <p:nvPr/>
+        </p:nvSpPr>
+        <p:spPr>
+          <a:xfrm>
+            <a:off x="3197186" y="6113307"/>
+            <a:ext cx="2410800" cy="480900"/>
+          </a:xfrm>
+          <a:prstGeom prst="roundRect">
+            <a:avLst>
+              <a:gd name="adj" fmla="val 16667"/>
+            </a:avLst>
+          </a:prstGeom>
+          <a:solidFill>
+            <a:srgbClr val="E6B8AF"/>
+          </a:solidFill>
+          <a:ln w="28575" cap="flat" cmpd="sng">
+            <a:solidFill>
+              <a:srgbClr val="5B0F00"/>
+            </a:solidFill>
+            <a:prstDash val="solid"/>
+            <a:round/>
+            <a:headEnd type="none" w="sm" len="sm"/>
+            <a:tailEnd type="none" w="sm" len="sm"/>
+          </a:ln>
+        </p:spPr>
+        <p:txBody>
+          <a:bodyPr spcFirstLastPara="1" wrap="square" lIns="91425" tIns="91425" rIns="91425" bIns="91425" anchor="ctr" anchorCtr="0">
+            <a:noAutofit/>
+          </a:bodyPr>
+          <a:lstStyle/>
+          <a:p>
+            <a:pPr marL="0" lvl="0" indent="0" algn="ctr" rtl="0">
+              <a:spcBef>
+                <a:spcPts val="0"/>
+              </a:spcBef>
+              <a:spcAft>
+                <a:spcPts val="0"/>
+              </a:spcAft>
+              <a:buNone/>
+            </a:pPr>
+            <a:r>
+              <a:rPr lang="en-GB" sz="1800" b="1" dirty="0">
+                <a:latin typeface="Consolas"/>
+                <a:ea typeface="Consolas"/>
+                <a:cs typeface="Consolas"/>
+                <a:sym typeface="Consolas"/>
+              </a:rPr>
+              <a:t>68180</a:t>
+            </a:r>
+            <a:endParaRPr sz="1800" b="1" dirty="0">
+              <a:latin typeface="Consolas"/>
+              <a:ea typeface="Consolas"/>
+              <a:cs typeface="Consolas"/>
+              <a:sym typeface="Consolas"/>
+            </a:endParaRPr>
+          </a:p>
+        </p:txBody>
+      </p:sp>
+      <p:sp>
+        <p:nvSpPr>
+          <p:cNvPr id="6" name="Google Shape;78;p15">
+            <a:extLst>
+              <a:ext uri="{FF2B5EF4-FFF2-40B4-BE49-F238E27FC236}">
+                <a16:creationId xmlns:a16="http://schemas.microsoft.com/office/drawing/2014/main" id="{77C1A36D-0E2C-02FE-F4AE-0B2BAEEAAF1B}"/>
+              </a:ext>
+            </a:extLst>
+          </p:cNvPr>
+          <p:cNvSpPr/>
+          <p:nvPr/>
+        </p:nvSpPr>
+        <p:spPr>
+          <a:xfrm>
+            <a:off x="3197186" y="7689198"/>
+            <a:ext cx="2410800" cy="480900"/>
+          </a:xfrm>
+          <a:prstGeom prst="roundRect">
+            <a:avLst>
+              <a:gd name="adj" fmla="val 16667"/>
+            </a:avLst>
+          </a:prstGeom>
+          <a:solidFill>
+            <a:srgbClr val="E6B8AF"/>
+          </a:solidFill>
+          <a:ln w="28575" cap="flat" cmpd="sng">
+            <a:solidFill>
+              <a:srgbClr val="5B0F00"/>
+            </a:solidFill>
+            <a:prstDash val="solid"/>
+            <a:round/>
+            <a:headEnd type="none" w="sm" len="sm"/>
+            <a:tailEnd type="none" w="sm" len="sm"/>
+          </a:ln>
+        </p:spPr>
+        <p:txBody>
+          <a:bodyPr spcFirstLastPara="1" wrap="square" lIns="91425" tIns="91425" rIns="91425" bIns="91425" anchor="ctr" anchorCtr="0">
+            <a:noAutofit/>
+          </a:bodyPr>
+          <a:lstStyle/>
+          <a:p>
+            <a:pPr marL="0" lvl="0" indent="0" algn="ctr" rtl="0">
+              <a:spcBef>
+                <a:spcPts val="0"/>
+              </a:spcBef>
+              <a:spcAft>
+                <a:spcPts val="0"/>
+              </a:spcAft>
+              <a:buNone/>
+            </a:pPr>
+            <a:r>
+              <a:rPr lang="en-GB" sz="1800" b="1" dirty="0">
+                <a:latin typeface="Consolas"/>
+                <a:ea typeface="Consolas"/>
+                <a:cs typeface="Consolas"/>
+                <a:sym typeface="Consolas"/>
+              </a:rPr>
+              <a:t>67912</a:t>
+            </a:r>
+            <a:endParaRPr sz="1800" b="1" dirty="0">
+              <a:latin typeface="Consolas"/>
+              <a:ea typeface="Consolas"/>
+              <a:cs typeface="Consolas"/>
+              <a:sym typeface="Consolas"/>
+            </a:endParaRPr>
+          </a:p>
+        </p:txBody>
+      </p:sp>
+      <p:sp>
+        <p:nvSpPr>
+          <p:cNvPr id="7" name="Google Shape;79;p15">
+            <a:extLst>
+              <a:ext uri="{FF2B5EF4-FFF2-40B4-BE49-F238E27FC236}">
+                <a16:creationId xmlns:a16="http://schemas.microsoft.com/office/drawing/2014/main" id="{73F0D196-DFE1-3633-DE00-DCAFFC2C2589}"/>
+              </a:ext>
+            </a:extLst>
+          </p:cNvPr>
+          <p:cNvSpPr/>
+          <p:nvPr/>
+        </p:nvSpPr>
+        <p:spPr>
+          <a:xfrm>
+            <a:off x="3197186" y="9265103"/>
+            <a:ext cx="2410800" cy="480900"/>
+          </a:xfrm>
+          <a:prstGeom prst="roundRect">
+            <a:avLst>
+              <a:gd name="adj" fmla="val 16667"/>
+            </a:avLst>
+          </a:prstGeom>
+          <a:solidFill>
+            <a:srgbClr val="E6B8AF"/>
+          </a:solidFill>
+          <a:ln w="28575" cap="flat" cmpd="sng">
+            <a:solidFill>
+              <a:srgbClr val="5B0F00"/>
+            </a:solidFill>
+            <a:prstDash val="solid"/>
+            <a:round/>
+            <a:headEnd type="none" w="sm" len="sm"/>
+            <a:tailEnd type="none" w="sm" len="sm"/>
+          </a:ln>
+        </p:spPr>
+        <p:txBody>
+          <a:bodyPr spcFirstLastPara="1" wrap="square" lIns="91425" tIns="91425" rIns="91425" bIns="91425" anchor="ctr" anchorCtr="0">
+            <a:noAutofit/>
+          </a:bodyPr>
+          <a:lstStyle/>
+          <a:p>
+            <a:pPr marL="0" lvl="0" indent="0" algn="ctr" rtl="0">
+              <a:spcBef>
+                <a:spcPts val="0"/>
+              </a:spcBef>
+              <a:spcAft>
+                <a:spcPts val="0"/>
+              </a:spcAft>
+              <a:buNone/>
+            </a:pPr>
+            <a:r>
+              <a:rPr lang="en-GB" sz="1800" b="1" dirty="0">
+                <a:latin typeface="Consolas"/>
+                <a:ea typeface="Consolas"/>
+                <a:cs typeface="Consolas"/>
+                <a:sym typeface="Consolas"/>
+              </a:rPr>
+              <a:t>67870</a:t>
+            </a:r>
+            <a:endParaRPr sz="1800" b="1" dirty="0">
+              <a:latin typeface="Consolas"/>
+              <a:ea typeface="Consolas"/>
+              <a:cs typeface="Consolas"/>
+              <a:sym typeface="Consolas"/>
+            </a:endParaRPr>
+          </a:p>
+        </p:txBody>
+      </p:sp>
+      <p:sp>
+        <p:nvSpPr>
+          <p:cNvPr id="10" name="Google Shape;86;p15">
+            <a:extLst>
+              <a:ext uri="{FF2B5EF4-FFF2-40B4-BE49-F238E27FC236}">
+                <a16:creationId xmlns:a16="http://schemas.microsoft.com/office/drawing/2014/main" id="{D1D777F4-DFB9-E8C3-6844-3A3DF488B499}"/>
+              </a:ext>
+            </a:extLst>
+          </p:cNvPr>
+          <p:cNvSpPr/>
+          <p:nvPr/>
+        </p:nvSpPr>
+        <p:spPr>
+          <a:xfrm>
+            <a:off x="6127942" y="3789573"/>
+            <a:ext cx="3204918" cy="1537318"/>
+          </a:xfrm>
+          <a:prstGeom prst="roundRect">
+            <a:avLst>
+              <a:gd name="adj" fmla="val 16667"/>
+            </a:avLst>
+          </a:prstGeom>
+          <a:solidFill>
+            <a:srgbClr val="D9EAD3"/>
+          </a:solidFill>
+          <a:ln w="28575" cap="flat" cmpd="sng">
+            <a:solidFill>
+              <a:srgbClr val="274E13"/>
+            </a:solidFill>
+            <a:prstDash val="solid"/>
+            <a:round/>
+            <a:headEnd type="none" w="sm" len="sm"/>
+            <a:tailEnd type="none" w="sm" len="sm"/>
+          </a:ln>
+        </p:spPr>
+        <p:txBody>
+          <a:bodyPr spcFirstLastPara="1" wrap="square" lIns="91425" tIns="91425" rIns="91425" bIns="91425" anchor="t" anchorCtr="0">
+            <a:noAutofit/>
+          </a:bodyPr>
+          <a:lstStyle/>
+          <a:p>
+            <a:pPr lvl="0"/>
+            <a:r>
+              <a:rPr lang="en-GB" dirty="0">
+                <a:latin typeface="Consolas"/>
+                <a:ea typeface="Consolas"/>
+                <a:cs typeface="Consolas"/>
+                <a:sym typeface="Consolas"/>
+              </a:rPr>
+              <a:t>US1: Como </a:t>
+            </a:r>
+            <a:r>
+              <a:rPr lang="en-GB" dirty="0" err="1">
+                <a:latin typeface="Consolas"/>
+                <a:ea typeface="Consolas"/>
+                <a:cs typeface="Consolas"/>
+                <a:sym typeface="Consolas"/>
+              </a:rPr>
+              <a:t>membro</a:t>
+            </a:r>
+            <a:r>
+              <a:rPr lang="en-GB" dirty="0">
+                <a:latin typeface="Consolas"/>
+                <a:ea typeface="Consolas"/>
+                <a:cs typeface="Consolas"/>
+                <a:sym typeface="Consolas"/>
+              </a:rPr>
+              <a:t> da </a:t>
+            </a:r>
+            <a:r>
+              <a:rPr lang="en-GB" dirty="0" err="1">
+                <a:latin typeface="Consolas"/>
+                <a:ea typeface="Consolas"/>
+                <a:cs typeface="Consolas"/>
+                <a:sym typeface="Consolas"/>
+              </a:rPr>
+              <a:t>equipa</a:t>
+            </a:r>
+            <a:r>
+              <a:rPr lang="en-GB" dirty="0">
+                <a:latin typeface="Consolas"/>
+                <a:ea typeface="Consolas"/>
+                <a:cs typeface="Consolas"/>
+                <a:sym typeface="Consolas"/>
+              </a:rPr>
+              <a:t> </a:t>
+            </a:r>
+            <a:r>
+              <a:rPr lang="en-GB" dirty="0" err="1">
+                <a:latin typeface="Consolas"/>
+                <a:ea typeface="Consolas"/>
+                <a:cs typeface="Consolas"/>
+                <a:sym typeface="Consolas"/>
+              </a:rPr>
+              <a:t>quero</a:t>
+            </a:r>
+            <a:r>
+              <a:rPr lang="en-GB" dirty="0">
+                <a:latin typeface="Consolas"/>
+                <a:ea typeface="Consolas"/>
+                <a:cs typeface="Consolas"/>
+                <a:sym typeface="Consolas"/>
+              </a:rPr>
+              <a:t> </a:t>
+            </a:r>
+            <a:r>
+              <a:rPr lang="pt-PT" dirty="0">
+                <a:latin typeface="Consolas"/>
+                <a:ea typeface="Consolas"/>
+                <a:cs typeface="Consolas"/>
+                <a:sym typeface="Consolas"/>
+              </a:rPr>
+              <a:t>terminar tsunami e earthquake spawners, no que toca às suas animações bem como alguma lógica de movimento de “builds”.</a:t>
+            </a:r>
+            <a:endParaRPr dirty="0">
+              <a:latin typeface="Consolas"/>
+              <a:ea typeface="Consolas"/>
+              <a:cs typeface="Consolas"/>
+              <a:sym typeface="Consolas"/>
+            </a:endParaRPr>
+          </a:p>
+        </p:txBody>
+      </p:sp>
+      <p:sp>
+        <p:nvSpPr>
+          <p:cNvPr id="11" name="Google Shape;92;p15">
+            <a:extLst>
+              <a:ext uri="{FF2B5EF4-FFF2-40B4-BE49-F238E27FC236}">
+                <a16:creationId xmlns:a16="http://schemas.microsoft.com/office/drawing/2014/main" id="{AA5A78AB-AFAE-8858-A76A-768D8BDABB19}"/>
+              </a:ext>
+            </a:extLst>
+          </p:cNvPr>
+          <p:cNvSpPr/>
+          <p:nvPr/>
+        </p:nvSpPr>
+        <p:spPr>
+          <a:xfrm>
+            <a:off x="6127942" y="7203407"/>
+            <a:ext cx="3184194" cy="1514182"/>
+          </a:xfrm>
+          <a:prstGeom prst="roundRect">
+            <a:avLst>
+              <a:gd name="adj" fmla="val 16667"/>
+            </a:avLst>
+          </a:prstGeom>
+          <a:solidFill>
+            <a:srgbClr val="D9EAD3"/>
+          </a:solidFill>
+          <a:ln w="28575" cap="flat" cmpd="sng">
+            <a:solidFill>
+              <a:srgbClr val="274E13"/>
+            </a:solidFill>
+            <a:prstDash val="solid"/>
+            <a:round/>
+            <a:headEnd type="none" w="sm" len="sm"/>
+            <a:tailEnd type="none" w="sm" len="sm"/>
+          </a:ln>
+        </p:spPr>
+        <p:txBody>
+          <a:bodyPr spcFirstLastPara="1" wrap="square" lIns="91425" tIns="91425" rIns="91425" bIns="91425" anchor="t" anchorCtr="0">
+            <a:noAutofit/>
+          </a:bodyPr>
+          <a:lstStyle/>
+          <a:p>
+            <a:pPr lvl="0"/>
+            <a:r>
+              <a:rPr lang="en-GB" dirty="0">
+                <a:latin typeface="Consolas"/>
+                <a:ea typeface="Consolas"/>
+                <a:cs typeface="Consolas"/>
+                <a:sym typeface="Consolas"/>
+              </a:rPr>
+              <a:t>US2: Como </a:t>
+            </a:r>
+            <a:r>
+              <a:rPr lang="en-GB" dirty="0" err="1">
+                <a:latin typeface="Consolas"/>
+                <a:ea typeface="Consolas"/>
+                <a:cs typeface="Consolas"/>
+                <a:sym typeface="Consolas"/>
+              </a:rPr>
+              <a:t>membro</a:t>
+            </a:r>
+            <a:r>
+              <a:rPr lang="en-GB" dirty="0">
+                <a:latin typeface="Consolas"/>
+                <a:ea typeface="Consolas"/>
+                <a:cs typeface="Consolas"/>
+                <a:sym typeface="Consolas"/>
+              </a:rPr>
+              <a:t> da </a:t>
+            </a:r>
+            <a:r>
+              <a:rPr lang="en-GB" dirty="0" err="1">
+                <a:latin typeface="Consolas"/>
+                <a:ea typeface="Consolas"/>
+                <a:cs typeface="Consolas"/>
+                <a:sym typeface="Consolas"/>
+              </a:rPr>
+              <a:t>equipa</a:t>
+            </a:r>
+            <a:r>
+              <a:rPr lang="en-GB" dirty="0">
+                <a:latin typeface="Consolas"/>
+                <a:ea typeface="Consolas"/>
+                <a:cs typeface="Consolas"/>
+                <a:sym typeface="Consolas"/>
+              </a:rPr>
+              <a:t> </a:t>
+            </a:r>
+            <a:r>
+              <a:rPr lang="en-GB" dirty="0" err="1">
+                <a:latin typeface="Consolas"/>
+                <a:ea typeface="Consolas"/>
+                <a:cs typeface="Consolas"/>
+                <a:sym typeface="Consolas"/>
+              </a:rPr>
+              <a:t>quero</a:t>
+            </a:r>
+            <a:r>
+              <a:rPr lang="en-GB" dirty="0">
+                <a:latin typeface="Consolas"/>
+                <a:ea typeface="Consolas"/>
+                <a:cs typeface="Consolas"/>
+                <a:sym typeface="Consolas"/>
+              </a:rPr>
+              <a:t> f</a:t>
+            </a:r>
+            <a:r>
+              <a:rPr lang="pt-PT" dirty="0">
+                <a:latin typeface="Consolas"/>
+                <a:ea typeface="Consolas"/>
+                <a:cs typeface="Consolas"/>
+                <a:sym typeface="Consolas"/>
+              </a:rPr>
+              <a:t>azer uma abstract class que ligue as 3 catastrofes naturais, para melhorar a qualidade do código.</a:t>
+            </a:r>
+            <a:endParaRPr dirty="0">
+              <a:latin typeface="Consolas"/>
+              <a:ea typeface="Consolas"/>
+              <a:cs typeface="Consolas"/>
+              <a:sym typeface="Consolas"/>
+            </a:endParaRPr>
+          </a:p>
+        </p:txBody>
+      </p:sp>
+      <p:sp>
+        <p:nvSpPr>
+          <p:cNvPr id="8" name="Google Shape;92;p15">
+            <a:extLst>
+              <a:ext uri="{FF2B5EF4-FFF2-40B4-BE49-F238E27FC236}">
+                <a16:creationId xmlns:a16="http://schemas.microsoft.com/office/drawing/2014/main" id="{22CE298D-41DD-E646-0618-A0CC580CC6D4}"/>
+              </a:ext>
+            </a:extLst>
+          </p:cNvPr>
+          <p:cNvSpPr/>
+          <p:nvPr/>
+        </p:nvSpPr>
+        <p:spPr>
+          <a:xfrm>
+            <a:off x="6200057" y="917871"/>
+            <a:ext cx="2943942" cy="2682459"/>
+          </a:xfrm>
+          <a:prstGeom prst="roundRect">
+            <a:avLst>
+              <a:gd name="adj" fmla="val 16667"/>
+            </a:avLst>
+          </a:prstGeom>
+          <a:solidFill>
+            <a:srgbClr val="D9EAD3"/>
+          </a:solidFill>
+          <a:ln w="28575" cap="flat" cmpd="sng">
+            <a:solidFill>
+              <a:srgbClr val="274E13"/>
+            </a:solidFill>
+            <a:prstDash val="solid"/>
+            <a:round/>
+            <a:headEnd type="none" w="sm" len="sm"/>
+            <a:tailEnd type="none" w="sm" len="sm"/>
+          </a:ln>
+        </p:spPr>
+        <p:txBody>
+          <a:bodyPr spcFirstLastPara="1" wrap="square" lIns="91425" tIns="91425" rIns="91425" bIns="91425" anchor="t" anchorCtr="0">
+            <a:noAutofit/>
+          </a:bodyPr>
+          <a:lstStyle/>
+          <a:p>
+            <a:pPr lvl="0"/>
+            <a:r>
+              <a:rPr lang="en-GB" dirty="0">
+                <a:latin typeface="Consolas"/>
+                <a:ea typeface="Consolas"/>
+                <a:cs typeface="Consolas"/>
+                <a:sym typeface="Consolas"/>
+              </a:rPr>
+              <a:t>US3: Como </a:t>
+            </a:r>
+            <a:r>
+              <a:rPr lang="en-GB" dirty="0" err="1">
+                <a:latin typeface="Consolas"/>
+                <a:ea typeface="Consolas"/>
+                <a:cs typeface="Consolas"/>
+                <a:sym typeface="Consolas"/>
+              </a:rPr>
+              <a:t>membro</a:t>
+            </a:r>
+            <a:r>
+              <a:rPr lang="en-GB" dirty="0">
+                <a:latin typeface="Consolas"/>
+                <a:ea typeface="Consolas"/>
+                <a:cs typeface="Consolas"/>
+                <a:sym typeface="Consolas"/>
+              </a:rPr>
+              <a:t> da </a:t>
+            </a:r>
+            <a:r>
+              <a:rPr lang="en-GB" dirty="0" err="1">
+                <a:latin typeface="Consolas"/>
+                <a:ea typeface="Consolas"/>
+                <a:cs typeface="Consolas"/>
+                <a:sym typeface="Consolas"/>
+              </a:rPr>
+              <a:t>equipa</a:t>
+            </a:r>
+            <a:r>
+              <a:rPr lang="en-GB" dirty="0">
+                <a:latin typeface="Consolas"/>
+                <a:ea typeface="Consolas"/>
+                <a:cs typeface="Consolas"/>
+                <a:sym typeface="Consolas"/>
+              </a:rPr>
+              <a:t> </a:t>
+            </a:r>
+            <a:r>
+              <a:rPr lang="en-GB" dirty="0" err="1">
+                <a:latin typeface="Consolas"/>
+                <a:ea typeface="Consolas"/>
+                <a:cs typeface="Consolas"/>
+                <a:sym typeface="Consolas"/>
+              </a:rPr>
+              <a:t>quero</a:t>
+            </a:r>
+            <a:r>
+              <a:rPr lang="en-GB" dirty="0">
+                <a:latin typeface="Consolas"/>
+                <a:ea typeface="Consolas"/>
+                <a:cs typeface="Consolas"/>
+                <a:sym typeface="Consolas"/>
+              </a:rPr>
+              <a:t> a</a:t>
+            </a:r>
+            <a:r>
+              <a:rPr lang="pt-PT" dirty="0">
+                <a:latin typeface="Consolas"/>
+                <a:ea typeface="Consolas"/>
+                <a:cs typeface="Consolas"/>
+                <a:sym typeface="Consolas"/>
+              </a:rPr>
+              <a:t>plicar sistema de ranking baseado nas waves derrotadas ecriar uma interface apelativa para o jogador, bem como finalizar as waves do modo semanal.</a:t>
+            </a:r>
+            <a:r>
+              <a:rPr lang="en-GB" dirty="0">
+                <a:latin typeface="Consolas"/>
+                <a:ea typeface="Consolas"/>
+                <a:cs typeface="Consolas"/>
+                <a:sym typeface="Consolas"/>
+              </a:rPr>
+              <a:t> </a:t>
+            </a:r>
+            <a:endParaRPr dirty="0">
+              <a:latin typeface="Consolas"/>
+              <a:ea typeface="Consolas"/>
+              <a:cs typeface="Consolas"/>
+              <a:sym typeface="Consolas"/>
+            </a:endParaRPr>
+          </a:p>
+        </p:txBody>
+      </p:sp>
+      <p:sp>
+        <p:nvSpPr>
+          <p:cNvPr id="9" name="Google Shape;92;p15">
+            <a:extLst>
+              <a:ext uri="{FF2B5EF4-FFF2-40B4-BE49-F238E27FC236}">
+                <a16:creationId xmlns:a16="http://schemas.microsoft.com/office/drawing/2014/main" id="{E48C8707-D518-1BA1-2607-70FA8251DDD8}"/>
+              </a:ext>
+            </a:extLst>
+          </p:cNvPr>
+          <p:cNvSpPr/>
+          <p:nvPr/>
+        </p:nvSpPr>
+        <p:spPr>
+          <a:xfrm>
+            <a:off x="6127942" y="5530416"/>
+            <a:ext cx="3184191" cy="1552771"/>
+          </a:xfrm>
+          <a:prstGeom prst="roundRect">
+            <a:avLst>
+              <a:gd name="adj" fmla="val 16667"/>
+            </a:avLst>
+          </a:prstGeom>
+          <a:solidFill>
+            <a:srgbClr val="D9EAD3"/>
+          </a:solidFill>
+          <a:ln w="28575" cap="flat" cmpd="sng">
+            <a:solidFill>
+              <a:srgbClr val="274E13"/>
+            </a:solidFill>
+            <a:prstDash val="solid"/>
+            <a:round/>
+            <a:headEnd type="none" w="sm" len="sm"/>
+            <a:tailEnd type="none" w="sm" len="sm"/>
+          </a:ln>
+        </p:spPr>
+        <p:txBody>
+          <a:bodyPr spcFirstLastPara="1" wrap="square" lIns="91425" tIns="91425" rIns="91425" bIns="91425" anchor="t" anchorCtr="0">
+            <a:noAutofit/>
+          </a:bodyPr>
+          <a:lstStyle/>
+          <a:p>
+            <a:pPr lvl="0"/>
+            <a:r>
+              <a:rPr lang="en-GB" dirty="0">
+                <a:latin typeface="Consolas"/>
+                <a:ea typeface="Consolas"/>
+                <a:cs typeface="Consolas"/>
+                <a:sym typeface="Consolas"/>
+              </a:rPr>
+              <a:t>US4: Como </a:t>
+            </a:r>
+            <a:r>
+              <a:rPr lang="en-GB" dirty="0" err="1">
+                <a:latin typeface="Consolas"/>
+                <a:ea typeface="Consolas"/>
+                <a:cs typeface="Consolas"/>
+                <a:sym typeface="Consolas"/>
+              </a:rPr>
+              <a:t>membro</a:t>
+            </a:r>
+            <a:r>
+              <a:rPr lang="en-GB" dirty="0">
+                <a:latin typeface="Consolas"/>
+                <a:ea typeface="Consolas"/>
+                <a:cs typeface="Consolas"/>
+                <a:sym typeface="Consolas"/>
+              </a:rPr>
+              <a:t> da </a:t>
+            </a:r>
+            <a:r>
+              <a:rPr lang="en-GB" dirty="0" err="1">
+                <a:latin typeface="Consolas"/>
+                <a:ea typeface="Consolas"/>
+                <a:cs typeface="Consolas"/>
+                <a:sym typeface="Consolas"/>
+              </a:rPr>
+              <a:t>equipa</a:t>
+            </a:r>
+            <a:r>
+              <a:rPr lang="en-GB" dirty="0">
+                <a:latin typeface="Consolas"/>
+                <a:ea typeface="Consolas"/>
+                <a:cs typeface="Consolas"/>
+                <a:sym typeface="Consolas"/>
+              </a:rPr>
+              <a:t> </a:t>
+            </a:r>
+            <a:r>
+              <a:rPr lang="en-GB" dirty="0" err="1">
+                <a:latin typeface="Consolas"/>
+                <a:ea typeface="Consolas"/>
+                <a:cs typeface="Consolas"/>
+                <a:sym typeface="Consolas"/>
+              </a:rPr>
+              <a:t>quero</a:t>
+            </a:r>
+            <a:r>
+              <a:rPr lang="en-GB" dirty="0">
+                <a:latin typeface="Consolas"/>
+                <a:ea typeface="Consolas"/>
+                <a:cs typeface="Consolas"/>
+                <a:sym typeface="Consolas"/>
+              </a:rPr>
+              <a:t> f</a:t>
+            </a:r>
+            <a:r>
+              <a:rPr lang="pt-PT" dirty="0">
+                <a:latin typeface="Consolas"/>
+                <a:ea typeface="Consolas"/>
+                <a:cs typeface="Consolas"/>
+                <a:sym typeface="Consolas"/>
+              </a:rPr>
+              <a:t>azer resource trader bot feature, com o qual os jogadores podem fazer trocas de uns recursos por outros durante o jogo</a:t>
+            </a:r>
+            <a:endParaRPr dirty="0">
+              <a:latin typeface="Consolas"/>
+              <a:ea typeface="Consolas"/>
+              <a:cs typeface="Consolas"/>
+              <a:sym typeface="Consolas"/>
+            </a:endParaRPr>
+          </a:p>
+        </p:txBody>
+      </p:sp>
+      <p:sp>
+        <p:nvSpPr>
+          <p:cNvPr id="23" name="Google Shape;121;p16">
+            <a:extLst>
+              <a:ext uri="{FF2B5EF4-FFF2-40B4-BE49-F238E27FC236}">
+                <a16:creationId xmlns:a16="http://schemas.microsoft.com/office/drawing/2014/main" id="{B331151C-5D03-6B1E-0616-77603A0DF667}"/>
+              </a:ext>
+            </a:extLst>
+          </p:cNvPr>
+          <p:cNvSpPr/>
+          <p:nvPr/>
+        </p:nvSpPr>
+        <p:spPr>
+          <a:xfrm>
+            <a:off x="12404282" y="4366085"/>
+            <a:ext cx="2449608" cy="946153"/>
+          </a:xfrm>
+          <a:prstGeom prst="roundRect">
+            <a:avLst>
+              <a:gd name="adj" fmla="val 16667"/>
+            </a:avLst>
+          </a:prstGeom>
+          <a:solidFill>
+            <a:srgbClr val="D0E0E3"/>
+          </a:solidFill>
+          <a:ln w="28575" cap="flat" cmpd="sng">
+            <a:solidFill>
+              <a:srgbClr val="134F5C"/>
+            </a:solidFill>
+            <a:prstDash val="solid"/>
+            <a:round/>
+            <a:headEnd type="none" w="sm" len="sm"/>
+            <a:tailEnd type="none" w="sm" len="sm"/>
+          </a:ln>
+        </p:spPr>
+        <p:txBody>
+          <a:bodyPr spcFirstLastPara="1" wrap="square" lIns="91425" tIns="91425" rIns="91425" bIns="91425" anchor="t" anchorCtr="0">
+            <a:noAutofit/>
+          </a:bodyPr>
+          <a:lstStyle/>
+          <a:p>
+            <a:pPr lvl="0"/>
+            <a:r>
+              <a:rPr lang="en-US" dirty="0">
+                <a:latin typeface="Consolas"/>
+                <a:ea typeface="Consolas"/>
+                <a:cs typeface="Consolas"/>
+                <a:sym typeface="Consolas"/>
+              </a:rPr>
+              <a:t>T1: </a:t>
+            </a:r>
+            <a:r>
+              <a:rPr lang="en-US" dirty="0" err="1">
+                <a:latin typeface="Consolas"/>
+                <a:ea typeface="Consolas"/>
+                <a:cs typeface="Consolas"/>
+                <a:sym typeface="Consolas"/>
+              </a:rPr>
+              <a:t>Terminar</a:t>
+            </a:r>
+            <a:r>
+              <a:rPr lang="en-US" dirty="0">
+                <a:latin typeface="Consolas"/>
+                <a:ea typeface="Consolas"/>
+                <a:cs typeface="Consolas"/>
+                <a:sym typeface="Consolas"/>
+              </a:rPr>
+              <a:t> tsunami e earthquake spawners.</a:t>
+            </a:r>
+          </a:p>
+          <a:p>
+            <a:pPr marL="0" lvl="0" indent="0" algn="l" rtl="0">
+              <a:spcBef>
+                <a:spcPts val="0"/>
+              </a:spcBef>
+              <a:spcAft>
+                <a:spcPts val="0"/>
+              </a:spcAft>
+              <a:buNone/>
+            </a:pPr>
+            <a:br>
+              <a:rPr lang="en-GB" dirty="0">
+                <a:latin typeface="Consolas"/>
+                <a:ea typeface="Consolas"/>
+                <a:cs typeface="Consolas"/>
+                <a:sym typeface="Consolas"/>
+              </a:rPr>
+            </a:br>
+            <a:endParaRPr lang="en-GB" dirty="0">
+              <a:latin typeface="Consolas"/>
+              <a:ea typeface="Consolas"/>
+              <a:cs typeface="Consolas"/>
+              <a:sym typeface="Consolas"/>
+            </a:endParaRPr>
+          </a:p>
+          <a:p>
+            <a:pPr marL="0" lvl="0" indent="0" algn="l" rtl="0">
+              <a:spcBef>
+                <a:spcPts val="0"/>
+              </a:spcBef>
+              <a:spcAft>
+                <a:spcPts val="0"/>
+              </a:spcAft>
+              <a:buNone/>
+            </a:pPr>
+            <a:endParaRPr dirty="0">
+              <a:latin typeface="Consolas"/>
+              <a:ea typeface="Consolas"/>
+              <a:cs typeface="Consolas"/>
+              <a:sym typeface="Consolas"/>
+            </a:endParaRPr>
+          </a:p>
+        </p:txBody>
+      </p:sp>
+      <p:sp>
+        <p:nvSpPr>
+          <p:cNvPr id="12" name="Google Shape;121;p16">
+            <a:extLst>
+              <a:ext uri="{FF2B5EF4-FFF2-40B4-BE49-F238E27FC236}">
+                <a16:creationId xmlns:a16="http://schemas.microsoft.com/office/drawing/2014/main" id="{935FA1DF-2C02-F28C-3E73-D9E9ACB2CD98}"/>
+              </a:ext>
+            </a:extLst>
+          </p:cNvPr>
+          <p:cNvSpPr/>
+          <p:nvPr/>
+        </p:nvSpPr>
+        <p:spPr>
+          <a:xfrm>
+            <a:off x="12443090" y="7484829"/>
+            <a:ext cx="2410800" cy="1041591"/>
+          </a:xfrm>
+          <a:prstGeom prst="roundRect">
+            <a:avLst>
+              <a:gd name="adj" fmla="val 16667"/>
+            </a:avLst>
+          </a:prstGeom>
+          <a:solidFill>
+            <a:srgbClr val="D0E0E3"/>
+          </a:solidFill>
+          <a:ln w="28575" cap="flat" cmpd="sng">
+            <a:solidFill>
+              <a:srgbClr val="134F5C"/>
+            </a:solidFill>
+            <a:prstDash val="solid"/>
+            <a:round/>
+            <a:headEnd type="none" w="sm" len="sm"/>
+            <a:tailEnd type="none" w="sm" len="sm"/>
+          </a:ln>
+        </p:spPr>
+        <p:txBody>
+          <a:bodyPr spcFirstLastPara="1" wrap="square" lIns="91425" tIns="91425" rIns="91425" bIns="91425" anchor="t" anchorCtr="0">
+            <a:noAutofit/>
+          </a:bodyPr>
+          <a:lstStyle/>
+          <a:p>
+            <a:pPr lvl="0"/>
+            <a:r>
+              <a:rPr lang="pt-PT" dirty="0">
+                <a:latin typeface="Consolas"/>
+                <a:ea typeface="Consolas"/>
+                <a:cs typeface="Consolas"/>
+                <a:sym typeface="Consolas"/>
+              </a:rPr>
+              <a:t>T2: Fazer abstract class para as catastrofes naturais.</a:t>
+            </a:r>
+            <a:br>
+              <a:rPr lang="en-GB" dirty="0">
+                <a:latin typeface="Consolas"/>
+                <a:ea typeface="Consolas"/>
+                <a:cs typeface="Consolas"/>
+                <a:sym typeface="Consolas"/>
+              </a:rPr>
+            </a:br>
+            <a:endParaRPr lang="en-GB" dirty="0">
+              <a:latin typeface="Consolas"/>
+              <a:ea typeface="Consolas"/>
+              <a:cs typeface="Consolas"/>
+              <a:sym typeface="Consolas"/>
+            </a:endParaRPr>
+          </a:p>
+          <a:p>
+            <a:pPr marL="0" lvl="0" indent="0" algn="l" rtl="0">
+              <a:spcBef>
+                <a:spcPts val="0"/>
+              </a:spcBef>
+              <a:spcAft>
+                <a:spcPts val="0"/>
+              </a:spcAft>
+              <a:buNone/>
+            </a:pPr>
+            <a:endParaRPr dirty="0">
+              <a:latin typeface="Consolas"/>
+              <a:ea typeface="Consolas"/>
+              <a:cs typeface="Consolas"/>
+              <a:sym typeface="Consolas"/>
+            </a:endParaRPr>
+          </a:p>
+        </p:txBody>
+      </p:sp>
+      <p:sp>
+        <p:nvSpPr>
+          <p:cNvPr id="13" name="Google Shape;121;p16">
+            <a:extLst>
+              <a:ext uri="{FF2B5EF4-FFF2-40B4-BE49-F238E27FC236}">
+                <a16:creationId xmlns:a16="http://schemas.microsoft.com/office/drawing/2014/main" id="{32911598-3F6D-FCA6-9B42-D0DE9E7BCE22}"/>
+              </a:ext>
+            </a:extLst>
+          </p:cNvPr>
+          <p:cNvSpPr/>
+          <p:nvPr/>
+        </p:nvSpPr>
+        <p:spPr>
+          <a:xfrm>
+            <a:off x="15532407" y="1316976"/>
+            <a:ext cx="2410800" cy="2549628"/>
+          </a:xfrm>
+          <a:prstGeom prst="roundRect">
+            <a:avLst>
+              <a:gd name="adj" fmla="val 16667"/>
+            </a:avLst>
+          </a:prstGeom>
+          <a:solidFill>
+            <a:srgbClr val="D0E0E3"/>
+          </a:solidFill>
+          <a:ln w="28575" cap="flat" cmpd="sng">
+            <a:solidFill>
+              <a:srgbClr val="134F5C"/>
+            </a:solidFill>
+            <a:prstDash val="solid"/>
+            <a:round/>
+            <a:headEnd type="none" w="sm" len="sm"/>
+            <a:tailEnd type="none" w="sm" len="sm"/>
+          </a:ln>
+        </p:spPr>
+        <p:txBody>
+          <a:bodyPr spcFirstLastPara="1" wrap="square" lIns="91425" tIns="91425" rIns="91425" bIns="91425" anchor="t" anchorCtr="0">
+            <a:noAutofit/>
+          </a:bodyPr>
+          <a:lstStyle/>
+          <a:p>
+            <a:pPr lvl="0"/>
+            <a:r>
+              <a:rPr lang="pt-PT" dirty="0">
+                <a:latin typeface="Consolas"/>
+                <a:ea typeface="Consolas"/>
+                <a:cs typeface="Consolas"/>
+                <a:sym typeface="Consolas"/>
+              </a:rPr>
+              <a:t>T3: Aplicar sistema de ranking e finalizar as waves do mode semanal.</a:t>
+            </a:r>
+          </a:p>
+          <a:p>
+            <a:pPr marL="0" lvl="0" indent="0" algn="l" rtl="0">
+              <a:spcBef>
+                <a:spcPts val="0"/>
+              </a:spcBef>
+              <a:spcAft>
+                <a:spcPts val="0"/>
+              </a:spcAft>
+              <a:buNone/>
+            </a:pPr>
+            <a:br>
+              <a:rPr lang="en-GB" dirty="0">
+                <a:latin typeface="Consolas"/>
+                <a:ea typeface="Consolas"/>
+                <a:cs typeface="Consolas"/>
+                <a:sym typeface="Consolas"/>
+              </a:rPr>
+            </a:br>
+            <a:br>
+              <a:rPr lang="en-GB" dirty="0">
+                <a:latin typeface="Consolas"/>
+                <a:ea typeface="Consolas"/>
+                <a:cs typeface="Consolas"/>
+                <a:sym typeface="Consolas"/>
+              </a:rPr>
+            </a:br>
+            <a:endParaRPr lang="en-GB" dirty="0">
+              <a:latin typeface="Consolas"/>
+              <a:ea typeface="Consolas"/>
+              <a:cs typeface="Consolas"/>
+              <a:sym typeface="Consolas"/>
+            </a:endParaRPr>
+          </a:p>
+          <a:p>
+            <a:pPr marL="0" lvl="0" indent="0" algn="l" rtl="0">
+              <a:spcBef>
+                <a:spcPts val="0"/>
+              </a:spcBef>
+              <a:spcAft>
+                <a:spcPts val="0"/>
+              </a:spcAft>
+              <a:buNone/>
+            </a:pPr>
+            <a:endParaRPr dirty="0">
+              <a:latin typeface="Consolas"/>
+              <a:ea typeface="Consolas"/>
+              <a:cs typeface="Consolas"/>
+              <a:sym typeface="Consolas"/>
+            </a:endParaRPr>
+          </a:p>
+        </p:txBody>
+      </p:sp>
+      <p:sp>
+        <p:nvSpPr>
+          <p:cNvPr id="14" name="Google Shape;121;p16">
+            <a:extLst>
+              <a:ext uri="{FF2B5EF4-FFF2-40B4-BE49-F238E27FC236}">
+                <a16:creationId xmlns:a16="http://schemas.microsoft.com/office/drawing/2014/main" id="{F7435B39-D2DA-3F89-1647-3F4311FB16A9}"/>
+              </a:ext>
+            </a:extLst>
+          </p:cNvPr>
+          <p:cNvSpPr/>
+          <p:nvPr/>
+        </p:nvSpPr>
+        <p:spPr>
+          <a:xfrm>
+            <a:off x="12443090" y="9060729"/>
+            <a:ext cx="2410800" cy="780327"/>
+          </a:xfrm>
+          <a:prstGeom prst="roundRect">
+            <a:avLst>
+              <a:gd name="adj" fmla="val 16667"/>
+            </a:avLst>
+          </a:prstGeom>
+          <a:solidFill>
+            <a:srgbClr val="D0E0E3"/>
+          </a:solidFill>
+          <a:ln w="28575" cap="flat" cmpd="sng">
+            <a:solidFill>
+              <a:srgbClr val="134F5C"/>
+            </a:solidFill>
+            <a:prstDash val="solid"/>
+            <a:round/>
+            <a:headEnd type="none" w="sm" len="sm"/>
+            <a:tailEnd type="none" w="sm" len="sm"/>
+          </a:ln>
+        </p:spPr>
+        <p:txBody>
+          <a:bodyPr spcFirstLastPara="1" wrap="square" lIns="91425" tIns="91425" rIns="91425" bIns="91425" anchor="t" anchorCtr="0">
+            <a:noAutofit/>
+          </a:bodyPr>
+          <a:lstStyle/>
+          <a:p>
+            <a:pPr lvl="0"/>
+            <a:r>
+              <a:rPr lang="pt-PT" dirty="0">
+                <a:latin typeface="Consolas"/>
+                <a:ea typeface="Consolas"/>
+                <a:cs typeface="Consolas"/>
+                <a:sym typeface="Consolas"/>
+              </a:rPr>
+              <a:t>T4: Fazer resource trader bot feature.</a:t>
+            </a:r>
+          </a:p>
+          <a:p>
+            <a:pPr marL="0" lvl="0" indent="0" algn="l" rtl="0">
+              <a:spcBef>
+                <a:spcPts val="0"/>
+              </a:spcBef>
+              <a:spcAft>
+                <a:spcPts val="0"/>
+              </a:spcAft>
+              <a:buNone/>
+            </a:pPr>
+            <a:br>
+              <a:rPr lang="en-GB" dirty="0">
+                <a:latin typeface="Consolas"/>
+                <a:ea typeface="Consolas"/>
+                <a:cs typeface="Consolas"/>
+                <a:sym typeface="Consolas"/>
+              </a:rPr>
+            </a:br>
+            <a:br>
+              <a:rPr lang="en-GB" dirty="0">
+                <a:latin typeface="Consolas"/>
+                <a:ea typeface="Consolas"/>
+                <a:cs typeface="Consolas"/>
+                <a:sym typeface="Consolas"/>
+              </a:rPr>
+            </a:br>
+            <a:endParaRPr lang="en-GB" dirty="0">
+              <a:latin typeface="Consolas"/>
+              <a:ea typeface="Consolas"/>
+              <a:cs typeface="Consolas"/>
+              <a:sym typeface="Consolas"/>
+            </a:endParaRPr>
+          </a:p>
+          <a:p>
+            <a:pPr marL="0" lvl="0" indent="0" algn="l" rtl="0">
+              <a:spcBef>
+                <a:spcPts val="0"/>
+              </a:spcBef>
+              <a:spcAft>
+                <a:spcPts val="0"/>
+              </a:spcAft>
+              <a:buNone/>
+            </a:pPr>
+            <a:endParaRPr dirty="0">
+              <a:latin typeface="Consolas"/>
+              <a:ea typeface="Consolas"/>
+              <a:cs typeface="Consolas"/>
+              <a:sym typeface="Consolas"/>
+            </a:endParaRPr>
+          </a:p>
+        </p:txBody>
+      </p:sp>
+      <p:sp>
+        <p:nvSpPr>
+          <p:cNvPr id="19" name="Google Shape;92;p15">
+            <a:extLst>
+              <a:ext uri="{FF2B5EF4-FFF2-40B4-BE49-F238E27FC236}">
+                <a16:creationId xmlns:a16="http://schemas.microsoft.com/office/drawing/2014/main" id="{D5FE743F-D8D2-FC81-6496-58BD0180C274}"/>
+              </a:ext>
+            </a:extLst>
+          </p:cNvPr>
+          <p:cNvSpPr/>
+          <p:nvPr/>
+        </p:nvSpPr>
+        <p:spPr>
+          <a:xfrm>
+            <a:off x="6073006" y="8884240"/>
+            <a:ext cx="3239127" cy="1552771"/>
+          </a:xfrm>
+          <a:prstGeom prst="roundRect">
+            <a:avLst>
+              <a:gd name="adj" fmla="val 16667"/>
+            </a:avLst>
+          </a:prstGeom>
+          <a:solidFill>
+            <a:srgbClr val="D9EAD3"/>
+          </a:solidFill>
+          <a:ln w="28575" cap="flat" cmpd="sng">
+            <a:solidFill>
+              <a:srgbClr val="274E13"/>
+            </a:solidFill>
+            <a:prstDash val="solid"/>
+            <a:round/>
+            <a:headEnd type="none" w="sm" len="sm"/>
+            <a:tailEnd type="none" w="sm" len="sm"/>
+          </a:ln>
+        </p:spPr>
+        <p:txBody>
+          <a:bodyPr spcFirstLastPara="1" wrap="square" lIns="91425" tIns="91425" rIns="91425" bIns="91425" anchor="t" anchorCtr="0">
+            <a:noAutofit/>
+          </a:bodyPr>
+          <a:lstStyle/>
+          <a:p>
+            <a:pPr lvl="0"/>
+            <a:r>
+              <a:rPr lang="en-GB" dirty="0">
+                <a:latin typeface="Consolas"/>
+                <a:ea typeface="Consolas"/>
+                <a:cs typeface="Consolas"/>
+                <a:sym typeface="Consolas"/>
+              </a:rPr>
+              <a:t>US4: Como </a:t>
+            </a:r>
+            <a:r>
+              <a:rPr lang="en-GB" dirty="0" err="1">
+                <a:latin typeface="Consolas"/>
+                <a:ea typeface="Consolas"/>
+                <a:cs typeface="Consolas"/>
+                <a:sym typeface="Consolas"/>
+              </a:rPr>
+              <a:t>membro</a:t>
+            </a:r>
+            <a:r>
+              <a:rPr lang="en-GB" dirty="0">
+                <a:latin typeface="Consolas"/>
+                <a:ea typeface="Consolas"/>
+                <a:cs typeface="Consolas"/>
+                <a:sym typeface="Consolas"/>
+              </a:rPr>
+              <a:t> da </a:t>
+            </a:r>
+            <a:r>
+              <a:rPr lang="en-GB" dirty="0" err="1">
+                <a:latin typeface="Consolas"/>
+                <a:ea typeface="Consolas"/>
+                <a:cs typeface="Consolas"/>
+                <a:sym typeface="Consolas"/>
+              </a:rPr>
+              <a:t>equipa</a:t>
+            </a:r>
+            <a:r>
+              <a:rPr lang="en-GB" dirty="0">
+                <a:latin typeface="Consolas"/>
+                <a:ea typeface="Consolas"/>
+                <a:cs typeface="Consolas"/>
+                <a:sym typeface="Consolas"/>
+              </a:rPr>
+              <a:t> </a:t>
+            </a:r>
+            <a:r>
+              <a:rPr lang="en-GB" dirty="0" err="1">
+                <a:latin typeface="Consolas"/>
+                <a:ea typeface="Consolas"/>
+                <a:cs typeface="Consolas"/>
+                <a:sym typeface="Consolas"/>
+              </a:rPr>
+              <a:t>quero</a:t>
+            </a:r>
+            <a:r>
+              <a:rPr lang="en-GB" dirty="0">
+                <a:latin typeface="Consolas"/>
+                <a:ea typeface="Consolas"/>
+                <a:cs typeface="Consolas"/>
+                <a:sym typeface="Consolas"/>
+              </a:rPr>
+              <a:t> f</a:t>
+            </a:r>
+            <a:r>
+              <a:rPr lang="pt-PT" dirty="0">
+                <a:latin typeface="Consolas"/>
+                <a:ea typeface="Consolas"/>
+                <a:cs typeface="Consolas"/>
+                <a:sym typeface="Consolas"/>
+              </a:rPr>
+              <a:t>azer resource trader bot feature, com o qual os jogadores podem fazer trocas de uns recursos por outros durante o jogo</a:t>
+            </a:r>
+            <a:endParaRPr dirty="0">
+              <a:latin typeface="Consolas"/>
+              <a:ea typeface="Consolas"/>
+              <a:cs typeface="Consolas"/>
+              <a:sym typeface="Consolas"/>
+            </a:endParaRPr>
+          </a:p>
+        </p:txBody>
+      </p:sp>
+      <p:sp>
+        <p:nvSpPr>
+          <p:cNvPr id="20" name="Google Shape;121;p16">
+            <a:extLst>
+              <a:ext uri="{FF2B5EF4-FFF2-40B4-BE49-F238E27FC236}">
+                <a16:creationId xmlns:a16="http://schemas.microsoft.com/office/drawing/2014/main" id="{321B21AC-7B43-7200-B2F9-BF25B6995A4D}"/>
+              </a:ext>
+            </a:extLst>
+          </p:cNvPr>
+          <p:cNvSpPr/>
+          <p:nvPr/>
+        </p:nvSpPr>
+        <p:spPr>
+          <a:xfrm>
+            <a:off x="12443090" y="6018221"/>
+            <a:ext cx="2410800" cy="780327"/>
+          </a:xfrm>
+          <a:prstGeom prst="roundRect">
+            <a:avLst>
+              <a:gd name="adj" fmla="val 16667"/>
+            </a:avLst>
+          </a:prstGeom>
+          <a:solidFill>
+            <a:srgbClr val="D0E0E3"/>
+          </a:solidFill>
+          <a:ln w="28575" cap="flat" cmpd="sng">
+            <a:solidFill>
+              <a:srgbClr val="134F5C"/>
+            </a:solidFill>
+            <a:prstDash val="solid"/>
+            <a:round/>
+            <a:headEnd type="none" w="sm" len="sm"/>
+            <a:tailEnd type="none" w="sm" len="sm"/>
+          </a:ln>
+        </p:spPr>
+        <p:txBody>
+          <a:bodyPr spcFirstLastPara="1" wrap="square" lIns="91425" tIns="91425" rIns="91425" bIns="91425" anchor="t" anchorCtr="0">
+            <a:noAutofit/>
+          </a:bodyPr>
+          <a:lstStyle/>
+          <a:p>
+            <a:pPr lvl="0"/>
+            <a:r>
+              <a:rPr lang="pt-PT" dirty="0">
+                <a:latin typeface="Consolas"/>
+                <a:ea typeface="Consolas"/>
+                <a:cs typeface="Consolas"/>
+                <a:sym typeface="Consolas"/>
+              </a:rPr>
+              <a:t>T4: Fazer resource trader bot feature.</a:t>
+            </a:r>
+          </a:p>
+          <a:p>
+            <a:pPr marL="0" lvl="0" indent="0" algn="l" rtl="0">
+              <a:spcBef>
+                <a:spcPts val="0"/>
+              </a:spcBef>
+              <a:spcAft>
+                <a:spcPts val="0"/>
+              </a:spcAft>
+              <a:buNone/>
+            </a:pPr>
+            <a:br>
+              <a:rPr lang="en-GB" dirty="0">
+                <a:latin typeface="Consolas"/>
+                <a:ea typeface="Consolas"/>
+                <a:cs typeface="Consolas"/>
+                <a:sym typeface="Consolas"/>
+              </a:rPr>
+            </a:br>
+            <a:br>
+              <a:rPr lang="en-GB" dirty="0">
+                <a:latin typeface="Consolas"/>
+                <a:ea typeface="Consolas"/>
+                <a:cs typeface="Consolas"/>
+                <a:sym typeface="Consolas"/>
+              </a:rPr>
+            </a:br>
+            <a:endParaRPr lang="en-GB" dirty="0">
+              <a:latin typeface="Consolas"/>
+              <a:ea typeface="Consolas"/>
+              <a:cs typeface="Consolas"/>
+              <a:sym typeface="Consolas"/>
+            </a:endParaRPr>
+          </a:p>
+          <a:p>
+            <a:pPr marL="0" lvl="0" indent="0" algn="l" rtl="0">
+              <a:spcBef>
+                <a:spcPts val="0"/>
+              </a:spcBef>
+              <a:spcAft>
+                <a:spcPts val="0"/>
+              </a:spcAft>
+              <a:buNone/>
+            </a:pPr>
+            <a:endParaRPr dirty="0">
+              <a:latin typeface="Consolas"/>
+              <a:ea typeface="Consolas"/>
+              <a:cs typeface="Consolas"/>
+              <a:sym typeface="Consolas"/>
+            </a:endParaRPr>
+          </a:p>
+        </p:txBody>
+      </p:sp>
+    </p:spTree>
+    <p:extLst>
+      <p:ext uri="{BB962C8B-B14F-4D97-AF65-F5344CB8AC3E}">
+        <p14:creationId xmlns:p14="http://schemas.microsoft.com/office/powerpoint/2010/main" val="1010171579"/>
+      </p:ext>
+    </p:extLst>
+  </p:cSld>
+  <p:clrMapOvr>
+    <a:masterClrMapping/>
+  </p:clrMapOvr>
+</p:sld>
+</file>
+
 <file path=ppt/slides/slide3.xml><?xml version="1.0" encoding="utf-8"?>
 <p:sld xmlns:a="http://schemas.openxmlformats.org/drawingml/2006/main" xmlns:r="http://schemas.openxmlformats.org/officeDocument/2006/relationships" xmlns:p="http://schemas.openxmlformats.org/presentationml/2006/main">
   <p:cSld>

--- a/SE202526/Management/Scrum Board.pptx
+++ b/SE202526/Management/Scrum Board.pptx
@@ -5,7 +5,7 @@
     <p:sldMasterId id="2147483659" r:id="rId1"/>
   </p:sldMasterIdLst>
   <p:notesMasterIdLst>
-    <p:notesMasterId r:id="rId29"/>
+    <p:notesMasterId r:id="rId30"/>
   </p:notesMasterIdLst>
   <p:sldIdLst>
     <p:sldId id="256" r:id="rId2"/>
@@ -35,6 +35,7 @@
     <p:sldId id="283" r:id="rId26"/>
     <p:sldId id="284" r:id="rId27"/>
     <p:sldId id="285" r:id="rId28"/>
+    <p:sldId id="286" r:id="rId29"/>
   </p:sldIdLst>
   <p:sldSz cx="21599525" cy="10799763"/>
   <p:notesSz cx="6858000" cy="9144000"/>
@@ -3077,7 +3078,7 @@
               </a:spcAft>
               <a:buNone/>
             </a:pPr>
-            <a:endParaRPr/>
+            <a:endParaRPr dirty="0"/>
           </a:p>
         </p:txBody>
       </p:sp>
@@ -3102,7 +3103,7 @@
         <p:cNvPr id="1" name="Shape 186">
           <a:extLst>
             <a:ext uri="{FF2B5EF4-FFF2-40B4-BE49-F238E27FC236}">
-              <a16:creationId xmlns:a16="http://schemas.microsoft.com/office/drawing/2014/main" id="{D5FEDCF4-1D3F-A876-EC7F-E063FB170265}"/>
+              <a16:creationId xmlns:a16="http://schemas.microsoft.com/office/drawing/2014/main" id="{EDB64537-E355-EDF6-29EF-4A4708FE618F}"/>
             </a:ext>
           </a:extLst>
         </p:cNvPr>
@@ -3122,7 +3123,7 @@
           <p:cNvPr id="187" name="Google Shape;187;g3850b307b58_0_218:notes">
             <a:extLst>
               <a:ext uri="{FF2B5EF4-FFF2-40B4-BE49-F238E27FC236}">
-                <a16:creationId xmlns:a16="http://schemas.microsoft.com/office/drawing/2014/main" id="{CFDEC4F2-FB39-8EF1-AF8A-6BA7BF2E9916}"/>
+                <a16:creationId xmlns:a16="http://schemas.microsoft.com/office/drawing/2014/main" id="{6BB80968-BD9F-B03A-40A9-EECE593CDC6F}"/>
               </a:ext>
             </a:extLst>
           </p:cNvPr>
@@ -3169,7 +3170,7 @@
           <p:cNvPr id="188" name="Google Shape;188;g3850b307b58_0_218:notes">
             <a:extLst>
               <a:ext uri="{FF2B5EF4-FFF2-40B4-BE49-F238E27FC236}">
-                <a16:creationId xmlns:a16="http://schemas.microsoft.com/office/drawing/2014/main" id="{E7B83622-7EF1-000E-F7B3-8D56357C5814}"/>
+                <a16:creationId xmlns:a16="http://schemas.microsoft.com/office/drawing/2014/main" id="{50ABCE7E-1CD0-8098-D492-B17B09AB781C}"/>
               </a:ext>
             </a:extLst>
           </p:cNvPr>
@@ -3204,14 +3205,141 @@
               </a:spcAft>
               <a:buNone/>
             </a:pPr>
-            <a:endParaRPr/>
+            <a:endParaRPr dirty="0"/>
           </a:p>
         </p:txBody>
       </p:sp>
     </p:spTree>
     <p:extLst>
       <p:ext uri="{BB962C8B-B14F-4D97-AF65-F5344CB8AC3E}">
-        <p14:creationId xmlns:p14="http://schemas.microsoft.com/office/powerpoint/2010/main" val="3464284141"/>
+        <p14:creationId xmlns:p14="http://schemas.microsoft.com/office/powerpoint/2010/main" val="4102854279"/>
+      </p:ext>
+    </p:extLst>
+  </p:cSld>
+  <p:clrMapOvr>
+    <a:masterClrMapping/>
+  </p:clrMapOvr>
+</p:notes>
+</file>
+
+<file path=ppt/notesSlides/notesSlide28.xml><?xml version="1.0" encoding="utf-8"?>
+<p:notes xmlns:a="http://schemas.openxmlformats.org/drawingml/2006/main" xmlns:r="http://schemas.openxmlformats.org/officeDocument/2006/relationships" xmlns:p="http://schemas.openxmlformats.org/presentationml/2006/main" showMasterSp="0" showMasterPhAnim="0">
+  <p:cSld>
+    <p:spTree>
+      <p:nvGrpSpPr>
+        <p:cNvPr id="1" name="Shape 186">
+          <a:extLst>
+            <a:ext uri="{FF2B5EF4-FFF2-40B4-BE49-F238E27FC236}">
+              <a16:creationId xmlns:a16="http://schemas.microsoft.com/office/drawing/2014/main" id="{797E3EF4-C4D0-8DD6-B045-F0B746CF144E}"/>
+            </a:ext>
+          </a:extLst>
+        </p:cNvPr>
+        <p:cNvGrpSpPr/>
+        <p:nvPr/>
+      </p:nvGrpSpPr>
+      <p:grpSpPr>
+        <a:xfrm>
+          <a:off x="0" y="0"/>
+          <a:ext cx="0" cy="0"/>
+          <a:chOff x="0" y="0"/>
+          <a:chExt cx="0" cy="0"/>
+        </a:xfrm>
+      </p:grpSpPr>
+      <p:sp>
+        <p:nvSpPr>
+          <p:cNvPr id="187" name="Google Shape;187;g3850b307b58_0_218:notes">
+            <a:extLst>
+              <a:ext uri="{FF2B5EF4-FFF2-40B4-BE49-F238E27FC236}">
+                <a16:creationId xmlns:a16="http://schemas.microsoft.com/office/drawing/2014/main" id="{2EB5D279-9A98-8FA1-F3A6-A50111A03E94}"/>
+              </a:ext>
+            </a:extLst>
+          </p:cNvPr>
+          <p:cNvSpPr>
+            <a:spLocks noGrp="1" noRot="1" noChangeAspect="1"/>
+          </p:cNvSpPr>
+          <p:nvPr>
+            <p:ph type="sldImg" idx="2"/>
+          </p:nvPr>
+        </p:nvSpPr>
+        <p:spPr>
+          <a:xfrm>
+            <a:off x="0" y="685800"/>
+            <a:ext cx="6858000" cy="3429000"/>
+          </a:xfrm>
+          <a:custGeom>
+            <a:avLst/>
+            <a:gdLst/>
+            <a:ahLst/>
+            <a:cxnLst/>
+            <a:rect l="l" t="t" r="r" b="b"/>
+            <a:pathLst>
+              <a:path w="120000" h="120000" extrusionOk="0">
+                <a:moveTo>
+                  <a:pt x="0" y="0"/>
+                </a:moveTo>
+                <a:lnTo>
+                  <a:pt x="120000" y="0"/>
+                </a:lnTo>
+                <a:lnTo>
+                  <a:pt x="120000" y="120000"/>
+                </a:lnTo>
+                <a:lnTo>
+                  <a:pt x="0" y="120000"/>
+                </a:lnTo>
+                <a:close/>
+              </a:path>
+            </a:pathLst>
+          </a:custGeom>
+        </p:spPr>
+      </p:sp>
+      <p:sp>
+        <p:nvSpPr>
+          <p:cNvPr id="188" name="Google Shape;188;g3850b307b58_0_218:notes">
+            <a:extLst>
+              <a:ext uri="{FF2B5EF4-FFF2-40B4-BE49-F238E27FC236}">
+                <a16:creationId xmlns:a16="http://schemas.microsoft.com/office/drawing/2014/main" id="{AF88B6DB-BF81-CD5F-E641-21BF3B6A27FB}"/>
+              </a:ext>
+            </a:extLst>
+          </p:cNvPr>
+          <p:cNvSpPr txBox="1">
+            <a:spLocks noGrp="1"/>
+          </p:cNvSpPr>
+          <p:nvPr>
+            <p:ph type="body" idx="1"/>
+          </p:nvPr>
+        </p:nvSpPr>
+        <p:spPr>
+          <a:xfrm>
+            <a:off x="685800" y="4343400"/>
+            <a:ext cx="5486400" cy="4114800"/>
+          </a:xfrm>
+          <a:prstGeom prst="rect">
+            <a:avLst/>
+          </a:prstGeom>
+        </p:spPr>
+        <p:txBody>
+          <a:bodyPr spcFirstLastPara="1" wrap="square" lIns="91425" tIns="91425" rIns="91425" bIns="91425" anchor="t" anchorCtr="0">
+            <a:noAutofit/>
+          </a:bodyPr>
+          <a:lstStyle/>
+          <a:p>
+            <a:pPr marL="0" lvl="0" indent="0" algn="l" rtl="0">
+              <a:spcBef>
+                <a:spcPts val="0"/>
+              </a:spcBef>
+              <a:spcAft>
+                <a:spcPts val="0"/>
+              </a:spcAft>
+              <a:buNone/>
+            </a:pPr>
+            <a:endParaRPr dirty="0"/>
+          </a:p>
+        </p:txBody>
+      </p:sp>
+    </p:spTree>
+    <p:extLst>
+      <p:ext uri="{BB962C8B-B14F-4D97-AF65-F5344CB8AC3E}">
+        <p14:creationId xmlns:p14="http://schemas.microsoft.com/office/powerpoint/2010/main" val="1725710287"/>
       </p:ext>
     </p:extLst>
   </p:cSld>
@@ -37960,7 +38088,7 @@
         </p:nvCxnSpPr>
         <p:spPr>
           <a:xfrm>
-            <a:off x="5944724" y="-31500"/>
+            <a:off x="5758457" y="-28500"/>
             <a:ext cx="0" cy="10857000"/>
           </a:xfrm>
           <a:prstGeom prst="straightConnector1">
@@ -38060,8 +38188,8 @@
         </p:nvSpPr>
         <p:spPr>
           <a:xfrm>
-            <a:off x="6281636" y="84312"/>
-            <a:ext cx="2410800" cy="480900"/>
+            <a:off x="6281635" y="84312"/>
+            <a:ext cx="3406779" cy="480900"/>
           </a:xfrm>
           <a:prstGeom prst="roundRect">
             <a:avLst>
@@ -38128,7 +38256,7 @@
         </p:nvSpPr>
         <p:spPr>
           <a:xfrm>
-            <a:off x="9366071" y="84312"/>
+            <a:off x="9896006" y="121794"/>
             <a:ext cx="2410800" cy="480900"/>
           </a:xfrm>
           <a:prstGeom prst="roundRect">
@@ -38196,7 +38324,7 @@
         </p:nvSpPr>
         <p:spPr>
           <a:xfrm>
-            <a:off x="12395940" y="84312"/>
+            <a:off x="12758767" y="136415"/>
             <a:ext cx="2410800" cy="480900"/>
           </a:xfrm>
           <a:prstGeom prst="roundRect">
@@ -38233,13 +38361,81 @@
               <a:buNone/>
             </a:pPr>
             <a:r>
+              <a:rPr lang="en-GB" sz="1800" b="1" dirty="0">
+                <a:latin typeface="Consolas"/>
+                <a:ea typeface="Consolas"/>
+                <a:cs typeface="Consolas"/>
+                <a:sym typeface="Consolas"/>
+              </a:rPr>
+              <a:t>Doing</a:t>
+            </a:r>
+            <a:endParaRPr sz="1800" b="1" dirty="0">
+              <a:latin typeface="Consolas"/>
+              <a:ea typeface="Consolas"/>
+              <a:cs typeface="Consolas"/>
+              <a:sym typeface="Consolas"/>
+            </a:endParaRPr>
+          </a:p>
+        </p:txBody>
+      </p:sp>
+      <p:sp>
+        <p:nvSpPr>
+          <p:cNvPr id="195" name="Google Shape;195;p19">
+            <a:extLst>
+              <a:ext uri="{FF2B5EF4-FFF2-40B4-BE49-F238E27FC236}">
+                <a16:creationId xmlns:a16="http://schemas.microsoft.com/office/drawing/2014/main" id="{F024E59C-02FE-6BA9-EF4F-6E127DF6FB26}"/>
+              </a:ext>
+            </a:extLst>
+          </p:cNvPr>
+          <p:cNvSpPr/>
+          <p:nvPr/>
+        </p:nvSpPr>
+        <p:spPr>
+          <a:xfrm>
+            <a:off x="15532407" y="84312"/>
+            <a:ext cx="2410800" cy="480900"/>
+          </a:xfrm>
+          <a:prstGeom prst="roundRect">
+            <a:avLst>
+              <a:gd name="adj" fmla="val 16667"/>
+            </a:avLst>
+          </a:prstGeom>
+          <a:solidFill>
+            <a:srgbClr val="F9CB9C"/>
+          </a:solidFill>
+          <a:ln w="28575" cap="flat" cmpd="sng">
+            <a:solidFill>
+              <a:srgbClr val="B45F06"/>
+            </a:solidFill>
+            <a:prstDash val="solid"/>
+            <a:round/>
+            <a:headEnd type="none" w="sm" len="sm"/>
+            <a:tailEnd type="none" w="sm" len="sm"/>
+          </a:ln>
+        </p:spPr>
+        <p:txBody>
+          <a:bodyPr spcFirstLastPara="1" wrap="square" lIns="91425" tIns="91425" rIns="91425" bIns="91425" anchor="ctr" anchorCtr="0">
+            <a:noAutofit/>
+          </a:bodyPr>
+          <a:lstStyle/>
+          <a:p>
+            <a:pPr marL="0" lvl="0" indent="0" algn="ctr" rtl="0">
+              <a:spcBef>
+                <a:spcPts val="0"/>
+              </a:spcBef>
+              <a:spcAft>
+                <a:spcPts val="0"/>
+              </a:spcAft>
+              <a:buNone/>
+            </a:pPr>
+            <a:r>
               <a:rPr lang="en-GB" sz="1800" b="1">
                 <a:latin typeface="Consolas"/>
                 <a:ea typeface="Consolas"/>
                 <a:cs typeface="Consolas"/>
                 <a:sym typeface="Consolas"/>
               </a:rPr>
-              <a:t>Doing</a:t>
+              <a:t>Review</a:t>
             </a:r>
             <a:endParaRPr sz="1800" b="1">
               <a:latin typeface="Consolas"/>
@@ -38252,10 +38448,10 @@
       </p:sp>
       <p:sp>
         <p:nvSpPr>
-          <p:cNvPr id="195" name="Google Shape;195;p19">
-            <a:extLst>
-              <a:ext uri="{FF2B5EF4-FFF2-40B4-BE49-F238E27FC236}">
-                <a16:creationId xmlns:a16="http://schemas.microsoft.com/office/drawing/2014/main" id="{F024E59C-02FE-6BA9-EF4F-6E127DF6FB26}"/>
+          <p:cNvPr id="196" name="Google Shape;196;p19">
+            <a:extLst>
+              <a:ext uri="{FF2B5EF4-FFF2-40B4-BE49-F238E27FC236}">
+                <a16:creationId xmlns:a16="http://schemas.microsoft.com/office/drawing/2014/main" id="{96EA5CF9-C618-437F-5A70-08B7FB006172}"/>
               </a:ext>
             </a:extLst>
           </p:cNvPr>
@@ -38264,7 +38460,7 @@
         </p:nvSpPr>
         <p:spPr>
           <a:xfrm>
-            <a:off x="15532407" y="84312"/>
+            <a:off x="18668888" y="84312"/>
             <a:ext cx="2410800" cy="480900"/>
           </a:xfrm>
           <a:prstGeom prst="roundRect">
@@ -38307,7 +38503,7 @@
                 <a:cs typeface="Consolas"/>
                 <a:sym typeface="Consolas"/>
               </a:rPr>
-              <a:t>Review</a:t>
+              <a:t>Done</a:t>
             </a:r>
             <a:endParaRPr sz="1800" b="1">
               <a:latin typeface="Consolas"/>
@@ -38320,10 +38516,10 @@
       </p:sp>
       <p:sp>
         <p:nvSpPr>
-          <p:cNvPr id="196" name="Google Shape;196;p19">
-            <a:extLst>
-              <a:ext uri="{FF2B5EF4-FFF2-40B4-BE49-F238E27FC236}">
-                <a16:creationId xmlns:a16="http://schemas.microsoft.com/office/drawing/2014/main" id="{96EA5CF9-C618-437F-5A70-08B7FB006172}"/>
+          <p:cNvPr id="197" name="Google Shape;197;p19">
+            <a:extLst>
+              <a:ext uri="{FF2B5EF4-FFF2-40B4-BE49-F238E27FC236}">
+                <a16:creationId xmlns:a16="http://schemas.microsoft.com/office/drawing/2014/main" id="{09F45951-51C3-6918-0A63-F119FAB29588}"/>
               </a:ext>
             </a:extLst>
           </p:cNvPr>
@@ -38332,7 +38528,7 @@
         </p:nvSpPr>
         <p:spPr>
           <a:xfrm>
-            <a:off x="18668888" y="84312"/>
+            <a:off x="167288" y="84312"/>
             <a:ext cx="2410800" cy="480900"/>
           </a:xfrm>
           <a:prstGeom prst="roundRect">
@@ -38375,7 +38571,7 @@
                 <a:cs typeface="Consolas"/>
                 <a:sym typeface="Consolas"/>
               </a:rPr>
-              <a:t>Done</a:t>
+              <a:t>Backlog</a:t>
             </a:r>
             <a:endParaRPr sz="1800" b="1">
               <a:latin typeface="Consolas"/>
@@ -38386,74 +38582,6 @@
           </a:p>
         </p:txBody>
       </p:sp>
-      <p:sp>
-        <p:nvSpPr>
-          <p:cNvPr id="197" name="Google Shape;197;p19">
-            <a:extLst>
-              <a:ext uri="{FF2B5EF4-FFF2-40B4-BE49-F238E27FC236}">
-                <a16:creationId xmlns:a16="http://schemas.microsoft.com/office/drawing/2014/main" id="{09F45951-51C3-6918-0A63-F119FAB29588}"/>
-              </a:ext>
-            </a:extLst>
-          </p:cNvPr>
-          <p:cNvSpPr/>
-          <p:nvPr/>
-        </p:nvSpPr>
-        <p:spPr>
-          <a:xfrm>
-            <a:off x="167288" y="84312"/>
-            <a:ext cx="2410800" cy="480900"/>
-          </a:xfrm>
-          <a:prstGeom prst="roundRect">
-            <a:avLst>
-              <a:gd name="adj" fmla="val 16667"/>
-            </a:avLst>
-          </a:prstGeom>
-          <a:solidFill>
-            <a:srgbClr val="F9CB9C"/>
-          </a:solidFill>
-          <a:ln w="28575" cap="flat" cmpd="sng">
-            <a:solidFill>
-              <a:srgbClr val="B45F06"/>
-            </a:solidFill>
-            <a:prstDash val="solid"/>
-            <a:round/>
-            <a:headEnd type="none" w="sm" len="sm"/>
-            <a:tailEnd type="none" w="sm" len="sm"/>
-          </a:ln>
-        </p:spPr>
-        <p:txBody>
-          <a:bodyPr spcFirstLastPara="1" wrap="square" lIns="91425" tIns="91425" rIns="91425" bIns="91425" anchor="ctr" anchorCtr="0">
-            <a:noAutofit/>
-          </a:bodyPr>
-          <a:lstStyle/>
-          <a:p>
-            <a:pPr marL="0" lvl="0" indent="0" algn="ctr" rtl="0">
-              <a:spcBef>
-                <a:spcPts val="0"/>
-              </a:spcBef>
-              <a:spcAft>
-                <a:spcPts val="0"/>
-              </a:spcAft>
-              <a:buNone/>
-            </a:pPr>
-            <a:r>
-              <a:rPr lang="en-GB" sz="1800" b="1">
-                <a:latin typeface="Consolas"/>
-                <a:ea typeface="Consolas"/>
-                <a:cs typeface="Consolas"/>
-                <a:sym typeface="Consolas"/>
-              </a:rPr>
-              <a:t>Backlog</a:t>
-            </a:r>
-            <a:endParaRPr sz="1800" b="1">
-              <a:latin typeface="Consolas"/>
-              <a:ea typeface="Consolas"/>
-              <a:cs typeface="Consolas"/>
-              <a:sym typeface="Consolas"/>
-            </a:endParaRPr>
-          </a:p>
-        </p:txBody>
-      </p:sp>
       <p:cxnSp>
         <p:nvCxnSpPr>
           <p:cNvPr id="204" name="Google Shape;204;p19">
@@ -38939,7 +39067,7 @@
                 <a:cs typeface="Consolas"/>
                 <a:sym typeface="Consolas"/>
               </a:rPr>
-              <a:t>68180</a:t>
+              <a:t>67912</a:t>
             </a:r>
             <a:endParaRPr sz="1800" b="1" dirty="0">
               <a:latin typeface="Consolas"/>
@@ -39007,7 +39135,7 @@
                 <a:cs typeface="Consolas"/>
                 <a:sym typeface="Consolas"/>
               </a:rPr>
-              <a:t>67912</a:t>
+              <a:t>68180</a:t>
             </a:r>
             <a:endParaRPr sz="1800" b="1" dirty="0">
               <a:latin typeface="Consolas"/>
@@ -39100,8 +39228,8 @@
         </p:nvSpPr>
         <p:spPr>
           <a:xfrm>
-            <a:off x="6127942" y="3789573"/>
-            <a:ext cx="3204918" cy="1537318"/>
+            <a:off x="5839417" y="3639469"/>
+            <a:ext cx="2443410" cy="2106418"/>
           </a:xfrm>
           <a:prstGeom prst="roundRect">
             <a:avLst>
@@ -39223,8 +39351,8 @@
         </p:nvSpPr>
         <p:spPr>
           <a:xfrm>
-            <a:off x="6127942" y="7203407"/>
-            <a:ext cx="3184194" cy="1514182"/>
+            <a:off x="5839417" y="5783003"/>
+            <a:ext cx="2443410" cy="1843569"/>
           </a:xfrm>
           <a:prstGeom prst="roundRect">
             <a:avLst>
@@ -39321,7 +39449,7 @@
                 <a:cs typeface="Consolas"/>
                 <a:sym typeface="Consolas"/>
               </a:rPr>
-              <a:t>azer uma abstract class que ligue as 3 catastrofes naturais, para melhorar a qualidade do código.</a:t>
+              <a:t>azer uma abstract class que ligue as 3 catástrofes naturais, para melhorar a qualidade do código.</a:t>
             </a:r>
             <a:endParaRPr dirty="0">
               <a:latin typeface="Consolas"/>
@@ -39346,8 +39474,8 @@
         </p:nvSpPr>
         <p:spPr>
           <a:xfrm>
-            <a:off x="6200057" y="917871"/>
-            <a:ext cx="2943942" cy="2682459"/>
+            <a:off x="5908929" y="768737"/>
+            <a:ext cx="2328734" cy="2817311"/>
           </a:xfrm>
           <a:prstGeom prst="roundRect">
             <a:avLst>
@@ -39466,10 +39594,10 @@
       </p:sp>
       <p:sp>
         <p:nvSpPr>
-          <p:cNvPr id="9" name="Google Shape;92;p15">
-            <a:extLst>
-              <a:ext uri="{FF2B5EF4-FFF2-40B4-BE49-F238E27FC236}">
-                <a16:creationId xmlns:a16="http://schemas.microsoft.com/office/drawing/2014/main" id="{B8D595D3-F6C8-B740-019D-3C36A4D731CA}"/>
+          <p:cNvPr id="23" name="Google Shape;121;p16">
+            <a:extLst>
+              <a:ext uri="{FF2B5EF4-FFF2-40B4-BE49-F238E27FC236}">
+                <a16:creationId xmlns:a16="http://schemas.microsoft.com/office/drawing/2014/main" id="{0EB0AA07-673C-E198-DD15-32AD87C01227}"/>
               </a:ext>
             </a:extLst>
           </p:cNvPr>
@@ -39478,8 +39606,8 @@
         </p:nvSpPr>
         <p:spPr>
           <a:xfrm>
-            <a:off x="6127942" y="5530416"/>
-            <a:ext cx="3184191" cy="1552771"/>
+            <a:off x="9907290" y="3774212"/>
+            <a:ext cx="2449608" cy="1625667"/>
           </a:xfrm>
           <a:prstGeom prst="roundRect">
             <a:avLst>
@@ -39487,11 +39615,11 @@
             </a:avLst>
           </a:prstGeom>
           <a:solidFill>
-            <a:srgbClr val="D9EAD3"/>
+            <a:srgbClr val="D0E0E3"/>
           </a:solidFill>
           <a:ln w="28575" cap="flat" cmpd="sng">
             <a:solidFill>
-              <a:srgbClr val="274E13"/>
+              <a:srgbClr val="134F5C"/>
             </a:solidFill>
             <a:prstDash val="solid"/>
             <a:round/>
@@ -39507,166 +39635,71 @@
           <a:p>
             <a:pPr lvl="0"/>
             <a:r>
-              <a:rPr lang="en-GB" dirty="0">
-                <a:latin typeface="Consolas"/>
-                <a:ea typeface="Consolas"/>
-                <a:cs typeface="Consolas"/>
-                <a:sym typeface="Consolas"/>
-              </a:rPr>
-              <a:t>US4: Como </a:t>
-            </a:r>
-            <a:r>
-              <a:rPr lang="en-GB" dirty="0" err="1">
-                <a:latin typeface="Consolas"/>
-                <a:ea typeface="Consolas"/>
-                <a:cs typeface="Consolas"/>
-                <a:sym typeface="Consolas"/>
-              </a:rPr>
-              <a:t>membro</a:t>
-            </a:r>
-            <a:r>
-              <a:rPr lang="en-GB" dirty="0">
-                <a:latin typeface="Consolas"/>
-                <a:ea typeface="Consolas"/>
-                <a:cs typeface="Consolas"/>
-                <a:sym typeface="Consolas"/>
-              </a:rPr>
-              <a:t> da </a:t>
-            </a:r>
-            <a:r>
-              <a:rPr lang="en-GB" dirty="0" err="1">
-                <a:latin typeface="Consolas"/>
-                <a:ea typeface="Consolas"/>
-                <a:cs typeface="Consolas"/>
-                <a:sym typeface="Consolas"/>
-              </a:rPr>
-              <a:t>equipa</a:t>
-            </a:r>
-            <a:r>
-              <a:rPr lang="en-GB" dirty="0">
-                <a:latin typeface="Consolas"/>
-                <a:ea typeface="Consolas"/>
-                <a:cs typeface="Consolas"/>
-                <a:sym typeface="Consolas"/>
-              </a:rPr>
-              <a:t> </a:t>
-            </a:r>
-            <a:r>
-              <a:rPr lang="en-GB" dirty="0" err="1">
-                <a:latin typeface="Consolas"/>
-                <a:ea typeface="Consolas"/>
-                <a:cs typeface="Consolas"/>
-                <a:sym typeface="Consolas"/>
-              </a:rPr>
-              <a:t>quero</a:t>
-            </a:r>
-            <a:r>
-              <a:rPr lang="en-GB" dirty="0">
-                <a:latin typeface="Consolas"/>
-                <a:ea typeface="Consolas"/>
-                <a:cs typeface="Consolas"/>
-                <a:sym typeface="Consolas"/>
-              </a:rPr>
-              <a:t> f</a:t>
-            </a:r>
-            <a:r>
-              <a:rPr lang="pt-PT" dirty="0">
-                <a:latin typeface="Consolas"/>
-                <a:ea typeface="Consolas"/>
-                <a:cs typeface="Consolas"/>
-                <a:sym typeface="Consolas"/>
-              </a:rPr>
-              <a:t>azer resource trader bot feature, com o qual os jogadores podem fazer trocas de uns recursos por outros durante o jogo</a:t>
-            </a:r>
-            <a:endParaRPr dirty="0">
+              <a:rPr lang="en-US" dirty="0">
+                <a:latin typeface="Consolas"/>
+                <a:ea typeface="Consolas"/>
+                <a:cs typeface="Consolas"/>
+                <a:sym typeface="Consolas"/>
+              </a:rPr>
+              <a:t>T1: </a:t>
+            </a:r>
+            <a:r>
+              <a:rPr lang="en-US" dirty="0" err="1">
+                <a:latin typeface="Consolas"/>
+                <a:ea typeface="Consolas"/>
+                <a:cs typeface="Consolas"/>
+                <a:sym typeface="Consolas"/>
+              </a:rPr>
+              <a:t>Terminar</a:t>
+            </a:r>
+            <a:r>
+              <a:rPr lang="en-US" dirty="0">
+                <a:latin typeface="Consolas"/>
+                <a:ea typeface="Consolas"/>
+                <a:cs typeface="Consolas"/>
+                <a:sym typeface="Consolas"/>
+              </a:rPr>
+              <a:t> tsunami e earthquake spawners.</a:t>
+            </a:r>
+          </a:p>
+          <a:p>
+            <a:pPr lvl="0"/>
+            <a:endParaRPr lang="en-US" dirty="0">
               <a:latin typeface="Consolas"/>
               <a:ea typeface="Consolas"/>
               <a:cs typeface="Consolas"/>
               <a:sym typeface="Consolas"/>
             </a:endParaRPr>
           </a:p>
-        </p:txBody>
-      </p:sp>
-      <p:sp>
-        <p:nvSpPr>
-          <p:cNvPr id="23" name="Google Shape;121;p16">
-            <a:extLst>
-              <a:ext uri="{FF2B5EF4-FFF2-40B4-BE49-F238E27FC236}">
-                <a16:creationId xmlns:a16="http://schemas.microsoft.com/office/drawing/2014/main" id="{0EB0AA07-673C-E198-DD15-32AD87C01227}"/>
-              </a:ext>
-            </a:extLst>
-          </p:cNvPr>
-          <p:cNvSpPr/>
-          <p:nvPr/>
-        </p:nvSpPr>
-        <p:spPr>
-          <a:xfrm>
-            <a:off x="9555665" y="4360319"/>
-            <a:ext cx="2449608" cy="946153"/>
-          </a:xfrm>
-          <a:prstGeom prst="roundRect">
-            <a:avLst>
-              <a:gd name="adj" fmla="val 16667"/>
-            </a:avLst>
-          </a:prstGeom>
-          <a:solidFill>
-            <a:srgbClr val="D0E0E3"/>
-          </a:solidFill>
-          <a:ln w="28575" cap="flat" cmpd="sng">
-            <a:solidFill>
-              <a:srgbClr val="134F5C"/>
-            </a:solidFill>
-            <a:prstDash val="solid"/>
-            <a:round/>
-            <a:headEnd type="none" w="sm" len="sm"/>
-            <a:tailEnd type="none" w="sm" len="sm"/>
-          </a:ln>
-        </p:spPr>
-        <p:txBody>
-          <a:bodyPr spcFirstLastPara="1" wrap="square" lIns="91425" tIns="91425" rIns="91425" bIns="91425" anchor="t" anchorCtr="0">
-            <a:noAutofit/>
-          </a:bodyPr>
-          <a:lstStyle/>
           <a:p>
             <a:pPr lvl="0"/>
             <a:r>
-              <a:rPr lang="en-US" dirty="0">
-                <a:latin typeface="Consolas"/>
-                <a:ea typeface="Consolas"/>
-                <a:cs typeface="Consolas"/>
-                <a:sym typeface="Consolas"/>
-              </a:rPr>
-              <a:t>T1: </a:t>
-            </a:r>
-            <a:r>
-              <a:rPr lang="en-US" dirty="0" err="1">
-                <a:latin typeface="Consolas"/>
-                <a:ea typeface="Consolas"/>
-                <a:cs typeface="Consolas"/>
-                <a:sym typeface="Consolas"/>
-              </a:rPr>
-              <a:t>Terminar</a:t>
-            </a:r>
-            <a:r>
-              <a:rPr lang="en-US" dirty="0">
-                <a:latin typeface="Consolas"/>
-                <a:ea typeface="Consolas"/>
-                <a:cs typeface="Consolas"/>
-                <a:sym typeface="Consolas"/>
-              </a:rPr>
-              <a:t> tsunami e earthquake spawners.</a:t>
-            </a:r>
-          </a:p>
-          <a:p>
-            <a:pPr marL="0" lvl="0" indent="0" algn="l" rtl="0">
-              <a:spcBef>
-                <a:spcPts val="0"/>
-              </a:spcBef>
-              <a:spcAft>
-                <a:spcPts val="0"/>
-              </a:spcAft>
-              <a:buNone/>
-            </a:pPr>
+              <a:rPr lang="en-GB" dirty="0">
+                <a:latin typeface="Consolas"/>
+                <a:ea typeface="Consolas"/>
+                <a:cs typeface="Consolas"/>
+                <a:sym typeface="Consolas"/>
+              </a:rPr>
+              <a:t>T5: Acabar as </a:t>
+            </a:r>
+            <a:r>
+              <a:rPr lang="en-GB" dirty="0" err="1">
+                <a:latin typeface="Consolas"/>
+                <a:ea typeface="Consolas"/>
+                <a:cs typeface="Consolas"/>
+                <a:sym typeface="Consolas"/>
+              </a:rPr>
+              <a:t>tarefas</a:t>
+            </a:r>
+            <a:r>
+              <a:rPr lang="en-GB" dirty="0">
+                <a:latin typeface="Consolas"/>
+                <a:ea typeface="Consolas"/>
+                <a:cs typeface="Consolas"/>
+                <a:sym typeface="Consolas"/>
+              </a:rPr>
+              <a:t> do milestone3.</a:t>
+            </a:r>
             <a:br>
               <a:rPr lang="en-GB" dirty="0">
                 <a:latin typeface="Consolas"/>
@@ -39715,8 +39748,8 @@
         </p:nvSpPr>
         <p:spPr>
           <a:xfrm>
-            <a:off x="9594473" y="7365723"/>
-            <a:ext cx="2410800" cy="1041591"/>
+            <a:off x="9946098" y="5694579"/>
+            <a:ext cx="2410800" cy="1603293"/>
           </a:xfrm>
           <a:prstGeom prst="roundRect">
             <a:avLst>
@@ -39751,6 +39784,45 @@
                 <a:sym typeface="Consolas"/>
               </a:rPr>
               <a:t>T2: Fazer abstract class para as catastrofes naturais.</a:t>
+            </a:r>
+          </a:p>
+          <a:p>
+            <a:pPr lvl="0"/>
+            <a:endParaRPr lang="pt-PT" dirty="0">
+              <a:latin typeface="Consolas"/>
+              <a:ea typeface="Consolas"/>
+              <a:cs typeface="Consolas"/>
+              <a:sym typeface="Consolas"/>
+            </a:endParaRPr>
+          </a:p>
+          <a:p>
+            <a:pPr lvl="0"/>
+            <a:r>
+              <a:rPr lang="en-GB" dirty="0">
+                <a:latin typeface="Consolas"/>
+                <a:ea typeface="Consolas"/>
+                <a:cs typeface="Consolas"/>
+                <a:sym typeface="Consolas"/>
+              </a:rPr>
+              <a:t>T5: Acabar as </a:t>
+            </a:r>
+            <a:r>
+              <a:rPr lang="en-GB" dirty="0" err="1">
+                <a:latin typeface="Consolas"/>
+                <a:ea typeface="Consolas"/>
+                <a:cs typeface="Consolas"/>
+                <a:sym typeface="Consolas"/>
+              </a:rPr>
+              <a:t>tarefas</a:t>
+            </a:r>
+            <a:r>
+              <a:rPr lang="en-GB" dirty="0">
+                <a:latin typeface="Consolas"/>
+                <a:ea typeface="Consolas"/>
+                <a:cs typeface="Consolas"/>
+                <a:sym typeface="Consolas"/>
+              </a:rPr>
+              <a:t> do milestone3.</a:t>
             </a:r>
             <a:br>
               <a:rPr lang="en-GB" dirty="0">
@@ -39800,7 +39872,7 @@
         </p:nvSpPr>
         <p:spPr>
           <a:xfrm>
-            <a:off x="9555665" y="977068"/>
+            <a:off x="9896006" y="984117"/>
             <a:ext cx="2410800" cy="2549628"/>
           </a:xfrm>
           <a:prstGeom prst="roundRect">
@@ -39848,14 +39920,50 @@
               </a:spcAft>
               <a:buNone/>
             </a:pPr>
-            <a:br>
-              <a:rPr lang="en-GB" dirty="0">
-                <a:latin typeface="Consolas"/>
-                <a:ea typeface="Consolas"/>
-                <a:cs typeface="Consolas"/>
-                <a:sym typeface="Consolas"/>
-              </a:rPr>
-            </a:br>
+            <a:endParaRPr lang="en-GB" dirty="0">
+              <a:latin typeface="Consolas"/>
+              <a:ea typeface="Consolas"/>
+              <a:cs typeface="Consolas"/>
+              <a:sym typeface="Consolas"/>
+            </a:endParaRPr>
+          </a:p>
+          <a:p>
+            <a:pPr marL="0" lvl="0" indent="0" algn="l" rtl="0">
+              <a:spcBef>
+                <a:spcPts val="0"/>
+              </a:spcBef>
+              <a:spcAft>
+                <a:spcPts val="0"/>
+              </a:spcAft>
+              <a:buNone/>
+            </a:pPr>
+            <a:r>
+              <a:rPr lang="en-GB" dirty="0">
+                <a:latin typeface="Consolas"/>
+                <a:ea typeface="Consolas"/>
+                <a:cs typeface="Consolas"/>
+                <a:sym typeface="Consolas"/>
+              </a:rPr>
+              <a:t>T5: Acabar as </a:t>
+            </a:r>
+            <a:r>
+              <a:rPr lang="en-GB" dirty="0" err="1">
+                <a:latin typeface="Consolas"/>
+                <a:ea typeface="Consolas"/>
+                <a:cs typeface="Consolas"/>
+                <a:sym typeface="Consolas"/>
+              </a:rPr>
+              <a:t>tarefas</a:t>
+            </a:r>
+            <a:r>
+              <a:rPr lang="en-GB" dirty="0">
+                <a:latin typeface="Consolas"/>
+                <a:ea typeface="Consolas"/>
+                <a:cs typeface="Consolas"/>
+                <a:sym typeface="Consolas"/>
+              </a:rPr>
+              <a:t> do milestone3.</a:t>
+            </a:r>
             <a:br>
               <a:rPr lang="en-GB" dirty="0">
                 <a:latin typeface="Consolas"/>
@@ -39904,8 +40012,8 @@
         </p:nvSpPr>
         <p:spPr>
           <a:xfrm>
-            <a:off x="9594473" y="9115374"/>
-            <a:ext cx="2410800" cy="780327"/>
+            <a:off x="9946098" y="7689168"/>
+            <a:ext cx="2410800" cy="2167362"/>
           </a:xfrm>
           <a:prstGeom prst="roundRect">
             <a:avLst>
@@ -39941,6 +40049,51 @@
               </a:rPr>
               <a:t>T4: Fazer resource trader bot feature.</a:t>
             </a:r>
+          </a:p>
+          <a:p>
+            <a:pPr lvl="0"/>
+            <a:endParaRPr lang="pt-PT" dirty="0">
+              <a:latin typeface="Consolas"/>
+              <a:ea typeface="Consolas"/>
+              <a:cs typeface="Consolas"/>
+              <a:sym typeface="Consolas"/>
+            </a:endParaRPr>
+          </a:p>
+          <a:p>
+            <a:pPr lvl="0"/>
+            <a:r>
+              <a:rPr lang="en-GB" dirty="0">
+                <a:latin typeface="Consolas"/>
+                <a:ea typeface="Consolas"/>
+                <a:cs typeface="Consolas"/>
+                <a:sym typeface="Consolas"/>
+              </a:rPr>
+              <a:t>T5: Acabar as </a:t>
+            </a:r>
+            <a:r>
+              <a:rPr lang="en-GB" dirty="0" err="1">
+                <a:latin typeface="Consolas"/>
+                <a:ea typeface="Consolas"/>
+                <a:cs typeface="Consolas"/>
+                <a:sym typeface="Consolas"/>
+              </a:rPr>
+              <a:t>tarefas</a:t>
+            </a:r>
+            <a:r>
+              <a:rPr lang="en-GB" dirty="0">
+                <a:latin typeface="Consolas"/>
+                <a:ea typeface="Consolas"/>
+                <a:cs typeface="Consolas"/>
+                <a:sym typeface="Consolas"/>
+              </a:rPr>
+              <a:t> do milestone3.</a:t>
+            </a:r>
+            <a:endParaRPr lang="pt-PT" dirty="0">
+              <a:latin typeface="Consolas"/>
+              <a:ea typeface="Consolas"/>
+              <a:cs typeface="Consolas"/>
+              <a:sym typeface="Consolas"/>
+            </a:endParaRPr>
           </a:p>
           <a:p>
             <a:pPr marL="0" lvl="0" indent="0" algn="l" rtl="0">
@@ -40103,7 +40256,7 @@
                 <a:cs typeface="Consolas"/>
                 <a:sym typeface="Consolas"/>
               </a:rPr>
-              <a:t>T2: Fazer abstract class para as catastrofes naturais.</a:t>
+              <a:t>T2: Fazer abstract class para as catástrofes naturais.</a:t>
             </a:r>
             <a:endParaRPr dirty="0">
               <a:latin typeface="Consolas"/>
@@ -40248,8 +40401,8 @@
         </p:nvSpPr>
         <p:spPr>
           <a:xfrm>
-            <a:off x="6073006" y="8884240"/>
-            <a:ext cx="3239127" cy="1552771"/>
+            <a:off x="5863765" y="7700804"/>
+            <a:ext cx="2419062" cy="2330222"/>
           </a:xfrm>
           <a:prstGeom prst="roundRect">
             <a:avLst>
@@ -40359,10 +40512,10 @@
       </p:sp>
       <p:sp>
         <p:nvSpPr>
-          <p:cNvPr id="20" name="Google Shape;121;p16">
-            <a:extLst>
-              <a:ext uri="{FF2B5EF4-FFF2-40B4-BE49-F238E27FC236}">
-                <a16:creationId xmlns:a16="http://schemas.microsoft.com/office/drawing/2014/main" id="{2B47F683-630C-9164-86A5-E9DA21ACA18F}"/>
+          <p:cNvPr id="21" name="Google Shape;92;p15">
+            <a:extLst>
+              <a:ext uri="{FF2B5EF4-FFF2-40B4-BE49-F238E27FC236}">
+                <a16:creationId xmlns:a16="http://schemas.microsoft.com/office/drawing/2014/main" id="{F39CEA7E-4E17-50F6-F35B-E895C4342806}"/>
               </a:ext>
             </a:extLst>
           </p:cNvPr>
@@ -40371,8 +40524,8 @@
         </p:nvSpPr>
         <p:spPr>
           <a:xfrm>
-            <a:off x="9555665" y="6101100"/>
-            <a:ext cx="2410800" cy="780327"/>
+            <a:off x="270828" y="8531327"/>
+            <a:ext cx="2185575" cy="1792037"/>
           </a:xfrm>
           <a:prstGeom prst="roundRect">
             <a:avLst>
@@ -40380,11 +40533,11 @@
             </a:avLst>
           </a:prstGeom>
           <a:solidFill>
-            <a:srgbClr val="D0E0E3"/>
+            <a:srgbClr val="D9EAD3"/>
           </a:solidFill>
           <a:ln w="28575" cap="flat" cmpd="sng">
             <a:solidFill>
-              <a:srgbClr val="134F5C"/>
+              <a:srgbClr val="274E13"/>
             </a:solidFill>
             <a:prstDash val="solid"/>
             <a:round/>
@@ -40406,52 +40559,74 @@
                 <a:cs typeface="Consolas"/>
                 <a:sym typeface="Consolas"/>
               </a:rPr>
-              <a:t>T4: Fazer resource trader bot feature.</a:t>
-            </a:r>
-          </a:p>
-          <a:p>
-            <a:pPr marL="0" lvl="0" indent="0" algn="l" rtl="0">
-              <a:spcBef>
-                <a:spcPts val="0"/>
-              </a:spcBef>
-              <a:spcAft>
-                <a:spcPts val="0"/>
-              </a:spcAft>
-              <a:buNone/>
-            </a:pPr>
-            <a:br>
-              <a:rPr lang="en-GB" dirty="0">
-                <a:latin typeface="Consolas"/>
-                <a:ea typeface="Consolas"/>
-                <a:cs typeface="Consolas"/>
-                <a:sym typeface="Consolas"/>
-              </a:rPr>
-            </a:br>
-            <a:br>
-              <a:rPr lang="en-GB" dirty="0">
-                <a:latin typeface="Consolas"/>
-                <a:ea typeface="Consolas"/>
-                <a:cs typeface="Consolas"/>
-                <a:sym typeface="Consolas"/>
-              </a:rPr>
-            </a:br>
-            <a:endParaRPr lang="en-GB" dirty="0">
+              <a:t>T5: Fazer as tarefas do milestone3</a:t>
+            </a:r>
+          </a:p>
+          <a:p>
+            <a:pPr lvl="0"/>
+            <a:endParaRPr dirty="0">
               <a:latin typeface="Consolas"/>
               <a:ea typeface="Consolas"/>
               <a:cs typeface="Consolas"/>
               <a:sym typeface="Consolas"/>
             </a:endParaRPr>
           </a:p>
-          <a:p>
-            <a:pPr marL="0" lvl="0" indent="0" algn="l" rtl="0">
-              <a:spcBef>
-                <a:spcPts val="0"/>
-              </a:spcBef>
-              <a:spcAft>
-                <a:spcPts val="0"/>
-              </a:spcAft>
-              <a:buNone/>
-            </a:pPr>
+        </p:txBody>
+      </p:sp>
+      <p:sp>
+        <p:nvSpPr>
+          <p:cNvPr id="22" name="Google Shape;92;p15">
+            <a:extLst>
+              <a:ext uri="{FF2B5EF4-FFF2-40B4-BE49-F238E27FC236}">
+                <a16:creationId xmlns:a16="http://schemas.microsoft.com/office/drawing/2014/main" id="{F20C3E3A-2108-DC73-BF32-B631880FD8E8}"/>
+              </a:ext>
+            </a:extLst>
+          </p:cNvPr>
+          <p:cNvSpPr/>
+          <p:nvPr/>
+        </p:nvSpPr>
+        <p:spPr>
+          <a:xfrm>
+            <a:off x="8388135" y="768737"/>
+            <a:ext cx="1300278" cy="9262289"/>
+          </a:xfrm>
+          <a:prstGeom prst="roundRect">
+            <a:avLst>
+              <a:gd name="adj" fmla="val 16667"/>
+            </a:avLst>
+          </a:prstGeom>
+          <a:solidFill>
+            <a:srgbClr val="D9EAD3"/>
+          </a:solidFill>
+          <a:ln w="28575" cap="flat" cmpd="sng">
+            <a:solidFill>
+              <a:srgbClr val="274E13"/>
+            </a:solidFill>
+            <a:prstDash val="solid"/>
+            <a:round/>
+            <a:headEnd type="none" w="sm" len="sm"/>
+            <a:tailEnd type="none" w="sm" len="sm"/>
+          </a:ln>
+        </p:spPr>
+        <p:txBody>
+          <a:bodyPr spcFirstLastPara="1" wrap="square" lIns="91425" tIns="91425" rIns="91425" bIns="91425" anchor="t" anchorCtr="0">
+            <a:noAutofit/>
+          </a:bodyPr>
+          <a:lstStyle/>
+          <a:p>
+            <a:pPr lvl="0"/>
+            <a:r>
+              <a:rPr lang="pt-PT" dirty="0">
+                <a:latin typeface="Consolas"/>
+                <a:ea typeface="Consolas"/>
+                <a:cs typeface="Consolas"/>
+                <a:sym typeface="Consolas"/>
+              </a:rPr>
+              <a:t>US5: como membro da equipa quero completar as tarefas do milestone 3 referentes às implementações que acrescentei ao jogo</a:t>
+            </a:r>
+          </a:p>
+          <a:p>
+            <a:pPr lvl="0"/>
             <a:endParaRPr dirty="0">
               <a:latin typeface="Consolas"/>
               <a:ea typeface="Consolas"/>
@@ -40482,7 +40657,7 @@
         <p:cNvPr id="1" name="Shape 189">
           <a:extLst>
             <a:ext uri="{FF2B5EF4-FFF2-40B4-BE49-F238E27FC236}">
-              <a16:creationId xmlns:a16="http://schemas.microsoft.com/office/drawing/2014/main" id="{38B40F53-7C80-5485-64A7-49C6B6A8D225}"/>
+              <a16:creationId xmlns:a16="http://schemas.microsoft.com/office/drawing/2014/main" id="{1884D502-D4C4-17F2-FE05-280E2B8DF729}"/>
             </a:ext>
           </a:extLst>
         </p:cNvPr>
@@ -40502,7 +40677,7 @@
           <p:cNvPr id="190" name="Google Shape;190;p19">
             <a:extLst>
               <a:ext uri="{FF2B5EF4-FFF2-40B4-BE49-F238E27FC236}">
-                <a16:creationId xmlns:a16="http://schemas.microsoft.com/office/drawing/2014/main" id="{542070C5-6431-B5F0-8372-E369FDB6D570}"/>
+                <a16:creationId xmlns:a16="http://schemas.microsoft.com/office/drawing/2014/main" id="{AFFC4121-F5F6-EDEC-9389-54E1D67E0D66}"/>
               </a:ext>
             </a:extLst>
           </p:cNvPr>
@@ -40511,7 +40686,7 @@
         </p:nvCxnSpPr>
         <p:spPr>
           <a:xfrm>
-            <a:off x="5944724" y="-31500"/>
+            <a:off x="5758457" y="-28500"/>
             <a:ext cx="0" cy="10857000"/>
           </a:xfrm>
           <a:prstGeom prst="straightConnector1">
@@ -40534,7 +40709,7 @@
           <p:cNvPr id="191" name="Google Shape;191;p19">
             <a:extLst>
               <a:ext uri="{FF2B5EF4-FFF2-40B4-BE49-F238E27FC236}">
-                <a16:creationId xmlns:a16="http://schemas.microsoft.com/office/drawing/2014/main" id="{A475E9F0-077B-640C-CC2C-431DBA9CE48A}"/>
+                <a16:creationId xmlns:a16="http://schemas.microsoft.com/office/drawing/2014/main" id="{D3830E6E-A456-21D7-725F-8EAEBFFA42C0}"/>
               </a:ext>
             </a:extLst>
           </p:cNvPr>
@@ -40602,7 +40777,7 @@
           <p:cNvPr id="192" name="Google Shape;192;p19">
             <a:extLst>
               <a:ext uri="{FF2B5EF4-FFF2-40B4-BE49-F238E27FC236}">
-                <a16:creationId xmlns:a16="http://schemas.microsoft.com/office/drawing/2014/main" id="{EAAFB6FC-A304-815E-465B-46CE5E66C3DD}"/>
+                <a16:creationId xmlns:a16="http://schemas.microsoft.com/office/drawing/2014/main" id="{3C776D20-B739-25DA-7782-B9CA3E7A5F11}"/>
               </a:ext>
             </a:extLst>
           </p:cNvPr>
@@ -40611,8 +40786,8 @@
         </p:nvSpPr>
         <p:spPr>
           <a:xfrm>
-            <a:off x="6281636" y="84312"/>
-            <a:ext cx="2410800" cy="480900"/>
+            <a:off x="6281635" y="84312"/>
+            <a:ext cx="3406779" cy="480900"/>
           </a:xfrm>
           <a:prstGeom prst="roundRect">
             <a:avLst>
@@ -40670,7 +40845,7 @@
           <p:cNvPr id="193" name="Google Shape;193;p19">
             <a:extLst>
               <a:ext uri="{FF2B5EF4-FFF2-40B4-BE49-F238E27FC236}">
-                <a16:creationId xmlns:a16="http://schemas.microsoft.com/office/drawing/2014/main" id="{C05F7EE9-B3DE-C9A5-5559-FE2DEE5C2EFF}"/>
+                <a16:creationId xmlns:a16="http://schemas.microsoft.com/office/drawing/2014/main" id="{5850BBAC-18F9-8239-C708-5D906E8895FA}"/>
               </a:ext>
             </a:extLst>
           </p:cNvPr>
@@ -40679,7 +40854,7 @@
         </p:nvSpPr>
         <p:spPr>
           <a:xfrm>
-            <a:off x="9366071" y="84312"/>
+            <a:off x="9896006" y="121794"/>
             <a:ext cx="2410800" cy="480900"/>
           </a:xfrm>
           <a:prstGeom prst="roundRect">
@@ -40738,7 +40913,7 @@
           <p:cNvPr id="194" name="Google Shape;194;p19">
             <a:extLst>
               <a:ext uri="{FF2B5EF4-FFF2-40B4-BE49-F238E27FC236}">
-                <a16:creationId xmlns:a16="http://schemas.microsoft.com/office/drawing/2014/main" id="{2772A143-6B7D-B705-CB8F-DE3A787555FC}"/>
+                <a16:creationId xmlns:a16="http://schemas.microsoft.com/office/drawing/2014/main" id="{BD2AF685-26E4-0E31-8D24-B8ADB1634FC0}"/>
               </a:ext>
             </a:extLst>
           </p:cNvPr>
@@ -40747,7 +40922,7 @@
         </p:nvSpPr>
         <p:spPr>
           <a:xfrm>
-            <a:off x="12395940" y="84312"/>
+            <a:off x="12758767" y="136415"/>
             <a:ext cx="2410800" cy="480900"/>
           </a:xfrm>
           <a:prstGeom prst="roundRect">
@@ -40784,13 +40959,81 @@
               <a:buNone/>
             </a:pPr>
             <a:r>
+              <a:rPr lang="en-GB" sz="1800" b="1" dirty="0">
+                <a:latin typeface="Consolas"/>
+                <a:ea typeface="Consolas"/>
+                <a:cs typeface="Consolas"/>
+                <a:sym typeface="Consolas"/>
+              </a:rPr>
+              <a:t>Doing</a:t>
+            </a:r>
+            <a:endParaRPr sz="1800" b="1" dirty="0">
+              <a:latin typeface="Consolas"/>
+              <a:ea typeface="Consolas"/>
+              <a:cs typeface="Consolas"/>
+              <a:sym typeface="Consolas"/>
+            </a:endParaRPr>
+          </a:p>
+        </p:txBody>
+      </p:sp>
+      <p:sp>
+        <p:nvSpPr>
+          <p:cNvPr id="195" name="Google Shape;195;p19">
+            <a:extLst>
+              <a:ext uri="{FF2B5EF4-FFF2-40B4-BE49-F238E27FC236}">
+                <a16:creationId xmlns:a16="http://schemas.microsoft.com/office/drawing/2014/main" id="{65BBF2C7-18A8-7AAD-B77A-9BBC70D28C5E}"/>
+              </a:ext>
+            </a:extLst>
+          </p:cNvPr>
+          <p:cNvSpPr/>
+          <p:nvPr/>
+        </p:nvSpPr>
+        <p:spPr>
+          <a:xfrm>
+            <a:off x="15532407" y="84312"/>
+            <a:ext cx="2410800" cy="480900"/>
+          </a:xfrm>
+          <a:prstGeom prst="roundRect">
+            <a:avLst>
+              <a:gd name="adj" fmla="val 16667"/>
+            </a:avLst>
+          </a:prstGeom>
+          <a:solidFill>
+            <a:srgbClr val="F9CB9C"/>
+          </a:solidFill>
+          <a:ln w="28575" cap="flat" cmpd="sng">
+            <a:solidFill>
+              <a:srgbClr val="B45F06"/>
+            </a:solidFill>
+            <a:prstDash val="solid"/>
+            <a:round/>
+            <a:headEnd type="none" w="sm" len="sm"/>
+            <a:tailEnd type="none" w="sm" len="sm"/>
+          </a:ln>
+        </p:spPr>
+        <p:txBody>
+          <a:bodyPr spcFirstLastPara="1" wrap="square" lIns="91425" tIns="91425" rIns="91425" bIns="91425" anchor="ctr" anchorCtr="0">
+            <a:noAutofit/>
+          </a:bodyPr>
+          <a:lstStyle/>
+          <a:p>
+            <a:pPr marL="0" lvl="0" indent="0" algn="ctr" rtl="0">
+              <a:spcBef>
+                <a:spcPts val="0"/>
+              </a:spcBef>
+              <a:spcAft>
+                <a:spcPts val="0"/>
+              </a:spcAft>
+              <a:buNone/>
+            </a:pPr>
+            <a:r>
               <a:rPr lang="en-GB" sz="1800" b="1">
                 <a:latin typeface="Consolas"/>
                 <a:ea typeface="Consolas"/>
                 <a:cs typeface="Consolas"/>
                 <a:sym typeface="Consolas"/>
               </a:rPr>
-              <a:t>Doing</a:t>
+              <a:t>Review</a:t>
             </a:r>
             <a:endParaRPr sz="1800" b="1">
               <a:latin typeface="Consolas"/>
@@ -40803,10 +41046,10 @@
       </p:sp>
       <p:sp>
         <p:nvSpPr>
-          <p:cNvPr id="195" name="Google Shape;195;p19">
-            <a:extLst>
-              <a:ext uri="{FF2B5EF4-FFF2-40B4-BE49-F238E27FC236}">
-                <a16:creationId xmlns:a16="http://schemas.microsoft.com/office/drawing/2014/main" id="{E825F796-654E-471F-F89C-57464C79DC55}"/>
+          <p:cNvPr id="196" name="Google Shape;196;p19">
+            <a:extLst>
+              <a:ext uri="{FF2B5EF4-FFF2-40B4-BE49-F238E27FC236}">
+                <a16:creationId xmlns:a16="http://schemas.microsoft.com/office/drawing/2014/main" id="{69C17420-9F7C-55A5-9027-6C9ABA1B0DA5}"/>
               </a:ext>
             </a:extLst>
           </p:cNvPr>
@@ -40815,7 +41058,7 @@
         </p:nvSpPr>
         <p:spPr>
           <a:xfrm>
-            <a:off x="15532407" y="84312"/>
+            <a:off x="18668888" y="84312"/>
             <a:ext cx="2410800" cy="480900"/>
           </a:xfrm>
           <a:prstGeom prst="roundRect">
@@ -40858,7 +41101,7 @@
                 <a:cs typeface="Consolas"/>
                 <a:sym typeface="Consolas"/>
               </a:rPr>
-              <a:t>Review</a:t>
+              <a:t>Done</a:t>
             </a:r>
             <a:endParaRPr sz="1800" b="1">
               <a:latin typeface="Consolas"/>
@@ -40871,10 +41114,10 @@
       </p:sp>
       <p:sp>
         <p:nvSpPr>
-          <p:cNvPr id="196" name="Google Shape;196;p19">
-            <a:extLst>
-              <a:ext uri="{FF2B5EF4-FFF2-40B4-BE49-F238E27FC236}">
-                <a16:creationId xmlns:a16="http://schemas.microsoft.com/office/drawing/2014/main" id="{7ED55001-6730-D01F-A5DD-E307994EC050}"/>
+          <p:cNvPr id="197" name="Google Shape;197;p19">
+            <a:extLst>
+              <a:ext uri="{FF2B5EF4-FFF2-40B4-BE49-F238E27FC236}">
+                <a16:creationId xmlns:a16="http://schemas.microsoft.com/office/drawing/2014/main" id="{C0AA4A37-E3FC-D0D8-F541-C0268B9A6A61}"/>
               </a:ext>
             </a:extLst>
           </p:cNvPr>
@@ -40883,7 +41126,7 @@
         </p:nvSpPr>
         <p:spPr>
           <a:xfrm>
-            <a:off x="18668888" y="84312"/>
+            <a:off x="167288" y="84312"/>
             <a:ext cx="2410800" cy="480900"/>
           </a:xfrm>
           <a:prstGeom prst="roundRect">
@@ -40926,7 +41169,7 @@
                 <a:cs typeface="Consolas"/>
                 <a:sym typeface="Consolas"/>
               </a:rPr>
-              <a:t>Done</a:t>
+              <a:t>Backlog</a:t>
             </a:r>
             <a:endParaRPr sz="1800" b="1">
               <a:latin typeface="Consolas"/>
@@ -40937,80 +41180,12 @@
           </a:p>
         </p:txBody>
       </p:sp>
-      <p:sp>
-        <p:nvSpPr>
-          <p:cNvPr id="197" name="Google Shape;197;p19">
-            <a:extLst>
-              <a:ext uri="{FF2B5EF4-FFF2-40B4-BE49-F238E27FC236}">
-                <a16:creationId xmlns:a16="http://schemas.microsoft.com/office/drawing/2014/main" id="{B668A3DD-B32E-93AD-C5BD-4658382ED89A}"/>
-              </a:ext>
-            </a:extLst>
-          </p:cNvPr>
-          <p:cNvSpPr/>
-          <p:nvPr/>
-        </p:nvSpPr>
-        <p:spPr>
-          <a:xfrm>
-            <a:off x="167288" y="84312"/>
-            <a:ext cx="2410800" cy="480900"/>
-          </a:xfrm>
-          <a:prstGeom prst="roundRect">
-            <a:avLst>
-              <a:gd name="adj" fmla="val 16667"/>
-            </a:avLst>
-          </a:prstGeom>
-          <a:solidFill>
-            <a:srgbClr val="F9CB9C"/>
-          </a:solidFill>
-          <a:ln w="28575" cap="flat" cmpd="sng">
-            <a:solidFill>
-              <a:srgbClr val="B45F06"/>
-            </a:solidFill>
-            <a:prstDash val="solid"/>
-            <a:round/>
-            <a:headEnd type="none" w="sm" len="sm"/>
-            <a:tailEnd type="none" w="sm" len="sm"/>
-          </a:ln>
-        </p:spPr>
-        <p:txBody>
-          <a:bodyPr spcFirstLastPara="1" wrap="square" lIns="91425" tIns="91425" rIns="91425" bIns="91425" anchor="ctr" anchorCtr="0">
-            <a:noAutofit/>
-          </a:bodyPr>
-          <a:lstStyle/>
-          <a:p>
-            <a:pPr marL="0" lvl="0" indent="0" algn="ctr" rtl="0">
-              <a:spcBef>
-                <a:spcPts val="0"/>
-              </a:spcBef>
-              <a:spcAft>
-                <a:spcPts val="0"/>
-              </a:spcAft>
-              <a:buNone/>
-            </a:pPr>
-            <a:r>
-              <a:rPr lang="en-GB" sz="1800" b="1">
-                <a:latin typeface="Consolas"/>
-                <a:ea typeface="Consolas"/>
-                <a:cs typeface="Consolas"/>
-                <a:sym typeface="Consolas"/>
-              </a:rPr>
-              <a:t>Backlog</a:t>
-            </a:r>
-            <a:endParaRPr sz="1800" b="1">
-              <a:latin typeface="Consolas"/>
-              <a:ea typeface="Consolas"/>
-              <a:cs typeface="Consolas"/>
-              <a:sym typeface="Consolas"/>
-            </a:endParaRPr>
-          </a:p>
-        </p:txBody>
-      </p:sp>
       <p:cxnSp>
         <p:nvCxnSpPr>
           <p:cNvPr id="204" name="Google Shape;204;p19">
             <a:extLst>
               <a:ext uri="{FF2B5EF4-FFF2-40B4-BE49-F238E27FC236}">
-                <a16:creationId xmlns:a16="http://schemas.microsoft.com/office/drawing/2014/main" id="{6955466E-5E95-1672-BF12-C595137AC2F5}"/>
+                <a16:creationId xmlns:a16="http://schemas.microsoft.com/office/drawing/2014/main" id="{5630DD10-CC98-B8DD-3E1B-615AE34FC608}"/>
               </a:ext>
             </a:extLst>
           </p:cNvPr>
@@ -41042,7 +41217,7 @@
           <p:cNvPr id="205" name="Google Shape;205;p19">
             <a:extLst>
               <a:ext uri="{FF2B5EF4-FFF2-40B4-BE49-F238E27FC236}">
-                <a16:creationId xmlns:a16="http://schemas.microsoft.com/office/drawing/2014/main" id="{5C747A2C-69F0-E415-453A-0694816748B8}"/>
+                <a16:creationId xmlns:a16="http://schemas.microsoft.com/office/drawing/2014/main" id="{615D1424-8A4F-1FE9-220C-61BD0365C743}"/>
               </a:ext>
             </a:extLst>
           </p:cNvPr>
@@ -41074,7 +41249,7 @@
           <p:cNvPr id="206" name="Google Shape;206;p19">
             <a:extLst>
               <a:ext uri="{FF2B5EF4-FFF2-40B4-BE49-F238E27FC236}">
-                <a16:creationId xmlns:a16="http://schemas.microsoft.com/office/drawing/2014/main" id="{00D0F128-CB48-3992-A275-7D3321E4BAED}"/>
+                <a16:creationId xmlns:a16="http://schemas.microsoft.com/office/drawing/2014/main" id="{E2FD37CA-ECE5-DC4E-0E69-0F914A3B8655}"/>
               </a:ext>
             </a:extLst>
           </p:cNvPr>
@@ -41106,7 +41281,7 @@
           <p:cNvPr id="207" name="Google Shape;207;p19">
             <a:extLst>
               <a:ext uri="{FF2B5EF4-FFF2-40B4-BE49-F238E27FC236}">
-                <a16:creationId xmlns:a16="http://schemas.microsoft.com/office/drawing/2014/main" id="{9F8FB354-8780-7D79-3499-0656846FFB04}"/>
+                <a16:creationId xmlns:a16="http://schemas.microsoft.com/office/drawing/2014/main" id="{13A03627-502D-3E18-C334-49127C3E8E66}"/>
               </a:ext>
             </a:extLst>
           </p:cNvPr>
@@ -41138,7 +41313,7 @@
           <p:cNvPr id="208" name="Google Shape;208;p19">
             <a:extLst>
               <a:ext uri="{FF2B5EF4-FFF2-40B4-BE49-F238E27FC236}">
-                <a16:creationId xmlns:a16="http://schemas.microsoft.com/office/drawing/2014/main" id="{E0F90484-CDB3-AABB-CFE7-D00AD45D9DF6}"/>
+                <a16:creationId xmlns:a16="http://schemas.microsoft.com/office/drawing/2014/main" id="{E0EB0C5B-130D-E80D-8B82-3F86A7E1A423}"/>
               </a:ext>
             </a:extLst>
           </p:cNvPr>
@@ -41170,7 +41345,7 @@
           <p:cNvPr id="209" name="Google Shape;209;p19">
             <a:extLst>
               <a:ext uri="{FF2B5EF4-FFF2-40B4-BE49-F238E27FC236}">
-                <a16:creationId xmlns:a16="http://schemas.microsoft.com/office/drawing/2014/main" id="{8D97126C-2194-7CA4-A3DB-040305EFBAF4}"/>
+                <a16:creationId xmlns:a16="http://schemas.microsoft.com/office/drawing/2014/main" id="{2D1E791E-AEC1-79F4-D100-B1A69ECC7F78}"/>
               </a:ext>
             </a:extLst>
           </p:cNvPr>
@@ -41202,7 +41377,7 @@
           <p:cNvPr id="215" name="Google Shape;215;p19">
             <a:extLst>
               <a:ext uri="{FF2B5EF4-FFF2-40B4-BE49-F238E27FC236}">
-                <a16:creationId xmlns:a16="http://schemas.microsoft.com/office/drawing/2014/main" id="{6515A5F8-EE33-DF07-886D-83332148AEAD}"/>
+                <a16:creationId xmlns:a16="http://schemas.microsoft.com/office/drawing/2014/main" id="{397578CF-74EE-FB0B-5FFE-31CDD2000584}"/>
               </a:ext>
             </a:extLst>
           </p:cNvPr>
@@ -41234,7 +41409,7 @@
           <p:cNvPr id="2" name="Google Shape;74;p15">
             <a:extLst>
               <a:ext uri="{FF2B5EF4-FFF2-40B4-BE49-F238E27FC236}">
-                <a16:creationId xmlns:a16="http://schemas.microsoft.com/office/drawing/2014/main" id="{CEBE4865-C87B-9909-2CFE-8EA80F10ADB6}"/>
+                <a16:creationId xmlns:a16="http://schemas.microsoft.com/office/drawing/2014/main" id="{96DA7F0F-474D-DC08-11AB-BAAFB0A62A93}"/>
               </a:ext>
             </a:extLst>
           </p:cNvPr>
@@ -41302,7 +41477,7 @@
           <p:cNvPr id="3" name="Google Shape;75;p15">
             <a:extLst>
               <a:ext uri="{FF2B5EF4-FFF2-40B4-BE49-F238E27FC236}">
-                <a16:creationId xmlns:a16="http://schemas.microsoft.com/office/drawing/2014/main" id="{EA2F84E6-CDC0-C8DB-A9EB-A5CED20F8BB5}"/>
+                <a16:creationId xmlns:a16="http://schemas.microsoft.com/office/drawing/2014/main" id="{03783755-5E3C-B531-9C95-73461D289697}"/>
               </a:ext>
             </a:extLst>
           </p:cNvPr>
@@ -41370,7 +41545,7 @@
           <p:cNvPr id="4" name="Google Shape;76;p15">
             <a:extLst>
               <a:ext uri="{FF2B5EF4-FFF2-40B4-BE49-F238E27FC236}">
-                <a16:creationId xmlns:a16="http://schemas.microsoft.com/office/drawing/2014/main" id="{78EE480A-111E-47E8-85AE-F2AE29A81500}"/>
+                <a16:creationId xmlns:a16="http://schemas.microsoft.com/office/drawing/2014/main" id="{F90A49D1-CBE8-B77F-68A9-D787B79A9D9A}"/>
               </a:ext>
             </a:extLst>
           </p:cNvPr>
@@ -41438,7 +41613,7 @@
           <p:cNvPr id="5" name="Google Shape;77;p15">
             <a:extLst>
               <a:ext uri="{FF2B5EF4-FFF2-40B4-BE49-F238E27FC236}">
-                <a16:creationId xmlns:a16="http://schemas.microsoft.com/office/drawing/2014/main" id="{E2FC4B4F-39A1-0988-C550-C1F4AE228169}"/>
+                <a16:creationId xmlns:a16="http://schemas.microsoft.com/office/drawing/2014/main" id="{55F4D89F-1EA0-A3DE-91CF-267F6454FB1D}"/>
               </a:ext>
             </a:extLst>
           </p:cNvPr>
@@ -41490,7 +41665,7 @@
                 <a:cs typeface="Consolas"/>
                 <a:sym typeface="Consolas"/>
               </a:rPr>
-              <a:t>68180</a:t>
+              <a:t>67912</a:t>
             </a:r>
             <a:endParaRPr sz="1800" b="1" dirty="0">
               <a:latin typeface="Consolas"/>
@@ -41506,7 +41681,7 @@
           <p:cNvPr id="6" name="Google Shape;78;p15">
             <a:extLst>
               <a:ext uri="{FF2B5EF4-FFF2-40B4-BE49-F238E27FC236}">
-                <a16:creationId xmlns:a16="http://schemas.microsoft.com/office/drawing/2014/main" id="{77C1A36D-0E2C-02FE-F4AE-0B2BAEEAAF1B}"/>
+                <a16:creationId xmlns:a16="http://schemas.microsoft.com/office/drawing/2014/main" id="{4B5A6A0E-E9DA-3120-E027-A7EEDF101FF8}"/>
               </a:ext>
             </a:extLst>
           </p:cNvPr>
@@ -41558,7 +41733,7 @@
                 <a:cs typeface="Consolas"/>
                 <a:sym typeface="Consolas"/>
               </a:rPr>
-              <a:t>67912</a:t>
+              <a:t>68180</a:t>
             </a:r>
             <a:endParaRPr sz="1800" b="1" dirty="0">
               <a:latin typeface="Consolas"/>
@@ -41574,7 +41749,7 @@
           <p:cNvPr id="7" name="Google Shape;79;p15">
             <a:extLst>
               <a:ext uri="{FF2B5EF4-FFF2-40B4-BE49-F238E27FC236}">
-                <a16:creationId xmlns:a16="http://schemas.microsoft.com/office/drawing/2014/main" id="{73F0D196-DFE1-3633-DE00-DCAFFC2C2589}"/>
+                <a16:creationId xmlns:a16="http://schemas.microsoft.com/office/drawing/2014/main" id="{D532E309-5929-93E1-D5B4-A551C1F4C51D}"/>
               </a:ext>
             </a:extLst>
           </p:cNvPr>
@@ -41642,7 +41817,7 @@
           <p:cNvPr id="10" name="Google Shape;86;p15">
             <a:extLst>
               <a:ext uri="{FF2B5EF4-FFF2-40B4-BE49-F238E27FC236}">
-                <a16:creationId xmlns:a16="http://schemas.microsoft.com/office/drawing/2014/main" id="{D1D777F4-DFB9-E8C3-6844-3A3DF488B499}"/>
+                <a16:creationId xmlns:a16="http://schemas.microsoft.com/office/drawing/2014/main" id="{48708324-E0A0-5213-3A3C-301AC91C451C}"/>
               </a:ext>
             </a:extLst>
           </p:cNvPr>
@@ -41651,8 +41826,8 @@
         </p:nvSpPr>
         <p:spPr>
           <a:xfrm>
-            <a:off x="6127942" y="3789573"/>
-            <a:ext cx="3204918" cy="1537318"/>
+            <a:off x="5839417" y="3639469"/>
+            <a:ext cx="2443410" cy="2106418"/>
           </a:xfrm>
           <a:prstGeom prst="roundRect">
             <a:avLst>
@@ -41765,7 +41940,7 @@
           <p:cNvPr id="11" name="Google Shape;92;p15">
             <a:extLst>
               <a:ext uri="{FF2B5EF4-FFF2-40B4-BE49-F238E27FC236}">
-                <a16:creationId xmlns:a16="http://schemas.microsoft.com/office/drawing/2014/main" id="{AA5A78AB-AFAE-8858-A76A-768D8BDABB19}"/>
+                <a16:creationId xmlns:a16="http://schemas.microsoft.com/office/drawing/2014/main" id="{40CFB6B6-521E-AE64-AE96-2272B1A7717A}"/>
               </a:ext>
             </a:extLst>
           </p:cNvPr>
@@ -41774,8 +41949,8 @@
         </p:nvSpPr>
         <p:spPr>
           <a:xfrm>
-            <a:off x="6127942" y="7203407"/>
-            <a:ext cx="3184194" cy="1514182"/>
+            <a:off x="5839417" y="5783003"/>
+            <a:ext cx="2443410" cy="1843569"/>
           </a:xfrm>
           <a:prstGeom prst="roundRect">
             <a:avLst>
@@ -41888,7 +42063,7 @@
           <p:cNvPr id="8" name="Google Shape;92;p15">
             <a:extLst>
               <a:ext uri="{FF2B5EF4-FFF2-40B4-BE49-F238E27FC236}">
-                <a16:creationId xmlns:a16="http://schemas.microsoft.com/office/drawing/2014/main" id="{22CE298D-41DD-E646-0618-A0CC580CC6D4}"/>
+                <a16:creationId xmlns:a16="http://schemas.microsoft.com/office/drawing/2014/main" id="{CCD46F56-3C51-6A3C-0C88-451996AC6655}"/>
               </a:ext>
             </a:extLst>
           </p:cNvPr>
@@ -41897,8 +42072,8 @@
         </p:nvSpPr>
         <p:spPr>
           <a:xfrm>
-            <a:off x="6200057" y="917871"/>
-            <a:ext cx="2943942" cy="2682459"/>
+            <a:off x="5839417" y="768737"/>
+            <a:ext cx="2398246" cy="2817311"/>
           </a:xfrm>
           <a:prstGeom prst="roundRect">
             <a:avLst>
@@ -42017,10 +42192,10 @@
       </p:sp>
       <p:sp>
         <p:nvSpPr>
-          <p:cNvPr id="9" name="Google Shape;92;p15">
-            <a:extLst>
-              <a:ext uri="{FF2B5EF4-FFF2-40B4-BE49-F238E27FC236}">
-                <a16:creationId xmlns:a16="http://schemas.microsoft.com/office/drawing/2014/main" id="{E48C8707-D518-1BA1-2607-70FA8251DDD8}"/>
+          <p:cNvPr id="23" name="Google Shape;121;p16">
+            <a:extLst>
+              <a:ext uri="{FF2B5EF4-FFF2-40B4-BE49-F238E27FC236}">
+                <a16:creationId xmlns:a16="http://schemas.microsoft.com/office/drawing/2014/main" id="{4247313A-D8EF-9713-6623-0E758F057BED}"/>
               </a:ext>
             </a:extLst>
           </p:cNvPr>
@@ -42029,8 +42204,8 @@
         </p:nvSpPr>
         <p:spPr>
           <a:xfrm>
-            <a:off x="6127942" y="5530416"/>
-            <a:ext cx="3184191" cy="1552771"/>
+            <a:off x="12758767" y="3997472"/>
+            <a:ext cx="2449608" cy="1155484"/>
           </a:xfrm>
           <a:prstGeom prst="roundRect">
             <a:avLst>
@@ -42038,11 +42213,11 @@
             </a:avLst>
           </a:prstGeom>
           <a:solidFill>
-            <a:srgbClr val="D9EAD3"/>
+            <a:srgbClr val="D0E0E3"/>
           </a:solidFill>
           <a:ln w="28575" cap="flat" cmpd="sng">
             <a:solidFill>
-              <a:srgbClr val="274E13"/>
+              <a:srgbClr val="134F5C"/>
             </a:solidFill>
             <a:prstDash val="solid"/>
             <a:round/>
@@ -42058,129 +42233,6 @@
           <a:p>
             <a:pPr lvl="0"/>
             <a:r>
-              <a:rPr lang="en-GB" dirty="0">
-                <a:latin typeface="Consolas"/>
-                <a:ea typeface="Consolas"/>
-                <a:cs typeface="Consolas"/>
-                <a:sym typeface="Consolas"/>
-              </a:rPr>
-              <a:t>US4: Como </a:t>
-            </a:r>
-            <a:r>
-              <a:rPr lang="en-GB" dirty="0" err="1">
-                <a:latin typeface="Consolas"/>
-                <a:ea typeface="Consolas"/>
-                <a:cs typeface="Consolas"/>
-                <a:sym typeface="Consolas"/>
-              </a:rPr>
-              <a:t>membro</a:t>
-            </a:r>
-            <a:r>
-              <a:rPr lang="en-GB" dirty="0">
-                <a:latin typeface="Consolas"/>
-                <a:ea typeface="Consolas"/>
-                <a:cs typeface="Consolas"/>
-                <a:sym typeface="Consolas"/>
-              </a:rPr>
-              <a:t> da </a:t>
-            </a:r>
-            <a:r>
-              <a:rPr lang="en-GB" dirty="0" err="1">
-                <a:latin typeface="Consolas"/>
-                <a:ea typeface="Consolas"/>
-                <a:cs typeface="Consolas"/>
-                <a:sym typeface="Consolas"/>
-              </a:rPr>
-              <a:t>equipa</a:t>
-            </a:r>
-            <a:r>
-              <a:rPr lang="en-GB" dirty="0">
-                <a:latin typeface="Consolas"/>
-                <a:ea typeface="Consolas"/>
-                <a:cs typeface="Consolas"/>
-                <a:sym typeface="Consolas"/>
-              </a:rPr>
-              <a:t> </a:t>
-            </a:r>
-            <a:r>
-              <a:rPr lang="en-GB" dirty="0" err="1">
-                <a:latin typeface="Consolas"/>
-                <a:ea typeface="Consolas"/>
-                <a:cs typeface="Consolas"/>
-                <a:sym typeface="Consolas"/>
-              </a:rPr>
-              <a:t>quero</a:t>
-            </a:r>
-            <a:r>
-              <a:rPr lang="en-GB" dirty="0">
-                <a:latin typeface="Consolas"/>
-                <a:ea typeface="Consolas"/>
-                <a:cs typeface="Consolas"/>
-                <a:sym typeface="Consolas"/>
-              </a:rPr>
-              <a:t> f</a:t>
-            </a:r>
-            <a:r>
-              <a:rPr lang="pt-PT" dirty="0">
-                <a:latin typeface="Consolas"/>
-                <a:ea typeface="Consolas"/>
-                <a:cs typeface="Consolas"/>
-                <a:sym typeface="Consolas"/>
-              </a:rPr>
-              <a:t>azer resource trader bot feature, com o qual os jogadores podem fazer trocas de uns recursos por outros durante o jogo</a:t>
-            </a:r>
-            <a:endParaRPr dirty="0">
-              <a:latin typeface="Consolas"/>
-              <a:ea typeface="Consolas"/>
-              <a:cs typeface="Consolas"/>
-              <a:sym typeface="Consolas"/>
-            </a:endParaRPr>
-          </a:p>
-        </p:txBody>
-      </p:sp>
-      <p:sp>
-        <p:nvSpPr>
-          <p:cNvPr id="23" name="Google Shape;121;p16">
-            <a:extLst>
-              <a:ext uri="{FF2B5EF4-FFF2-40B4-BE49-F238E27FC236}">
-                <a16:creationId xmlns:a16="http://schemas.microsoft.com/office/drawing/2014/main" id="{B331151C-5D03-6B1E-0616-77603A0DF667}"/>
-              </a:ext>
-            </a:extLst>
-          </p:cNvPr>
-          <p:cNvSpPr/>
-          <p:nvPr/>
-        </p:nvSpPr>
-        <p:spPr>
-          <a:xfrm>
-            <a:off x="12404282" y="4366085"/>
-            <a:ext cx="2449608" cy="946153"/>
-          </a:xfrm>
-          <a:prstGeom prst="roundRect">
-            <a:avLst>
-              <a:gd name="adj" fmla="val 16667"/>
-            </a:avLst>
-          </a:prstGeom>
-          <a:solidFill>
-            <a:srgbClr val="D0E0E3"/>
-          </a:solidFill>
-          <a:ln w="28575" cap="flat" cmpd="sng">
-            <a:solidFill>
-              <a:srgbClr val="134F5C"/>
-            </a:solidFill>
-            <a:prstDash val="solid"/>
-            <a:round/>
-            <a:headEnd type="none" w="sm" len="sm"/>
-            <a:tailEnd type="none" w="sm" len="sm"/>
-          </a:ln>
-        </p:spPr>
-        <p:txBody>
-          <a:bodyPr spcFirstLastPara="1" wrap="square" lIns="91425" tIns="91425" rIns="91425" bIns="91425" anchor="t" anchorCtr="0">
-            <a:noAutofit/>
-          </a:bodyPr>
-          <a:lstStyle/>
-          <a:p>
-            <a:pPr lvl="0"/>
-            <a:r>
               <a:rPr lang="en-US" dirty="0">
                 <a:latin typeface="Consolas"/>
                 <a:ea typeface="Consolas"/>
@@ -42207,17 +42259,6 @@
               </a:rPr>
               <a:t> tsunami e earthquake spawners.</a:t>
             </a:r>
-          </a:p>
-          <a:p>
-            <a:pPr marL="0" lvl="0" indent="0" algn="l" rtl="0">
-              <a:spcBef>
-                <a:spcPts val="0"/>
-              </a:spcBef>
-              <a:spcAft>
-                <a:spcPts val="0"/>
-              </a:spcAft>
-              <a:buNone/>
-            </a:pPr>
             <a:br>
               <a:rPr lang="en-GB" dirty="0">
                 <a:latin typeface="Consolas"/>
@@ -42257,7 +42298,7 @@
           <p:cNvPr id="12" name="Google Shape;121;p16">
             <a:extLst>
               <a:ext uri="{FF2B5EF4-FFF2-40B4-BE49-F238E27FC236}">
-                <a16:creationId xmlns:a16="http://schemas.microsoft.com/office/drawing/2014/main" id="{935FA1DF-2C02-F28C-3E73-D9E9ACB2CD98}"/>
+                <a16:creationId xmlns:a16="http://schemas.microsoft.com/office/drawing/2014/main" id="{DEC6349A-3B21-DE30-1869-6ABBAE6E0099}"/>
               </a:ext>
             </a:extLst>
           </p:cNvPr>
@@ -42266,8 +42307,8 @@
         </p:nvSpPr>
         <p:spPr>
           <a:xfrm>
-            <a:off x="12443090" y="7484829"/>
-            <a:ext cx="2410800" cy="1041591"/>
+            <a:off x="12797575" y="5795890"/>
+            <a:ext cx="2410800" cy="1112620"/>
           </a:xfrm>
           <a:prstGeom prst="roundRect">
             <a:avLst>
@@ -42342,7 +42383,7 @@
           <p:cNvPr id="13" name="Google Shape;121;p16">
             <a:extLst>
               <a:ext uri="{FF2B5EF4-FFF2-40B4-BE49-F238E27FC236}">
-                <a16:creationId xmlns:a16="http://schemas.microsoft.com/office/drawing/2014/main" id="{32911598-3F6D-FCA6-9B42-D0DE9E7BCE22}"/>
+                <a16:creationId xmlns:a16="http://schemas.microsoft.com/office/drawing/2014/main" id="{E80262C6-9266-606F-D9EE-27119EE22BFA}"/>
               </a:ext>
             </a:extLst>
           </p:cNvPr>
@@ -42351,8 +42392,8 @@
         </p:nvSpPr>
         <p:spPr>
           <a:xfrm>
-            <a:off x="15532407" y="1316976"/>
-            <a:ext cx="2410800" cy="2549628"/>
+            <a:off x="15532407" y="1077944"/>
+            <a:ext cx="2410800" cy="2364426"/>
           </a:xfrm>
           <a:prstGeom prst="roundRect">
             <a:avLst>
@@ -42399,14 +42440,23 @@
               </a:spcAft>
               <a:buNone/>
             </a:pPr>
-            <a:br>
-              <a:rPr lang="en-GB" dirty="0">
-                <a:latin typeface="Consolas"/>
-                <a:ea typeface="Consolas"/>
-                <a:cs typeface="Consolas"/>
-                <a:sym typeface="Consolas"/>
-              </a:rPr>
-            </a:br>
+            <a:endParaRPr lang="en-GB" dirty="0">
+              <a:latin typeface="Consolas"/>
+              <a:ea typeface="Consolas"/>
+              <a:cs typeface="Consolas"/>
+              <a:sym typeface="Consolas"/>
+            </a:endParaRPr>
+          </a:p>
+          <a:p>
+            <a:pPr marL="0" lvl="0" indent="0" algn="l" rtl="0">
+              <a:spcBef>
+                <a:spcPts val="0"/>
+              </a:spcBef>
+              <a:spcAft>
+                <a:spcPts val="0"/>
+              </a:spcAft>
+              <a:buNone/>
+            </a:pPr>
             <a:br>
               <a:rPr lang="en-GB" dirty="0">
                 <a:latin typeface="Consolas"/>
@@ -42446,7 +42496,7 @@
           <p:cNvPr id="14" name="Google Shape;121;p16">
             <a:extLst>
               <a:ext uri="{FF2B5EF4-FFF2-40B4-BE49-F238E27FC236}">
-                <a16:creationId xmlns:a16="http://schemas.microsoft.com/office/drawing/2014/main" id="{F7435B39-D2DA-3F89-1647-3F4311FB16A9}"/>
+                <a16:creationId xmlns:a16="http://schemas.microsoft.com/office/drawing/2014/main" id="{654D7C70-80B2-69D0-2411-A7CF48D17290}"/>
               </a:ext>
             </a:extLst>
           </p:cNvPr>
@@ -42455,8 +42505,8 @@
         </p:nvSpPr>
         <p:spPr>
           <a:xfrm>
-            <a:off x="12443090" y="9060729"/>
-            <a:ext cx="2410800" cy="780327"/>
+            <a:off x="12797575" y="7626572"/>
+            <a:ext cx="2410800" cy="2056805"/>
           </a:xfrm>
           <a:prstGeom prst="roundRect">
             <a:avLst>
@@ -42492,6 +42542,15 @@
               </a:rPr>
               <a:t>T4: Fazer resource trader bot feature.</a:t>
             </a:r>
+          </a:p>
+          <a:p>
+            <a:pPr lvl="0"/>
+            <a:endParaRPr lang="pt-PT" dirty="0">
+              <a:latin typeface="Consolas"/>
+              <a:ea typeface="Consolas"/>
+              <a:cs typeface="Consolas"/>
+              <a:sym typeface="Consolas"/>
+            </a:endParaRPr>
           </a:p>
           <a:p>
             <a:pPr marL="0" lvl="0" indent="0" algn="l" rtl="0">
@@ -42550,7 +42609,7 @@
           <p:cNvPr id="19" name="Google Shape;92;p15">
             <a:extLst>
               <a:ext uri="{FF2B5EF4-FFF2-40B4-BE49-F238E27FC236}">
-                <a16:creationId xmlns:a16="http://schemas.microsoft.com/office/drawing/2014/main" id="{D5FE743F-D8D2-FC81-6496-58BD0180C274}"/>
+                <a16:creationId xmlns:a16="http://schemas.microsoft.com/office/drawing/2014/main" id="{6E8390E4-399A-DF49-E4D5-147AD22F7ADF}"/>
               </a:ext>
             </a:extLst>
           </p:cNvPr>
@@ -42559,8 +42618,8 @@
         </p:nvSpPr>
         <p:spPr>
           <a:xfrm>
-            <a:off x="6073006" y="8884240"/>
-            <a:ext cx="3239127" cy="1552771"/>
+            <a:off x="5863765" y="7700804"/>
+            <a:ext cx="2419062" cy="2330222"/>
           </a:xfrm>
           <a:prstGeom prst="roundRect">
             <a:avLst>
@@ -42670,10 +42729,10 @@
       </p:sp>
       <p:sp>
         <p:nvSpPr>
-          <p:cNvPr id="20" name="Google Shape;121;p16">
-            <a:extLst>
-              <a:ext uri="{FF2B5EF4-FFF2-40B4-BE49-F238E27FC236}">
-                <a16:creationId xmlns:a16="http://schemas.microsoft.com/office/drawing/2014/main" id="{321B21AC-7B43-7200-B2F9-BF25B6995A4D}"/>
+          <p:cNvPr id="22" name="Google Shape;92;p15">
+            <a:extLst>
+              <a:ext uri="{FF2B5EF4-FFF2-40B4-BE49-F238E27FC236}">
+                <a16:creationId xmlns:a16="http://schemas.microsoft.com/office/drawing/2014/main" id="{7D41EB2D-0BD1-9CFB-2A02-1FFEA0E5321A}"/>
               </a:ext>
             </a:extLst>
           </p:cNvPr>
@@ -42682,8 +42741,8 @@
         </p:nvSpPr>
         <p:spPr>
           <a:xfrm>
-            <a:off x="12443090" y="6018221"/>
-            <a:ext cx="2410800" cy="780327"/>
+            <a:off x="8388135" y="768737"/>
+            <a:ext cx="1300278" cy="9262289"/>
           </a:xfrm>
           <a:prstGeom prst="roundRect">
             <a:avLst>
@@ -42691,11 +42750,11 @@
             </a:avLst>
           </a:prstGeom>
           <a:solidFill>
-            <a:srgbClr val="D0E0E3"/>
+            <a:srgbClr val="D9EAD3"/>
           </a:solidFill>
           <a:ln w="28575" cap="flat" cmpd="sng">
             <a:solidFill>
-              <a:srgbClr val="134F5C"/>
+              <a:srgbClr val="274E13"/>
             </a:solidFill>
             <a:prstDash val="solid"/>
             <a:round/>
@@ -42717,27 +42776,89 @@
                 <a:cs typeface="Consolas"/>
                 <a:sym typeface="Consolas"/>
               </a:rPr>
-              <a:t>T4: Fazer resource trader bot feature.</a:t>
-            </a:r>
-          </a:p>
-          <a:p>
-            <a:pPr marL="0" lvl="0" indent="0" algn="l" rtl="0">
-              <a:spcBef>
-                <a:spcPts val="0"/>
-              </a:spcBef>
-              <a:spcAft>
-                <a:spcPts val="0"/>
-              </a:spcAft>
-              <a:buNone/>
-            </a:pPr>
-            <a:br>
-              <a:rPr lang="en-GB" dirty="0">
-                <a:latin typeface="Consolas"/>
-                <a:ea typeface="Consolas"/>
-                <a:cs typeface="Consolas"/>
-                <a:sym typeface="Consolas"/>
-              </a:rPr>
-            </a:br>
+              <a:t>US5: como membro da equipa quero completar as tarefas do milestone 3 referentes às implementações que acrescentei ao jogo</a:t>
+            </a:r>
+          </a:p>
+          <a:p>
+            <a:pPr lvl="0"/>
+            <a:endParaRPr dirty="0">
+              <a:latin typeface="Consolas"/>
+              <a:ea typeface="Consolas"/>
+              <a:cs typeface="Consolas"/>
+              <a:sym typeface="Consolas"/>
+            </a:endParaRPr>
+          </a:p>
+        </p:txBody>
+      </p:sp>
+      <p:sp>
+        <p:nvSpPr>
+          <p:cNvPr id="24" name="Google Shape;121;p16">
+            <a:extLst>
+              <a:ext uri="{FF2B5EF4-FFF2-40B4-BE49-F238E27FC236}">
+                <a16:creationId xmlns:a16="http://schemas.microsoft.com/office/drawing/2014/main" id="{57224E8B-A947-5DAE-85EE-62DC2AB5CEBD}"/>
+              </a:ext>
+            </a:extLst>
+          </p:cNvPr>
+          <p:cNvSpPr/>
+          <p:nvPr/>
+        </p:nvSpPr>
+        <p:spPr>
+          <a:xfrm>
+            <a:off x="12758767" y="1077943"/>
+            <a:ext cx="2410800" cy="2376933"/>
+          </a:xfrm>
+          <a:prstGeom prst="roundRect">
+            <a:avLst>
+              <a:gd name="adj" fmla="val 16667"/>
+            </a:avLst>
+          </a:prstGeom>
+          <a:solidFill>
+            <a:srgbClr val="D0E0E3"/>
+          </a:solidFill>
+          <a:ln w="28575" cap="flat" cmpd="sng">
+            <a:solidFill>
+              <a:srgbClr val="134F5C"/>
+            </a:solidFill>
+            <a:prstDash val="solid"/>
+            <a:round/>
+            <a:headEnd type="none" w="sm" len="sm"/>
+            <a:tailEnd type="none" w="sm" len="sm"/>
+          </a:ln>
+        </p:spPr>
+        <p:txBody>
+          <a:bodyPr spcFirstLastPara="1" wrap="square" lIns="91425" tIns="91425" rIns="91425" bIns="91425" anchor="t" anchorCtr="0">
+            <a:noAutofit/>
+          </a:bodyPr>
+          <a:lstStyle/>
+          <a:p>
+            <a:pPr lvl="0"/>
+            <a:r>
+              <a:rPr lang="en-GB" dirty="0">
+                <a:latin typeface="Consolas"/>
+                <a:ea typeface="Consolas"/>
+                <a:cs typeface="Consolas"/>
+                <a:sym typeface="Consolas"/>
+              </a:rPr>
+              <a:t>T5: Acabar as </a:t>
+            </a:r>
+            <a:r>
+              <a:rPr lang="en-GB" dirty="0" err="1">
+                <a:latin typeface="Consolas"/>
+                <a:ea typeface="Consolas"/>
+                <a:cs typeface="Consolas"/>
+                <a:sym typeface="Consolas"/>
+              </a:rPr>
+              <a:t>tarefas</a:t>
+            </a:r>
+            <a:r>
+              <a:rPr lang="en-GB" dirty="0">
+                <a:latin typeface="Consolas"/>
+                <a:ea typeface="Consolas"/>
+                <a:cs typeface="Consolas"/>
+                <a:sym typeface="Consolas"/>
+              </a:rPr>
+              <a:t> do milestone3.</a:t>
+            </a:r>
             <a:br>
               <a:rPr lang="en-GB" dirty="0">
                 <a:latin typeface="Consolas"/>
@@ -42763,6 +42884,48 @@
               </a:spcAft>
               <a:buNone/>
             </a:pPr>
+            <a:endParaRPr lang="en-GB" dirty="0">
+              <a:latin typeface="Consolas"/>
+              <a:ea typeface="Consolas"/>
+              <a:cs typeface="Consolas"/>
+              <a:sym typeface="Consolas"/>
+            </a:endParaRPr>
+          </a:p>
+          <a:p>
+            <a:pPr marL="0" lvl="0" indent="0" algn="l" rtl="0">
+              <a:spcBef>
+                <a:spcPts val="0"/>
+              </a:spcBef>
+              <a:spcAft>
+                <a:spcPts val="0"/>
+              </a:spcAft>
+              <a:buNone/>
+            </a:pPr>
+            <a:br>
+              <a:rPr lang="en-GB" dirty="0">
+                <a:latin typeface="Consolas"/>
+                <a:ea typeface="Consolas"/>
+                <a:cs typeface="Consolas"/>
+                <a:sym typeface="Consolas"/>
+              </a:rPr>
+            </a:br>
+            <a:endParaRPr lang="en-GB" dirty="0">
+              <a:latin typeface="Consolas"/>
+              <a:ea typeface="Consolas"/>
+              <a:cs typeface="Consolas"/>
+              <a:sym typeface="Consolas"/>
+            </a:endParaRPr>
+          </a:p>
+          <a:p>
+            <a:pPr marL="0" lvl="0" indent="0" algn="l" rtl="0">
+              <a:spcBef>
+                <a:spcPts val="0"/>
+              </a:spcBef>
+              <a:spcAft>
+                <a:spcPts val="0"/>
+              </a:spcAft>
+              <a:buNone/>
+            </a:pPr>
             <a:endParaRPr dirty="0">
               <a:latin typeface="Consolas"/>
               <a:ea typeface="Consolas"/>
@@ -42772,10 +42935,2435 @@
           </a:p>
         </p:txBody>
       </p:sp>
+      <p:sp>
+        <p:nvSpPr>
+          <p:cNvPr id="27" name="Google Shape;121;p16">
+            <a:extLst>
+              <a:ext uri="{FF2B5EF4-FFF2-40B4-BE49-F238E27FC236}">
+                <a16:creationId xmlns:a16="http://schemas.microsoft.com/office/drawing/2014/main" id="{BB385921-257B-DE86-B1AA-DE2114A8AF79}"/>
+              </a:ext>
+            </a:extLst>
+          </p:cNvPr>
+          <p:cNvSpPr/>
+          <p:nvPr/>
+        </p:nvSpPr>
+        <p:spPr>
+          <a:xfrm>
+            <a:off x="9998786" y="3997472"/>
+            <a:ext cx="2410800" cy="5938269"/>
+          </a:xfrm>
+          <a:prstGeom prst="roundRect">
+            <a:avLst>
+              <a:gd name="adj" fmla="val 16667"/>
+            </a:avLst>
+          </a:prstGeom>
+          <a:solidFill>
+            <a:srgbClr val="D0E0E3"/>
+          </a:solidFill>
+          <a:ln w="28575" cap="flat" cmpd="sng">
+            <a:solidFill>
+              <a:srgbClr val="134F5C"/>
+            </a:solidFill>
+            <a:prstDash val="solid"/>
+            <a:round/>
+            <a:headEnd type="none" w="sm" len="sm"/>
+            <a:tailEnd type="none" w="sm" len="sm"/>
+          </a:ln>
+        </p:spPr>
+        <p:txBody>
+          <a:bodyPr spcFirstLastPara="1" wrap="square" lIns="91425" tIns="91425" rIns="91425" bIns="91425" anchor="t" anchorCtr="0">
+            <a:noAutofit/>
+          </a:bodyPr>
+          <a:lstStyle/>
+          <a:p>
+            <a:pPr lvl="0"/>
+            <a:r>
+              <a:rPr lang="en-GB" dirty="0">
+                <a:latin typeface="Consolas"/>
+                <a:ea typeface="Consolas"/>
+                <a:cs typeface="Consolas"/>
+                <a:sym typeface="Consolas"/>
+              </a:rPr>
+              <a:t>T5: Acabar as </a:t>
+            </a:r>
+            <a:r>
+              <a:rPr lang="en-GB" dirty="0" err="1">
+                <a:latin typeface="Consolas"/>
+                <a:ea typeface="Consolas"/>
+                <a:cs typeface="Consolas"/>
+                <a:sym typeface="Consolas"/>
+              </a:rPr>
+              <a:t>tarefas</a:t>
+            </a:r>
+            <a:r>
+              <a:rPr lang="en-GB" dirty="0">
+                <a:latin typeface="Consolas"/>
+                <a:ea typeface="Consolas"/>
+                <a:cs typeface="Consolas"/>
+                <a:sym typeface="Consolas"/>
+              </a:rPr>
+              <a:t> do milestone3.</a:t>
+            </a:r>
+            <a:br>
+              <a:rPr lang="en-GB" dirty="0">
+                <a:latin typeface="Consolas"/>
+                <a:ea typeface="Consolas"/>
+                <a:cs typeface="Consolas"/>
+                <a:sym typeface="Consolas"/>
+              </a:rPr>
+            </a:br>
+            <a:endParaRPr lang="en-GB" dirty="0">
+              <a:latin typeface="Consolas"/>
+              <a:ea typeface="Consolas"/>
+              <a:cs typeface="Consolas"/>
+              <a:sym typeface="Consolas"/>
+            </a:endParaRPr>
+          </a:p>
+          <a:p>
+            <a:pPr marL="0" lvl="0" indent="0" algn="l" rtl="0">
+              <a:spcBef>
+                <a:spcPts val="0"/>
+              </a:spcBef>
+              <a:spcAft>
+                <a:spcPts val="0"/>
+              </a:spcAft>
+              <a:buNone/>
+            </a:pPr>
+            <a:endParaRPr lang="en-GB" dirty="0">
+              <a:latin typeface="Consolas"/>
+              <a:ea typeface="Consolas"/>
+              <a:cs typeface="Consolas"/>
+              <a:sym typeface="Consolas"/>
+            </a:endParaRPr>
+          </a:p>
+          <a:p>
+            <a:pPr marL="0" lvl="0" indent="0" algn="l" rtl="0">
+              <a:spcBef>
+                <a:spcPts val="0"/>
+              </a:spcBef>
+              <a:spcAft>
+                <a:spcPts val="0"/>
+              </a:spcAft>
+              <a:buNone/>
+            </a:pPr>
+            <a:br>
+              <a:rPr lang="en-GB" dirty="0">
+                <a:latin typeface="Consolas"/>
+                <a:ea typeface="Consolas"/>
+                <a:cs typeface="Consolas"/>
+                <a:sym typeface="Consolas"/>
+              </a:rPr>
+            </a:br>
+            <a:endParaRPr lang="en-GB" dirty="0">
+              <a:latin typeface="Consolas"/>
+              <a:ea typeface="Consolas"/>
+              <a:cs typeface="Consolas"/>
+              <a:sym typeface="Consolas"/>
+            </a:endParaRPr>
+          </a:p>
+          <a:p>
+            <a:pPr marL="0" lvl="0" indent="0" algn="l" rtl="0">
+              <a:spcBef>
+                <a:spcPts val="0"/>
+              </a:spcBef>
+              <a:spcAft>
+                <a:spcPts val="0"/>
+              </a:spcAft>
+              <a:buNone/>
+            </a:pPr>
+            <a:endParaRPr dirty="0">
+              <a:latin typeface="Consolas"/>
+              <a:ea typeface="Consolas"/>
+              <a:cs typeface="Consolas"/>
+              <a:sym typeface="Consolas"/>
+            </a:endParaRPr>
+          </a:p>
+        </p:txBody>
+      </p:sp>
     </p:spTree>
     <p:extLst>
       <p:ext uri="{BB962C8B-B14F-4D97-AF65-F5344CB8AC3E}">
-        <p14:creationId xmlns:p14="http://schemas.microsoft.com/office/powerpoint/2010/main" val="1010171579"/>
+        <p14:creationId xmlns:p14="http://schemas.microsoft.com/office/powerpoint/2010/main" val="1628635303"/>
+      </p:ext>
+    </p:extLst>
+  </p:cSld>
+  <p:clrMapOvr>
+    <a:masterClrMapping/>
+  </p:clrMapOvr>
+</p:sld>
+</file>
+
+<file path=ppt/slides/slide28.xml><?xml version="1.0" encoding="utf-8"?>
+<p:sld xmlns:a="http://schemas.openxmlformats.org/drawingml/2006/main" xmlns:r="http://schemas.openxmlformats.org/officeDocument/2006/relationships" xmlns:p="http://schemas.openxmlformats.org/presentationml/2006/main">
+  <p:cSld>
+    <p:spTree>
+      <p:nvGrpSpPr>
+        <p:cNvPr id="1" name="Shape 189">
+          <a:extLst>
+            <a:ext uri="{FF2B5EF4-FFF2-40B4-BE49-F238E27FC236}">
+              <a16:creationId xmlns:a16="http://schemas.microsoft.com/office/drawing/2014/main" id="{C0B08FDD-9788-56F0-A14B-47622BE0901C}"/>
+            </a:ext>
+          </a:extLst>
+        </p:cNvPr>
+        <p:cNvGrpSpPr/>
+        <p:nvPr/>
+      </p:nvGrpSpPr>
+      <p:grpSpPr>
+        <a:xfrm>
+          <a:off x="0" y="0"/>
+          <a:ext cx="0" cy="0"/>
+          <a:chOff x="0" y="0"/>
+          <a:chExt cx="0" cy="0"/>
+        </a:xfrm>
+      </p:grpSpPr>
+      <p:cxnSp>
+        <p:nvCxnSpPr>
+          <p:cNvPr id="190" name="Google Shape;190;p19">
+            <a:extLst>
+              <a:ext uri="{FF2B5EF4-FFF2-40B4-BE49-F238E27FC236}">
+                <a16:creationId xmlns:a16="http://schemas.microsoft.com/office/drawing/2014/main" id="{FF3DF361-9E05-5329-DDF8-8C4220280652}"/>
+              </a:ext>
+            </a:extLst>
+          </p:cNvPr>
+          <p:cNvCxnSpPr/>
+          <p:nvPr/>
+        </p:nvCxnSpPr>
+        <p:spPr>
+          <a:xfrm>
+            <a:off x="5758457" y="-28500"/>
+            <a:ext cx="0" cy="10857000"/>
+          </a:xfrm>
+          <a:prstGeom prst="straightConnector1">
+            <a:avLst/>
+          </a:prstGeom>
+          <a:noFill/>
+          <a:ln w="38100" cap="flat" cmpd="sng">
+            <a:solidFill>
+              <a:srgbClr val="5B0F00"/>
+            </a:solidFill>
+            <a:prstDash val="solid"/>
+            <a:round/>
+            <a:headEnd type="none" w="med" len="med"/>
+            <a:tailEnd type="none" w="med" len="med"/>
+          </a:ln>
+        </p:spPr>
+      </p:cxnSp>
+      <p:sp>
+        <p:nvSpPr>
+          <p:cNvPr id="191" name="Google Shape;191;p19">
+            <a:extLst>
+              <a:ext uri="{FF2B5EF4-FFF2-40B4-BE49-F238E27FC236}">
+                <a16:creationId xmlns:a16="http://schemas.microsoft.com/office/drawing/2014/main" id="{483FC68F-B23B-9F79-1777-E75A56A5B90B}"/>
+              </a:ext>
+            </a:extLst>
+          </p:cNvPr>
+          <p:cNvSpPr/>
+          <p:nvPr/>
+        </p:nvSpPr>
+        <p:spPr>
+          <a:xfrm>
+            <a:off x="3197186" y="84312"/>
+            <a:ext cx="2410800" cy="480900"/>
+          </a:xfrm>
+          <a:prstGeom prst="roundRect">
+            <a:avLst>
+              <a:gd name="adj" fmla="val 16667"/>
+            </a:avLst>
+          </a:prstGeom>
+          <a:solidFill>
+            <a:srgbClr val="F9CB9C"/>
+          </a:solidFill>
+          <a:ln w="28575" cap="flat" cmpd="sng">
+            <a:solidFill>
+              <a:srgbClr val="B45F06"/>
+            </a:solidFill>
+            <a:prstDash val="solid"/>
+            <a:round/>
+            <a:headEnd type="none" w="sm" len="sm"/>
+            <a:tailEnd type="none" w="sm" len="sm"/>
+          </a:ln>
+        </p:spPr>
+        <p:txBody>
+          <a:bodyPr spcFirstLastPara="1" wrap="square" lIns="91425" tIns="91425" rIns="91425" bIns="91425" anchor="ctr" anchorCtr="0">
+            <a:noAutofit/>
+          </a:bodyPr>
+          <a:lstStyle/>
+          <a:p>
+            <a:pPr marL="0" lvl="0" indent="0" algn="ctr" rtl="0">
+              <a:spcBef>
+                <a:spcPts val="0"/>
+              </a:spcBef>
+              <a:spcAft>
+                <a:spcPts val="0"/>
+              </a:spcAft>
+              <a:buNone/>
+            </a:pPr>
+            <a:r>
+              <a:rPr lang="en-GB" sz="1800" b="1">
+                <a:latin typeface="Consolas"/>
+                <a:ea typeface="Consolas"/>
+                <a:cs typeface="Consolas"/>
+                <a:sym typeface="Consolas"/>
+              </a:rPr>
+              <a:t>Student ID</a:t>
+            </a:r>
+            <a:endParaRPr sz="1800" b="1">
+              <a:latin typeface="Consolas"/>
+              <a:ea typeface="Consolas"/>
+              <a:cs typeface="Consolas"/>
+              <a:sym typeface="Consolas"/>
+            </a:endParaRPr>
+          </a:p>
+        </p:txBody>
+      </p:sp>
+      <p:sp>
+        <p:nvSpPr>
+          <p:cNvPr id="192" name="Google Shape;192;p19">
+            <a:extLst>
+              <a:ext uri="{FF2B5EF4-FFF2-40B4-BE49-F238E27FC236}">
+                <a16:creationId xmlns:a16="http://schemas.microsoft.com/office/drawing/2014/main" id="{507E8E29-705C-DFBA-FAB0-5C8D64690A6C}"/>
+              </a:ext>
+            </a:extLst>
+          </p:cNvPr>
+          <p:cNvSpPr/>
+          <p:nvPr/>
+        </p:nvSpPr>
+        <p:spPr>
+          <a:xfrm>
+            <a:off x="6281635" y="84312"/>
+            <a:ext cx="3406779" cy="480900"/>
+          </a:xfrm>
+          <a:prstGeom prst="roundRect">
+            <a:avLst>
+              <a:gd name="adj" fmla="val 16667"/>
+            </a:avLst>
+          </a:prstGeom>
+          <a:solidFill>
+            <a:srgbClr val="F9CB9C"/>
+          </a:solidFill>
+          <a:ln w="28575" cap="flat" cmpd="sng">
+            <a:solidFill>
+              <a:srgbClr val="B45F06"/>
+            </a:solidFill>
+            <a:prstDash val="solid"/>
+            <a:round/>
+            <a:headEnd type="none" w="sm" len="sm"/>
+            <a:tailEnd type="none" w="sm" len="sm"/>
+          </a:ln>
+        </p:spPr>
+        <p:txBody>
+          <a:bodyPr spcFirstLastPara="1" wrap="square" lIns="91425" tIns="91425" rIns="91425" bIns="91425" anchor="ctr" anchorCtr="0">
+            <a:noAutofit/>
+          </a:bodyPr>
+          <a:lstStyle/>
+          <a:p>
+            <a:pPr marL="0" lvl="0" indent="0" algn="ctr" rtl="0">
+              <a:spcBef>
+                <a:spcPts val="0"/>
+              </a:spcBef>
+              <a:spcAft>
+                <a:spcPts val="0"/>
+              </a:spcAft>
+              <a:buNone/>
+            </a:pPr>
+            <a:r>
+              <a:rPr lang="en-GB" sz="1800" b="1">
+                <a:latin typeface="Consolas"/>
+                <a:ea typeface="Consolas"/>
+                <a:cs typeface="Consolas"/>
+                <a:sym typeface="Consolas"/>
+              </a:rPr>
+              <a:t>Story</a:t>
+            </a:r>
+            <a:endParaRPr sz="1800" b="1">
+              <a:latin typeface="Consolas"/>
+              <a:ea typeface="Consolas"/>
+              <a:cs typeface="Consolas"/>
+              <a:sym typeface="Consolas"/>
+            </a:endParaRPr>
+          </a:p>
+        </p:txBody>
+      </p:sp>
+      <p:sp>
+        <p:nvSpPr>
+          <p:cNvPr id="193" name="Google Shape;193;p19">
+            <a:extLst>
+              <a:ext uri="{FF2B5EF4-FFF2-40B4-BE49-F238E27FC236}">
+                <a16:creationId xmlns:a16="http://schemas.microsoft.com/office/drawing/2014/main" id="{EB22822B-1C79-DBCC-610C-4D4516E406BE}"/>
+              </a:ext>
+            </a:extLst>
+          </p:cNvPr>
+          <p:cNvSpPr/>
+          <p:nvPr/>
+        </p:nvSpPr>
+        <p:spPr>
+          <a:xfrm>
+            <a:off x="9896006" y="121794"/>
+            <a:ext cx="2410800" cy="480900"/>
+          </a:xfrm>
+          <a:prstGeom prst="roundRect">
+            <a:avLst>
+              <a:gd name="adj" fmla="val 16667"/>
+            </a:avLst>
+          </a:prstGeom>
+          <a:solidFill>
+            <a:srgbClr val="F9CB9C"/>
+          </a:solidFill>
+          <a:ln w="28575" cap="flat" cmpd="sng">
+            <a:solidFill>
+              <a:srgbClr val="B45F06"/>
+            </a:solidFill>
+            <a:prstDash val="solid"/>
+            <a:round/>
+            <a:headEnd type="none" w="sm" len="sm"/>
+            <a:tailEnd type="none" w="sm" len="sm"/>
+          </a:ln>
+        </p:spPr>
+        <p:txBody>
+          <a:bodyPr spcFirstLastPara="1" wrap="square" lIns="91425" tIns="91425" rIns="91425" bIns="91425" anchor="ctr" anchorCtr="0">
+            <a:noAutofit/>
+          </a:bodyPr>
+          <a:lstStyle/>
+          <a:p>
+            <a:pPr marL="0" lvl="0" indent="0" algn="ctr" rtl="0">
+              <a:spcBef>
+                <a:spcPts val="0"/>
+              </a:spcBef>
+              <a:spcAft>
+                <a:spcPts val="0"/>
+              </a:spcAft>
+              <a:buNone/>
+            </a:pPr>
+            <a:r>
+              <a:rPr lang="en-GB" sz="1800" b="1">
+                <a:latin typeface="Consolas"/>
+                <a:ea typeface="Consolas"/>
+                <a:cs typeface="Consolas"/>
+                <a:sym typeface="Consolas"/>
+              </a:rPr>
+              <a:t>To Do</a:t>
+            </a:r>
+            <a:endParaRPr sz="1800" b="1">
+              <a:latin typeface="Consolas"/>
+              <a:ea typeface="Consolas"/>
+              <a:cs typeface="Consolas"/>
+              <a:sym typeface="Consolas"/>
+            </a:endParaRPr>
+          </a:p>
+        </p:txBody>
+      </p:sp>
+      <p:sp>
+        <p:nvSpPr>
+          <p:cNvPr id="194" name="Google Shape;194;p19">
+            <a:extLst>
+              <a:ext uri="{FF2B5EF4-FFF2-40B4-BE49-F238E27FC236}">
+                <a16:creationId xmlns:a16="http://schemas.microsoft.com/office/drawing/2014/main" id="{13ED885A-FD95-0B1B-4F17-ACF55E09BFB3}"/>
+              </a:ext>
+            </a:extLst>
+          </p:cNvPr>
+          <p:cNvSpPr/>
+          <p:nvPr/>
+        </p:nvSpPr>
+        <p:spPr>
+          <a:xfrm>
+            <a:off x="12758767" y="136415"/>
+            <a:ext cx="2410800" cy="480900"/>
+          </a:xfrm>
+          <a:prstGeom prst="roundRect">
+            <a:avLst>
+              <a:gd name="adj" fmla="val 16667"/>
+            </a:avLst>
+          </a:prstGeom>
+          <a:solidFill>
+            <a:srgbClr val="F9CB9C"/>
+          </a:solidFill>
+          <a:ln w="28575" cap="flat" cmpd="sng">
+            <a:solidFill>
+              <a:srgbClr val="B45F06"/>
+            </a:solidFill>
+            <a:prstDash val="solid"/>
+            <a:round/>
+            <a:headEnd type="none" w="sm" len="sm"/>
+            <a:tailEnd type="none" w="sm" len="sm"/>
+          </a:ln>
+        </p:spPr>
+        <p:txBody>
+          <a:bodyPr spcFirstLastPara="1" wrap="square" lIns="91425" tIns="91425" rIns="91425" bIns="91425" anchor="ctr" anchorCtr="0">
+            <a:noAutofit/>
+          </a:bodyPr>
+          <a:lstStyle/>
+          <a:p>
+            <a:pPr marL="0" lvl="0" indent="0" algn="ctr" rtl="0">
+              <a:spcBef>
+                <a:spcPts val="0"/>
+              </a:spcBef>
+              <a:spcAft>
+                <a:spcPts val="0"/>
+              </a:spcAft>
+              <a:buNone/>
+            </a:pPr>
+            <a:r>
+              <a:rPr lang="en-GB" sz="1800" b="1" dirty="0">
+                <a:latin typeface="Consolas"/>
+                <a:ea typeface="Consolas"/>
+                <a:cs typeface="Consolas"/>
+                <a:sym typeface="Consolas"/>
+              </a:rPr>
+              <a:t>Doing</a:t>
+            </a:r>
+            <a:endParaRPr sz="1800" b="1" dirty="0">
+              <a:latin typeface="Consolas"/>
+              <a:ea typeface="Consolas"/>
+              <a:cs typeface="Consolas"/>
+              <a:sym typeface="Consolas"/>
+            </a:endParaRPr>
+          </a:p>
+        </p:txBody>
+      </p:sp>
+      <p:sp>
+        <p:nvSpPr>
+          <p:cNvPr id="195" name="Google Shape;195;p19">
+            <a:extLst>
+              <a:ext uri="{FF2B5EF4-FFF2-40B4-BE49-F238E27FC236}">
+                <a16:creationId xmlns:a16="http://schemas.microsoft.com/office/drawing/2014/main" id="{9E1869F0-5E5B-590C-B212-5C62FB0E8E67}"/>
+              </a:ext>
+            </a:extLst>
+          </p:cNvPr>
+          <p:cNvSpPr/>
+          <p:nvPr/>
+        </p:nvSpPr>
+        <p:spPr>
+          <a:xfrm>
+            <a:off x="15532407" y="84312"/>
+            <a:ext cx="2410800" cy="480900"/>
+          </a:xfrm>
+          <a:prstGeom prst="roundRect">
+            <a:avLst>
+              <a:gd name="adj" fmla="val 16667"/>
+            </a:avLst>
+          </a:prstGeom>
+          <a:solidFill>
+            <a:srgbClr val="F9CB9C"/>
+          </a:solidFill>
+          <a:ln w="28575" cap="flat" cmpd="sng">
+            <a:solidFill>
+              <a:srgbClr val="B45F06"/>
+            </a:solidFill>
+            <a:prstDash val="solid"/>
+            <a:round/>
+            <a:headEnd type="none" w="sm" len="sm"/>
+            <a:tailEnd type="none" w="sm" len="sm"/>
+          </a:ln>
+        </p:spPr>
+        <p:txBody>
+          <a:bodyPr spcFirstLastPara="1" wrap="square" lIns="91425" tIns="91425" rIns="91425" bIns="91425" anchor="ctr" anchorCtr="0">
+            <a:noAutofit/>
+          </a:bodyPr>
+          <a:lstStyle/>
+          <a:p>
+            <a:pPr marL="0" lvl="0" indent="0" algn="ctr" rtl="0">
+              <a:spcBef>
+                <a:spcPts val="0"/>
+              </a:spcBef>
+              <a:spcAft>
+                <a:spcPts val="0"/>
+              </a:spcAft>
+              <a:buNone/>
+            </a:pPr>
+            <a:r>
+              <a:rPr lang="en-GB" sz="1800" b="1">
+                <a:latin typeface="Consolas"/>
+                <a:ea typeface="Consolas"/>
+                <a:cs typeface="Consolas"/>
+                <a:sym typeface="Consolas"/>
+              </a:rPr>
+              <a:t>Review</a:t>
+            </a:r>
+            <a:endParaRPr sz="1800" b="1">
+              <a:latin typeface="Consolas"/>
+              <a:ea typeface="Consolas"/>
+              <a:cs typeface="Consolas"/>
+              <a:sym typeface="Consolas"/>
+            </a:endParaRPr>
+          </a:p>
+        </p:txBody>
+      </p:sp>
+      <p:sp>
+        <p:nvSpPr>
+          <p:cNvPr id="196" name="Google Shape;196;p19">
+            <a:extLst>
+              <a:ext uri="{FF2B5EF4-FFF2-40B4-BE49-F238E27FC236}">
+                <a16:creationId xmlns:a16="http://schemas.microsoft.com/office/drawing/2014/main" id="{10B6CAB3-AF2F-5483-CD6A-5822A56F13B4}"/>
+              </a:ext>
+            </a:extLst>
+          </p:cNvPr>
+          <p:cNvSpPr/>
+          <p:nvPr/>
+        </p:nvSpPr>
+        <p:spPr>
+          <a:xfrm>
+            <a:off x="18668888" y="84312"/>
+            <a:ext cx="2410800" cy="480900"/>
+          </a:xfrm>
+          <a:prstGeom prst="roundRect">
+            <a:avLst>
+              <a:gd name="adj" fmla="val 16667"/>
+            </a:avLst>
+          </a:prstGeom>
+          <a:solidFill>
+            <a:srgbClr val="F9CB9C"/>
+          </a:solidFill>
+          <a:ln w="28575" cap="flat" cmpd="sng">
+            <a:solidFill>
+              <a:srgbClr val="B45F06"/>
+            </a:solidFill>
+            <a:prstDash val="solid"/>
+            <a:round/>
+            <a:headEnd type="none" w="sm" len="sm"/>
+            <a:tailEnd type="none" w="sm" len="sm"/>
+          </a:ln>
+        </p:spPr>
+        <p:txBody>
+          <a:bodyPr spcFirstLastPara="1" wrap="square" lIns="91425" tIns="91425" rIns="91425" bIns="91425" anchor="ctr" anchorCtr="0">
+            <a:noAutofit/>
+          </a:bodyPr>
+          <a:lstStyle/>
+          <a:p>
+            <a:pPr marL="0" lvl="0" indent="0" algn="ctr" rtl="0">
+              <a:spcBef>
+                <a:spcPts val="0"/>
+              </a:spcBef>
+              <a:spcAft>
+                <a:spcPts val="0"/>
+              </a:spcAft>
+              <a:buNone/>
+            </a:pPr>
+            <a:r>
+              <a:rPr lang="en-GB" sz="1800" b="1">
+                <a:latin typeface="Consolas"/>
+                <a:ea typeface="Consolas"/>
+                <a:cs typeface="Consolas"/>
+                <a:sym typeface="Consolas"/>
+              </a:rPr>
+              <a:t>Done</a:t>
+            </a:r>
+            <a:endParaRPr sz="1800" b="1">
+              <a:latin typeface="Consolas"/>
+              <a:ea typeface="Consolas"/>
+              <a:cs typeface="Consolas"/>
+              <a:sym typeface="Consolas"/>
+            </a:endParaRPr>
+          </a:p>
+        </p:txBody>
+      </p:sp>
+      <p:sp>
+        <p:nvSpPr>
+          <p:cNvPr id="197" name="Google Shape;197;p19">
+            <a:extLst>
+              <a:ext uri="{FF2B5EF4-FFF2-40B4-BE49-F238E27FC236}">
+                <a16:creationId xmlns:a16="http://schemas.microsoft.com/office/drawing/2014/main" id="{DF087BA1-C5D2-192E-6B81-D36F6B2F911D}"/>
+              </a:ext>
+            </a:extLst>
+          </p:cNvPr>
+          <p:cNvSpPr/>
+          <p:nvPr/>
+        </p:nvSpPr>
+        <p:spPr>
+          <a:xfrm>
+            <a:off x="167288" y="84312"/>
+            <a:ext cx="2410800" cy="480900"/>
+          </a:xfrm>
+          <a:prstGeom prst="roundRect">
+            <a:avLst>
+              <a:gd name="adj" fmla="val 16667"/>
+            </a:avLst>
+          </a:prstGeom>
+          <a:solidFill>
+            <a:srgbClr val="F9CB9C"/>
+          </a:solidFill>
+          <a:ln w="28575" cap="flat" cmpd="sng">
+            <a:solidFill>
+              <a:srgbClr val="B45F06"/>
+            </a:solidFill>
+            <a:prstDash val="solid"/>
+            <a:round/>
+            <a:headEnd type="none" w="sm" len="sm"/>
+            <a:tailEnd type="none" w="sm" len="sm"/>
+          </a:ln>
+        </p:spPr>
+        <p:txBody>
+          <a:bodyPr spcFirstLastPara="1" wrap="square" lIns="91425" tIns="91425" rIns="91425" bIns="91425" anchor="ctr" anchorCtr="0">
+            <a:noAutofit/>
+          </a:bodyPr>
+          <a:lstStyle/>
+          <a:p>
+            <a:pPr marL="0" lvl="0" indent="0" algn="ctr" rtl="0">
+              <a:spcBef>
+                <a:spcPts val="0"/>
+              </a:spcBef>
+              <a:spcAft>
+                <a:spcPts val="0"/>
+              </a:spcAft>
+              <a:buNone/>
+            </a:pPr>
+            <a:r>
+              <a:rPr lang="en-GB" sz="1800" b="1">
+                <a:latin typeface="Consolas"/>
+                <a:ea typeface="Consolas"/>
+                <a:cs typeface="Consolas"/>
+                <a:sym typeface="Consolas"/>
+              </a:rPr>
+              <a:t>Backlog</a:t>
+            </a:r>
+            <a:endParaRPr sz="1800" b="1">
+              <a:latin typeface="Consolas"/>
+              <a:ea typeface="Consolas"/>
+              <a:cs typeface="Consolas"/>
+              <a:sym typeface="Consolas"/>
+            </a:endParaRPr>
+          </a:p>
+        </p:txBody>
+      </p:sp>
+      <p:cxnSp>
+        <p:nvCxnSpPr>
+          <p:cNvPr id="204" name="Google Shape;204;p19">
+            <a:extLst>
+              <a:ext uri="{FF2B5EF4-FFF2-40B4-BE49-F238E27FC236}">
+                <a16:creationId xmlns:a16="http://schemas.microsoft.com/office/drawing/2014/main" id="{2B521640-ACBC-27C7-BED0-535BDC8C8F8D}"/>
+              </a:ext>
+            </a:extLst>
+          </p:cNvPr>
+          <p:cNvCxnSpPr/>
+          <p:nvPr/>
+        </p:nvCxnSpPr>
+        <p:spPr>
+          <a:xfrm>
+            <a:off x="5607986" y="1626038"/>
+            <a:ext cx="16042200" cy="0"/>
+          </a:xfrm>
+          <a:prstGeom prst="straightConnector1">
+            <a:avLst/>
+          </a:prstGeom>
+          <a:noFill/>
+          <a:ln w="28575" cap="flat" cmpd="sng">
+            <a:solidFill>
+              <a:srgbClr val="999999"/>
+            </a:solidFill>
+            <a:prstDash val="dash"/>
+            <a:round/>
+            <a:headEnd type="none" w="med" len="med"/>
+            <a:tailEnd type="none" w="med" len="med"/>
+          </a:ln>
+        </p:spPr>
+      </p:cxnSp>
+      <p:cxnSp>
+        <p:nvCxnSpPr>
+          <p:cNvPr id="205" name="Google Shape;205;p19">
+            <a:extLst>
+              <a:ext uri="{FF2B5EF4-FFF2-40B4-BE49-F238E27FC236}">
+                <a16:creationId xmlns:a16="http://schemas.microsoft.com/office/drawing/2014/main" id="{DFEFDB1B-C7B5-C2F0-5A78-96BD9D3E15DB}"/>
+              </a:ext>
+            </a:extLst>
+          </p:cNvPr>
+          <p:cNvCxnSpPr/>
+          <p:nvPr/>
+        </p:nvCxnSpPr>
+        <p:spPr>
+          <a:xfrm>
+            <a:off x="5607986" y="3203476"/>
+            <a:ext cx="16042200" cy="0"/>
+          </a:xfrm>
+          <a:prstGeom prst="straightConnector1">
+            <a:avLst/>
+          </a:prstGeom>
+          <a:noFill/>
+          <a:ln w="28575" cap="flat" cmpd="sng">
+            <a:solidFill>
+              <a:srgbClr val="999999"/>
+            </a:solidFill>
+            <a:prstDash val="dash"/>
+            <a:round/>
+            <a:headEnd type="none" w="med" len="med"/>
+            <a:tailEnd type="none" w="med" len="med"/>
+          </a:ln>
+        </p:spPr>
+      </p:cxnSp>
+      <p:cxnSp>
+        <p:nvCxnSpPr>
+          <p:cNvPr id="206" name="Google Shape;206;p19">
+            <a:extLst>
+              <a:ext uri="{FF2B5EF4-FFF2-40B4-BE49-F238E27FC236}">
+                <a16:creationId xmlns:a16="http://schemas.microsoft.com/office/drawing/2014/main" id="{C5598281-C186-ED93-0B9E-FA71813E06BF}"/>
+              </a:ext>
+            </a:extLst>
+          </p:cNvPr>
+          <p:cNvCxnSpPr/>
+          <p:nvPr/>
+        </p:nvCxnSpPr>
+        <p:spPr>
+          <a:xfrm>
+            <a:off x="5607986" y="4777838"/>
+            <a:ext cx="16042200" cy="0"/>
+          </a:xfrm>
+          <a:prstGeom prst="straightConnector1">
+            <a:avLst/>
+          </a:prstGeom>
+          <a:noFill/>
+          <a:ln w="28575" cap="flat" cmpd="sng">
+            <a:solidFill>
+              <a:srgbClr val="999999"/>
+            </a:solidFill>
+            <a:prstDash val="dash"/>
+            <a:round/>
+            <a:headEnd type="none" w="med" len="med"/>
+            <a:tailEnd type="none" w="med" len="med"/>
+          </a:ln>
+        </p:spPr>
+      </p:cxnSp>
+      <p:cxnSp>
+        <p:nvCxnSpPr>
+          <p:cNvPr id="207" name="Google Shape;207;p19">
+            <a:extLst>
+              <a:ext uri="{FF2B5EF4-FFF2-40B4-BE49-F238E27FC236}">
+                <a16:creationId xmlns:a16="http://schemas.microsoft.com/office/drawing/2014/main" id="{B449461E-7A61-54FE-B440-D3BC861F004C}"/>
+              </a:ext>
+            </a:extLst>
+          </p:cNvPr>
+          <p:cNvCxnSpPr/>
+          <p:nvPr/>
+        </p:nvCxnSpPr>
+        <p:spPr>
+          <a:xfrm>
+            <a:off x="5607986" y="6353738"/>
+            <a:ext cx="16042200" cy="0"/>
+          </a:xfrm>
+          <a:prstGeom prst="straightConnector1">
+            <a:avLst/>
+          </a:prstGeom>
+          <a:noFill/>
+          <a:ln w="28575" cap="flat" cmpd="sng">
+            <a:solidFill>
+              <a:srgbClr val="999999"/>
+            </a:solidFill>
+            <a:prstDash val="dash"/>
+            <a:round/>
+            <a:headEnd type="none" w="med" len="med"/>
+            <a:tailEnd type="none" w="med" len="med"/>
+          </a:ln>
+        </p:spPr>
+      </p:cxnSp>
+      <p:cxnSp>
+        <p:nvCxnSpPr>
+          <p:cNvPr id="208" name="Google Shape;208;p19">
+            <a:extLst>
+              <a:ext uri="{FF2B5EF4-FFF2-40B4-BE49-F238E27FC236}">
+                <a16:creationId xmlns:a16="http://schemas.microsoft.com/office/drawing/2014/main" id="{7AE63AC8-C98F-9423-6E0B-6B9E14123968}"/>
+              </a:ext>
+            </a:extLst>
+          </p:cNvPr>
+          <p:cNvCxnSpPr/>
+          <p:nvPr/>
+        </p:nvCxnSpPr>
+        <p:spPr>
+          <a:xfrm>
+            <a:off x="5607986" y="7929638"/>
+            <a:ext cx="16042200" cy="0"/>
+          </a:xfrm>
+          <a:prstGeom prst="straightConnector1">
+            <a:avLst/>
+          </a:prstGeom>
+          <a:noFill/>
+          <a:ln w="28575" cap="flat" cmpd="sng">
+            <a:solidFill>
+              <a:srgbClr val="999999"/>
+            </a:solidFill>
+            <a:prstDash val="dash"/>
+            <a:round/>
+            <a:headEnd type="none" w="med" len="med"/>
+            <a:tailEnd type="none" w="med" len="med"/>
+          </a:ln>
+        </p:spPr>
+      </p:cxnSp>
+      <p:cxnSp>
+        <p:nvCxnSpPr>
+          <p:cNvPr id="209" name="Google Shape;209;p19">
+            <a:extLst>
+              <a:ext uri="{FF2B5EF4-FFF2-40B4-BE49-F238E27FC236}">
+                <a16:creationId xmlns:a16="http://schemas.microsoft.com/office/drawing/2014/main" id="{96C2826A-7F19-DC95-B194-FDF0D40C709D}"/>
+              </a:ext>
+            </a:extLst>
+          </p:cNvPr>
+          <p:cNvCxnSpPr/>
+          <p:nvPr/>
+        </p:nvCxnSpPr>
+        <p:spPr>
+          <a:xfrm>
+            <a:off x="5607986" y="9505538"/>
+            <a:ext cx="16042200" cy="0"/>
+          </a:xfrm>
+          <a:prstGeom prst="straightConnector1">
+            <a:avLst/>
+          </a:prstGeom>
+          <a:noFill/>
+          <a:ln w="28575" cap="flat" cmpd="sng">
+            <a:solidFill>
+              <a:srgbClr val="999999"/>
+            </a:solidFill>
+            <a:prstDash val="dash"/>
+            <a:round/>
+            <a:headEnd type="none" w="med" len="med"/>
+            <a:tailEnd type="none" w="med" len="med"/>
+          </a:ln>
+        </p:spPr>
+      </p:cxnSp>
+      <p:cxnSp>
+        <p:nvCxnSpPr>
+          <p:cNvPr id="215" name="Google Shape;215;p19">
+            <a:extLst>
+              <a:ext uri="{FF2B5EF4-FFF2-40B4-BE49-F238E27FC236}">
+                <a16:creationId xmlns:a16="http://schemas.microsoft.com/office/drawing/2014/main" id="{9C93E015-7270-C5F6-A541-70EE13764530}"/>
+              </a:ext>
+            </a:extLst>
+          </p:cNvPr>
+          <p:cNvCxnSpPr/>
+          <p:nvPr/>
+        </p:nvCxnSpPr>
+        <p:spPr>
+          <a:xfrm>
+            <a:off x="2874374" y="-28500"/>
+            <a:ext cx="0" cy="10857000"/>
+          </a:xfrm>
+          <a:prstGeom prst="straightConnector1">
+            <a:avLst/>
+          </a:prstGeom>
+          <a:noFill/>
+          <a:ln w="38100" cap="flat" cmpd="sng">
+            <a:solidFill>
+              <a:srgbClr val="5B0F00"/>
+            </a:solidFill>
+            <a:prstDash val="solid"/>
+            <a:round/>
+            <a:headEnd type="none" w="med" len="med"/>
+            <a:tailEnd type="none" w="med" len="med"/>
+          </a:ln>
+        </p:spPr>
+      </p:cxnSp>
+      <p:sp>
+        <p:nvSpPr>
+          <p:cNvPr id="2" name="Google Shape;74;p15">
+            <a:extLst>
+              <a:ext uri="{FF2B5EF4-FFF2-40B4-BE49-F238E27FC236}">
+                <a16:creationId xmlns:a16="http://schemas.microsoft.com/office/drawing/2014/main" id="{1838924A-098B-2C1A-59C6-C1A5C5FD3FD1}"/>
+              </a:ext>
+            </a:extLst>
+          </p:cNvPr>
+          <p:cNvSpPr/>
+          <p:nvPr/>
+        </p:nvSpPr>
+        <p:spPr>
+          <a:xfrm>
+            <a:off x="3197186" y="1385588"/>
+            <a:ext cx="2410800" cy="480900"/>
+          </a:xfrm>
+          <a:prstGeom prst="roundRect">
+            <a:avLst>
+              <a:gd name="adj" fmla="val 16667"/>
+            </a:avLst>
+          </a:prstGeom>
+          <a:solidFill>
+            <a:srgbClr val="E6B8AF"/>
+          </a:solidFill>
+          <a:ln w="28575" cap="flat" cmpd="sng">
+            <a:solidFill>
+              <a:srgbClr val="5B0F00"/>
+            </a:solidFill>
+            <a:prstDash val="solid"/>
+            <a:round/>
+            <a:headEnd type="none" w="sm" len="sm"/>
+            <a:tailEnd type="none" w="sm" len="sm"/>
+          </a:ln>
+        </p:spPr>
+        <p:txBody>
+          <a:bodyPr spcFirstLastPara="1" wrap="square" lIns="91425" tIns="91425" rIns="91425" bIns="91425" anchor="ctr" anchorCtr="0">
+            <a:noAutofit/>
+          </a:bodyPr>
+          <a:lstStyle/>
+          <a:p>
+            <a:pPr marL="0" lvl="0" indent="0" algn="ctr" rtl="0">
+              <a:spcBef>
+                <a:spcPts val="0"/>
+              </a:spcBef>
+              <a:spcAft>
+                <a:spcPts val="0"/>
+              </a:spcAft>
+              <a:buNone/>
+            </a:pPr>
+            <a:r>
+              <a:rPr lang="en-GB" sz="1800" b="1" dirty="0">
+                <a:latin typeface="Consolas"/>
+                <a:ea typeface="Consolas"/>
+                <a:cs typeface="Consolas"/>
+                <a:sym typeface="Consolas"/>
+              </a:rPr>
+              <a:t>68338</a:t>
+            </a:r>
+            <a:endParaRPr sz="1800" b="1" dirty="0">
+              <a:latin typeface="Consolas"/>
+              <a:ea typeface="Consolas"/>
+              <a:cs typeface="Consolas"/>
+              <a:sym typeface="Consolas"/>
+            </a:endParaRPr>
+          </a:p>
+        </p:txBody>
+      </p:sp>
+      <p:sp>
+        <p:nvSpPr>
+          <p:cNvPr id="3" name="Google Shape;75;p15">
+            <a:extLst>
+              <a:ext uri="{FF2B5EF4-FFF2-40B4-BE49-F238E27FC236}">
+                <a16:creationId xmlns:a16="http://schemas.microsoft.com/office/drawing/2014/main" id="{8FAE8CC2-9B8F-011E-0950-6AF8FC09AFDB}"/>
+              </a:ext>
+            </a:extLst>
+          </p:cNvPr>
+          <p:cNvSpPr/>
+          <p:nvPr/>
+        </p:nvSpPr>
+        <p:spPr>
+          <a:xfrm>
+            <a:off x="3197186" y="2961501"/>
+            <a:ext cx="2410800" cy="480900"/>
+          </a:xfrm>
+          <a:prstGeom prst="roundRect">
+            <a:avLst>
+              <a:gd name="adj" fmla="val 16667"/>
+            </a:avLst>
+          </a:prstGeom>
+          <a:solidFill>
+            <a:srgbClr val="E6B8AF"/>
+          </a:solidFill>
+          <a:ln w="28575" cap="flat" cmpd="sng">
+            <a:solidFill>
+              <a:srgbClr val="5B0F00"/>
+            </a:solidFill>
+            <a:prstDash val="solid"/>
+            <a:round/>
+            <a:headEnd type="none" w="sm" len="sm"/>
+            <a:tailEnd type="none" w="sm" len="sm"/>
+          </a:ln>
+        </p:spPr>
+        <p:txBody>
+          <a:bodyPr spcFirstLastPara="1" wrap="square" lIns="91425" tIns="91425" rIns="91425" bIns="91425" anchor="ctr" anchorCtr="0">
+            <a:noAutofit/>
+          </a:bodyPr>
+          <a:lstStyle/>
+          <a:p>
+            <a:pPr marL="0" lvl="0" indent="0" algn="ctr" rtl="0">
+              <a:spcBef>
+                <a:spcPts val="0"/>
+              </a:spcBef>
+              <a:spcAft>
+                <a:spcPts val="0"/>
+              </a:spcAft>
+              <a:buNone/>
+            </a:pPr>
+            <a:r>
+              <a:rPr lang="en-GB" sz="1800" b="1" dirty="0">
+                <a:latin typeface="Consolas"/>
+                <a:ea typeface="Consolas"/>
+                <a:cs typeface="Consolas"/>
+                <a:sym typeface="Consolas"/>
+              </a:rPr>
+              <a:t>68245</a:t>
+            </a:r>
+            <a:endParaRPr sz="1800" b="1" dirty="0">
+              <a:latin typeface="Consolas"/>
+              <a:ea typeface="Consolas"/>
+              <a:cs typeface="Consolas"/>
+              <a:sym typeface="Consolas"/>
+            </a:endParaRPr>
+          </a:p>
+        </p:txBody>
+      </p:sp>
+      <p:sp>
+        <p:nvSpPr>
+          <p:cNvPr id="4" name="Google Shape;76;p15">
+            <a:extLst>
+              <a:ext uri="{FF2B5EF4-FFF2-40B4-BE49-F238E27FC236}">
+                <a16:creationId xmlns:a16="http://schemas.microsoft.com/office/drawing/2014/main" id="{D614A066-B1BD-DE85-7351-F9564DCFB44B}"/>
+              </a:ext>
+            </a:extLst>
+          </p:cNvPr>
+          <p:cNvSpPr/>
+          <p:nvPr/>
+        </p:nvSpPr>
+        <p:spPr>
+          <a:xfrm>
+            <a:off x="3197186" y="4537410"/>
+            <a:ext cx="2410800" cy="480900"/>
+          </a:xfrm>
+          <a:prstGeom prst="roundRect">
+            <a:avLst>
+              <a:gd name="adj" fmla="val 16667"/>
+            </a:avLst>
+          </a:prstGeom>
+          <a:solidFill>
+            <a:srgbClr val="E6B8AF"/>
+          </a:solidFill>
+          <a:ln w="28575" cap="flat" cmpd="sng">
+            <a:solidFill>
+              <a:srgbClr val="5B0F00"/>
+            </a:solidFill>
+            <a:prstDash val="solid"/>
+            <a:round/>
+            <a:headEnd type="none" w="sm" len="sm"/>
+            <a:tailEnd type="none" w="sm" len="sm"/>
+          </a:ln>
+        </p:spPr>
+        <p:txBody>
+          <a:bodyPr spcFirstLastPara="1" wrap="square" lIns="91425" tIns="91425" rIns="91425" bIns="91425" anchor="ctr" anchorCtr="0">
+            <a:noAutofit/>
+          </a:bodyPr>
+          <a:lstStyle/>
+          <a:p>
+            <a:pPr marL="0" lvl="0" indent="0" algn="ctr" rtl="0">
+              <a:spcBef>
+                <a:spcPts val="0"/>
+              </a:spcBef>
+              <a:spcAft>
+                <a:spcPts val="0"/>
+              </a:spcAft>
+              <a:buNone/>
+            </a:pPr>
+            <a:r>
+              <a:rPr lang="en-GB" sz="1800" b="1" dirty="0">
+                <a:latin typeface="Consolas"/>
+                <a:ea typeface="Consolas"/>
+                <a:cs typeface="Consolas"/>
+                <a:sym typeface="Consolas"/>
+              </a:rPr>
+              <a:t>68725</a:t>
+            </a:r>
+            <a:endParaRPr sz="1800" b="1" dirty="0">
+              <a:latin typeface="Consolas"/>
+              <a:ea typeface="Consolas"/>
+              <a:cs typeface="Consolas"/>
+              <a:sym typeface="Consolas"/>
+            </a:endParaRPr>
+          </a:p>
+        </p:txBody>
+      </p:sp>
+      <p:sp>
+        <p:nvSpPr>
+          <p:cNvPr id="5" name="Google Shape;77;p15">
+            <a:extLst>
+              <a:ext uri="{FF2B5EF4-FFF2-40B4-BE49-F238E27FC236}">
+                <a16:creationId xmlns:a16="http://schemas.microsoft.com/office/drawing/2014/main" id="{7886D51B-9465-B92B-BB2F-6119072AB61C}"/>
+              </a:ext>
+            </a:extLst>
+          </p:cNvPr>
+          <p:cNvSpPr/>
+          <p:nvPr/>
+        </p:nvSpPr>
+        <p:spPr>
+          <a:xfrm>
+            <a:off x="3197186" y="6113307"/>
+            <a:ext cx="2410800" cy="480900"/>
+          </a:xfrm>
+          <a:prstGeom prst="roundRect">
+            <a:avLst>
+              <a:gd name="adj" fmla="val 16667"/>
+            </a:avLst>
+          </a:prstGeom>
+          <a:solidFill>
+            <a:srgbClr val="E6B8AF"/>
+          </a:solidFill>
+          <a:ln w="28575" cap="flat" cmpd="sng">
+            <a:solidFill>
+              <a:srgbClr val="5B0F00"/>
+            </a:solidFill>
+            <a:prstDash val="solid"/>
+            <a:round/>
+            <a:headEnd type="none" w="sm" len="sm"/>
+            <a:tailEnd type="none" w="sm" len="sm"/>
+          </a:ln>
+        </p:spPr>
+        <p:txBody>
+          <a:bodyPr spcFirstLastPara="1" wrap="square" lIns="91425" tIns="91425" rIns="91425" bIns="91425" anchor="ctr" anchorCtr="0">
+            <a:noAutofit/>
+          </a:bodyPr>
+          <a:lstStyle/>
+          <a:p>
+            <a:pPr marL="0" lvl="0" indent="0" algn="ctr" rtl="0">
+              <a:spcBef>
+                <a:spcPts val="0"/>
+              </a:spcBef>
+              <a:spcAft>
+                <a:spcPts val="0"/>
+              </a:spcAft>
+              <a:buNone/>
+            </a:pPr>
+            <a:r>
+              <a:rPr lang="en-GB" sz="1800" b="1" dirty="0">
+                <a:latin typeface="Consolas"/>
+                <a:ea typeface="Consolas"/>
+                <a:cs typeface="Consolas"/>
+                <a:sym typeface="Consolas"/>
+              </a:rPr>
+              <a:t>67912</a:t>
+            </a:r>
+            <a:endParaRPr sz="1800" b="1" dirty="0">
+              <a:latin typeface="Consolas"/>
+              <a:ea typeface="Consolas"/>
+              <a:cs typeface="Consolas"/>
+              <a:sym typeface="Consolas"/>
+            </a:endParaRPr>
+          </a:p>
+        </p:txBody>
+      </p:sp>
+      <p:sp>
+        <p:nvSpPr>
+          <p:cNvPr id="6" name="Google Shape;78;p15">
+            <a:extLst>
+              <a:ext uri="{FF2B5EF4-FFF2-40B4-BE49-F238E27FC236}">
+                <a16:creationId xmlns:a16="http://schemas.microsoft.com/office/drawing/2014/main" id="{C71FE21E-7A86-2434-5C3E-047D8A2E8658}"/>
+              </a:ext>
+            </a:extLst>
+          </p:cNvPr>
+          <p:cNvSpPr/>
+          <p:nvPr/>
+        </p:nvSpPr>
+        <p:spPr>
+          <a:xfrm>
+            <a:off x="3197186" y="7689198"/>
+            <a:ext cx="2410800" cy="480900"/>
+          </a:xfrm>
+          <a:prstGeom prst="roundRect">
+            <a:avLst>
+              <a:gd name="adj" fmla="val 16667"/>
+            </a:avLst>
+          </a:prstGeom>
+          <a:solidFill>
+            <a:srgbClr val="E6B8AF"/>
+          </a:solidFill>
+          <a:ln w="28575" cap="flat" cmpd="sng">
+            <a:solidFill>
+              <a:srgbClr val="5B0F00"/>
+            </a:solidFill>
+            <a:prstDash val="solid"/>
+            <a:round/>
+            <a:headEnd type="none" w="sm" len="sm"/>
+            <a:tailEnd type="none" w="sm" len="sm"/>
+          </a:ln>
+        </p:spPr>
+        <p:txBody>
+          <a:bodyPr spcFirstLastPara="1" wrap="square" lIns="91425" tIns="91425" rIns="91425" bIns="91425" anchor="ctr" anchorCtr="0">
+            <a:noAutofit/>
+          </a:bodyPr>
+          <a:lstStyle/>
+          <a:p>
+            <a:pPr marL="0" lvl="0" indent="0" algn="ctr" rtl="0">
+              <a:spcBef>
+                <a:spcPts val="0"/>
+              </a:spcBef>
+              <a:spcAft>
+                <a:spcPts val="0"/>
+              </a:spcAft>
+              <a:buNone/>
+            </a:pPr>
+            <a:r>
+              <a:rPr lang="en-GB" sz="1800" b="1" dirty="0">
+                <a:latin typeface="Consolas"/>
+                <a:ea typeface="Consolas"/>
+                <a:cs typeface="Consolas"/>
+                <a:sym typeface="Consolas"/>
+              </a:rPr>
+              <a:t>68180</a:t>
+            </a:r>
+            <a:endParaRPr sz="1800" b="1" dirty="0">
+              <a:latin typeface="Consolas"/>
+              <a:ea typeface="Consolas"/>
+              <a:cs typeface="Consolas"/>
+              <a:sym typeface="Consolas"/>
+            </a:endParaRPr>
+          </a:p>
+        </p:txBody>
+      </p:sp>
+      <p:sp>
+        <p:nvSpPr>
+          <p:cNvPr id="7" name="Google Shape;79;p15">
+            <a:extLst>
+              <a:ext uri="{FF2B5EF4-FFF2-40B4-BE49-F238E27FC236}">
+                <a16:creationId xmlns:a16="http://schemas.microsoft.com/office/drawing/2014/main" id="{489C537E-393E-7D7F-35EE-6A063860A73D}"/>
+              </a:ext>
+            </a:extLst>
+          </p:cNvPr>
+          <p:cNvSpPr/>
+          <p:nvPr/>
+        </p:nvSpPr>
+        <p:spPr>
+          <a:xfrm>
+            <a:off x="3197186" y="9265103"/>
+            <a:ext cx="2410800" cy="480900"/>
+          </a:xfrm>
+          <a:prstGeom prst="roundRect">
+            <a:avLst>
+              <a:gd name="adj" fmla="val 16667"/>
+            </a:avLst>
+          </a:prstGeom>
+          <a:solidFill>
+            <a:srgbClr val="E6B8AF"/>
+          </a:solidFill>
+          <a:ln w="28575" cap="flat" cmpd="sng">
+            <a:solidFill>
+              <a:srgbClr val="5B0F00"/>
+            </a:solidFill>
+            <a:prstDash val="solid"/>
+            <a:round/>
+            <a:headEnd type="none" w="sm" len="sm"/>
+            <a:tailEnd type="none" w="sm" len="sm"/>
+          </a:ln>
+        </p:spPr>
+        <p:txBody>
+          <a:bodyPr spcFirstLastPara="1" wrap="square" lIns="91425" tIns="91425" rIns="91425" bIns="91425" anchor="ctr" anchorCtr="0">
+            <a:noAutofit/>
+          </a:bodyPr>
+          <a:lstStyle/>
+          <a:p>
+            <a:pPr marL="0" lvl="0" indent="0" algn="ctr" rtl="0">
+              <a:spcBef>
+                <a:spcPts val="0"/>
+              </a:spcBef>
+              <a:spcAft>
+                <a:spcPts val="0"/>
+              </a:spcAft>
+              <a:buNone/>
+            </a:pPr>
+            <a:r>
+              <a:rPr lang="en-GB" sz="1800" b="1" dirty="0">
+                <a:latin typeface="Consolas"/>
+                <a:ea typeface="Consolas"/>
+                <a:cs typeface="Consolas"/>
+                <a:sym typeface="Consolas"/>
+              </a:rPr>
+              <a:t>67870</a:t>
+            </a:r>
+            <a:endParaRPr sz="1800" b="1" dirty="0">
+              <a:latin typeface="Consolas"/>
+              <a:ea typeface="Consolas"/>
+              <a:cs typeface="Consolas"/>
+              <a:sym typeface="Consolas"/>
+            </a:endParaRPr>
+          </a:p>
+        </p:txBody>
+      </p:sp>
+      <p:sp>
+        <p:nvSpPr>
+          <p:cNvPr id="10" name="Google Shape;86;p15">
+            <a:extLst>
+              <a:ext uri="{FF2B5EF4-FFF2-40B4-BE49-F238E27FC236}">
+                <a16:creationId xmlns:a16="http://schemas.microsoft.com/office/drawing/2014/main" id="{39209C63-F3EA-7B0F-E723-B8E203519A60}"/>
+              </a:ext>
+            </a:extLst>
+          </p:cNvPr>
+          <p:cNvSpPr/>
+          <p:nvPr/>
+        </p:nvSpPr>
+        <p:spPr>
+          <a:xfrm>
+            <a:off x="5839417" y="3639469"/>
+            <a:ext cx="2443410" cy="2106418"/>
+          </a:xfrm>
+          <a:prstGeom prst="roundRect">
+            <a:avLst>
+              <a:gd name="adj" fmla="val 16667"/>
+            </a:avLst>
+          </a:prstGeom>
+          <a:solidFill>
+            <a:srgbClr val="D9EAD3"/>
+          </a:solidFill>
+          <a:ln w="28575" cap="flat" cmpd="sng">
+            <a:solidFill>
+              <a:srgbClr val="274E13"/>
+            </a:solidFill>
+            <a:prstDash val="solid"/>
+            <a:round/>
+            <a:headEnd type="none" w="sm" len="sm"/>
+            <a:tailEnd type="none" w="sm" len="sm"/>
+          </a:ln>
+        </p:spPr>
+        <p:txBody>
+          <a:bodyPr spcFirstLastPara="1" wrap="square" lIns="91425" tIns="91425" rIns="91425" bIns="91425" anchor="t" anchorCtr="0">
+            <a:noAutofit/>
+          </a:bodyPr>
+          <a:lstStyle/>
+          <a:p>
+            <a:pPr lvl="0"/>
+            <a:r>
+              <a:rPr lang="en-GB" dirty="0">
+                <a:latin typeface="Consolas"/>
+                <a:ea typeface="Consolas"/>
+                <a:cs typeface="Consolas"/>
+                <a:sym typeface="Consolas"/>
+              </a:rPr>
+              <a:t>US1: Como </a:t>
+            </a:r>
+            <a:r>
+              <a:rPr lang="en-GB" dirty="0" err="1">
+                <a:latin typeface="Consolas"/>
+                <a:ea typeface="Consolas"/>
+                <a:cs typeface="Consolas"/>
+                <a:sym typeface="Consolas"/>
+              </a:rPr>
+              <a:t>membro</a:t>
+            </a:r>
+            <a:r>
+              <a:rPr lang="en-GB" dirty="0">
+                <a:latin typeface="Consolas"/>
+                <a:ea typeface="Consolas"/>
+                <a:cs typeface="Consolas"/>
+                <a:sym typeface="Consolas"/>
+              </a:rPr>
+              <a:t> da </a:t>
+            </a:r>
+            <a:r>
+              <a:rPr lang="en-GB" dirty="0" err="1">
+                <a:latin typeface="Consolas"/>
+                <a:ea typeface="Consolas"/>
+                <a:cs typeface="Consolas"/>
+                <a:sym typeface="Consolas"/>
+              </a:rPr>
+              <a:t>equipa</a:t>
+            </a:r>
+            <a:r>
+              <a:rPr lang="en-GB" dirty="0">
+                <a:latin typeface="Consolas"/>
+                <a:ea typeface="Consolas"/>
+                <a:cs typeface="Consolas"/>
+                <a:sym typeface="Consolas"/>
+              </a:rPr>
+              <a:t> </a:t>
+            </a:r>
+            <a:r>
+              <a:rPr lang="en-GB" dirty="0" err="1">
+                <a:latin typeface="Consolas"/>
+                <a:ea typeface="Consolas"/>
+                <a:cs typeface="Consolas"/>
+                <a:sym typeface="Consolas"/>
+              </a:rPr>
+              <a:t>quero</a:t>
+            </a:r>
+            <a:r>
+              <a:rPr lang="en-GB" dirty="0">
+                <a:latin typeface="Consolas"/>
+                <a:ea typeface="Consolas"/>
+                <a:cs typeface="Consolas"/>
+                <a:sym typeface="Consolas"/>
+              </a:rPr>
+              <a:t> </a:t>
+            </a:r>
+            <a:r>
+              <a:rPr lang="pt-PT" dirty="0">
+                <a:latin typeface="Consolas"/>
+                <a:ea typeface="Consolas"/>
+                <a:cs typeface="Consolas"/>
+                <a:sym typeface="Consolas"/>
+              </a:rPr>
+              <a:t>terminar tsunami e earthquake spawners, no que toca às suas animações bem como alguma lógica de movimento de “builds”.</a:t>
+            </a:r>
+            <a:endParaRPr dirty="0">
+              <a:latin typeface="Consolas"/>
+              <a:ea typeface="Consolas"/>
+              <a:cs typeface="Consolas"/>
+              <a:sym typeface="Consolas"/>
+            </a:endParaRPr>
+          </a:p>
+        </p:txBody>
+      </p:sp>
+      <p:sp>
+        <p:nvSpPr>
+          <p:cNvPr id="11" name="Google Shape;92;p15">
+            <a:extLst>
+              <a:ext uri="{FF2B5EF4-FFF2-40B4-BE49-F238E27FC236}">
+                <a16:creationId xmlns:a16="http://schemas.microsoft.com/office/drawing/2014/main" id="{AF87CD37-A0ED-7E4E-AF7C-314DFD4CEB2F}"/>
+              </a:ext>
+            </a:extLst>
+          </p:cNvPr>
+          <p:cNvSpPr/>
+          <p:nvPr/>
+        </p:nvSpPr>
+        <p:spPr>
+          <a:xfrm>
+            <a:off x="5839417" y="5783003"/>
+            <a:ext cx="2443410" cy="1843569"/>
+          </a:xfrm>
+          <a:prstGeom prst="roundRect">
+            <a:avLst>
+              <a:gd name="adj" fmla="val 16667"/>
+            </a:avLst>
+          </a:prstGeom>
+          <a:solidFill>
+            <a:srgbClr val="D9EAD3"/>
+          </a:solidFill>
+          <a:ln w="28575" cap="flat" cmpd="sng">
+            <a:solidFill>
+              <a:srgbClr val="274E13"/>
+            </a:solidFill>
+            <a:prstDash val="solid"/>
+            <a:round/>
+            <a:headEnd type="none" w="sm" len="sm"/>
+            <a:tailEnd type="none" w="sm" len="sm"/>
+          </a:ln>
+        </p:spPr>
+        <p:txBody>
+          <a:bodyPr spcFirstLastPara="1" wrap="square" lIns="91425" tIns="91425" rIns="91425" bIns="91425" anchor="t" anchorCtr="0">
+            <a:noAutofit/>
+          </a:bodyPr>
+          <a:lstStyle/>
+          <a:p>
+            <a:pPr lvl="0"/>
+            <a:r>
+              <a:rPr lang="en-GB" dirty="0">
+                <a:latin typeface="Consolas"/>
+                <a:ea typeface="Consolas"/>
+                <a:cs typeface="Consolas"/>
+                <a:sym typeface="Consolas"/>
+              </a:rPr>
+              <a:t>US2: Como </a:t>
+            </a:r>
+            <a:r>
+              <a:rPr lang="en-GB" dirty="0" err="1">
+                <a:latin typeface="Consolas"/>
+                <a:ea typeface="Consolas"/>
+                <a:cs typeface="Consolas"/>
+                <a:sym typeface="Consolas"/>
+              </a:rPr>
+              <a:t>membro</a:t>
+            </a:r>
+            <a:r>
+              <a:rPr lang="en-GB" dirty="0">
+                <a:latin typeface="Consolas"/>
+                <a:ea typeface="Consolas"/>
+                <a:cs typeface="Consolas"/>
+                <a:sym typeface="Consolas"/>
+              </a:rPr>
+              <a:t> da </a:t>
+            </a:r>
+            <a:r>
+              <a:rPr lang="en-GB" dirty="0" err="1">
+                <a:latin typeface="Consolas"/>
+                <a:ea typeface="Consolas"/>
+                <a:cs typeface="Consolas"/>
+                <a:sym typeface="Consolas"/>
+              </a:rPr>
+              <a:t>equipa</a:t>
+            </a:r>
+            <a:r>
+              <a:rPr lang="en-GB" dirty="0">
+                <a:latin typeface="Consolas"/>
+                <a:ea typeface="Consolas"/>
+                <a:cs typeface="Consolas"/>
+                <a:sym typeface="Consolas"/>
+              </a:rPr>
+              <a:t> </a:t>
+            </a:r>
+            <a:r>
+              <a:rPr lang="en-GB" dirty="0" err="1">
+                <a:latin typeface="Consolas"/>
+                <a:ea typeface="Consolas"/>
+                <a:cs typeface="Consolas"/>
+                <a:sym typeface="Consolas"/>
+              </a:rPr>
+              <a:t>quero</a:t>
+            </a:r>
+            <a:r>
+              <a:rPr lang="en-GB" dirty="0">
+                <a:latin typeface="Consolas"/>
+                <a:ea typeface="Consolas"/>
+                <a:cs typeface="Consolas"/>
+                <a:sym typeface="Consolas"/>
+              </a:rPr>
+              <a:t> f</a:t>
+            </a:r>
+            <a:r>
+              <a:rPr lang="pt-PT" dirty="0">
+                <a:latin typeface="Consolas"/>
+                <a:ea typeface="Consolas"/>
+                <a:cs typeface="Consolas"/>
+                <a:sym typeface="Consolas"/>
+              </a:rPr>
+              <a:t>azer uma abstract class que ligue as 3 catastrofes naturais, para melhorar a qualidade do código.</a:t>
+            </a:r>
+            <a:endParaRPr dirty="0">
+              <a:latin typeface="Consolas"/>
+              <a:ea typeface="Consolas"/>
+              <a:cs typeface="Consolas"/>
+              <a:sym typeface="Consolas"/>
+            </a:endParaRPr>
+          </a:p>
+        </p:txBody>
+      </p:sp>
+      <p:sp>
+        <p:nvSpPr>
+          <p:cNvPr id="8" name="Google Shape;92;p15">
+            <a:extLst>
+              <a:ext uri="{FF2B5EF4-FFF2-40B4-BE49-F238E27FC236}">
+                <a16:creationId xmlns:a16="http://schemas.microsoft.com/office/drawing/2014/main" id="{EA84CFE8-5331-7231-9E1A-C692D1681A2C}"/>
+              </a:ext>
+            </a:extLst>
+          </p:cNvPr>
+          <p:cNvSpPr/>
+          <p:nvPr/>
+        </p:nvSpPr>
+        <p:spPr>
+          <a:xfrm>
+            <a:off x="5839417" y="768737"/>
+            <a:ext cx="2398246" cy="2817311"/>
+          </a:xfrm>
+          <a:prstGeom prst="roundRect">
+            <a:avLst>
+              <a:gd name="adj" fmla="val 16667"/>
+            </a:avLst>
+          </a:prstGeom>
+          <a:solidFill>
+            <a:srgbClr val="D9EAD3"/>
+          </a:solidFill>
+          <a:ln w="28575" cap="flat" cmpd="sng">
+            <a:solidFill>
+              <a:srgbClr val="274E13"/>
+            </a:solidFill>
+            <a:prstDash val="solid"/>
+            <a:round/>
+            <a:headEnd type="none" w="sm" len="sm"/>
+            <a:tailEnd type="none" w="sm" len="sm"/>
+          </a:ln>
+        </p:spPr>
+        <p:txBody>
+          <a:bodyPr spcFirstLastPara="1" wrap="square" lIns="91425" tIns="91425" rIns="91425" bIns="91425" anchor="t" anchorCtr="0">
+            <a:noAutofit/>
+          </a:bodyPr>
+          <a:lstStyle/>
+          <a:p>
+            <a:pPr lvl="0"/>
+            <a:r>
+              <a:rPr lang="en-GB" dirty="0">
+                <a:latin typeface="Consolas"/>
+                <a:ea typeface="Consolas"/>
+                <a:cs typeface="Consolas"/>
+                <a:sym typeface="Consolas"/>
+              </a:rPr>
+              <a:t>US3: Como </a:t>
+            </a:r>
+            <a:r>
+              <a:rPr lang="en-GB" dirty="0" err="1">
+                <a:latin typeface="Consolas"/>
+                <a:ea typeface="Consolas"/>
+                <a:cs typeface="Consolas"/>
+                <a:sym typeface="Consolas"/>
+              </a:rPr>
+              <a:t>membro</a:t>
+            </a:r>
+            <a:r>
+              <a:rPr lang="en-GB" dirty="0">
+                <a:latin typeface="Consolas"/>
+                <a:ea typeface="Consolas"/>
+                <a:cs typeface="Consolas"/>
+                <a:sym typeface="Consolas"/>
+              </a:rPr>
+              <a:t> da </a:t>
+            </a:r>
+            <a:r>
+              <a:rPr lang="en-GB" dirty="0" err="1">
+                <a:latin typeface="Consolas"/>
+                <a:ea typeface="Consolas"/>
+                <a:cs typeface="Consolas"/>
+                <a:sym typeface="Consolas"/>
+              </a:rPr>
+              <a:t>equipa</a:t>
+            </a:r>
+            <a:r>
+              <a:rPr lang="en-GB" dirty="0">
+                <a:latin typeface="Consolas"/>
+                <a:ea typeface="Consolas"/>
+                <a:cs typeface="Consolas"/>
+                <a:sym typeface="Consolas"/>
+              </a:rPr>
+              <a:t> </a:t>
+            </a:r>
+            <a:r>
+              <a:rPr lang="en-GB" dirty="0" err="1">
+                <a:latin typeface="Consolas"/>
+                <a:ea typeface="Consolas"/>
+                <a:cs typeface="Consolas"/>
+                <a:sym typeface="Consolas"/>
+              </a:rPr>
+              <a:t>quero</a:t>
+            </a:r>
+            <a:r>
+              <a:rPr lang="en-GB" dirty="0">
+                <a:latin typeface="Consolas"/>
+                <a:ea typeface="Consolas"/>
+                <a:cs typeface="Consolas"/>
+                <a:sym typeface="Consolas"/>
+              </a:rPr>
+              <a:t> a</a:t>
+            </a:r>
+            <a:r>
+              <a:rPr lang="pt-PT" dirty="0">
+                <a:latin typeface="Consolas"/>
+                <a:ea typeface="Consolas"/>
+                <a:cs typeface="Consolas"/>
+                <a:sym typeface="Consolas"/>
+              </a:rPr>
+              <a:t>plicar sistema de ranking baseado nas waves derrotadas ecriar uma interface apelativa para o jogador, bem como finalizar as waves do modo semanal.</a:t>
+            </a:r>
+            <a:r>
+              <a:rPr lang="en-GB" dirty="0">
+                <a:latin typeface="Consolas"/>
+                <a:ea typeface="Consolas"/>
+                <a:cs typeface="Consolas"/>
+                <a:sym typeface="Consolas"/>
+              </a:rPr>
+              <a:t> </a:t>
+            </a:r>
+            <a:endParaRPr dirty="0">
+              <a:latin typeface="Consolas"/>
+              <a:ea typeface="Consolas"/>
+              <a:cs typeface="Consolas"/>
+              <a:sym typeface="Consolas"/>
+            </a:endParaRPr>
+          </a:p>
+        </p:txBody>
+      </p:sp>
+      <p:sp>
+        <p:nvSpPr>
+          <p:cNvPr id="23" name="Google Shape;121;p16">
+            <a:extLst>
+              <a:ext uri="{FF2B5EF4-FFF2-40B4-BE49-F238E27FC236}">
+                <a16:creationId xmlns:a16="http://schemas.microsoft.com/office/drawing/2014/main" id="{38C0A21B-D771-9F48-5406-2D717AECE14D}"/>
+              </a:ext>
+            </a:extLst>
+          </p:cNvPr>
+          <p:cNvSpPr/>
+          <p:nvPr/>
+        </p:nvSpPr>
+        <p:spPr>
+          <a:xfrm>
+            <a:off x="18744555" y="3733376"/>
+            <a:ext cx="2449608" cy="1729878"/>
+          </a:xfrm>
+          <a:prstGeom prst="roundRect">
+            <a:avLst>
+              <a:gd name="adj" fmla="val 16667"/>
+            </a:avLst>
+          </a:prstGeom>
+          <a:solidFill>
+            <a:srgbClr val="D0E0E3"/>
+          </a:solidFill>
+          <a:ln w="28575" cap="flat" cmpd="sng">
+            <a:solidFill>
+              <a:srgbClr val="134F5C"/>
+            </a:solidFill>
+            <a:prstDash val="solid"/>
+            <a:round/>
+            <a:headEnd type="none" w="sm" len="sm"/>
+            <a:tailEnd type="none" w="sm" len="sm"/>
+          </a:ln>
+        </p:spPr>
+        <p:txBody>
+          <a:bodyPr spcFirstLastPara="1" wrap="square" lIns="91425" tIns="91425" rIns="91425" bIns="91425" anchor="t" anchorCtr="0">
+            <a:noAutofit/>
+          </a:bodyPr>
+          <a:lstStyle/>
+          <a:p>
+            <a:pPr lvl="0"/>
+            <a:r>
+              <a:rPr lang="en-US" dirty="0">
+                <a:latin typeface="Consolas"/>
+                <a:ea typeface="Consolas"/>
+                <a:cs typeface="Consolas"/>
+                <a:sym typeface="Consolas"/>
+              </a:rPr>
+              <a:t>T1: </a:t>
+            </a:r>
+            <a:r>
+              <a:rPr lang="en-US" dirty="0" err="1">
+                <a:latin typeface="Consolas"/>
+                <a:ea typeface="Consolas"/>
+                <a:cs typeface="Consolas"/>
+                <a:sym typeface="Consolas"/>
+              </a:rPr>
+              <a:t>Terminar</a:t>
+            </a:r>
+            <a:r>
+              <a:rPr lang="en-US" dirty="0">
+                <a:latin typeface="Consolas"/>
+                <a:ea typeface="Consolas"/>
+                <a:cs typeface="Consolas"/>
+                <a:sym typeface="Consolas"/>
+              </a:rPr>
+              <a:t> tsunami e earthquake spawners.</a:t>
+            </a:r>
+            <a:br>
+              <a:rPr lang="en-GB" dirty="0">
+                <a:latin typeface="Consolas"/>
+                <a:ea typeface="Consolas"/>
+                <a:cs typeface="Consolas"/>
+                <a:sym typeface="Consolas"/>
+              </a:rPr>
+            </a:br>
+            <a:endParaRPr lang="en-GB" dirty="0">
+              <a:latin typeface="Consolas"/>
+              <a:ea typeface="Consolas"/>
+              <a:cs typeface="Consolas"/>
+              <a:sym typeface="Consolas"/>
+            </a:endParaRPr>
+          </a:p>
+          <a:p>
+            <a:r>
+              <a:rPr lang="en-GB" dirty="0">
+                <a:latin typeface="Consolas"/>
+                <a:ea typeface="Consolas"/>
+                <a:cs typeface="Consolas"/>
+                <a:sym typeface="Consolas"/>
+              </a:rPr>
+              <a:t>T5: Acabar as </a:t>
+            </a:r>
+            <a:r>
+              <a:rPr lang="en-GB" dirty="0" err="1">
+                <a:latin typeface="Consolas"/>
+                <a:ea typeface="Consolas"/>
+                <a:cs typeface="Consolas"/>
+                <a:sym typeface="Consolas"/>
+              </a:rPr>
+              <a:t>tarefas</a:t>
+            </a:r>
+            <a:r>
+              <a:rPr lang="en-GB" dirty="0">
+                <a:latin typeface="Consolas"/>
+                <a:ea typeface="Consolas"/>
+                <a:cs typeface="Consolas"/>
+                <a:sym typeface="Consolas"/>
+              </a:rPr>
+              <a:t> do milestone3.</a:t>
+            </a:r>
+          </a:p>
+          <a:p>
+            <a:pPr marL="0" lvl="0" indent="0" algn="l" rtl="0">
+              <a:spcBef>
+                <a:spcPts val="0"/>
+              </a:spcBef>
+              <a:spcAft>
+                <a:spcPts val="0"/>
+              </a:spcAft>
+              <a:buNone/>
+            </a:pPr>
+            <a:endParaRPr dirty="0">
+              <a:latin typeface="Consolas"/>
+              <a:ea typeface="Consolas"/>
+              <a:cs typeface="Consolas"/>
+              <a:sym typeface="Consolas"/>
+            </a:endParaRPr>
+          </a:p>
+        </p:txBody>
+      </p:sp>
+      <p:sp>
+        <p:nvSpPr>
+          <p:cNvPr id="12" name="Google Shape;121;p16">
+            <a:extLst>
+              <a:ext uri="{FF2B5EF4-FFF2-40B4-BE49-F238E27FC236}">
+                <a16:creationId xmlns:a16="http://schemas.microsoft.com/office/drawing/2014/main" id="{3E13DAE9-6EB6-D15B-D9B4-C7703617DBFF}"/>
+              </a:ext>
+            </a:extLst>
+          </p:cNvPr>
+          <p:cNvSpPr/>
+          <p:nvPr/>
+        </p:nvSpPr>
+        <p:spPr>
+          <a:xfrm>
+            <a:off x="18763959" y="5573260"/>
+            <a:ext cx="2410800" cy="1926176"/>
+          </a:xfrm>
+          <a:prstGeom prst="roundRect">
+            <a:avLst>
+              <a:gd name="adj" fmla="val 16667"/>
+            </a:avLst>
+          </a:prstGeom>
+          <a:solidFill>
+            <a:srgbClr val="D0E0E3"/>
+          </a:solidFill>
+          <a:ln w="28575" cap="flat" cmpd="sng">
+            <a:solidFill>
+              <a:srgbClr val="134F5C"/>
+            </a:solidFill>
+            <a:prstDash val="solid"/>
+            <a:round/>
+            <a:headEnd type="none" w="sm" len="sm"/>
+            <a:tailEnd type="none" w="sm" len="sm"/>
+          </a:ln>
+        </p:spPr>
+        <p:txBody>
+          <a:bodyPr spcFirstLastPara="1" wrap="square" lIns="91425" tIns="91425" rIns="91425" bIns="91425" anchor="t" anchorCtr="0">
+            <a:noAutofit/>
+          </a:bodyPr>
+          <a:lstStyle/>
+          <a:p>
+            <a:pPr lvl="0"/>
+            <a:r>
+              <a:rPr lang="pt-PT" dirty="0">
+                <a:latin typeface="Consolas"/>
+                <a:ea typeface="Consolas"/>
+                <a:cs typeface="Consolas"/>
+                <a:sym typeface="Consolas"/>
+              </a:rPr>
+              <a:t>T2: Fazer abstract class para as catastrofes naturais.</a:t>
+            </a:r>
+            <a:br>
+              <a:rPr lang="en-GB" dirty="0">
+                <a:latin typeface="Consolas"/>
+                <a:ea typeface="Consolas"/>
+                <a:cs typeface="Consolas"/>
+                <a:sym typeface="Consolas"/>
+              </a:rPr>
+            </a:br>
+            <a:endParaRPr lang="en-GB" dirty="0">
+              <a:latin typeface="Consolas"/>
+              <a:ea typeface="Consolas"/>
+              <a:cs typeface="Consolas"/>
+              <a:sym typeface="Consolas"/>
+            </a:endParaRPr>
+          </a:p>
+          <a:p>
+            <a:r>
+              <a:rPr lang="en-GB" dirty="0">
+                <a:latin typeface="Consolas"/>
+                <a:ea typeface="Consolas"/>
+                <a:cs typeface="Consolas"/>
+                <a:sym typeface="Consolas"/>
+              </a:rPr>
+              <a:t>T5: Acabar as </a:t>
+            </a:r>
+            <a:r>
+              <a:rPr lang="en-GB" dirty="0" err="1">
+                <a:latin typeface="Consolas"/>
+                <a:ea typeface="Consolas"/>
+                <a:cs typeface="Consolas"/>
+                <a:sym typeface="Consolas"/>
+              </a:rPr>
+              <a:t>tarefas</a:t>
+            </a:r>
+            <a:r>
+              <a:rPr lang="en-GB" dirty="0">
+                <a:latin typeface="Consolas"/>
+                <a:ea typeface="Consolas"/>
+                <a:cs typeface="Consolas"/>
+                <a:sym typeface="Consolas"/>
+              </a:rPr>
+              <a:t> do milestone3.</a:t>
+            </a:r>
+          </a:p>
+          <a:p>
+            <a:pPr lvl="0"/>
+            <a:endParaRPr lang="en-GB" dirty="0">
+              <a:latin typeface="Consolas"/>
+              <a:ea typeface="Consolas"/>
+              <a:cs typeface="Consolas"/>
+              <a:sym typeface="Consolas"/>
+            </a:endParaRPr>
+          </a:p>
+          <a:p>
+            <a:pPr marL="0" lvl="0" indent="0" algn="l" rtl="0">
+              <a:spcBef>
+                <a:spcPts val="0"/>
+              </a:spcBef>
+              <a:spcAft>
+                <a:spcPts val="0"/>
+              </a:spcAft>
+              <a:buNone/>
+            </a:pPr>
+            <a:endParaRPr dirty="0">
+              <a:latin typeface="Consolas"/>
+              <a:ea typeface="Consolas"/>
+              <a:cs typeface="Consolas"/>
+              <a:sym typeface="Consolas"/>
+            </a:endParaRPr>
+          </a:p>
+        </p:txBody>
+      </p:sp>
+      <p:sp>
+        <p:nvSpPr>
+          <p:cNvPr id="13" name="Google Shape;121;p16">
+            <a:extLst>
+              <a:ext uri="{FF2B5EF4-FFF2-40B4-BE49-F238E27FC236}">
+                <a16:creationId xmlns:a16="http://schemas.microsoft.com/office/drawing/2014/main" id="{53DD130E-0E2F-1F19-5C00-3B67D2BC462B}"/>
+              </a:ext>
+            </a:extLst>
+          </p:cNvPr>
+          <p:cNvSpPr/>
+          <p:nvPr/>
+        </p:nvSpPr>
+        <p:spPr>
+          <a:xfrm>
+            <a:off x="18725151" y="1173063"/>
+            <a:ext cx="2410800" cy="2364426"/>
+          </a:xfrm>
+          <a:prstGeom prst="roundRect">
+            <a:avLst>
+              <a:gd name="adj" fmla="val 16667"/>
+            </a:avLst>
+          </a:prstGeom>
+          <a:solidFill>
+            <a:srgbClr val="D0E0E3"/>
+          </a:solidFill>
+          <a:ln w="28575" cap="flat" cmpd="sng">
+            <a:solidFill>
+              <a:srgbClr val="134F5C"/>
+            </a:solidFill>
+            <a:prstDash val="solid"/>
+            <a:round/>
+            <a:headEnd type="none" w="sm" len="sm"/>
+            <a:tailEnd type="none" w="sm" len="sm"/>
+          </a:ln>
+        </p:spPr>
+        <p:txBody>
+          <a:bodyPr spcFirstLastPara="1" wrap="square" lIns="91425" tIns="91425" rIns="91425" bIns="91425" anchor="t" anchorCtr="0">
+            <a:noAutofit/>
+          </a:bodyPr>
+          <a:lstStyle/>
+          <a:p>
+            <a:pPr lvl="0"/>
+            <a:r>
+              <a:rPr lang="pt-PT" dirty="0">
+                <a:latin typeface="Consolas"/>
+                <a:ea typeface="Consolas"/>
+                <a:cs typeface="Consolas"/>
+                <a:sym typeface="Consolas"/>
+              </a:rPr>
+              <a:t>T3: Aplicar sistema de ranking e finalizar as waves do mode semanal.</a:t>
+            </a:r>
+          </a:p>
+          <a:p>
+            <a:pPr marL="0" lvl="0" indent="0" algn="l" rtl="0">
+              <a:spcBef>
+                <a:spcPts val="0"/>
+              </a:spcBef>
+              <a:spcAft>
+                <a:spcPts val="0"/>
+              </a:spcAft>
+              <a:buNone/>
+            </a:pPr>
+            <a:endParaRPr lang="en-GB" dirty="0">
+              <a:latin typeface="Consolas"/>
+              <a:ea typeface="Consolas"/>
+              <a:cs typeface="Consolas"/>
+              <a:sym typeface="Consolas"/>
+            </a:endParaRPr>
+          </a:p>
+          <a:p>
+            <a:pPr lvl="0"/>
+            <a:r>
+              <a:rPr lang="en-GB" dirty="0">
+                <a:latin typeface="Consolas"/>
+                <a:ea typeface="Consolas"/>
+                <a:cs typeface="Consolas"/>
+                <a:sym typeface="Consolas"/>
+              </a:rPr>
+              <a:t>T5: Acabar as </a:t>
+            </a:r>
+            <a:r>
+              <a:rPr lang="en-GB" dirty="0" err="1">
+                <a:latin typeface="Consolas"/>
+                <a:ea typeface="Consolas"/>
+                <a:cs typeface="Consolas"/>
+                <a:sym typeface="Consolas"/>
+              </a:rPr>
+              <a:t>tarefas</a:t>
+            </a:r>
+            <a:r>
+              <a:rPr lang="en-GB" dirty="0">
+                <a:latin typeface="Consolas"/>
+                <a:ea typeface="Consolas"/>
+                <a:cs typeface="Consolas"/>
+                <a:sym typeface="Consolas"/>
+              </a:rPr>
+              <a:t> do milestone3.</a:t>
+            </a:r>
+          </a:p>
+          <a:p>
+            <a:pPr marL="0" lvl="0" indent="0" algn="l" rtl="0">
+              <a:spcBef>
+                <a:spcPts val="0"/>
+              </a:spcBef>
+              <a:spcAft>
+                <a:spcPts val="0"/>
+              </a:spcAft>
+              <a:buNone/>
+            </a:pPr>
+            <a:br>
+              <a:rPr lang="en-GB" dirty="0">
+                <a:latin typeface="Consolas"/>
+                <a:ea typeface="Consolas"/>
+                <a:cs typeface="Consolas"/>
+                <a:sym typeface="Consolas"/>
+              </a:rPr>
+            </a:br>
+            <a:endParaRPr lang="en-GB" dirty="0">
+              <a:latin typeface="Consolas"/>
+              <a:ea typeface="Consolas"/>
+              <a:cs typeface="Consolas"/>
+              <a:sym typeface="Consolas"/>
+            </a:endParaRPr>
+          </a:p>
+          <a:p>
+            <a:pPr marL="0" lvl="0" indent="0" algn="l" rtl="0">
+              <a:spcBef>
+                <a:spcPts val="0"/>
+              </a:spcBef>
+              <a:spcAft>
+                <a:spcPts val="0"/>
+              </a:spcAft>
+              <a:buNone/>
+            </a:pPr>
+            <a:endParaRPr dirty="0">
+              <a:latin typeface="Consolas"/>
+              <a:ea typeface="Consolas"/>
+              <a:cs typeface="Consolas"/>
+              <a:sym typeface="Consolas"/>
+            </a:endParaRPr>
+          </a:p>
+        </p:txBody>
+      </p:sp>
+      <p:sp>
+        <p:nvSpPr>
+          <p:cNvPr id="14" name="Google Shape;121;p16">
+            <a:extLst>
+              <a:ext uri="{FF2B5EF4-FFF2-40B4-BE49-F238E27FC236}">
+                <a16:creationId xmlns:a16="http://schemas.microsoft.com/office/drawing/2014/main" id="{1CBF505A-F69D-739D-FD7C-0A6A5E20C3D3}"/>
+              </a:ext>
+            </a:extLst>
+          </p:cNvPr>
+          <p:cNvSpPr/>
+          <p:nvPr/>
+        </p:nvSpPr>
+        <p:spPr>
+          <a:xfrm>
+            <a:off x="18744555" y="7644970"/>
+            <a:ext cx="2410800" cy="2056805"/>
+          </a:xfrm>
+          <a:prstGeom prst="roundRect">
+            <a:avLst>
+              <a:gd name="adj" fmla="val 16667"/>
+            </a:avLst>
+          </a:prstGeom>
+          <a:solidFill>
+            <a:srgbClr val="D0E0E3"/>
+          </a:solidFill>
+          <a:ln w="28575" cap="flat" cmpd="sng">
+            <a:solidFill>
+              <a:srgbClr val="134F5C"/>
+            </a:solidFill>
+            <a:prstDash val="solid"/>
+            <a:round/>
+            <a:headEnd type="none" w="sm" len="sm"/>
+            <a:tailEnd type="none" w="sm" len="sm"/>
+          </a:ln>
+        </p:spPr>
+        <p:txBody>
+          <a:bodyPr spcFirstLastPara="1" wrap="square" lIns="91425" tIns="91425" rIns="91425" bIns="91425" anchor="t" anchorCtr="0">
+            <a:noAutofit/>
+          </a:bodyPr>
+          <a:lstStyle/>
+          <a:p>
+            <a:pPr lvl="0"/>
+            <a:r>
+              <a:rPr lang="pt-PT" dirty="0">
+                <a:latin typeface="Consolas"/>
+                <a:ea typeface="Consolas"/>
+                <a:cs typeface="Consolas"/>
+                <a:sym typeface="Consolas"/>
+              </a:rPr>
+              <a:t>T4: Fazer resource trader bot feature.</a:t>
+            </a:r>
+          </a:p>
+          <a:p>
+            <a:pPr lvl="0"/>
+            <a:endParaRPr lang="pt-PT" dirty="0">
+              <a:latin typeface="Consolas"/>
+              <a:ea typeface="Consolas"/>
+              <a:cs typeface="Consolas"/>
+              <a:sym typeface="Consolas"/>
+            </a:endParaRPr>
+          </a:p>
+          <a:p>
+            <a:r>
+              <a:rPr lang="en-GB" dirty="0">
+                <a:latin typeface="Consolas"/>
+                <a:ea typeface="Consolas"/>
+                <a:cs typeface="Consolas"/>
+                <a:sym typeface="Consolas"/>
+              </a:rPr>
+              <a:t>T5: Acabar as </a:t>
+            </a:r>
+            <a:r>
+              <a:rPr lang="en-GB" dirty="0" err="1">
+                <a:latin typeface="Consolas"/>
+                <a:ea typeface="Consolas"/>
+                <a:cs typeface="Consolas"/>
+                <a:sym typeface="Consolas"/>
+              </a:rPr>
+              <a:t>tarefas</a:t>
+            </a:r>
+            <a:r>
+              <a:rPr lang="en-GB" dirty="0">
+                <a:latin typeface="Consolas"/>
+                <a:ea typeface="Consolas"/>
+                <a:cs typeface="Consolas"/>
+                <a:sym typeface="Consolas"/>
+              </a:rPr>
+              <a:t> do milestone3.</a:t>
+            </a:r>
+          </a:p>
+          <a:p>
+            <a:pPr marL="0" lvl="0" indent="0" algn="l" rtl="0">
+              <a:spcBef>
+                <a:spcPts val="0"/>
+              </a:spcBef>
+              <a:spcAft>
+                <a:spcPts val="0"/>
+              </a:spcAft>
+              <a:buNone/>
+            </a:pPr>
+            <a:br>
+              <a:rPr lang="en-GB" dirty="0">
+                <a:latin typeface="Consolas"/>
+                <a:ea typeface="Consolas"/>
+                <a:cs typeface="Consolas"/>
+                <a:sym typeface="Consolas"/>
+              </a:rPr>
+            </a:br>
+            <a:br>
+              <a:rPr lang="en-GB" dirty="0">
+                <a:latin typeface="Consolas"/>
+                <a:ea typeface="Consolas"/>
+                <a:cs typeface="Consolas"/>
+                <a:sym typeface="Consolas"/>
+              </a:rPr>
+            </a:br>
+            <a:endParaRPr lang="en-GB" dirty="0">
+              <a:latin typeface="Consolas"/>
+              <a:ea typeface="Consolas"/>
+              <a:cs typeface="Consolas"/>
+              <a:sym typeface="Consolas"/>
+            </a:endParaRPr>
+          </a:p>
+          <a:p>
+            <a:pPr marL="0" lvl="0" indent="0" algn="l" rtl="0">
+              <a:spcBef>
+                <a:spcPts val="0"/>
+              </a:spcBef>
+              <a:spcAft>
+                <a:spcPts val="0"/>
+              </a:spcAft>
+              <a:buNone/>
+            </a:pPr>
+            <a:endParaRPr dirty="0">
+              <a:latin typeface="Consolas"/>
+              <a:ea typeface="Consolas"/>
+              <a:cs typeface="Consolas"/>
+              <a:sym typeface="Consolas"/>
+            </a:endParaRPr>
+          </a:p>
+        </p:txBody>
+      </p:sp>
+      <p:sp>
+        <p:nvSpPr>
+          <p:cNvPr id="19" name="Google Shape;92;p15">
+            <a:extLst>
+              <a:ext uri="{FF2B5EF4-FFF2-40B4-BE49-F238E27FC236}">
+                <a16:creationId xmlns:a16="http://schemas.microsoft.com/office/drawing/2014/main" id="{50E12F45-982C-11AE-FEEF-80433E78BDD6}"/>
+              </a:ext>
+            </a:extLst>
+          </p:cNvPr>
+          <p:cNvSpPr/>
+          <p:nvPr/>
+        </p:nvSpPr>
+        <p:spPr>
+          <a:xfrm>
+            <a:off x="5863765" y="7700804"/>
+            <a:ext cx="2419062" cy="2330222"/>
+          </a:xfrm>
+          <a:prstGeom prst="roundRect">
+            <a:avLst>
+              <a:gd name="adj" fmla="val 16667"/>
+            </a:avLst>
+          </a:prstGeom>
+          <a:solidFill>
+            <a:srgbClr val="D9EAD3"/>
+          </a:solidFill>
+          <a:ln w="28575" cap="flat" cmpd="sng">
+            <a:solidFill>
+              <a:srgbClr val="274E13"/>
+            </a:solidFill>
+            <a:prstDash val="solid"/>
+            <a:round/>
+            <a:headEnd type="none" w="sm" len="sm"/>
+            <a:tailEnd type="none" w="sm" len="sm"/>
+          </a:ln>
+        </p:spPr>
+        <p:txBody>
+          <a:bodyPr spcFirstLastPara="1" wrap="square" lIns="91425" tIns="91425" rIns="91425" bIns="91425" anchor="t" anchorCtr="0">
+            <a:noAutofit/>
+          </a:bodyPr>
+          <a:lstStyle/>
+          <a:p>
+            <a:pPr lvl="0"/>
+            <a:r>
+              <a:rPr lang="en-GB" dirty="0">
+                <a:latin typeface="Consolas"/>
+                <a:ea typeface="Consolas"/>
+                <a:cs typeface="Consolas"/>
+                <a:sym typeface="Consolas"/>
+              </a:rPr>
+              <a:t>US4: Como </a:t>
+            </a:r>
+            <a:r>
+              <a:rPr lang="en-GB" dirty="0" err="1">
+                <a:latin typeface="Consolas"/>
+                <a:ea typeface="Consolas"/>
+                <a:cs typeface="Consolas"/>
+                <a:sym typeface="Consolas"/>
+              </a:rPr>
+              <a:t>membro</a:t>
+            </a:r>
+            <a:r>
+              <a:rPr lang="en-GB" dirty="0">
+                <a:latin typeface="Consolas"/>
+                <a:ea typeface="Consolas"/>
+                <a:cs typeface="Consolas"/>
+                <a:sym typeface="Consolas"/>
+              </a:rPr>
+              <a:t> da </a:t>
+            </a:r>
+            <a:r>
+              <a:rPr lang="en-GB" dirty="0" err="1">
+                <a:latin typeface="Consolas"/>
+                <a:ea typeface="Consolas"/>
+                <a:cs typeface="Consolas"/>
+                <a:sym typeface="Consolas"/>
+              </a:rPr>
+              <a:t>equipa</a:t>
+            </a:r>
+            <a:r>
+              <a:rPr lang="en-GB" dirty="0">
+                <a:latin typeface="Consolas"/>
+                <a:ea typeface="Consolas"/>
+                <a:cs typeface="Consolas"/>
+                <a:sym typeface="Consolas"/>
+              </a:rPr>
+              <a:t> </a:t>
+            </a:r>
+            <a:r>
+              <a:rPr lang="en-GB" dirty="0" err="1">
+                <a:latin typeface="Consolas"/>
+                <a:ea typeface="Consolas"/>
+                <a:cs typeface="Consolas"/>
+                <a:sym typeface="Consolas"/>
+              </a:rPr>
+              <a:t>quero</a:t>
+            </a:r>
+            <a:r>
+              <a:rPr lang="en-GB" dirty="0">
+                <a:latin typeface="Consolas"/>
+                <a:ea typeface="Consolas"/>
+                <a:cs typeface="Consolas"/>
+                <a:sym typeface="Consolas"/>
+              </a:rPr>
+              <a:t> f</a:t>
+            </a:r>
+            <a:r>
+              <a:rPr lang="pt-PT" dirty="0">
+                <a:latin typeface="Consolas"/>
+                <a:ea typeface="Consolas"/>
+                <a:cs typeface="Consolas"/>
+                <a:sym typeface="Consolas"/>
+              </a:rPr>
+              <a:t>azer resource trader bot feature, com o qual os jogadores podem fazer trocas de uns recursos por outros durante o jogo</a:t>
+            </a:r>
+            <a:endParaRPr dirty="0">
+              <a:latin typeface="Consolas"/>
+              <a:ea typeface="Consolas"/>
+              <a:cs typeface="Consolas"/>
+              <a:sym typeface="Consolas"/>
+            </a:endParaRPr>
+          </a:p>
+        </p:txBody>
+      </p:sp>
+      <p:sp>
+        <p:nvSpPr>
+          <p:cNvPr id="22" name="Google Shape;92;p15">
+            <a:extLst>
+              <a:ext uri="{FF2B5EF4-FFF2-40B4-BE49-F238E27FC236}">
+                <a16:creationId xmlns:a16="http://schemas.microsoft.com/office/drawing/2014/main" id="{EC3A16EF-320A-9848-1017-DDD4AEEE72D9}"/>
+              </a:ext>
+            </a:extLst>
+          </p:cNvPr>
+          <p:cNvSpPr/>
+          <p:nvPr/>
+        </p:nvSpPr>
+        <p:spPr>
+          <a:xfrm>
+            <a:off x="8388135" y="768737"/>
+            <a:ext cx="1300278" cy="9262289"/>
+          </a:xfrm>
+          <a:prstGeom prst="roundRect">
+            <a:avLst>
+              <a:gd name="adj" fmla="val 16667"/>
+            </a:avLst>
+          </a:prstGeom>
+          <a:solidFill>
+            <a:srgbClr val="D9EAD3"/>
+          </a:solidFill>
+          <a:ln w="28575" cap="flat" cmpd="sng">
+            <a:solidFill>
+              <a:srgbClr val="274E13"/>
+            </a:solidFill>
+            <a:prstDash val="solid"/>
+            <a:round/>
+            <a:headEnd type="none" w="sm" len="sm"/>
+            <a:tailEnd type="none" w="sm" len="sm"/>
+          </a:ln>
+        </p:spPr>
+        <p:txBody>
+          <a:bodyPr spcFirstLastPara="1" wrap="square" lIns="91425" tIns="91425" rIns="91425" bIns="91425" anchor="t" anchorCtr="0">
+            <a:noAutofit/>
+          </a:bodyPr>
+          <a:lstStyle/>
+          <a:p>
+            <a:pPr lvl="0"/>
+            <a:r>
+              <a:rPr lang="pt-PT" dirty="0">
+                <a:latin typeface="Consolas"/>
+                <a:ea typeface="Consolas"/>
+                <a:cs typeface="Consolas"/>
+                <a:sym typeface="Consolas"/>
+              </a:rPr>
+              <a:t>US5: como membro da equipa quero completar as tarefas do milestone 3 referentes às implementações que acrescentei ao jogo</a:t>
+            </a:r>
+          </a:p>
+          <a:p>
+            <a:pPr lvl="0"/>
+            <a:endParaRPr dirty="0">
+              <a:latin typeface="Consolas"/>
+              <a:ea typeface="Consolas"/>
+              <a:cs typeface="Consolas"/>
+              <a:sym typeface="Consolas"/>
+            </a:endParaRPr>
+          </a:p>
+        </p:txBody>
+      </p:sp>
+    </p:spTree>
+    <p:extLst>
+      <p:ext uri="{BB962C8B-B14F-4D97-AF65-F5344CB8AC3E}">
+        <p14:creationId xmlns:p14="http://schemas.microsoft.com/office/powerpoint/2010/main" val="399222532"/>
       </p:ext>
     </p:extLst>
   </p:cSld>

--- a/SE202526/Management/Scrum Board.pptx
+++ b/SE202526/Management/Scrum Board.pptx
@@ -34,8 +34,8 @@
     <p:sldId id="282" r:id="rId25"/>
     <p:sldId id="283" r:id="rId26"/>
     <p:sldId id="284" r:id="rId27"/>
-    <p:sldId id="285" r:id="rId28"/>
-    <p:sldId id="286" r:id="rId29"/>
+    <p:sldId id="289" r:id="rId28"/>
+    <p:sldId id="290" r:id="rId29"/>
   </p:sldIdLst>
   <p:sldSz cx="21599525" cy="10799763"/>
   <p:notesSz cx="6858000" cy="9144000"/>
@@ -3103,7 +3103,7 @@
         <p:cNvPr id="1" name="Shape 186">
           <a:extLst>
             <a:ext uri="{FF2B5EF4-FFF2-40B4-BE49-F238E27FC236}">
-              <a16:creationId xmlns:a16="http://schemas.microsoft.com/office/drawing/2014/main" id="{EDB64537-E355-EDF6-29EF-4A4708FE618F}"/>
+              <a16:creationId xmlns:a16="http://schemas.microsoft.com/office/drawing/2014/main" id="{CA82F358-C09F-2D57-E46E-11DEC0C42AB3}"/>
             </a:ext>
           </a:extLst>
         </p:cNvPr>
@@ -3123,7 +3123,7 @@
           <p:cNvPr id="187" name="Google Shape;187;g3850b307b58_0_218:notes">
             <a:extLst>
               <a:ext uri="{FF2B5EF4-FFF2-40B4-BE49-F238E27FC236}">
-                <a16:creationId xmlns:a16="http://schemas.microsoft.com/office/drawing/2014/main" id="{6BB80968-BD9F-B03A-40A9-EECE593CDC6F}"/>
+                <a16:creationId xmlns:a16="http://schemas.microsoft.com/office/drawing/2014/main" id="{49E079F8-6A82-59C1-3A3E-0C7F938306ED}"/>
               </a:ext>
             </a:extLst>
           </p:cNvPr>
@@ -3170,7 +3170,7 @@
           <p:cNvPr id="188" name="Google Shape;188;g3850b307b58_0_218:notes">
             <a:extLst>
               <a:ext uri="{FF2B5EF4-FFF2-40B4-BE49-F238E27FC236}">
-                <a16:creationId xmlns:a16="http://schemas.microsoft.com/office/drawing/2014/main" id="{50ABCE7E-1CD0-8098-D492-B17B09AB781C}"/>
+                <a16:creationId xmlns:a16="http://schemas.microsoft.com/office/drawing/2014/main" id="{FCFB710A-24C2-BE47-E76C-672D5D07D998}"/>
               </a:ext>
             </a:extLst>
           </p:cNvPr>
@@ -3212,7 +3212,7 @@
     </p:spTree>
     <p:extLst>
       <p:ext uri="{BB962C8B-B14F-4D97-AF65-F5344CB8AC3E}">
-        <p14:creationId xmlns:p14="http://schemas.microsoft.com/office/powerpoint/2010/main" val="4102854279"/>
+        <p14:creationId xmlns:p14="http://schemas.microsoft.com/office/powerpoint/2010/main" val="2353602832"/>
       </p:ext>
     </p:extLst>
   </p:cSld>
@@ -3230,7 +3230,7 @@
         <p:cNvPr id="1" name="Shape 186">
           <a:extLst>
             <a:ext uri="{FF2B5EF4-FFF2-40B4-BE49-F238E27FC236}">
-              <a16:creationId xmlns:a16="http://schemas.microsoft.com/office/drawing/2014/main" id="{797E3EF4-C4D0-8DD6-B045-F0B746CF144E}"/>
+              <a16:creationId xmlns:a16="http://schemas.microsoft.com/office/drawing/2014/main" id="{3AC429BA-73A6-44BA-A269-2033C9BF1AF5}"/>
             </a:ext>
           </a:extLst>
         </p:cNvPr>
@@ -3250,7 +3250,7 @@
           <p:cNvPr id="187" name="Google Shape;187;g3850b307b58_0_218:notes">
             <a:extLst>
               <a:ext uri="{FF2B5EF4-FFF2-40B4-BE49-F238E27FC236}">
-                <a16:creationId xmlns:a16="http://schemas.microsoft.com/office/drawing/2014/main" id="{2EB5D279-9A98-8FA1-F3A6-A50111A03E94}"/>
+                <a16:creationId xmlns:a16="http://schemas.microsoft.com/office/drawing/2014/main" id="{0B002E85-DE1D-64C2-AE46-6FB55A989A06}"/>
               </a:ext>
             </a:extLst>
           </p:cNvPr>
@@ -3297,7 +3297,7 @@
           <p:cNvPr id="188" name="Google Shape;188;g3850b307b58_0_218:notes">
             <a:extLst>
               <a:ext uri="{FF2B5EF4-FFF2-40B4-BE49-F238E27FC236}">
-                <a16:creationId xmlns:a16="http://schemas.microsoft.com/office/drawing/2014/main" id="{AF88B6DB-BF81-CD5F-E641-21BF3B6A27FB}"/>
+                <a16:creationId xmlns:a16="http://schemas.microsoft.com/office/drawing/2014/main" id="{79A2A178-D12C-4C05-BD17-7B750E475FF5}"/>
               </a:ext>
             </a:extLst>
           </p:cNvPr>
@@ -3339,7 +3339,7 @@
     </p:spTree>
     <p:extLst>
       <p:ext uri="{BB962C8B-B14F-4D97-AF65-F5344CB8AC3E}">
-        <p14:creationId xmlns:p14="http://schemas.microsoft.com/office/powerpoint/2010/main" val="1725710287"/>
+        <p14:creationId xmlns:p14="http://schemas.microsoft.com/office/powerpoint/2010/main" val="163564405"/>
       </p:ext>
     </p:extLst>
   </p:cSld>
@@ -38088,7 +38088,7 @@
         </p:nvCxnSpPr>
         <p:spPr>
           <a:xfrm>
-            <a:off x="5758457" y="-28500"/>
+            <a:off x="5607986" y="-57237"/>
             <a:ext cx="0" cy="10857000"/>
           </a:xfrm>
           <a:prstGeom prst="straightConnector1">
@@ -38120,8 +38120,8 @@
         </p:nvSpPr>
         <p:spPr>
           <a:xfrm>
-            <a:off x="3197186" y="84312"/>
-            <a:ext cx="2410800" cy="480900"/>
+            <a:off x="3175318" y="84312"/>
+            <a:ext cx="2007930" cy="480900"/>
           </a:xfrm>
           <a:prstGeom prst="roundRect">
             <a:avLst>
@@ -38188,7 +38188,7 @@
         </p:nvSpPr>
         <p:spPr>
           <a:xfrm>
-            <a:off x="6281635" y="84312"/>
+            <a:off x="6032725" y="84312"/>
             <a:ext cx="3406779" cy="480900"/>
           </a:xfrm>
           <a:prstGeom prst="roundRect">
@@ -38225,13 +38225,81 @@
               <a:buNone/>
             </a:pPr>
             <a:r>
+              <a:rPr lang="en-GB" sz="1800" b="1" dirty="0">
+                <a:latin typeface="Consolas"/>
+                <a:ea typeface="Consolas"/>
+                <a:cs typeface="Consolas"/>
+                <a:sym typeface="Consolas"/>
+              </a:rPr>
+              <a:t>Story</a:t>
+            </a:r>
+            <a:endParaRPr sz="1800" b="1" dirty="0">
+              <a:latin typeface="Consolas"/>
+              <a:ea typeface="Consolas"/>
+              <a:cs typeface="Consolas"/>
+              <a:sym typeface="Consolas"/>
+            </a:endParaRPr>
+          </a:p>
+        </p:txBody>
+      </p:sp>
+      <p:sp>
+        <p:nvSpPr>
+          <p:cNvPr id="193" name="Google Shape;193;p19">
+            <a:extLst>
+              <a:ext uri="{FF2B5EF4-FFF2-40B4-BE49-F238E27FC236}">
+                <a16:creationId xmlns:a16="http://schemas.microsoft.com/office/drawing/2014/main" id="{C6AD373A-D0E8-6C85-95B8-61EE6C466822}"/>
+              </a:ext>
+            </a:extLst>
+          </p:cNvPr>
+          <p:cNvSpPr/>
+          <p:nvPr/>
+        </p:nvSpPr>
+        <p:spPr>
+          <a:xfrm>
+            <a:off x="9896006" y="121794"/>
+            <a:ext cx="2410800" cy="480900"/>
+          </a:xfrm>
+          <a:prstGeom prst="roundRect">
+            <a:avLst>
+              <a:gd name="adj" fmla="val 16667"/>
+            </a:avLst>
+          </a:prstGeom>
+          <a:solidFill>
+            <a:srgbClr val="F9CB9C"/>
+          </a:solidFill>
+          <a:ln w="28575" cap="flat" cmpd="sng">
+            <a:solidFill>
+              <a:srgbClr val="B45F06"/>
+            </a:solidFill>
+            <a:prstDash val="solid"/>
+            <a:round/>
+            <a:headEnd type="none" w="sm" len="sm"/>
+            <a:tailEnd type="none" w="sm" len="sm"/>
+          </a:ln>
+        </p:spPr>
+        <p:txBody>
+          <a:bodyPr spcFirstLastPara="1" wrap="square" lIns="91425" tIns="91425" rIns="91425" bIns="91425" anchor="ctr" anchorCtr="0">
+            <a:noAutofit/>
+          </a:bodyPr>
+          <a:lstStyle/>
+          <a:p>
+            <a:pPr marL="0" lvl="0" indent="0" algn="ctr" rtl="0">
+              <a:spcBef>
+                <a:spcPts val="0"/>
+              </a:spcBef>
+              <a:spcAft>
+                <a:spcPts val="0"/>
+              </a:spcAft>
+              <a:buNone/>
+            </a:pPr>
+            <a:r>
               <a:rPr lang="en-GB" sz="1800" b="1">
                 <a:latin typeface="Consolas"/>
                 <a:ea typeface="Consolas"/>
                 <a:cs typeface="Consolas"/>
                 <a:sym typeface="Consolas"/>
               </a:rPr>
-              <a:t>Story</a:t>
+              <a:t>To Do</a:t>
             </a:r>
             <a:endParaRPr sz="1800" b="1">
               <a:latin typeface="Consolas"/>
@@ -38244,10 +38312,10 @@
       </p:sp>
       <p:sp>
         <p:nvSpPr>
-          <p:cNvPr id="193" name="Google Shape;193;p19">
-            <a:extLst>
-              <a:ext uri="{FF2B5EF4-FFF2-40B4-BE49-F238E27FC236}">
-                <a16:creationId xmlns:a16="http://schemas.microsoft.com/office/drawing/2014/main" id="{C6AD373A-D0E8-6C85-95B8-61EE6C466822}"/>
+          <p:cNvPr id="194" name="Google Shape;194;p19">
+            <a:extLst>
+              <a:ext uri="{FF2B5EF4-FFF2-40B4-BE49-F238E27FC236}">
+                <a16:creationId xmlns:a16="http://schemas.microsoft.com/office/drawing/2014/main" id="{0FB97E51-61C7-2F8A-1B09-8B30499A060B}"/>
               </a:ext>
             </a:extLst>
           </p:cNvPr>
@@ -38256,7 +38324,7 @@
         </p:nvSpPr>
         <p:spPr>
           <a:xfrm>
-            <a:off x="9896006" y="121794"/>
+            <a:off x="12758767" y="136415"/>
             <a:ext cx="2410800" cy="480900"/>
           </a:xfrm>
           <a:prstGeom prst="roundRect">
@@ -38293,13 +38361,81 @@
               <a:buNone/>
             </a:pPr>
             <a:r>
+              <a:rPr lang="en-GB" sz="1800" b="1" dirty="0">
+                <a:latin typeface="Consolas"/>
+                <a:ea typeface="Consolas"/>
+                <a:cs typeface="Consolas"/>
+                <a:sym typeface="Consolas"/>
+              </a:rPr>
+              <a:t>Doing</a:t>
+            </a:r>
+            <a:endParaRPr sz="1800" b="1" dirty="0">
+              <a:latin typeface="Consolas"/>
+              <a:ea typeface="Consolas"/>
+              <a:cs typeface="Consolas"/>
+              <a:sym typeface="Consolas"/>
+            </a:endParaRPr>
+          </a:p>
+        </p:txBody>
+      </p:sp>
+      <p:sp>
+        <p:nvSpPr>
+          <p:cNvPr id="195" name="Google Shape;195;p19">
+            <a:extLst>
+              <a:ext uri="{FF2B5EF4-FFF2-40B4-BE49-F238E27FC236}">
+                <a16:creationId xmlns:a16="http://schemas.microsoft.com/office/drawing/2014/main" id="{F024E59C-02FE-6BA9-EF4F-6E127DF6FB26}"/>
+              </a:ext>
+            </a:extLst>
+          </p:cNvPr>
+          <p:cNvSpPr/>
+          <p:nvPr/>
+        </p:nvSpPr>
+        <p:spPr>
+          <a:xfrm>
+            <a:off x="15532407" y="84312"/>
+            <a:ext cx="2410800" cy="480900"/>
+          </a:xfrm>
+          <a:prstGeom prst="roundRect">
+            <a:avLst>
+              <a:gd name="adj" fmla="val 16667"/>
+            </a:avLst>
+          </a:prstGeom>
+          <a:solidFill>
+            <a:srgbClr val="F9CB9C"/>
+          </a:solidFill>
+          <a:ln w="28575" cap="flat" cmpd="sng">
+            <a:solidFill>
+              <a:srgbClr val="B45F06"/>
+            </a:solidFill>
+            <a:prstDash val="solid"/>
+            <a:round/>
+            <a:headEnd type="none" w="sm" len="sm"/>
+            <a:tailEnd type="none" w="sm" len="sm"/>
+          </a:ln>
+        </p:spPr>
+        <p:txBody>
+          <a:bodyPr spcFirstLastPara="1" wrap="square" lIns="91425" tIns="91425" rIns="91425" bIns="91425" anchor="ctr" anchorCtr="0">
+            <a:noAutofit/>
+          </a:bodyPr>
+          <a:lstStyle/>
+          <a:p>
+            <a:pPr marL="0" lvl="0" indent="0" algn="ctr" rtl="0">
+              <a:spcBef>
+                <a:spcPts val="0"/>
+              </a:spcBef>
+              <a:spcAft>
+                <a:spcPts val="0"/>
+              </a:spcAft>
+              <a:buNone/>
+            </a:pPr>
+            <a:r>
               <a:rPr lang="en-GB" sz="1800" b="1">
                 <a:latin typeface="Consolas"/>
                 <a:ea typeface="Consolas"/>
                 <a:cs typeface="Consolas"/>
                 <a:sym typeface="Consolas"/>
               </a:rPr>
-              <a:t>To Do</a:t>
+              <a:t>Review</a:t>
             </a:r>
             <a:endParaRPr sz="1800" b="1">
               <a:latin typeface="Consolas"/>
@@ -38312,10 +38448,10 @@
       </p:sp>
       <p:sp>
         <p:nvSpPr>
-          <p:cNvPr id="194" name="Google Shape;194;p19">
-            <a:extLst>
-              <a:ext uri="{FF2B5EF4-FFF2-40B4-BE49-F238E27FC236}">
-                <a16:creationId xmlns:a16="http://schemas.microsoft.com/office/drawing/2014/main" id="{0FB97E51-61C7-2F8A-1B09-8B30499A060B}"/>
+          <p:cNvPr id="196" name="Google Shape;196;p19">
+            <a:extLst>
+              <a:ext uri="{FF2B5EF4-FFF2-40B4-BE49-F238E27FC236}">
+                <a16:creationId xmlns:a16="http://schemas.microsoft.com/office/drawing/2014/main" id="{96EA5CF9-C618-437F-5A70-08B7FB006172}"/>
               </a:ext>
             </a:extLst>
           </p:cNvPr>
@@ -38324,7 +38460,7 @@
         </p:nvSpPr>
         <p:spPr>
           <a:xfrm>
-            <a:off x="12758767" y="136415"/>
+            <a:off x="18668888" y="84312"/>
             <a:ext cx="2410800" cy="480900"/>
           </a:xfrm>
           <a:prstGeom prst="roundRect">
@@ -38361,13 +38497,373 @@
               <a:buNone/>
             </a:pPr>
             <a:r>
+              <a:rPr lang="en-GB" sz="1800" b="1">
+                <a:latin typeface="Consolas"/>
+                <a:ea typeface="Consolas"/>
+                <a:cs typeface="Consolas"/>
+                <a:sym typeface="Consolas"/>
+              </a:rPr>
+              <a:t>Done</a:t>
+            </a:r>
+            <a:endParaRPr sz="1800" b="1">
+              <a:latin typeface="Consolas"/>
+              <a:ea typeface="Consolas"/>
+              <a:cs typeface="Consolas"/>
+              <a:sym typeface="Consolas"/>
+            </a:endParaRPr>
+          </a:p>
+        </p:txBody>
+      </p:sp>
+      <p:sp>
+        <p:nvSpPr>
+          <p:cNvPr id="197" name="Google Shape;197;p19">
+            <a:extLst>
+              <a:ext uri="{FF2B5EF4-FFF2-40B4-BE49-F238E27FC236}">
+                <a16:creationId xmlns:a16="http://schemas.microsoft.com/office/drawing/2014/main" id="{09F45951-51C3-6918-0A63-F119FAB29588}"/>
+              </a:ext>
+            </a:extLst>
+          </p:cNvPr>
+          <p:cNvSpPr/>
+          <p:nvPr/>
+        </p:nvSpPr>
+        <p:spPr>
+          <a:xfrm>
+            <a:off x="167288" y="84312"/>
+            <a:ext cx="2410800" cy="480900"/>
+          </a:xfrm>
+          <a:prstGeom prst="roundRect">
+            <a:avLst>
+              <a:gd name="adj" fmla="val 16667"/>
+            </a:avLst>
+          </a:prstGeom>
+          <a:solidFill>
+            <a:srgbClr val="F9CB9C"/>
+          </a:solidFill>
+          <a:ln w="28575" cap="flat" cmpd="sng">
+            <a:solidFill>
+              <a:srgbClr val="B45F06"/>
+            </a:solidFill>
+            <a:prstDash val="solid"/>
+            <a:round/>
+            <a:headEnd type="none" w="sm" len="sm"/>
+            <a:tailEnd type="none" w="sm" len="sm"/>
+          </a:ln>
+        </p:spPr>
+        <p:txBody>
+          <a:bodyPr spcFirstLastPara="1" wrap="square" lIns="91425" tIns="91425" rIns="91425" bIns="91425" anchor="ctr" anchorCtr="0">
+            <a:noAutofit/>
+          </a:bodyPr>
+          <a:lstStyle/>
+          <a:p>
+            <a:pPr marL="0" lvl="0" indent="0" algn="ctr" rtl="0">
+              <a:spcBef>
+                <a:spcPts val="0"/>
+              </a:spcBef>
+              <a:spcAft>
+                <a:spcPts val="0"/>
+              </a:spcAft>
+              <a:buNone/>
+            </a:pPr>
+            <a:r>
+              <a:rPr lang="en-GB" sz="1800" b="1">
+                <a:latin typeface="Consolas"/>
+                <a:ea typeface="Consolas"/>
+                <a:cs typeface="Consolas"/>
+                <a:sym typeface="Consolas"/>
+              </a:rPr>
+              <a:t>Backlog</a:t>
+            </a:r>
+            <a:endParaRPr sz="1800" b="1">
+              <a:latin typeface="Consolas"/>
+              <a:ea typeface="Consolas"/>
+              <a:cs typeface="Consolas"/>
+              <a:sym typeface="Consolas"/>
+            </a:endParaRPr>
+          </a:p>
+        </p:txBody>
+      </p:sp>
+      <p:cxnSp>
+        <p:nvCxnSpPr>
+          <p:cNvPr id="204" name="Google Shape;204;p19">
+            <a:extLst>
+              <a:ext uri="{FF2B5EF4-FFF2-40B4-BE49-F238E27FC236}">
+                <a16:creationId xmlns:a16="http://schemas.microsoft.com/office/drawing/2014/main" id="{AAB4011C-C097-FECA-EE7E-BBCADB77304A}"/>
+              </a:ext>
+            </a:extLst>
+          </p:cNvPr>
+          <p:cNvCxnSpPr/>
+          <p:nvPr/>
+        </p:nvCxnSpPr>
+        <p:spPr>
+          <a:xfrm>
+            <a:off x="5607986" y="1626038"/>
+            <a:ext cx="16042200" cy="0"/>
+          </a:xfrm>
+          <a:prstGeom prst="straightConnector1">
+            <a:avLst/>
+          </a:prstGeom>
+          <a:noFill/>
+          <a:ln w="28575" cap="flat" cmpd="sng">
+            <a:solidFill>
+              <a:srgbClr val="999999"/>
+            </a:solidFill>
+            <a:prstDash val="dash"/>
+            <a:round/>
+            <a:headEnd type="none" w="med" len="med"/>
+            <a:tailEnd type="none" w="med" len="med"/>
+          </a:ln>
+        </p:spPr>
+      </p:cxnSp>
+      <p:cxnSp>
+        <p:nvCxnSpPr>
+          <p:cNvPr id="205" name="Google Shape;205;p19">
+            <a:extLst>
+              <a:ext uri="{FF2B5EF4-FFF2-40B4-BE49-F238E27FC236}">
+                <a16:creationId xmlns:a16="http://schemas.microsoft.com/office/drawing/2014/main" id="{45008102-40A6-D1DF-96BD-C4F3480FED5D}"/>
+              </a:ext>
+            </a:extLst>
+          </p:cNvPr>
+          <p:cNvCxnSpPr/>
+          <p:nvPr/>
+        </p:nvCxnSpPr>
+        <p:spPr>
+          <a:xfrm>
+            <a:off x="5607986" y="3203476"/>
+            <a:ext cx="16042200" cy="0"/>
+          </a:xfrm>
+          <a:prstGeom prst="straightConnector1">
+            <a:avLst/>
+          </a:prstGeom>
+          <a:noFill/>
+          <a:ln w="28575" cap="flat" cmpd="sng">
+            <a:solidFill>
+              <a:srgbClr val="999999"/>
+            </a:solidFill>
+            <a:prstDash val="dash"/>
+            <a:round/>
+            <a:headEnd type="none" w="med" len="med"/>
+            <a:tailEnd type="none" w="med" len="med"/>
+          </a:ln>
+        </p:spPr>
+      </p:cxnSp>
+      <p:cxnSp>
+        <p:nvCxnSpPr>
+          <p:cNvPr id="206" name="Google Shape;206;p19">
+            <a:extLst>
+              <a:ext uri="{FF2B5EF4-FFF2-40B4-BE49-F238E27FC236}">
+                <a16:creationId xmlns:a16="http://schemas.microsoft.com/office/drawing/2014/main" id="{D957ABBE-AA3F-70B1-E50E-8F3611AA10B2}"/>
+              </a:ext>
+            </a:extLst>
+          </p:cNvPr>
+          <p:cNvCxnSpPr/>
+          <p:nvPr/>
+        </p:nvCxnSpPr>
+        <p:spPr>
+          <a:xfrm>
+            <a:off x="5607986" y="4777838"/>
+            <a:ext cx="16042200" cy="0"/>
+          </a:xfrm>
+          <a:prstGeom prst="straightConnector1">
+            <a:avLst/>
+          </a:prstGeom>
+          <a:noFill/>
+          <a:ln w="28575" cap="flat" cmpd="sng">
+            <a:solidFill>
+              <a:srgbClr val="999999"/>
+            </a:solidFill>
+            <a:prstDash val="dash"/>
+            <a:round/>
+            <a:headEnd type="none" w="med" len="med"/>
+            <a:tailEnd type="none" w="med" len="med"/>
+          </a:ln>
+        </p:spPr>
+      </p:cxnSp>
+      <p:cxnSp>
+        <p:nvCxnSpPr>
+          <p:cNvPr id="207" name="Google Shape;207;p19">
+            <a:extLst>
+              <a:ext uri="{FF2B5EF4-FFF2-40B4-BE49-F238E27FC236}">
+                <a16:creationId xmlns:a16="http://schemas.microsoft.com/office/drawing/2014/main" id="{1EAFF5A6-D492-1049-DE1E-BD06B51C2E93}"/>
+              </a:ext>
+            </a:extLst>
+          </p:cNvPr>
+          <p:cNvCxnSpPr/>
+          <p:nvPr/>
+        </p:nvCxnSpPr>
+        <p:spPr>
+          <a:xfrm>
+            <a:off x="5607986" y="6353738"/>
+            <a:ext cx="16042200" cy="0"/>
+          </a:xfrm>
+          <a:prstGeom prst="straightConnector1">
+            <a:avLst/>
+          </a:prstGeom>
+          <a:noFill/>
+          <a:ln w="28575" cap="flat" cmpd="sng">
+            <a:solidFill>
+              <a:srgbClr val="999999"/>
+            </a:solidFill>
+            <a:prstDash val="dash"/>
+            <a:round/>
+            <a:headEnd type="none" w="med" len="med"/>
+            <a:tailEnd type="none" w="med" len="med"/>
+          </a:ln>
+        </p:spPr>
+      </p:cxnSp>
+      <p:cxnSp>
+        <p:nvCxnSpPr>
+          <p:cNvPr id="208" name="Google Shape;208;p19">
+            <a:extLst>
+              <a:ext uri="{FF2B5EF4-FFF2-40B4-BE49-F238E27FC236}">
+                <a16:creationId xmlns:a16="http://schemas.microsoft.com/office/drawing/2014/main" id="{74EBAD19-4E4C-FA6C-AE9A-539B811A77A7}"/>
+              </a:ext>
+            </a:extLst>
+          </p:cNvPr>
+          <p:cNvCxnSpPr/>
+          <p:nvPr/>
+        </p:nvCxnSpPr>
+        <p:spPr>
+          <a:xfrm>
+            <a:off x="5607986" y="7929638"/>
+            <a:ext cx="16042200" cy="0"/>
+          </a:xfrm>
+          <a:prstGeom prst="straightConnector1">
+            <a:avLst/>
+          </a:prstGeom>
+          <a:noFill/>
+          <a:ln w="28575" cap="flat" cmpd="sng">
+            <a:solidFill>
+              <a:srgbClr val="999999"/>
+            </a:solidFill>
+            <a:prstDash val="dash"/>
+            <a:round/>
+            <a:headEnd type="none" w="med" len="med"/>
+            <a:tailEnd type="none" w="med" len="med"/>
+          </a:ln>
+        </p:spPr>
+      </p:cxnSp>
+      <p:cxnSp>
+        <p:nvCxnSpPr>
+          <p:cNvPr id="209" name="Google Shape;209;p19">
+            <a:extLst>
+              <a:ext uri="{FF2B5EF4-FFF2-40B4-BE49-F238E27FC236}">
+                <a16:creationId xmlns:a16="http://schemas.microsoft.com/office/drawing/2014/main" id="{A47C608B-763E-4E56-53CD-7DC9E35FB246}"/>
+              </a:ext>
+            </a:extLst>
+          </p:cNvPr>
+          <p:cNvCxnSpPr/>
+          <p:nvPr/>
+        </p:nvCxnSpPr>
+        <p:spPr>
+          <a:xfrm>
+            <a:off x="5607986" y="9505538"/>
+            <a:ext cx="16042200" cy="0"/>
+          </a:xfrm>
+          <a:prstGeom prst="straightConnector1">
+            <a:avLst/>
+          </a:prstGeom>
+          <a:noFill/>
+          <a:ln w="28575" cap="flat" cmpd="sng">
+            <a:solidFill>
+              <a:srgbClr val="999999"/>
+            </a:solidFill>
+            <a:prstDash val="dash"/>
+            <a:round/>
+            <a:headEnd type="none" w="med" len="med"/>
+            <a:tailEnd type="none" w="med" len="med"/>
+          </a:ln>
+        </p:spPr>
+      </p:cxnSp>
+      <p:cxnSp>
+        <p:nvCxnSpPr>
+          <p:cNvPr id="215" name="Google Shape;215;p19">
+            <a:extLst>
+              <a:ext uri="{FF2B5EF4-FFF2-40B4-BE49-F238E27FC236}">
+                <a16:creationId xmlns:a16="http://schemas.microsoft.com/office/drawing/2014/main" id="{3F5BE43E-E3B7-487C-50CF-56D0A99A16E2}"/>
+              </a:ext>
+            </a:extLst>
+          </p:cNvPr>
+          <p:cNvCxnSpPr/>
+          <p:nvPr/>
+        </p:nvCxnSpPr>
+        <p:spPr>
+          <a:xfrm>
+            <a:off x="2874374" y="-28500"/>
+            <a:ext cx="0" cy="10857000"/>
+          </a:xfrm>
+          <a:prstGeom prst="straightConnector1">
+            <a:avLst/>
+          </a:prstGeom>
+          <a:noFill/>
+          <a:ln w="38100" cap="flat" cmpd="sng">
+            <a:solidFill>
+              <a:srgbClr val="5B0F00"/>
+            </a:solidFill>
+            <a:prstDash val="solid"/>
+            <a:round/>
+            <a:headEnd type="none" w="med" len="med"/>
+            <a:tailEnd type="none" w="med" len="med"/>
+          </a:ln>
+        </p:spPr>
+      </p:cxnSp>
+      <p:sp>
+        <p:nvSpPr>
+          <p:cNvPr id="2" name="Google Shape;74;p15">
+            <a:extLst>
+              <a:ext uri="{FF2B5EF4-FFF2-40B4-BE49-F238E27FC236}">
+                <a16:creationId xmlns:a16="http://schemas.microsoft.com/office/drawing/2014/main" id="{AE969579-889B-4F34-6B53-3B1A2E0FC744}"/>
+              </a:ext>
+            </a:extLst>
+          </p:cNvPr>
+          <p:cNvSpPr/>
+          <p:nvPr/>
+        </p:nvSpPr>
+        <p:spPr>
+          <a:xfrm>
+            <a:off x="3175318" y="1385588"/>
+            <a:ext cx="2007930" cy="480900"/>
+          </a:xfrm>
+          <a:prstGeom prst="roundRect">
+            <a:avLst>
+              <a:gd name="adj" fmla="val 16667"/>
+            </a:avLst>
+          </a:prstGeom>
+          <a:solidFill>
+            <a:srgbClr val="E6B8AF"/>
+          </a:solidFill>
+          <a:ln w="28575" cap="flat" cmpd="sng">
+            <a:solidFill>
+              <a:srgbClr val="5B0F00"/>
+            </a:solidFill>
+            <a:prstDash val="solid"/>
+            <a:round/>
+            <a:headEnd type="none" w="sm" len="sm"/>
+            <a:tailEnd type="none" w="sm" len="sm"/>
+          </a:ln>
+        </p:spPr>
+        <p:txBody>
+          <a:bodyPr spcFirstLastPara="1" wrap="square" lIns="91425" tIns="91425" rIns="91425" bIns="91425" anchor="ctr" anchorCtr="0">
+            <a:noAutofit/>
+          </a:bodyPr>
+          <a:lstStyle/>
+          <a:p>
+            <a:pPr marL="0" lvl="0" indent="0" algn="ctr" rtl="0">
+              <a:spcBef>
+                <a:spcPts val="0"/>
+              </a:spcBef>
+              <a:spcAft>
+                <a:spcPts val="0"/>
+              </a:spcAft>
+              <a:buNone/>
+            </a:pPr>
+            <a:r>
               <a:rPr lang="en-GB" sz="1800" b="1" dirty="0">
                 <a:latin typeface="Consolas"/>
                 <a:ea typeface="Consolas"/>
                 <a:cs typeface="Consolas"/>
                 <a:sym typeface="Consolas"/>
               </a:rPr>
-              <a:t>Doing</a:t>
+              <a:t>68338</a:t>
             </a:r>
             <a:endParaRPr sz="1800" b="1" dirty="0">
               <a:latin typeface="Consolas"/>
@@ -38380,10 +38876,10 @@
       </p:sp>
       <p:sp>
         <p:nvSpPr>
-          <p:cNvPr id="195" name="Google Shape;195;p19">
-            <a:extLst>
-              <a:ext uri="{FF2B5EF4-FFF2-40B4-BE49-F238E27FC236}">
-                <a16:creationId xmlns:a16="http://schemas.microsoft.com/office/drawing/2014/main" id="{F024E59C-02FE-6BA9-EF4F-6E127DF6FB26}"/>
+          <p:cNvPr id="3" name="Google Shape;75;p15">
+            <a:extLst>
+              <a:ext uri="{FF2B5EF4-FFF2-40B4-BE49-F238E27FC236}">
+                <a16:creationId xmlns:a16="http://schemas.microsoft.com/office/drawing/2014/main" id="{0F891185-8E1D-56B1-6084-57C91FA76442}"/>
               </a:ext>
             </a:extLst>
           </p:cNvPr>
@@ -38392,8 +38888,8 @@
         </p:nvSpPr>
         <p:spPr>
           <a:xfrm>
-            <a:off x="15532407" y="84312"/>
-            <a:ext cx="2410800" cy="480900"/>
+            <a:off x="3175318" y="2961501"/>
+            <a:ext cx="2007930" cy="480900"/>
           </a:xfrm>
           <a:prstGeom prst="roundRect">
             <a:avLst>
@@ -38401,11 +38897,11 @@
             </a:avLst>
           </a:prstGeom>
           <a:solidFill>
-            <a:srgbClr val="F9CB9C"/>
+            <a:srgbClr val="E6B8AF"/>
           </a:solidFill>
           <a:ln w="28575" cap="flat" cmpd="sng">
             <a:solidFill>
-              <a:srgbClr val="B45F06"/>
+              <a:srgbClr val="5B0F00"/>
             </a:solidFill>
             <a:prstDash val="solid"/>
             <a:round/>
@@ -38429,441 +38925,13 @@
               <a:buNone/>
             </a:pPr>
             <a:r>
-              <a:rPr lang="en-GB" sz="1800" b="1">
-                <a:latin typeface="Consolas"/>
-                <a:ea typeface="Consolas"/>
-                <a:cs typeface="Consolas"/>
-                <a:sym typeface="Consolas"/>
-              </a:rPr>
-              <a:t>Review</a:t>
-            </a:r>
-            <a:endParaRPr sz="1800" b="1">
-              <a:latin typeface="Consolas"/>
-              <a:ea typeface="Consolas"/>
-              <a:cs typeface="Consolas"/>
-              <a:sym typeface="Consolas"/>
-            </a:endParaRPr>
-          </a:p>
-        </p:txBody>
-      </p:sp>
-      <p:sp>
-        <p:nvSpPr>
-          <p:cNvPr id="196" name="Google Shape;196;p19">
-            <a:extLst>
-              <a:ext uri="{FF2B5EF4-FFF2-40B4-BE49-F238E27FC236}">
-                <a16:creationId xmlns:a16="http://schemas.microsoft.com/office/drawing/2014/main" id="{96EA5CF9-C618-437F-5A70-08B7FB006172}"/>
-              </a:ext>
-            </a:extLst>
-          </p:cNvPr>
-          <p:cNvSpPr/>
-          <p:nvPr/>
-        </p:nvSpPr>
-        <p:spPr>
-          <a:xfrm>
-            <a:off x="18668888" y="84312"/>
-            <a:ext cx="2410800" cy="480900"/>
-          </a:xfrm>
-          <a:prstGeom prst="roundRect">
-            <a:avLst>
-              <a:gd name="adj" fmla="val 16667"/>
-            </a:avLst>
-          </a:prstGeom>
-          <a:solidFill>
-            <a:srgbClr val="F9CB9C"/>
-          </a:solidFill>
-          <a:ln w="28575" cap="flat" cmpd="sng">
-            <a:solidFill>
-              <a:srgbClr val="B45F06"/>
-            </a:solidFill>
-            <a:prstDash val="solid"/>
-            <a:round/>
-            <a:headEnd type="none" w="sm" len="sm"/>
-            <a:tailEnd type="none" w="sm" len="sm"/>
-          </a:ln>
-        </p:spPr>
-        <p:txBody>
-          <a:bodyPr spcFirstLastPara="1" wrap="square" lIns="91425" tIns="91425" rIns="91425" bIns="91425" anchor="ctr" anchorCtr="0">
-            <a:noAutofit/>
-          </a:bodyPr>
-          <a:lstStyle/>
-          <a:p>
-            <a:pPr marL="0" lvl="0" indent="0" algn="ctr" rtl="0">
-              <a:spcBef>
-                <a:spcPts val="0"/>
-              </a:spcBef>
-              <a:spcAft>
-                <a:spcPts val="0"/>
-              </a:spcAft>
-              <a:buNone/>
-            </a:pPr>
-            <a:r>
-              <a:rPr lang="en-GB" sz="1800" b="1">
-                <a:latin typeface="Consolas"/>
-                <a:ea typeface="Consolas"/>
-                <a:cs typeface="Consolas"/>
-                <a:sym typeface="Consolas"/>
-              </a:rPr>
-              <a:t>Done</a:t>
-            </a:r>
-            <a:endParaRPr sz="1800" b="1">
-              <a:latin typeface="Consolas"/>
-              <a:ea typeface="Consolas"/>
-              <a:cs typeface="Consolas"/>
-              <a:sym typeface="Consolas"/>
-            </a:endParaRPr>
-          </a:p>
-        </p:txBody>
-      </p:sp>
-      <p:sp>
-        <p:nvSpPr>
-          <p:cNvPr id="197" name="Google Shape;197;p19">
-            <a:extLst>
-              <a:ext uri="{FF2B5EF4-FFF2-40B4-BE49-F238E27FC236}">
-                <a16:creationId xmlns:a16="http://schemas.microsoft.com/office/drawing/2014/main" id="{09F45951-51C3-6918-0A63-F119FAB29588}"/>
-              </a:ext>
-            </a:extLst>
-          </p:cNvPr>
-          <p:cNvSpPr/>
-          <p:nvPr/>
-        </p:nvSpPr>
-        <p:spPr>
-          <a:xfrm>
-            <a:off x="167288" y="84312"/>
-            <a:ext cx="2410800" cy="480900"/>
-          </a:xfrm>
-          <a:prstGeom prst="roundRect">
-            <a:avLst>
-              <a:gd name="adj" fmla="val 16667"/>
-            </a:avLst>
-          </a:prstGeom>
-          <a:solidFill>
-            <a:srgbClr val="F9CB9C"/>
-          </a:solidFill>
-          <a:ln w="28575" cap="flat" cmpd="sng">
-            <a:solidFill>
-              <a:srgbClr val="B45F06"/>
-            </a:solidFill>
-            <a:prstDash val="solid"/>
-            <a:round/>
-            <a:headEnd type="none" w="sm" len="sm"/>
-            <a:tailEnd type="none" w="sm" len="sm"/>
-          </a:ln>
-        </p:spPr>
-        <p:txBody>
-          <a:bodyPr spcFirstLastPara="1" wrap="square" lIns="91425" tIns="91425" rIns="91425" bIns="91425" anchor="ctr" anchorCtr="0">
-            <a:noAutofit/>
-          </a:bodyPr>
-          <a:lstStyle/>
-          <a:p>
-            <a:pPr marL="0" lvl="0" indent="0" algn="ctr" rtl="0">
-              <a:spcBef>
-                <a:spcPts val="0"/>
-              </a:spcBef>
-              <a:spcAft>
-                <a:spcPts val="0"/>
-              </a:spcAft>
-              <a:buNone/>
-            </a:pPr>
-            <a:r>
-              <a:rPr lang="en-GB" sz="1800" b="1">
-                <a:latin typeface="Consolas"/>
-                <a:ea typeface="Consolas"/>
-                <a:cs typeface="Consolas"/>
-                <a:sym typeface="Consolas"/>
-              </a:rPr>
-              <a:t>Backlog</a:t>
-            </a:r>
-            <a:endParaRPr sz="1800" b="1">
-              <a:latin typeface="Consolas"/>
-              <a:ea typeface="Consolas"/>
-              <a:cs typeface="Consolas"/>
-              <a:sym typeface="Consolas"/>
-            </a:endParaRPr>
-          </a:p>
-        </p:txBody>
-      </p:sp>
-      <p:cxnSp>
-        <p:nvCxnSpPr>
-          <p:cNvPr id="204" name="Google Shape;204;p19">
-            <a:extLst>
-              <a:ext uri="{FF2B5EF4-FFF2-40B4-BE49-F238E27FC236}">
-                <a16:creationId xmlns:a16="http://schemas.microsoft.com/office/drawing/2014/main" id="{AAB4011C-C097-FECA-EE7E-BBCADB77304A}"/>
-              </a:ext>
-            </a:extLst>
-          </p:cNvPr>
-          <p:cNvCxnSpPr/>
-          <p:nvPr/>
-        </p:nvCxnSpPr>
-        <p:spPr>
-          <a:xfrm>
-            <a:off x="5607986" y="1626038"/>
-            <a:ext cx="16042200" cy="0"/>
-          </a:xfrm>
-          <a:prstGeom prst="straightConnector1">
-            <a:avLst/>
-          </a:prstGeom>
-          <a:noFill/>
-          <a:ln w="28575" cap="flat" cmpd="sng">
-            <a:solidFill>
-              <a:srgbClr val="999999"/>
-            </a:solidFill>
-            <a:prstDash val="dash"/>
-            <a:round/>
-            <a:headEnd type="none" w="med" len="med"/>
-            <a:tailEnd type="none" w="med" len="med"/>
-          </a:ln>
-        </p:spPr>
-      </p:cxnSp>
-      <p:cxnSp>
-        <p:nvCxnSpPr>
-          <p:cNvPr id="205" name="Google Shape;205;p19">
-            <a:extLst>
-              <a:ext uri="{FF2B5EF4-FFF2-40B4-BE49-F238E27FC236}">
-                <a16:creationId xmlns:a16="http://schemas.microsoft.com/office/drawing/2014/main" id="{45008102-40A6-D1DF-96BD-C4F3480FED5D}"/>
-              </a:ext>
-            </a:extLst>
-          </p:cNvPr>
-          <p:cNvCxnSpPr/>
-          <p:nvPr/>
-        </p:nvCxnSpPr>
-        <p:spPr>
-          <a:xfrm>
-            <a:off x="5607986" y="3203476"/>
-            <a:ext cx="16042200" cy="0"/>
-          </a:xfrm>
-          <a:prstGeom prst="straightConnector1">
-            <a:avLst/>
-          </a:prstGeom>
-          <a:noFill/>
-          <a:ln w="28575" cap="flat" cmpd="sng">
-            <a:solidFill>
-              <a:srgbClr val="999999"/>
-            </a:solidFill>
-            <a:prstDash val="dash"/>
-            <a:round/>
-            <a:headEnd type="none" w="med" len="med"/>
-            <a:tailEnd type="none" w="med" len="med"/>
-          </a:ln>
-        </p:spPr>
-      </p:cxnSp>
-      <p:cxnSp>
-        <p:nvCxnSpPr>
-          <p:cNvPr id="206" name="Google Shape;206;p19">
-            <a:extLst>
-              <a:ext uri="{FF2B5EF4-FFF2-40B4-BE49-F238E27FC236}">
-                <a16:creationId xmlns:a16="http://schemas.microsoft.com/office/drawing/2014/main" id="{D957ABBE-AA3F-70B1-E50E-8F3611AA10B2}"/>
-              </a:ext>
-            </a:extLst>
-          </p:cNvPr>
-          <p:cNvCxnSpPr/>
-          <p:nvPr/>
-        </p:nvCxnSpPr>
-        <p:spPr>
-          <a:xfrm>
-            <a:off x="5607986" y="4777838"/>
-            <a:ext cx="16042200" cy="0"/>
-          </a:xfrm>
-          <a:prstGeom prst="straightConnector1">
-            <a:avLst/>
-          </a:prstGeom>
-          <a:noFill/>
-          <a:ln w="28575" cap="flat" cmpd="sng">
-            <a:solidFill>
-              <a:srgbClr val="999999"/>
-            </a:solidFill>
-            <a:prstDash val="dash"/>
-            <a:round/>
-            <a:headEnd type="none" w="med" len="med"/>
-            <a:tailEnd type="none" w="med" len="med"/>
-          </a:ln>
-        </p:spPr>
-      </p:cxnSp>
-      <p:cxnSp>
-        <p:nvCxnSpPr>
-          <p:cNvPr id="207" name="Google Shape;207;p19">
-            <a:extLst>
-              <a:ext uri="{FF2B5EF4-FFF2-40B4-BE49-F238E27FC236}">
-                <a16:creationId xmlns:a16="http://schemas.microsoft.com/office/drawing/2014/main" id="{1EAFF5A6-D492-1049-DE1E-BD06B51C2E93}"/>
-              </a:ext>
-            </a:extLst>
-          </p:cNvPr>
-          <p:cNvCxnSpPr/>
-          <p:nvPr/>
-        </p:nvCxnSpPr>
-        <p:spPr>
-          <a:xfrm>
-            <a:off x="5607986" y="6353738"/>
-            <a:ext cx="16042200" cy="0"/>
-          </a:xfrm>
-          <a:prstGeom prst="straightConnector1">
-            <a:avLst/>
-          </a:prstGeom>
-          <a:noFill/>
-          <a:ln w="28575" cap="flat" cmpd="sng">
-            <a:solidFill>
-              <a:srgbClr val="999999"/>
-            </a:solidFill>
-            <a:prstDash val="dash"/>
-            <a:round/>
-            <a:headEnd type="none" w="med" len="med"/>
-            <a:tailEnd type="none" w="med" len="med"/>
-          </a:ln>
-        </p:spPr>
-      </p:cxnSp>
-      <p:cxnSp>
-        <p:nvCxnSpPr>
-          <p:cNvPr id="208" name="Google Shape;208;p19">
-            <a:extLst>
-              <a:ext uri="{FF2B5EF4-FFF2-40B4-BE49-F238E27FC236}">
-                <a16:creationId xmlns:a16="http://schemas.microsoft.com/office/drawing/2014/main" id="{74EBAD19-4E4C-FA6C-AE9A-539B811A77A7}"/>
-              </a:ext>
-            </a:extLst>
-          </p:cNvPr>
-          <p:cNvCxnSpPr/>
-          <p:nvPr/>
-        </p:nvCxnSpPr>
-        <p:spPr>
-          <a:xfrm>
-            <a:off x="5607986" y="7929638"/>
-            <a:ext cx="16042200" cy="0"/>
-          </a:xfrm>
-          <a:prstGeom prst="straightConnector1">
-            <a:avLst/>
-          </a:prstGeom>
-          <a:noFill/>
-          <a:ln w="28575" cap="flat" cmpd="sng">
-            <a:solidFill>
-              <a:srgbClr val="999999"/>
-            </a:solidFill>
-            <a:prstDash val="dash"/>
-            <a:round/>
-            <a:headEnd type="none" w="med" len="med"/>
-            <a:tailEnd type="none" w="med" len="med"/>
-          </a:ln>
-        </p:spPr>
-      </p:cxnSp>
-      <p:cxnSp>
-        <p:nvCxnSpPr>
-          <p:cNvPr id="209" name="Google Shape;209;p19">
-            <a:extLst>
-              <a:ext uri="{FF2B5EF4-FFF2-40B4-BE49-F238E27FC236}">
-                <a16:creationId xmlns:a16="http://schemas.microsoft.com/office/drawing/2014/main" id="{A47C608B-763E-4E56-53CD-7DC9E35FB246}"/>
-              </a:ext>
-            </a:extLst>
-          </p:cNvPr>
-          <p:cNvCxnSpPr/>
-          <p:nvPr/>
-        </p:nvCxnSpPr>
-        <p:spPr>
-          <a:xfrm>
-            <a:off x="5607986" y="9505538"/>
-            <a:ext cx="16042200" cy="0"/>
-          </a:xfrm>
-          <a:prstGeom prst="straightConnector1">
-            <a:avLst/>
-          </a:prstGeom>
-          <a:noFill/>
-          <a:ln w="28575" cap="flat" cmpd="sng">
-            <a:solidFill>
-              <a:srgbClr val="999999"/>
-            </a:solidFill>
-            <a:prstDash val="dash"/>
-            <a:round/>
-            <a:headEnd type="none" w="med" len="med"/>
-            <a:tailEnd type="none" w="med" len="med"/>
-          </a:ln>
-        </p:spPr>
-      </p:cxnSp>
-      <p:cxnSp>
-        <p:nvCxnSpPr>
-          <p:cNvPr id="215" name="Google Shape;215;p19">
-            <a:extLst>
-              <a:ext uri="{FF2B5EF4-FFF2-40B4-BE49-F238E27FC236}">
-                <a16:creationId xmlns:a16="http://schemas.microsoft.com/office/drawing/2014/main" id="{3F5BE43E-E3B7-487C-50CF-56D0A99A16E2}"/>
-              </a:ext>
-            </a:extLst>
-          </p:cNvPr>
-          <p:cNvCxnSpPr/>
-          <p:nvPr/>
-        </p:nvCxnSpPr>
-        <p:spPr>
-          <a:xfrm>
-            <a:off x="2874374" y="-28500"/>
-            <a:ext cx="0" cy="10857000"/>
-          </a:xfrm>
-          <a:prstGeom prst="straightConnector1">
-            <a:avLst/>
-          </a:prstGeom>
-          <a:noFill/>
-          <a:ln w="38100" cap="flat" cmpd="sng">
-            <a:solidFill>
-              <a:srgbClr val="5B0F00"/>
-            </a:solidFill>
-            <a:prstDash val="solid"/>
-            <a:round/>
-            <a:headEnd type="none" w="med" len="med"/>
-            <a:tailEnd type="none" w="med" len="med"/>
-          </a:ln>
-        </p:spPr>
-      </p:cxnSp>
-      <p:sp>
-        <p:nvSpPr>
-          <p:cNvPr id="2" name="Google Shape;74;p15">
-            <a:extLst>
-              <a:ext uri="{FF2B5EF4-FFF2-40B4-BE49-F238E27FC236}">
-                <a16:creationId xmlns:a16="http://schemas.microsoft.com/office/drawing/2014/main" id="{AE969579-889B-4F34-6B53-3B1A2E0FC744}"/>
-              </a:ext>
-            </a:extLst>
-          </p:cNvPr>
-          <p:cNvSpPr/>
-          <p:nvPr/>
-        </p:nvSpPr>
-        <p:spPr>
-          <a:xfrm>
-            <a:off x="3197186" y="1385588"/>
-            <a:ext cx="2410800" cy="480900"/>
-          </a:xfrm>
-          <a:prstGeom prst="roundRect">
-            <a:avLst>
-              <a:gd name="adj" fmla="val 16667"/>
-            </a:avLst>
-          </a:prstGeom>
-          <a:solidFill>
-            <a:srgbClr val="E6B8AF"/>
-          </a:solidFill>
-          <a:ln w="28575" cap="flat" cmpd="sng">
-            <a:solidFill>
-              <a:srgbClr val="5B0F00"/>
-            </a:solidFill>
-            <a:prstDash val="solid"/>
-            <a:round/>
-            <a:headEnd type="none" w="sm" len="sm"/>
-            <a:tailEnd type="none" w="sm" len="sm"/>
-          </a:ln>
-        </p:spPr>
-        <p:txBody>
-          <a:bodyPr spcFirstLastPara="1" wrap="square" lIns="91425" tIns="91425" rIns="91425" bIns="91425" anchor="ctr" anchorCtr="0">
-            <a:noAutofit/>
-          </a:bodyPr>
-          <a:lstStyle/>
-          <a:p>
-            <a:pPr marL="0" lvl="0" indent="0" algn="ctr" rtl="0">
-              <a:spcBef>
-                <a:spcPts val="0"/>
-              </a:spcBef>
-              <a:spcAft>
-                <a:spcPts val="0"/>
-              </a:spcAft>
-              <a:buNone/>
-            </a:pPr>
-            <a:r>
               <a:rPr lang="en-GB" sz="1800" b="1" dirty="0">
                 <a:latin typeface="Consolas"/>
                 <a:ea typeface="Consolas"/>
                 <a:cs typeface="Consolas"/>
                 <a:sym typeface="Consolas"/>
               </a:rPr>
-              <a:t>68338</a:t>
+              <a:t>68245</a:t>
             </a:r>
             <a:endParaRPr sz="1800" b="1" dirty="0">
               <a:latin typeface="Consolas"/>
@@ -38876,10 +38944,10 @@
       </p:sp>
       <p:sp>
         <p:nvSpPr>
-          <p:cNvPr id="3" name="Google Shape;75;p15">
-            <a:extLst>
-              <a:ext uri="{FF2B5EF4-FFF2-40B4-BE49-F238E27FC236}">
-                <a16:creationId xmlns:a16="http://schemas.microsoft.com/office/drawing/2014/main" id="{0F891185-8E1D-56B1-6084-57C91FA76442}"/>
+          <p:cNvPr id="4" name="Google Shape;76;p15">
+            <a:extLst>
+              <a:ext uri="{FF2B5EF4-FFF2-40B4-BE49-F238E27FC236}">
+                <a16:creationId xmlns:a16="http://schemas.microsoft.com/office/drawing/2014/main" id="{46C4BE80-BC25-8FB5-90F6-0F017EAFC7EC}"/>
               </a:ext>
             </a:extLst>
           </p:cNvPr>
@@ -38888,8 +38956,8 @@
         </p:nvSpPr>
         <p:spPr>
           <a:xfrm>
-            <a:off x="3197186" y="2961501"/>
-            <a:ext cx="2410800" cy="480900"/>
+            <a:off x="3175318" y="4537410"/>
+            <a:ext cx="2007930" cy="480900"/>
           </a:xfrm>
           <a:prstGeom prst="roundRect">
             <a:avLst>
@@ -38931,7 +38999,7 @@
                 <a:cs typeface="Consolas"/>
                 <a:sym typeface="Consolas"/>
               </a:rPr>
-              <a:t>68245</a:t>
+              <a:t>68725</a:t>
             </a:r>
             <a:endParaRPr sz="1800" b="1" dirty="0">
               <a:latin typeface="Consolas"/>
@@ -38944,10 +39012,10 @@
       </p:sp>
       <p:sp>
         <p:nvSpPr>
-          <p:cNvPr id="4" name="Google Shape;76;p15">
-            <a:extLst>
-              <a:ext uri="{FF2B5EF4-FFF2-40B4-BE49-F238E27FC236}">
-                <a16:creationId xmlns:a16="http://schemas.microsoft.com/office/drawing/2014/main" id="{46C4BE80-BC25-8FB5-90F6-0F017EAFC7EC}"/>
+          <p:cNvPr id="5" name="Google Shape;77;p15">
+            <a:extLst>
+              <a:ext uri="{FF2B5EF4-FFF2-40B4-BE49-F238E27FC236}">
+                <a16:creationId xmlns:a16="http://schemas.microsoft.com/office/drawing/2014/main" id="{293C3D12-CDEB-E2DA-3FDB-03BA6A95EAB2}"/>
               </a:ext>
             </a:extLst>
           </p:cNvPr>
@@ -38956,8 +39024,8 @@
         </p:nvSpPr>
         <p:spPr>
           <a:xfrm>
-            <a:off x="3197186" y="4537410"/>
-            <a:ext cx="2410800" cy="480900"/>
+            <a:off x="3175318" y="6113307"/>
+            <a:ext cx="2007930" cy="480900"/>
           </a:xfrm>
           <a:prstGeom prst="roundRect">
             <a:avLst>
@@ -38999,7 +39067,7 @@
                 <a:cs typeface="Consolas"/>
                 <a:sym typeface="Consolas"/>
               </a:rPr>
-              <a:t>68725</a:t>
+              <a:t>67912</a:t>
             </a:r>
             <a:endParaRPr sz="1800" b="1" dirty="0">
               <a:latin typeface="Consolas"/>
@@ -39012,10 +39080,10 @@
       </p:sp>
       <p:sp>
         <p:nvSpPr>
-          <p:cNvPr id="5" name="Google Shape;77;p15">
-            <a:extLst>
-              <a:ext uri="{FF2B5EF4-FFF2-40B4-BE49-F238E27FC236}">
-                <a16:creationId xmlns:a16="http://schemas.microsoft.com/office/drawing/2014/main" id="{293C3D12-CDEB-E2DA-3FDB-03BA6A95EAB2}"/>
+          <p:cNvPr id="6" name="Google Shape;78;p15">
+            <a:extLst>
+              <a:ext uri="{FF2B5EF4-FFF2-40B4-BE49-F238E27FC236}">
+                <a16:creationId xmlns:a16="http://schemas.microsoft.com/office/drawing/2014/main" id="{ADEDD67D-ED1D-3329-E03F-C4B9C3F2A3EE}"/>
               </a:ext>
             </a:extLst>
           </p:cNvPr>
@@ -39024,8 +39092,8 @@
         </p:nvSpPr>
         <p:spPr>
           <a:xfrm>
-            <a:off x="3197186" y="6113307"/>
-            <a:ext cx="2410800" cy="480900"/>
+            <a:off x="3175318" y="7689198"/>
+            <a:ext cx="2007930" cy="480900"/>
           </a:xfrm>
           <a:prstGeom prst="roundRect">
             <a:avLst>
@@ -39067,7 +39135,7 @@
                 <a:cs typeface="Consolas"/>
                 <a:sym typeface="Consolas"/>
               </a:rPr>
-              <a:t>67912</a:t>
+              <a:t>68180</a:t>
             </a:r>
             <a:endParaRPr sz="1800" b="1" dirty="0">
               <a:latin typeface="Consolas"/>
@@ -39080,10 +39148,10 @@
       </p:sp>
       <p:sp>
         <p:nvSpPr>
-          <p:cNvPr id="6" name="Google Shape;78;p15">
-            <a:extLst>
-              <a:ext uri="{FF2B5EF4-FFF2-40B4-BE49-F238E27FC236}">
-                <a16:creationId xmlns:a16="http://schemas.microsoft.com/office/drawing/2014/main" id="{ADEDD67D-ED1D-3329-E03F-C4B9C3F2A3EE}"/>
+          <p:cNvPr id="7" name="Google Shape;79;p15">
+            <a:extLst>
+              <a:ext uri="{FF2B5EF4-FFF2-40B4-BE49-F238E27FC236}">
+                <a16:creationId xmlns:a16="http://schemas.microsoft.com/office/drawing/2014/main" id="{F756FE5E-D13D-D08A-2B42-EF680989A32F}"/>
               </a:ext>
             </a:extLst>
           </p:cNvPr>
@@ -39092,8 +39160,8 @@
         </p:nvSpPr>
         <p:spPr>
           <a:xfrm>
-            <a:off x="3197186" y="7689198"/>
-            <a:ext cx="2410800" cy="480900"/>
+            <a:off x="3175318" y="9265103"/>
+            <a:ext cx="2007930" cy="480900"/>
           </a:xfrm>
           <a:prstGeom prst="roundRect">
             <a:avLst>
@@ -39135,7 +39203,7 @@
                 <a:cs typeface="Consolas"/>
                 <a:sym typeface="Consolas"/>
               </a:rPr>
-              <a:t>68180</a:t>
+              <a:t>67870</a:t>
             </a:r>
             <a:endParaRPr sz="1800" b="1" dirty="0">
               <a:latin typeface="Consolas"/>
@@ -39148,10 +39216,10 @@
       </p:sp>
       <p:sp>
         <p:nvSpPr>
-          <p:cNvPr id="7" name="Google Shape;79;p15">
-            <a:extLst>
-              <a:ext uri="{FF2B5EF4-FFF2-40B4-BE49-F238E27FC236}">
-                <a16:creationId xmlns:a16="http://schemas.microsoft.com/office/drawing/2014/main" id="{F756FE5E-D13D-D08A-2B42-EF680989A32F}"/>
+          <p:cNvPr id="10" name="Google Shape;86;p15">
+            <a:extLst>
+              <a:ext uri="{FF2B5EF4-FFF2-40B4-BE49-F238E27FC236}">
+                <a16:creationId xmlns:a16="http://schemas.microsoft.com/office/drawing/2014/main" id="{9B7BE298-0344-D3DC-EDE1-D67A5BE797E0}"/>
               </a:ext>
             </a:extLst>
           </p:cNvPr>
@@ -39160,76 +39228,8 @@
         </p:nvSpPr>
         <p:spPr>
           <a:xfrm>
-            <a:off x="3197186" y="9265103"/>
-            <a:ext cx="2410800" cy="480900"/>
-          </a:xfrm>
-          <a:prstGeom prst="roundRect">
-            <a:avLst>
-              <a:gd name="adj" fmla="val 16667"/>
-            </a:avLst>
-          </a:prstGeom>
-          <a:solidFill>
-            <a:srgbClr val="E6B8AF"/>
-          </a:solidFill>
-          <a:ln w="28575" cap="flat" cmpd="sng">
-            <a:solidFill>
-              <a:srgbClr val="5B0F00"/>
-            </a:solidFill>
-            <a:prstDash val="solid"/>
-            <a:round/>
-            <a:headEnd type="none" w="sm" len="sm"/>
-            <a:tailEnd type="none" w="sm" len="sm"/>
-          </a:ln>
-        </p:spPr>
-        <p:txBody>
-          <a:bodyPr spcFirstLastPara="1" wrap="square" lIns="91425" tIns="91425" rIns="91425" bIns="91425" anchor="ctr" anchorCtr="0">
-            <a:noAutofit/>
-          </a:bodyPr>
-          <a:lstStyle/>
-          <a:p>
-            <a:pPr marL="0" lvl="0" indent="0" algn="ctr" rtl="0">
-              <a:spcBef>
-                <a:spcPts val="0"/>
-              </a:spcBef>
-              <a:spcAft>
-                <a:spcPts val="0"/>
-              </a:spcAft>
-              <a:buNone/>
-            </a:pPr>
-            <a:r>
-              <a:rPr lang="en-GB" sz="1800" b="1" dirty="0">
-                <a:latin typeface="Consolas"/>
-                <a:ea typeface="Consolas"/>
-                <a:cs typeface="Consolas"/>
-                <a:sym typeface="Consolas"/>
-              </a:rPr>
-              <a:t>67870</a:t>
-            </a:r>
-            <a:endParaRPr sz="1800" b="1" dirty="0">
-              <a:latin typeface="Consolas"/>
-              <a:ea typeface="Consolas"/>
-              <a:cs typeface="Consolas"/>
-              <a:sym typeface="Consolas"/>
-            </a:endParaRPr>
-          </a:p>
-        </p:txBody>
-      </p:sp>
-      <p:sp>
-        <p:nvSpPr>
-          <p:cNvPr id="10" name="Google Shape;86;p15">
-            <a:extLst>
-              <a:ext uri="{FF2B5EF4-FFF2-40B4-BE49-F238E27FC236}">
-                <a16:creationId xmlns:a16="http://schemas.microsoft.com/office/drawing/2014/main" id="{9B7BE298-0344-D3DC-EDE1-D67A5BE797E0}"/>
-              </a:ext>
-            </a:extLst>
-          </p:cNvPr>
-          <p:cNvSpPr/>
-          <p:nvPr/>
-        </p:nvSpPr>
-        <p:spPr>
-          <a:xfrm>
-            <a:off x="5839417" y="3639469"/>
-            <a:ext cx="2443410" cy="2106418"/>
+            <a:off x="5713295" y="3639469"/>
+            <a:ext cx="2569532" cy="2106418"/>
           </a:xfrm>
           <a:prstGeom prst="roundRect">
             <a:avLst>
@@ -39326,7 +39326,7 @@
                 <a:cs typeface="Consolas"/>
                 <a:sym typeface="Consolas"/>
               </a:rPr>
-              <a:t>terminar tsunami e earthquake spawners, no que toca às suas animações bem como alguma lógica de movimento de “builds”.</a:t>
+              <a:t>atualizar tsunami e earthquake spawners, no que toca às suas animações bem como alguma lógica de movimento de “builds”, para os finalizar</a:t>
             </a:r>
             <a:endParaRPr dirty="0">
               <a:latin typeface="Consolas"/>
@@ -39351,8 +39351,8 @@
         </p:nvSpPr>
         <p:spPr>
           <a:xfrm>
-            <a:off x="5839417" y="5783003"/>
-            <a:ext cx="2443410" cy="1843569"/>
+            <a:off x="5713295" y="5783003"/>
+            <a:ext cx="2569532" cy="1843569"/>
           </a:xfrm>
           <a:prstGeom prst="roundRect">
             <a:avLst>
@@ -39474,8 +39474,8 @@
         </p:nvSpPr>
         <p:spPr>
           <a:xfrm>
-            <a:off x="5908929" y="768737"/>
-            <a:ext cx="2328734" cy="2817311"/>
+            <a:off x="5713295" y="768737"/>
+            <a:ext cx="2524368" cy="2817311"/>
           </a:xfrm>
           <a:prstGeom prst="roundRect">
             <a:avLst>
@@ -39572,7 +39572,7 @@
                 <a:cs typeface="Consolas"/>
                 <a:sym typeface="Consolas"/>
               </a:rPr>
-              <a:t>plicar sistema de ranking baseado nas waves derrotadas ecriar uma interface apelativa para o jogador, bem como finalizar as waves do modo semanal.</a:t>
+              <a:t>plicar sistema de ranking baseado nas waves derrotadas e criar uma interface apelativa para o jogador, bem como finalizar as waves do modo semanal, para dar como finalizado o modo semanal</a:t>
             </a:r>
             <a:r>
               <a:rPr lang="en-GB" dirty="0">
@@ -40401,8 +40401,8 @@
         </p:nvSpPr>
         <p:spPr>
           <a:xfrm>
-            <a:off x="5863765" y="7700804"/>
-            <a:ext cx="2419062" cy="2330222"/>
+            <a:off x="5713293" y="7700804"/>
+            <a:ext cx="2569533" cy="2622560"/>
           </a:xfrm>
           <a:prstGeom prst="roundRect">
             <a:avLst>
@@ -40499,7 +40499,7 @@
                 <a:cs typeface="Consolas"/>
                 <a:sym typeface="Consolas"/>
               </a:rPr>
-              <a:t>azer resource trader bot feature, com o qual os jogadores podem fazer trocas de uns recursos por outros durante o jogo</a:t>
+              <a:t>azer resource trader bot feature, com o qual os jogadores podem fazer trocas de uns recursos por outros durante o jogo, para dar utilidade aos minerais acumulados na capacidade máxima.</a:t>
             </a:r>
             <a:endParaRPr dirty="0">
               <a:latin typeface="Consolas"/>
@@ -40657,7 +40657,7 @@
         <p:cNvPr id="1" name="Shape 189">
           <a:extLst>
             <a:ext uri="{FF2B5EF4-FFF2-40B4-BE49-F238E27FC236}">
-              <a16:creationId xmlns:a16="http://schemas.microsoft.com/office/drawing/2014/main" id="{1884D502-D4C4-17F2-FE05-280E2B8DF729}"/>
+              <a16:creationId xmlns:a16="http://schemas.microsoft.com/office/drawing/2014/main" id="{D50FBD4E-E387-079E-CCEB-7F8FAF41EAA6}"/>
             </a:ext>
           </a:extLst>
         </p:cNvPr>
@@ -40677,7 +40677,7 @@
           <p:cNvPr id="190" name="Google Shape;190;p19">
             <a:extLst>
               <a:ext uri="{FF2B5EF4-FFF2-40B4-BE49-F238E27FC236}">
-                <a16:creationId xmlns:a16="http://schemas.microsoft.com/office/drawing/2014/main" id="{AFFC4121-F5F6-EDEC-9389-54E1D67E0D66}"/>
+                <a16:creationId xmlns:a16="http://schemas.microsoft.com/office/drawing/2014/main" id="{BF04F8B3-BFF4-7E33-2DA8-0429C4525CAA}"/>
               </a:ext>
             </a:extLst>
           </p:cNvPr>
@@ -40686,7 +40686,7 @@
         </p:nvCxnSpPr>
         <p:spPr>
           <a:xfrm>
-            <a:off x="5758457" y="-28500"/>
+            <a:off x="5607986" y="-57237"/>
             <a:ext cx="0" cy="10857000"/>
           </a:xfrm>
           <a:prstGeom prst="straightConnector1">
@@ -40709,7 +40709,7 @@
           <p:cNvPr id="191" name="Google Shape;191;p19">
             <a:extLst>
               <a:ext uri="{FF2B5EF4-FFF2-40B4-BE49-F238E27FC236}">
-                <a16:creationId xmlns:a16="http://schemas.microsoft.com/office/drawing/2014/main" id="{D3830E6E-A456-21D7-725F-8EAEBFFA42C0}"/>
+                <a16:creationId xmlns:a16="http://schemas.microsoft.com/office/drawing/2014/main" id="{086C986E-1CF5-CABB-FB0B-0B24C325DB1D}"/>
               </a:ext>
             </a:extLst>
           </p:cNvPr>
@@ -40718,8 +40718,8 @@
         </p:nvSpPr>
         <p:spPr>
           <a:xfrm>
-            <a:off x="3197186" y="84312"/>
-            <a:ext cx="2410800" cy="480900"/>
+            <a:off x="3175318" y="84312"/>
+            <a:ext cx="2007930" cy="480900"/>
           </a:xfrm>
           <a:prstGeom prst="roundRect">
             <a:avLst>
@@ -40777,7 +40777,7 @@
           <p:cNvPr id="192" name="Google Shape;192;p19">
             <a:extLst>
               <a:ext uri="{FF2B5EF4-FFF2-40B4-BE49-F238E27FC236}">
-                <a16:creationId xmlns:a16="http://schemas.microsoft.com/office/drawing/2014/main" id="{3C776D20-B739-25DA-7782-B9CA3E7A5F11}"/>
+                <a16:creationId xmlns:a16="http://schemas.microsoft.com/office/drawing/2014/main" id="{0E292897-3222-8AE0-C560-F552AFE43761}"/>
               </a:ext>
             </a:extLst>
           </p:cNvPr>
@@ -40786,7 +40786,7 @@
         </p:nvSpPr>
         <p:spPr>
           <a:xfrm>
-            <a:off x="6281635" y="84312"/>
+            <a:off x="6032725" y="84312"/>
             <a:ext cx="3406779" cy="480900"/>
           </a:xfrm>
           <a:prstGeom prst="roundRect">
@@ -40823,13 +40823,81 @@
               <a:buNone/>
             </a:pPr>
             <a:r>
+              <a:rPr lang="en-GB" sz="1800" b="1" dirty="0">
+                <a:latin typeface="Consolas"/>
+                <a:ea typeface="Consolas"/>
+                <a:cs typeface="Consolas"/>
+                <a:sym typeface="Consolas"/>
+              </a:rPr>
+              <a:t>Story</a:t>
+            </a:r>
+            <a:endParaRPr sz="1800" b="1" dirty="0">
+              <a:latin typeface="Consolas"/>
+              <a:ea typeface="Consolas"/>
+              <a:cs typeface="Consolas"/>
+              <a:sym typeface="Consolas"/>
+            </a:endParaRPr>
+          </a:p>
+        </p:txBody>
+      </p:sp>
+      <p:sp>
+        <p:nvSpPr>
+          <p:cNvPr id="193" name="Google Shape;193;p19">
+            <a:extLst>
+              <a:ext uri="{FF2B5EF4-FFF2-40B4-BE49-F238E27FC236}">
+                <a16:creationId xmlns:a16="http://schemas.microsoft.com/office/drawing/2014/main" id="{F7E27494-3D0D-866C-C6DB-7C72028AEA21}"/>
+              </a:ext>
+            </a:extLst>
+          </p:cNvPr>
+          <p:cNvSpPr/>
+          <p:nvPr/>
+        </p:nvSpPr>
+        <p:spPr>
+          <a:xfrm>
+            <a:off x="9896006" y="121794"/>
+            <a:ext cx="2410800" cy="480900"/>
+          </a:xfrm>
+          <a:prstGeom prst="roundRect">
+            <a:avLst>
+              <a:gd name="adj" fmla="val 16667"/>
+            </a:avLst>
+          </a:prstGeom>
+          <a:solidFill>
+            <a:srgbClr val="F9CB9C"/>
+          </a:solidFill>
+          <a:ln w="28575" cap="flat" cmpd="sng">
+            <a:solidFill>
+              <a:srgbClr val="B45F06"/>
+            </a:solidFill>
+            <a:prstDash val="solid"/>
+            <a:round/>
+            <a:headEnd type="none" w="sm" len="sm"/>
+            <a:tailEnd type="none" w="sm" len="sm"/>
+          </a:ln>
+        </p:spPr>
+        <p:txBody>
+          <a:bodyPr spcFirstLastPara="1" wrap="square" lIns="91425" tIns="91425" rIns="91425" bIns="91425" anchor="ctr" anchorCtr="0">
+            <a:noAutofit/>
+          </a:bodyPr>
+          <a:lstStyle/>
+          <a:p>
+            <a:pPr marL="0" lvl="0" indent="0" algn="ctr" rtl="0">
+              <a:spcBef>
+                <a:spcPts val="0"/>
+              </a:spcBef>
+              <a:spcAft>
+                <a:spcPts val="0"/>
+              </a:spcAft>
+              <a:buNone/>
+            </a:pPr>
+            <a:r>
               <a:rPr lang="en-GB" sz="1800" b="1">
                 <a:latin typeface="Consolas"/>
                 <a:ea typeface="Consolas"/>
                 <a:cs typeface="Consolas"/>
                 <a:sym typeface="Consolas"/>
               </a:rPr>
-              <a:t>Story</a:t>
+              <a:t>To Do</a:t>
             </a:r>
             <a:endParaRPr sz="1800" b="1">
               <a:latin typeface="Consolas"/>
@@ -40842,10 +40910,10 @@
       </p:sp>
       <p:sp>
         <p:nvSpPr>
-          <p:cNvPr id="193" name="Google Shape;193;p19">
-            <a:extLst>
-              <a:ext uri="{FF2B5EF4-FFF2-40B4-BE49-F238E27FC236}">
-                <a16:creationId xmlns:a16="http://schemas.microsoft.com/office/drawing/2014/main" id="{5850BBAC-18F9-8239-C708-5D906E8895FA}"/>
+          <p:cNvPr id="194" name="Google Shape;194;p19">
+            <a:extLst>
+              <a:ext uri="{FF2B5EF4-FFF2-40B4-BE49-F238E27FC236}">
+                <a16:creationId xmlns:a16="http://schemas.microsoft.com/office/drawing/2014/main" id="{A64D7D41-D799-1B17-C04A-12E878F05945}"/>
               </a:ext>
             </a:extLst>
           </p:cNvPr>
@@ -40854,7 +40922,7 @@
         </p:nvSpPr>
         <p:spPr>
           <a:xfrm>
-            <a:off x="9896006" y="121794"/>
+            <a:off x="12758767" y="136415"/>
             <a:ext cx="2410800" cy="480900"/>
           </a:xfrm>
           <a:prstGeom prst="roundRect">
@@ -40891,13 +40959,81 @@
               <a:buNone/>
             </a:pPr>
             <a:r>
+              <a:rPr lang="en-GB" sz="1800" b="1" dirty="0">
+                <a:latin typeface="Consolas"/>
+                <a:ea typeface="Consolas"/>
+                <a:cs typeface="Consolas"/>
+                <a:sym typeface="Consolas"/>
+              </a:rPr>
+              <a:t>Doing</a:t>
+            </a:r>
+            <a:endParaRPr sz="1800" b="1" dirty="0">
+              <a:latin typeface="Consolas"/>
+              <a:ea typeface="Consolas"/>
+              <a:cs typeface="Consolas"/>
+              <a:sym typeface="Consolas"/>
+            </a:endParaRPr>
+          </a:p>
+        </p:txBody>
+      </p:sp>
+      <p:sp>
+        <p:nvSpPr>
+          <p:cNvPr id="195" name="Google Shape;195;p19">
+            <a:extLst>
+              <a:ext uri="{FF2B5EF4-FFF2-40B4-BE49-F238E27FC236}">
+                <a16:creationId xmlns:a16="http://schemas.microsoft.com/office/drawing/2014/main" id="{DCBCD57B-62BA-D52F-C1CA-82A7B45B3A8D}"/>
+              </a:ext>
+            </a:extLst>
+          </p:cNvPr>
+          <p:cNvSpPr/>
+          <p:nvPr/>
+        </p:nvSpPr>
+        <p:spPr>
+          <a:xfrm>
+            <a:off x="15532407" y="84312"/>
+            <a:ext cx="2410800" cy="480900"/>
+          </a:xfrm>
+          <a:prstGeom prst="roundRect">
+            <a:avLst>
+              <a:gd name="adj" fmla="val 16667"/>
+            </a:avLst>
+          </a:prstGeom>
+          <a:solidFill>
+            <a:srgbClr val="F9CB9C"/>
+          </a:solidFill>
+          <a:ln w="28575" cap="flat" cmpd="sng">
+            <a:solidFill>
+              <a:srgbClr val="B45F06"/>
+            </a:solidFill>
+            <a:prstDash val="solid"/>
+            <a:round/>
+            <a:headEnd type="none" w="sm" len="sm"/>
+            <a:tailEnd type="none" w="sm" len="sm"/>
+          </a:ln>
+        </p:spPr>
+        <p:txBody>
+          <a:bodyPr spcFirstLastPara="1" wrap="square" lIns="91425" tIns="91425" rIns="91425" bIns="91425" anchor="ctr" anchorCtr="0">
+            <a:noAutofit/>
+          </a:bodyPr>
+          <a:lstStyle/>
+          <a:p>
+            <a:pPr marL="0" lvl="0" indent="0" algn="ctr" rtl="0">
+              <a:spcBef>
+                <a:spcPts val="0"/>
+              </a:spcBef>
+              <a:spcAft>
+                <a:spcPts val="0"/>
+              </a:spcAft>
+              <a:buNone/>
+            </a:pPr>
+            <a:r>
               <a:rPr lang="en-GB" sz="1800" b="1">
                 <a:latin typeface="Consolas"/>
                 <a:ea typeface="Consolas"/>
                 <a:cs typeface="Consolas"/>
                 <a:sym typeface="Consolas"/>
               </a:rPr>
-              <a:t>To Do</a:t>
+              <a:t>Review</a:t>
             </a:r>
             <a:endParaRPr sz="1800" b="1">
               <a:latin typeface="Consolas"/>
@@ -40910,10 +41046,10 @@
       </p:sp>
       <p:sp>
         <p:nvSpPr>
-          <p:cNvPr id="194" name="Google Shape;194;p19">
-            <a:extLst>
-              <a:ext uri="{FF2B5EF4-FFF2-40B4-BE49-F238E27FC236}">
-                <a16:creationId xmlns:a16="http://schemas.microsoft.com/office/drawing/2014/main" id="{BD2AF685-26E4-0E31-8D24-B8ADB1634FC0}"/>
+          <p:cNvPr id="196" name="Google Shape;196;p19">
+            <a:extLst>
+              <a:ext uri="{FF2B5EF4-FFF2-40B4-BE49-F238E27FC236}">
+                <a16:creationId xmlns:a16="http://schemas.microsoft.com/office/drawing/2014/main" id="{B8CE2EBB-D09F-6F73-5268-53487FE907ED}"/>
               </a:ext>
             </a:extLst>
           </p:cNvPr>
@@ -40922,7 +41058,7 @@
         </p:nvSpPr>
         <p:spPr>
           <a:xfrm>
-            <a:off x="12758767" y="136415"/>
+            <a:off x="18668888" y="84312"/>
             <a:ext cx="2410800" cy="480900"/>
           </a:xfrm>
           <a:prstGeom prst="roundRect">
@@ -40959,13 +41095,373 @@
               <a:buNone/>
             </a:pPr>
             <a:r>
+              <a:rPr lang="en-GB" sz="1800" b="1">
+                <a:latin typeface="Consolas"/>
+                <a:ea typeface="Consolas"/>
+                <a:cs typeface="Consolas"/>
+                <a:sym typeface="Consolas"/>
+              </a:rPr>
+              <a:t>Done</a:t>
+            </a:r>
+            <a:endParaRPr sz="1800" b="1">
+              <a:latin typeface="Consolas"/>
+              <a:ea typeface="Consolas"/>
+              <a:cs typeface="Consolas"/>
+              <a:sym typeface="Consolas"/>
+            </a:endParaRPr>
+          </a:p>
+        </p:txBody>
+      </p:sp>
+      <p:sp>
+        <p:nvSpPr>
+          <p:cNvPr id="197" name="Google Shape;197;p19">
+            <a:extLst>
+              <a:ext uri="{FF2B5EF4-FFF2-40B4-BE49-F238E27FC236}">
+                <a16:creationId xmlns:a16="http://schemas.microsoft.com/office/drawing/2014/main" id="{45C0E723-8C56-084D-27E1-D1797698BF4F}"/>
+              </a:ext>
+            </a:extLst>
+          </p:cNvPr>
+          <p:cNvSpPr/>
+          <p:nvPr/>
+        </p:nvSpPr>
+        <p:spPr>
+          <a:xfrm>
+            <a:off x="167288" y="84312"/>
+            <a:ext cx="2410800" cy="480900"/>
+          </a:xfrm>
+          <a:prstGeom prst="roundRect">
+            <a:avLst>
+              <a:gd name="adj" fmla="val 16667"/>
+            </a:avLst>
+          </a:prstGeom>
+          <a:solidFill>
+            <a:srgbClr val="F9CB9C"/>
+          </a:solidFill>
+          <a:ln w="28575" cap="flat" cmpd="sng">
+            <a:solidFill>
+              <a:srgbClr val="B45F06"/>
+            </a:solidFill>
+            <a:prstDash val="solid"/>
+            <a:round/>
+            <a:headEnd type="none" w="sm" len="sm"/>
+            <a:tailEnd type="none" w="sm" len="sm"/>
+          </a:ln>
+        </p:spPr>
+        <p:txBody>
+          <a:bodyPr spcFirstLastPara="1" wrap="square" lIns="91425" tIns="91425" rIns="91425" bIns="91425" anchor="ctr" anchorCtr="0">
+            <a:noAutofit/>
+          </a:bodyPr>
+          <a:lstStyle/>
+          <a:p>
+            <a:pPr marL="0" lvl="0" indent="0" algn="ctr" rtl="0">
+              <a:spcBef>
+                <a:spcPts val="0"/>
+              </a:spcBef>
+              <a:spcAft>
+                <a:spcPts val="0"/>
+              </a:spcAft>
+              <a:buNone/>
+            </a:pPr>
+            <a:r>
+              <a:rPr lang="en-GB" sz="1800" b="1">
+                <a:latin typeface="Consolas"/>
+                <a:ea typeface="Consolas"/>
+                <a:cs typeface="Consolas"/>
+                <a:sym typeface="Consolas"/>
+              </a:rPr>
+              <a:t>Backlog</a:t>
+            </a:r>
+            <a:endParaRPr sz="1800" b="1">
+              <a:latin typeface="Consolas"/>
+              <a:ea typeface="Consolas"/>
+              <a:cs typeface="Consolas"/>
+              <a:sym typeface="Consolas"/>
+            </a:endParaRPr>
+          </a:p>
+        </p:txBody>
+      </p:sp>
+      <p:cxnSp>
+        <p:nvCxnSpPr>
+          <p:cNvPr id="204" name="Google Shape;204;p19">
+            <a:extLst>
+              <a:ext uri="{FF2B5EF4-FFF2-40B4-BE49-F238E27FC236}">
+                <a16:creationId xmlns:a16="http://schemas.microsoft.com/office/drawing/2014/main" id="{48278163-70F4-1746-90C1-41B23770CDB0}"/>
+              </a:ext>
+            </a:extLst>
+          </p:cNvPr>
+          <p:cNvCxnSpPr/>
+          <p:nvPr/>
+        </p:nvCxnSpPr>
+        <p:spPr>
+          <a:xfrm>
+            <a:off x="5607986" y="1626038"/>
+            <a:ext cx="16042200" cy="0"/>
+          </a:xfrm>
+          <a:prstGeom prst="straightConnector1">
+            <a:avLst/>
+          </a:prstGeom>
+          <a:noFill/>
+          <a:ln w="28575" cap="flat" cmpd="sng">
+            <a:solidFill>
+              <a:srgbClr val="999999"/>
+            </a:solidFill>
+            <a:prstDash val="dash"/>
+            <a:round/>
+            <a:headEnd type="none" w="med" len="med"/>
+            <a:tailEnd type="none" w="med" len="med"/>
+          </a:ln>
+        </p:spPr>
+      </p:cxnSp>
+      <p:cxnSp>
+        <p:nvCxnSpPr>
+          <p:cNvPr id="205" name="Google Shape;205;p19">
+            <a:extLst>
+              <a:ext uri="{FF2B5EF4-FFF2-40B4-BE49-F238E27FC236}">
+                <a16:creationId xmlns:a16="http://schemas.microsoft.com/office/drawing/2014/main" id="{E34BE8CD-CF24-1B74-D5B3-914854B59671}"/>
+              </a:ext>
+            </a:extLst>
+          </p:cNvPr>
+          <p:cNvCxnSpPr/>
+          <p:nvPr/>
+        </p:nvCxnSpPr>
+        <p:spPr>
+          <a:xfrm>
+            <a:off x="5607986" y="3203476"/>
+            <a:ext cx="16042200" cy="0"/>
+          </a:xfrm>
+          <a:prstGeom prst="straightConnector1">
+            <a:avLst/>
+          </a:prstGeom>
+          <a:noFill/>
+          <a:ln w="28575" cap="flat" cmpd="sng">
+            <a:solidFill>
+              <a:srgbClr val="999999"/>
+            </a:solidFill>
+            <a:prstDash val="dash"/>
+            <a:round/>
+            <a:headEnd type="none" w="med" len="med"/>
+            <a:tailEnd type="none" w="med" len="med"/>
+          </a:ln>
+        </p:spPr>
+      </p:cxnSp>
+      <p:cxnSp>
+        <p:nvCxnSpPr>
+          <p:cNvPr id="206" name="Google Shape;206;p19">
+            <a:extLst>
+              <a:ext uri="{FF2B5EF4-FFF2-40B4-BE49-F238E27FC236}">
+                <a16:creationId xmlns:a16="http://schemas.microsoft.com/office/drawing/2014/main" id="{6E0E2F32-5787-0C21-5BCC-AADEC13C627A}"/>
+              </a:ext>
+            </a:extLst>
+          </p:cNvPr>
+          <p:cNvCxnSpPr/>
+          <p:nvPr/>
+        </p:nvCxnSpPr>
+        <p:spPr>
+          <a:xfrm>
+            <a:off x="5607986" y="4777838"/>
+            <a:ext cx="16042200" cy="0"/>
+          </a:xfrm>
+          <a:prstGeom prst="straightConnector1">
+            <a:avLst/>
+          </a:prstGeom>
+          <a:noFill/>
+          <a:ln w="28575" cap="flat" cmpd="sng">
+            <a:solidFill>
+              <a:srgbClr val="999999"/>
+            </a:solidFill>
+            <a:prstDash val="dash"/>
+            <a:round/>
+            <a:headEnd type="none" w="med" len="med"/>
+            <a:tailEnd type="none" w="med" len="med"/>
+          </a:ln>
+        </p:spPr>
+      </p:cxnSp>
+      <p:cxnSp>
+        <p:nvCxnSpPr>
+          <p:cNvPr id="207" name="Google Shape;207;p19">
+            <a:extLst>
+              <a:ext uri="{FF2B5EF4-FFF2-40B4-BE49-F238E27FC236}">
+                <a16:creationId xmlns:a16="http://schemas.microsoft.com/office/drawing/2014/main" id="{B758A90D-77A2-3417-4D5E-1DB220D97D37}"/>
+              </a:ext>
+            </a:extLst>
+          </p:cNvPr>
+          <p:cNvCxnSpPr/>
+          <p:nvPr/>
+        </p:nvCxnSpPr>
+        <p:spPr>
+          <a:xfrm>
+            <a:off x="5607986" y="6353738"/>
+            <a:ext cx="16042200" cy="0"/>
+          </a:xfrm>
+          <a:prstGeom prst="straightConnector1">
+            <a:avLst/>
+          </a:prstGeom>
+          <a:noFill/>
+          <a:ln w="28575" cap="flat" cmpd="sng">
+            <a:solidFill>
+              <a:srgbClr val="999999"/>
+            </a:solidFill>
+            <a:prstDash val="dash"/>
+            <a:round/>
+            <a:headEnd type="none" w="med" len="med"/>
+            <a:tailEnd type="none" w="med" len="med"/>
+          </a:ln>
+        </p:spPr>
+      </p:cxnSp>
+      <p:cxnSp>
+        <p:nvCxnSpPr>
+          <p:cNvPr id="208" name="Google Shape;208;p19">
+            <a:extLst>
+              <a:ext uri="{FF2B5EF4-FFF2-40B4-BE49-F238E27FC236}">
+                <a16:creationId xmlns:a16="http://schemas.microsoft.com/office/drawing/2014/main" id="{D36CFFFA-D423-E427-03A8-63ABD5637D75}"/>
+              </a:ext>
+            </a:extLst>
+          </p:cNvPr>
+          <p:cNvCxnSpPr/>
+          <p:nvPr/>
+        </p:nvCxnSpPr>
+        <p:spPr>
+          <a:xfrm>
+            <a:off x="5607986" y="7929638"/>
+            <a:ext cx="16042200" cy="0"/>
+          </a:xfrm>
+          <a:prstGeom prst="straightConnector1">
+            <a:avLst/>
+          </a:prstGeom>
+          <a:noFill/>
+          <a:ln w="28575" cap="flat" cmpd="sng">
+            <a:solidFill>
+              <a:srgbClr val="999999"/>
+            </a:solidFill>
+            <a:prstDash val="dash"/>
+            <a:round/>
+            <a:headEnd type="none" w="med" len="med"/>
+            <a:tailEnd type="none" w="med" len="med"/>
+          </a:ln>
+        </p:spPr>
+      </p:cxnSp>
+      <p:cxnSp>
+        <p:nvCxnSpPr>
+          <p:cNvPr id="209" name="Google Shape;209;p19">
+            <a:extLst>
+              <a:ext uri="{FF2B5EF4-FFF2-40B4-BE49-F238E27FC236}">
+                <a16:creationId xmlns:a16="http://schemas.microsoft.com/office/drawing/2014/main" id="{E9F7744F-5151-2F9E-3123-856B1AB53548}"/>
+              </a:ext>
+            </a:extLst>
+          </p:cNvPr>
+          <p:cNvCxnSpPr/>
+          <p:nvPr/>
+        </p:nvCxnSpPr>
+        <p:spPr>
+          <a:xfrm>
+            <a:off x="5607986" y="9505538"/>
+            <a:ext cx="16042200" cy="0"/>
+          </a:xfrm>
+          <a:prstGeom prst="straightConnector1">
+            <a:avLst/>
+          </a:prstGeom>
+          <a:noFill/>
+          <a:ln w="28575" cap="flat" cmpd="sng">
+            <a:solidFill>
+              <a:srgbClr val="999999"/>
+            </a:solidFill>
+            <a:prstDash val="dash"/>
+            <a:round/>
+            <a:headEnd type="none" w="med" len="med"/>
+            <a:tailEnd type="none" w="med" len="med"/>
+          </a:ln>
+        </p:spPr>
+      </p:cxnSp>
+      <p:cxnSp>
+        <p:nvCxnSpPr>
+          <p:cNvPr id="215" name="Google Shape;215;p19">
+            <a:extLst>
+              <a:ext uri="{FF2B5EF4-FFF2-40B4-BE49-F238E27FC236}">
+                <a16:creationId xmlns:a16="http://schemas.microsoft.com/office/drawing/2014/main" id="{69CCD747-B0A9-08BD-8404-D7599A74059F}"/>
+              </a:ext>
+            </a:extLst>
+          </p:cNvPr>
+          <p:cNvCxnSpPr/>
+          <p:nvPr/>
+        </p:nvCxnSpPr>
+        <p:spPr>
+          <a:xfrm>
+            <a:off x="2874374" y="-28500"/>
+            <a:ext cx="0" cy="10857000"/>
+          </a:xfrm>
+          <a:prstGeom prst="straightConnector1">
+            <a:avLst/>
+          </a:prstGeom>
+          <a:noFill/>
+          <a:ln w="38100" cap="flat" cmpd="sng">
+            <a:solidFill>
+              <a:srgbClr val="5B0F00"/>
+            </a:solidFill>
+            <a:prstDash val="solid"/>
+            <a:round/>
+            <a:headEnd type="none" w="med" len="med"/>
+            <a:tailEnd type="none" w="med" len="med"/>
+          </a:ln>
+        </p:spPr>
+      </p:cxnSp>
+      <p:sp>
+        <p:nvSpPr>
+          <p:cNvPr id="2" name="Google Shape;74;p15">
+            <a:extLst>
+              <a:ext uri="{FF2B5EF4-FFF2-40B4-BE49-F238E27FC236}">
+                <a16:creationId xmlns:a16="http://schemas.microsoft.com/office/drawing/2014/main" id="{C22A2FB4-187E-1252-E432-1286009CA7E3}"/>
+              </a:ext>
+            </a:extLst>
+          </p:cNvPr>
+          <p:cNvSpPr/>
+          <p:nvPr/>
+        </p:nvSpPr>
+        <p:spPr>
+          <a:xfrm>
+            <a:off x="3175318" y="1385588"/>
+            <a:ext cx="2007930" cy="480900"/>
+          </a:xfrm>
+          <a:prstGeom prst="roundRect">
+            <a:avLst>
+              <a:gd name="adj" fmla="val 16667"/>
+            </a:avLst>
+          </a:prstGeom>
+          <a:solidFill>
+            <a:srgbClr val="E6B8AF"/>
+          </a:solidFill>
+          <a:ln w="28575" cap="flat" cmpd="sng">
+            <a:solidFill>
+              <a:srgbClr val="5B0F00"/>
+            </a:solidFill>
+            <a:prstDash val="solid"/>
+            <a:round/>
+            <a:headEnd type="none" w="sm" len="sm"/>
+            <a:tailEnd type="none" w="sm" len="sm"/>
+          </a:ln>
+        </p:spPr>
+        <p:txBody>
+          <a:bodyPr spcFirstLastPara="1" wrap="square" lIns="91425" tIns="91425" rIns="91425" bIns="91425" anchor="ctr" anchorCtr="0">
+            <a:noAutofit/>
+          </a:bodyPr>
+          <a:lstStyle/>
+          <a:p>
+            <a:pPr marL="0" lvl="0" indent="0" algn="ctr" rtl="0">
+              <a:spcBef>
+                <a:spcPts val="0"/>
+              </a:spcBef>
+              <a:spcAft>
+                <a:spcPts val="0"/>
+              </a:spcAft>
+              <a:buNone/>
+            </a:pPr>
+            <a:r>
               <a:rPr lang="en-GB" sz="1800" b="1" dirty="0">
                 <a:latin typeface="Consolas"/>
                 <a:ea typeface="Consolas"/>
                 <a:cs typeface="Consolas"/>
                 <a:sym typeface="Consolas"/>
               </a:rPr>
-              <a:t>Doing</a:t>
+              <a:t>68338</a:t>
             </a:r>
             <a:endParaRPr sz="1800" b="1" dirty="0">
               <a:latin typeface="Consolas"/>
@@ -40978,10 +41474,10 @@
       </p:sp>
       <p:sp>
         <p:nvSpPr>
-          <p:cNvPr id="195" name="Google Shape;195;p19">
-            <a:extLst>
-              <a:ext uri="{FF2B5EF4-FFF2-40B4-BE49-F238E27FC236}">
-                <a16:creationId xmlns:a16="http://schemas.microsoft.com/office/drawing/2014/main" id="{65BBF2C7-18A8-7AAD-B77A-9BBC70D28C5E}"/>
+          <p:cNvPr id="3" name="Google Shape;75;p15">
+            <a:extLst>
+              <a:ext uri="{FF2B5EF4-FFF2-40B4-BE49-F238E27FC236}">
+                <a16:creationId xmlns:a16="http://schemas.microsoft.com/office/drawing/2014/main" id="{897F2A6C-32C8-4B04-DECB-C22305CB0FED}"/>
               </a:ext>
             </a:extLst>
           </p:cNvPr>
@@ -40990,8 +41486,8 @@
         </p:nvSpPr>
         <p:spPr>
           <a:xfrm>
-            <a:off x="15532407" y="84312"/>
-            <a:ext cx="2410800" cy="480900"/>
+            <a:off x="3175318" y="2961501"/>
+            <a:ext cx="2007930" cy="480900"/>
           </a:xfrm>
           <a:prstGeom prst="roundRect">
             <a:avLst>
@@ -40999,11 +41495,11 @@
             </a:avLst>
           </a:prstGeom>
           <a:solidFill>
-            <a:srgbClr val="F9CB9C"/>
+            <a:srgbClr val="E6B8AF"/>
           </a:solidFill>
           <a:ln w="28575" cap="flat" cmpd="sng">
             <a:solidFill>
-              <a:srgbClr val="B45F06"/>
+              <a:srgbClr val="5B0F00"/>
             </a:solidFill>
             <a:prstDash val="solid"/>
             <a:round/>
@@ -41027,441 +41523,13 @@
               <a:buNone/>
             </a:pPr>
             <a:r>
-              <a:rPr lang="en-GB" sz="1800" b="1">
-                <a:latin typeface="Consolas"/>
-                <a:ea typeface="Consolas"/>
-                <a:cs typeface="Consolas"/>
-                <a:sym typeface="Consolas"/>
-              </a:rPr>
-              <a:t>Review</a:t>
-            </a:r>
-            <a:endParaRPr sz="1800" b="1">
-              <a:latin typeface="Consolas"/>
-              <a:ea typeface="Consolas"/>
-              <a:cs typeface="Consolas"/>
-              <a:sym typeface="Consolas"/>
-            </a:endParaRPr>
-          </a:p>
-        </p:txBody>
-      </p:sp>
-      <p:sp>
-        <p:nvSpPr>
-          <p:cNvPr id="196" name="Google Shape;196;p19">
-            <a:extLst>
-              <a:ext uri="{FF2B5EF4-FFF2-40B4-BE49-F238E27FC236}">
-                <a16:creationId xmlns:a16="http://schemas.microsoft.com/office/drawing/2014/main" id="{69C17420-9F7C-55A5-9027-6C9ABA1B0DA5}"/>
-              </a:ext>
-            </a:extLst>
-          </p:cNvPr>
-          <p:cNvSpPr/>
-          <p:nvPr/>
-        </p:nvSpPr>
-        <p:spPr>
-          <a:xfrm>
-            <a:off x="18668888" y="84312"/>
-            <a:ext cx="2410800" cy="480900"/>
-          </a:xfrm>
-          <a:prstGeom prst="roundRect">
-            <a:avLst>
-              <a:gd name="adj" fmla="val 16667"/>
-            </a:avLst>
-          </a:prstGeom>
-          <a:solidFill>
-            <a:srgbClr val="F9CB9C"/>
-          </a:solidFill>
-          <a:ln w="28575" cap="flat" cmpd="sng">
-            <a:solidFill>
-              <a:srgbClr val="B45F06"/>
-            </a:solidFill>
-            <a:prstDash val="solid"/>
-            <a:round/>
-            <a:headEnd type="none" w="sm" len="sm"/>
-            <a:tailEnd type="none" w="sm" len="sm"/>
-          </a:ln>
-        </p:spPr>
-        <p:txBody>
-          <a:bodyPr spcFirstLastPara="1" wrap="square" lIns="91425" tIns="91425" rIns="91425" bIns="91425" anchor="ctr" anchorCtr="0">
-            <a:noAutofit/>
-          </a:bodyPr>
-          <a:lstStyle/>
-          <a:p>
-            <a:pPr marL="0" lvl="0" indent="0" algn="ctr" rtl="0">
-              <a:spcBef>
-                <a:spcPts val="0"/>
-              </a:spcBef>
-              <a:spcAft>
-                <a:spcPts val="0"/>
-              </a:spcAft>
-              <a:buNone/>
-            </a:pPr>
-            <a:r>
-              <a:rPr lang="en-GB" sz="1800" b="1">
-                <a:latin typeface="Consolas"/>
-                <a:ea typeface="Consolas"/>
-                <a:cs typeface="Consolas"/>
-                <a:sym typeface="Consolas"/>
-              </a:rPr>
-              <a:t>Done</a:t>
-            </a:r>
-            <a:endParaRPr sz="1800" b="1">
-              <a:latin typeface="Consolas"/>
-              <a:ea typeface="Consolas"/>
-              <a:cs typeface="Consolas"/>
-              <a:sym typeface="Consolas"/>
-            </a:endParaRPr>
-          </a:p>
-        </p:txBody>
-      </p:sp>
-      <p:sp>
-        <p:nvSpPr>
-          <p:cNvPr id="197" name="Google Shape;197;p19">
-            <a:extLst>
-              <a:ext uri="{FF2B5EF4-FFF2-40B4-BE49-F238E27FC236}">
-                <a16:creationId xmlns:a16="http://schemas.microsoft.com/office/drawing/2014/main" id="{C0AA4A37-E3FC-D0D8-F541-C0268B9A6A61}"/>
-              </a:ext>
-            </a:extLst>
-          </p:cNvPr>
-          <p:cNvSpPr/>
-          <p:nvPr/>
-        </p:nvSpPr>
-        <p:spPr>
-          <a:xfrm>
-            <a:off x="167288" y="84312"/>
-            <a:ext cx="2410800" cy="480900"/>
-          </a:xfrm>
-          <a:prstGeom prst="roundRect">
-            <a:avLst>
-              <a:gd name="adj" fmla="val 16667"/>
-            </a:avLst>
-          </a:prstGeom>
-          <a:solidFill>
-            <a:srgbClr val="F9CB9C"/>
-          </a:solidFill>
-          <a:ln w="28575" cap="flat" cmpd="sng">
-            <a:solidFill>
-              <a:srgbClr val="B45F06"/>
-            </a:solidFill>
-            <a:prstDash val="solid"/>
-            <a:round/>
-            <a:headEnd type="none" w="sm" len="sm"/>
-            <a:tailEnd type="none" w="sm" len="sm"/>
-          </a:ln>
-        </p:spPr>
-        <p:txBody>
-          <a:bodyPr spcFirstLastPara="1" wrap="square" lIns="91425" tIns="91425" rIns="91425" bIns="91425" anchor="ctr" anchorCtr="0">
-            <a:noAutofit/>
-          </a:bodyPr>
-          <a:lstStyle/>
-          <a:p>
-            <a:pPr marL="0" lvl="0" indent="0" algn="ctr" rtl="0">
-              <a:spcBef>
-                <a:spcPts val="0"/>
-              </a:spcBef>
-              <a:spcAft>
-                <a:spcPts val="0"/>
-              </a:spcAft>
-              <a:buNone/>
-            </a:pPr>
-            <a:r>
-              <a:rPr lang="en-GB" sz="1800" b="1">
-                <a:latin typeface="Consolas"/>
-                <a:ea typeface="Consolas"/>
-                <a:cs typeface="Consolas"/>
-                <a:sym typeface="Consolas"/>
-              </a:rPr>
-              <a:t>Backlog</a:t>
-            </a:r>
-            <a:endParaRPr sz="1800" b="1">
-              <a:latin typeface="Consolas"/>
-              <a:ea typeface="Consolas"/>
-              <a:cs typeface="Consolas"/>
-              <a:sym typeface="Consolas"/>
-            </a:endParaRPr>
-          </a:p>
-        </p:txBody>
-      </p:sp>
-      <p:cxnSp>
-        <p:nvCxnSpPr>
-          <p:cNvPr id="204" name="Google Shape;204;p19">
-            <a:extLst>
-              <a:ext uri="{FF2B5EF4-FFF2-40B4-BE49-F238E27FC236}">
-                <a16:creationId xmlns:a16="http://schemas.microsoft.com/office/drawing/2014/main" id="{5630DD10-CC98-B8DD-3E1B-615AE34FC608}"/>
-              </a:ext>
-            </a:extLst>
-          </p:cNvPr>
-          <p:cNvCxnSpPr/>
-          <p:nvPr/>
-        </p:nvCxnSpPr>
-        <p:spPr>
-          <a:xfrm>
-            <a:off x="5607986" y="1626038"/>
-            <a:ext cx="16042200" cy="0"/>
-          </a:xfrm>
-          <a:prstGeom prst="straightConnector1">
-            <a:avLst/>
-          </a:prstGeom>
-          <a:noFill/>
-          <a:ln w="28575" cap="flat" cmpd="sng">
-            <a:solidFill>
-              <a:srgbClr val="999999"/>
-            </a:solidFill>
-            <a:prstDash val="dash"/>
-            <a:round/>
-            <a:headEnd type="none" w="med" len="med"/>
-            <a:tailEnd type="none" w="med" len="med"/>
-          </a:ln>
-        </p:spPr>
-      </p:cxnSp>
-      <p:cxnSp>
-        <p:nvCxnSpPr>
-          <p:cNvPr id="205" name="Google Shape;205;p19">
-            <a:extLst>
-              <a:ext uri="{FF2B5EF4-FFF2-40B4-BE49-F238E27FC236}">
-                <a16:creationId xmlns:a16="http://schemas.microsoft.com/office/drawing/2014/main" id="{615D1424-8A4F-1FE9-220C-61BD0365C743}"/>
-              </a:ext>
-            </a:extLst>
-          </p:cNvPr>
-          <p:cNvCxnSpPr/>
-          <p:nvPr/>
-        </p:nvCxnSpPr>
-        <p:spPr>
-          <a:xfrm>
-            <a:off x="5607986" y="3203476"/>
-            <a:ext cx="16042200" cy="0"/>
-          </a:xfrm>
-          <a:prstGeom prst="straightConnector1">
-            <a:avLst/>
-          </a:prstGeom>
-          <a:noFill/>
-          <a:ln w="28575" cap="flat" cmpd="sng">
-            <a:solidFill>
-              <a:srgbClr val="999999"/>
-            </a:solidFill>
-            <a:prstDash val="dash"/>
-            <a:round/>
-            <a:headEnd type="none" w="med" len="med"/>
-            <a:tailEnd type="none" w="med" len="med"/>
-          </a:ln>
-        </p:spPr>
-      </p:cxnSp>
-      <p:cxnSp>
-        <p:nvCxnSpPr>
-          <p:cNvPr id="206" name="Google Shape;206;p19">
-            <a:extLst>
-              <a:ext uri="{FF2B5EF4-FFF2-40B4-BE49-F238E27FC236}">
-                <a16:creationId xmlns:a16="http://schemas.microsoft.com/office/drawing/2014/main" id="{E2FD37CA-ECE5-DC4E-0E69-0F914A3B8655}"/>
-              </a:ext>
-            </a:extLst>
-          </p:cNvPr>
-          <p:cNvCxnSpPr/>
-          <p:nvPr/>
-        </p:nvCxnSpPr>
-        <p:spPr>
-          <a:xfrm>
-            <a:off x="5607986" y="4777838"/>
-            <a:ext cx="16042200" cy="0"/>
-          </a:xfrm>
-          <a:prstGeom prst="straightConnector1">
-            <a:avLst/>
-          </a:prstGeom>
-          <a:noFill/>
-          <a:ln w="28575" cap="flat" cmpd="sng">
-            <a:solidFill>
-              <a:srgbClr val="999999"/>
-            </a:solidFill>
-            <a:prstDash val="dash"/>
-            <a:round/>
-            <a:headEnd type="none" w="med" len="med"/>
-            <a:tailEnd type="none" w="med" len="med"/>
-          </a:ln>
-        </p:spPr>
-      </p:cxnSp>
-      <p:cxnSp>
-        <p:nvCxnSpPr>
-          <p:cNvPr id="207" name="Google Shape;207;p19">
-            <a:extLst>
-              <a:ext uri="{FF2B5EF4-FFF2-40B4-BE49-F238E27FC236}">
-                <a16:creationId xmlns:a16="http://schemas.microsoft.com/office/drawing/2014/main" id="{13A03627-502D-3E18-C334-49127C3E8E66}"/>
-              </a:ext>
-            </a:extLst>
-          </p:cNvPr>
-          <p:cNvCxnSpPr/>
-          <p:nvPr/>
-        </p:nvCxnSpPr>
-        <p:spPr>
-          <a:xfrm>
-            <a:off x="5607986" y="6353738"/>
-            <a:ext cx="16042200" cy="0"/>
-          </a:xfrm>
-          <a:prstGeom prst="straightConnector1">
-            <a:avLst/>
-          </a:prstGeom>
-          <a:noFill/>
-          <a:ln w="28575" cap="flat" cmpd="sng">
-            <a:solidFill>
-              <a:srgbClr val="999999"/>
-            </a:solidFill>
-            <a:prstDash val="dash"/>
-            <a:round/>
-            <a:headEnd type="none" w="med" len="med"/>
-            <a:tailEnd type="none" w="med" len="med"/>
-          </a:ln>
-        </p:spPr>
-      </p:cxnSp>
-      <p:cxnSp>
-        <p:nvCxnSpPr>
-          <p:cNvPr id="208" name="Google Shape;208;p19">
-            <a:extLst>
-              <a:ext uri="{FF2B5EF4-FFF2-40B4-BE49-F238E27FC236}">
-                <a16:creationId xmlns:a16="http://schemas.microsoft.com/office/drawing/2014/main" id="{E0EB0C5B-130D-E80D-8B82-3F86A7E1A423}"/>
-              </a:ext>
-            </a:extLst>
-          </p:cNvPr>
-          <p:cNvCxnSpPr/>
-          <p:nvPr/>
-        </p:nvCxnSpPr>
-        <p:spPr>
-          <a:xfrm>
-            <a:off x="5607986" y="7929638"/>
-            <a:ext cx="16042200" cy="0"/>
-          </a:xfrm>
-          <a:prstGeom prst="straightConnector1">
-            <a:avLst/>
-          </a:prstGeom>
-          <a:noFill/>
-          <a:ln w="28575" cap="flat" cmpd="sng">
-            <a:solidFill>
-              <a:srgbClr val="999999"/>
-            </a:solidFill>
-            <a:prstDash val="dash"/>
-            <a:round/>
-            <a:headEnd type="none" w="med" len="med"/>
-            <a:tailEnd type="none" w="med" len="med"/>
-          </a:ln>
-        </p:spPr>
-      </p:cxnSp>
-      <p:cxnSp>
-        <p:nvCxnSpPr>
-          <p:cNvPr id="209" name="Google Shape;209;p19">
-            <a:extLst>
-              <a:ext uri="{FF2B5EF4-FFF2-40B4-BE49-F238E27FC236}">
-                <a16:creationId xmlns:a16="http://schemas.microsoft.com/office/drawing/2014/main" id="{2D1E791E-AEC1-79F4-D100-B1A69ECC7F78}"/>
-              </a:ext>
-            </a:extLst>
-          </p:cNvPr>
-          <p:cNvCxnSpPr/>
-          <p:nvPr/>
-        </p:nvCxnSpPr>
-        <p:spPr>
-          <a:xfrm>
-            <a:off x="5607986" y="9505538"/>
-            <a:ext cx="16042200" cy="0"/>
-          </a:xfrm>
-          <a:prstGeom prst="straightConnector1">
-            <a:avLst/>
-          </a:prstGeom>
-          <a:noFill/>
-          <a:ln w="28575" cap="flat" cmpd="sng">
-            <a:solidFill>
-              <a:srgbClr val="999999"/>
-            </a:solidFill>
-            <a:prstDash val="dash"/>
-            <a:round/>
-            <a:headEnd type="none" w="med" len="med"/>
-            <a:tailEnd type="none" w="med" len="med"/>
-          </a:ln>
-        </p:spPr>
-      </p:cxnSp>
-      <p:cxnSp>
-        <p:nvCxnSpPr>
-          <p:cNvPr id="215" name="Google Shape;215;p19">
-            <a:extLst>
-              <a:ext uri="{FF2B5EF4-FFF2-40B4-BE49-F238E27FC236}">
-                <a16:creationId xmlns:a16="http://schemas.microsoft.com/office/drawing/2014/main" id="{397578CF-74EE-FB0B-5FFE-31CDD2000584}"/>
-              </a:ext>
-            </a:extLst>
-          </p:cNvPr>
-          <p:cNvCxnSpPr/>
-          <p:nvPr/>
-        </p:nvCxnSpPr>
-        <p:spPr>
-          <a:xfrm>
-            <a:off x="2874374" y="-28500"/>
-            <a:ext cx="0" cy="10857000"/>
-          </a:xfrm>
-          <a:prstGeom prst="straightConnector1">
-            <a:avLst/>
-          </a:prstGeom>
-          <a:noFill/>
-          <a:ln w="38100" cap="flat" cmpd="sng">
-            <a:solidFill>
-              <a:srgbClr val="5B0F00"/>
-            </a:solidFill>
-            <a:prstDash val="solid"/>
-            <a:round/>
-            <a:headEnd type="none" w="med" len="med"/>
-            <a:tailEnd type="none" w="med" len="med"/>
-          </a:ln>
-        </p:spPr>
-      </p:cxnSp>
-      <p:sp>
-        <p:nvSpPr>
-          <p:cNvPr id="2" name="Google Shape;74;p15">
-            <a:extLst>
-              <a:ext uri="{FF2B5EF4-FFF2-40B4-BE49-F238E27FC236}">
-                <a16:creationId xmlns:a16="http://schemas.microsoft.com/office/drawing/2014/main" id="{96DA7F0F-474D-DC08-11AB-BAAFB0A62A93}"/>
-              </a:ext>
-            </a:extLst>
-          </p:cNvPr>
-          <p:cNvSpPr/>
-          <p:nvPr/>
-        </p:nvSpPr>
-        <p:spPr>
-          <a:xfrm>
-            <a:off x="3197186" y="1385588"/>
-            <a:ext cx="2410800" cy="480900"/>
-          </a:xfrm>
-          <a:prstGeom prst="roundRect">
-            <a:avLst>
-              <a:gd name="adj" fmla="val 16667"/>
-            </a:avLst>
-          </a:prstGeom>
-          <a:solidFill>
-            <a:srgbClr val="E6B8AF"/>
-          </a:solidFill>
-          <a:ln w="28575" cap="flat" cmpd="sng">
-            <a:solidFill>
-              <a:srgbClr val="5B0F00"/>
-            </a:solidFill>
-            <a:prstDash val="solid"/>
-            <a:round/>
-            <a:headEnd type="none" w="sm" len="sm"/>
-            <a:tailEnd type="none" w="sm" len="sm"/>
-          </a:ln>
-        </p:spPr>
-        <p:txBody>
-          <a:bodyPr spcFirstLastPara="1" wrap="square" lIns="91425" tIns="91425" rIns="91425" bIns="91425" anchor="ctr" anchorCtr="0">
-            <a:noAutofit/>
-          </a:bodyPr>
-          <a:lstStyle/>
-          <a:p>
-            <a:pPr marL="0" lvl="0" indent="0" algn="ctr" rtl="0">
-              <a:spcBef>
-                <a:spcPts val="0"/>
-              </a:spcBef>
-              <a:spcAft>
-                <a:spcPts val="0"/>
-              </a:spcAft>
-              <a:buNone/>
-            </a:pPr>
-            <a:r>
               <a:rPr lang="en-GB" sz="1800" b="1" dirty="0">
                 <a:latin typeface="Consolas"/>
                 <a:ea typeface="Consolas"/>
                 <a:cs typeface="Consolas"/>
                 <a:sym typeface="Consolas"/>
               </a:rPr>
-              <a:t>68338</a:t>
+              <a:t>68245</a:t>
             </a:r>
             <a:endParaRPr sz="1800" b="1" dirty="0">
               <a:latin typeface="Consolas"/>
@@ -41474,10 +41542,10 @@
       </p:sp>
       <p:sp>
         <p:nvSpPr>
-          <p:cNvPr id="3" name="Google Shape;75;p15">
-            <a:extLst>
-              <a:ext uri="{FF2B5EF4-FFF2-40B4-BE49-F238E27FC236}">
-                <a16:creationId xmlns:a16="http://schemas.microsoft.com/office/drawing/2014/main" id="{03783755-5E3C-B531-9C95-73461D289697}"/>
+          <p:cNvPr id="4" name="Google Shape;76;p15">
+            <a:extLst>
+              <a:ext uri="{FF2B5EF4-FFF2-40B4-BE49-F238E27FC236}">
+                <a16:creationId xmlns:a16="http://schemas.microsoft.com/office/drawing/2014/main" id="{995E0582-E30F-A421-4D52-9EDC212DF340}"/>
               </a:ext>
             </a:extLst>
           </p:cNvPr>
@@ -41486,8 +41554,8 @@
         </p:nvSpPr>
         <p:spPr>
           <a:xfrm>
-            <a:off x="3197186" y="2961501"/>
-            <a:ext cx="2410800" cy="480900"/>
+            <a:off x="3175318" y="4537410"/>
+            <a:ext cx="2007930" cy="480900"/>
           </a:xfrm>
           <a:prstGeom prst="roundRect">
             <a:avLst>
@@ -41529,7 +41597,7 @@
                 <a:cs typeface="Consolas"/>
                 <a:sym typeface="Consolas"/>
               </a:rPr>
-              <a:t>68245</a:t>
+              <a:t>68725</a:t>
             </a:r>
             <a:endParaRPr sz="1800" b="1" dirty="0">
               <a:latin typeface="Consolas"/>
@@ -41542,10 +41610,10 @@
       </p:sp>
       <p:sp>
         <p:nvSpPr>
-          <p:cNvPr id="4" name="Google Shape;76;p15">
-            <a:extLst>
-              <a:ext uri="{FF2B5EF4-FFF2-40B4-BE49-F238E27FC236}">
-                <a16:creationId xmlns:a16="http://schemas.microsoft.com/office/drawing/2014/main" id="{F90A49D1-CBE8-B77F-68A9-D787B79A9D9A}"/>
+          <p:cNvPr id="5" name="Google Shape;77;p15">
+            <a:extLst>
+              <a:ext uri="{FF2B5EF4-FFF2-40B4-BE49-F238E27FC236}">
+                <a16:creationId xmlns:a16="http://schemas.microsoft.com/office/drawing/2014/main" id="{F27FAD52-AFA8-BEF8-CA76-C8FD4DB23EAF}"/>
               </a:ext>
             </a:extLst>
           </p:cNvPr>
@@ -41554,8 +41622,8 @@
         </p:nvSpPr>
         <p:spPr>
           <a:xfrm>
-            <a:off x="3197186" y="4537410"/>
-            <a:ext cx="2410800" cy="480900"/>
+            <a:off x="3175318" y="6113307"/>
+            <a:ext cx="2007930" cy="480900"/>
           </a:xfrm>
           <a:prstGeom prst="roundRect">
             <a:avLst>
@@ -41597,7 +41665,7 @@
                 <a:cs typeface="Consolas"/>
                 <a:sym typeface="Consolas"/>
               </a:rPr>
-              <a:t>68725</a:t>
+              <a:t>67912</a:t>
             </a:r>
             <a:endParaRPr sz="1800" b="1" dirty="0">
               <a:latin typeface="Consolas"/>
@@ -41610,10 +41678,10 @@
       </p:sp>
       <p:sp>
         <p:nvSpPr>
-          <p:cNvPr id="5" name="Google Shape;77;p15">
-            <a:extLst>
-              <a:ext uri="{FF2B5EF4-FFF2-40B4-BE49-F238E27FC236}">
-                <a16:creationId xmlns:a16="http://schemas.microsoft.com/office/drawing/2014/main" id="{55F4D89F-1EA0-A3DE-91CF-267F6454FB1D}"/>
+          <p:cNvPr id="6" name="Google Shape;78;p15">
+            <a:extLst>
+              <a:ext uri="{FF2B5EF4-FFF2-40B4-BE49-F238E27FC236}">
+                <a16:creationId xmlns:a16="http://schemas.microsoft.com/office/drawing/2014/main" id="{B9D1F774-8407-2124-C675-59110D172B76}"/>
               </a:ext>
             </a:extLst>
           </p:cNvPr>
@@ -41622,8 +41690,8 @@
         </p:nvSpPr>
         <p:spPr>
           <a:xfrm>
-            <a:off x="3197186" y="6113307"/>
-            <a:ext cx="2410800" cy="480900"/>
+            <a:off x="3175318" y="7689198"/>
+            <a:ext cx="2007930" cy="480900"/>
           </a:xfrm>
           <a:prstGeom prst="roundRect">
             <a:avLst>
@@ -41665,7 +41733,7 @@
                 <a:cs typeface="Consolas"/>
                 <a:sym typeface="Consolas"/>
               </a:rPr>
-              <a:t>67912</a:t>
+              <a:t>68180</a:t>
             </a:r>
             <a:endParaRPr sz="1800" b="1" dirty="0">
               <a:latin typeface="Consolas"/>
@@ -41678,10 +41746,10 @@
       </p:sp>
       <p:sp>
         <p:nvSpPr>
-          <p:cNvPr id="6" name="Google Shape;78;p15">
-            <a:extLst>
-              <a:ext uri="{FF2B5EF4-FFF2-40B4-BE49-F238E27FC236}">
-                <a16:creationId xmlns:a16="http://schemas.microsoft.com/office/drawing/2014/main" id="{4B5A6A0E-E9DA-3120-E027-A7EEDF101FF8}"/>
+          <p:cNvPr id="7" name="Google Shape;79;p15">
+            <a:extLst>
+              <a:ext uri="{FF2B5EF4-FFF2-40B4-BE49-F238E27FC236}">
+                <a16:creationId xmlns:a16="http://schemas.microsoft.com/office/drawing/2014/main" id="{417A76C0-D0B0-CC4E-5EC4-3BE394AD0ED4}"/>
               </a:ext>
             </a:extLst>
           </p:cNvPr>
@@ -41690,8 +41758,8 @@
         </p:nvSpPr>
         <p:spPr>
           <a:xfrm>
-            <a:off x="3197186" y="7689198"/>
-            <a:ext cx="2410800" cy="480900"/>
+            <a:off x="3175318" y="9265103"/>
+            <a:ext cx="2007930" cy="480900"/>
           </a:xfrm>
           <a:prstGeom prst="roundRect">
             <a:avLst>
@@ -41733,7 +41801,7 @@
                 <a:cs typeface="Consolas"/>
                 <a:sym typeface="Consolas"/>
               </a:rPr>
-              <a:t>68180</a:t>
+              <a:t>67870</a:t>
             </a:r>
             <a:endParaRPr sz="1800" b="1" dirty="0">
               <a:latin typeface="Consolas"/>
@@ -41746,10 +41814,10 @@
       </p:sp>
       <p:sp>
         <p:nvSpPr>
-          <p:cNvPr id="7" name="Google Shape;79;p15">
-            <a:extLst>
-              <a:ext uri="{FF2B5EF4-FFF2-40B4-BE49-F238E27FC236}">
-                <a16:creationId xmlns:a16="http://schemas.microsoft.com/office/drawing/2014/main" id="{D532E309-5929-93E1-D5B4-A551C1F4C51D}"/>
+          <p:cNvPr id="10" name="Google Shape;86;p15">
+            <a:extLst>
+              <a:ext uri="{FF2B5EF4-FFF2-40B4-BE49-F238E27FC236}">
+                <a16:creationId xmlns:a16="http://schemas.microsoft.com/office/drawing/2014/main" id="{D90A9DCC-71C6-F5F2-9B25-A6C9BD24DA1E}"/>
               </a:ext>
             </a:extLst>
           </p:cNvPr>
@@ -41758,76 +41826,8 @@
         </p:nvSpPr>
         <p:spPr>
           <a:xfrm>
-            <a:off x="3197186" y="9265103"/>
-            <a:ext cx="2410800" cy="480900"/>
-          </a:xfrm>
-          <a:prstGeom prst="roundRect">
-            <a:avLst>
-              <a:gd name="adj" fmla="val 16667"/>
-            </a:avLst>
-          </a:prstGeom>
-          <a:solidFill>
-            <a:srgbClr val="E6B8AF"/>
-          </a:solidFill>
-          <a:ln w="28575" cap="flat" cmpd="sng">
-            <a:solidFill>
-              <a:srgbClr val="5B0F00"/>
-            </a:solidFill>
-            <a:prstDash val="solid"/>
-            <a:round/>
-            <a:headEnd type="none" w="sm" len="sm"/>
-            <a:tailEnd type="none" w="sm" len="sm"/>
-          </a:ln>
-        </p:spPr>
-        <p:txBody>
-          <a:bodyPr spcFirstLastPara="1" wrap="square" lIns="91425" tIns="91425" rIns="91425" bIns="91425" anchor="ctr" anchorCtr="0">
-            <a:noAutofit/>
-          </a:bodyPr>
-          <a:lstStyle/>
-          <a:p>
-            <a:pPr marL="0" lvl="0" indent="0" algn="ctr" rtl="0">
-              <a:spcBef>
-                <a:spcPts val="0"/>
-              </a:spcBef>
-              <a:spcAft>
-                <a:spcPts val="0"/>
-              </a:spcAft>
-              <a:buNone/>
-            </a:pPr>
-            <a:r>
-              <a:rPr lang="en-GB" sz="1800" b="1" dirty="0">
-                <a:latin typeface="Consolas"/>
-                <a:ea typeface="Consolas"/>
-                <a:cs typeface="Consolas"/>
-                <a:sym typeface="Consolas"/>
-              </a:rPr>
-              <a:t>67870</a:t>
-            </a:r>
-            <a:endParaRPr sz="1800" b="1" dirty="0">
-              <a:latin typeface="Consolas"/>
-              <a:ea typeface="Consolas"/>
-              <a:cs typeface="Consolas"/>
-              <a:sym typeface="Consolas"/>
-            </a:endParaRPr>
-          </a:p>
-        </p:txBody>
-      </p:sp>
-      <p:sp>
-        <p:nvSpPr>
-          <p:cNvPr id="10" name="Google Shape;86;p15">
-            <a:extLst>
-              <a:ext uri="{FF2B5EF4-FFF2-40B4-BE49-F238E27FC236}">
-                <a16:creationId xmlns:a16="http://schemas.microsoft.com/office/drawing/2014/main" id="{48708324-E0A0-5213-3A3C-301AC91C451C}"/>
-              </a:ext>
-            </a:extLst>
-          </p:cNvPr>
-          <p:cNvSpPr/>
-          <p:nvPr/>
-        </p:nvSpPr>
-        <p:spPr>
-          <a:xfrm>
-            <a:off x="5839417" y="3639469"/>
-            <a:ext cx="2443410" cy="2106418"/>
+            <a:off x="5713295" y="3639469"/>
+            <a:ext cx="2569532" cy="2106418"/>
           </a:xfrm>
           <a:prstGeom prst="roundRect">
             <a:avLst>
@@ -41924,7 +41924,7 @@
                 <a:cs typeface="Consolas"/>
                 <a:sym typeface="Consolas"/>
               </a:rPr>
-              <a:t>terminar tsunami e earthquake spawners, no que toca às suas animações bem como alguma lógica de movimento de “builds”.</a:t>
+              <a:t>atualizar tsunami e earthquake spawners, no que toca às suas animações bem como alguma lógica de movimento de “builds”, para os finalizar</a:t>
             </a:r>
             <a:endParaRPr dirty="0">
               <a:latin typeface="Consolas"/>
@@ -41940,7 +41940,7 @@
           <p:cNvPr id="11" name="Google Shape;92;p15">
             <a:extLst>
               <a:ext uri="{FF2B5EF4-FFF2-40B4-BE49-F238E27FC236}">
-                <a16:creationId xmlns:a16="http://schemas.microsoft.com/office/drawing/2014/main" id="{40CFB6B6-521E-AE64-AE96-2272B1A7717A}"/>
+                <a16:creationId xmlns:a16="http://schemas.microsoft.com/office/drawing/2014/main" id="{04B649B4-0EF0-75A5-89EB-45E9C8084BD0}"/>
               </a:ext>
             </a:extLst>
           </p:cNvPr>
@@ -41949,8 +41949,8 @@
         </p:nvSpPr>
         <p:spPr>
           <a:xfrm>
-            <a:off x="5839417" y="5783003"/>
-            <a:ext cx="2443410" cy="1843569"/>
+            <a:off x="5713295" y="5783003"/>
+            <a:ext cx="2569532" cy="1843569"/>
           </a:xfrm>
           <a:prstGeom prst="roundRect">
             <a:avLst>
@@ -42047,7 +42047,7 @@
                 <a:cs typeface="Consolas"/>
                 <a:sym typeface="Consolas"/>
               </a:rPr>
-              <a:t>azer uma abstract class que ligue as 3 catastrofes naturais, para melhorar a qualidade do código.</a:t>
+              <a:t>azer uma abstract class que ligue as 3 catástrofes naturais, para melhorar a qualidade do código.</a:t>
             </a:r>
             <a:endParaRPr dirty="0">
               <a:latin typeface="Consolas"/>
@@ -42063,7 +42063,7 @@
           <p:cNvPr id="8" name="Google Shape;92;p15">
             <a:extLst>
               <a:ext uri="{FF2B5EF4-FFF2-40B4-BE49-F238E27FC236}">
-                <a16:creationId xmlns:a16="http://schemas.microsoft.com/office/drawing/2014/main" id="{CCD46F56-3C51-6A3C-0C88-451996AC6655}"/>
+                <a16:creationId xmlns:a16="http://schemas.microsoft.com/office/drawing/2014/main" id="{5CA63B75-4549-891B-16A3-4E203669A770}"/>
               </a:ext>
             </a:extLst>
           </p:cNvPr>
@@ -42072,8 +42072,8 @@
         </p:nvSpPr>
         <p:spPr>
           <a:xfrm>
-            <a:off x="5839417" y="768737"/>
-            <a:ext cx="2398246" cy="2817311"/>
+            <a:off x="5713295" y="768737"/>
+            <a:ext cx="2524368" cy="2817311"/>
           </a:xfrm>
           <a:prstGeom prst="roundRect">
             <a:avLst>
@@ -42170,7 +42170,7 @@
                 <a:cs typeface="Consolas"/>
                 <a:sym typeface="Consolas"/>
               </a:rPr>
-              <a:t>plicar sistema de ranking baseado nas waves derrotadas ecriar uma interface apelativa para o jogador, bem como finalizar as waves do modo semanal.</a:t>
+              <a:t>plicar sistema de ranking baseado nas waves derrotadas e criar uma interface apelativa para o jogador, bem como finalizar as waves do modo semanal, para dar como finalizado o modo semanal</a:t>
             </a:r>
             <a:r>
               <a:rPr lang="en-GB" dirty="0">
@@ -42192,10 +42192,10 @@
       </p:sp>
       <p:sp>
         <p:nvSpPr>
-          <p:cNvPr id="23" name="Google Shape;121;p16">
-            <a:extLst>
-              <a:ext uri="{FF2B5EF4-FFF2-40B4-BE49-F238E27FC236}">
-                <a16:creationId xmlns:a16="http://schemas.microsoft.com/office/drawing/2014/main" id="{4247313A-D8EF-9713-6623-0E758F057BED}"/>
+          <p:cNvPr id="19" name="Google Shape;92;p15">
+            <a:extLst>
+              <a:ext uri="{FF2B5EF4-FFF2-40B4-BE49-F238E27FC236}">
+                <a16:creationId xmlns:a16="http://schemas.microsoft.com/office/drawing/2014/main" id="{0DA2DE78-8FB8-B4BD-A07B-E3B77A35BFF9}"/>
               </a:ext>
             </a:extLst>
           </p:cNvPr>
@@ -42204,7 +42204,193 @@
         </p:nvSpPr>
         <p:spPr>
           <a:xfrm>
-            <a:off x="12758767" y="3997472"/>
+            <a:off x="5713295" y="7700804"/>
+            <a:ext cx="2569532" cy="2622560"/>
+          </a:xfrm>
+          <a:prstGeom prst="roundRect">
+            <a:avLst>
+              <a:gd name="adj" fmla="val 16667"/>
+            </a:avLst>
+          </a:prstGeom>
+          <a:solidFill>
+            <a:srgbClr val="D9EAD3"/>
+          </a:solidFill>
+          <a:ln w="28575" cap="flat" cmpd="sng">
+            <a:solidFill>
+              <a:srgbClr val="274E13"/>
+            </a:solidFill>
+            <a:prstDash val="solid"/>
+            <a:round/>
+            <a:headEnd type="none" w="sm" len="sm"/>
+            <a:tailEnd type="none" w="sm" len="sm"/>
+          </a:ln>
+        </p:spPr>
+        <p:txBody>
+          <a:bodyPr spcFirstLastPara="1" wrap="square" lIns="91425" tIns="91425" rIns="91425" bIns="91425" anchor="t" anchorCtr="0">
+            <a:noAutofit/>
+          </a:bodyPr>
+          <a:lstStyle/>
+          <a:p>
+            <a:pPr lvl="0"/>
+            <a:r>
+              <a:rPr lang="en-GB" dirty="0">
+                <a:latin typeface="Consolas"/>
+                <a:ea typeface="Consolas"/>
+                <a:cs typeface="Consolas"/>
+                <a:sym typeface="Consolas"/>
+              </a:rPr>
+              <a:t>US4: Como </a:t>
+            </a:r>
+            <a:r>
+              <a:rPr lang="en-GB" dirty="0" err="1">
+                <a:latin typeface="Consolas"/>
+                <a:ea typeface="Consolas"/>
+                <a:cs typeface="Consolas"/>
+                <a:sym typeface="Consolas"/>
+              </a:rPr>
+              <a:t>membro</a:t>
+            </a:r>
+            <a:r>
+              <a:rPr lang="en-GB" dirty="0">
+                <a:latin typeface="Consolas"/>
+                <a:ea typeface="Consolas"/>
+                <a:cs typeface="Consolas"/>
+                <a:sym typeface="Consolas"/>
+              </a:rPr>
+              <a:t> da </a:t>
+            </a:r>
+            <a:r>
+              <a:rPr lang="en-GB" dirty="0" err="1">
+                <a:latin typeface="Consolas"/>
+                <a:ea typeface="Consolas"/>
+                <a:cs typeface="Consolas"/>
+                <a:sym typeface="Consolas"/>
+              </a:rPr>
+              <a:t>equipa</a:t>
+            </a:r>
+            <a:r>
+              <a:rPr lang="en-GB" dirty="0">
+                <a:latin typeface="Consolas"/>
+                <a:ea typeface="Consolas"/>
+                <a:cs typeface="Consolas"/>
+                <a:sym typeface="Consolas"/>
+              </a:rPr>
+              <a:t> </a:t>
+            </a:r>
+            <a:r>
+              <a:rPr lang="en-GB" dirty="0" err="1">
+                <a:latin typeface="Consolas"/>
+                <a:ea typeface="Consolas"/>
+                <a:cs typeface="Consolas"/>
+                <a:sym typeface="Consolas"/>
+              </a:rPr>
+              <a:t>quero</a:t>
+            </a:r>
+            <a:r>
+              <a:rPr lang="en-GB" dirty="0">
+                <a:latin typeface="Consolas"/>
+                <a:ea typeface="Consolas"/>
+                <a:cs typeface="Consolas"/>
+                <a:sym typeface="Consolas"/>
+              </a:rPr>
+              <a:t> f</a:t>
+            </a:r>
+            <a:r>
+              <a:rPr lang="pt-PT" dirty="0">
+                <a:latin typeface="Consolas"/>
+                <a:ea typeface="Consolas"/>
+                <a:cs typeface="Consolas"/>
+                <a:sym typeface="Consolas"/>
+              </a:rPr>
+              <a:t>azer resource trader bot feature, com o qual os jogadores podem fazer trocas de uns recursos por outros durante o jogo, para dar utilidade aos minerais acumulados na capacidade máxima.</a:t>
+            </a:r>
+            <a:endParaRPr dirty="0">
+              <a:latin typeface="Consolas"/>
+              <a:ea typeface="Consolas"/>
+              <a:cs typeface="Consolas"/>
+              <a:sym typeface="Consolas"/>
+            </a:endParaRPr>
+          </a:p>
+        </p:txBody>
+      </p:sp>
+      <p:sp>
+        <p:nvSpPr>
+          <p:cNvPr id="22" name="Google Shape;92;p15">
+            <a:extLst>
+              <a:ext uri="{FF2B5EF4-FFF2-40B4-BE49-F238E27FC236}">
+                <a16:creationId xmlns:a16="http://schemas.microsoft.com/office/drawing/2014/main" id="{70A288AE-2E52-8162-0C48-76E47166A571}"/>
+              </a:ext>
+            </a:extLst>
+          </p:cNvPr>
+          <p:cNvSpPr/>
+          <p:nvPr/>
+        </p:nvSpPr>
+        <p:spPr>
+          <a:xfrm>
+            <a:off x="8388135" y="768737"/>
+            <a:ext cx="1300278" cy="9262289"/>
+          </a:xfrm>
+          <a:prstGeom prst="roundRect">
+            <a:avLst>
+              <a:gd name="adj" fmla="val 16667"/>
+            </a:avLst>
+          </a:prstGeom>
+          <a:solidFill>
+            <a:srgbClr val="D9EAD3"/>
+          </a:solidFill>
+          <a:ln w="28575" cap="flat" cmpd="sng">
+            <a:solidFill>
+              <a:srgbClr val="274E13"/>
+            </a:solidFill>
+            <a:prstDash val="solid"/>
+            <a:round/>
+            <a:headEnd type="none" w="sm" len="sm"/>
+            <a:tailEnd type="none" w="sm" len="sm"/>
+          </a:ln>
+        </p:spPr>
+        <p:txBody>
+          <a:bodyPr spcFirstLastPara="1" wrap="square" lIns="91425" tIns="91425" rIns="91425" bIns="91425" anchor="t" anchorCtr="0">
+            <a:noAutofit/>
+          </a:bodyPr>
+          <a:lstStyle/>
+          <a:p>
+            <a:pPr lvl="0"/>
+            <a:r>
+              <a:rPr lang="pt-PT" dirty="0">
+                <a:latin typeface="Consolas"/>
+                <a:ea typeface="Consolas"/>
+                <a:cs typeface="Consolas"/>
+                <a:sym typeface="Consolas"/>
+              </a:rPr>
+              <a:t>US5: como membro da equipa quero completar as tarefas do milestone 3 referentes às implementações que acrescentei ao jogo</a:t>
+            </a:r>
+          </a:p>
+          <a:p>
+            <a:pPr lvl="0"/>
+            <a:endParaRPr dirty="0">
+              <a:latin typeface="Consolas"/>
+              <a:ea typeface="Consolas"/>
+              <a:cs typeface="Consolas"/>
+              <a:sym typeface="Consolas"/>
+            </a:endParaRPr>
+          </a:p>
+        </p:txBody>
+      </p:sp>
+      <p:sp>
+        <p:nvSpPr>
+          <p:cNvPr id="9" name="Google Shape;121;p16">
+            <a:extLst>
+              <a:ext uri="{FF2B5EF4-FFF2-40B4-BE49-F238E27FC236}">
+                <a16:creationId xmlns:a16="http://schemas.microsoft.com/office/drawing/2014/main" id="{2F0EA794-C801-5616-42A1-89098D6E2334}"/>
+              </a:ext>
+            </a:extLst>
+          </p:cNvPr>
+          <p:cNvSpPr/>
+          <p:nvPr/>
+        </p:nvSpPr>
+        <p:spPr>
+          <a:xfrm>
+            <a:off x="12887787" y="4110128"/>
             <a:ext cx="2449608" cy="1155484"/>
           </a:xfrm>
           <a:prstGeom prst="roundRect">
@@ -42295,10 +42481,10 @@
       </p:sp>
       <p:sp>
         <p:nvSpPr>
-          <p:cNvPr id="12" name="Google Shape;121;p16">
-            <a:extLst>
-              <a:ext uri="{FF2B5EF4-FFF2-40B4-BE49-F238E27FC236}">
-                <a16:creationId xmlns:a16="http://schemas.microsoft.com/office/drawing/2014/main" id="{DEC6349A-3B21-DE30-1869-6ABBAE6E0099}"/>
+          <p:cNvPr id="20" name="Google Shape;121;p16">
+            <a:extLst>
+              <a:ext uri="{FF2B5EF4-FFF2-40B4-BE49-F238E27FC236}">
+                <a16:creationId xmlns:a16="http://schemas.microsoft.com/office/drawing/2014/main" id="{A3E20DA7-8B5A-0F0F-9D37-A089B739ECE9}"/>
               </a:ext>
             </a:extLst>
           </p:cNvPr>
@@ -42307,7 +42493,7 @@
         </p:nvSpPr>
         <p:spPr>
           <a:xfrm>
-            <a:off x="12797575" y="5795890"/>
+            <a:off x="12926595" y="5908546"/>
             <a:ext cx="2410800" cy="1112620"/>
           </a:xfrm>
           <a:prstGeom prst="roundRect">
@@ -42380,10 +42566,10 @@
       </p:sp>
       <p:sp>
         <p:nvSpPr>
-          <p:cNvPr id="13" name="Google Shape;121;p16">
-            <a:extLst>
-              <a:ext uri="{FF2B5EF4-FFF2-40B4-BE49-F238E27FC236}">
-                <a16:creationId xmlns:a16="http://schemas.microsoft.com/office/drawing/2014/main" id="{E80262C6-9266-606F-D9EE-27119EE22BFA}"/>
+          <p:cNvPr id="24" name="Google Shape;121;p16">
+            <a:extLst>
+              <a:ext uri="{FF2B5EF4-FFF2-40B4-BE49-F238E27FC236}">
+                <a16:creationId xmlns:a16="http://schemas.microsoft.com/office/drawing/2014/main" id="{BB530975-E58D-00EE-C8D3-6A128B8BF325}"/>
               </a:ext>
             </a:extLst>
           </p:cNvPr>
@@ -42392,7 +42578,7 @@
         </p:nvSpPr>
         <p:spPr>
           <a:xfrm>
-            <a:off x="15532407" y="1077944"/>
+            <a:off x="15661427" y="1190600"/>
             <a:ext cx="2410800" cy="2364426"/>
           </a:xfrm>
           <a:prstGeom prst="roundRect">
@@ -42493,10 +42679,10 @@
       </p:sp>
       <p:sp>
         <p:nvSpPr>
-          <p:cNvPr id="14" name="Google Shape;121;p16">
-            <a:extLst>
-              <a:ext uri="{FF2B5EF4-FFF2-40B4-BE49-F238E27FC236}">
-                <a16:creationId xmlns:a16="http://schemas.microsoft.com/office/drawing/2014/main" id="{654D7C70-80B2-69D0-2411-A7CF48D17290}"/>
+          <p:cNvPr id="25" name="Google Shape;121;p16">
+            <a:extLst>
+              <a:ext uri="{FF2B5EF4-FFF2-40B4-BE49-F238E27FC236}">
+                <a16:creationId xmlns:a16="http://schemas.microsoft.com/office/drawing/2014/main" id="{25F3125C-E737-A2EA-0CE4-882D05496CB0}"/>
               </a:ext>
             </a:extLst>
           </p:cNvPr>
@@ -42505,7 +42691,7 @@
         </p:nvSpPr>
         <p:spPr>
           <a:xfrm>
-            <a:off x="12797575" y="7626572"/>
+            <a:off x="12926595" y="7739228"/>
             <a:ext cx="2410800" cy="2056805"/>
           </a:xfrm>
           <a:prstGeom prst="roundRect">
@@ -42606,10 +42792,10 @@
       </p:sp>
       <p:sp>
         <p:nvSpPr>
-          <p:cNvPr id="19" name="Google Shape;92;p15">
-            <a:extLst>
-              <a:ext uri="{FF2B5EF4-FFF2-40B4-BE49-F238E27FC236}">
-                <a16:creationId xmlns:a16="http://schemas.microsoft.com/office/drawing/2014/main" id="{6E8390E4-399A-DF49-E4D5-147AD22F7ADF}"/>
+          <p:cNvPr id="26" name="Google Shape;121;p16">
+            <a:extLst>
+              <a:ext uri="{FF2B5EF4-FFF2-40B4-BE49-F238E27FC236}">
+                <a16:creationId xmlns:a16="http://schemas.microsoft.com/office/drawing/2014/main" id="{AE024C6C-669A-C236-31F5-D3F5BAC10FA2}"/>
               </a:ext>
             </a:extLst>
           </p:cNvPr>
@@ -42618,193 +42804,7 @@
         </p:nvSpPr>
         <p:spPr>
           <a:xfrm>
-            <a:off x="5863765" y="7700804"/>
-            <a:ext cx="2419062" cy="2330222"/>
-          </a:xfrm>
-          <a:prstGeom prst="roundRect">
-            <a:avLst>
-              <a:gd name="adj" fmla="val 16667"/>
-            </a:avLst>
-          </a:prstGeom>
-          <a:solidFill>
-            <a:srgbClr val="D9EAD3"/>
-          </a:solidFill>
-          <a:ln w="28575" cap="flat" cmpd="sng">
-            <a:solidFill>
-              <a:srgbClr val="274E13"/>
-            </a:solidFill>
-            <a:prstDash val="solid"/>
-            <a:round/>
-            <a:headEnd type="none" w="sm" len="sm"/>
-            <a:tailEnd type="none" w="sm" len="sm"/>
-          </a:ln>
-        </p:spPr>
-        <p:txBody>
-          <a:bodyPr spcFirstLastPara="1" wrap="square" lIns="91425" tIns="91425" rIns="91425" bIns="91425" anchor="t" anchorCtr="0">
-            <a:noAutofit/>
-          </a:bodyPr>
-          <a:lstStyle/>
-          <a:p>
-            <a:pPr lvl="0"/>
-            <a:r>
-              <a:rPr lang="en-GB" dirty="0">
-                <a:latin typeface="Consolas"/>
-                <a:ea typeface="Consolas"/>
-                <a:cs typeface="Consolas"/>
-                <a:sym typeface="Consolas"/>
-              </a:rPr>
-              <a:t>US4: Como </a:t>
-            </a:r>
-            <a:r>
-              <a:rPr lang="en-GB" dirty="0" err="1">
-                <a:latin typeface="Consolas"/>
-                <a:ea typeface="Consolas"/>
-                <a:cs typeface="Consolas"/>
-                <a:sym typeface="Consolas"/>
-              </a:rPr>
-              <a:t>membro</a:t>
-            </a:r>
-            <a:r>
-              <a:rPr lang="en-GB" dirty="0">
-                <a:latin typeface="Consolas"/>
-                <a:ea typeface="Consolas"/>
-                <a:cs typeface="Consolas"/>
-                <a:sym typeface="Consolas"/>
-              </a:rPr>
-              <a:t> da </a:t>
-            </a:r>
-            <a:r>
-              <a:rPr lang="en-GB" dirty="0" err="1">
-                <a:latin typeface="Consolas"/>
-                <a:ea typeface="Consolas"/>
-                <a:cs typeface="Consolas"/>
-                <a:sym typeface="Consolas"/>
-              </a:rPr>
-              <a:t>equipa</a:t>
-            </a:r>
-            <a:r>
-              <a:rPr lang="en-GB" dirty="0">
-                <a:latin typeface="Consolas"/>
-                <a:ea typeface="Consolas"/>
-                <a:cs typeface="Consolas"/>
-                <a:sym typeface="Consolas"/>
-              </a:rPr>
-              <a:t> </a:t>
-            </a:r>
-            <a:r>
-              <a:rPr lang="en-GB" dirty="0" err="1">
-                <a:latin typeface="Consolas"/>
-                <a:ea typeface="Consolas"/>
-                <a:cs typeface="Consolas"/>
-                <a:sym typeface="Consolas"/>
-              </a:rPr>
-              <a:t>quero</a:t>
-            </a:r>
-            <a:r>
-              <a:rPr lang="en-GB" dirty="0">
-                <a:latin typeface="Consolas"/>
-                <a:ea typeface="Consolas"/>
-                <a:cs typeface="Consolas"/>
-                <a:sym typeface="Consolas"/>
-              </a:rPr>
-              <a:t> f</a:t>
-            </a:r>
-            <a:r>
-              <a:rPr lang="pt-PT" dirty="0">
-                <a:latin typeface="Consolas"/>
-                <a:ea typeface="Consolas"/>
-                <a:cs typeface="Consolas"/>
-                <a:sym typeface="Consolas"/>
-              </a:rPr>
-              <a:t>azer resource trader bot feature, com o qual os jogadores podem fazer trocas de uns recursos por outros durante o jogo</a:t>
-            </a:r>
-            <a:endParaRPr dirty="0">
-              <a:latin typeface="Consolas"/>
-              <a:ea typeface="Consolas"/>
-              <a:cs typeface="Consolas"/>
-              <a:sym typeface="Consolas"/>
-            </a:endParaRPr>
-          </a:p>
-        </p:txBody>
-      </p:sp>
-      <p:sp>
-        <p:nvSpPr>
-          <p:cNvPr id="22" name="Google Shape;92;p15">
-            <a:extLst>
-              <a:ext uri="{FF2B5EF4-FFF2-40B4-BE49-F238E27FC236}">
-                <a16:creationId xmlns:a16="http://schemas.microsoft.com/office/drawing/2014/main" id="{7D41EB2D-0BD1-9CFB-2A02-1FFEA0E5321A}"/>
-              </a:ext>
-            </a:extLst>
-          </p:cNvPr>
-          <p:cNvSpPr/>
-          <p:nvPr/>
-        </p:nvSpPr>
-        <p:spPr>
-          <a:xfrm>
-            <a:off x="8388135" y="768737"/>
-            <a:ext cx="1300278" cy="9262289"/>
-          </a:xfrm>
-          <a:prstGeom prst="roundRect">
-            <a:avLst>
-              <a:gd name="adj" fmla="val 16667"/>
-            </a:avLst>
-          </a:prstGeom>
-          <a:solidFill>
-            <a:srgbClr val="D9EAD3"/>
-          </a:solidFill>
-          <a:ln w="28575" cap="flat" cmpd="sng">
-            <a:solidFill>
-              <a:srgbClr val="274E13"/>
-            </a:solidFill>
-            <a:prstDash val="solid"/>
-            <a:round/>
-            <a:headEnd type="none" w="sm" len="sm"/>
-            <a:tailEnd type="none" w="sm" len="sm"/>
-          </a:ln>
-        </p:spPr>
-        <p:txBody>
-          <a:bodyPr spcFirstLastPara="1" wrap="square" lIns="91425" tIns="91425" rIns="91425" bIns="91425" anchor="t" anchorCtr="0">
-            <a:noAutofit/>
-          </a:bodyPr>
-          <a:lstStyle/>
-          <a:p>
-            <a:pPr lvl="0"/>
-            <a:r>
-              <a:rPr lang="pt-PT" dirty="0">
-                <a:latin typeface="Consolas"/>
-                <a:ea typeface="Consolas"/>
-                <a:cs typeface="Consolas"/>
-                <a:sym typeface="Consolas"/>
-              </a:rPr>
-              <a:t>US5: como membro da equipa quero completar as tarefas do milestone 3 referentes às implementações que acrescentei ao jogo</a:t>
-            </a:r>
-          </a:p>
-          <a:p>
-            <a:pPr lvl="0"/>
-            <a:endParaRPr dirty="0">
-              <a:latin typeface="Consolas"/>
-              <a:ea typeface="Consolas"/>
-              <a:cs typeface="Consolas"/>
-              <a:sym typeface="Consolas"/>
-            </a:endParaRPr>
-          </a:p>
-        </p:txBody>
-      </p:sp>
-      <p:sp>
-        <p:nvSpPr>
-          <p:cNvPr id="24" name="Google Shape;121;p16">
-            <a:extLst>
-              <a:ext uri="{FF2B5EF4-FFF2-40B4-BE49-F238E27FC236}">
-                <a16:creationId xmlns:a16="http://schemas.microsoft.com/office/drawing/2014/main" id="{57224E8B-A947-5DAE-85EE-62DC2AB5CEBD}"/>
-              </a:ext>
-            </a:extLst>
-          </p:cNvPr>
-          <p:cNvSpPr/>
-          <p:nvPr/>
-        </p:nvSpPr>
-        <p:spPr>
-          <a:xfrm>
-            <a:off x="12758767" y="1077943"/>
+            <a:off x="12887787" y="1190599"/>
             <a:ext cx="2410800" cy="2376933"/>
           </a:xfrm>
           <a:prstGeom prst="roundRect">
@@ -42940,7 +42940,7 @@
           <p:cNvPr id="27" name="Google Shape;121;p16">
             <a:extLst>
               <a:ext uri="{FF2B5EF4-FFF2-40B4-BE49-F238E27FC236}">
-                <a16:creationId xmlns:a16="http://schemas.microsoft.com/office/drawing/2014/main" id="{BB385921-257B-DE86-B1AA-DE2114A8AF79}"/>
+                <a16:creationId xmlns:a16="http://schemas.microsoft.com/office/drawing/2014/main" id="{00F6EA12-28EA-3031-1516-966485234C81}"/>
               </a:ext>
             </a:extLst>
           </p:cNvPr>
@@ -42949,7 +42949,7 @@
         </p:nvSpPr>
         <p:spPr>
           <a:xfrm>
-            <a:off x="9998786" y="3997472"/>
+            <a:off x="10127806" y="4110128"/>
             <a:ext cx="2410800" cy="5938269"/>
           </a:xfrm>
           <a:prstGeom prst="roundRect">
@@ -43083,7 +43083,7 @@
     </p:spTree>
     <p:extLst>
       <p:ext uri="{BB962C8B-B14F-4D97-AF65-F5344CB8AC3E}">
-        <p14:creationId xmlns:p14="http://schemas.microsoft.com/office/powerpoint/2010/main" val="1628635303"/>
+        <p14:creationId xmlns:p14="http://schemas.microsoft.com/office/powerpoint/2010/main" val="2450869942"/>
       </p:ext>
     </p:extLst>
   </p:cSld>
@@ -43101,7 +43101,7 @@
         <p:cNvPr id="1" name="Shape 189">
           <a:extLst>
             <a:ext uri="{FF2B5EF4-FFF2-40B4-BE49-F238E27FC236}">
-              <a16:creationId xmlns:a16="http://schemas.microsoft.com/office/drawing/2014/main" id="{C0B08FDD-9788-56F0-A14B-47622BE0901C}"/>
+              <a16:creationId xmlns:a16="http://schemas.microsoft.com/office/drawing/2014/main" id="{E263FB97-7E34-DD45-1003-C5D152A47D38}"/>
             </a:ext>
           </a:extLst>
         </p:cNvPr>
@@ -43121,7 +43121,7 @@
           <p:cNvPr id="190" name="Google Shape;190;p19">
             <a:extLst>
               <a:ext uri="{FF2B5EF4-FFF2-40B4-BE49-F238E27FC236}">
-                <a16:creationId xmlns:a16="http://schemas.microsoft.com/office/drawing/2014/main" id="{FF3DF361-9E05-5329-DDF8-8C4220280652}"/>
+                <a16:creationId xmlns:a16="http://schemas.microsoft.com/office/drawing/2014/main" id="{1EE30EBB-D6AB-54CA-6914-501244D7D46E}"/>
               </a:ext>
             </a:extLst>
           </p:cNvPr>
@@ -43130,7 +43130,7 @@
         </p:nvCxnSpPr>
         <p:spPr>
           <a:xfrm>
-            <a:off x="5758457" y="-28500"/>
+            <a:off x="5607986" y="-57237"/>
             <a:ext cx="0" cy="10857000"/>
           </a:xfrm>
           <a:prstGeom prst="straightConnector1">
@@ -43153,7 +43153,7 @@
           <p:cNvPr id="191" name="Google Shape;191;p19">
             <a:extLst>
               <a:ext uri="{FF2B5EF4-FFF2-40B4-BE49-F238E27FC236}">
-                <a16:creationId xmlns:a16="http://schemas.microsoft.com/office/drawing/2014/main" id="{483FC68F-B23B-9F79-1777-E75A56A5B90B}"/>
+                <a16:creationId xmlns:a16="http://schemas.microsoft.com/office/drawing/2014/main" id="{F6D879D2-F277-C824-A147-AEF871EA25B9}"/>
               </a:ext>
             </a:extLst>
           </p:cNvPr>
@@ -43162,8 +43162,8 @@
         </p:nvSpPr>
         <p:spPr>
           <a:xfrm>
-            <a:off x="3197186" y="84312"/>
-            <a:ext cx="2410800" cy="480900"/>
+            <a:off x="3175318" y="84312"/>
+            <a:ext cx="2007930" cy="480900"/>
           </a:xfrm>
           <a:prstGeom prst="roundRect">
             <a:avLst>
@@ -43221,7 +43221,7 @@
           <p:cNvPr id="192" name="Google Shape;192;p19">
             <a:extLst>
               <a:ext uri="{FF2B5EF4-FFF2-40B4-BE49-F238E27FC236}">
-                <a16:creationId xmlns:a16="http://schemas.microsoft.com/office/drawing/2014/main" id="{507E8E29-705C-DFBA-FAB0-5C8D64690A6C}"/>
+                <a16:creationId xmlns:a16="http://schemas.microsoft.com/office/drawing/2014/main" id="{070529AF-AF94-15C0-7202-969B5708E137}"/>
               </a:ext>
             </a:extLst>
           </p:cNvPr>
@@ -43230,7 +43230,7 @@
         </p:nvSpPr>
         <p:spPr>
           <a:xfrm>
-            <a:off x="6281635" y="84312"/>
+            <a:off x="6032725" y="84312"/>
             <a:ext cx="3406779" cy="480900"/>
           </a:xfrm>
           <a:prstGeom prst="roundRect">
@@ -43267,13 +43267,81 @@
               <a:buNone/>
             </a:pPr>
             <a:r>
+              <a:rPr lang="en-GB" sz="1800" b="1" dirty="0">
+                <a:latin typeface="Consolas"/>
+                <a:ea typeface="Consolas"/>
+                <a:cs typeface="Consolas"/>
+                <a:sym typeface="Consolas"/>
+              </a:rPr>
+              <a:t>Story</a:t>
+            </a:r>
+            <a:endParaRPr sz="1800" b="1" dirty="0">
+              <a:latin typeface="Consolas"/>
+              <a:ea typeface="Consolas"/>
+              <a:cs typeface="Consolas"/>
+              <a:sym typeface="Consolas"/>
+            </a:endParaRPr>
+          </a:p>
+        </p:txBody>
+      </p:sp>
+      <p:sp>
+        <p:nvSpPr>
+          <p:cNvPr id="193" name="Google Shape;193;p19">
+            <a:extLst>
+              <a:ext uri="{FF2B5EF4-FFF2-40B4-BE49-F238E27FC236}">
+                <a16:creationId xmlns:a16="http://schemas.microsoft.com/office/drawing/2014/main" id="{31167D3E-4F43-913B-93CF-73DE8B06F9F1}"/>
+              </a:ext>
+            </a:extLst>
+          </p:cNvPr>
+          <p:cNvSpPr/>
+          <p:nvPr/>
+        </p:nvSpPr>
+        <p:spPr>
+          <a:xfrm>
+            <a:off x="9896006" y="121794"/>
+            <a:ext cx="2410800" cy="480900"/>
+          </a:xfrm>
+          <a:prstGeom prst="roundRect">
+            <a:avLst>
+              <a:gd name="adj" fmla="val 16667"/>
+            </a:avLst>
+          </a:prstGeom>
+          <a:solidFill>
+            <a:srgbClr val="F9CB9C"/>
+          </a:solidFill>
+          <a:ln w="28575" cap="flat" cmpd="sng">
+            <a:solidFill>
+              <a:srgbClr val="B45F06"/>
+            </a:solidFill>
+            <a:prstDash val="solid"/>
+            <a:round/>
+            <a:headEnd type="none" w="sm" len="sm"/>
+            <a:tailEnd type="none" w="sm" len="sm"/>
+          </a:ln>
+        </p:spPr>
+        <p:txBody>
+          <a:bodyPr spcFirstLastPara="1" wrap="square" lIns="91425" tIns="91425" rIns="91425" bIns="91425" anchor="ctr" anchorCtr="0">
+            <a:noAutofit/>
+          </a:bodyPr>
+          <a:lstStyle/>
+          <a:p>
+            <a:pPr marL="0" lvl="0" indent="0" algn="ctr" rtl="0">
+              <a:spcBef>
+                <a:spcPts val="0"/>
+              </a:spcBef>
+              <a:spcAft>
+                <a:spcPts val="0"/>
+              </a:spcAft>
+              <a:buNone/>
+            </a:pPr>
+            <a:r>
               <a:rPr lang="en-GB" sz="1800" b="1">
                 <a:latin typeface="Consolas"/>
                 <a:ea typeface="Consolas"/>
                 <a:cs typeface="Consolas"/>
                 <a:sym typeface="Consolas"/>
               </a:rPr>
-              <a:t>Story</a:t>
+              <a:t>To Do</a:t>
             </a:r>
             <a:endParaRPr sz="1800" b="1">
               <a:latin typeface="Consolas"/>
@@ -43286,10 +43354,10 @@
       </p:sp>
       <p:sp>
         <p:nvSpPr>
-          <p:cNvPr id="193" name="Google Shape;193;p19">
-            <a:extLst>
-              <a:ext uri="{FF2B5EF4-FFF2-40B4-BE49-F238E27FC236}">
-                <a16:creationId xmlns:a16="http://schemas.microsoft.com/office/drawing/2014/main" id="{EB22822B-1C79-DBCC-610C-4D4516E406BE}"/>
+          <p:cNvPr id="194" name="Google Shape;194;p19">
+            <a:extLst>
+              <a:ext uri="{FF2B5EF4-FFF2-40B4-BE49-F238E27FC236}">
+                <a16:creationId xmlns:a16="http://schemas.microsoft.com/office/drawing/2014/main" id="{61E483FB-5B46-7DFA-9963-A689B39F985D}"/>
               </a:ext>
             </a:extLst>
           </p:cNvPr>
@@ -43298,7 +43366,7 @@
         </p:nvSpPr>
         <p:spPr>
           <a:xfrm>
-            <a:off x="9896006" y="121794"/>
+            <a:off x="12758767" y="136415"/>
             <a:ext cx="2410800" cy="480900"/>
           </a:xfrm>
           <a:prstGeom prst="roundRect">
@@ -43335,13 +43403,81 @@
               <a:buNone/>
             </a:pPr>
             <a:r>
+              <a:rPr lang="en-GB" sz="1800" b="1" dirty="0">
+                <a:latin typeface="Consolas"/>
+                <a:ea typeface="Consolas"/>
+                <a:cs typeface="Consolas"/>
+                <a:sym typeface="Consolas"/>
+              </a:rPr>
+              <a:t>Doing</a:t>
+            </a:r>
+            <a:endParaRPr sz="1800" b="1" dirty="0">
+              <a:latin typeface="Consolas"/>
+              <a:ea typeface="Consolas"/>
+              <a:cs typeface="Consolas"/>
+              <a:sym typeface="Consolas"/>
+            </a:endParaRPr>
+          </a:p>
+        </p:txBody>
+      </p:sp>
+      <p:sp>
+        <p:nvSpPr>
+          <p:cNvPr id="195" name="Google Shape;195;p19">
+            <a:extLst>
+              <a:ext uri="{FF2B5EF4-FFF2-40B4-BE49-F238E27FC236}">
+                <a16:creationId xmlns:a16="http://schemas.microsoft.com/office/drawing/2014/main" id="{B9EF9CFA-457C-B88F-5A8A-CB0C74F74D9C}"/>
+              </a:ext>
+            </a:extLst>
+          </p:cNvPr>
+          <p:cNvSpPr/>
+          <p:nvPr/>
+        </p:nvSpPr>
+        <p:spPr>
+          <a:xfrm>
+            <a:off x="15532407" y="84312"/>
+            <a:ext cx="2410800" cy="480900"/>
+          </a:xfrm>
+          <a:prstGeom prst="roundRect">
+            <a:avLst>
+              <a:gd name="adj" fmla="val 16667"/>
+            </a:avLst>
+          </a:prstGeom>
+          <a:solidFill>
+            <a:srgbClr val="F9CB9C"/>
+          </a:solidFill>
+          <a:ln w="28575" cap="flat" cmpd="sng">
+            <a:solidFill>
+              <a:srgbClr val="B45F06"/>
+            </a:solidFill>
+            <a:prstDash val="solid"/>
+            <a:round/>
+            <a:headEnd type="none" w="sm" len="sm"/>
+            <a:tailEnd type="none" w="sm" len="sm"/>
+          </a:ln>
+        </p:spPr>
+        <p:txBody>
+          <a:bodyPr spcFirstLastPara="1" wrap="square" lIns="91425" tIns="91425" rIns="91425" bIns="91425" anchor="ctr" anchorCtr="0">
+            <a:noAutofit/>
+          </a:bodyPr>
+          <a:lstStyle/>
+          <a:p>
+            <a:pPr marL="0" lvl="0" indent="0" algn="ctr" rtl="0">
+              <a:spcBef>
+                <a:spcPts val="0"/>
+              </a:spcBef>
+              <a:spcAft>
+                <a:spcPts val="0"/>
+              </a:spcAft>
+              <a:buNone/>
+            </a:pPr>
+            <a:r>
               <a:rPr lang="en-GB" sz="1800" b="1">
                 <a:latin typeface="Consolas"/>
                 <a:ea typeface="Consolas"/>
                 <a:cs typeface="Consolas"/>
                 <a:sym typeface="Consolas"/>
               </a:rPr>
-              <a:t>To Do</a:t>
+              <a:t>Review</a:t>
             </a:r>
             <a:endParaRPr sz="1800" b="1">
               <a:latin typeface="Consolas"/>
@@ -43354,10 +43490,10 @@
       </p:sp>
       <p:sp>
         <p:nvSpPr>
-          <p:cNvPr id="194" name="Google Shape;194;p19">
-            <a:extLst>
-              <a:ext uri="{FF2B5EF4-FFF2-40B4-BE49-F238E27FC236}">
-                <a16:creationId xmlns:a16="http://schemas.microsoft.com/office/drawing/2014/main" id="{13ED885A-FD95-0B1B-4F17-ACF55E09BFB3}"/>
+          <p:cNvPr id="196" name="Google Shape;196;p19">
+            <a:extLst>
+              <a:ext uri="{FF2B5EF4-FFF2-40B4-BE49-F238E27FC236}">
+                <a16:creationId xmlns:a16="http://schemas.microsoft.com/office/drawing/2014/main" id="{891265A7-6187-89B1-29D7-16E28EC87C71}"/>
               </a:ext>
             </a:extLst>
           </p:cNvPr>
@@ -43366,7 +43502,7 @@
         </p:nvSpPr>
         <p:spPr>
           <a:xfrm>
-            <a:off x="12758767" y="136415"/>
+            <a:off x="18668888" y="84312"/>
             <a:ext cx="2410800" cy="480900"/>
           </a:xfrm>
           <a:prstGeom prst="roundRect">
@@ -43403,13 +43539,373 @@
               <a:buNone/>
             </a:pPr>
             <a:r>
+              <a:rPr lang="en-GB" sz="1800" b="1">
+                <a:latin typeface="Consolas"/>
+                <a:ea typeface="Consolas"/>
+                <a:cs typeface="Consolas"/>
+                <a:sym typeface="Consolas"/>
+              </a:rPr>
+              <a:t>Done</a:t>
+            </a:r>
+            <a:endParaRPr sz="1800" b="1">
+              <a:latin typeface="Consolas"/>
+              <a:ea typeface="Consolas"/>
+              <a:cs typeface="Consolas"/>
+              <a:sym typeface="Consolas"/>
+            </a:endParaRPr>
+          </a:p>
+        </p:txBody>
+      </p:sp>
+      <p:sp>
+        <p:nvSpPr>
+          <p:cNvPr id="197" name="Google Shape;197;p19">
+            <a:extLst>
+              <a:ext uri="{FF2B5EF4-FFF2-40B4-BE49-F238E27FC236}">
+                <a16:creationId xmlns:a16="http://schemas.microsoft.com/office/drawing/2014/main" id="{6912DA6E-D758-DFDC-4B67-CDB1A69525BF}"/>
+              </a:ext>
+            </a:extLst>
+          </p:cNvPr>
+          <p:cNvSpPr/>
+          <p:nvPr/>
+        </p:nvSpPr>
+        <p:spPr>
+          <a:xfrm>
+            <a:off x="167288" y="84312"/>
+            <a:ext cx="2410800" cy="480900"/>
+          </a:xfrm>
+          <a:prstGeom prst="roundRect">
+            <a:avLst>
+              <a:gd name="adj" fmla="val 16667"/>
+            </a:avLst>
+          </a:prstGeom>
+          <a:solidFill>
+            <a:srgbClr val="F9CB9C"/>
+          </a:solidFill>
+          <a:ln w="28575" cap="flat" cmpd="sng">
+            <a:solidFill>
+              <a:srgbClr val="B45F06"/>
+            </a:solidFill>
+            <a:prstDash val="solid"/>
+            <a:round/>
+            <a:headEnd type="none" w="sm" len="sm"/>
+            <a:tailEnd type="none" w="sm" len="sm"/>
+          </a:ln>
+        </p:spPr>
+        <p:txBody>
+          <a:bodyPr spcFirstLastPara="1" wrap="square" lIns="91425" tIns="91425" rIns="91425" bIns="91425" anchor="ctr" anchorCtr="0">
+            <a:noAutofit/>
+          </a:bodyPr>
+          <a:lstStyle/>
+          <a:p>
+            <a:pPr marL="0" lvl="0" indent="0" algn="ctr" rtl="0">
+              <a:spcBef>
+                <a:spcPts val="0"/>
+              </a:spcBef>
+              <a:spcAft>
+                <a:spcPts val="0"/>
+              </a:spcAft>
+              <a:buNone/>
+            </a:pPr>
+            <a:r>
+              <a:rPr lang="en-GB" sz="1800" b="1">
+                <a:latin typeface="Consolas"/>
+                <a:ea typeface="Consolas"/>
+                <a:cs typeface="Consolas"/>
+                <a:sym typeface="Consolas"/>
+              </a:rPr>
+              <a:t>Backlog</a:t>
+            </a:r>
+            <a:endParaRPr sz="1800" b="1">
+              <a:latin typeface="Consolas"/>
+              <a:ea typeface="Consolas"/>
+              <a:cs typeface="Consolas"/>
+              <a:sym typeface="Consolas"/>
+            </a:endParaRPr>
+          </a:p>
+        </p:txBody>
+      </p:sp>
+      <p:cxnSp>
+        <p:nvCxnSpPr>
+          <p:cNvPr id="204" name="Google Shape;204;p19">
+            <a:extLst>
+              <a:ext uri="{FF2B5EF4-FFF2-40B4-BE49-F238E27FC236}">
+                <a16:creationId xmlns:a16="http://schemas.microsoft.com/office/drawing/2014/main" id="{73206BF8-1D67-AE95-E9FE-B48C5994718C}"/>
+              </a:ext>
+            </a:extLst>
+          </p:cNvPr>
+          <p:cNvCxnSpPr/>
+          <p:nvPr/>
+        </p:nvCxnSpPr>
+        <p:spPr>
+          <a:xfrm>
+            <a:off x="5607986" y="1626038"/>
+            <a:ext cx="16042200" cy="0"/>
+          </a:xfrm>
+          <a:prstGeom prst="straightConnector1">
+            <a:avLst/>
+          </a:prstGeom>
+          <a:noFill/>
+          <a:ln w="28575" cap="flat" cmpd="sng">
+            <a:solidFill>
+              <a:srgbClr val="999999"/>
+            </a:solidFill>
+            <a:prstDash val="dash"/>
+            <a:round/>
+            <a:headEnd type="none" w="med" len="med"/>
+            <a:tailEnd type="none" w="med" len="med"/>
+          </a:ln>
+        </p:spPr>
+      </p:cxnSp>
+      <p:cxnSp>
+        <p:nvCxnSpPr>
+          <p:cNvPr id="205" name="Google Shape;205;p19">
+            <a:extLst>
+              <a:ext uri="{FF2B5EF4-FFF2-40B4-BE49-F238E27FC236}">
+                <a16:creationId xmlns:a16="http://schemas.microsoft.com/office/drawing/2014/main" id="{20B1CEEE-B139-5AB4-E110-2C497F970C9E}"/>
+              </a:ext>
+            </a:extLst>
+          </p:cNvPr>
+          <p:cNvCxnSpPr/>
+          <p:nvPr/>
+        </p:nvCxnSpPr>
+        <p:spPr>
+          <a:xfrm>
+            <a:off x="5607986" y="3203476"/>
+            <a:ext cx="16042200" cy="0"/>
+          </a:xfrm>
+          <a:prstGeom prst="straightConnector1">
+            <a:avLst/>
+          </a:prstGeom>
+          <a:noFill/>
+          <a:ln w="28575" cap="flat" cmpd="sng">
+            <a:solidFill>
+              <a:srgbClr val="999999"/>
+            </a:solidFill>
+            <a:prstDash val="dash"/>
+            <a:round/>
+            <a:headEnd type="none" w="med" len="med"/>
+            <a:tailEnd type="none" w="med" len="med"/>
+          </a:ln>
+        </p:spPr>
+      </p:cxnSp>
+      <p:cxnSp>
+        <p:nvCxnSpPr>
+          <p:cNvPr id="206" name="Google Shape;206;p19">
+            <a:extLst>
+              <a:ext uri="{FF2B5EF4-FFF2-40B4-BE49-F238E27FC236}">
+                <a16:creationId xmlns:a16="http://schemas.microsoft.com/office/drawing/2014/main" id="{AEF225D2-CAD0-0FD6-4C74-343CDAA787C3}"/>
+              </a:ext>
+            </a:extLst>
+          </p:cNvPr>
+          <p:cNvCxnSpPr/>
+          <p:nvPr/>
+        </p:nvCxnSpPr>
+        <p:spPr>
+          <a:xfrm>
+            <a:off x="5607986" y="4777838"/>
+            <a:ext cx="16042200" cy="0"/>
+          </a:xfrm>
+          <a:prstGeom prst="straightConnector1">
+            <a:avLst/>
+          </a:prstGeom>
+          <a:noFill/>
+          <a:ln w="28575" cap="flat" cmpd="sng">
+            <a:solidFill>
+              <a:srgbClr val="999999"/>
+            </a:solidFill>
+            <a:prstDash val="dash"/>
+            <a:round/>
+            <a:headEnd type="none" w="med" len="med"/>
+            <a:tailEnd type="none" w="med" len="med"/>
+          </a:ln>
+        </p:spPr>
+      </p:cxnSp>
+      <p:cxnSp>
+        <p:nvCxnSpPr>
+          <p:cNvPr id="207" name="Google Shape;207;p19">
+            <a:extLst>
+              <a:ext uri="{FF2B5EF4-FFF2-40B4-BE49-F238E27FC236}">
+                <a16:creationId xmlns:a16="http://schemas.microsoft.com/office/drawing/2014/main" id="{B588FB24-EF34-A074-D026-745E8FC3EB54}"/>
+              </a:ext>
+            </a:extLst>
+          </p:cNvPr>
+          <p:cNvCxnSpPr/>
+          <p:nvPr/>
+        </p:nvCxnSpPr>
+        <p:spPr>
+          <a:xfrm>
+            <a:off x="5607986" y="6353738"/>
+            <a:ext cx="16042200" cy="0"/>
+          </a:xfrm>
+          <a:prstGeom prst="straightConnector1">
+            <a:avLst/>
+          </a:prstGeom>
+          <a:noFill/>
+          <a:ln w="28575" cap="flat" cmpd="sng">
+            <a:solidFill>
+              <a:srgbClr val="999999"/>
+            </a:solidFill>
+            <a:prstDash val="dash"/>
+            <a:round/>
+            <a:headEnd type="none" w="med" len="med"/>
+            <a:tailEnd type="none" w="med" len="med"/>
+          </a:ln>
+        </p:spPr>
+      </p:cxnSp>
+      <p:cxnSp>
+        <p:nvCxnSpPr>
+          <p:cNvPr id="208" name="Google Shape;208;p19">
+            <a:extLst>
+              <a:ext uri="{FF2B5EF4-FFF2-40B4-BE49-F238E27FC236}">
+                <a16:creationId xmlns:a16="http://schemas.microsoft.com/office/drawing/2014/main" id="{57DA269E-10A2-B3D9-5CC3-26FE3F119D40}"/>
+              </a:ext>
+            </a:extLst>
+          </p:cNvPr>
+          <p:cNvCxnSpPr/>
+          <p:nvPr/>
+        </p:nvCxnSpPr>
+        <p:spPr>
+          <a:xfrm>
+            <a:off x="5607986" y="7929638"/>
+            <a:ext cx="16042200" cy="0"/>
+          </a:xfrm>
+          <a:prstGeom prst="straightConnector1">
+            <a:avLst/>
+          </a:prstGeom>
+          <a:noFill/>
+          <a:ln w="28575" cap="flat" cmpd="sng">
+            <a:solidFill>
+              <a:srgbClr val="999999"/>
+            </a:solidFill>
+            <a:prstDash val="dash"/>
+            <a:round/>
+            <a:headEnd type="none" w="med" len="med"/>
+            <a:tailEnd type="none" w="med" len="med"/>
+          </a:ln>
+        </p:spPr>
+      </p:cxnSp>
+      <p:cxnSp>
+        <p:nvCxnSpPr>
+          <p:cNvPr id="209" name="Google Shape;209;p19">
+            <a:extLst>
+              <a:ext uri="{FF2B5EF4-FFF2-40B4-BE49-F238E27FC236}">
+                <a16:creationId xmlns:a16="http://schemas.microsoft.com/office/drawing/2014/main" id="{2E23F63F-A8C3-4043-E16D-346D64D4EB6F}"/>
+              </a:ext>
+            </a:extLst>
+          </p:cNvPr>
+          <p:cNvCxnSpPr/>
+          <p:nvPr/>
+        </p:nvCxnSpPr>
+        <p:spPr>
+          <a:xfrm>
+            <a:off x="5607986" y="9505538"/>
+            <a:ext cx="16042200" cy="0"/>
+          </a:xfrm>
+          <a:prstGeom prst="straightConnector1">
+            <a:avLst/>
+          </a:prstGeom>
+          <a:noFill/>
+          <a:ln w="28575" cap="flat" cmpd="sng">
+            <a:solidFill>
+              <a:srgbClr val="999999"/>
+            </a:solidFill>
+            <a:prstDash val="dash"/>
+            <a:round/>
+            <a:headEnd type="none" w="med" len="med"/>
+            <a:tailEnd type="none" w="med" len="med"/>
+          </a:ln>
+        </p:spPr>
+      </p:cxnSp>
+      <p:cxnSp>
+        <p:nvCxnSpPr>
+          <p:cNvPr id="215" name="Google Shape;215;p19">
+            <a:extLst>
+              <a:ext uri="{FF2B5EF4-FFF2-40B4-BE49-F238E27FC236}">
+                <a16:creationId xmlns:a16="http://schemas.microsoft.com/office/drawing/2014/main" id="{A4AA4700-26B9-C425-74DC-295A02928CA0}"/>
+              </a:ext>
+            </a:extLst>
+          </p:cNvPr>
+          <p:cNvCxnSpPr/>
+          <p:nvPr/>
+        </p:nvCxnSpPr>
+        <p:spPr>
+          <a:xfrm>
+            <a:off x="2874374" y="-28500"/>
+            <a:ext cx="0" cy="10857000"/>
+          </a:xfrm>
+          <a:prstGeom prst="straightConnector1">
+            <a:avLst/>
+          </a:prstGeom>
+          <a:noFill/>
+          <a:ln w="38100" cap="flat" cmpd="sng">
+            <a:solidFill>
+              <a:srgbClr val="5B0F00"/>
+            </a:solidFill>
+            <a:prstDash val="solid"/>
+            <a:round/>
+            <a:headEnd type="none" w="med" len="med"/>
+            <a:tailEnd type="none" w="med" len="med"/>
+          </a:ln>
+        </p:spPr>
+      </p:cxnSp>
+      <p:sp>
+        <p:nvSpPr>
+          <p:cNvPr id="2" name="Google Shape;74;p15">
+            <a:extLst>
+              <a:ext uri="{FF2B5EF4-FFF2-40B4-BE49-F238E27FC236}">
+                <a16:creationId xmlns:a16="http://schemas.microsoft.com/office/drawing/2014/main" id="{DC6C77C6-43EC-2C4B-BFA6-8B7AE19CEC28}"/>
+              </a:ext>
+            </a:extLst>
+          </p:cNvPr>
+          <p:cNvSpPr/>
+          <p:nvPr/>
+        </p:nvSpPr>
+        <p:spPr>
+          <a:xfrm>
+            <a:off x="3175318" y="1385588"/>
+            <a:ext cx="2007930" cy="480900"/>
+          </a:xfrm>
+          <a:prstGeom prst="roundRect">
+            <a:avLst>
+              <a:gd name="adj" fmla="val 16667"/>
+            </a:avLst>
+          </a:prstGeom>
+          <a:solidFill>
+            <a:srgbClr val="E6B8AF"/>
+          </a:solidFill>
+          <a:ln w="28575" cap="flat" cmpd="sng">
+            <a:solidFill>
+              <a:srgbClr val="5B0F00"/>
+            </a:solidFill>
+            <a:prstDash val="solid"/>
+            <a:round/>
+            <a:headEnd type="none" w="sm" len="sm"/>
+            <a:tailEnd type="none" w="sm" len="sm"/>
+          </a:ln>
+        </p:spPr>
+        <p:txBody>
+          <a:bodyPr spcFirstLastPara="1" wrap="square" lIns="91425" tIns="91425" rIns="91425" bIns="91425" anchor="ctr" anchorCtr="0">
+            <a:noAutofit/>
+          </a:bodyPr>
+          <a:lstStyle/>
+          <a:p>
+            <a:pPr marL="0" lvl="0" indent="0" algn="ctr" rtl="0">
+              <a:spcBef>
+                <a:spcPts val="0"/>
+              </a:spcBef>
+              <a:spcAft>
+                <a:spcPts val="0"/>
+              </a:spcAft>
+              <a:buNone/>
+            </a:pPr>
+            <a:r>
               <a:rPr lang="en-GB" sz="1800" b="1" dirty="0">
                 <a:latin typeface="Consolas"/>
                 <a:ea typeface="Consolas"/>
                 <a:cs typeface="Consolas"/>
                 <a:sym typeface="Consolas"/>
               </a:rPr>
-              <a:t>Doing</a:t>
+              <a:t>68338</a:t>
             </a:r>
             <a:endParaRPr sz="1800" b="1" dirty="0">
               <a:latin typeface="Consolas"/>
@@ -43422,10 +43918,10 @@
       </p:sp>
       <p:sp>
         <p:nvSpPr>
-          <p:cNvPr id="195" name="Google Shape;195;p19">
-            <a:extLst>
-              <a:ext uri="{FF2B5EF4-FFF2-40B4-BE49-F238E27FC236}">
-                <a16:creationId xmlns:a16="http://schemas.microsoft.com/office/drawing/2014/main" id="{9E1869F0-5E5B-590C-B212-5C62FB0E8E67}"/>
+          <p:cNvPr id="3" name="Google Shape;75;p15">
+            <a:extLst>
+              <a:ext uri="{FF2B5EF4-FFF2-40B4-BE49-F238E27FC236}">
+                <a16:creationId xmlns:a16="http://schemas.microsoft.com/office/drawing/2014/main" id="{96960A0E-9FD5-41A1-6043-46901515128D}"/>
               </a:ext>
             </a:extLst>
           </p:cNvPr>
@@ -43434,8 +43930,8 @@
         </p:nvSpPr>
         <p:spPr>
           <a:xfrm>
-            <a:off x="15532407" y="84312"/>
-            <a:ext cx="2410800" cy="480900"/>
+            <a:off x="3175318" y="2961501"/>
+            <a:ext cx="2007930" cy="480900"/>
           </a:xfrm>
           <a:prstGeom prst="roundRect">
             <a:avLst>
@@ -43443,11 +43939,11 @@
             </a:avLst>
           </a:prstGeom>
           <a:solidFill>
-            <a:srgbClr val="F9CB9C"/>
+            <a:srgbClr val="E6B8AF"/>
           </a:solidFill>
           <a:ln w="28575" cap="flat" cmpd="sng">
             <a:solidFill>
-              <a:srgbClr val="B45F06"/>
+              <a:srgbClr val="5B0F00"/>
             </a:solidFill>
             <a:prstDash val="solid"/>
             <a:round/>
@@ -43471,441 +43967,13 @@
               <a:buNone/>
             </a:pPr>
             <a:r>
-              <a:rPr lang="en-GB" sz="1800" b="1">
-                <a:latin typeface="Consolas"/>
-                <a:ea typeface="Consolas"/>
-                <a:cs typeface="Consolas"/>
-                <a:sym typeface="Consolas"/>
-              </a:rPr>
-              <a:t>Review</a:t>
-            </a:r>
-            <a:endParaRPr sz="1800" b="1">
-              <a:latin typeface="Consolas"/>
-              <a:ea typeface="Consolas"/>
-              <a:cs typeface="Consolas"/>
-              <a:sym typeface="Consolas"/>
-            </a:endParaRPr>
-          </a:p>
-        </p:txBody>
-      </p:sp>
-      <p:sp>
-        <p:nvSpPr>
-          <p:cNvPr id="196" name="Google Shape;196;p19">
-            <a:extLst>
-              <a:ext uri="{FF2B5EF4-FFF2-40B4-BE49-F238E27FC236}">
-                <a16:creationId xmlns:a16="http://schemas.microsoft.com/office/drawing/2014/main" id="{10B6CAB3-AF2F-5483-CD6A-5822A56F13B4}"/>
-              </a:ext>
-            </a:extLst>
-          </p:cNvPr>
-          <p:cNvSpPr/>
-          <p:nvPr/>
-        </p:nvSpPr>
-        <p:spPr>
-          <a:xfrm>
-            <a:off x="18668888" y="84312"/>
-            <a:ext cx="2410800" cy="480900"/>
-          </a:xfrm>
-          <a:prstGeom prst="roundRect">
-            <a:avLst>
-              <a:gd name="adj" fmla="val 16667"/>
-            </a:avLst>
-          </a:prstGeom>
-          <a:solidFill>
-            <a:srgbClr val="F9CB9C"/>
-          </a:solidFill>
-          <a:ln w="28575" cap="flat" cmpd="sng">
-            <a:solidFill>
-              <a:srgbClr val="B45F06"/>
-            </a:solidFill>
-            <a:prstDash val="solid"/>
-            <a:round/>
-            <a:headEnd type="none" w="sm" len="sm"/>
-            <a:tailEnd type="none" w="sm" len="sm"/>
-          </a:ln>
-        </p:spPr>
-        <p:txBody>
-          <a:bodyPr spcFirstLastPara="1" wrap="square" lIns="91425" tIns="91425" rIns="91425" bIns="91425" anchor="ctr" anchorCtr="0">
-            <a:noAutofit/>
-          </a:bodyPr>
-          <a:lstStyle/>
-          <a:p>
-            <a:pPr marL="0" lvl="0" indent="0" algn="ctr" rtl="0">
-              <a:spcBef>
-                <a:spcPts val="0"/>
-              </a:spcBef>
-              <a:spcAft>
-                <a:spcPts val="0"/>
-              </a:spcAft>
-              <a:buNone/>
-            </a:pPr>
-            <a:r>
-              <a:rPr lang="en-GB" sz="1800" b="1">
-                <a:latin typeface="Consolas"/>
-                <a:ea typeface="Consolas"/>
-                <a:cs typeface="Consolas"/>
-                <a:sym typeface="Consolas"/>
-              </a:rPr>
-              <a:t>Done</a:t>
-            </a:r>
-            <a:endParaRPr sz="1800" b="1">
-              <a:latin typeface="Consolas"/>
-              <a:ea typeface="Consolas"/>
-              <a:cs typeface="Consolas"/>
-              <a:sym typeface="Consolas"/>
-            </a:endParaRPr>
-          </a:p>
-        </p:txBody>
-      </p:sp>
-      <p:sp>
-        <p:nvSpPr>
-          <p:cNvPr id="197" name="Google Shape;197;p19">
-            <a:extLst>
-              <a:ext uri="{FF2B5EF4-FFF2-40B4-BE49-F238E27FC236}">
-                <a16:creationId xmlns:a16="http://schemas.microsoft.com/office/drawing/2014/main" id="{DF087BA1-C5D2-192E-6B81-D36F6B2F911D}"/>
-              </a:ext>
-            </a:extLst>
-          </p:cNvPr>
-          <p:cNvSpPr/>
-          <p:nvPr/>
-        </p:nvSpPr>
-        <p:spPr>
-          <a:xfrm>
-            <a:off x="167288" y="84312"/>
-            <a:ext cx="2410800" cy="480900"/>
-          </a:xfrm>
-          <a:prstGeom prst="roundRect">
-            <a:avLst>
-              <a:gd name="adj" fmla="val 16667"/>
-            </a:avLst>
-          </a:prstGeom>
-          <a:solidFill>
-            <a:srgbClr val="F9CB9C"/>
-          </a:solidFill>
-          <a:ln w="28575" cap="flat" cmpd="sng">
-            <a:solidFill>
-              <a:srgbClr val="B45F06"/>
-            </a:solidFill>
-            <a:prstDash val="solid"/>
-            <a:round/>
-            <a:headEnd type="none" w="sm" len="sm"/>
-            <a:tailEnd type="none" w="sm" len="sm"/>
-          </a:ln>
-        </p:spPr>
-        <p:txBody>
-          <a:bodyPr spcFirstLastPara="1" wrap="square" lIns="91425" tIns="91425" rIns="91425" bIns="91425" anchor="ctr" anchorCtr="0">
-            <a:noAutofit/>
-          </a:bodyPr>
-          <a:lstStyle/>
-          <a:p>
-            <a:pPr marL="0" lvl="0" indent="0" algn="ctr" rtl="0">
-              <a:spcBef>
-                <a:spcPts val="0"/>
-              </a:spcBef>
-              <a:spcAft>
-                <a:spcPts val="0"/>
-              </a:spcAft>
-              <a:buNone/>
-            </a:pPr>
-            <a:r>
-              <a:rPr lang="en-GB" sz="1800" b="1">
-                <a:latin typeface="Consolas"/>
-                <a:ea typeface="Consolas"/>
-                <a:cs typeface="Consolas"/>
-                <a:sym typeface="Consolas"/>
-              </a:rPr>
-              <a:t>Backlog</a:t>
-            </a:r>
-            <a:endParaRPr sz="1800" b="1">
-              <a:latin typeface="Consolas"/>
-              <a:ea typeface="Consolas"/>
-              <a:cs typeface="Consolas"/>
-              <a:sym typeface="Consolas"/>
-            </a:endParaRPr>
-          </a:p>
-        </p:txBody>
-      </p:sp>
-      <p:cxnSp>
-        <p:nvCxnSpPr>
-          <p:cNvPr id="204" name="Google Shape;204;p19">
-            <a:extLst>
-              <a:ext uri="{FF2B5EF4-FFF2-40B4-BE49-F238E27FC236}">
-                <a16:creationId xmlns:a16="http://schemas.microsoft.com/office/drawing/2014/main" id="{2B521640-ACBC-27C7-BED0-535BDC8C8F8D}"/>
-              </a:ext>
-            </a:extLst>
-          </p:cNvPr>
-          <p:cNvCxnSpPr/>
-          <p:nvPr/>
-        </p:nvCxnSpPr>
-        <p:spPr>
-          <a:xfrm>
-            <a:off x="5607986" y="1626038"/>
-            <a:ext cx="16042200" cy="0"/>
-          </a:xfrm>
-          <a:prstGeom prst="straightConnector1">
-            <a:avLst/>
-          </a:prstGeom>
-          <a:noFill/>
-          <a:ln w="28575" cap="flat" cmpd="sng">
-            <a:solidFill>
-              <a:srgbClr val="999999"/>
-            </a:solidFill>
-            <a:prstDash val="dash"/>
-            <a:round/>
-            <a:headEnd type="none" w="med" len="med"/>
-            <a:tailEnd type="none" w="med" len="med"/>
-          </a:ln>
-        </p:spPr>
-      </p:cxnSp>
-      <p:cxnSp>
-        <p:nvCxnSpPr>
-          <p:cNvPr id="205" name="Google Shape;205;p19">
-            <a:extLst>
-              <a:ext uri="{FF2B5EF4-FFF2-40B4-BE49-F238E27FC236}">
-                <a16:creationId xmlns:a16="http://schemas.microsoft.com/office/drawing/2014/main" id="{DFEFDB1B-C7B5-C2F0-5A78-96BD9D3E15DB}"/>
-              </a:ext>
-            </a:extLst>
-          </p:cNvPr>
-          <p:cNvCxnSpPr/>
-          <p:nvPr/>
-        </p:nvCxnSpPr>
-        <p:spPr>
-          <a:xfrm>
-            <a:off x="5607986" y="3203476"/>
-            <a:ext cx="16042200" cy="0"/>
-          </a:xfrm>
-          <a:prstGeom prst="straightConnector1">
-            <a:avLst/>
-          </a:prstGeom>
-          <a:noFill/>
-          <a:ln w="28575" cap="flat" cmpd="sng">
-            <a:solidFill>
-              <a:srgbClr val="999999"/>
-            </a:solidFill>
-            <a:prstDash val="dash"/>
-            <a:round/>
-            <a:headEnd type="none" w="med" len="med"/>
-            <a:tailEnd type="none" w="med" len="med"/>
-          </a:ln>
-        </p:spPr>
-      </p:cxnSp>
-      <p:cxnSp>
-        <p:nvCxnSpPr>
-          <p:cNvPr id="206" name="Google Shape;206;p19">
-            <a:extLst>
-              <a:ext uri="{FF2B5EF4-FFF2-40B4-BE49-F238E27FC236}">
-                <a16:creationId xmlns:a16="http://schemas.microsoft.com/office/drawing/2014/main" id="{C5598281-C186-ED93-0B9E-FA71813E06BF}"/>
-              </a:ext>
-            </a:extLst>
-          </p:cNvPr>
-          <p:cNvCxnSpPr/>
-          <p:nvPr/>
-        </p:nvCxnSpPr>
-        <p:spPr>
-          <a:xfrm>
-            <a:off x="5607986" y="4777838"/>
-            <a:ext cx="16042200" cy="0"/>
-          </a:xfrm>
-          <a:prstGeom prst="straightConnector1">
-            <a:avLst/>
-          </a:prstGeom>
-          <a:noFill/>
-          <a:ln w="28575" cap="flat" cmpd="sng">
-            <a:solidFill>
-              <a:srgbClr val="999999"/>
-            </a:solidFill>
-            <a:prstDash val="dash"/>
-            <a:round/>
-            <a:headEnd type="none" w="med" len="med"/>
-            <a:tailEnd type="none" w="med" len="med"/>
-          </a:ln>
-        </p:spPr>
-      </p:cxnSp>
-      <p:cxnSp>
-        <p:nvCxnSpPr>
-          <p:cNvPr id="207" name="Google Shape;207;p19">
-            <a:extLst>
-              <a:ext uri="{FF2B5EF4-FFF2-40B4-BE49-F238E27FC236}">
-                <a16:creationId xmlns:a16="http://schemas.microsoft.com/office/drawing/2014/main" id="{B449461E-7A61-54FE-B440-D3BC861F004C}"/>
-              </a:ext>
-            </a:extLst>
-          </p:cNvPr>
-          <p:cNvCxnSpPr/>
-          <p:nvPr/>
-        </p:nvCxnSpPr>
-        <p:spPr>
-          <a:xfrm>
-            <a:off x="5607986" y="6353738"/>
-            <a:ext cx="16042200" cy="0"/>
-          </a:xfrm>
-          <a:prstGeom prst="straightConnector1">
-            <a:avLst/>
-          </a:prstGeom>
-          <a:noFill/>
-          <a:ln w="28575" cap="flat" cmpd="sng">
-            <a:solidFill>
-              <a:srgbClr val="999999"/>
-            </a:solidFill>
-            <a:prstDash val="dash"/>
-            <a:round/>
-            <a:headEnd type="none" w="med" len="med"/>
-            <a:tailEnd type="none" w="med" len="med"/>
-          </a:ln>
-        </p:spPr>
-      </p:cxnSp>
-      <p:cxnSp>
-        <p:nvCxnSpPr>
-          <p:cNvPr id="208" name="Google Shape;208;p19">
-            <a:extLst>
-              <a:ext uri="{FF2B5EF4-FFF2-40B4-BE49-F238E27FC236}">
-                <a16:creationId xmlns:a16="http://schemas.microsoft.com/office/drawing/2014/main" id="{7AE63AC8-C98F-9423-6E0B-6B9E14123968}"/>
-              </a:ext>
-            </a:extLst>
-          </p:cNvPr>
-          <p:cNvCxnSpPr/>
-          <p:nvPr/>
-        </p:nvCxnSpPr>
-        <p:spPr>
-          <a:xfrm>
-            <a:off x="5607986" y="7929638"/>
-            <a:ext cx="16042200" cy="0"/>
-          </a:xfrm>
-          <a:prstGeom prst="straightConnector1">
-            <a:avLst/>
-          </a:prstGeom>
-          <a:noFill/>
-          <a:ln w="28575" cap="flat" cmpd="sng">
-            <a:solidFill>
-              <a:srgbClr val="999999"/>
-            </a:solidFill>
-            <a:prstDash val="dash"/>
-            <a:round/>
-            <a:headEnd type="none" w="med" len="med"/>
-            <a:tailEnd type="none" w="med" len="med"/>
-          </a:ln>
-        </p:spPr>
-      </p:cxnSp>
-      <p:cxnSp>
-        <p:nvCxnSpPr>
-          <p:cNvPr id="209" name="Google Shape;209;p19">
-            <a:extLst>
-              <a:ext uri="{FF2B5EF4-FFF2-40B4-BE49-F238E27FC236}">
-                <a16:creationId xmlns:a16="http://schemas.microsoft.com/office/drawing/2014/main" id="{96C2826A-7F19-DC95-B194-FDF0D40C709D}"/>
-              </a:ext>
-            </a:extLst>
-          </p:cNvPr>
-          <p:cNvCxnSpPr/>
-          <p:nvPr/>
-        </p:nvCxnSpPr>
-        <p:spPr>
-          <a:xfrm>
-            <a:off x="5607986" y="9505538"/>
-            <a:ext cx="16042200" cy="0"/>
-          </a:xfrm>
-          <a:prstGeom prst="straightConnector1">
-            <a:avLst/>
-          </a:prstGeom>
-          <a:noFill/>
-          <a:ln w="28575" cap="flat" cmpd="sng">
-            <a:solidFill>
-              <a:srgbClr val="999999"/>
-            </a:solidFill>
-            <a:prstDash val="dash"/>
-            <a:round/>
-            <a:headEnd type="none" w="med" len="med"/>
-            <a:tailEnd type="none" w="med" len="med"/>
-          </a:ln>
-        </p:spPr>
-      </p:cxnSp>
-      <p:cxnSp>
-        <p:nvCxnSpPr>
-          <p:cNvPr id="215" name="Google Shape;215;p19">
-            <a:extLst>
-              <a:ext uri="{FF2B5EF4-FFF2-40B4-BE49-F238E27FC236}">
-                <a16:creationId xmlns:a16="http://schemas.microsoft.com/office/drawing/2014/main" id="{9C93E015-7270-C5F6-A541-70EE13764530}"/>
-              </a:ext>
-            </a:extLst>
-          </p:cNvPr>
-          <p:cNvCxnSpPr/>
-          <p:nvPr/>
-        </p:nvCxnSpPr>
-        <p:spPr>
-          <a:xfrm>
-            <a:off x="2874374" y="-28500"/>
-            <a:ext cx="0" cy="10857000"/>
-          </a:xfrm>
-          <a:prstGeom prst="straightConnector1">
-            <a:avLst/>
-          </a:prstGeom>
-          <a:noFill/>
-          <a:ln w="38100" cap="flat" cmpd="sng">
-            <a:solidFill>
-              <a:srgbClr val="5B0F00"/>
-            </a:solidFill>
-            <a:prstDash val="solid"/>
-            <a:round/>
-            <a:headEnd type="none" w="med" len="med"/>
-            <a:tailEnd type="none" w="med" len="med"/>
-          </a:ln>
-        </p:spPr>
-      </p:cxnSp>
-      <p:sp>
-        <p:nvSpPr>
-          <p:cNvPr id="2" name="Google Shape;74;p15">
-            <a:extLst>
-              <a:ext uri="{FF2B5EF4-FFF2-40B4-BE49-F238E27FC236}">
-                <a16:creationId xmlns:a16="http://schemas.microsoft.com/office/drawing/2014/main" id="{1838924A-098B-2C1A-59C6-C1A5C5FD3FD1}"/>
-              </a:ext>
-            </a:extLst>
-          </p:cNvPr>
-          <p:cNvSpPr/>
-          <p:nvPr/>
-        </p:nvSpPr>
-        <p:spPr>
-          <a:xfrm>
-            <a:off x="3197186" y="1385588"/>
-            <a:ext cx="2410800" cy="480900"/>
-          </a:xfrm>
-          <a:prstGeom prst="roundRect">
-            <a:avLst>
-              <a:gd name="adj" fmla="val 16667"/>
-            </a:avLst>
-          </a:prstGeom>
-          <a:solidFill>
-            <a:srgbClr val="E6B8AF"/>
-          </a:solidFill>
-          <a:ln w="28575" cap="flat" cmpd="sng">
-            <a:solidFill>
-              <a:srgbClr val="5B0F00"/>
-            </a:solidFill>
-            <a:prstDash val="solid"/>
-            <a:round/>
-            <a:headEnd type="none" w="sm" len="sm"/>
-            <a:tailEnd type="none" w="sm" len="sm"/>
-          </a:ln>
-        </p:spPr>
-        <p:txBody>
-          <a:bodyPr spcFirstLastPara="1" wrap="square" lIns="91425" tIns="91425" rIns="91425" bIns="91425" anchor="ctr" anchorCtr="0">
-            <a:noAutofit/>
-          </a:bodyPr>
-          <a:lstStyle/>
-          <a:p>
-            <a:pPr marL="0" lvl="0" indent="0" algn="ctr" rtl="0">
-              <a:spcBef>
-                <a:spcPts val="0"/>
-              </a:spcBef>
-              <a:spcAft>
-                <a:spcPts val="0"/>
-              </a:spcAft>
-              <a:buNone/>
-            </a:pPr>
-            <a:r>
               <a:rPr lang="en-GB" sz="1800" b="1" dirty="0">
                 <a:latin typeface="Consolas"/>
                 <a:ea typeface="Consolas"/>
                 <a:cs typeface="Consolas"/>
                 <a:sym typeface="Consolas"/>
               </a:rPr>
-              <a:t>68338</a:t>
+              <a:t>68245</a:t>
             </a:r>
             <a:endParaRPr sz="1800" b="1" dirty="0">
               <a:latin typeface="Consolas"/>
@@ -43918,10 +43986,10 @@
       </p:sp>
       <p:sp>
         <p:nvSpPr>
-          <p:cNvPr id="3" name="Google Shape;75;p15">
-            <a:extLst>
-              <a:ext uri="{FF2B5EF4-FFF2-40B4-BE49-F238E27FC236}">
-                <a16:creationId xmlns:a16="http://schemas.microsoft.com/office/drawing/2014/main" id="{8FAE8CC2-9B8F-011E-0950-6AF8FC09AFDB}"/>
+          <p:cNvPr id="4" name="Google Shape;76;p15">
+            <a:extLst>
+              <a:ext uri="{FF2B5EF4-FFF2-40B4-BE49-F238E27FC236}">
+                <a16:creationId xmlns:a16="http://schemas.microsoft.com/office/drawing/2014/main" id="{5873D1FF-E0DC-8122-3CA9-677F71409356}"/>
               </a:ext>
             </a:extLst>
           </p:cNvPr>
@@ -43930,8 +43998,8 @@
         </p:nvSpPr>
         <p:spPr>
           <a:xfrm>
-            <a:off x="3197186" y="2961501"/>
-            <a:ext cx="2410800" cy="480900"/>
+            <a:off x="3175318" y="4537410"/>
+            <a:ext cx="2007930" cy="480900"/>
           </a:xfrm>
           <a:prstGeom prst="roundRect">
             <a:avLst>
@@ -43973,7 +44041,7 @@
                 <a:cs typeface="Consolas"/>
                 <a:sym typeface="Consolas"/>
               </a:rPr>
-              <a:t>68245</a:t>
+              <a:t>68725</a:t>
             </a:r>
             <a:endParaRPr sz="1800" b="1" dirty="0">
               <a:latin typeface="Consolas"/>
@@ -43986,10 +44054,10 @@
       </p:sp>
       <p:sp>
         <p:nvSpPr>
-          <p:cNvPr id="4" name="Google Shape;76;p15">
-            <a:extLst>
-              <a:ext uri="{FF2B5EF4-FFF2-40B4-BE49-F238E27FC236}">
-                <a16:creationId xmlns:a16="http://schemas.microsoft.com/office/drawing/2014/main" id="{D614A066-B1BD-DE85-7351-F9564DCFB44B}"/>
+          <p:cNvPr id="5" name="Google Shape;77;p15">
+            <a:extLst>
+              <a:ext uri="{FF2B5EF4-FFF2-40B4-BE49-F238E27FC236}">
+                <a16:creationId xmlns:a16="http://schemas.microsoft.com/office/drawing/2014/main" id="{50A0F201-99F5-EF57-5E04-F6CC7BF81805}"/>
               </a:ext>
             </a:extLst>
           </p:cNvPr>
@@ -43998,8 +44066,8 @@
         </p:nvSpPr>
         <p:spPr>
           <a:xfrm>
-            <a:off x="3197186" y="4537410"/>
-            <a:ext cx="2410800" cy="480900"/>
+            <a:off x="3175318" y="6113307"/>
+            <a:ext cx="2007930" cy="480900"/>
           </a:xfrm>
           <a:prstGeom prst="roundRect">
             <a:avLst>
@@ -44041,7 +44109,7 @@
                 <a:cs typeface="Consolas"/>
                 <a:sym typeface="Consolas"/>
               </a:rPr>
-              <a:t>68725</a:t>
+              <a:t>67912</a:t>
             </a:r>
             <a:endParaRPr sz="1800" b="1" dirty="0">
               <a:latin typeface="Consolas"/>
@@ -44054,10 +44122,10 @@
       </p:sp>
       <p:sp>
         <p:nvSpPr>
-          <p:cNvPr id="5" name="Google Shape;77;p15">
-            <a:extLst>
-              <a:ext uri="{FF2B5EF4-FFF2-40B4-BE49-F238E27FC236}">
-                <a16:creationId xmlns:a16="http://schemas.microsoft.com/office/drawing/2014/main" id="{7886D51B-9465-B92B-BB2F-6119072AB61C}"/>
+          <p:cNvPr id="6" name="Google Shape;78;p15">
+            <a:extLst>
+              <a:ext uri="{FF2B5EF4-FFF2-40B4-BE49-F238E27FC236}">
+                <a16:creationId xmlns:a16="http://schemas.microsoft.com/office/drawing/2014/main" id="{64A4F705-AC49-ADE0-DC10-1350768FE65E}"/>
               </a:ext>
             </a:extLst>
           </p:cNvPr>
@@ -44066,8 +44134,8 @@
         </p:nvSpPr>
         <p:spPr>
           <a:xfrm>
-            <a:off x="3197186" y="6113307"/>
-            <a:ext cx="2410800" cy="480900"/>
+            <a:off x="3175318" y="7689198"/>
+            <a:ext cx="2007930" cy="480900"/>
           </a:xfrm>
           <a:prstGeom prst="roundRect">
             <a:avLst>
@@ -44109,7 +44177,7 @@
                 <a:cs typeface="Consolas"/>
                 <a:sym typeface="Consolas"/>
               </a:rPr>
-              <a:t>67912</a:t>
+              <a:t>68180</a:t>
             </a:r>
             <a:endParaRPr sz="1800" b="1" dirty="0">
               <a:latin typeface="Consolas"/>
@@ -44122,10 +44190,10 @@
       </p:sp>
       <p:sp>
         <p:nvSpPr>
-          <p:cNvPr id="6" name="Google Shape;78;p15">
-            <a:extLst>
-              <a:ext uri="{FF2B5EF4-FFF2-40B4-BE49-F238E27FC236}">
-                <a16:creationId xmlns:a16="http://schemas.microsoft.com/office/drawing/2014/main" id="{C71FE21E-7A86-2434-5C3E-047D8A2E8658}"/>
+          <p:cNvPr id="7" name="Google Shape;79;p15">
+            <a:extLst>
+              <a:ext uri="{FF2B5EF4-FFF2-40B4-BE49-F238E27FC236}">
+                <a16:creationId xmlns:a16="http://schemas.microsoft.com/office/drawing/2014/main" id="{1BCFE546-C1D1-6DD8-1449-92B669A0B47D}"/>
               </a:ext>
             </a:extLst>
           </p:cNvPr>
@@ -44134,8 +44202,8 @@
         </p:nvSpPr>
         <p:spPr>
           <a:xfrm>
-            <a:off x="3197186" y="7689198"/>
-            <a:ext cx="2410800" cy="480900"/>
+            <a:off x="3175318" y="9265103"/>
+            <a:ext cx="2007930" cy="480900"/>
           </a:xfrm>
           <a:prstGeom prst="roundRect">
             <a:avLst>
@@ -44177,7 +44245,7 @@
                 <a:cs typeface="Consolas"/>
                 <a:sym typeface="Consolas"/>
               </a:rPr>
-              <a:t>68180</a:t>
+              <a:t>67870</a:t>
             </a:r>
             <a:endParaRPr sz="1800" b="1" dirty="0">
               <a:latin typeface="Consolas"/>
@@ -44190,10 +44258,10 @@
       </p:sp>
       <p:sp>
         <p:nvSpPr>
-          <p:cNvPr id="7" name="Google Shape;79;p15">
-            <a:extLst>
-              <a:ext uri="{FF2B5EF4-FFF2-40B4-BE49-F238E27FC236}">
-                <a16:creationId xmlns:a16="http://schemas.microsoft.com/office/drawing/2014/main" id="{489C537E-393E-7D7F-35EE-6A063860A73D}"/>
+          <p:cNvPr id="10" name="Google Shape;86;p15">
+            <a:extLst>
+              <a:ext uri="{FF2B5EF4-FFF2-40B4-BE49-F238E27FC236}">
+                <a16:creationId xmlns:a16="http://schemas.microsoft.com/office/drawing/2014/main" id="{68684DC3-1F0A-A3C2-B370-1B99CB2750BB}"/>
               </a:ext>
             </a:extLst>
           </p:cNvPr>
@@ -44202,76 +44270,8 @@
         </p:nvSpPr>
         <p:spPr>
           <a:xfrm>
-            <a:off x="3197186" y="9265103"/>
-            <a:ext cx="2410800" cy="480900"/>
-          </a:xfrm>
-          <a:prstGeom prst="roundRect">
-            <a:avLst>
-              <a:gd name="adj" fmla="val 16667"/>
-            </a:avLst>
-          </a:prstGeom>
-          <a:solidFill>
-            <a:srgbClr val="E6B8AF"/>
-          </a:solidFill>
-          <a:ln w="28575" cap="flat" cmpd="sng">
-            <a:solidFill>
-              <a:srgbClr val="5B0F00"/>
-            </a:solidFill>
-            <a:prstDash val="solid"/>
-            <a:round/>
-            <a:headEnd type="none" w="sm" len="sm"/>
-            <a:tailEnd type="none" w="sm" len="sm"/>
-          </a:ln>
-        </p:spPr>
-        <p:txBody>
-          <a:bodyPr spcFirstLastPara="1" wrap="square" lIns="91425" tIns="91425" rIns="91425" bIns="91425" anchor="ctr" anchorCtr="0">
-            <a:noAutofit/>
-          </a:bodyPr>
-          <a:lstStyle/>
-          <a:p>
-            <a:pPr marL="0" lvl="0" indent="0" algn="ctr" rtl="0">
-              <a:spcBef>
-                <a:spcPts val="0"/>
-              </a:spcBef>
-              <a:spcAft>
-                <a:spcPts val="0"/>
-              </a:spcAft>
-              <a:buNone/>
-            </a:pPr>
-            <a:r>
-              <a:rPr lang="en-GB" sz="1800" b="1" dirty="0">
-                <a:latin typeface="Consolas"/>
-                <a:ea typeface="Consolas"/>
-                <a:cs typeface="Consolas"/>
-                <a:sym typeface="Consolas"/>
-              </a:rPr>
-              <a:t>67870</a:t>
-            </a:r>
-            <a:endParaRPr sz="1800" b="1" dirty="0">
-              <a:latin typeface="Consolas"/>
-              <a:ea typeface="Consolas"/>
-              <a:cs typeface="Consolas"/>
-              <a:sym typeface="Consolas"/>
-            </a:endParaRPr>
-          </a:p>
-        </p:txBody>
-      </p:sp>
-      <p:sp>
-        <p:nvSpPr>
-          <p:cNvPr id="10" name="Google Shape;86;p15">
-            <a:extLst>
-              <a:ext uri="{FF2B5EF4-FFF2-40B4-BE49-F238E27FC236}">
-                <a16:creationId xmlns:a16="http://schemas.microsoft.com/office/drawing/2014/main" id="{39209C63-F3EA-7B0F-E723-B8E203519A60}"/>
-              </a:ext>
-            </a:extLst>
-          </p:cNvPr>
-          <p:cNvSpPr/>
-          <p:nvPr/>
-        </p:nvSpPr>
-        <p:spPr>
-          <a:xfrm>
-            <a:off x="5839417" y="3639469"/>
-            <a:ext cx="2443410" cy="2106418"/>
+            <a:off x="5713295" y="3639469"/>
+            <a:ext cx="2569532" cy="2106418"/>
           </a:xfrm>
           <a:prstGeom prst="roundRect">
             <a:avLst>
@@ -44368,7 +44368,7 @@
                 <a:cs typeface="Consolas"/>
                 <a:sym typeface="Consolas"/>
               </a:rPr>
-              <a:t>terminar tsunami e earthquake spawners, no que toca às suas animações bem como alguma lógica de movimento de “builds”.</a:t>
+              <a:t>atualizar tsunami e earthquake spawners, no que toca às suas animações bem como alguma lógica de movimento de “builds”, para os finalizar</a:t>
             </a:r>
             <a:endParaRPr dirty="0">
               <a:latin typeface="Consolas"/>
@@ -44384,7 +44384,7 @@
           <p:cNvPr id="11" name="Google Shape;92;p15">
             <a:extLst>
               <a:ext uri="{FF2B5EF4-FFF2-40B4-BE49-F238E27FC236}">
-                <a16:creationId xmlns:a16="http://schemas.microsoft.com/office/drawing/2014/main" id="{AF87CD37-A0ED-7E4E-AF7C-314DFD4CEB2F}"/>
+                <a16:creationId xmlns:a16="http://schemas.microsoft.com/office/drawing/2014/main" id="{04B5433B-B135-6F2F-312C-B43E99C468BB}"/>
               </a:ext>
             </a:extLst>
           </p:cNvPr>
@@ -44393,8 +44393,8 @@
         </p:nvSpPr>
         <p:spPr>
           <a:xfrm>
-            <a:off x="5839417" y="5783003"/>
-            <a:ext cx="2443410" cy="1843569"/>
+            <a:off x="5713295" y="5783003"/>
+            <a:ext cx="2569532" cy="1843569"/>
           </a:xfrm>
           <a:prstGeom prst="roundRect">
             <a:avLst>
@@ -44491,7 +44491,7 @@
                 <a:cs typeface="Consolas"/>
                 <a:sym typeface="Consolas"/>
               </a:rPr>
-              <a:t>azer uma abstract class que ligue as 3 catastrofes naturais, para melhorar a qualidade do código.</a:t>
+              <a:t>azer uma abstract class que ligue as 3 catástrofes naturais, para melhorar a qualidade do código.</a:t>
             </a:r>
             <a:endParaRPr dirty="0">
               <a:latin typeface="Consolas"/>
@@ -44507,7 +44507,7 @@
           <p:cNvPr id="8" name="Google Shape;92;p15">
             <a:extLst>
               <a:ext uri="{FF2B5EF4-FFF2-40B4-BE49-F238E27FC236}">
-                <a16:creationId xmlns:a16="http://schemas.microsoft.com/office/drawing/2014/main" id="{EA84CFE8-5331-7231-9E1A-C692D1681A2C}"/>
+                <a16:creationId xmlns:a16="http://schemas.microsoft.com/office/drawing/2014/main" id="{9CD6E41F-0765-5FD6-6E81-9104894FE1F1}"/>
               </a:ext>
             </a:extLst>
           </p:cNvPr>
@@ -44516,8 +44516,8 @@
         </p:nvSpPr>
         <p:spPr>
           <a:xfrm>
-            <a:off x="5839417" y="768737"/>
-            <a:ext cx="2398246" cy="2817311"/>
+            <a:off x="5713295" y="768737"/>
+            <a:ext cx="2524368" cy="2817311"/>
           </a:xfrm>
           <a:prstGeom prst="roundRect">
             <a:avLst>
@@ -44614,7 +44614,7 @@
                 <a:cs typeface="Consolas"/>
                 <a:sym typeface="Consolas"/>
               </a:rPr>
-              <a:t>plicar sistema de ranking baseado nas waves derrotadas ecriar uma interface apelativa para o jogador, bem como finalizar as waves do modo semanal.</a:t>
+              <a:t>plicar sistema de ranking baseado nas waves derrotadas e criar uma interface apelativa para o jogador, bem como finalizar as waves do modo semanal, para dar como finalizado o modo semanal</a:t>
             </a:r>
             <a:r>
               <a:rPr lang="en-GB" dirty="0">
@@ -44636,10 +44636,10 @@
       </p:sp>
       <p:sp>
         <p:nvSpPr>
-          <p:cNvPr id="23" name="Google Shape;121;p16">
-            <a:extLst>
-              <a:ext uri="{FF2B5EF4-FFF2-40B4-BE49-F238E27FC236}">
-                <a16:creationId xmlns:a16="http://schemas.microsoft.com/office/drawing/2014/main" id="{38C0A21B-D771-9F48-5406-2D717AECE14D}"/>
+          <p:cNvPr id="19" name="Google Shape;92;p15">
+            <a:extLst>
+              <a:ext uri="{FF2B5EF4-FFF2-40B4-BE49-F238E27FC236}">
+                <a16:creationId xmlns:a16="http://schemas.microsoft.com/office/drawing/2014/main" id="{31174F55-C12C-0BD1-6E66-B0C99E9879D0}"/>
               </a:ext>
             </a:extLst>
           </p:cNvPr>
@@ -44648,7 +44648,193 @@
         </p:nvSpPr>
         <p:spPr>
           <a:xfrm>
-            <a:off x="18744555" y="3733376"/>
+            <a:off x="5713295" y="7700804"/>
+            <a:ext cx="2569532" cy="2622560"/>
+          </a:xfrm>
+          <a:prstGeom prst="roundRect">
+            <a:avLst>
+              <a:gd name="adj" fmla="val 16667"/>
+            </a:avLst>
+          </a:prstGeom>
+          <a:solidFill>
+            <a:srgbClr val="D9EAD3"/>
+          </a:solidFill>
+          <a:ln w="28575" cap="flat" cmpd="sng">
+            <a:solidFill>
+              <a:srgbClr val="274E13"/>
+            </a:solidFill>
+            <a:prstDash val="solid"/>
+            <a:round/>
+            <a:headEnd type="none" w="sm" len="sm"/>
+            <a:tailEnd type="none" w="sm" len="sm"/>
+          </a:ln>
+        </p:spPr>
+        <p:txBody>
+          <a:bodyPr spcFirstLastPara="1" wrap="square" lIns="91425" tIns="91425" rIns="91425" bIns="91425" anchor="t" anchorCtr="0">
+            <a:noAutofit/>
+          </a:bodyPr>
+          <a:lstStyle/>
+          <a:p>
+            <a:pPr lvl="0"/>
+            <a:r>
+              <a:rPr lang="en-GB" dirty="0">
+                <a:latin typeface="Consolas"/>
+                <a:ea typeface="Consolas"/>
+                <a:cs typeface="Consolas"/>
+                <a:sym typeface="Consolas"/>
+              </a:rPr>
+              <a:t>US4: Como </a:t>
+            </a:r>
+            <a:r>
+              <a:rPr lang="en-GB" dirty="0" err="1">
+                <a:latin typeface="Consolas"/>
+                <a:ea typeface="Consolas"/>
+                <a:cs typeface="Consolas"/>
+                <a:sym typeface="Consolas"/>
+              </a:rPr>
+              <a:t>membro</a:t>
+            </a:r>
+            <a:r>
+              <a:rPr lang="en-GB" dirty="0">
+                <a:latin typeface="Consolas"/>
+                <a:ea typeface="Consolas"/>
+                <a:cs typeface="Consolas"/>
+                <a:sym typeface="Consolas"/>
+              </a:rPr>
+              <a:t> da </a:t>
+            </a:r>
+            <a:r>
+              <a:rPr lang="en-GB" dirty="0" err="1">
+                <a:latin typeface="Consolas"/>
+                <a:ea typeface="Consolas"/>
+                <a:cs typeface="Consolas"/>
+                <a:sym typeface="Consolas"/>
+              </a:rPr>
+              <a:t>equipa</a:t>
+            </a:r>
+            <a:r>
+              <a:rPr lang="en-GB" dirty="0">
+                <a:latin typeface="Consolas"/>
+                <a:ea typeface="Consolas"/>
+                <a:cs typeface="Consolas"/>
+                <a:sym typeface="Consolas"/>
+              </a:rPr>
+              <a:t> </a:t>
+            </a:r>
+            <a:r>
+              <a:rPr lang="en-GB" dirty="0" err="1">
+                <a:latin typeface="Consolas"/>
+                <a:ea typeface="Consolas"/>
+                <a:cs typeface="Consolas"/>
+                <a:sym typeface="Consolas"/>
+              </a:rPr>
+              <a:t>quero</a:t>
+            </a:r>
+            <a:r>
+              <a:rPr lang="en-GB" dirty="0">
+                <a:latin typeface="Consolas"/>
+                <a:ea typeface="Consolas"/>
+                <a:cs typeface="Consolas"/>
+                <a:sym typeface="Consolas"/>
+              </a:rPr>
+              <a:t> f</a:t>
+            </a:r>
+            <a:r>
+              <a:rPr lang="pt-PT" dirty="0">
+                <a:latin typeface="Consolas"/>
+                <a:ea typeface="Consolas"/>
+                <a:cs typeface="Consolas"/>
+                <a:sym typeface="Consolas"/>
+              </a:rPr>
+              <a:t>azer resource trader bot feature, com o qual os jogadores podem fazer trocas de uns recursos por outros durante o jogo, para dar utilidade aos minerais acumulados na capacidade máxima.</a:t>
+            </a:r>
+            <a:endParaRPr dirty="0">
+              <a:latin typeface="Consolas"/>
+              <a:ea typeface="Consolas"/>
+              <a:cs typeface="Consolas"/>
+              <a:sym typeface="Consolas"/>
+            </a:endParaRPr>
+          </a:p>
+        </p:txBody>
+      </p:sp>
+      <p:sp>
+        <p:nvSpPr>
+          <p:cNvPr id="22" name="Google Shape;92;p15">
+            <a:extLst>
+              <a:ext uri="{FF2B5EF4-FFF2-40B4-BE49-F238E27FC236}">
+                <a16:creationId xmlns:a16="http://schemas.microsoft.com/office/drawing/2014/main" id="{F0F6EEDF-5A2B-4DE3-3D95-82FA4C960C56}"/>
+              </a:ext>
+            </a:extLst>
+          </p:cNvPr>
+          <p:cNvSpPr/>
+          <p:nvPr/>
+        </p:nvSpPr>
+        <p:spPr>
+          <a:xfrm>
+            <a:off x="8388135" y="768737"/>
+            <a:ext cx="1300278" cy="9262289"/>
+          </a:xfrm>
+          <a:prstGeom prst="roundRect">
+            <a:avLst>
+              <a:gd name="adj" fmla="val 16667"/>
+            </a:avLst>
+          </a:prstGeom>
+          <a:solidFill>
+            <a:srgbClr val="D9EAD3"/>
+          </a:solidFill>
+          <a:ln w="28575" cap="flat" cmpd="sng">
+            <a:solidFill>
+              <a:srgbClr val="274E13"/>
+            </a:solidFill>
+            <a:prstDash val="solid"/>
+            <a:round/>
+            <a:headEnd type="none" w="sm" len="sm"/>
+            <a:tailEnd type="none" w="sm" len="sm"/>
+          </a:ln>
+        </p:spPr>
+        <p:txBody>
+          <a:bodyPr spcFirstLastPara="1" wrap="square" lIns="91425" tIns="91425" rIns="91425" bIns="91425" anchor="t" anchorCtr="0">
+            <a:noAutofit/>
+          </a:bodyPr>
+          <a:lstStyle/>
+          <a:p>
+            <a:pPr lvl="0"/>
+            <a:r>
+              <a:rPr lang="pt-PT" dirty="0">
+                <a:latin typeface="Consolas"/>
+                <a:ea typeface="Consolas"/>
+                <a:cs typeface="Consolas"/>
+                <a:sym typeface="Consolas"/>
+              </a:rPr>
+              <a:t>US5: como membro da equipa quero completar as tarefas do milestone 3 referentes às implementações que acrescentei ao jogo</a:t>
+            </a:r>
+          </a:p>
+          <a:p>
+            <a:pPr lvl="0"/>
+            <a:endParaRPr dirty="0">
+              <a:latin typeface="Consolas"/>
+              <a:ea typeface="Consolas"/>
+              <a:cs typeface="Consolas"/>
+              <a:sym typeface="Consolas"/>
+            </a:endParaRPr>
+          </a:p>
+        </p:txBody>
+      </p:sp>
+      <p:sp>
+        <p:nvSpPr>
+          <p:cNvPr id="12" name="Google Shape;121;p16">
+            <a:extLst>
+              <a:ext uri="{FF2B5EF4-FFF2-40B4-BE49-F238E27FC236}">
+                <a16:creationId xmlns:a16="http://schemas.microsoft.com/office/drawing/2014/main" id="{BD062F75-11CD-D8BF-EDD9-250FA536C111}"/>
+              </a:ext>
+            </a:extLst>
+          </p:cNvPr>
+          <p:cNvSpPr/>
+          <p:nvPr/>
+        </p:nvSpPr>
+        <p:spPr>
+          <a:xfrm>
+            <a:off x="18688292" y="3777604"/>
             <a:ext cx="2449608" cy="1729878"/>
           </a:xfrm>
           <a:prstGeom prst="roundRect">
@@ -44768,10 +44954,10 @@
       </p:sp>
       <p:sp>
         <p:nvSpPr>
-          <p:cNvPr id="12" name="Google Shape;121;p16">
-            <a:extLst>
-              <a:ext uri="{FF2B5EF4-FFF2-40B4-BE49-F238E27FC236}">
-                <a16:creationId xmlns:a16="http://schemas.microsoft.com/office/drawing/2014/main" id="{3E13DAE9-6EB6-D15B-D9B4-C7703617DBFF}"/>
+          <p:cNvPr id="13" name="Google Shape;121;p16">
+            <a:extLst>
+              <a:ext uri="{FF2B5EF4-FFF2-40B4-BE49-F238E27FC236}">
+                <a16:creationId xmlns:a16="http://schemas.microsoft.com/office/drawing/2014/main" id="{65C25292-25E3-A5D1-B644-CD7CCB9F4FCB}"/>
               </a:ext>
             </a:extLst>
           </p:cNvPr>
@@ -44780,7 +44966,7 @@
         </p:nvSpPr>
         <p:spPr>
           <a:xfrm>
-            <a:off x="18763959" y="5573260"/>
+            <a:off x="18707696" y="5617488"/>
             <a:ext cx="2410800" cy="1926176"/>
           </a:xfrm>
           <a:prstGeom prst="roundRect">
@@ -44891,10 +45077,10 @@
       </p:sp>
       <p:sp>
         <p:nvSpPr>
-          <p:cNvPr id="13" name="Google Shape;121;p16">
-            <a:extLst>
-              <a:ext uri="{FF2B5EF4-FFF2-40B4-BE49-F238E27FC236}">
-                <a16:creationId xmlns:a16="http://schemas.microsoft.com/office/drawing/2014/main" id="{53DD130E-0E2F-1F19-5C00-3B67D2BC462B}"/>
+          <p:cNvPr id="14" name="Google Shape;121;p16">
+            <a:extLst>
+              <a:ext uri="{FF2B5EF4-FFF2-40B4-BE49-F238E27FC236}">
+                <a16:creationId xmlns:a16="http://schemas.microsoft.com/office/drawing/2014/main" id="{7D8BC553-B707-69F2-12A8-D341FE23CD11}"/>
               </a:ext>
             </a:extLst>
           </p:cNvPr>
@@ -44903,7 +45089,7 @@
         </p:nvSpPr>
         <p:spPr>
           <a:xfrm>
-            <a:off x="18725151" y="1173063"/>
+            <a:off x="18668888" y="1217291"/>
             <a:ext cx="2410800" cy="2364426"/>
           </a:xfrm>
           <a:prstGeom prst="roundRect">
@@ -45034,10 +45220,10 @@
       </p:sp>
       <p:sp>
         <p:nvSpPr>
-          <p:cNvPr id="14" name="Google Shape;121;p16">
-            <a:extLst>
-              <a:ext uri="{FF2B5EF4-FFF2-40B4-BE49-F238E27FC236}">
-                <a16:creationId xmlns:a16="http://schemas.microsoft.com/office/drawing/2014/main" id="{1CBF505A-F69D-739D-FD7C-0A6A5E20C3D3}"/>
+          <p:cNvPr id="15" name="Google Shape;121;p16">
+            <a:extLst>
+              <a:ext uri="{FF2B5EF4-FFF2-40B4-BE49-F238E27FC236}">
+                <a16:creationId xmlns:a16="http://schemas.microsoft.com/office/drawing/2014/main" id="{2F412FA4-C166-2B00-4B3E-8B720A203D7E}"/>
               </a:ext>
             </a:extLst>
           </p:cNvPr>
@@ -45046,7 +45232,7 @@
         </p:nvSpPr>
         <p:spPr>
           <a:xfrm>
-            <a:off x="18744555" y="7644970"/>
+            <a:off x="18688292" y="7689198"/>
             <a:ext cx="2410800" cy="2056805"/>
           </a:xfrm>
           <a:prstGeom prst="roundRect">
@@ -45174,196 +45360,10 @@
           </a:p>
         </p:txBody>
       </p:sp>
-      <p:sp>
-        <p:nvSpPr>
-          <p:cNvPr id="19" name="Google Shape;92;p15">
-            <a:extLst>
-              <a:ext uri="{FF2B5EF4-FFF2-40B4-BE49-F238E27FC236}">
-                <a16:creationId xmlns:a16="http://schemas.microsoft.com/office/drawing/2014/main" id="{50E12F45-982C-11AE-FEEF-80433E78BDD6}"/>
-              </a:ext>
-            </a:extLst>
-          </p:cNvPr>
-          <p:cNvSpPr/>
-          <p:nvPr/>
-        </p:nvSpPr>
-        <p:spPr>
-          <a:xfrm>
-            <a:off x="5863765" y="7700804"/>
-            <a:ext cx="2419062" cy="2330222"/>
-          </a:xfrm>
-          <a:prstGeom prst="roundRect">
-            <a:avLst>
-              <a:gd name="adj" fmla="val 16667"/>
-            </a:avLst>
-          </a:prstGeom>
-          <a:solidFill>
-            <a:srgbClr val="D9EAD3"/>
-          </a:solidFill>
-          <a:ln w="28575" cap="flat" cmpd="sng">
-            <a:solidFill>
-              <a:srgbClr val="274E13"/>
-            </a:solidFill>
-            <a:prstDash val="solid"/>
-            <a:round/>
-            <a:headEnd type="none" w="sm" len="sm"/>
-            <a:tailEnd type="none" w="sm" len="sm"/>
-          </a:ln>
-        </p:spPr>
-        <p:txBody>
-          <a:bodyPr spcFirstLastPara="1" wrap="square" lIns="91425" tIns="91425" rIns="91425" bIns="91425" anchor="t" anchorCtr="0">
-            <a:noAutofit/>
-          </a:bodyPr>
-          <a:lstStyle/>
-          <a:p>
-            <a:pPr lvl="0"/>
-            <a:r>
-              <a:rPr lang="en-GB" dirty="0">
-                <a:latin typeface="Consolas"/>
-                <a:ea typeface="Consolas"/>
-                <a:cs typeface="Consolas"/>
-                <a:sym typeface="Consolas"/>
-              </a:rPr>
-              <a:t>US4: Como </a:t>
-            </a:r>
-            <a:r>
-              <a:rPr lang="en-GB" dirty="0" err="1">
-                <a:latin typeface="Consolas"/>
-                <a:ea typeface="Consolas"/>
-                <a:cs typeface="Consolas"/>
-                <a:sym typeface="Consolas"/>
-              </a:rPr>
-              <a:t>membro</a:t>
-            </a:r>
-            <a:r>
-              <a:rPr lang="en-GB" dirty="0">
-                <a:latin typeface="Consolas"/>
-                <a:ea typeface="Consolas"/>
-                <a:cs typeface="Consolas"/>
-                <a:sym typeface="Consolas"/>
-              </a:rPr>
-              <a:t> da </a:t>
-            </a:r>
-            <a:r>
-              <a:rPr lang="en-GB" dirty="0" err="1">
-                <a:latin typeface="Consolas"/>
-                <a:ea typeface="Consolas"/>
-                <a:cs typeface="Consolas"/>
-                <a:sym typeface="Consolas"/>
-              </a:rPr>
-              <a:t>equipa</a:t>
-            </a:r>
-            <a:r>
-              <a:rPr lang="en-GB" dirty="0">
-                <a:latin typeface="Consolas"/>
-                <a:ea typeface="Consolas"/>
-                <a:cs typeface="Consolas"/>
-                <a:sym typeface="Consolas"/>
-              </a:rPr>
-              <a:t> </a:t>
-            </a:r>
-            <a:r>
-              <a:rPr lang="en-GB" dirty="0" err="1">
-                <a:latin typeface="Consolas"/>
-                <a:ea typeface="Consolas"/>
-                <a:cs typeface="Consolas"/>
-                <a:sym typeface="Consolas"/>
-              </a:rPr>
-              <a:t>quero</a:t>
-            </a:r>
-            <a:r>
-              <a:rPr lang="en-GB" dirty="0">
-                <a:latin typeface="Consolas"/>
-                <a:ea typeface="Consolas"/>
-                <a:cs typeface="Consolas"/>
-                <a:sym typeface="Consolas"/>
-              </a:rPr>
-              <a:t> f</a:t>
-            </a:r>
-            <a:r>
-              <a:rPr lang="pt-PT" dirty="0">
-                <a:latin typeface="Consolas"/>
-                <a:ea typeface="Consolas"/>
-                <a:cs typeface="Consolas"/>
-                <a:sym typeface="Consolas"/>
-              </a:rPr>
-              <a:t>azer resource trader bot feature, com o qual os jogadores podem fazer trocas de uns recursos por outros durante o jogo</a:t>
-            </a:r>
-            <a:endParaRPr dirty="0">
-              <a:latin typeface="Consolas"/>
-              <a:ea typeface="Consolas"/>
-              <a:cs typeface="Consolas"/>
-              <a:sym typeface="Consolas"/>
-            </a:endParaRPr>
-          </a:p>
-        </p:txBody>
-      </p:sp>
-      <p:sp>
-        <p:nvSpPr>
-          <p:cNvPr id="22" name="Google Shape;92;p15">
-            <a:extLst>
-              <a:ext uri="{FF2B5EF4-FFF2-40B4-BE49-F238E27FC236}">
-                <a16:creationId xmlns:a16="http://schemas.microsoft.com/office/drawing/2014/main" id="{EC3A16EF-320A-9848-1017-DDD4AEEE72D9}"/>
-              </a:ext>
-            </a:extLst>
-          </p:cNvPr>
-          <p:cNvSpPr/>
-          <p:nvPr/>
-        </p:nvSpPr>
-        <p:spPr>
-          <a:xfrm>
-            <a:off x="8388135" y="768737"/>
-            <a:ext cx="1300278" cy="9262289"/>
-          </a:xfrm>
-          <a:prstGeom prst="roundRect">
-            <a:avLst>
-              <a:gd name="adj" fmla="val 16667"/>
-            </a:avLst>
-          </a:prstGeom>
-          <a:solidFill>
-            <a:srgbClr val="D9EAD3"/>
-          </a:solidFill>
-          <a:ln w="28575" cap="flat" cmpd="sng">
-            <a:solidFill>
-              <a:srgbClr val="274E13"/>
-            </a:solidFill>
-            <a:prstDash val="solid"/>
-            <a:round/>
-            <a:headEnd type="none" w="sm" len="sm"/>
-            <a:tailEnd type="none" w="sm" len="sm"/>
-          </a:ln>
-        </p:spPr>
-        <p:txBody>
-          <a:bodyPr spcFirstLastPara="1" wrap="square" lIns="91425" tIns="91425" rIns="91425" bIns="91425" anchor="t" anchorCtr="0">
-            <a:noAutofit/>
-          </a:bodyPr>
-          <a:lstStyle/>
-          <a:p>
-            <a:pPr lvl="0"/>
-            <a:r>
-              <a:rPr lang="pt-PT" dirty="0">
-                <a:latin typeface="Consolas"/>
-                <a:ea typeface="Consolas"/>
-                <a:cs typeface="Consolas"/>
-                <a:sym typeface="Consolas"/>
-              </a:rPr>
-              <a:t>US5: como membro da equipa quero completar as tarefas do milestone 3 referentes às implementações que acrescentei ao jogo</a:t>
-            </a:r>
-          </a:p>
-          <a:p>
-            <a:pPr lvl="0"/>
-            <a:endParaRPr dirty="0">
-              <a:latin typeface="Consolas"/>
-              <a:ea typeface="Consolas"/>
-              <a:cs typeface="Consolas"/>
-              <a:sym typeface="Consolas"/>
-            </a:endParaRPr>
-          </a:p>
-        </p:txBody>
-      </p:sp>
     </p:spTree>
     <p:extLst>
       <p:ext uri="{BB962C8B-B14F-4D97-AF65-F5344CB8AC3E}">
-        <p14:creationId xmlns:p14="http://schemas.microsoft.com/office/powerpoint/2010/main" val="399222532"/>
+        <p14:creationId xmlns:p14="http://schemas.microsoft.com/office/powerpoint/2010/main" val="1436931683"/>
       </p:ext>
     </p:extLst>
   </p:cSld>
